--- a/submission/CMP7200_Viva_Presentation.pptx
+++ b/submission/CMP7200_Viva_Presentation.pptx
@@ -5881,7 +5881,7 @@
                 </a:solidFill>
                 <a:latin typeface="Calibri"/>
               </a:rPr>
-              <a:t>8,591</a:t>
+              <a:t>8,159</a:t>
             </a:r>
           </a:p>
         </p:txBody>

--- a/submission/CMP7200_Viva_Presentation.pptx
+++ b/submission/CMP7200_Viva_Presentation.pptx
@@ -5881,7 +5881,7 @@
                 </a:solidFill>
                 <a:latin typeface="Calibri"/>
               </a:rPr>
-              <a:t>8,159</a:t>
+              <a:t>15,925</a:t>
             </a:r>
           </a:p>
         </p:txBody>

--- a/submission/CMP7200_Viva_Presentation.pptx
+++ b/submission/CMP7200_Viva_Presentation.pptx
@@ -5881,7 +5881,7 @@
                 </a:solidFill>
                 <a:latin typeface="Calibri"/>
               </a:rPr>
-              <a:t>15,925</a:t>
+              <a:t>15,929</a:t>
             </a:r>
           </a:p>
         </p:txBody>

--- a/submission/CMP7200_Viva_Presentation.pptx
+++ b/submission/CMP7200_Viva_Presentation.pptx
@@ -5881,7 +5881,7 @@
                 </a:solidFill>
                 <a:latin typeface="Calibri"/>
               </a:rPr>
-              <a:t>15,929</a:t>
+              <a:t>15,928</a:t>
             </a:r>
           </a:p>
         </p:txBody>

--- a/submission/CMP7200_Viva_Presentation.pptx
+++ b/submission/CMP7200_Viva_Presentation.pptx
@@ -5881,7 +5881,7 @@
                 </a:solidFill>
                 <a:latin typeface="Calibri"/>
               </a:rPr>
-              <a:t>15,928</a:t>
+              <a:t>16,169</a:t>
             </a:r>
           </a:p>
         </p:txBody>
@@ -5959,7 +5959,7 @@
                 </a:solidFill>
                 <a:latin typeface="Calibri"/>
               </a:rPr>
-              <a:t>393</a:t>
+              <a:t>403</a:t>
             </a:r>
           </a:p>
         </p:txBody>
@@ -9226,7 +9226,7 @@
                 </a:solidFill>
                 <a:latin typeface="Calibri"/>
               </a:rPr>
-              <a:t>393</a:t>
+              <a:t>403</a:t>
             </a:r>
           </a:p>
         </p:txBody>

--- a/submission/CMP7200_Viva_Presentation.pptx
+++ b/submission/CMP7200_Viva_Presentation.pptx
@@ -20,6 +20,8 @@
     <p:sldId id="268" r:id="rId20"/>
     <p:sldId id="269" r:id="rId21"/>
     <p:sldId id="270" r:id="rId22"/>
+    <p:sldId id="271" r:id="rId23"/>
+    <p:sldId id="272" r:id="rId24"/>
   </p:sldIdLst>
   <p:sldSz cx="12191695" cy="6858000" type="screen4x3"/>
   <p:notesSz cx="6858000" cy="9144000"/>
@@ -516,7 +518,7 @@
           <a:lstStyle/>
           <a:p>
             <a:r>
-              <a:t>Fifteen minutes. The argument is one sentence: a model is worth its cost where a step needs judgement, and costs without adding anything where it does not. I built four architectures that differ only in how data is retrieved, measured all four, and the retrieval layer is where the money goes.</a:t>
+              <a:t>Fifteen minutes. One idea: AI is worth paying for when a step needs thinking, and is a waste of money when it does not. I built four versions of the same planner that differ only in how they fetch data, measured all four, and the differences are large.</a:t>
             </a:r>
           </a:p>
         </p:txBody>
@@ -586,7 +588,7 @@
           <a:lstStyle/>
           <a:p>
             <a:r>
-              <a:t>The cost saving would be worthless if the plan got vaguer. A is the control and scores 1.7% — a fluent itinerary invented from nothing, which is exactly the failure this metric exists to detect. It caught a real one: the first end-to-end run produced a confident plan while every tool call was silently failing.</a:t>
+              <a:t>Six agents: 120,703 tokens and 20.6 AI calls per trip. Three agents with normal code: 7,840 and 2.0. The ranges from the repeated runs do not overlap, which is why I report this as a real difference and not as noise.</a:t>
             </a:r>
           </a:p>
         </p:txBody>
@@ -656,7 +658,7 @@
           <a:lstStyle/>
           <a:p>
             <a:r>
-              <a:t>6 of 9 conformance checks fail: message priority is declared and never honoured, and inbound permissions are never enforced. On the gate, precision is 1.0 and recall 0.5 — it never wrongly refuses a workable trip, and it misses half the impossible ones. Kappa 0.643 is moderate agreement. Saying so is the point; an evaluation that only confirms its author is not an evaluation.</a:t>
+              <a:t>Honest finding that weakens my own headline. Cutting each agent's tool list and step limit, without touching the design, removed 89% of the cost. So most of B's expense was bad configuration, not the architecture. What is left over is the part only the design change reaches, and that is what I claim.</a:t>
             </a:r>
           </a:p>
         </p:txBody>
@@ -726,7 +728,7 @@
           <a:lstStyle/>
           <a:p>
             <a:r>
-              <a:t>Both allowances were fully spent during development. The controls were built before the arms were, and they worked: 30 committed responses mean a marker with no API keys can reproduce every number. What they could not do is create requests that were never made, so coverage of the cost comparison stayed at 1 of 20. Appendix N has the full register — three of the eight risks occurred, including the model being withdrawn mid-project.</a:t>
+              <a:t>Saving money would be pointless if the plan got vaguer. A is the control and scores 1.7% - a confident itinerary invented from nothing, which is exactly what this measure exists to catch. It caught a real one: my first working run produced a complete plan while every single tool call was silently failing.</a:t>
             </a:r>
           </a:p>
         </p:txBody>
@@ -796,7 +798,7 @@
           <a:lstStyle/>
           <a:p>
             <a:r>
-              <a:t>The feasibility gate is the part a user would notice. Ask for six nights in London on three thousand dollars and it declines, names the shortfall, and offers a shorter trip or a nearer city. It also distinguishes a measured price from an estimated one, because the price table was 52% below a real fare on the one route where both were known.</a:t>
+              <a:t>6 of 9 checks fail. Message priority is declared and never actually used. Permissions are declared and never enforced. On the budget check, precision is 100% and recall 50%. Saying this out loud is the point: an evaluation that only confirms its author is not an evaluation.</a:t>
             </a:r>
           </a:p>
         </p:txBody>
@@ -866,7 +868,7 @@
           <a:lstStyle/>
           <a:p>
             <a:r>
-              <a:t>Honest answer to the likely question. The tool server came first because nothing works without it, then the message layer, then the agents, and the measurement infrastructure last. That ordering is why the first end-to-end run silently produced an ungrounded itinerary and nothing noticed. Reversed, the six-to-three pivot would have been a design decision rather than a rewrite.</a:t>
+              <a:t>Both limits were fully used up during development. The protection was built before the four versions were: 30 saved replies mean a marker with no keys can reproduce every number in the report. What it could not do is create requests I never made, so cost coverage stayed at 1 of 20 trips. Appendix N has the full register - three of eight risks happened, including the AI model being withdrawn mid-project.</a:t>
             </a:r>
           </a:p>
         </p:txBody>
@@ -936,7 +938,147 @@
           <a:lstStyle/>
           <a:p>
             <a:r>
-              <a:t>Land on the claim and its limit in the same breath. The effect is large and the sample is narrow, and both are stated in the abstract. The cache, the harness and the scenarios are all committed, so the next person — or I, next month, when the quota resets — can widen it without rebuilding anything.</a:t>
+              <a:t>If asked "so what?", this is the answer. The industry adds agents and tools by default. This project is a worked example of asking which steps deserve one, measuring the answer, and finding that the honest answer is "fewer than you think".</a:t>
+            </a:r>
+          </a:p>
+        </p:txBody>
+      </p:sp>
+      <p:sp>
+        <p:nvSpPr>
+          <p:cNvPr id="4" name="Slide Number Placeholder 3"/>
+          <p:cNvSpPr>
+            <a:spLocks noGrp="1"/>
+          </p:cNvSpPr>
+          <p:nvPr>
+            <p:ph type="sldNum" idx="5" sz="quarter"/>
+          </p:nvPr>
+        </p:nvSpPr>
+        <p:spPr/>
+      </p:sp>
+    </p:spTree>
+  </p:cSld>
+  <p:clrMapOvr>
+    <a:masterClrMapping/>
+  </p:clrMapOvr>
+</p:notes>
+</file>
+
+<file path=ppt/notesSlides/notesSlide16.xml><?xml version="1.0" encoding="utf-8"?>
+<p:notes xmlns:a="http://schemas.openxmlformats.org/drawingml/2006/main" xmlns:p="http://schemas.openxmlformats.org/presentationml/2006/main" xmlns:r="http://schemas.openxmlformats.org/officeDocument/2006/relationships">
+  <p:cSld>
+    <p:spTree>
+      <p:nvGrpSpPr>
+        <p:cNvPr id="1" name=""/>
+        <p:cNvGrpSpPr/>
+        <p:nvPr/>
+      </p:nvGrpSpPr>
+      <p:grpSpPr>
+        <a:xfrm>
+          <a:off x="0" y="0"/>
+          <a:ext cx="0" cy="0"/>
+          <a:chOff x="0" y="0"/>
+          <a:chExt cx="0" cy="0"/>
+        </a:xfrm>
+      </p:grpSpPr>
+      <p:sp>
+        <p:nvSpPr>
+          <p:cNvPr id="2" name="Slide Image Placeholder 1"/>
+          <p:cNvSpPr>
+            <a:spLocks noGrp="1"/>
+          </p:cNvSpPr>
+          <p:nvPr>
+            <p:ph type="sldImg" idx="2"/>
+          </p:nvPr>
+        </p:nvSpPr>
+        <p:spPr/>
+      </p:sp>
+      <p:sp>
+        <p:nvSpPr>
+          <p:cNvPr id="3" name="Notes Placeholder 2"/>
+          <p:cNvSpPr>
+            <a:spLocks noGrp="1"/>
+          </p:cNvSpPr>
+          <p:nvPr>
+            <p:ph type="body" idx="3" sz="quarter"/>
+          </p:nvPr>
+        </p:nvSpPr>
+        <p:spPr/>
+        <p:txBody>
+          <a:bodyPr/>
+          <a:lstStyle/>
+          <a:p>
+            <a:r>
+              <a:t>Honest answer to the likely question. I built the tool server first because nothing works without it, then the messaging, then the agents, and the measuring last. That order is why my first end-to-end run produced a plan with no real data in it and nothing noticed. Reversed, the six-to- three change would have been a design decision instead of a rewrite.</a:t>
+            </a:r>
+          </a:p>
+        </p:txBody>
+      </p:sp>
+      <p:sp>
+        <p:nvSpPr>
+          <p:cNvPr id="4" name="Slide Number Placeholder 3"/>
+          <p:cNvSpPr>
+            <a:spLocks noGrp="1"/>
+          </p:cNvSpPr>
+          <p:nvPr>
+            <p:ph type="sldNum" idx="5" sz="quarter"/>
+          </p:nvPr>
+        </p:nvSpPr>
+        <p:spPr/>
+      </p:sp>
+    </p:spTree>
+  </p:cSld>
+  <p:clrMapOvr>
+    <a:masterClrMapping/>
+  </p:clrMapOvr>
+</p:notes>
+</file>
+
+<file path=ppt/notesSlides/notesSlide17.xml><?xml version="1.0" encoding="utf-8"?>
+<p:notes xmlns:a="http://schemas.openxmlformats.org/drawingml/2006/main" xmlns:p="http://schemas.openxmlformats.org/presentationml/2006/main" xmlns:r="http://schemas.openxmlformats.org/officeDocument/2006/relationships">
+  <p:cSld>
+    <p:spTree>
+      <p:nvGrpSpPr>
+        <p:cNvPr id="1" name=""/>
+        <p:cNvGrpSpPr/>
+        <p:nvPr/>
+      </p:nvGrpSpPr>
+      <p:grpSpPr>
+        <a:xfrm>
+          <a:off x="0" y="0"/>
+          <a:ext cx="0" cy="0"/>
+          <a:chOff x="0" y="0"/>
+          <a:chExt cx="0" cy="0"/>
+        </a:xfrm>
+      </p:grpSpPr>
+      <p:sp>
+        <p:nvSpPr>
+          <p:cNvPr id="2" name="Slide Image Placeholder 1"/>
+          <p:cNvSpPr>
+            <a:spLocks noGrp="1"/>
+          </p:cNvSpPr>
+          <p:nvPr>
+            <p:ph type="sldImg" idx="2"/>
+          </p:nvPr>
+        </p:nvSpPr>
+        <p:spPr/>
+      </p:sp>
+      <p:sp>
+        <p:nvSpPr>
+          <p:cNvPr id="3" name="Notes Placeholder 2"/>
+          <p:cNvSpPr>
+            <a:spLocks noGrp="1"/>
+          </p:cNvSpPr>
+          <p:nvPr>
+            <p:ph type="body" idx="3" sz="quarter"/>
+          </p:nvPr>
+        </p:nvSpPr>
+        <p:spPr/>
+        <p:txBody>
+          <a:bodyPr/>
+          <a:lstStyle/>
+          <a:p>
+            <a:r>
+              <a:t>Land on the claim and its limit together. The effect is large and the sample is narrow, and both are in the abstract. The saved replies, the test harness and the twenty trips are all committed, so the next person - or me next month when the limits reset - can widen it without rebuilding anything.</a:t>
             </a:r>
           </a:p>
         </p:txBody>
@@ -1006,7 +1148,7 @@
           <a:lstStyle/>
           <a:p>
             <a:r>
-              <a:t>The literature treats tool-use as the thing that makes agents useful. Nobody asks which steps deserve one. Interpreting "leaving on the fifteenth for two adults" is a judgement. Calling a flight API with a date is not. The naive arm spent 20.6 model requests per trip against 2.0 for the shipped design, and the tokens differ by about 15 times, because each loop step re-sends the whole tool schema set.</a:t>
+              <a:t>Everyone gives agents tools. Nobody asks which jobs actually need one. Reading "leaving on the fifteenth for two adults" needs thinking. Calling a flight API with a date does not. The agent version used 20.6 AI calls per trip; mine uses 2.0. The text sent differs by about 15 times, because every step re-sends the whole conversation and every tool description.</a:t>
             </a:r>
           </a:p>
         </p:txBody>
@@ -1076,7 +1218,7 @@
           <a:lstStyle/>
           <a:p>
             <a:r>
-              <a:t>Everything else is held constant: same task, same prompts where they overlap, same tool server, same message protocol, same model. Only the retrieval layer changes between arms. That is what makes the comparison attributable.</a:t>
+              <a:t>Same task, same prompts where they overlap, same tool server, same message system, same AI model. Only the way data is fetched changes between the four versions. That is what makes the comparison fair.</a:t>
             </a:r>
           </a:p>
         </p:txBody>
@@ -1146,7 +1288,7 @@
           <a:lstStyle/>
           <a:p>
             <a:r>
-              <a:t>C is the arm that makes the result defensible. Tuning alone cut tokens by 89% without changing the architecture — so a comparison of B against D would have conflated two different effects. A is the control: it produces a fluent itinerary from nothing, and its price groundedness of 1.7% is the number that shows why retrieval matters at all.</a:t>
+              <a:t>Worth demonstrating live. Ask it for six nights in London on three thousand dollars and it declines, tells you the shortfall, and offers a shorter trip or a nearer city. It also marks which prices are measured and which are estimated, because the built-in price table was 52% below a real fare on the one route where both were known.</a:t>
             </a:r>
           </a:p>
         </p:txBody>
@@ -1216,7 +1358,7 @@
           <a:lstStyle/>
           <a:p>
             <a:r>
-              <a:t>Layer one takes the request, two turns free text into typed fields, three retrieves, four assembles. The research question lives entirely in layer three. Note the honest detail: the shipped path imports the tool functions in process. The JSON-RPC transport is exercised by the six-agent arms, and Section 7.2 of the dissertation says so rather than implying otherwise.</a:t>
+              <a:t>It started as six agents and became three, because measuring showed most of the AI calls were being spent on fetching data. You cannot write a rule that understands any phrasing a person might use, and you cannot write a rule that makes a day pleasant. You absolutely can write a rule that calls a flight API.</a:t>
             </a:r>
           </a:p>
         </p:txBody>
@@ -1286,7 +1428,7 @@
           <a:lstStyle/>
           <a:p>
             <a:r>
-              <a:t>Six agents became three because the instrumentation showed most requests were spent on deterministic retrieval. The three that remain each fail the "write it as code" test — you cannot write a rule that interprets arbitrary phrasing, and you cannot write a rule that sequences a pleasant day.</a:t>
+              <a:t>C is what makes the result defensible. Just tuning the six agents, without changing the design at all, cut the text sent by 89%. So if I had only compared B against D I would have been mixing two different effects together and claiming credit for both.</a:t>
             </a:r>
           </a:p>
         </p:txBody>
@@ -1356,7 +1498,7 @@
           <a:lstStyle/>
           <a:p>
             <a:r>
-              <a:t>The honest weakness first: 1 of 20 scenarios for the cost comparison, because the free tiers allow thirty flight and fifty hotel searches a month. What that bought instead: two questions that need no quota — protocol conformance and the feasibility gate — evaluated across all twenty, and both produced negative findings. Never hand-count model requests: a reasoning loop issues far more than there are tasks.</a:t>
+              <a:t>This slide is the heart of the argument. An agent that skips a tool still writes a confident, well-formatted itinerary, so you cannot tell by looking. B never once fetched attractions or restaurants and still produced a full plan. That is why I measure groundedness rather than reading the output and judging it.</a:t>
             </a:r>
           </a:p>
         </p:txBody>
@@ -1426,7 +1568,7 @@
           <a:lstStyle/>
           <a:p>
             <a:r>
-              <a:t>Naive six agents: 120,703 tokens and 20.6 model requests per trip. Three agents with Python retrieval: 7,840 tokens and 2.0 requests. The intervals do not overlap, which is why this is reported as a difference rather than as noise. Latency follows the same shape.</a:t>
+              <a:t>Layer one takes the request, two turns words into fields, three fetches the data, four writes the plan. My question lives entirely in layer three. One honest detail: the shipped version calls the tool functions directly rather than over the network protocol. The protocol is genuinely used, but only by the six-agent versions, and Section 7.2 of the report says so.</a:t>
             </a:r>
           </a:p>
         </p:txBody>
@@ -1496,7 +1638,7 @@
           <a:lstStyle/>
           <a:p>
             <a:r>
-              <a:t>This slide is the answer to the obvious objection. Cutting each agent's tool list from twenty slots to four, and its step budget down, took 89% of the tokens out without touching the architecture. So most of B's cost was configuration. The remainder — the part only the architecture change reaches — is the contribution being claimed.</a:t>
+              <a:t>The weakness first: only 1 of 20 trips for the cost comparison, because the free plans allow thirty flight and fifty hotel searches a month. What I did instead: the two questions that need no API - does the message system behave as designed, and does the budget check work - were tested on all twenty, and both found real problems.</a:t>
             </a:r>
           </a:p>
         </p:txBody>
@@ -4544,7 +4686,7 @@
                 </a:solidFill>
                 <a:latin typeface="Calibri"/>
               </a:rPr>
-              <a:t>MSc DISSERTATION · VIVA VOCE</a:t>
+              <a:t>MSc DISSERTATION  ·  VIVA VOCE</a:t>
             </a:r>
           </a:p>
         </p:txBody>
@@ -4577,13 +4719,13 @@
               </a:lnSpc>
             </a:pPr>
             <a:r>
-              <a:rPr sz="4000" b="1">
+              <a:rPr sz="4200" b="1">
                 <a:solidFill>
                   <a:srgbClr val="FFFFFF"/>
                 </a:solidFill>
                 <a:latin typeface="Calibri"/>
               </a:rPr>
-              <a:t>Does a language model earn its cost</a:t>
+              <a:t>When is AI worth its cost</a:t>
             </a:r>
           </a:p>
           <a:p>
@@ -4593,13 +4735,13 @@
               </a:lnSpc>
             </a:pPr>
             <a:r>
-              <a:rPr sz="4000" b="1">
+              <a:rPr sz="4200" b="1">
                 <a:solidFill>
                   <a:srgbClr val="6EE7DF"/>
                 </a:solidFill>
                 <a:latin typeface="Calibri"/>
               </a:rPr>
-              <a:t>in a multi-agent travel planner?</a:t>
+              <a:t>in a travel planning system?</a:t>
             </a:r>
           </a:p>
         </p:txBody>
@@ -4676,13 +4818,13 @@
               </a:lnSpc>
             </a:pPr>
             <a:r>
-              <a:rPr sz="1700" b="0">
+              <a:rPr sz="1800" b="0">
                 <a:solidFill>
                   <a:srgbClr val="C7D2FE"/>
                 </a:solidFill>
                 <a:latin typeface="Calibri"/>
               </a:rPr>
-              <a:t>Four architectures measured on the same task, with retrieval as the only variable.</a:t>
+              <a:t>I built the same travel planner four different ways and measured all four.</a:t>
             </a:r>
           </a:p>
           <a:p>
@@ -4771,7 +4913,7 @@
                 </a:solidFill>
                 <a:latin typeface="Calibri"/>
               </a:rPr>
-              <a:t>RESULT · GROUNDEDNESS</a:t>
+              <a:t>RESULT 1  ·  COST</a:t>
             </a:r>
           </a:p>
         </p:txBody>
@@ -4810,7 +4952,7 @@
                 </a:solidFill>
                 <a:latin typeface="Calibri"/>
               </a:rPr>
-              <a:t>Cheaper, and no less real</a:t>
+              <a:t>Fetching data is where the money goes</a:t>
             </a:r>
           </a:p>
         </p:txBody>
@@ -4861,7 +5003,7 @@
       </p:sp>
       <p:pic>
         <p:nvPicPr>
-          <p:cNvPr id="5" name="Picture 4" descr="groundedness.png"/>
+          <p:cNvPr id="5" name="Picture 4" descr="efficiency.png"/>
           <p:cNvPicPr>
             <a:picLocks noChangeAspect="1"/>
           </p:cNvPicPr>
@@ -4875,8 +5017,8 @@
         </p:blipFill>
         <p:spPr>
           <a:xfrm>
-            <a:off x="-115629" y="1783080"/>
-            <a:ext cx="12422953" cy="4023360"/>
+            <a:off x="2692927" y="1783080"/>
+            <a:ext cx="6805840" cy="4023360"/>
           </a:xfrm>
           <a:prstGeom prst="rect">
             <a:avLst/>
@@ -4917,7 +5059,7 @@
                 </a:solidFill>
                 <a:latin typeface="Calibri"/>
               </a:rPr>
-              <a:t>Prices traceable to retrieved data — A 1.7%  ·  B 22.9%  ·  C 56.3%  ·  D 46.6%</a:t>
+              <a:t>B sent 120,703 units of text.  D sent 7,840.  Same trip, same data, same AI.</a:t>
             </a:r>
           </a:p>
         </p:txBody>
@@ -4974,7 +5116,7 @@
                 </a:solidFill>
                 <a:latin typeface="Calibri"/>
               </a:rPr>
-              <a:t>FINDINGS THAT WERE NOT FLATTERING</a:t>
+              <a:t>RESULT 2  ·  SETTINGS VS DESIGN</a:t>
             </a:r>
           </a:p>
         </p:txBody>
@@ -5013,7 +5155,7 @@
                 </a:solidFill>
                 <a:latin typeface="Calibri"/>
               </a:rPr>
-              <a:t>Two things I built do not do what I claimed</a:t>
+              <a:t>Answering the obvious objection</a:t>
             </a:r>
           </a:p>
         </p:txBody>
@@ -5062,16 +5204,40 @@
           </a:p>
         </p:txBody>
       </p:sp>
-      <p:sp>
-        <p:nvSpPr>
-          <p:cNvPr id="5" name="TextBox 4"/>
+      <p:pic>
+        <p:nvPicPr>
+          <p:cNvPr id="5" name="Picture 4" descr="tuning_effect.png"/>
+          <p:cNvPicPr>
+            <a:picLocks noChangeAspect="1"/>
+          </p:cNvPicPr>
+          <p:nvPr/>
+        </p:nvPicPr>
+        <p:blipFill>
+          <a:blip r:embed="rId2"/>
+          <a:stretch>
+            <a:fillRect/>
+          </a:stretch>
+        </p:blipFill>
+        <p:spPr>
+          <a:xfrm>
+            <a:off x="-465761" y="1783080"/>
+            <a:ext cx="13123217" cy="4023360"/>
+          </a:xfrm>
+          <a:prstGeom prst="rect">
+            <a:avLst/>
+          </a:prstGeom>
+        </p:spPr>
+      </p:pic>
+      <p:sp>
+        <p:nvSpPr>
+          <p:cNvPr id="6" name="TextBox 5"/>
           <p:cNvSpPr txBox="1"/>
           <p:nvPr/>
         </p:nvSpPr>
         <p:spPr>
           <a:xfrm>
-            <a:off x="822960" y="2103120"/>
-            <a:ext cx="5272887" cy="1188720"/>
+            <a:off x="822960" y="5943600"/>
+            <a:ext cx="10515600" cy="548640"/>
           </a:xfrm>
           <a:prstGeom prst="rect">
             <a:avLst/>
@@ -5084,193 +5250,19 @@
           </a:bodyPr>
           <a:lstStyle/>
           <a:p>
-            <a:pPr algn="ctr">
+            <a:pPr algn="l">
               <a:lnSpc>
                 <a:spcPct val="100000"/>
               </a:lnSpc>
             </a:pPr>
             <a:r>
-              <a:rPr sz="6000" b="1">
-                <a:solidFill>
-                  <a:srgbClr val="A85B00"/>
-                </a:solidFill>
-                <a:latin typeface="Calibri"/>
-              </a:rPr>
-              <a:t>3/9</a:t>
-            </a:r>
-          </a:p>
-        </p:txBody>
-      </p:sp>
-      <p:sp>
-        <p:nvSpPr>
-          <p:cNvPr id="6" name="TextBox 5"/>
-          <p:cNvSpPr txBox="1"/>
-          <p:nvPr/>
-        </p:nvSpPr>
-        <p:spPr>
-          <a:xfrm>
-            <a:off x="822960" y="3246120"/>
-            <a:ext cx="5272887" cy="731520"/>
-          </a:xfrm>
-          <a:prstGeom prst="rect">
-            <a:avLst/>
-          </a:prstGeom>
-          <a:noFill/>
-        </p:spPr>
-        <p:txBody>
-          <a:bodyPr wrap="square" anchor="t">
-            <a:spAutoFit/>
-          </a:bodyPr>
-          <a:lstStyle/>
-          <a:p>
-            <a:pPr algn="ctr">
-              <a:lnSpc>
-                <a:spcPct val="100000"/>
-              </a:lnSpc>
-            </a:pPr>
-            <a:r>
-              <a:rPr sz="1400" b="0">
-                <a:solidFill>
-                  <a:srgbClr val="545C6E"/>
-                </a:solidFill>
-                <a:latin typeface="Calibri"/>
-              </a:rPr>
-              <a:t>protocol conformance checks pass.
-Priority is declared, never honoured</a:t>
-            </a:r>
-          </a:p>
-        </p:txBody>
-      </p:sp>
-      <p:sp>
-        <p:nvSpPr>
-          <p:cNvPr id="7" name="TextBox 6"/>
-          <p:cNvSpPr txBox="1"/>
-          <p:nvPr/>
-        </p:nvSpPr>
-        <p:spPr>
-          <a:xfrm>
-            <a:off x="6095847" y="2103120"/>
-            <a:ext cx="5272887" cy="1188720"/>
-          </a:xfrm>
-          <a:prstGeom prst="rect">
-            <a:avLst/>
-          </a:prstGeom>
-          <a:noFill/>
-        </p:spPr>
-        <p:txBody>
-          <a:bodyPr wrap="square" anchor="t">
-            <a:spAutoFit/>
-          </a:bodyPr>
-          <a:lstStyle/>
-          <a:p>
-            <a:pPr algn="ctr">
-              <a:lnSpc>
-                <a:spcPct val="100000"/>
-              </a:lnSpc>
-            </a:pPr>
-            <a:r>
-              <a:rPr sz="6000" b="1">
-                <a:solidFill>
-                  <a:srgbClr val="A85B00"/>
-                </a:solidFill>
-                <a:latin typeface="Calibri"/>
-              </a:rPr>
-              <a:t>0.643</a:t>
-            </a:r>
-          </a:p>
-        </p:txBody>
-      </p:sp>
-      <p:sp>
-        <p:nvSpPr>
-          <p:cNvPr id="8" name="TextBox 7"/>
-          <p:cNvSpPr txBox="1"/>
-          <p:nvPr/>
-        </p:nvSpPr>
-        <p:spPr>
-          <a:xfrm>
-            <a:off x="6095847" y="3246120"/>
-            <a:ext cx="5272887" cy="731520"/>
-          </a:xfrm>
-          <a:prstGeom prst="rect">
-            <a:avLst/>
-          </a:prstGeom>
-          <a:noFill/>
-        </p:spPr>
-        <p:txBody>
-          <a:bodyPr wrap="square" anchor="t">
-            <a:spAutoFit/>
-          </a:bodyPr>
-          <a:lstStyle/>
-          <a:p>
-            <a:pPr algn="ctr">
-              <a:lnSpc>
-                <a:spcPct val="100000"/>
-              </a:lnSpc>
-            </a:pPr>
-            <a:r>
-              <a:rPr sz="1400" b="0">
-                <a:solidFill>
-                  <a:srgbClr val="545C6E"/>
-                </a:solidFill>
-                <a:latin typeface="Calibri"/>
-              </a:rPr>
-              <a:t>Cohen's kappa on the budget gate.
-Moderate, not good</a:t>
-            </a:r>
-          </a:p>
-        </p:txBody>
-      </p:sp>
-      <p:sp>
-        <p:nvSpPr>
-          <p:cNvPr id="9" name="TextBox 8"/>
-          <p:cNvSpPr txBox="1"/>
-          <p:nvPr/>
-        </p:nvSpPr>
-        <p:spPr>
-          <a:xfrm>
-            <a:off x="822960" y="4846320"/>
-            <a:ext cx="10515600" cy="1280160"/>
-          </a:xfrm>
-          <a:prstGeom prst="rect">
-            <a:avLst/>
-          </a:prstGeom>
-          <a:noFill/>
-        </p:spPr>
-        <p:txBody>
-          <a:bodyPr wrap="square" anchor="t">
-            <a:spAutoFit/>
-          </a:bodyPr>
-          <a:lstStyle/>
-          <a:p>
-            <a:pPr algn="l">
-              <a:lnSpc>
-                <a:spcPct val="125000"/>
-              </a:lnSpc>
-            </a:pPr>
-            <a:r>
-              <a:rPr sz="2000" b="1">
+              <a:rPr sz="1600" b="1">
                 <a:solidFill>
                   <a:srgbClr val="161A23"/>
                 </a:solidFill>
                 <a:latin typeface="Calibri"/>
               </a:rPr>
-              <a:t>Both are reported rather than quietly fixed.</a:t>
-            </a:r>
-          </a:p>
-          <a:p>
-            <a:pPr algn="l">
-              <a:lnSpc>
-                <a:spcPct val="125000"/>
-              </a:lnSpc>
-            </a:pPr>
-            <a:r>
-              <a:rPr sz="1600" b="0">
-                <a:solidFill>
-                  <a:srgbClr val="545C6E"/>
-                </a:solidFill>
-                <a:latin typeface="Calibri"/>
-              </a:rPr>
-              <a:t>The gate misses 1 of 2 impossible budgets — recall 0.5, precision 1.0.</a:t>
+              <a:t>Just better settings: 89% less text.  Changing the design: 94%.</a:t>
             </a:r>
           </a:p>
         </p:txBody>
@@ -5327,7 +5319,7 @@
                 </a:solidFill>
                 <a:latin typeface="Calibri"/>
               </a:rPr>
-              <a:t>RISK</a:t>
+              <a:t>RESULT 3  ·  IS THE PLAN REAL?</a:t>
             </a:r>
           </a:p>
         </p:txBody>
@@ -5366,7 +5358,7 @@
                 </a:solidFill>
                 <a:latin typeface="Calibri"/>
               </a:rPr>
-              <a:t>The binding constraint was never difficulty</a:t>
+              <a:t>Cheaper, and no less accurate</a:t>
             </a:r>
           </a:p>
         </p:txBody>
@@ -5415,16 +5407,40 @@
           </a:p>
         </p:txBody>
       </p:sp>
-      <p:sp>
-        <p:nvSpPr>
-          <p:cNvPr id="5" name="TextBox 4"/>
+      <p:pic>
+        <p:nvPicPr>
+          <p:cNvPr id="5" name="Picture 4" descr="groundedness.png"/>
+          <p:cNvPicPr>
+            <a:picLocks noChangeAspect="1"/>
+          </p:cNvPicPr>
+          <p:nvPr/>
+        </p:nvPicPr>
+        <p:blipFill>
+          <a:blip r:embed="rId2"/>
+          <a:stretch>
+            <a:fillRect/>
+          </a:stretch>
+        </p:blipFill>
+        <p:spPr>
+          <a:xfrm>
+            <a:off x="-115629" y="1783080"/>
+            <a:ext cx="12422953" cy="4023360"/>
+          </a:xfrm>
+          <a:prstGeom prst="rect">
+            <a:avLst/>
+          </a:prstGeom>
+        </p:spPr>
+      </p:pic>
+      <p:sp>
+        <p:nvSpPr>
+          <p:cNvPr id="6" name="TextBox 5"/>
           <p:cNvSpPr txBox="1"/>
           <p:nvPr/>
         </p:nvSpPr>
         <p:spPr>
           <a:xfrm>
-            <a:off x="822960" y="2103120"/>
-            <a:ext cx="3515258" cy="1188720"/>
+            <a:off x="822960" y="5943600"/>
+            <a:ext cx="10515600" cy="548640"/>
           </a:xfrm>
           <a:prstGeom prst="rect">
             <a:avLst/>
@@ -5437,272 +5453,19 @@
           </a:bodyPr>
           <a:lstStyle/>
           <a:p>
-            <a:pPr algn="ctr">
+            <a:pPr algn="l">
               <a:lnSpc>
                 <a:spcPct val="100000"/>
               </a:lnSpc>
             </a:pPr>
             <a:r>
-              <a:rPr sz="6000" b="1">
-                <a:solidFill>
-                  <a:srgbClr val="A85B00"/>
-                </a:solidFill>
-                <a:latin typeface="Calibri"/>
-              </a:rPr>
-              <a:t>30</a:t>
-            </a:r>
-          </a:p>
-        </p:txBody>
-      </p:sp>
-      <p:sp>
-        <p:nvSpPr>
-          <p:cNvPr id="6" name="TextBox 5"/>
-          <p:cNvSpPr txBox="1"/>
-          <p:nvPr/>
-        </p:nvSpPr>
-        <p:spPr>
-          <a:xfrm>
-            <a:off x="822960" y="3246120"/>
-            <a:ext cx="3515258" cy="731520"/>
-          </a:xfrm>
-          <a:prstGeom prst="rect">
-            <a:avLst/>
-          </a:prstGeom>
-          <a:noFill/>
-        </p:spPr>
-        <p:txBody>
-          <a:bodyPr wrap="square" anchor="t">
-            <a:spAutoFit/>
-          </a:bodyPr>
-          <a:lstStyle/>
-          <a:p>
-            <a:pPr algn="ctr">
-              <a:lnSpc>
-                <a:spcPct val="100000"/>
-              </a:lnSpc>
-            </a:pPr>
-            <a:r>
-              <a:rPr sz="1400" b="0">
-                <a:solidFill>
-                  <a:srgbClr val="545C6E"/>
-                </a:solidFill>
-                <a:latin typeface="Calibri"/>
-              </a:rPr>
-              <a:t>flight searches a month.
-One search costs two</a:t>
-            </a:r>
-          </a:p>
-        </p:txBody>
-      </p:sp>
-      <p:sp>
-        <p:nvSpPr>
-          <p:cNvPr id="7" name="TextBox 6"/>
-          <p:cNvSpPr txBox="1"/>
-          <p:nvPr/>
-        </p:nvSpPr>
-        <p:spPr>
-          <a:xfrm>
-            <a:off x="4338218" y="2103120"/>
-            <a:ext cx="3515258" cy="1188720"/>
-          </a:xfrm>
-          <a:prstGeom prst="rect">
-            <a:avLst/>
-          </a:prstGeom>
-          <a:noFill/>
-        </p:spPr>
-        <p:txBody>
-          <a:bodyPr wrap="square" anchor="t">
-            <a:spAutoFit/>
-          </a:bodyPr>
-          <a:lstStyle/>
-          <a:p>
-            <a:pPr algn="ctr">
-              <a:lnSpc>
-                <a:spcPct val="100000"/>
-              </a:lnSpc>
-            </a:pPr>
-            <a:r>
-              <a:rPr sz="6000" b="1">
-                <a:solidFill>
-                  <a:srgbClr val="A85B00"/>
-                </a:solidFill>
-                <a:latin typeface="Calibri"/>
-              </a:rPr>
-              <a:t>50</a:t>
-            </a:r>
-          </a:p>
-        </p:txBody>
-      </p:sp>
-      <p:sp>
-        <p:nvSpPr>
-          <p:cNvPr id="8" name="TextBox 7"/>
-          <p:cNvSpPr txBox="1"/>
-          <p:nvPr/>
-        </p:nvSpPr>
-        <p:spPr>
-          <a:xfrm>
-            <a:off x="4338218" y="3246120"/>
-            <a:ext cx="3515258" cy="731520"/>
-          </a:xfrm>
-          <a:prstGeom prst="rect">
-            <a:avLst/>
-          </a:prstGeom>
-          <a:noFill/>
-        </p:spPr>
-        <p:txBody>
-          <a:bodyPr wrap="square" anchor="t">
-            <a:spAutoFit/>
-          </a:bodyPr>
-          <a:lstStyle/>
-          <a:p>
-            <a:pPr algn="ctr">
-              <a:lnSpc>
-                <a:spcPct val="100000"/>
-              </a:lnSpc>
-            </a:pPr>
-            <a:r>
-              <a:rPr sz="1400" b="0">
-                <a:solidFill>
-                  <a:srgbClr val="545C6E"/>
-                </a:solidFill>
-                <a:latin typeface="Calibri"/>
-              </a:rPr>
-              <a:t>hotel searches a month.
-Free tier, no top-up</a:t>
-            </a:r>
-          </a:p>
-        </p:txBody>
-      </p:sp>
-      <p:sp>
-        <p:nvSpPr>
-          <p:cNvPr id="9" name="TextBox 8"/>
-          <p:cNvSpPr txBox="1"/>
-          <p:nvPr/>
-        </p:nvSpPr>
-        <p:spPr>
-          <a:xfrm>
-            <a:off x="7853476" y="2103120"/>
-            <a:ext cx="3515258" cy="1188720"/>
-          </a:xfrm>
-          <a:prstGeom prst="rect">
-            <a:avLst/>
-          </a:prstGeom>
-          <a:noFill/>
-        </p:spPr>
-        <p:txBody>
-          <a:bodyPr wrap="square" anchor="t">
-            <a:spAutoFit/>
-          </a:bodyPr>
-          <a:lstStyle/>
-          <a:p>
-            <a:pPr algn="ctr">
-              <a:lnSpc>
-                <a:spcPct val="100000"/>
-              </a:lnSpc>
-            </a:pPr>
-            <a:r>
-              <a:rPr sz="6000" b="1">
-                <a:solidFill>
-                  <a:srgbClr val="A85B00"/>
-                </a:solidFill>
-                <a:latin typeface="Calibri"/>
-              </a:rPr>
-              <a:t>30</a:t>
-            </a:r>
-          </a:p>
-        </p:txBody>
-      </p:sp>
-      <p:sp>
-        <p:nvSpPr>
-          <p:cNvPr id="10" name="TextBox 9"/>
-          <p:cNvSpPr txBox="1"/>
-          <p:nvPr/>
-        </p:nvSpPr>
-        <p:spPr>
-          <a:xfrm>
-            <a:off x="7853476" y="3246120"/>
-            <a:ext cx="3515258" cy="731520"/>
-          </a:xfrm>
-          <a:prstGeom prst="rect">
-            <a:avLst/>
-          </a:prstGeom>
-          <a:noFill/>
-        </p:spPr>
-        <p:txBody>
-          <a:bodyPr wrap="square" anchor="t">
-            <a:spAutoFit/>
-          </a:bodyPr>
-          <a:lstStyle/>
-          <a:p>
-            <a:pPr algn="ctr">
-              <a:lnSpc>
-                <a:spcPct val="100000"/>
-              </a:lnSpc>
-            </a:pPr>
-            <a:r>
-              <a:rPr sz="1400" b="0">
-                <a:solidFill>
-                  <a:srgbClr val="545C6E"/>
-                </a:solidFill>
-                <a:latin typeface="Calibri"/>
-              </a:rPr>
-              <a:t>responses recorded once,
-replayed for ever</a:t>
-            </a:r>
-          </a:p>
-        </p:txBody>
-      </p:sp>
-      <p:sp>
-        <p:nvSpPr>
-          <p:cNvPr id="11" name="TextBox 10"/>
-          <p:cNvSpPr txBox="1"/>
-          <p:nvPr/>
-        </p:nvSpPr>
-        <p:spPr>
-          <a:xfrm>
-            <a:off x="822960" y="4846320"/>
-            <a:ext cx="10515600" cy="1280160"/>
-          </a:xfrm>
-          <a:prstGeom prst="rect">
-            <a:avLst/>
-          </a:prstGeom>
-          <a:noFill/>
-        </p:spPr>
-        <p:txBody>
-          <a:bodyPr wrap="square" anchor="t">
-            <a:spAutoFit/>
-          </a:bodyPr>
-          <a:lstStyle/>
-          <a:p>
-            <a:pPr algn="l">
-              <a:lnSpc>
-                <a:spcPct val="125000"/>
-              </a:lnSpc>
-            </a:pPr>
-            <a:r>
-              <a:rPr sz="2000" b="1">
+              <a:rPr sz="1600" b="1">
                 <a:solidFill>
                   <a:srgbClr val="161A23"/>
                 </a:solidFill>
                 <a:latin typeface="Calibri"/>
               </a:rPr>
-              <a:t>Exhausting the quota is not a delay. It is a month-long stop.</a:t>
-            </a:r>
-          </a:p>
-          <a:p>
-            <a:pPr algn="l">
-              <a:lnSpc>
-                <a:spcPct val="125000"/>
-              </a:lnSpc>
-            </a:pPr>
-            <a:r>
-              <a:rPr sz="1600" b="0">
-                <a:solidFill>
-                  <a:srgbClr val="545C6E"/>
-                </a:solidFill>
-                <a:latin typeface="Calibri"/>
-              </a:rPr>
-              <a:t>Record-and-replay plus a hard live-call ceiling protected reproducibility — not breadth.</a:t>
+              <a:t>Prices that match a real fare:  A 1.7%  ·  B 22.9%  ·  C 56.3%  ·  D 46.6%</a:t>
             </a:r>
           </a:p>
         </p:txBody>
@@ -5759,7 +5522,7 @@
                 </a:solidFill>
                 <a:latin typeface="Calibri"/>
               </a:rPr>
-              <a:t>THE ARTEFACT</a:t>
+              <a:t>PROBLEMS IN MY OWN SYSTEM</a:t>
             </a:r>
           </a:p>
         </p:txBody>
@@ -5798,7 +5561,7 @@
                 </a:solidFill>
                 <a:latin typeface="Calibri"/>
               </a:rPr>
-              <a:t>A working planner, not only an experiment</a:t>
+              <a:t>Found by measuring it, and reported not hidden</a:t>
             </a:r>
           </a:p>
         </p:txBody>
@@ -5856,7 +5619,7 @@
         <p:spPr>
           <a:xfrm>
             <a:off x="822960" y="2103120"/>
-            <a:ext cx="2636443" cy="1188720"/>
+            <a:ext cx="5272887" cy="1188720"/>
           </a:xfrm>
           <a:prstGeom prst="rect">
             <a:avLst/>
@@ -5877,11 +5640,11 @@
             <a:r>
               <a:rPr sz="6000" b="1">
                 <a:solidFill>
-                  <a:srgbClr val="4338CA"/>
+                  <a:srgbClr val="A85B00"/>
                 </a:solidFill>
                 <a:latin typeface="Calibri"/>
               </a:rPr>
-              <a:t>16,169</a:t>
+              <a:t>3/9</a:t>
             </a:r>
           </a:p>
         </p:txBody>
@@ -5895,7 +5658,7 @@
         <p:spPr>
           <a:xfrm>
             <a:off x="822960" y="3246120"/>
-            <a:ext cx="2636443" cy="731520"/>
+            <a:ext cx="5272887" cy="731520"/>
           </a:xfrm>
           <a:prstGeom prst="rect">
             <a:avLst/>
@@ -5920,7 +5683,8 @@
                 </a:solidFill>
                 <a:latin typeface="Calibri"/>
               </a:rPr>
-              <a:t>lines in the system</a:t>
+              <a:t>design checks pass.
+Six things I claimed, that do not happen</a:t>
             </a:r>
           </a:p>
         </p:txBody>
@@ -5933,8 +5697,8 @@
         </p:nvSpPr>
         <p:spPr>
           <a:xfrm>
-            <a:off x="3459403" y="2103120"/>
-            <a:ext cx="2636443" cy="1188720"/>
+            <a:off x="6095847" y="2103120"/>
+            <a:ext cx="5272887" cy="1188720"/>
           </a:xfrm>
           <a:prstGeom prst="rect">
             <a:avLst/>
@@ -5955,11 +5719,11 @@
             <a:r>
               <a:rPr sz="6000" b="1">
                 <a:solidFill>
-                  <a:srgbClr val="4338CA"/>
+                  <a:srgbClr val="A85B00"/>
                 </a:solidFill>
                 <a:latin typeface="Calibri"/>
               </a:rPr>
-              <a:t>403</a:t>
+              <a:t>50%</a:t>
             </a:r>
           </a:p>
         </p:txBody>
@@ -5972,8 +5736,8 @@
         </p:nvSpPr>
         <p:spPr>
           <a:xfrm>
-            <a:off x="3459403" y="3246120"/>
-            <a:ext cx="2636443" cy="731520"/>
+            <a:off x="6095847" y="3246120"/>
+            <a:ext cx="5272887" cy="731520"/>
           </a:xfrm>
           <a:prstGeom prst="rect">
             <a:avLst/>
@@ -5998,7 +5762,8 @@
                 </a:solidFill>
                 <a:latin typeface="Calibri"/>
               </a:rPr>
-              <a:t>tests, all passing</a:t>
+              <a:t>of impossible budgets caught.
+It misses the other half</a:t>
             </a:r>
           </a:p>
         </p:txBody>
@@ -6006,163 +5771,6 @@
       <p:sp>
         <p:nvSpPr>
           <p:cNvPr id="9" name="TextBox 8"/>
-          <p:cNvSpPr txBox="1"/>
-          <p:nvPr/>
-        </p:nvSpPr>
-        <p:spPr>
-          <a:xfrm>
-            <a:off x="6095847" y="2103120"/>
-            <a:ext cx="2636443" cy="1188720"/>
-          </a:xfrm>
-          <a:prstGeom prst="rect">
-            <a:avLst/>
-          </a:prstGeom>
-          <a:noFill/>
-        </p:spPr>
-        <p:txBody>
-          <a:bodyPr wrap="square" anchor="t">
-            <a:spAutoFit/>
-          </a:bodyPr>
-          <a:lstStyle/>
-          <a:p>
-            <a:pPr algn="ctr">
-              <a:lnSpc>
-                <a:spcPct val="100000"/>
-              </a:lnSpc>
-            </a:pPr>
-            <a:r>
-              <a:rPr sz="6000" b="1">
-                <a:solidFill>
-                  <a:srgbClr val="4338CA"/>
-                </a:solidFill>
-                <a:latin typeface="Calibri"/>
-              </a:rPr>
-              <a:t>12</a:t>
-            </a:r>
-          </a:p>
-        </p:txBody>
-      </p:sp>
-      <p:sp>
-        <p:nvSpPr>
-          <p:cNvPr id="10" name="TextBox 9"/>
-          <p:cNvSpPr txBox="1"/>
-          <p:nvPr/>
-        </p:nvSpPr>
-        <p:spPr>
-          <a:xfrm>
-            <a:off x="6095847" y="3246120"/>
-            <a:ext cx="2636443" cy="731520"/>
-          </a:xfrm>
-          <a:prstGeom prst="rect">
-            <a:avLst/>
-          </a:prstGeom>
-          <a:noFill/>
-        </p:spPr>
-        <p:txBody>
-          <a:bodyPr wrap="square" anchor="t">
-            <a:spAutoFit/>
-          </a:bodyPr>
-          <a:lstStyle/>
-          <a:p>
-            <a:pPr algn="ctr">
-              <a:lnSpc>
-                <a:spcPct val="100000"/>
-              </a:lnSpc>
-            </a:pPr>
-            <a:r>
-              <a:rPr sz="1400" b="0">
-                <a:solidFill>
-                  <a:srgbClr val="545C6E"/>
-                </a:solidFill>
-                <a:latin typeface="Calibri"/>
-              </a:rPr>
-              <a:t>schema-validated tools</a:t>
-            </a:r>
-          </a:p>
-        </p:txBody>
-      </p:sp>
-      <p:sp>
-        <p:nvSpPr>
-          <p:cNvPr id="11" name="TextBox 10"/>
-          <p:cNvSpPr txBox="1"/>
-          <p:nvPr/>
-        </p:nvSpPr>
-        <p:spPr>
-          <a:xfrm>
-            <a:off x="8732291" y="2103120"/>
-            <a:ext cx="2636443" cy="1188720"/>
-          </a:xfrm>
-          <a:prstGeom prst="rect">
-            <a:avLst/>
-          </a:prstGeom>
-          <a:noFill/>
-        </p:spPr>
-        <p:txBody>
-          <a:bodyPr wrap="square" anchor="t">
-            <a:spAutoFit/>
-          </a:bodyPr>
-          <a:lstStyle/>
-          <a:p>
-            <a:pPr algn="ctr">
-              <a:lnSpc>
-                <a:spcPct val="100000"/>
-              </a:lnSpc>
-            </a:pPr>
-            <a:r>
-              <a:rPr sz="6000" b="1">
-                <a:solidFill>
-                  <a:srgbClr val="4338CA"/>
-                </a:solidFill>
-                <a:latin typeface="Calibri"/>
-              </a:rPr>
-              <a:t>2</a:t>
-            </a:r>
-          </a:p>
-        </p:txBody>
-      </p:sp>
-      <p:sp>
-        <p:nvSpPr>
-          <p:cNvPr id="12" name="TextBox 11"/>
-          <p:cNvSpPr txBox="1"/>
-          <p:nvPr/>
-        </p:nvSpPr>
-        <p:spPr>
-          <a:xfrm>
-            <a:off x="8732291" y="3246120"/>
-            <a:ext cx="2636443" cy="731520"/>
-          </a:xfrm>
-          <a:prstGeom prst="rect">
-            <a:avLst/>
-          </a:prstGeom>
-          <a:noFill/>
-        </p:spPr>
-        <p:txBody>
-          <a:bodyPr wrap="square" anchor="t">
-            <a:spAutoFit/>
-          </a:bodyPr>
-          <a:lstStyle/>
-          <a:p>
-            <a:pPr algn="ctr">
-              <a:lnSpc>
-                <a:spcPct val="100000"/>
-              </a:lnSpc>
-            </a:pPr>
-            <a:r>
-              <a:rPr sz="1400" b="0">
-                <a:solidFill>
-                  <a:srgbClr val="545C6E"/>
-                </a:solidFill>
-                <a:latin typeface="Calibri"/>
-              </a:rPr>
-              <a:t>interfaces — terminal
-and browser</a:t>
-            </a:r>
-          </a:p>
-        </p:txBody>
-      </p:sp>
-      <p:sp>
-        <p:nvSpPr>
-          <p:cNvPr id="13" name="TextBox 12"/>
           <p:cNvSpPr txBox="1"/>
           <p:nvPr/>
         </p:nvSpPr>
@@ -6194,7 +5802,7 @@
                 </a:solidFill>
                 <a:latin typeface="Calibri"/>
               </a:rPr>
-              <a:t>It refuses a trip it cannot afford, and says what would work.</a:t>
+              <a:t>Both are in the report, with the evidence.</a:t>
             </a:r>
           </a:p>
           <a:p>
@@ -6210,7 +5818,7 @@
                 </a:solidFill>
                 <a:latin typeface="Calibri"/>
               </a:rPr>
-              <a:t>Where a route has been recorded it uses the fare really quoted; where it has not, it says the figure is estimated.</a:t>
+              <a:t>The budget check never wrongly refuses a workable trip (precision 100%), but it lets 1 impossible one through. Agreement score 0.643 - moderate, not good.</a:t>
             </a:r>
           </a:p>
         </p:txBody>
@@ -6267,7 +5875,7 @@
                 </a:solidFill>
                 <a:latin typeface="Calibri"/>
               </a:rPr>
-              <a:t>WHAT I WOULD DO DIFFERENTLY</a:t>
+              <a:t>THE BIGGEST RISK</a:t>
             </a:r>
           </a:p>
         </p:txBody>
@@ -6306,7 +5914,7 @@
                 </a:solidFill>
                 <a:latin typeface="Calibri"/>
               </a:rPr>
-              <a:t>The ordering mistake, and what it cost</a:t>
+              <a:t>It was never the coding</a:t>
             </a:r>
           </a:p>
         </p:txBody>
@@ -6363,8 +5971,8 @@
         </p:nvSpPr>
         <p:spPr>
           <a:xfrm>
-            <a:off x="822960" y="2011680"/>
-            <a:ext cx="10515600" cy="3291840"/>
+            <a:off x="822960" y="2103120"/>
+            <a:ext cx="3515258" cy="1188720"/>
           </a:xfrm>
           <a:prstGeom prst="rect">
             <a:avLst/>
@@ -6377,83 +5985,272 @@
           </a:bodyPr>
           <a:lstStyle/>
           <a:p>
-            <a:pPr algn="l">
+            <a:pPr algn="ctr">
               <a:lnSpc>
-                <a:spcPct val="130000"/>
+                <a:spcPct val="100000"/>
               </a:lnSpc>
             </a:pPr>
             <a:r>
-              <a:rPr sz="2400" b="1">
+              <a:rPr sz="6000" b="1">
                 <a:solidFill>
-                  <a:srgbClr val="4338CA"/>
+                  <a:srgbClr val="A85B00"/>
                 </a:solidFill>
                 <a:latin typeface="Calibri"/>
               </a:rPr>
-              <a:t>Measurement last was the wrong order.</a:t>
-            </a:r>
-          </a:p>
+              <a:t>30</a:t>
+            </a:r>
+          </a:p>
+        </p:txBody>
+      </p:sp>
+      <p:sp>
+        <p:nvSpPr>
+          <p:cNvPr id="6" name="TextBox 5"/>
+          <p:cNvSpPr txBox="1"/>
+          <p:nvPr/>
+        </p:nvSpPr>
+        <p:spPr>
+          <a:xfrm>
+            <a:off x="822960" y="3246120"/>
+            <a:ext cx="3515258" cy="731520"/>
+          </a:xfrm>
+          <a:prstGeom prst="rect">
+            <a:avLst/>
+          </a:prstGeom>
+          <a:noFill/>
+        </p:spPr>
+        <p:txBody>
+          <a:bodyPr wrap="square" anchor="t">
+            <a:spAutoFit/>
+          </a:bodyPr>
+          <a:lstStyle/>
+          <a:p>
+            <a:pPr algn="ctr">
+              <a:lnSpc>
+                <a:spcPct val="100000"/>
+              </a:lnSpc>
+            </a:pPr>
+            <a:r>
+              <a:rPr sz="1400" b="0">
+                <a:solidFill>
+                  <a:srgbClr val="545C6E"/>
+                </a:solidFill>
+                <a:latin typeface="Calibri"/>
+              </a:rPr>
+              <a:t>flight searches a month.
+One search costs two</a:t>
+            </a:r>
+          </a:p>
+        </p:txBody>
+      </p:sp>
+      <p:sp>
+        <p:nvSpPr>
+          <p:cNvPr id="7" name="TextBox 6"/>
+          <p:cNvSpPr txBox="1"/>
+          <p:nvPr/>
+        </p:nvSpPr>
+        <p:spPr>
+          <a:xfrm>
+            <a:off x="4338218" y="2103120"/>
+            <a:ext cx="3515258" cy="1188720"/>
+          </a:xfrm>
+          <a:prstGeom prst="rect">
+            <a:avLst/>
+          </a:prstGeom>
+          <a:noFill/>
+        </p:spPr>
+        <p:txBody>
+          <a:bodyPr wrap="square" anchor="t">
+            <a:spAutoFit/>
+          </a:bodyPr>
+          <a:lstStyle/>
+          <a:p>
+            <a:pPr algn="ctr">
+              <a:lnSpc>
+                <a:spcPct val="100000"/>
+              </a:lnSpc>
+            </a:pPr>
+            <a:r>
+              <a:rPr sz="6000" b="1">
+                <a:solidFill>
+                  <a:srgbClr val="A85B00"/>
+                </a:solidFill>
+                <a:latin typeface="Calibri"/>
+              </a:rPr>
+              <a:t>50</a:t>
+            </a:r>
+          </a:p>
+        </p:txBody>
+      </p:sp>
+      <p:sp>
+        <p:nvSpPr>
+          <p:cNvPr id="8" name="TextBox 7"/>
+          <p:cNvSpPr txBox="1"/>
+          <p:nvPr/>
+        </p:nvSpPr>
+        <p:spPr>
+          <a:xfrm>
+            <a:off x="4338218" y="3246120"/>
+            <a:ext cx="3515258" cy="731520"/>
+          </a:xfrm>
+          <a:prstGeom prst="rect">
+            <a:avLst/>
+          </a:prstGeom>
+          <a:noFill/>
+        </p:spPr>
+        <p:txBody>
+          <a:bodyPr wrap="square" anchor="t">
+            <a:spAutoFit/>
+          </a:bodyPr>
+          <a:lstStyle/>
+          <a:p>
+            <a:pPr algn="ctr">
+              <a:lnSpc>
+                <a:spcPct val="100000"/>
+              </a:lnSpc>
+            </a:pPr>
+            <a:r>
+              <a:rPr sz="1400" b="0">
+                <a:solidFill>
+                  <a:srgbClr val="545C6E"/>
+                </a:solidFill>
+                <a:latin typeface="Calibri"/>
+              </a:rPr>
+              <a:t>hotel searches a month.
+Free plan, cannot buy more</a:t>
+            </a:r>
+          </a:p>
+        </p:txBody>
+      </p:sp>
+      <p:sp>
+        <p:nvSpPr>
+          <p:cNvPr id="9" name="TextBox 8"/>
+          <p:cNvSpPr txBox="1"/>
+          <p:nvPr/>
+        </p:nvSpPr>
+        <p:spPr>
+          <a:xfrm>
+            <a:off x="7853476" y="2103120"/>
+            <a:ext cx="3515258" cy="1188720"/>
+          </a:xfrm>
+          <a:prstGeom prst="rect">
+            <a:avLst/>
+          </a:prstGeom>
+          <a:noFill/>
+        </p:spPr>
+        <p:txBody>
+          <a:bodyPr wrap="square" anchor="t">
+            <a:spAutoFit/>
+          </a:bodyPr>
+          <a:lstStyle/>
+          <a:p>
+            <a:pPr algn="ctr">
+              <a:lnSpc>
+                <a:spcPct val="100000"/>
+              </a:lnSpc>
+            </a:pPr>
+            <a:r>
+              <a:rPr sz="6000" b="1">
+                <a:solidFill>
+                  <a:srgbClr val="A85B00"/>
+                </a:solidFill>
+                <a:latin typeface="Calibri"/>
+              </a:rPr>
+              <a:t>30</a:t>
+            </a:r>
+          </a:p>
+        </p:txBody>
+      </p:sp>
+      <p:sp>
+        <p:nvSpPr>
+          <p:cNvPr id="10" name="TextBox 9"/>
+          <p:cNvSpPr txBox="1"/>
+          <p:nvPr/>
+        </p:nvSpPr>
+        <p:spPr>
+          <a:xfrm>
+            <a:off x="7853476" y="3246120"/>
+            <a:ext cx="3515258" cy="731520"/>
+          </a:xfrm>
+          <a:prstGeom prst="rect">
+            <a:avLst/>
+          </a:prstGeom>
+          <a:noFill/>
+        </p:spPr>
+        <p:txBody>
+          <a:bodyPr wrap="square" anchor="t">
+            <a:spAutoFit/>
+          </a:bodyPr>
+          <a:lstStyle/>
+          <a:p>
+            <a:pPr algn="ctr">
+              <a:lnSpc>
+                <a:spcPct val="100000"/>
+              </a:lnSpc>
+            </a:pPr>
+            <a:r>
+              <a:rPr sz="1400" b="0">
+                <a:solidFill>
+                  <a:srgbClr val="545C6E"/>
+                </a:solidFill>
+                <a:latin typeface="Calibri"/>
+              </a:rPr>
+              <a:t>replies saved once,
+reused for ever</a:t>
+            </a:r>
+          </a:p>
+        </p:txBody>
+      </p:sp>
+      <p:sp>
+        <p:nvSpPr>
+          <p:cNvPr id="11" name="TextBox 10"/>
+          <p:cNvSpPr txBox="1"/>
+          <p:nvPr/>
+        </p:nvSpPr>
+        <p:spPr>
+          <a:xfrm>
+            <a:off x="822960" y="4846320"/>
+            <a:ext cx="10515600" cy="1280160"/>
+          </a:xfrm>
+          <a:prstGeom prst="rect">
+            <a:avLst/>
+          </a:prstGeom>
+          <a:noFill/>
+        </p:spPr>
+        <p:txBody>
+          <a:bodyPr wrap="square" anchor="t">
+            <a:spAutoFit/>
+          </a:bodyPr>
+          <a:lstStyle/>
           <a:p>
             <a:pPr algn="l">
               <a:lnSpc>
-                <a:spcPct val="130000"/>
+                <a:spcPct val="125000"/>
               </a:lnSpc>
             </a:pPr>
             <a:r>
-              <a:rPr sz="1000" b="0">
+              <a:rPr sz="2000" b="1">
                 <a:solidFill>
                   <a:srgbClr val="161A23"/>
                 </a:solidFill>
                 <a:latin typeface="Calibri"/>
               </a:rPr>
-              <a:t/>
+              <a:t>Running out is not a delay. It is a month of waiting.</a:t>
             </a:r>
           </a:p>
           <a:p>
             <a:pPr algn="l">
               <a:lnSpc>
-                <a:spcPct val="130000"/>
+                <a:spcPct val="125000"/>
               </a:lnSpc>
             </a:pPr>
             <a:r>
-              <a:rPr sz="1700" b="0">
+              <a:rPr sz="1600" b="0">
                 <a:solidFill>
-                  <a:srgbClr val="161A23"/>
+                  <a:srgbClr val="545C6E"/>
                 </a:solidFill>
                 <a:latin typeface="Calibri"/>
               </a:rPr>
-              <a:t>Six agents became three because instrumentation showed where the requests went. That evidence arrived after the architecture was built, so the pivot cost a rebuild.</a:t>
-            </a:r>
-          </a:p>
-          <a:p>
-            <a:pPr algn="l">
-              <a:lnSpc>
-                <a:spcPct val="130000"/>
-              </a:lnSpc>
-            </a:pPr>
-            <a:r>
-              <a:rPr sz="800" b="0">
-                <a:solidFill>
-                  <a:srgbClr val="161A23"/>
-                </a:solidFill>
-                <a:latin typeface="Calibri"/>
-              </a:rPr>
-              <a:t/>
-            </a:r>
-          </a:p>
-          <a:p>
-            <a:pPr algn="l">
-              <a:lnSpc>
-                <a:spcPct val="130000"/>
-              </a:lnSpc>
-            </a:pPr>
-            <a:r>
-              <a:rPr sz="1900" b="1">
-                <a:solidFill>
-                  <a:srgbClr val="161A23"/>
-                </a:solidFill>
-                <a:latin typeface="Calibri"/>
-              </a:rPr>
-              <a:t>Build the counter first, then the thing being counted.</a:t>
+              <a:t>So I saved every reply to disk before building anything. That is why you can repeat my results with no API keys at all.</a:t>
             </a:r>
           </a:p>
         </p:txBody>
@@ -6467,6 +6264,684 @@
 </file>
 
 <file path=ppt/slides/slide15.xml><?xml version="1.0" encoding="utf-8"?>
+<p:sld xmlns:a="http://schemas.openxmlformats.org/drawingml/2006/main" xmlns:p="http://schemas.openxmlformats.org/presentationml/2006/main" xmlns:r="http://schemas.openxmlformats.org/officeDocument/2006/relationships">
+  <p:cSld>
+    <p:spTree>
+      <p:nvGrpSpPr>
+        <p:cNvPr id="1" name=""/>
+        <p:cNvGrpSpPr/>
+        <p:nvPr/>
+      </p:nvGrpSpPr>
+      <p:grpSpPr/>
+      <p:sp>
+        <p:nvSpPr>
+          <p:cNvPr id="2" name="TextBox 1"/>
+          <p:cNvSpPr txBox="1"/>
+          <p:nvPr/>
+        </p:nvSpPr>
+        <p:spPr>
+          <a:xfrm>
+            <a:off x="822960" y="457200"/>
+            <a:ext cx="10515600" cy="365760"/>
+          </a:xfrm>
+          <a:prstGeom prst="rect">
+            <a:avLst/>
+          </a:prstGeom>
+          <a:noFill/>
+        </p:spPr>
+        <p:txBody>
+          <a:bodyPr wrap="square" anchor="t">
+            <a:spAutoFit/>
+          </a:bodyPr>
+          <a:lstStyle/>
+          <a:p>
+            <a:pPr algn="l">
+              <a:lnSpc>
+                <a:spcPct val="100000"/>
+              </a:lnSpc>
+            </a:pPr>
+            <a:r>
+              <a:rPr sz="1200" b="1">
+                <a:solidFill>
+                  <a:srgbClr val="4338CA"/>
+                </a:solidFill>
+                <a:latin typeface="Calibri"/>
+              </a:rPr>
+              <a:t>WHY THIS MATTERS</a:t>
+            </a:r>
+          </a:p>
+        </p:txBody>
+      </p:sp>
+      <p:sp>
+        <p:nvSpPr>
+          <p:cNvPr id="3" name="TextBox 2"/>
+          <p:cNvSpPr txBox="1"/>
+          <p:nvPr/>
+        </p:nvSpPr>
+        <p:spPr>
+          <a:xfrm>
+            <a:off x="822960" y="777240"/>
+            <a:ext cx="10515600" cy="822960"/>
+          </a:xfrm>
+          <a:prstGeom prst="rect">
+            <a:avLst/>
+          </a:prstGeom>
+          <a:noFill/>
+        </p:spPr>
+        <p:txBody>
+          <a:bodyPr wrap="square" anchor="t">
+            <a:spAutoFit/>
+          </a:bodyPr>
+          <a:lstStyle/>
+          <a:p>
+            <a:pPr algn="l">
+              <a:lnSpc>
+                <a:spcPct val="100000"/>
+              </a:lnSpc>
+            </a:pPr>
+            <a:r>
+              <a:rPr sz="3200" b="1">
+                <a:solidFill>
+                  <a:srgbClr val="161A23"/>
+                </a:solidFill>
+                <a:latin typeface="Calibri"/>
+              </a:rPr>
+              <a:t>Beyond one travel planner</a:t>
+            </a:r>
+          </a:p>
+        </p:txBody>
+      </p:sp>
+      <p:sp>
+        <p:nvSpPr>
+          <p:cNvPr id="4" name="Rectangle 3"/>
+          <p:cNvSpPr/>
+          <p:nvPr/>
+        </p:nvSpPr>
+        <p:spPr>
+          <a:xfrm>
+            <a:off x="822960" y="1572768"/>
+            <a:ext cx="1005840" cy="34000"/>
+          </a:xfrm>
+          <a:prstGeom prst="rect">
+            <a:avLst/>
+          </a:prstGeom>
+          <a:solidFill>
+            <a:srgbClr val="4338CA"/>
+          </a:solidFill>
+          <a:ln>
+            <a:noFill/>
+          </a:ln>
+          <a:effectLst/>
+        </p:spPr>
+        <p:style>
+          <a:lnRef idx="1">
+            <a:schemeClr val="accent1"/>
+          </a:lnRef>
+          <a:fillRef idx="3">
+            <a:schemeClr val="accent1"/>
+          </a:fillRef>
+          <a:effectRef idx="2">
+            <a:schemeClr val="accent1"/>
+          </a:effectRef>
+          <a:fontRef idx="minor">
+            <a:schemeClr val="lt1"/>
+          </a:fontRef>
+        </p:style>
+        <p:txBody>
+          <a:bodyPr rtlCol="0" anchor="ctr"/>
+          <a:lstStyle/>
+          <a:p>
+            <a:pPr algn="ctr"/>
+          </a:p>
+        </p:txBody>
+      </p:sp>
+      <p:graphicFrame>
+        <p:nvGraphicFramePr>
+          <p:cNvPr id="5" name="Table 4"/>
+          <p:cNvGraphicFramePr>
+            <a:graphicFrameLocks noGrp="1"/>
+          </p:cNvGraphicFramePr>
+          <p:nvPr/>
+        </p:nvGraphicFramePr>
+        <p:xfrm>
+          <a:off x="822960" y="2011680"/>
+          <a:ext cx="10515599" cy="1828800"/>
+        </p:xfrm>
+        <a:graphic>
+          <a:graphicData uri="http://schemas.openxmlformats.org/drawingml/2006/table">
+            <a:tbl>
+              <a:tblPr firstRow="1" bandRow="1">
+                <a:tableStyleId>{5C22544A-7EE6-4342-B048-85BDC9FD1C3A}</a:tableStyleId>
+              </a:tblPr>
+              <a:tblGrid>
+                <a:gridCol w="477981"/>
+                <a:gridCol w="10037618"/>
+              </a:tblGrid>
+              <a:tr h="365760">
+                <a:tc>
+                  <a:txBody>
+                    <a:bodyPr/>
+                    <a:lstStyle/>
+                    <a:p>
+                      <a:r>
+                        <a:rPr sz="1400" b="1">
+                          <a:solidFill>
+                            <a:srgbClr val="FFFFFF"/>
+                          </a:solidFill>
+                          <a:latin typeface="Calibri"/>
+                        </a:rPr>
+                        <a:t> </a:t>
+                      </a:r>
+                    </a:p>
+                  </a:txBody>
+                  <a:tcPr>
+                    <a:solidFill>
+                      <a:srgbClr val="4338CA"/>
+                    </a:solidFill>
+                  </a:tcPr>
+                </a:tc>
+                <a:tc>
+                  <a:txBody>
+                    <a:bodyPr/>
+                    <a:lstStyle/>
+                    <a:p>
+                      <a:r>
+                        <a:rPr sz="1400" b="1">
+                          <a:solidFill>
+                            <a:srgbClr val="FFFFFF"/>
+                          </a:solidFill>
+                          <a:latin typeface="Calibri"/>
+                        </a:rPr>
+                        <a:t>What this project shows</a:t>
+                      </a:r>
+                    </a:p>
+                  </a:txBody>
+                  <a:tcPr>
+                    <a:solidFill>
+                      <a:srgbClr val="4338CA"/>
+                    </a:solidFill>
+                  </a:tcPr>
+                </a:tc>
+              </a:tr>
+              <a:tr h="365760">
+                <a:tc>
+                  <a:txBody>
+                    <a:bodyPr/>
+                    <a:lstStyle/>
+                    <a:p>
+                      <a:r>
+                        <a:rPr sz="1400" b="0">
+                          <a:solidFill>
+                            <a:srgbClr val="161A23"/>
+                          </a:solidFill>
+                          <a:latin typeface="Calibri"/>
+                        </a:rPr>
+                        <a:t>1</a:t>
+                      </a:r>
+                    </a:p>
+                  </a:txBody>
+                  <a:tcPr>
+                    <a:solidFill>
+                      <a:srgbClr val="FFFFFF"/>
+                    </a:solidFill>
+                  </a:tcPr>
+                </a:tc>
+                <a:tc>
+                  <a:txBody>
+                    <a:bodyPr/>
+                    <a:lstStyle/>
+                    <a:p>
+                      <a:r>
+                        <a:rPr sz="1400" b="0">
+                          <a:solidFill>
+                            <a:srgbClr val="161A23"/>
+                          </a:solidFill>
+                          <a:latin typeface="Calibri"/>
+                        </a:rPr>
+                        <a:t>AI agents are expensive by default, and most of the cost is spent on work that needs no intelligence</a:t>
+                      </a:r>
+                    </a:p>
+                  </a:txBody>
+                  <a:tcPr>
+                    <a:solidFill>
+                      <a:srgbClr val="FFFFFF"/>
+                    </a:solidFill>
+                  </a:tcPr>
+                </a:tc>
+              </a:tr>
+              <a:tr h="365760">
+                <a:tc>
+                  <a:txBody>
+                    <a:bodyPr/>
+                    <a:lstStyle/>
+                    <a:p>
+                      <a:r>
+                        <a:rPr sz="1400" b="0">
+                          <a:solidFill>
+                            <a:srgbClr val="161A23"/>
+                          </a:solidFill>
+                          <a:latin typeface="Calibri"/>
+                        </a:rPr>
+                        <a:t>2</a:t>
+                      </a:r>
+                    </a:p>
+                  </a:txBody>
+                  <a:tcPr>
+                    <a:solidFill>
+                      <a:srgbClr val="F7F8FC"/>
+                    </a:solidFill>
+                  </a:tcPr>
+                </a:tc>
+                <a:tc>
+                  <a:txBody>
+                    <a:bodyPr/>
+                    <a:lstStyle/>
+                    <a:p>
+                      <a:r>
+                        <a:rPr sz="1400" b="0">
+                          <a:solidFill>
+                            <a:srgbClr val="161A23"/>
+                          </a:solidFill>
+                          <a:latin typeface="Calibri"/>
+                        </a:rPr>
+                        <a:t>Giving an agent a tool does not mean it will use it. Mine skipped tools and still produced confident plans</a:t>
+                      </a:r>
+                    </a:p>
+                  </a:txBody>
+                  <a:tcPr>
+                    <a:solidFill>
+                      <a:srgbClr val="F7F8FC"/>
+                    </a:solidFill>
+                  </a:tcPr>
+                </a:tc>
+              </a:tr>
+              <a:tr h="365760">
+                <a:tc>
+                  <a:txBody>
+                    <a:bodyPr/>
+                    <a:lstStyle/>
+                    <a:p>
+                      <a:r>
+                        <a:rPr sz="1400" b="0">
+                          <a:solidFill>
+                            <a:srgbClr val="161A23"/>
+                          </a:solidFill>
+                          <a:latin typeface="Calibri"/>
+                        </a:rPr>
+                        <a:t>3</a:t>
+                      </a:r>
+                    </a:p>
+                  </a:txBody>
+                  <a:tcPr>
+                    <a:solidFill>
+                      <a:srgbClr val="FFFFFF"/>
+                    </a:solidFill>
+                  </a:tcPr>
+                </a:tc>
+                <a:tc>
+                  <a:txBody>
+                    <a:bodyPr/>
+                    <a:lstStyle/>
+                    <a:p>
+                      <a:r>
+                        <a:rPr sz="1400" b="0">
+                          <a:solidFill>
+                            <a:srgbClr val="161A23"/>
+                          </a:solidFill>
+                          <a:latin typeface="Calibri"/>
+                        </a:rPr>
+                        <a:t>You cannot tell a made-up plan from a real one by reading it. It has to be measured</a:t>
+                      </a:r>
+                    </a:p>
+                  </a:txBody>
+                  <a:tcPr>
+                    <a:solidFill>
+                      <a:srgbClr val="FFFFFF"/>
+                    </a:solidFill>
+                  </a:tcPr>
+                </a:tc>
+              </a:tr>
+              <a:tr h="365760">
+                <a:tc>
+                  <a:txBody>
+                    <a:bodyPr/>
+                    <a:lstStyle/>
+                    <a:p>
+                      <a:r>
+                        <a:rPr sz="1400" b="0">
+                          <a:solidFill>
+                            <a:srgbClr val="161A23"/>
+                          </a:solidFill>
+                          <a:latin typeface="Calibri"/>
+                        </a:rPr>
+                        <a:t>4</a:t>
+                      </a:r>
+                    </a:p>
+                  </a:txBody>
+                  <a:tcPr>
+                    <a:solidFill>
+                      <a:srgbClr val="F7F8FC"/>
+                    </a:solidFill>
+                  </a:tcPr>
+                </a:tc>
+                <a:tc>
+                  <a:txBody>
+                    <a:bodyPr/>
+                    <a:lstStyle/>
+                    <a:p>
+                      <a:r>
+                        <a:rPr sz="1400" b="0">
+                          <a:solidFill>
+                            <a:srgbClr val="161A23"/>
+                          </a:solidFill>
+                          <a:latin typeface="Calibri"/>
+                        </a:rPr>
+                        <a:t>The same result comes out cheaper AND just as accurate, so there is no trade-off being hidden here</a:t>
+                      </a:r>
+                    </a:p>
+                  </a:txBody>
+                  <a:tcPr>
+                    <a:solidFill>
+                      <a:srgbClr val="F7F8FC"/>
+                    </a:solidFill>
+                  </a:tcPr>
+                </a:tc>
+              </a:tr>
+            </a:tbl>
+          </a:graphicData>
+        </a:graphic>
+      </p:graphicFrame>
+      <p:sp>
+        <p:nvSpPr>
+          <p:cNvPr id="6" name="TextBox 5"/>
+          <p:cNvSpPr txBox="1"/>
+          <p:nvPr/>
+        </p:nvSpPr>
+        <p:spPr>
+          <a:xfrm>
+            <a:off x="822960" y="5029200"/>
+            <a:ext cx="10515600" cy="1005840"/>
+          </a:xfrm>
+          <a:prstGeom prst="rect">
+            <a:avLst/>
+          </a:prstGeom>
+          <a:noFill/>
+        </p:spPr>
+        <p:txBody>
+          <a:bodyPr wrap="square" anchor="t">
+            <a:spAutoFit/>
+          </a:bodyPr>
+          <a:lstStyle/>
+          <a:p>
+            <a:pPr algn="l">
+              <a:lnSpc>
+                <a:spcPct val="100000"/>
+              </a:lnSpc>
+            </a:pPr>
+            <a:r>
+              <a:rPr sz="1900" b="1">
+                <a:solidFill>
+                  <a:srgbClr val="4338CA"/>
+                </a:solidFill>
+                <a:latin typeface="Calibri"/>
+              </a:rPr>
+              <a:t>Anyone building with AI agents faces this choice. Most do not measure it.</a:t>
+            </a:r>
+          </a:p>
+        </p:txBody>
+      </p:sp>
+    </p:spTree>
+  </p:cSld>
+  <p:clrMapOvr>
+    <a:masterClrMapping/>
+  </p:clrMapOvr>
+</p:sld>
+</file>
+
+<file path=ppt/slides/slide16.xml><?xml version="1.0" encoding="utf-8"?>
+<p:sld xmlns:a="http://schemas.openxmlformats.org/drawingml/2006/main" xmlns:p="http://schemas.openxmlformats.org/presentationml/2006/main" xmlns:r="http://schemas.openxmlformats.org/officeDocument/2006/relationships">
+  <p:cSld>
+    <p:spTree>
+      <p:nvGrpSpPr>
+        <p:cNvPr id="1" name=""/>
+        <p:cNvGrpSpPr/>
+        <p:nvPr/>
+      </p:nvGrpSpPr>
+      <p:grpSpPr/>
+      <p:sp>
+        <p:nvSpPr>
+          <p:cNvPr id="2" name="TextBox 1"/>
+          <p:cNvSpPr txBox="1"/>
+          <p:nvPr/>
+        </p:nvSpPr>
+        <p:spPr>
+          <a:xfrm>
+            <a:off x="822960" y="457200"/>
+            <a:ext cx="10515600" cy="365760"/>
+          </a:xfrm>
+          <a:prstGeom prst="rect">
+            <a:avLst/>
+          </a:prstGeom>
+          <a:noFill/>
+        </p:spPr>
+        <p:txBody>
+          <a:bodyPr wrap="square" anchor="t">
+            <a:spAutoFit/>
+          </a:bodyPr>
+          <a:lstStyle/>
+          <a:p>
+            <a:pPr algn="l">
+              <a:lnSpc>
+                <a:spcPct val="100000"/>
+              </a:lnSpc>
+            </a:pPr>
+            <a:r>
+              <a:rPr sz="1200" b="1">
+                <a:solidFill>
+                  <a:srgbClr val="4338CA"/>
+                </a:solidFill>
+                <a:latin typeface="Calibri"/>
+              </a:rPr>
+              <a:t>WHAT I WOULD DO DIFFERENTLY</a:t>
+            </a:r>
+          </a:p>
+        </p:txBody>
+      </p:sp>
+      <p:sp>
+        <p:nvSpPr>
+          <p:cNvPr id="3" name="TextBox 2"/>
+          <p:cNvSpPr txBox="1"/>
+          <p:nvPr/>
+        </p:nvSpPr>
+        <p:spPr>
+          <a:xfrm>
+            <a:off x="822960" y="777240"/>
+            <a:ext cx="10515600" cy="822960"/>
+          </a:xfrm>
+          <a:prstGeom prst="rect">
+            <a:avLst/>
+          </a:prstGeom>
+          <a:noFill/>
+        </p:spPr>
+        <p:txBody>
+          <a:bodyPr wrap="square" anchor="t">
+            <a:spAutoFit/>
+          </a:bodyPr>
+          <a:lstStyle/>
+          <a:p>
+            <a:pPr algn="l">
+              <a:lnSpc>
+                <a:spcPct val="100000"/>
+              </a:lnSpc>
+            </a:pPr>
+            <a:r>
+              <a:rPr sz="3200" b="1">
+                <a:solidFill>
+                  <a:srgbClr val="161A23"/>
+                </a:solidFill>
+                <a:latin typeface="Calibri"/>
+              </a:rPr>
+              <a:t>One mistake, and what it cost</a:t>
+            </a:r>
+          </a:p>
+        </p:txBody>
+      </p:sp>
+      <p:sp>
+        <p:nvSpPr>
+          <p:cNvPr id="4" name="Rectangle 3"/>
+          <p:cNvSpPr/>
+          <p:nvPr/>
+        </p:nvSpPr>
+        <p:spPr>
+          <a:xfrm>
+            <a:off x="822960" y="1572768"/>
+            <a:ext cx="1005840" cy="34000"/>
+          </a:xfrm>
+          <a:prstGeom prst="rect">
+            <a:avLst/>
+          </a:prstGeom>
+          <a:solidFill>
+            <a:srgbClr val="4338CA"/>
+          </a:solidFill>
+          <a:ln>
+            <a:noFill/>
+          </a:ln>
+          <a:effectLst/>
+        </p:spPr>
+        <p:style>
+          <a:lnRef idx="1">
+            <a:schemeClr val="accent1"/>
+          </a:lnRef>
+          <a:fillRef idx="3">
+            <a:schemeClr val="accent1"/>
+          </a:fillRef>
+          <a:effectRef idx="2">
+            <a:schemeClr val="accent1"/>
+          </a:effectRef>
+          <a:fontRef idx="minor">
+            <a:schemeClr val="lt1"/>
+          </a:fontRef>
+        </p:style>
+        <p:txBody>
+          <a:bodyPr rtlCol="0" anchor="ctr"/>
+          <a:lstStyle/>
+          <a:p>
+            <a:pPr algn="ctr"/>
+          </a:p>
+        </p:txBody>
+      </p:sp>
+      <p:sp>
+        <p:nvSpPr>
+          <p:cNvPr id="5" name="TextBox 4"/>
+          <p:cNvSpPr txBox="1"/>
+          <p:nvPr/>
+        </p:nvSpPr>
+        <p:spPr>
+          <a:xfrm>
+            <a:off x="822960" y="2011680"/>
+            <a:ext cx="10515600" cy="3291840"/>
+          </a:xfrm>
+          <a:prstGeom prst="rect">
+            <a:avLst/>
+          </a:prstGeom>
+          <a:noFill/>
+        </p:spPr>
+        <p:txBody>
+          <a:bodyPr wrap="square" anchor="t">
+            <a:spAutoFit/>
+          </a:bodyPr>
+          <a:lstStyle/>
+          <a:p>
+            <a:pPr algn="l">
+              <a:lnSpc>
+                <a:spcPct val="130000"/>
+              </a:lnSpc>
+            </a:pPr>
+            <a:r>
+              <a:rPr sz="2400" b="1">
+                <a:solidFill>
+                  <a:srgbClr val="4338CA"/>
+                </a:solidFill>
+                <a:latin typeface="Calibri"/>
+              </a:rPr>
+              <a:t>I built the measuring last. It should have been first.</a:t>
+            </a:r>
+          </a:p>
+          <a:p>
+            <a:pPr algn="l">
+              <a:lnSpc>
+                <a:spcPct val="130000"/>
+              </a:lnSpc>
+            </a:pPr>
+            <a:r>
+              <a:rPr sz="1000" b="0">
+                <a:solidFill>
+                  <a:srgbClr val="161A23"/>
+                </a:solidFill>
+                <a:latin typeface="Calibri"/>
+              </a:rPr>
+              <a:t/>
+            </a:r>
+          </a:p>
+          <a:p>
+            <a:pPr algn="l">
+              <a:lnSpc>
+                <a:spcPct val="130000"/>
+              </a:lnSpc>
+            </a:pPr>
+            <a:r>
+              <a:rPr sz="1700" b="0">
+                <a:solidFill>
+                  <a:srgbClr val="161A23"/>
+                </a:solidFill>
+                <a:latin typeface="Calibri"/>
+              </a:rPr>
+              <a:t>Six agents became three only because measuring showed where the cost was going. That evidence arrived after the system was already built, so changing it meant rebuilding.</a:t>
+            </a:r>
+          </a:p>
+          <a:p>
+            <a:pPr algn="l">
+              <a:lnSpc>
+                <a:spcPct val="130000"/>
+              </a:lnSpc>
+            </a:pPr>
+            <a:r>
+              <a:rPr sz="800" b="0">
+                <a:solidFill>
+                  <a:srgbClr val="161A23"/>
+                </a:solidFill>
+                <a:latin typeface="Calibri"/>
+              </a:rPr>
+              <a:t/>
+            </a:r>
+          </a:p>
+          <a:p>
+            <a:pPr algn="l">
+              <a:lnSpc>
+                <a:spcPct val="130000"/>
+              </a:lnSpc>
+            </a:pPr>
+            <a:r>
+              <a:rPr sz="1900" b="1">
+                <a:solidFill>
+                  <a:srgbClr val="161A23"/>
+                </a:solidFill>
+                <a:latin typeface="Calibri"/>
+              </a:rPr>
+              <a:t>Build the counter before the thing being counted.</a:t>
+            </a:r>
+          </a:p>
+        </p:txBody>
+      </p:sp>
+    </p:spTree>
+  </p:cSld>
+  <p:clrMapOvr>
+    <a:masterClrMapping/>
+  </p:clrMapOvr>
+</p:sld>
+</file>
+
+<file path=ppt/slides/slide17.xml><?xml version="1.0" encoding="utf-8"?>
 <p:sld xmlns:a="http://schemas.openxmlformats.org/drawingml/2006/main" xmlns:p="http://schemas.openxmlformats.org/presentationml/2006/main" xmlns:r="http://schemas.openxmlformats.org/officeDocument/2006/relationships">
   <p:cSld>
     <p:bg>
@@ -6518,7 +6993,7 @@
                 </a:solidFill>
                 <a:latin typeface="Calibri"/>
               </a:rPr>
-              <a:t>CONCLUSION</a:t>
+              <a:t>IN ONE SENTENCE</a:t>
             </a:r>
           </a:p>
         </p:txBody>
@@ -6547,49 +7022,33 @@
           <a:p>
             <a:pPr algn="l">
               <a:lnSpc>
-                <a:spcPct val="115000"/>
+                <a:spcPct val="120000"/>
               </a:lnSpc>
             </a:pPr>
             <a:r>
-              <a:rPr sz="3200" b="1">
+              <a:rPr sz="3400" b="1">
                 <a:solidFill>
                   <a:srgbClr val="FFFFFF"/>
                 </a:solidFill>
                 <a:latin typeface="Calibri"/>
               </a:rPr>
-              <a:t>A model earns its cost where a step</a:t>
+              <a:t>Use AI where a step needs thinking.</a:t>
             </a:r>
           </a:p>
           <a:p>
             <a:pPr algn="l">
               <a:lnSpc>
-                <a:spcPct val="115000"/>
+                <a:spcPct val="120000"/>
               </a:lnSpc>
             </a:pPr>
             <a:r>
-              <a:rPr sz="3200" b="1">
+              <a:rPr sz="3400" b="1">
                 <a:solidFill>
                   <a:srgbClr val="6EE7DF"/>
                 </a:solidFill>
                 <a:latin typeface="Calibri"/>
               </a:rPr>
-              <a:t>needs a judgement you cannot write as code.</a:t>
-            </a:r>
-          </a:p>
-          <a:p>
-            <a:pPr algn="l">
-              <a:lnSpc>
-                <a:spcPct val="115000"/>
-              </a:lnSpc>
-            </a:pPr>
-            <a:r>
-              <a:rPr sz="3200" b="1">
-                <a:solidFill>
-                  <a:srgbClr val="FFFFFF"/>
-                </a:solidFill>
-                <a:latin typeface="Calibri"/>
-              </a:rPr>
-              <a:t>Everywhere else it is a bill.</a:t>
+              <a:t>Everywhere else, it is just a bill.</a:t>
             </a:r>
           </a:p>
         </p:txBody>
@@ -6602,7 +7061,7 @@
         </p:nvSpPr>
         <p:spPr>
           <a:xfrm>
-            <a:off x="1005840" y="4389120"/>
+            <a:off x="1005840" y="4297680"/>
             <a:ext cx="1463040" cy="34000"/>
           </a:xfrm>
           <a:prstGeom prst="rect">
@@ -6646,7 +7105,7 @@
         </p:nvSpPr>
         <p:spPr>
           <a:xfrm>
-            <a:off x="1005840" y="4709160"/>
+            <a:off x="1005840" y="4617720"/>
             <a:ext cx="10241280" cy="1463040"/>
           </a:xfrm>
           <a:prstGeom prst="rect">
@@ -6672,7 +7131,7 @@
                 </a:solidFill>
                 <a:latin typeface="Calibri"/>
               </a:rPr>
-              <a:t>15x fewer tokens, no loss of groundedness, on 1 scenario measured 5 times.</a:t>
+              <a:t>15x cheaper, no loss of accuracy, measured on 1 trip run 5 times.</a:t>
             </a:r>
           </a:p>
           <a:p>
@@ -6704,7 +7163,7 @@
                 </a:solidFill>
                 <a:latin typeface="Calibri"/>
               </a:rPr>
-              <a:t>Breadth is the gap. Everything needed to close it is committed and runs without credentials.</a:t>
+              <a:t>Narrow coverage is the gap. Everything needed to widen it is saved and runs without keys.</a:t>
             </a:r>
           </a:p>
         </p:txBody>
@@ -6800,7 +7259,7 @@
                 </a:solidFill>
                 <a:latin typeface="Calibri"/>
               </a:rPr>
-              <a:t>Agents are given tools by default</a:t>
+              <a:t>AI is being used for jobs that do not need it</a:t>
             </a:r>
           </a:p>
         </p:txBody>
@@ -6922,8 +7381,8 @@
                 </a:solidFill>
                 <a:latin typeface="Calibri"/>
               </a:rPr>
-              <a:t>model requests per trip
-when six agents each decide</a:t>
+              <a:t>AI calls to plan one trip
+when agents fetch the data</a:t>
             </a:r>
           </a:p>
         </p:txBody>
@@ -7001,8 +7460,8 @@
                 </a:solidFill>
                 <a:latin typeface="Calibri"/>
               </a:rPr>
-              <a:t>model requests per trip
-when plain Python fetches</a:t>
+              <a:t>AI calls for the same trip
+when normal code fetches it</a:t>
             </a:r>
           </a:p>
         </p:txBody>
@@ -7080,8 +7539,8 @@
                 </a:solidFill>
                 <a:latin typeface="Calibri"/>
               </a:rPr>
-              <a:t>the tokens, for the same
-finished itinerary</a:t>
+              <a:t>more text sent to the AI,
+for the same finished plan</a:t>
             </a:r>
           </a:p>
         </p:txBody>
@@ -7114,13 +7573,13 @@
               </a:lnSpc>
             </a:pPr>
             <a:r>
-              <a:rPr sz="2000" b="1">
+              <a:rPr sz="2100" b="1">
                 <a:solidFill>
                   <a:srgbClr val="161A23"/>
                 </a:solidFill>
                 <a:latin typeface="Calibri"/>
               </a:rPr>
-              <a:t>Fetching a fare for a known route on a known date needs no judgement.</a:t>
+              <a:t>Looking up a flight price needs no thinking. It is one web request.</a:t>
             </a:r>
           </a:p>
           <a:p>
@@ -7130,13 +7589,13 @@
               </a:lnSpc>
             </a:pPr>
             <a:r>
-              <a:rPr sz="1600" b="0">
+              <a:rPr sz="1700" b="0">
                 <a:solidFill>
                   <a:srgbClr val="545C6E"/>
                 </a:solidFill>
                 <a:latin typeface="Calibri"/>
               </a:rPr>
-              <a:t>A reasoning loop is charged for it anyway — every step re-sends every tool schema.</a:t>
+              <a:t>But if an AI agent does the looking up, you pay for every step it takes to decide.</a:t>
             </a:r>
           </a:p>
         </p:txBody>
@@ -7175,8 +7634,8 @@
         </p:nvSpPr>
         <p:spPr>
           <a:xfrm>
-            <a:off x="1280160" y="2103120"/>
-            <a:ext cx="9601200" cy="2377440"/>
+            <a:off x="1280160" y="2011680"/>
+            <a:ext cx="9601200" cy="2560320"/>
           </a:xfrm>
           <a:prstGeom prst="rect">
             <a:avLst/>
@@ -7195,13 +7654,13 @@
               </a:lnSpc>
             </a:pPr>
             <a:r>
-              <a:rPr sz="3400" b="0">
+              <a:rPr sz="2600" b="0">
                 <a:solidFill>
-                  <a:srgbClr val="545C6E"/>
+                  <a:srgbClr val="8A91A0"/>
                 </a:solidFill>
                 <a:latin typeface="Calibri"/>
               </a:rPr>
-              <a:t>Where does a language model</a:t>
+              <a:t>My question</a:t>
             </a:r>
           </a:p>
           <a:p>
@@ -7211,13 +7670,13 @@
               </a:lnSpc>
             </a:pPr>
             <a:r>
-              <a:rPr sz="4600" b="1">
+              <a:rPr sz="4000" b="1">
                 <a:solidFill>
                   <a:srgbClr val="4338CA"/>
                 </a:solidFill>
                 <a:latin typeface="Calibri"/>
               </a:rPr>
-              <a:t>earn its cost,</a:t>
+              <a:t>Which steps really need AI,</a:t>
             </a:r>
           </a:p>
           <a:p>
@@ -7227,13 +7686,13 @@
               </a:lnSpc>
             </a:pPr>
             <a:r>
-              <a:rPr sz="3400" b="0">
+              <a:rPr sz="4000" b="1">
                 <a:solidFill>
-                  <a:srgbClr val="545C6E"/>
+                  <a:srgbClr val="4338CA"/>
                 </a:solidFill>
                 <a:latin typeface="Calibri"/>
               </a:rPr>
-              <a:t>and where is it just expensive?</a:t>
+              <a:t>and which are just expensive?</a:t>
             </a:r>
           </a:p>
         </p:txBody>
@@ -7246,7 +7705,7 @@
         </p:nvSpPr>
         <p:spPr>
           <a:xfrm>
-            <a:off x="1280160" y="4754880"/>
+            <a:off x="1280160" y="4846320"/>
             <a:ext cx="1828800" cy="34000"/>
           </a:xfrm>
           <a:prstGeom prst="rect">
@@ -7290,7 +7749,7 @@
         </p:nvSpPr>
         <p:spPr>
           <a:xfrm>
-            <a:off x="1280160" y="5029200"/>
+            <a:off x="1280160" y="5120640"/>
             <a:ext cx="9601200" cy="731520"/>
           </a:xfrm>
           <a:prstGeom prst="rect">
@@ -7310,13 +7769,13 @@
               </a:lnSpc>
             </a:pPr>
             <a:r>
-              <a:rPr sz="1500" b="0">
+              <a:rPr sz="1600" b="0">
                 <a:solidFill>
-                  <a:srgbClr val="8A91A0"/>
+                  <a:srgbClr val="545C6E"/>
                 </a:solidFill>
                 <a:latin typeface="Calibri"/>
               </a:rPr>
-              <a:t>Design Science Research · four-arm ablation · retrieval is the only variable</a:t>
+              <a:t>Everything else is kept identical. Only the data-fetching changes.</a:t>
             </a:r>
           </a:p>
         </p:txBody>
@@ -7373,7 +7832,7 @@
                 </a:solidFill>
                 <a:latin typeface="Calibri"/>
               </a:rPr>
-              <a:t>THE FOUR APPROACHES</a:t>
+              <a:t>WHAT IT DOES</a:t>
             </a:r>
           </a:p>
         </p:txBody>
@@ -7412,7 +7871,7 @@
                 </a:solidFill>
                 <a:latin typeface="Calibri"/>
               </a:rPr>
-              <a:t>One variable: who fetches the data</a:t>
+              <a:t>A working travel planner, not just an experiment</a:t>
             </a:r>
           </a:p>
         </p:txBody>
@@ -7471,7 +7930,7 @@
         </p:nvGraphicFramePr>
         <p:xfrm>
           <a:off x="822960" y="2011680"/>
-          <a:ext cx="10515598" cy="1828800"/>
+          <a:ext cx="10515600" cy="2194560"/>
         </p:xfrm>
         <a:graphic>
           <a:graphicData uri="http://schemas.openxmlformats.org/drawingml/2006/table">
@@ -7480,10 +7939,8 @@
                 <a:tableStyleId>{5C22544A-7EE6-4342-B048-85BDC9FD1C3A}</a:tableStyleId>
               </a:tblPr>
               <a:tblGrid>
-                <a:gridCol w="491383"/>
-                <a:gridCol w="2948299"/>
-                <a:gridCol w="2162085"/>
-                <a:gridCol w="4913831"/>
+                <a:gridCol w="1752600"/>
+                <a:gridCol w="8763000"/>
               </a:tblGrid>
               <a:tr h="365760">
                 <a:tc>
@@ -7498,7 +7955,7 @@
                           </a:solidFill>
                           <a:latin typeface="Calibri"/>
                         </a:rPr>
-                        <a:t> </a:t>
+                        <a:t>The user</a:t>
                       </a:r>
                     </a:p>
                   </a:txBody>
@@ -7520,51 +7977,7 @@
                           </a:solidFill>
                           <a:latin typeface="Calibri"/>
                         </a:rPr>
-                        <a:t>Architecture</a:t>
-                      </a:r>
-                    </a:p>
-                  </a:txBody>
-                  <a:tcPr>
-                    <a:solidFill>
-                      <a:srgbClr val="4338CA"/>
-                    </a:solidFill>
-                  </a:tcPr>
-                </a:tc>
-                <a:tc>
-                  <a:txBody>
-                    <a:bodyPr/>
-                    <a:lstStyle/>
-                    <a:p>
-                      <a:r>
-                        <a:rPr sz="1300" b="1">
-                          <a:solidFill>
-                            <a:srgbClr val="FFFFFF"/>
-                          </a:solidFill>
-                          <a:latin typeface="Calibri"/>
-                        </a:rPr>
-                        <a:t>Who retrieves</a:t>
-                      </a:r>
-                    </a:p>
-                  </a:txBody>
-                  <a:tcPr>
-                    <a:solidFill>
-                      <a:srgbClr val="4338CA"/>
-                    </a:solidFill>
-                  </a:tcPr>
-                </a:tc>
-                <a:tc>
-                  <a:txBody>
-                    <a:bodyPr/>
-                    <a:lstStyle/>
-                    <a:p>
-                      <a:r>
-                        <a:rPr sz="1300" b="1">
-                          <a:solidFill>
-                            <a:srgbClr val="FFFFFF"/>
-                          </a:solidFill>
-                          <a:latin typeface="Calibri"/>
-                        </a:rPr>
-                        <a:t>Why it is in the design</a:t>
+                        <a:t>What happens</a:t>
                       </a:r>
                     </a:p>
                   </a:txBody>
@@ -7588,7 +8001,7 @@
                           </a:solidFill>
                           <a:latin typeface="Calibri"/>
                         </a:rPr>
-                        <a:t>A</a:t>
+                        <a:t>Fills one form</a:t>
                       </a:r>
                     </a:p>
                   </a:txBody>
@@ -7610,51 +8023,7 @@
                           </a:solidFill>
                           <a:latin typeface="Calibri"/>
                         </a:rPr>
-                        <a:t>One model call, no tools</a:t>
-                      </a:r>
-                    </a:p>
-                  </a:txBody>
-                  <a:tcPr>
-                    <a:solidFill>
-                      <a:srgbClr val="FFFFFF"/>
-                    </a:solidFill>
-                  </a:tcPr>
-                </a:tc>
-                <a:tc>
-                  <a:txBody>
-                    <a:bodyPr/>
-                    <a:lstStyle/>
-                    <a:p>
-                      <a:r>
-                        <a:rPr sz="1300" b="0">
-                          <a:solidFill>
-                            <a:srgbClr val="161A23"/>
-                          </a:solidFill>
-                          <a:latin typeface="Calibri"/>
-                        </a:rPr>
-                        <a:t>nothing</a:t>
-                      </a:r>
-                    </a:p>
-                  </a:txBody>
-                  <a:tcPr>
-                    <a:solidFill>
-                      <a:srgbClr val="FFFFFF"/>
-                    </a:solidFill>
-                  </a:tcPr>
-                </a:tc>
-                <a:tc>
-                  <a:txBody>
-                    <a:bodyPr/>
-                    <a:lstStyle/>
-                    <a:p>
-                      <a:r>
-                        <a:rPr sz="1300" b="0">
-                          <a:solidFill>
-                            <a:srgbClr val="161A23"/>
-                          </a:solidFill>
-                          <a:latin typeface="Calibri"/>
-                        </a:rPr>
-                        <a:t>Floor. Shows what fluency alone produces</a:t>
+                        <a:t>Where from, where to, dates, how many people, budget, interests</a:t>
                       </a:r>
                     </a:p>
                   </a:txBody>
@@ -7678,7 +8047,7 @@
                           </a:solidFill>
                           <a:latin typeface="Calibri"/>
                         </a:rPr>
-                        <a:t>B</a:t>
+                        <a:t>Presses one button</a:t>
                       </a:r>
                     </a:p>
                   </a:txBody>
@@ -7700,51 +8069,7 @@
                           </a:solidFill>
                           <a:latin typeface="Calibri"/>
                         </a:rPr>
-                        <a:t>Six agents, as first built</a:t>
-                      </a:r>
-                    </a:p>
-                  </a:txBody>
-                  <a:tcPr>
-                    <a:solidFill>
-                      <a:srgbClr val="F7F8FC"/>
-                    </a:solidFill>
-                  </a:tcPr>
-                </a:tc>
-                <a:tc>
-                  <a:txBody>
-                    <a:bodyPr/>
-                    <a:lstStyle/>
-                    <a:p>
-                      <a:r>
-                        <a:rPr sz="1300" b="0">
-                          <a:solidFill>
-                            <a:srgbClr val="161A23"/>
-                          </a:solidFill>
-                          <a:latin typeface="Calibri"/>
-                        </a:rPr>
-                        <a:t>each agent decides</a:t>
-                      </a:r>
-                    </a:p>
-                  </a:txBody>
-                  <a:tcPr>
-                    <a:solidFill>
-                      <a:srgbClr val="F7F8FC"/>
-                    </a:solidFill>
-                  </a:tcPr>
-                </a:tc>
-                <a:tc>
-                  <a:txBody>
-                    <a:bodyPr/>
-                    <a:lstStyle/>
-                    <a:p>
-                      <a:r>
-                        <a:rPr sz="1300" b="0">
-                          <a:solidFill>
-                            <a:srgbClr val="161A23"/>
-                          </a:solidFill>
-                          <a:latin typeface="Calibri"/>
-                        </a:rPr>
-                        <a:t>The proposal, untuned. The honest baseline</a:t>
+                        <a:t>Seven steps run and update live on screen as each finishes</a:t>
                       </a:r>
                     </a:p>
                   </a:txBody>
@@ -7768,7 +8093,7 @@
                           </a:solidFill>
                           <a:latin typeface="Calibri"/>
                         </a:rPr>
-                        <a:t>C</a:t>
+                        <a:t>Sees the plan</a:t>
                       </a:r>
                     </a:p>
                   </a:txBody>
@@ -7790,51 +8115,7 @@
                           </a:solidFill>
                           <a:latin typeface="Calibri"/>
                         </a:rPr>
-                        <a:t>Six agents, tuned</a:t>
-                      </a:r>
-                    </a:p>
-                  </a:txBody>
-                  <a:tcPr>
-                    <a:solidFill>
-                      <a:srgbClr val="FFFFFF"/>
-                    </a:solidFill>
-                  </a:tcPr>
-                </a:tc>
-                <a:tc>
-                  <a:txBody>
-                    <a:bodyPr/>
-                    <a:lstStyle/>
-                    <a:p>
-                      <a:r>
-                        <a:rPr sz="1300" b="0">
-                          <a:solidFill>
-                            <a:srgbClr val="161A23"/>
-                          </a:solidFill>
-                          <a:latin typeface="Calibri"/>
-                        </a:rPr>
-                        <a:t>each agent decides</a:t>
-                      </a:r>
-                    </a:p>
-                  </a:txBody>
-                  <a:tcPr>
-                    <a:solidFill>
-                      <a:srgbClr val="FFFFFF"/>
-                    </a:solidFill>
-                  </a:tcPr>
-                </a:tc>
-                <a:tc>
-                  <a:txBody>
-                    <a:bodyPr/>
-                    <a:lstStyle/>
-                    <a:p>
-                      <a:r>
-                        <a:rPr sz="1300" b="0">
-                          <a:solidFill>
-                            <a:srgbClr val="161A23"/>
-                          </a:solidFill>
-                          <a:latin typeface="Calibri"/>
-                        </a:rPr>
-                        <a:t>Separates tuning from architecture</a:t>
+                        <a:t>A day-by-day itinerary in tabs: flights, hotels, each day, budget, tips</a:t>
                       </a:r>
                     </a:p>
                   </a:txBody>
@@ -7858,7 +8139,7 @@
                           </a:solidFill>
                           <a:latin typeface="Calibri"/>
                         </a:rPr>
-                        <a:t>D</a:t>
+                        <a:t>Can trust the prices</a:t>
                       </a:r>
                     </a:p>
                   </a:txBody>
@@ -7880,13 +8161,37 @@
                           </a:solidFill>
                           <a:latin typeface="Calibri"/>
                         </a:rPr>
-                        <a:t>Three agents</a:t>
+                        <a:t>Real fares from live travel APIs. If a price is a guess, it says so</a:t>
                       </a:r>
                     </a:p>
                   </a:txBody>
                   <a:tcPr>
                     <a:solidFill>
                       <a:srgbClr val="F7F8FC"/>
+                    </a:solidFill>
+                  </a:tcPr>
+                </a:tc>
+              </a:tr>
+              <a:tr h="365760">
+                <a:tc>
+                  <a:txBody>
+                    <a:bodyPr/>
+                    <a:lstStyle/>
+                    <a:p>
+                      <a:r>
+                        <a:rPr sz="1300" b="0">
+                          <a:solidFill>
+                            <a:srgbClr val="161A23"/>
+                          </a:solidFill>
+                          <a:latin typeface="Calibri"/>
+                        </a:rPr>
+                        <a:t>Gets told the truth</a:t>
+                      </a:r>
+                    </a:p>
+                  </a:txBody>
+                  <a:tcPr>
+                    <a:solidFill>
+                      <a:srgbClr val="FFFFFF"/>
                     </a:solidFill>
                   </a:tcPr>
                 </a:tc>
@@ -7902,35 +8207,13 @@
                           </a:solidFill>
                           <a:latin typeface="Calibri"/>
                         </a:rPr>
-                        <a:t>plain Python</a:t>
+                        <a:t>If the budget cannot cover the trip, it refuses and says what would work</a:t>
                       </a:r>
                     </a:p>
                   </a:txBody>
                   <a:tcPr>
                     <a:solidFill>
-                      <a:srgbClr val="F7F8FC"/>
-                    </a:solidFill>
-                  </a:tcPr>
-                </a:tc>
-                <a:tc>
-                  <a:txBody>
-                    <a:bodyPr/>
-                    <a:lstStyle/>
-                    <a:p>
-                      <a:r>
-                        <a:rPr sz="1300" b="0">
-                          <a:solidFill>
-                            <a:srgbClr val="161A23"/>
-                          </a:solidFill>
-                          <a:latin typeface="Calibri"/>
-                        </a:rPr>
-                        <a:t>What ships. The claim under test</a:t>
-                      </a:r>
-                    </a:p>
-                  </a:txBody>
-                  <a:tcPr>
-                    <a:solidFill>
-                      <a:srgbClr val="F7F8FC"/>
+                      <a:srgbClr val="FFFFFF"/>
                     </a:solidFill>
                   </a:tcPr>
                 </a:tc>
@@ -7947,8 +8230,8 @@
         </p:nvSpPr>
         <p:spPr>
           <a:xfrm>
-            <a:off x="822960" y="5120640"/>
-            <a:ext cx="10515600" cy="914400"/>
+            <a:off x="822960" y="5212080"/>
+            <a:ext cx="10515600" cy="822960"/>
           </a:xfrm>
           <a:prstGeom prst="rect">
             <a:avLst/>
@@ -7967,13 +8250,13 @@
               </a:lnSpc>
             </a:pPr>
             <a:r>
-              <a:rPr sz="1800" b="1">
+              <a:rPr sz="1700" b="0">
                 <a:solidFill>
-                  <a:srgbClr val="4338CA"/>
+                  <a:srgbClr val="545C6E"/>
                 </a:solidFill>
                 <a:latin typeface="Calibri"/>
               </a:rPr>
-              <a:t>C exists so nobody can say D only won because B was badly configured.</a:t>
+              <a:t>There is also a terminal version, and every step is narrated as it runs.</a:t>
             </a:r>
           </a:p>
         </p:txBody>
@@ -8030,7 +8313,7 @@
                 </a:solidFill>
                 <a:latin typeface="Calibri"/>
               </a:rPr>
-              <a:t>ARCHITECTURE</a:t>
+              <a:t>THE AGENTS</a:t>
             </a:r>
           </a:p>
         </p:txBody>
@@ -8069,7 +8352,7 @@
                 </a:solidFill>
                 <a:latin typeface="Calibri"/>
               </a:rPr>
-              <a:t>Four layers; only layer three changes</a:t>
+              <a:t>Three use AI. Four steps do not</a:t>
             </a:r>
           </a:p>
         </p:txBody>
@@ -8118,170 +8401,6 @@
           </a:p>
         </p:txBody>
       </p:sp>
-      <p:pic>
-        <p:nvPicPr>
-          <p:cNvPr id="5" name="Picture 4" descr="architecture.png"/>
-          <p:cNvPicPr>
-            <a:picLocks noChangeAspect="1"/>
-          </p:cNvPicPr>
-          <p:nvPr/>
-        </p:nvPicPr>
-        <p:blipFill>
-          <a:blip r:embed="rId2"/>
-          <a:stretch>
-            <a:fillRect/>
-          </a:stretch>
-        </p:blipFill>
-        <p:spPr>
-          <a:xfrm>
-            <a:off x="2903513" y="1828800"/>
-            <a:ext cx="6384669" cy="4297680"/>
-          </a:xfrm>
-          <a:prstGeom prst="rect">
-            <a:avLst/>
-          </a:prstGeom>
-        </p:spPr>
-      </p:pic>
-    </p:spTree>
-  </p:cSld>
-  <p:clrMapOvr>
-    <a:masterClrMapping/>
-  </p:clrMapOvr>
-</p:sld>
-</file>
-
-<file path=ppt/slides/slide6.xml><?xml version="1.0" encoding="utf-8"?>
-<p:sld xmlns:a="http://schemas.openxmlformats.org/drawingml/2006/main" xmlns:p="http://schemas.openxmlformats.org/presentationml/2006/main" xmlns:r="http://schemas.openxmlformats.org/officeDocument/2006/relationships">
-  <p:cSld>
-    <p:spTree>
-      <p:nvGrpSpPr>
-        <p:cNvPr id="1" name=""/>
-        <p:cNvGrpSpPr/>
-        <p:nvPr/>
-      </p:nvGrpSpPr>
-      <p:grpSpPr/>
-      <p:sp>
-        <p:nvSpPr>
-          <p:cNvPr id="2" name="TextBox 1"/>
-          <p:cNvSpPr txBox="1"/>
-          <p:nvPr/>
-        </p:nvSpPr>
-        <p:spPr>
-          <a:xfrm>
-            <a:off x="822960" y="457200"/>
-            <a:ext cx="10515600" cy="365760"/>
-          </a:xfrm>
-          <a:prstGeom prst="rect">
-            <a:avLst/>
-          </a:prstGeom>
-          <a:noFill/>
-        </p:spPr>
-        <p:txBody>
-          <a:bodyPr wrap="square" anchor="t">
-            <a:spAutoFit/>
-          </a:bodyPr>
-          <a:lstStyle/>
-          <a:p>
-            <a:pPr algn="l">
-              <a:lnSpc>
-                <a:spcPct val="100000"/>
-              </a:lnSpc>
-            </a:pPr>
-            <a:r>
-              <a:rPr sz="1200" b="1">
-                <a:solidFill>
-                  <a:srgbClr val="4338CA"/>
-                </a:solidFill>
-                <a:latin typeface="Calibri"/>
-              </a:rPr>
-              <a:t>THE AGENTS</a:t>
-            </a:r>
-          </a:p>
-        </p:txBody>
-      </p:sp>
-      <p:sp>
-        <p:nvSpPr>
-          <p:cNvPr id="3" name="TextBox 2"/>
-          <p:cNvSpPr txBox="1"/>
-          <p:nvPr/>
-        </p:nvSpPr>
-        <p:spPr>
-          <a:xfrm>
-            <a:off x="822960" y="777240"/>
-            <a:ext cx="10515600" cy="822960"/>
-          </a:xfrm>
-          <a:prstGeom prst="rect">
-            <a:avLst/>
-          </a:prstGeom>
-          <a:noFill/>
-        </p:spPr>
-        <p:txBody>
-          <a:bodyPr wrap="square" anchor="t">
-            <a:spAutoFit/>
-          </a:bodyPr>
-          <a:lstStyle/>
-          <a:p>
-            <a:pPr algn="l">
-              <a:lnSpc>
-                <a:spcPct val="100000"/>
-              </a:lnSpc>
-            </a:pPr>
-            <a:r>
-              <a:rPr sz="3200" b="1">
-                <a:solidFill>
-                  <a:srgbClr val="161A23"/>
-                </a:solidFill>
-                <a:latin typeface="Calibri"/>
-              </a:rPr>
-              <a:t>Three use the model. Four steps do not</a:t>
-            </a:r>
-          </a:p>
-        </p:txBody>
-      </p:sp>
-      <p:sp>
-        <p:nvSpPr>
-          <p:cNvPr id="4" name="Rectangle 3"/>
-          <p:cNvSpPr/>
-          <p:nvPr/>
-        </p:nvSpPr>
-        <p:spPr>
-          <a:xfrm>
-            <a:off x="822960" y="1572768"/>
-            <a:ext cx="1005840" cy="34000"/>
-          </a:xfrm>
-          <a:prstGeom prst="rect">
-            <a:avLst/>
-          </a:prstGeom>
-          <a:solidFill>
-            <a:srgbClr val="4338CA"/>
-          </a:solidFill>
-          <a:ln>
-            <a:noFill/>
-          </a:ln>
-          <a:effectLst/>
-        </p:spPr>
-        <p:style>
-          <a:lnRef idx="1">
-            <a:schemeClr val="accent1"/>
-          </a:lnRef>
-          <a:fillRef idx="3">
-            <a:schemeClr val="accent1"/>
-          </a:fillRef>
-          <a:effectRef idx="2">
-            <a:schemeClr val="accent1"/>
-          </a:effectRef>
-          <a:fontRef idx="minor">
-            <a:schemeClr val="lt1"/>
-          </a:fontRef>
-        </p:style>
-        <p:txBody>
-          <a:bodyPr rtlCol="0" anchor="ctr"/>
-          <a:lstStyle/>
-          <a:p>
-            <a:pPr algn="ctr"/>
-          </a:p>
-        </p:txBody>
-      </p:sp>
       <p:graphicFrame>
         <p:nvGraphicFramePr>
           <p:cNvPr id="5" name="Table 4"/>
@@ -8292,7 +8411,7 @@
         </p:nvGraphicFramePr>
         <p:xfrm>
           <a:off x="822960" y="2011680"/>
-          <a:ext cx="10515598" cy="1828800"/>
+          <a:ext cx="10515599" cy="1828800"/>
         </p:xfrm>
         <a:graphic>
           <a:graphicData uri="http://schemas.openxmlformats.org/drawingml/2006/table">
@@ -8303,8 +8422,8 @@
               <a:tblGrid>
                 <a:gridCol w="491383"/>
                 <a:gridCol w="3341405"/>
-                <a:gridCol w="884489"/>
-                <a:gridCol w="5798321"/>
+                <a:gridCol w="786213"/>
+                <a:gridCol w="5896598"/>
               </a:tblGrid>
               <a:tr h="365760">
                 <a:tc>
@@ -8341,7 +8460,7 @@
                           </a:solidFill>
                           <a:latin typeface="Calibri"/>
                         </a:rPr>
-                        <a:t>Who</a:t>
+                        <a:t>Who does it</a:t>
                       </a:r>
                     </a:p>
                   </a:txBody>
@@ -8363,7 +8482,7 @@
                           </a:solidFill>
                           <a:latin typeface="Calibri"/>
                         </a:rPr>
-                        <a:t>Model?</a:t>
+                        <a:t>AI?</a:t>
                       </a:r>
                     </a:p>
                   </a:txBody>
@@ -8431,7 +8550,7 @@
                           </a:solidFill>
                           <a:latin typeface="Calibri"/>
                         </a:rPr>
-                        <a:t>Conversational agent</a:t>
+                        <a:t>Conversation agent</a:t>
                       </a:r>
                     </a:p>
                   </a:txBody>
@@ -8453,7 +8572,7 @@
                           </a:solidFill>
                           <a:latin typeface="Calibri"/>
                         </a:rPr>
-                        <a:t>yes</a:t>
+                        <a:t>YES</a:t>
                       </a:r>
                     </a:p>
                   </a:txBody>
@@ -8475,7 +8594,7 @@
                           </a:solidFill>
                           <a:latin typeface="Calibri"/>
                         </a:rPr>
-                        <a:t>Reads a request written however a person writes it</a:t>
+                        <a:t>People write requests in a thousand different ways</a:t>
                       </a:r>
                     </a:p>
                   </a:txBody>
@@ -8521,7 +8640,7 @@
                           </a:solidFill>
                           <a:latin typeface="Calibri"/>
                         </a:rPr>
-                        <a:t>Preferences extractor</a:t>
+                        <a:t>Preferences agent</a:t>
                       </a:r>
                     </a:p>
                   </a:txBody>
@@ -8543,7 +8662,7 @@
                           </a:solidFill>
                           <a:latin typeface="Calibri"/>
                         </a:rPr>
-                        <a:t>yes</a:t>
+                        <a:t>YES</a:t>
                       </a:r>
                     </a:p>
                   </a:txBody>
@@ -8565,7 +8684,7 @@
                           </a:solidFill>
                           <a:latin typeface="Calibri"/>
                         </a:rPr>
-                        <a:t>Free text to typed fields, then the budget is checked</a:t>
+                        <a:t>Turns that writing into exact fields, then checks the budget</a:t>
                       </a:r>
                     </a:p>
                   </a:txBody>
@@ -8611,7 +8730,7 @@
                           </a:solidFill>
                           <a:latin typeface="Calibri"/>
                         </a:rPr>
-                        <a:t>Flights · hotels · attractions · restaurants</a:t>
+                        <a:t>Flights, hotels, attractions, restaurants</a:t>
                       </a:r>
                     </a:p>
                   </a:txBody>
@@ -8655,7 +8774,7 @@
                           </a:solidFill>
                           <a:latin typeface="Calibri"/>
                         </a:rPr>
-                        <a:t>One correct call each. An if statement decides, not a model</a:t>
+                        <a:t>One correct request each. An IF statement decides, not AI</a:t>
                       </a:r>
                     </a:p>
                   </a:txBody>
@@ -8701,7 +8820,7 @@
                           </a:solidFill>
                           <a:latin typeface="Calibri"/>
                         </a:rPr>
-                        <a:t>Itinerary coordinator</a:t>
+                        <a:t>Itinerary agent</a:t>
                       </a:r>
                     </a:p>
                   </a:txBody>
@@ -8723,7 +8842,7 @@
                           </a:solidFill>
                           <a:latin typeface="Calibri"/>
                         </a:rPr>
-                        <a:t>yes</a:t>
+                        <a:t>YES</a:t>
                       </a:r>
                     </a:p>
                   </a:txBody>
@@ -8745,7 +8864,7 @@
                           </a:solidFill>
                           <a:latin typeface="Calibri"/>
                         </a:rPr>
-                        <a:t>Arranges retrieved options into a sensible day-by-day plan</a:t>
+                        <a:t>Deciding what to do on which day needs judgement</a:t>
                       </a:r>
                     </a:p>
                   </a:txBody>
@@ -8768,7 +8887,7 @@
         </p:nvSpPr>
         <p:spPr>
           <a:xfrm>
-            <a:off x="822960" y="5029200"/>
+            <a:off x="822960" y="5120640"/>
             <a:ext cx="10515600" cy="1005840"/>
           </a:xfrm>
           <a:prstGeom prst="rect">
@@ -8788,13 +8907,13 @@
               </a:lnSpc>
             </a:pPr>
             <a:r>
-              <a:rPr sz="1800" b="1">
+              <a:rPr sz="2000" b="1">
                 <a:solidFill>
                   <a:srgbClr val="161A23"/>
                 </a:solidFill>
                 <a:latin typeface="Calibri"/>
               </a:rPr>
-              <a:t>The test applied to every step: does this need a judgement that cannot be written as code?</a:t>
+              <a:t>The test for every step: could I write this as ordinary code?</a:t>
             </a:r>
           </a:p>
           <a:p>
@@ -8804,13 +8923,670 @@
               </a:lnSpc>
             </a:pPr>
             <a:r>
-              <a:rPr sz="1600" b="0">
+              <a:rPr sz="1700" b="0">
                 <a:solidFill>
                   <a:srgbClr val="545C6E"/>
                 </a:solidFill>
                 <a:latin typeface="Calibri"/>
               </a:rPr>
-              <a:t>Two steps do. Four do not. That is the whole design.</a:t>
+              <a:t>If yes, no AI. Two steps out of six need thinking. That is the whole design.</a:t>
+            </a:r>
+          </a:p>
+        </p:txBody>
+      </p:sp>
+    </p:spTree>
+  </p:cSld>
+  <p:clrMapOvr>
+    <a:masterClrMapping/>
+  </p:clrMapOvr>
+</p:sld>
+</file>
+
+<file path=ppt/slides/slide6.xml><?xml version="1.0" encoding="utf-8"?>
+<p:sld xmlns:a="http://schemas.openxmlformats.org/drawingml/2006/main" xmlns:p="http://schemas.openxmlformats.org/presentationml/2006/main" xmlns:r="http://schemas.openxmlformats.org/officeDocument/2006/relationships">
+  <p:cSld>
+    <p:spTree>
+      <p:nvGrpSpPr>
+        <p:cNvPr id="1" name=""/>
+        <p:cNvGrpSpPr/>
+        <p:nvPr/>
+      </p:nvGrpSpPr>
+      <p:grpSpPr/>
+      <p:sp>
+        <p:nvSpPr>
+          <p:cNvPr id="2" name="TextBox 1"/>
+          <p:cNvSpPr txBox="1"/>
+          <p:nvPr/>
+        </p:nvSpPr>
+        <p:spPr>
+          <a:xfrm>
+            <a:off x="822960" y="457200"/>
+            <a:ext cx="10515600" cy="365760"/>
+          </a:xfrm>
+          <a:prstGeom prst="rect">
+            <a:avLst/>
+          </a:prstGeom>
+          <a:noFill/>
+        </p:spPr>
+        <p:txBody>
+          <a:bodyPr wrap="square" anchor="t">
+            <a:spAutoFit/>
+          </a:bodyPr>
+          <a:lstStyle/>
+          <a:p>
+            <a:pPr algn="l">
+              <a:lnSpc>
+                <a:spcPct val="100000"/>
+              </a:lnSpc>
+            </a:pPr>
+            <a:r>
+              <a:rPr sz="1200" b="1">
+                <a:solidFill>
+                  <a:srgbClr val="4338CA"/>
+                </a:solidFill>
+                <a:latin typeface="Calibri"/>
+              </a:rPr>
+              <a:t>THE FOUR VERSIONS</a:t>
+            </a:r>
+          </a:p>
+        </p:txBody>
+      </p:sp>
+      <p:sp>
+        <p:nvSpPr>
+          <p:cNvPr id="3" name="TextBox 2"/>
+          <p:cNvSpPr txBox="1"/>
+          <p:nvPr/>
+        </p:nvSpPr>
+        <p:spPr>
+          <a:xfrm>
+            <a:off x="822960" y="777240"/>
+            <a:ext cx="10515600" cy="822960"/>
+          </a:xfrm>
+          <a:prstGeom prst="rect">
+            <a:avLst/>
+          </a:prstGeom>
+          <a:noFill/>
+        </p:spPr>
+        <p:txBody>
+          <a:bodyPr wrap="square" anchor="t">
+            <a:spAutoFit/>
+          </a:bodyPr>
+          <a:lstStyle/>
+          <a:p>
+            <a:pPr algn="l">
+              <a:lnSpc>
+                <a:spcPct val="100000"/>
+              </a:lnSpc>
+            </a:pPr>
+            <a:r>
+              <a:rPr sz="3200" b="1">
+                <a:solidFill>
+                  <a:srgbClr val="161A23"/>
+                </a:solidFill>
+                <a:latin typeface="Calibri"/>
+              </a:rPr>
+              <a:t>Only one thing changes: who fetches the data</a:t>
+            </a:r>
+          </a:p>
+        </p:txBody>
+      </p:sp>
+      <p:sp>
+        <p:nvSpPr>
+          <p:cNvPr id="4" name="Rectangle 3"/>
+          <p:cNvSpPr/>
+          <p:nvPr/>
+        </p:nvSpPr>
+        <p:spPr>
+          <a:xfrm>
+            <a:off x="822960" y="1572768"/>
+            <a:ext cx="1005840" cy="34000"/>
+          </a:xfrm>
+          <a:prstGeom prst="rect">
+            <a:avLst/>
+          </a:prstGeom>
+          <a:solidFill>
+            <a:srgbClr val="4338CA"/>
+          </a:solidFill>
+          <a:ln>
+            <a:noFill/>
+          </a:ln>
+          <a:effectLst/>
+        </p:spPr>
+        <p:style>
+          <a:lnRef idx="1">
+            <a:schemeClr val="accent1"/>
+          </a:lnRef>
+          <a:fillRef idx="3">
+            <a:schemeClr val="accent1"/>
+          </a:fillRef>
+          <a:effectRef idx="2">
+            <a:schemeClr val="accent1"/>
+          </a:effectRef>
+          <a:fontRef idx="minor">
+            <a:schemeClr val="lt1"/>
+          </a:fontRef>
+        </p:style>
+        <p:txBody>
+          <a:bodyPr rtlCol="0" anchor="ctr"/>
+          <a:lstStyle/>
+          <a:p>
+            <a:pPr algn="ctr"/>
+          </a:p>
+        </p:txBody>
+      </p:sp>
+      <p:graphicFrame>
+        <p:nvGraphicFramePr>
+          <p:cNvPr id="5" name="Table 4"/>
+          <p:cNvGraphicFramePr>
+            <a:graphicFrameLocks noGrp="1"/>
+          </p:cNvGraphicFramePr>
+          <p:nvPr/>
+        </p:nvGraphicFramePr>
+        <p:xfrm>
+          <a:off x="822960" y="2011680"/>
+          <a:ext cx="10515598" cy="1828800"/>
+        </p:xfrm>
+        <a:graphic>
+          <a:graphicData uri="http://schemas.openxmlformats.org/drawingml/2006/table">
+            <a:tbl>
+              <a:tblPr firstRow="1" bandRow="1">
+                <a:tableStyleId>{5C22544A-7EE6-4342-B048-85BDC9FD1C3A}</a:tableStyleId>
+              </a:tblPr>
+              <a:tblGrid>
+                <a:gridCol w="491383"/>
+                <a:gridCol w="3144852"/>
+                <a:gridCol w="1965532"/>
+                <a:gridCol w="4913831"/>
+              </a:tblGrid>
+              <a:tr h="365760">
+                <a:tc>
+                  <a:txBody>
+                    <a:bodyPr/>
+                    <a:lstStyle/>
+                    <a:p>
+                      <a:r>
+                        <a:rPr sz="1300" b="1">
+                          <a:solidFill>
+                            <a:srgbClr val="FFFFFF"/>
+                          </a:solidFill>
+                          <a:latin typeface="Calibri"/>
+                        </a:rPr>
+                        <a:t> </a:t>
+                      </a:r>
+                    </a:p>
+                  </a:txBody>
+                  <a:tcPr>
+                    <a:solidFill>
+                      <a:srgbClr val="4338CA"/>
+                    </a:solidFill>
+                  </a:tcPr>
+                </a:tc>
+                <a:tc>
+                  <a:txBody>
+                    <a:bodyPr/>
+                    <a:lstStyle/>
+                    <a:p>
+                      <a:r>
+                        <a:rPr sz="1300" b="1">
+                          <a:solidFill>
+                            <a:srgbClr val="FFFFFF"/>
+                          </a:solidFill>
+                          <a:latin typeface="Calibri"/>
+                        </a:rPr>
+                        <a:t>How it works</a:t>
+                      </a:r>
+                    </a:p>
+                  </a:txBody>
+                  <a:tcPr>
+                    <a:solidFill>
+                      <a:srgbClr val="4338CA"/>
+                    </a:solidFill>
+                  </a:tcPr>
+                </a:tc>
+                <a:tc>
+                  <a:txBody>
+                    <a:bodyPr/>
+                    <a:lstStyle/>
+                    <a:p>
+                      <a:r>
+                        <a:rPr sz="1300" b="1">
+                          <a:solidFill>
+                            <a:srgbClr val="FFFFFF"/>
+                          </a:solidFill>
+                          <a:latin typeface="Calibri"/>
+                        </a:rPr>
+                        <a:t>Who fetches</a:t>
+                      </a:r>
+                    </a:p>
+                  </a:txBody>
+                  <a:tcPr>
+                    <a:solidFill>
+                      <a:srgbClr val="4338CA"/>
+                    </a:solidFill>
+                  </a:tcPr>
+                </a:tc>
+                <a:tc>
+                  <a:txBody>
+                    <a:bodyPr/>
+                    <a:lstStyle/>
+                    <a:p>
+                      <a:r>
+                        <a:rPr sz="1300" b="1">
+                          <a:solidFill>
+                            <a:srgbClr val="FFFFFF"/>
+                          </a:solidFill>
+                          <a:latin typeface="Calibri"/>
+                        </a:rPr>
+                        <a:t>Why I built it</a:t>
+                      </a:r>
+                    </a:p>
+                  </a:txBody>
+                  <a:tcPr>
+                    <a:solidFill>
+                      <a:srgbClr val="4338CA"/>
+                    </a:solidFill>
+                  </a:tcPr>
+                </a:tc>
+              </a:tr>
+              <a:tr h="365760">
+                <a:tc>
+                  <a:txBody>
+                    <a:bodyPr/>
+                    <a:lstStyle/>
+                    <a:p>
+                      <a:r>
+                        <a:rPr sz="1300" b="0">
+                          <a:solidFill>
+                            <a:srgbClr val="161A23"/>
+                          </a:solidFill>
+                          <a:latin typeface="Calibri"/>
+                        </a:rPr>
+                        <a:t>A</a:t>
+                      </a:r>
+                    </a:p>
+                  </a:txBody>
+                  <a:tcPr>
+                    <a:solidFill>
+                      <a:srgbClr val="FFFFFF"/>
+                    </a:solidFill>
+                  </a:tcPr>
+                </a:tc>
+                <a:tc>
+                  <a:txBody>
+                    <a:bodyPr/>
+                    <a:lstStyle/>
+                    <a:p>
+                      <a:r>
+                        <a:rPr sz="1300" b="0">
+                          <a:solidFill>
+                            <a:srgbClr val="161A23"/>
+                          </a:solidFill>
+                          <a:latin typeface="Calibri"/>
+                        </a:rPr>
+                        <a:t>One AI call, no tools</a:t>
+                      </a:r>
+                    </a:p>
+                  </a:txBody>
+                  <a:tcPr>
+                    <a:solidFill>
+                      <a:srgbClr val="FFFFFF"/>
+                    </a:solidFill>
+                  </a:tcPr>
+                </a:tc>
+                <a:tc>
+                  <a:txBody>
+                    <a:bodyPr/>
+                    <a:lstStyle/>
+                    <a:p>
+                      <a:r>
+                        <a:rPr sz="1300" b="0">
+                          <a:solidFill>
+                            <a:srgbClr val="161A23"/>
+                          </a:solidFill>
+                          <a:latin typeface="Calibri"/>
+                        </a:rPr>
+                        <a:t>nobody</a:t>
+                      </a:r>
+                    </a:p>
+                  </a:txBody>
+                  <a:tcPr>
+                    <a:solidFill>
+                      <a:srgbClr val="FFFFFF"/>
+                    </a:solidFill>
+                  </a:tcPr>
+                </a:tc>
+                <a:tc>
+                  <a:txBody>
+                    <a:bodyPr/>
+                    <a:lstStyle/>
+                    <a:p>
+                      <a:r>
+                        <a:rPr sz="1300" b="0">
+                          <a:solidFill>
+                            <a:srgbClr val="161A23"/>
+                          </a:solidFill>
+                          <a:latin typeface="Calibri"/>
+                        </a:rPr>
+                        <a:t>The floor. Shows what AI alone produces with no real data</a:t>
+                      </a:r>
+                    </a:p>
+                  </a:txBody>
+                  <a:tcPr>
+                    <a:solidFill>
+                      <a:srgbClr val="FFFFFF"/>
+                    </a:solidFill>
+                  </a:tcPr>
+                </a:tc>
+              </a:tr>
+              <a:tr h="365760">
+                <a:tc>
+                  <a:txBody>
+                    <a:bodyPr/>
+                    <a:lstStyle/>
+                    <a:p>
+                      <a:r>
+                        <a:rPr sz="1300" b="0">
+                          <a:solidFill>
+                            <a:srgbClr val="161A23"/>
+                          </a:solidFill>
+                          <a:latin typeface="Calibri"/>
+                        </a:rPr>
+                        <a:t>B</a:t>
+                      </a:r>
+                    </a:p>
+                  </a:txBody>
+                  <a:tcPr>
+                    <a:solidFill>
+                      <a:srgbClr val="F7F8FC"/>
+                    </a:solidFill>
+                  </a:tcPr>
+                </a:tc>
+                <a:tc>
+                  <a:txBody>
+                    <a:bodyPr/>
+                    <a:lstStyle/>
+                    <a:p>
+                      <a:r>
+                        <a:rPr sz="1300" b="0">
+                          <a:solidFill>
+                            <a:srgbClr val="161A23"/>
+                          </a:solidFill>
+                          <a:latin typeface="Calibri"/>
+                        </a:rPr>
+                        <a:t>Six agents, first attempt</a:t>
+                      </a:r>
+                    </a:p>
+                  </a:txBody>
+                  <a:tcPr>
+                    <a:solidFill>
+                      <a:srgbClr val="F7F8FC"/>
+                    </a:solidFill>
+                  </a:tcPr>
+                </a:tc>
+                <a:tc>
+                  <a:txBody>
+                    <a:bodyPr/>
+                    <a:lstStyle/>
+                    <a:p>
+                      <a:r>
+                        <a:rPr sz="1300" b="0">
+                          <a:solidFill>
+                            <a:srgbClr val="161A23"/>
+                          </a:solidFill>
+                          <a:latin typeface="Calibri"/>
+                        </a:rPr>
+                        <a:t>each agent decides</a:t>
+                      </a:r>
+                    </a:p>
+                  </a:txBody>
+                  <a:tcPr>
+                    <a:solidFill>
+                      <a:srgbClr val="F7F8FC"/>
+                    </a:solidFill>
+                  </a:tcPr>
+                </a:tc>
+                <a:tc>
+                  <a:txBody>
+                    <a:bodyPr/>
+                    <a:lstStyle/>
+                    <a:p>
+                      <a:r>
+                        <a:rPr sz="1300" b="0">
+                          <a:solidFill>
+                            <a:srgbClr val="161A23"/>
+                          </a:solidFill>
+                          <a:latin typeface="Calibri"/>
+                        </a:rPr>
+                        <a:t>My original proposal, untuned. The honest starting point</a:t>
+                      </a:r>
+                    </a:p>
+                  </a:txBody>
+                  <a:tcPr>
+                    <a:solidFill>
+                      <a:srgbClr val="F7F8FC"/>
+                    </a:solidFill>
+                  </a:tcPr>
+                </a:tc>
+              </a:tr>
+              <a:tr h="365760">
+                <a:tc>
+                  <a:txBody>
+                    <a:bodyPr/>
+                    <a:lstStyle/>
+                    <a:p>
+                      <a:r>
+                        <a:rPr sz="1300" b="0">
+                          <a:solidFill>
+                            <a:srgbClr val="161A23"/>
+                          </a:solidFill>
+                          <a:latin typeface="Calibri"/>
+                        </a:rPr>
+                        <a:t>C</a:t>
+                      </a:r>
+                    </a:p>
+                  </a:txBody>
+                  <a:tcPr>
+                    <a:solidFill>
+                      <a:srgbClr val="FFFFFF"/>
+                    </a:solidFill>
+                  </a:tcPr>
+                </a:tc>
+                <a:tc>
+                  <a:txBody>
+                    <a:bodyPr/>
+                    <a:lstStyle/>
+                    <a:p>
+                      <a:r>
+                        <a:rPr sz="1300" b="0">
+                          <a:solidFill>
+                            <a:srgbClr val="161A23"/>
+                          </a:solidFill>
+                          <a:latin typeface="Calibri"/>
+                        </a:rPr>
+                        <a:t>Same six agents, tuned properly</a:t>
+                      </a:r>
+                    </a:p>
+                  </a:txBody>
+                  <a:tcPr>
+                    <a:solidFill>
+                      <a:srgbClr val="FFFFFF"/>
+                    </a:solidFill>
+                  </a:tcPr>
+                </a:tc>
+                <a:tc>
+                  <a:txBody>
+                    <a:bodyPr/>
+                    <a:lstStyle/>
+                    <a:p>
+                      <a:r>
+                        <a:rPr sz="1300" b="0">
+                          <a:solidFill>
+                            <a:srgbClr val="161A23"/>
+                          </a:solidFill>
+                          <a:latin typeface="Calibri"/>
+                        </a:rPr>
+                        <a:t>each agent decides</a:t>
+                      </a:r>
+                    </a:p>
+                  </a:txBody>
+                  <a:tcPr>
+                    <a:solidFill>
+                      <a:srgbClr val="FFFFFF"/>
+                    </a:solidFill>
+                  </a:tcPr>
+                </a:tc>
+                <a:tc>
+                  <a:txBody>
+                    <a:bodyPr/>
+                    <a:lstStyle/>
+                    <a:p>
+                      <a:r>
+                        <a:rPr sz="1300" b="0">
+                          <a:solidFill>
+                            <a:srgbClr val="161A23"/>
+                          </a:solidFill>
+                          <a:latin typeface="Calibri"/>
+                        </a:rPr>
+                        <a:t>Proves the gain is the design, not just better settings</a:t>
+                      </a:r>
+                    </a:p>
+                  </a:txBody>
+                  <a:tcPr>
+                    <a:solidFill>
+                      <a:srgbClr val="FFFFFF"/>
+                    </a:solidFill>
+                  </a:tcPr>
+                </a:tc>
+              </a:tr>
+              <a:tr h="365760">
+                <a:tc>
+                  <a:txBody>
+                    <a:bodyPr/>
+                    <a:lstStyle/>
+                    <a:p>
+                      <a:r>
+                        <a:rPr sz="1300" b="0">
+                          <a:solidFill>
+                            <a:srgbClr val="161A23"/>
+                          </a:solidFill>
+                          <a:latin typeface="Calibri"/>
+                        </a:rPr>
+                        <a:t>D</a:t>
+                      </a:r>
+                    </a:p>
+                  </a:txBody>
+                  <a:tcPr>
+                    <a:solidFill>
+                      <a:srgbClr val="F7F8FC"/>
+                    </a:solidFill>
+                  </a:tcPr>
+                </a:tc>
+                <a:tc>
+                  <a:txBody>
+                    <a:bodyPr/>
+                    <a:lstStyle/>
+                    <a:p>
+                      <a:r>
+                        <a:rPr sz="1300" b="0">
+                          <a:solidFill>
+                            <a:srgbClr val="161A23"/>
+                          </a:solidFill>
+                          <a:latin typeface="Calibri"/>
+                        </a:rPr>
+                        <a:t>Three agents, normal code fetches</a:t>
+                      </a:r>
+                    </a:p>
+                  </a:txBody>
+                  <a:tcPr>
+                    <a:solidFill>
+                      <a:srgbClr val="F7F8FC"/>
+                    </a:solidFill>
+                  </a:tcPr>
+                </a:tc>
+                <a:tc>
+                  <a:txBody>
+                    <a:bodyPr/>
+                    <a:lstStyle/>
+                    <a:p>
+                      <a:r>
+                        <a:rPr sz="1300" b="0">
+                          <a:solidFill>
+                            <a:srgbClr val="161A23"/>
+                          </a:solidFill>
+                          <a:latin typeface="Calibri"/>
+                        </a:rPr>
+                        <a:t>normal code</a:t>
+                      </a:r>
+                    </a:p>
+                  </a:txBody>
+                  <a:tcPr>
+                    <a:solidFill>
+                      <a:srgbClr val="F7F8FC"/>
+                    </a:solidFill>
+                  </a:tcPr>
+                </a:tc>
+                <a:tc>
+                  <a:txBody>
+                    <a:bodyPr/>
+                    <a:lstStyle/>
+                    <a:p>
+                      <a:r>
+                        <a:rPr sz="1300" b="0">
+                          <a:solidFill>
+                            <a:srgbClr val="161A23"/>
+                          </a:solidFill>
+                          <a:latin typeface="Calibri"/>
+                        </a:rPr>
+                        <a:t>What I ship. This is the idea being tested</a:t>
+                      </a:r>
+                    </a:p>
+                  </a:txBody>
+                  <a:tcPr>
+                    <a:solidFill>
+                      <a:srgbClr val="F7F8FC"/>
+                    </a:solidFill>
+                  </a:tcPr>
+                </a:tc>
+              </a:tr>
+            </a:tbl>
+          </a:graphicData>
+        </a:graphic>
+      </p:graphicFrame>
+      <p:sp>
+        <p:nvSpPr>
+          <p:cNvPr id="6" name="TextBox 5"/>
+          <p:cNvSpPr txBox="1"/>
+          <p:nvPr/>
+        </p:nvSpPr>
+        <p:spPr>
+          <a:xfrm>
+            <a:off x="822960" y="5120640"/>
+            <a:ext cx="10515600" cy="914400"/>
+          </a:xfrm>
+          <a:prstGeom prst="rect">
+            <a:avLst/>
+          </a:prstGeom>
+          <a:noFill/>
+        </p:spPr>
+        <p:txBody>
+          <a:bodyPr wrap="square" anchor="t">
+            <a:spAutoFit/>
+          </a:bodyPr>
+          <a:lstStyle/>
+          <a:p>
+            <a:pPr algn="l">
+              <a:lnSpc>
+                <a:spcPct val="100000"/>
+              </a:lnSpc>
+            </a:pPr>
+            <a:r>
+              <a:rPr sz="1800" b="1">
+                <a:solidFill>
+                  <a:srgbClr val="4338CA"/>
+                </a:solidFill>
+                <a:latin typeface="Calibri"/>
+              </a:rPr>
+              <a:t>C is the important one: without it, someone could say D only won because B was set up badly.</a:t>
             </a:r>
           </a:p>
         </p:txBody>
@@ -8867,7 +9643,7 @@
                 </a:solidFill>
                 <a:latin typeface="Calibri"/>
               </a:rPr>
-              <a:t>HOW IT WAS MEASURED</a:t>
+              <a:t>WHAT WENT WRONG IN EACH VERSION</a:t>
             </a:r>
           </a:p>
         </p:txBody>
@@ -8906,7 +9682,7 @@
                 </a:solidFill>
                 <a:latin typeface="Calibri"/>
               </a:rPr>
-              <a:t>Repeats, intervals, and no credentials</a:t>
+              <a:t>Measured, not guessed. This is why D exists</a:t>
             </a:r>
           </a:p>
         </p:txBody>
@@ -8955,16 +9731,272 @@
           </a:p>
         </p:txBody>
       </p:sp>
-      <p:sp>
-        <p:nvSpPr>
-          <p:cNvPr id="5" name="TextBox 4"/>
+      <p:graphicFrame>
+        <p:nvGraphicFramePr>
+          <p:cNvPr id="5" name="Table 4"/>
+          <p:cNvGraphicFramePr>
+            <a:graphicFrameLocks noGrp="1"/>
+          </p:cNvGraphicFramePr>
+          <p:nvPr/>
+        </p:nvGraphicFramePr>
+        <p:xfrm>
+          <a:off x="822960" y="2011680"/>
+          <a:ext cx="10515599" cy="1828800"/>
+        </p:xfrm>
+        <a:graphic>
+          <a:graphicData uri="http://schemas.openxmlformats.org/drawingml/2006/table">
+            <a:tbl>
+              <a:tblPr firstRow="1" bandRow="1">
+                <a:tableStyleId>{5C22544A-7EE6-4342-B048-85BDC9FD1C3A}</a:tableStyleId>
+              </a:tblPr>
+              <a:tblGrid>
+                <a:gridCol w="477981"/>
+                <a:gridCol w="10037618"/>
+              </a:tblGrid>
+              <a:tr h="365760">
+                <a:tc>
+                  <a:txBody>
+                    <a:bodyPr/>
+                    <a:lstStyle/>
+                    <a:p>
+                      <a:r>
+                        <a:rPr sz="1300" b="1">
+                          <a:solidFill>
+                            <a:srgbClr val="FFFFFF"/>
+                          </a:solidFill>
+                          <a:latin typeface="Calibri"/>
+                        </a:rPr>
+                        <a:t> </a:t>
+                      </a:r>
+                    </a:p>
+                  </a:txBody>
+                  <a:tcPr>
+                    <a:solidFill>
+                      <a:srgbClr val="4338CA"/>
+                    </a:solidFill>
+                  </a:tcPr>
+                </a:tc>
+                <a:tc>
+                  <a:txBody>
+                    <a:bodyPr/>
+                    <a:lstStyle/>
+                    <a:p>
+                      <a:r>
+                        <a:rPr sz="1300" b="1">
+                          <a:solidFill>
+                            <a:srgbClr val="FFFFFF"/>
+                          </a:solidFill>
+                          <a:latin typeface="Calibri"/>
+                        </a:rPr>
+                        <a:t>The problem I measured</a:t>
+                      </a:r>
+                    </a:p>
+                  </a:txBody>
+                  <a:tcPr>
+                    <a:solidFill>
+                      <a:srgbClr val="4338CA"/>
+                    </a:solidFill>
+                  </a:tcPr>
+                </a:tc>
+              </a:tr>
+              <a:tr h="365760">
+                <a:tc>
+                  <a:txBody>
+                    <a:bodyPr/>
+                    <a:lstStyle/>
+                    <a:p>
+                      <a:r>
+                        <a:rPr sz="1300" b="0">
+                          <a:solidFill>
+                            <a:srgbClr val="161A23"/>
+                          </a:solidFill>
+                          <a:latin typeface="Calibri"/>
+                        </a:rPr>
+                        <a:t>A</a:t>
+                      </a:r>
+                    </a:p>
+                  </a:txBody>
+                  <a:tcPr>
+                    <a:solidFill>
+                      <a:srgbClr val="FFFFFF"/>
+                    </a:solidFill>
+                  </a:tcPr>
+                </a:tc>
+                <a:tc>
+                  <a:txBody>
+                    <a:bodyPr/>
+                    <a:lstStyle/>
+                    <a:p>
+                      <a:r>
+                        <a:rPr sz="1300" b="0">
+                          <a:solidFill>
+                            <a:srgbClr val="161A23"/>
+                          </a:solidFill>
+                          <a:latin typeface="Calibri"/>
+                        </a:rPr>
+                        <a:t>No tools at all, so it invents everything. Only 1.7% of its prices matched a real fare</a:t>
+                      </a:r>
+                    </a:p>
+                  </a:txBody>
+                  <a:tcPr>
+                    <a:solidFill>
+                      <a:srgbClr val="FFFFFF"/>
+                    </a:solidFill>
+                  </a:tcPr>
+                </a:tc>
+              </a:tr>
+              <a:tr h="365760">
+                <a:tc>
+                  <a:txBody>
+                    <a:bodyPr/>
+                    <a:lstStyle/>
+                    <a:p>
+                      <a:r>
+                        <a:rPr sz="1300" b="0">
+                          <a:solidFill>
+                            <a:srgbClr val="161A23"/>
+                          </a:solidFill>
+                          <a:latin typeface="Calibri"/>
+                        </a:rPr>
+                        <a:t>B</a:t>
+                      </a:r>
+                    </a:p>
+                  </a:txBody>
+                  <a:tcPr>
+                    <a:solidFill>
+                      <a:srgbClr val="F7F8FC"/>
+                    </a:solidFill>
+                  </a:tcPr>
+                </a:tc>
+                <a:tc>
+                  <a:txBody>
+                    <a:bodyPr/>
+                    <a:lstStyle/>
+                    <a:p>
+                      <a:r>
+                        <a:rPr sz="1300" b="0">
+                          <a:solidFill>
+                            <a:srgbClr val="161A23"/>
+                          </a:solidFill>
+                          <a:latin typeface="Calibri"/>
+                        </a:rPr>
+                        <a:t>Skipped its own tools: never called the attractions or restaurant tool once. Twice produced broken output it had to redo</a:t>
+                      </a:r>
+                    </a:p>
+                  </a:txBody>
+                  <a:tcPr>
+                    <a:solidFill>
+                      <a:srgbClr val="F7F8FC"/>
+                    </a:solidFill>
+                  </a:tcPr>
+                </a:tc>
+              </a:tr>
+              <a:tr h="365760">
+                <a:tc>
+                  <a:txBody>
+                    <a:bodyPr/>
+                    <a:lstStyle/>
+                    <a:p>
+                      <a:r>
+                        <a:rPr sz="1300" b="0">
+                          <a:solidFill>
+                            <a:srgbClr val="161A23"/>
+                          </a:solidFill>
+                          <a:latin typeface="Calibri"/>
+                        </a:rPr>
+                        <a:t>C</a:t>
+                      </a:r>
+                    </a:p>
+                  </a:txBody>
+                  <a:tcPr>
+                    <a:solidFill>
+                      <a:srgbClr val="FFFFFF"/>
+                    </a:solidFill>
+                  </a:tcPr>
+                </a:tc>
+                <a:tc>
+                  <a:txBody>
+                    <a:bodyPr/>
+                    <a:lstStyle/>
+                    <a:p>
+                      <a:r>
+                        <a:rPr sz="1300" b="0">
+                          <a:solidFill>
+                            <a:srgbClr val="161A23"/>
+                          </a:solidFill>
+                          <a:latin typeface="Calibri"/>
+                        </a:rPr>
+                        <a:t>Better, but still unreliable: never called the flight tool at all on the recorded run</a:t>
+                      </a:r>
+                    </a:p>
+                  </a:txBody>
+                  <a:tcPr>
+                    <a:solidFill>
+                      <a:srgbClr val="FFFFFF"/>
+                    </a:solidFill>
+                  </a:tcPr>
+                </a:tc>
+              </a:tr>
+              <a:tr h="365760">
+                <a:tc>
+                  <a:txBody>
+                    <a:bodyPr/>
+                    <a:lstStyle/>
+                    <a:p>
+                      <a:r>
+                        <a:rPr sz="1300" b="0">
+                          <a:solidFill>
+                            <a:srgbClr val="161A23"/>
+                          </a:solidFill>
+                          <a:latin typeface="Calibri"/>
+                        </a:rPr>
+                        <a:t>D</a:t>
+                      </a:r>
+                    </a:p>
+                  </a:txBody>
+                  <a:tcPr>
+                    <a:solidFill>
+                      <a:srgbClr val="F7F8FC"/>
+                    </a:solidFill>
+                  </a:tcPr>
+                </a:tc>
+                <a:tc>
+                  <a:txBody>
+                    <a:bodyPr/>
+                    <a:lstStyle/>
+                    <a:p>
+                      <a:r>
+                        <a:rPr sz="1300" b="0">
+                          <a:solidFill>
+                            <a:srgbClr val="161A23"/>
+                          </a:solidFill>
+                          <a:latin typeface="Calibri"/>
+                        </a:rPr>
+                        <a:t>Always makes exactly the same 5 requests, because code decides, not AI. Nothing gets skipped</a:t>
+                      </a:r>
+                    </a:p>
+                  </a:txBody>
+                  <a:tcPr>
+                    <a:solidFill>
+                      <a:srgbClr val="F7F8FC"/>
+                    </a:solidFill>
+                  </a:tcPr>
+                </a:tc>
+              </a:tr>
+            </a:tbl>
+          </a:graphicData>
+        </a:graphic>
+      </p:graphicFrame>
+      <p:sp>
+        <p:nvSpPr>
+          <p:cNvPr id="6" name="TextBox 5"/>
           <p:cNvSpPr txBox="1"/>
           <p:nvPr/>
         </p:nvSpPr>
         <p:spPr>
           <a:xfrm>
-            <a:off x="822960" y="2103120"/>
-            <a:ext cx="2636443" cy="1188720"/>
+            <a:off x="822960" y="4937760"/>
+            <a:ext cx="10515600" cy="1188720"/>
           </a:xfrm>
           <a:prstGeom prst="rect">
             <a:avLst/>
@@ -8977,325 +10009,25 @@
           </a:bodyPr>
           <a:lstStyle/>
           <a:p>
-            <a:pPr algn="ctr">
+            <a:pPr algn="l">
               <a:lnSpc>
-                <a:spcPct val="100000"/>
+                <a:spcPct val="125000"/>
               </a:lnSpc>
             </a:pPr>
             <a:r>
-              <a:rPr sz="6000" b="1">
+              <a:rPr sz="2000" b="1">
                 <a:solidFill>
-                  <a:srgbClr val="4338CA"/>
+                  <a:srgbClr val="A85B00"/>
                 </a:solidFill>
                 <a:latin typeface="Calibri"/>
               </a:rPr>
-              <a:t>5</a:t>
-            </a:r>
-          </a:p>
-        </p:txBody>
-      </p:sp>
-      <p:sp>
-        <p:nvSpPr>
-          <p:cNvPr id="6" name="TextBox 5"/>
-          <p:cNvSpPr txBox="1"/>
-          <p:nvPr/>
-        </p:nvSpPr>
-        <p:spPr>
-          <a:xfrm>
-            <a:off x="822960" y="3246120"/>
-            <a:ext cx="2636443" cy="731520"/>
-          </a:xfrm>
-          <a:prstGeom prst="rect">
-            <a:avLst/>
-          </a:prstGeom>
-          <a:noFill/>
-        </p:spPr>
-        <p:txBody>
-          <a:bodyPr wrap="square" anchor="t">
-            <a:spAutoFit/>
-          </a:bodyPr>
-          <a:lstStyle/>
-          <a:p>
-            <a:pPr algn="ctr">
-              <a:lnSpc>
-                <a:spcPct val="100000"/>
-              </a:lnSpc>
-            </a:pPr>
-            <a:r>
-              <a:rPr sz="1400" b="0">
-                <a:solidFill>
-                  <a:srgbClr val="545C6E"/>
-                </a:solidFill>
-                <a:latin typeface="Calibri"/>
-              </a:rPr>
-              <a:t>runs per arm, so every
-figure has an interval</a:t>
-            </a:r>
-          </a:p>
-        </p:txBody>
-      </p:sp>
-      <p:sp>
-        <p:nvSpPr>
-          <p:cNvPr id="7" name="TextBox 6"/>
-          <p:cNvSpPr txBox="1"/>
-          <p:nvPr/>
-        </p:nvSpPr>
-        <p:spPr>
-          <a:xfrm>
-            <a:off x="3459403" y="2103120"/>
-            <a:ext cx="2636443" cy="1188720"/>
-          </a:xfrm>
-          <a:prstGeom prst="rect">
-            <a:avLst/>
-          </a:prstGeom>
-          <a:noFill/>
-        </p:spPr>
-        <p:txBody>
-          <a:bodyPr wrap="square" anchor="t">
-            <a:spAutoFit/>
-          </a:bodyPr>
-          <a:lstStyle/>
-          <a:p>
-            <a:pPr algn="ctr">
-              <a:lnSpc>
-                <a:spcPct val="100000"/>
-              </a:lnSpc>
-            </a:pPr>
-            <a:r>
-              <a:rPr sz="6000" b="1">
-                <a:solidFill>
-                  <a:srgbClr val="4338CA"/>
-                </a:solidFill>
-                <a:latin typeface="Calibri"/>
-              </a:rPr>
-              <a:t>1/20</a:t>
-            </a:r>
-          </a:p>
-        </p:txBody>
-      </p:sp>
-      <p:sp>
-        <p:nvSpPr>
-          <p:cNvPr id="8" name="TextBox 7"/>
-          <p:cNvSpPr txBox="1"/>
-          <p:nvPr/>
-        </p:nvSpPr>
-        <p:spPr>
-          <a:xfrm>
-            <a:off x="3459403" y="3246120"/>
-            <a:ext cx="2636443" cy="731520"/>
-          </a:xfrm>
-          <a:prstGeom prst="rect">
-            <a:avLst/>
-          </a:prstGeom>
-          <a:noFill/>
-        </p:spPr>
-        <p:txBody>
-          <a:bodyPr wrap="square" anchor="t">
-            <a:spAutoFit/>
-          </a:bodyPr>
-          <a:lstStyle/>
-          <a:p>
-            <a:pPr algn="ctr">
-              <a:lnSpc>
-                <a:spcPct val="100000"/>
-              </a:lnSpc>
-            </a:pPr>
-            <a:r>
-              <a:rPr sz="1400" b="0">
-                <a:solidFill>
-                  <a:srgbClr val="545C6E"/>
-                </a:solidFill>
-                <a:latin typeface="Calibri"/>
-              </a:rPr>
-              <a:t>scenarios for the cost
-comparison — quota-bound</a:t>
-            </a:r>
-          </a:p>
-        </p:txBody>
-      </p:sp>
-      <p:sp>
-        <p:nvSpPr>
-          <p:cNvPr id="9" name="TextBox 8"/>
-          <p:cNvSpPr txBox="1"/>
-          <p:nvPr/>
-        </p:nvSpPr>
-        <p:spPr>
-          <a:xfrm>
-            <a:off x="6095847" y="2103120"/>
-            <a:ext cx="2636443" cy="1188720"/>
-          </a:xfrm>
-          <a:prstGeom prst="rect">
-            <a:avLst/>
-          </a:prstGeom>
-          <a:noFill/>
-        </p:spPr>
-        <p:txBody>
-          <a:bodyPr wrap="square" anchor="t">
-            <a:spAutoFit/>
-          </a:bodyPr>
-          <a:lstStyle/>
-          <a:p>
-            <a:pPr algn="ctr">
-              <a:lnSpc>
-                <a:spcPct val="100000"/>
-              </a:lnSpc>
-            </a:pPr>
-            <a:r>
-              <a:rPr sz="6000" b="1">
-                <a:solidFill>
-                  <a:srgbClr val="4338CA"/>
-                </a:solidFill>
-                <a:latin typeface="Calibri"/>
-              </a:rPr>
-              <a:t>30</a:t>
-            </a:r>
-          </a:p>
-        </p:txBody>
-      </p:sp>
-      <p:sp>
-        <p:nvSpPr>
-          <p:cNvPr id="10" name="TextBox 9"/>
-          <p:cNvSpPr txBox="1"/>
-          <p:nvPr/>
-        </p:nvSpPr>
-        <p:spPr>
-          <a:xfrm>
-            <a:off x="6095847" y="3246120"/>
-            <a:ext cx="2636443" cy="731520"/>
-          </a:xfrm>
-          <a:prstGeom prst="rect">
-            <a:avLst/>
-          </a:prstGeom>
-          <a:noFill/>
-        </p:spPr>
-        <p:txBody>
-          <a:bodyPr wrap="square" anchor="t">
-            <a:spAutoFit/>
-          </a:bodyPr>
-          <a:lstStyle/>
-          <a:p>
-            <a:pPr algn="ctr">
-              <a:lnSpc>
-                <a:spcPct val="100000"/>
-              </a:lnSpc>
-            </a:pPr>
-            <a:r>
-              <a:rPr sz="1400" b="0">
-                <a:solidFill>
-                  <a:srgbClr val="545C6E"/>
-                </a:solidFill>
-                <a:latin typeface="Calibri"/>
-              </a:rPr>
-              <a:t>recorded API responses,
-committed and replayable</a:t>
-            </a:r>
-          </a:p>
-        </p:txBody>
-      </p:sp>
-      <p:sp>
-        <p:nvSpPr>
-          <p:cNvPr id="11" name="TextBox 10"/>
-          <p:cNvSpPr txBox="1"/>
-          <p:nvPr/>
-        </p:nvSpPr>
-        <p:spPr>
-          <a:xfrm>
-            <a:off x="8732291" y="2103120"/>
-            <a:ext cx="2636443" cy="1188720"/>
-          </a:xfrm>
-          <a:prstGeom prst="rect">
-            <a:avLst/>
-          </a:prstGeom>
-          <a:noFill/>
-        </p:spPr>
-        <p:txBody>
-          <a:bodyPr wrap="square" anchor="t">
-            <a:spAutoFit/>
-          </a:bodyPr>
-          <a:lstStyle/>
-          <a:p>
-            <a:pPr algn="ctr">
-              <a:lnSpc>
-                <a:spcPct val="100000"/>
-              </a:lnSpc>
-            </a:pPr>
-            <a:r>
-              <a:rPr sz="6000" b="1">
-                <a:solidFill>
-                  <a:srgbClr val="4338CA"/>
-                </a:solidFill>
-                <a:latin typeface="Calibri"/>
-              </a:rPr>
-              <a:t>403</a:t>
-            </a:r>
-          </a:p>
-        </p:txBody>
-      </p:sp>
-      <p:sp>
-        <p:nvSpPr>
-          <p:cNvPr id="12" name="TextBox 11"/>
-          <p:cNvSpPr txBox="1"/>
-          <p:nvPr/>
-        </p:nvSpPr>
-        <p:spPr>
-          <a:xfrm>
-            <a:off x="8732291" y="3246120"/>
-            <a:ext cx="2636443" cy="731520"/>
-          </a:xfrm>
-          <a:prstGeom prst="rect">
-            <a:avLst/>
-          </a:prstGeom>
-          <a:noFill/>
-        </p:spPr>
-        <p:txBody>
-          <a:bodyPr wrap="square" anchor="t">
-            <a:spAutoFit/>
-          </a:bodyPr>
-          <a:lstStyle/>
-          <a:p>
-            <a:pPr algn="ctr">
-              <a:lnSpc>
-                <a:spcPct val="100000"/>
-              </a:lnSpc>
-            </a:pPr>
-            <a:r>
-              <a:rPr sz="1400" b="0">
-                <a:solidFill>
-                  <a:srgbClr val="545C6E"/>
-                </a:solidFill>
-                <a:latin typeface="Calibri"/>
-              </a:rPr>
-              <a:t>tests, no keys
-and no network</a:t>
-            </a:r>
-          </a:p>
-        </p:txBody>
-      </p:sp>
-      <p:sp>
-        <p:nvSpPr>
-          <p:cNvPr id="13" name="TextBox 12"/>
-          <p:cNvSpPr txBox="1"/>
-          <p:nvPr/>
-        </p:nvSpPr>
-        <p:spPr>
-          <a:xfrm>
-            <a:off x="822960" y="4937760"/>
-            <a:ext cx="10515600" cy="1097280"/>
-          </a:xfrm>
-          <a:prstGeom prst="rect">
-            <a:avLst/>
-          </a:prstGeom>
-          <a:noFill/>
-        </p:spPr>
-        <p:txBody>
-          <a:bodyPr wrap="square" anchor="t">
-            <a:spAutoFit/>
-          </a:bodyPr>
-          <a:lstStyle/>
+              <a:t>The pattern: when AI decides which tools to call, it sometimes does not call them.</a:t>
+            </a:r>
+          </a:p>
           <a:p>
             <a:pPr algn="l">
               <a:lnSpc>
-                <a:spcPct val="130000"/>
+                <a:spcPct val="125000"/>
               </a:lnSpc>
             </a:pPr>
             <a:r>
@@ -9305,23 +10037,7 @@
                 </a:solidFill>
                 <a:latin typeface="Calibri"/>
               </a:rPr>
-              <a:t>Model requests counted from provider callbacks, never by hand.</a:t>
-            </a:r>
-          </a:p>
-          <a:p>
-            <a:pPr algn="l">
-              <a:lnSpc>
-                <a:spcPct val="130000"/>
-              </a:lnSpc>
-            </a:pPr>
-            <a:r>
-              <a:rPr sz="1700" b="0">
-                <a:solidFill>
-                  <a:srgbClr val="545C6E"/>
-                </a:solidFill>
-                <a:latin typeface="Calibri"/>
-              </a:rPr>
-              <a:t>Coverage is stated on every chart rather than smoothed over.</a:t>
+              <a:t>The plan still looks finished. That is what makes it dangerous.</a:t>
             </a:r>
           </a:p>
         </p:txBody>
@@ -9378,7 +10094,7 @@
                 </a:solidFill>
                 <a:latin typeface="Calibri"/>
               </a:rPr>
-              <a:t>RESULT · COST</a:t>
+              <a:t>HOW IT IS BUILT</a:t>
             </a:r>
           </a:p>
         </p:txBody>
@@ -9417,7 +10133,7 @@
                 </a:solidFill>
                 <a:latin typeface="Calibri"/>
               </a:rPr>
-              <a:t>The retrieval layer is where the money goes</a:t>
+              <a:t>Four layers. Only the third one changes</a:t>
             </a:r>
           </a:p>
         </p:txBody>
@@ -9468,7 +10184,7 @@
       </p:sp>
       <p:pic>
         <p:nvPicPr>
-          <p:cNvPr id="5" name="Picture 4" descr="efficiency.png"/>
+          <p:cNvPr id="5" name="Picture 4" descr="architecture.png"/>
           <p:cNvPicPr>
             <a:picLocks noChangeAspect="1"/>
           </p:cNvPicPr>
@@ -9482,53 +10198,14 @@
         </p:blipFill>
         <p:spPr>
           <a:xfrm>
-            <a:off x="2692927" y="1783080"/>
-            <a:ext cx="6805840" cy="4023360"/>
+            <a:off x="2903513" y="1828800"/>
+            <a:ext cx="6384669" cy="4297680"/>
           </a:xfrm>
           <a:prstGeom prst="rect">
             <a:avLst/>
           </a:prstGeom>
         </p:spPr>
       </p:pic>
-      <p:sp>
-        <p:nvSpPr>
-          <p:cNvPr id="6" name="TextBox 5"/>
-          <p:cNvSpPr txBox="1"/>
-          <p:nvPr/>
-        </p:nvSpPr>
-        <p:spPr>
-          <a:xfrm>
-            <a:off x="822960" y="5943600"/>
-            <a:ext cx="10515600" cy="548640"/>
-          </a:xfrm>
-          <a:prstGeom prst="rect">
-            <a:avLst/>
-          </a:prstGeom>
-          <a:noFill/>
-        </p:spPr>
-        <p:txBody>
-          <a:bodyPr wrap="square" anchor="t">
-            <a:spAutoFit/>
-          </a:bodyPr>
-          <a:lstStyle/>
-          <a:p>
-            <a:pPr algn="l">
-              <a:lnSpc>
-                <a:spcPct val="100000"/>
-              </a:lnSpc>
-            </a:pPr>
-            <a:r>
-              <a:rPr sz="1600" b="1">
-                <a:solidFill>
-                  <a:srgbClr val="161A23"/>
-                </a:solidFill>
-                <a:latin typeface="Calibri"/>
-              </a:rPr>
-              <a:t>B 120,703 tokens  →  D 7,840.  Same task, same data, same model.</a:t>
-            </a:r>
-          </a:p>
-        </p:txBody>
-      </p:sp>
     </p:spTree>
   </p:cSld>
   <p:clrMapOvr>
@@ -9581,7 +10258,7 @@
                 </a:solidFill>
                 <a:latin typeface="Calibri"/>
               </a:rPr>
-              <a:t>RESULT · TUNING VS ARCHITECTURE</a:t>
+              <a:t>HOW I MEASURED IT</a:t>
             </a:r>
           </a:p>
         </p:txBody>
@@ -9620,7 +10297,7 @@
                 </a:solidFill>
                 <a:latin typeface="Calibri"/>
               </a:rPr>
-              <a:t>Configuration is not the same as design</a:t>
+              <a:t>Repeated runs, and no keys needed to check</a:t>
             </a:r>
           </a:p>
         </p:txBody>
@@ -9669,40 +10346,16 @@
           </a:p>
         </p:txBody>
       </p:sp>
-      <p:pic>
-        <p:nvPicPr>
-          <p:cNvPr id="5" name="Picture 4" descr="tuning_effect.png"/>
-          <p:cNvPicPr>
-            <a:picLocks noChangeAspect="1"/>
-          </p:cNvPicPr>
-          <p:nvPr/>
-        </p:nvPicPr>
-        <p:blipFill>
-          <a:blip r:embed="rId2"/>
-          <a:stretch>
-            <a:fillRect/>
-          </a:stretch>
-        </p:blipFill>
-        <p:spPr>
-          <a:xfrm>
-            <a:off x="-465761" y="1783080"/>
-            <a:ext cx="13123217" cy="4023360"/>
-          </a:xfrm>
-          <a:prstGeom prst="rect">
-            <a:avLst/>
-          </a:prstGeom>
-        </p:spPr>
-      </p:pic>
-      <p:sp>
-        <p:nvSpPr>
-          <p:cNvPr id="6" name="TextBox 5"/>
+      <p:sp>
+        <p:nvSpPr>
+          <p:cNvPr id="5" name="TextBox 4"/>
           <p:cNvSpPr txBox="1"/>
           <p:nvPr/>
         </p:nvSpPr>
         <p:spPr>
           <a:xfrm>
-            <a:off x="822960" y="5943600"/>
-            <a:ext cx="10515600" cy="548640"/>
+            <a:off x="822960" y="2103120"/>
+            <a:ext cx="2636443" cy="1188720"/>
           </a:xfrm>
           <a:prstGeom prst="rect">
             <a:avLst/>
@@ -9715,19 +10368,351 @@
           </a:bodyPr>
           <a:lstStyle/>
           <a:p>
-            <a:pPr algn="l">
+            <a:pPr algn="ctr">
               <a:lnSpc>
                 <a:spcPct val="100000"/>
               </a:lnSpc>
             </a:pPr>
             <a:r>
-              <a:rPr sz="1600" b="1">
+              <a:rPr sz="6000" b="1">
                 <a:solidFill>
-                  <a:srgbClr val="161A23"/>
+                  <a:srgbClr val="4338CA"/>
                 </a:solidFill>
                 <a:latin typeface="Calibri"/>
               </a:rPr>
-              <a:t>Tuning alone: 89% fewer tokens. Changing the architecture: 94%.</a:t>
+              <a:t>5</a:t>
+            </a:r>
+          </a:p>
+        </p:txBody>
+      </p:sp>
+      <p:sp>
+        <p:nvSpPr>
+          <p:cNvPr id="6" name="TextBox 5"/>
+          <p:cNvSpPr txBox="1"/>
+          <p:nvPr/>
+        </p:nvSpPr>
+        <p:spPr>
+          <a:xfrm>
+            <a:off x="822960" y="3246120"/>
+            <a:ext cx="2636443" cy="731520"/>
+          </a:xfrm>
+          <a:prstGeom prst="rect">
+            <a:avLst/>
+          </a:prstGeom>
+          <a:noFill/>
+        </p:spPr>
+        <p:txBody>
+          <a:bodyPr wrap="square" anchor="t">
+            <a:spAutoFit/>
+          </a:bodyPr>
+          <a:lstStyle/>
+          <a:p>
+            <a:pPr algn="ctr">
+              <a:lnSpc>
+                <a:spcPct val="100000"/>
+              </a:lnSpc>
+            </a:pPr>
+            <a:r>
+              <a:rPr sz="1400" b="0">
+                <a:solidFill>
+                  <a:srgbClr val="545C6E"/>
+                </a:solidFill>
+                <a:latin typeface="Calibri"/>
+              </a:rPr>
+              <a:t>runs of each version,
+so every number has a range</a:t>
+            </a:r>
+          </a:p>
+        </p:txBody>
+      </p:sp>
+      <p:sp>
+        <p:nvSpPr>
+          <p:cNvPr id="7" name="TextBox 6"/>
+          <p:cNvSpPr txBox="1"/>
+          <p:nvPr/>
+        </p:nvSpPr>
+        <p:spPr>
+          <a:xfrm>
+            <a:off x="3459403" y="2103120"/>
+            <a:ext cx="2636443" cy="1188720"/>
+          </a:xfrm>
+          <a:prstGeom prst="rect">
+            <a:avLst/>
+          </a:prstGeom>
+          <a:noFill/>
+        </p:spPr>
+        <p:txBody>
+          <a:bodyPr wrap="square" anchor="t">
+            <a:spAutoFit/>
+          </a:bodyPr>
+          <a:lstStyle/>
+          <a:p>
+            <a:pPr algn="ctr">
+              <a:lnSpc>
+                <a:spcPct val="100000"/>
+              </a:lnSpc>
+            </a:pPr>
+            <a:r>
+              <a:rPr sz="6000" b="1">
+                <a:solidFill>
+                  <a:srgbClr val="4338CA"/>
+                </a:solidFill>
+                <a:latin typeface="Calibri"/>
+              </a:rPr>
+              <a:t>1/20</a:t>
+            </a:r>
+          </a:p>
+        </p:txBody>
+      </p:sp>
+      <p:sp>
+        <p:nvSpPr>
+          <p:cNvPr id="8" name="TextBox 7"/>
+          <p:cNvSpPr txBox="1"/>
+          <p:nvPr/>
+        </p:nvSpPr>
+        <p:spPr>
+          <a:xfrm>
+            <a:off x="3459403" y="3246120"/>
+            <a:ext cx="2636443" cy="731520"/>
+          </a:xfrm>
+          <a:prstGeom prst="rect">
+            <a:avLst/>
+          </a:prstGeom>
+          <a:noFill/>
+        </p:spPr>
+        <p:txBody>
+          <a:bodyPr wrap="square" anchor="t">
+            <a:spAutoFit/>
+          </a:bodyPr>
+          <a:lstStyle/>
+          <a:p>
+            <a:pPr algn="ctr">
+              <a:lnSpc>
+                <a:spcPct val="100000"/>
+              </a:lnSpc>
+            </a:pPr>
+            <a:r>
+              <a:rPr sz="1400" b="0">
+                <a:solidFill>
+                  <a:srgbClr val="545C6E"/>
+                </a:solidFill>
+                <a:latin typeface="Calibri"/>
+              </a:rPr>
+              <a:t>trips measured for cost.
+The API limits stopped me</a:t>
+            </a:r>
+          </a:p>
+        </p:txBody>
+      </p:sp>
+      <p:sp>
+        <p:nvSpPr>
+          <p:cNvPr id="9" name="TextBox 8"/>
+          <p:cNvSpPr txBox="1"/>
+          <p:nvPr/>
+        </p:nvSpPr>
+        <p:spPr>
+          <a:xfrm>
+            <a:off x="6095847" y="2103120"/>
+            <a:ext cx="2636443" cy="1188720"/>
+          </a:xfrm>
+          <a:prstGeom prst="rect">
+            <a:avLst/>
+          </a:prstGeom>
+          <a:noFill/>
+        </p:spPr>
+        <p:txBody>
+          <a:bodyPr wrap="square" anchor="t">
+            <a:spAutoFit/>
+          </a:bodyPr>
+          <a:lstStyle/>
+          <a:p>
+            <a:pPr algn="ctr">
+              <a:lnSpc>
+                <a:spcPct val="100000"/>
+              </a:lnSpc>
+            </a:pPr>
+            <a:r>
+              <a:rPr sz="6000" b="1">
+                <a:solidFill>
+                  <a:srgbClr val="4338CA"/>
+                </a:solidFill>
+                <a:latin typeface="Calibri"/>
+              </a:rPr>
+              <a:t>30</a:t>
+            </a:r>
+          </a:p>
+        </p:txBody>
+      </p:sp>
+      <p:sp>
+        <p:nvSpPr>
+          <p:cNvPr id="10" name="TextBox 9"/>
+          <p:cNvSpPr txBox="1"/>
+          <p:nvPr/>
+        </p:nvSpPr>
+        <p:spPr>
+          <a:xfrm>
+            <a:off x="6095847" y="3246120"/>
+            <a:ext cx="2636443" cy="731520"/>
+          </a:xfrm>
+          <a:prstGeom prst="rect">
+            <a:avLst/>
+          </a:prstGeom>
+          <a:noFill/>
+        </p:spPr>
+        <p:txBody>
+          <a:bodyPr wrap="square" anchor="t">
+            <a:spAutoFit/>
+          </a:bodyPr>
+          <a:lstStyle/>
+          <a:p>
+            <a:pPr algn="ctr">
+              <a:lnSpc>
+                <a:spcPct val="100000"/>
+              </a:lnSpc>
+            </a:pPr>
+            <a:r>
+              <a:rPr sz="1400" b="0">
+                <a:solidFill>
+                  <a:srgbClr val="545C6E"/>
+                </a:solidFill>
+                <a:latin typeface="Calibri"/>
+              </a:rPr>
+              <a:t>saved API replies, so anyone
+can repeat this for free</a:t>
+            </a:r>
+          </a:p>
+        </p:txBody>
+      </p:sp>
+      <p:sp>
+        <p:nvSpPr>
+          <p:cNvPr id="11" name="TextBox 10"/>
+          <p:cNvSpPr txBox="1"/>
+          <p:nvPr/>
+        </p:nvSpPr>
+        <p:spPr>
+          <a:xfrm>
+            <a:off x="8732291" y="2103120"/>
+            <a:ext cx="2636443" cy="1188720"/>
+          </a:xfrm>
+          <a:prstGeom prst="rect">
+            <a:avLst/>
+          </a:prstGeom>
+          <a:noFill/>
+        </p:spPr>
+        <p:txBody>
+          <a:bodyPr wrap="square" anchor="t">
+            <a:spAutoFit/>
+          </a:bodyPr>
+          <a:lstStyle/>
+          <a:p>
+            <a:pPr algn="ctr">
+              <a:lnSpc>
+                <a:spcPct val="100000"/>
+              </a:lnSpc>
+            </a:pPr>
+            <a:r>
+              <a:rPr sz="6000" b="1">
+                <a:solidFill>
+                  <a:srgbClr val="4338CA"/>
+                </a:solidFill>
+                <a:latin typeface="Calibri"/>
+              </a:rPr>
+              <a:t>403</a:t>
+            </a:r>
+          </a:p>
+        </p:txBody>
+      </p:sp>
+      <p:sp>
+        <p:nvSpPr>
+          <p:cNvPr id="12" name="TextBox 11"/>
+          <p:cNvSpPr txBox="1"/>
+          <p:nvPr/>
+        </p:nvSpPr>
+        <p:spPr>
+          <a:xfrm>
+            <a:off x="8732291" y="3246120"/>
+            <a:ext cx="2636443" cy="731520"/>
+          </a:xfrm>
+          <a:prstGeom prst="rect">
+            <a:avLst/>
+          </a:prstGeom>
+          <a:noFill/>
+        </p:spPr>
+        <p:txBody>
+          <a:bodyPr wrap="square" anchor="t">
+            <a:spAutoFit/>
+          </a:bodyPr>
+          <a:lstStyle/>
+          <a:p>
+            <a:pPr algn="ctr">
+              <a:lnSpc>
+                <a:spcPct val="100000"/>
+              </a:lnSpc>
+            </a:pPr>
+            <a:r>
+              <a:rPr sz="1400" b="0">
+                <a:solidFill>
+                  <a:srgbClr val="545C6E"/>
+                </a:solidFill>
+                <a:latin typeface="Calibri"/>
+              </a:rPr>
+              <a:t>automated tests,
+no keys, no internet</a:t>
+            </a:r>
+          </a:p>
+        </p:txBody>
+      </p:sp>
+      <p:sp>
+        <p:nvSpPr>
+          <p:cNvPr id="13" name="TextBox 12"/>
+          <p:cNvSpPr txBox="1"/>
+          <p:nvPr/>
+        </p:nvSpPr>
+        <p:spPr>
+          <a:xfrm>
+            <a:off x="822960" y="4937760"/>
+            <a:ext cx="10515600" cy="1097280"/>
+          </a:xfrm>
+          <a:prstGeom prst="rect">
+            <a:avLst/>
+          </a:prstGeom>
+          <a:noFill/>
+        </p:spPr>
+        <p:txBody>
+          <a:bodyPr wrap="square" anchor="t">
+            <a:spAutoFit/>
+          </a:bodyPr>
+          <a:lstStyle/>
+          <a:p>
+            <a:pPr algn="l">
+              <a:lnSpc>
+                <a:spcPct val="130000"/>
+              </a:lnSpc>
+            </a:pPr>
+            <a:r>
+              <a:rPr sz="1700" b="0">
+                <a:solidFill>
+                  <a:srgbClr val="545C6E"/>
+                </a:solidFill>
+                <a:latin typeface="Calibri"/>
+              </a:rPr>
+              <a:t>AI calls are counted by the system itself, never by hand.</a:t>
+            </a:r>
+          </a:p>
+          <a:p>
+            <a:pPr algn="l">
+              <a:lnSpc>
+                <a:spcPct val="130000"/>
+              </a:lnSpc>
+            </a:pPr>
+            <a:r>
+              <a:rPr sz="1700" b="0">
+                <a:solidFill>
+                  <a:srgbClr val="545C6E"/>
+                </a:solidFill>
+                <a:latin typeface="Calibri"/>
+              </a:rPr>
+              <a:t>The limited coverage is printed on every chart, not hidden.</a:t>
             </a:r>
           </a:p>
         </p:txBody>

--- a/submission/CMP7200_Viva_Presentation.pptx
+++ b/submission/CMP7200_Viva_Presentation.pptx
@@ -20,8 +20,6 @@
     <p:sldId id="268" r:id="rId20"/>
     <p:sldId id="269" r:id="rId21"/>
     <p:sldId id="270" r:id="rId22"/>
-    <p:sldId id="271" r:id="rId23"/>
-    <p:sldId id="272" r:id="rId24"/>
   </p:sldIdLst>
   <p:sldSz cx="12191695" cy="6858000" type="screen4x3"/>
   <p:notesSz cx="6858000" cy="9144000"/>
@@ -518,7 +516,7 @@
           <a:lstStyle/>
           <a:p>
             <a:r>
-              <a:t>Fifteen minutes. One idea: AI is worth paying for when a step needs thinking, and is a waste of money when it does not. I built four versions of the same planner that differ only in how they fetch data, measured all four, and the differences are large.</a:t>
+              <a:t>Fifteen minutes, fourteen slides. One idea: AI is worth paying for when a step needs thinking, and is wasted money when it does not. I built the same travel planner four ways and measured all four.</a:t>
             </a:r>
           </a:p>
         </p:txBody>
@@ -588,7 +586,7 @@
           <a:lstStyle/>
           <a:p>
             <a:r>
-              <a:t>Six agents: 120,703 tokens and 20.6 AI calls per trip. Three agents with normal code: 7,840 and 2.0. The ranges from the repeated runs do not overlap, which is why I report this as a real difference and not as noise.</a:t>
+              <a:t>Two parts. It estimates what the trip costs at minimum, comfortable and luxury standards, and refuses anything below the floor - then offers to shorten the trip, raise the budget, or pick a nearer city. And where a real fare has been recorded for that route it uses that instead of the table, and marks the line as measured rather than estimated. Tested on all 20 trips: it never wrongly refuses a workable one, and it misses 1 impossible one. Agreement score 0.643.</a:t>
             </a:r>
           </a:p>
         </p:txBody>
@@ -658,7 +656,7 @@
           <a:lstStyle/>
           <a:p>
             <a:r>
-              <a:t>Honest finding that weakens my own headline. Cutting each agent's tool list and step limit, without touching the design, removed 89% of the cost. So most of B's expense was bad configuration, not the architecture. What is left over is the part only the design change reaches, and that is what I claim.</a:t>
+              <a:t>5 runs of each version, so every bar has a range. The ranges for B and D do not overlap, which is why this is reported as a real difference rather than noise. Tuning alone accounted for 89% and the design change reached 94% - the gap between those two is what I claim.</a:t>
             </a:r>
           </a:p>
         </p:txBody>
@@ -728,7 +726,7 @@
           <a:lstStyle/>
           <a:p>
             <a:r>
-              <a:t>Saving money would be pointless if the plan got vaguer. A is the control and scores 1.7% - a confident itinerary invented from nothing, which is exactly what this measure exists to catch. It caught a real one: my first working run produced a complete plan while every single tool call was silently failing.</a:t>
+              <a:t>Saving money would be pointless if the plan got vaguer. A is the control and scores 1.7% - a confident itinerary invented from nothing, which is what this measure exists to catch. It caught a real one: my first working run produced a complete plan while every tool call was silently failing.</a:t>
             </a:r>
           </a:p>
         </p:txBody>
@@ -798,7 +796,7 @@
           <a:lstStyle/>
           <a:p>
             <a:r>
-              <a:t>6 of 9 checks fail. Message priority is declared and never actually used. Permissions are declared and never enforced. On the budget check, precision is 100% and recall 50%. Saying this out loud is the point: an evaluation that only confirms its author is not an evaluation.</a:t>
+              <a:t>6 of 9 checks fail: message priority is declared and never used, permissions are declared and never enforced. The budget check never wrongly refuses a workable trip but misses half the impossible ones. And cost coverage is one trip because the free plans allow thirty flight searches a month. All three are stated in the abstract, not buried.</a:t>
             </a:r>
           </a:p>
         </p:txBody>
@@ -868,7 +866,7 @@
           <a:lstStyle/>
           <a:p>
             <a:r>
-              <a:t>Both limits were fully used up during development. The protection was built before the four versions were: 30 saved replies mean a marker with no keys can reproduce every number in the report. What it could not do is create requests I never made, so cost coverage stayed at 1 of 20 trips. Appendix N has the full register - three of eight risks happened, including the AI model being withdrawn mid-project.</a:t>
+              <a:t>The "so what?" answer. The system is 16,169 lines with 403 tests, and the whole evaluation replays from disk with no API keys, so the method is reusable by anyone asking the same question about their own agents.</a:t>
             </a:r>
           </a:p>
         </p:txBody>
@@ -938,147 +936,7 @@
           <a:lstStyle/>
           <a:p>
             <a:r>
-              <a:t>If asked "so what?", this is the answer. The industry adds agents and tools by default. This project is a worked example of asking which steps deserve one, measuring the answer, and finding that the honest answer is "fewer than you think".</a:t>
-            </a:r>
-          </a:p>
-        </p:txBody>
-      </p:sp>
-      <p:sp>
-        <p:nvSpPr>
-          <p:cNvPr id="4" name="Slide Number Placeholder 3"/>
-          <p:cNvSpPr>
-            <a:spLocks noGrp="1"/>
-          </p:cNvSpPr>
-          <p:nvPr>
-            <p:ph type="sldNum" idx="5" sz="quarter"/>
-          </p:nvPr>
-        </p:nvSpPr>
-        <p:spPr/>
-      </p:sp>
-    </p:spTree>
-  </p:cSld>
-  <p:clrMapOvr>
-    <a:masterClrMapping/>
-  </p:clrMapOvr>
-</p:notes>
-</file>
-
-<file path=ppt/notesSlides/notesSlide16.xml><?xml version="1.0" encoding="utf-8"?>
-<p:notes xmlns:a="http://schemas.openxmlformats.org/drawingml/2006/main" xmlns:p="http://schemas.openxmlformats.org/presentationml/2006/main" xmlns:r="http://schemas.openxmlformats.org/officeDocument/2006/relationships">
-  <p:cSld>
-    <p:spTree>
-      <p:nvGrpSpPr>
-        <p:cNvPr id="1" name=""/>
-        <p:cNvGrpSpPr/>
-        <p:nvPr/>
-      </p:nvGrpSpPr>
-      <p:grpSpPr>
-        <a:xfrm>
-          <a:off x="0" y="0"/>
-          <a:ext cx="0" cy="0"/>
-          <a:chOff x="0" y="0"/>
-          <a:chExt cx="0" cy="0"/>
-        </a:xfrm>
-      </p:grpSpPr>
-      <p:sp>
-        <p:nvSpPr>
-          <p:cNvPr id="2" name="Slide Image Placeholder 1"/>
-          <p:cNvSpPr>
-            <a:spLocks noGrp="1"/>
-          </p:cNvSpPr>
-          <p:nvPr>
-            <p:ph type="sldImg" idx="2"/>
-          </p:nvPr>
-        </p:nvSpPr>
-        <p:spPr/>
-      </p:sp>
-      <p:sp>
-        <p:nvSpPr>
-          <p:cNvPr id="3" name="Notes Placeholder 2"/>
-          <p:cNvSpPr>
-            <a:spLocks noGrp="1"/>
-          </p:cNvSpPr>
-          <p:nvPr>
-            <p:ph type="body" idx="3" sz="quarter"/>
-          </p:nvPr>
-        </p:nvSpPr>
-        <p:spPr/>
-        <p:txBody>
-          <a:bodyPr/>
-          <a:lstStyle/>
-          <a:p>
-            <a:r>
-              <a:t>Honest answer to the likely question. I built the tool server first because nothing works without it, then the messaging, then the agents, and the measuring last. That order is why my first end-to-end run produced a plan with no real data in it and nothing noticed. Reversed, the six-to- three change would have been a design decision instead of a rewrite.</a:t>
-            </a:r>
-          </a:p>
-        </p:txBody>
-      </p:sp>
-      <p:sp>
-        <p:nvSpPr>
-          <p:cNvPr id="4" name="Slide Number Placeholder 3"/>
-          <p:cNvSpPr>
-            <a:spLocks noGrp="1"/>
-          </p:cNvSpPr>
-          <p:nvPr>
-            <p:ph type="sldNum" idx="5" sz="quarter"/>
-          </p:nvPr>
-        </p:nvSpPr>
-        <p:spPr/>
-      </p:sp>
-    </p:spTree>
-  </p:cSld>
-  <p:clrMapOvr>
-    <a:masterClrMapping/>
-  </p:clrMapOvr>
-</p:notes>
-</file>
-
-<file path=ppt/notesSlides/notesSlide17.xml><?xml version="1.0" encoding="utf-8"?>
-<p:notes xmlns:a="http://schemas.openxmlformats.org/drawingml/2006/main" xmlns:p="http://schemas.openxmlformats.org/presentationml/2006/main" xmlns:r="http://schemas.openxmlformats.org/officeDocument/2006/relationships">
-  <p:cSld>
-    <p:spTree>
-      <p:nvGrpSpPr>
-        <p:cNvPr id="1" name=""/>
-        <p:cNvGrpSpPr/>
-        <p:nvPr/>
-      </p:nvGrpSpPr>
-      <p:grpSpPr>
-        <a:xfrm>
-          <a:off x="0" y="0"/>
-          <a:ext cx="0" cy="0"/>
-          <a:chOff x="0" y="0"/>
-          <a:chExt cx="0" cy="0"/>
-        </a:xfrm>
-      </p:grpSpPr>
-      <p:sp>
-        <p:nvSpPr>
-          <p:cNvPr id="2" name="Slide Image Placeholder 1"/>
-          <p:cNvSpPr>
-            <a:spLocks noGrp="1"/>
-          </p:cNvSpPr>
-          <p:nvPr>
-            <p:ph type="sldImg" idx="2"/>
-          </p:nvPr>
-        </p:nvSpPr>
-        <p:spPr/>
-      </p:sp>
-      <p:sp>
-        <p:nvSpPr>
-          <p:cNvPr id="3" name="Notes Placeholder 2"/>
-          <p:cNvSpPr>
-            <a:spLocks noGrp="1"/>
-          </p:cNvSpPr>
-          <p:nvPr>
-            <p:ph type="body" idx="3" sz="quarter"/>
-          </p:nvPr>
-        </p:nvSpPr>
-        <p:spPr/>
-        <p:txBody>
-          <a:bodyPr/>
-          <a:lstStyle/>
-          <a:p>
-            <a:r>
-              <a:t>Land on the claim and its limit together. The effect is large and the sample is narrow, and both are in the abstract. The saved replies, the test harness and the twenty trips are all committed, so the next person - or me next month when the limits reset - can widen it without rebuilding anything.</a:t>
+              <a:t>Land the claim and its limit in the same breath. The effect is large and the sample is narrow, and both are in the abstract. The saved replies, the harness and the twenty trips are all committed, so the next person - or me next month when the limits reset - can widen it without rebuilding.</a:t>
             </a:r>
           </a:p>
         </p:txBody>
@@ -1148,7 +1006,7 @@
           <a:lstStyle/>
           <a:p>
             <a:r>
-              <a:t>Everyone gives agents tools. Nobody asks which jobs actually need one. Reading "leaving on the fifteenth for two adults" needs thinking. Calling a flight API with a date does not. The agent version used 20.6 AI calls per trip; mine uses 2.0. The text sent differs by about 15 times, because every step re-sends the whole conversation and every tool description.</a:t>
+              <a:t>Everyone gives agents tools. Nobody asks which jobs need one. The agent version used 20.6 AI calls per trip; mine uses 2.0. Every loop step re-sends the whole conversation and every tool description, which is why the text differs by 15 times.</a:t>
             </a:r>
           </a:p>
         </p:txBody>
@@ -1218,7 +1076,7 @@
           <a:lstStyle/>
           <a:p>
             <a:r>
-              <a:t>Same task, same prompts where they overlap, same tool server, same message system, same AI model. Only the way data is fetched changes between the four versions. That is what makes the comparison fair.</a:t>
+              <a:t>This is the whole contribution in one slide. You cannot write a rule that understands any phrasing a person might use, and you cannot write a rule that makes a day pleasant. You absolutely can write a rule that calls a flight API with a date. It started as six agents and became three because measuring showed where the calls were going.</a:t>
             </a:r>
           </a:p>
         </p:txBody>
@@ -1288,7 +1146,7 @@
           <a:lstStyle/>
           <a:p>
             <a:r>
-              <a:t>Worth demonstrating live. Ask it for six nights in London on three thousand dollars and it declines, tells you the shortfall, and offers a shorter trip or a nearer city. It also marks which prices are measured and which are estimated, because the built-in price table was 52% below a real fare on the one route where both were known.</a:t>
+              <a:t>Worth demonstrating live. Ask for six nights in London on three thousand dollars and it refuses, gives the shortfall, and offers a shorter trip or a nearer city. The seven step rows tick over as each finishes, so the page never looks frozen. The plan arrives in six tabs with one block per day.</a:t>
             </a:r>
           </a:p>
         </p:txBody>
@@ -1358,7 +1216,7 @@
           <a:lstStyle/>
           <a:p>
             <a:r>
-              <a:t>It started as six agents and became three, because measuring showed most of the AI calls were being spent on fetching data. You cannot write a rule that understands any phrasing a person might use, and you cannot write a rule that makes a day pleasant. You absolutely can write a rule that calls a flight API.</a:t>
+              <a:t>C makes the result defensible. Tuning the six agents without changing the design at all cut the text sent by 89%. Comparing B against D alone would have mixed two effects and claimed credit for both.</a:t>
             </a:r>
           </a:p>
         </p:txBody>
@@ -1428,7 +1286,7 @@
           <a:lstStyle/>
           <a:p>
             <a:r>
-              <a:t>C is what makes the result defensible. Just tuning the six agents, without changing the design at all, cut the text sent by 89%. So if I had only compared B against D I would have been mixing two different effects together and claiming credit for both.</a:t>
+              <a:t>"Steps" is the loop limit: how many times the agent may think, call a tool, and think again. Each step is a full AI call that re-sends the conversation and every tool description it holds. Eight tools times ten steps is where B's cost came from. C cut the same agents to one or two tools and three steps. D removes the fetching agents entirely, so the four tools that remain belong to the coordinator and nothing loops.</a:t>
             </a:r>
           </a:p>
         </p:txBody>
@@ -1498,7 +1356,7 @@
           <a:lstStyle/>
           <a:p>
             <a:r>
-              <a:t>This slide is the heart of the argument. An agent that skips a tool still writes a confident, well-formatted itinerary, so you cannot tell by looking. B never once fetched attractions or restaurants and still produced a full plan. That is why I measure groundedness rather than reading the output and judging it.</a:t>
+              <a:t>The tool server runs as its own program and answers over JSON-RPC. Twelve tools, each declaring what input it accepts, so a malformed request is refused rather than sent. Every reply passes through a record-and-replay layer: 30 responses are saved, which is why anyone can reproduce my results with no API keys. Honest caveat: the shipped version calls these functions directly rather than over the protocol - the protocol is exercised by the six-agent versions, and the report says so.</a:t>
             </a:r>
           </a:p>
         </p:txBody>
@@ -1568,7 +1426,7 @@
           <a:lstStyle/>
           <a:p>
             <a:r>
-              <a:t>Layer one takes the request, two turns words into fields, three fetches the data, four writes the plan. My question lives entirely in layer three. One honest detail: the shipped version calls the tool functions directly rather than over the network protocol. The protocol is genuinely used, but only by the six-agent versions, and Section 7.2 of the report says so.</a:t>
+              <a:t>The heart of the argument. An agent that skips a tool still writes a confident, well-formatted itinerary, so you cannot tell by reading it. B never once fetched attractions or restaurants and still produced a full plan. That is why groundedness is measured rather than judged by eye.</a:t>
             </a:r>
           </a:p>
         </p:txBody>
@@ -1638,7 +1496,7 @@
           <a:lstStyle/>
           <a:p>
             <a:r>
-              <a:t>The weakness first: only 1 of 20 trips for the cost comparison, because the free plans allow thirty flight and fifty hotel searches a month. What I did instead: the two questions that need no API - does the message system behave as designed, and does the budget check work - were tested on all twenty, and both found real problems.</a:t>
+              <a:t>It used to be one fixed percentage split for every trip. It now reads the wording, and no category is ever given more than it could possibly spend. On a two thousand dollar Istanbul trip the room budget moves from $327 if the traveller can compromise, to $443 at moderate, to $664 for a luxury stay. Same total, different trip.</a:t>
             </a:r>
           </a:p>
         </p:txBody>
@@ -4660,7 +4518,7 @@
         </p:nvSpPr>
         <p:spPr>
           <a:xfrm>
-            <a:off x="1005840" y="1737360"/>
+            <a:off x="1005840" y="1828800"/>
             <a:ext cx="10241280" cy="457200"/>
           </a:xfrm>
           <a:prstGeom prst="rect">
@@ -4699,7 +4557,7 @@
         </p:nvSpPr>
         <p:spPr>
           <a:xfrm>
-            <a:off x="1005840" y="2194560"/>
+            <a:off x="1005840" y="2286000"/>
             <a:ext cx="10241280" cy="1737360"/>
           </a:xfrm>
           <a:prstGeom prst="rect">
@@ -4715,33 +4573,33 @@
           <a:p>
             <a:pPr algn="l">
               <a:lnSpc>
-                <a:spcPct val="110000"/>
+                <a:spcPct val="115000"/>
               </a:lnSpc>
             </a:pPr>
             <a:r>
-              <a:rPr sz="4200" b="1">
+              <a:rPr sz="4400" b="1">
                 <a:solidFill>
                   <a:srgbClr val="FFFFFF"/>
                 </a:solidFill>
                 <a:latin typeface="Calibri"/>
               </a:rPr>
-              <a:t>When is AI worth its cost</a:t>
+              <a:t>When is AI worth paying for?</a:t>
             </a:r>
           </a:p>
           <a:p>
             <a:pPr algn="l">
               <a:lnSpc>
-                <a:spcPct val="110000"/>
+                <a:spcPct val="115000"/>
               </a:lnSpc>
             </a:pPr>
             <a:r>
-              <a:rPr sz="4200" b="1">
+              <a:rPr sz="3200" b="1">
                 <a:solidFill>
                   <a:srgbClr val="6EE7DF"/>
                 </a:solidFill>
                 <a:latin typeface="Calibri"/>
               </a:rPr>
-              <a:t>in a travel planning system?</a:t>
+              <a:t>A travel planner, built four ways.</a:t>
             </a:r>
           </a:p>
         </p:txBody>
@@ -4754,7 +4612,7 @@
         </p:nvSpPr>
         <p:spPr>
           <a:xfrm>
-            <a:off x="1005840" y="4114800"/>
+            <a:off x="1005840" y="4389120"/>
             <a:ext cx="1463040" cy="34000"/>
           </a:xfrm>
           <a:prstGeom prst="rect">
@@ -4798,8 +4656,8 @@
         </p:nvSpPr>
         <p:spPr>
           <a:xfrm>
-            <a:off x="1005840" y="4480560"/>
-            <a:ext cx="10241280" cy="1280160"/>
+            <a:off x="1005840" y="4754880"/>
+            <a:ext cx="10241280" cy="1097280"/>
           </a:xfrm>
           <a:prstGeom prst="rect">
             <a:avLst/>
@@ -4818,39 +4676,7 @@
               </a:lnSpc>
             </a:pPr>
             <a:r>
-              <a:rPr sz="1800" b="0">
-                <a:solidFill>
-                  <a:srgbClr val="C7D2FE"/>
-                </a:solidFill>
-                <a:latin typeface="Calibri"/>
-              </a:rPr>
-              <a:t>I built the same travel planner four different ways and measured all four.</a:t>
-            </a:r>
-          </a:p>
-          <a:p>
-            <a:pPr algn="l">
-              <a:lnSpc>
-                <a:spcPct val="100000"/>
-              </a:lnSpc>
-            </a:pPr>
-            <a:r>
-              <a:rPr sz="800" b="0">
-                <a:solidFill>
-                  <a:srgbClr val="FFFFFF"/>
-                </a:solidFill>
-                <a:latin typeface="Calibri"/>
-              </a:rPr>
-              <a:t/>
-            </a:r>
-          </a:p>
-          <a:p>
-            <a:pPr algn="l">
-              <a:lnSpc>
-                <a:spcPct val="100000"/>
-              </a:lnSpc>
-            </a:pPr>
-            <a:r>
-              <a:rPr sz="1300" b="0">
+              <a:rPr sz="1400" b="0">
                 <a:solidFill>
                   <a:srgbClr val="9CA3F5"/>
                 </a:solidFill>
@@ -4913,7 +4739,7 @@
                 </a:solidFill>
                 <a:latin typeface="Calibri"/>
               </a:rPr>
-              <a:t>RESULT 1  ·  COST</a:t>
+              <a:t>9  ·  BUDGET: IS THE TRIP EVEN POSSIBLE?</a:t>
             </a:r>
           </a:p>
         </p:txBody>
@@ -4952,7 +4778,7 @@
                 </a:solidFill>
                 <a:latin typeface="Calibri"/>
               </a:rPr>
-              <a:t>Fetching data is where the money goes</a:t>
+              <a:t>It refuses, and says what would work</a:t>
             </a:r>
           </a:p>
         </p:txBody>
@@ -5001,40 +4827,16 @@
           </a:p>
         </p:txBody>
       </p:sp>
-      <p:pic>
-        <p:nvPicPr>
-          <p:cNvPr id="5" name="Picture 4" descr="efficiency.png"/>
-          <p:cNvPicPr>
-            <a:picLocks noChangeAspect="1"/>
-          </p:cNvPicPr>
+      <p:sp>
+        <p:nvSpPr>
+          <p:cNvPr id="5" name="TextBox 4"/>
+          <p:cNvSpPr txBox="1"/>
           <p:nvPr/>
-        </p:nvPicPr>
-        <p:blipFill>
-          <a:blip r:embed="rId2"/>
-          <a:stretch>
-            <a:fillRect/>
-          </a:stretch>
-        </p:blipFill>
+        </p:nvSpPr>
         <p:spPr>
           <a:xfrm>
-            <a:off x="2692927" y="1783080"/>
-            <a:ext cx="6805840" cy="4023360"/>
-          </a:xfrm>
-          <a:prstGeom prst="rect">
-            <a:avLst/>
-          </a:prstGeom>
-        </p:spPr>
-      </p:pic>
-      <p:sp>
-        <p:nvSpPr>
-          <p:cNvPr id="6" name="TextBox 5"/>
-          <p:cNvSpPr txBox="1"/>
-          <p:nvPr/>
-        </p:nvSpPr>
-        <p:spPr>
-          <a:xfrm>
-            <a:off x="822960" y="5943600"/>
-            <a:ext cx="10515600" cy="548640"/>
+            <a:off x="822960" y="2103120"/>
+            <a:ext cx="3515258" cy="1188720"/>
           </a:xfrm>
           <a:prstGeom prst="rect">
             <a:avLst/>
@@ -5047,19 +4849,272 @@
           </a:bodyPr>
           <a:lstStyle/>
           <a:p>
-            <a:pPr algn="l">
+            <a:pPr algn="ctr">
               <a:lnSpc>
                 <a:spcPct val="100000"/>
               </a:lnSpc>
             </a:pPr>
             <a:r>
-              <a:rPr sz="1600" b="1">
+              <a:rPr sz="6000" b="1">
+                <a:solidFill>
+                  <a:srgbClr val="A85B00"/>
+                </a:solidFill>
+                <a:latin typeface="Calibri"/>
+              </a:rPr>
+              <a:t>$800</a:t>
+            </a:r>
+          </a:p>
+        </p:txBody>
+      </p:sp>
+      <p:sp>
+        <p:nvSpPr>
+          <p:cNvPr id="6" name="TextBox 5"/>
+          <p:cNvSpPr txBox="1"/>
+          <p:nvPr/>
+        </p:nvSpPr>
+        <p:spPr>
+          <a:xfrm>
+            <a:off x="822960" y="3246120"/>
+            <a:ext cx="3515258" cy="731520"/>
+          </a:xfrm>
+          <a:prstGeom prst="rect">
+            <a:avLst/>
+          </a:prstGeom>
+          <a:noFill/>
+        </p:spPr>
+        <p:txBody>
+          <a:bodyPr wrap="square" anchor="t">
+            <a:spAutoFit/>
+          </a:bodyPr>
+          <a:lstStyle/>
+          <a:p>
+            <a:pPr algn="ctr">
+              <a:lnSpc>
+                <a:spcPct val="100000"/>
+              </a:lnSpc>
+            </a:pPr>
+            <a:r>
+              <a:rPr sz="1400" b="0">
+                <a:solidFill>
+                  <a:srgbClr val="545C6E"/>
+                </a:solidFill>
+                <a:latin typeface="Calibri"/>
+              </a:rPr>
+              <a:t>asked for
+4 nights in Istanbul</a:t>
+            </a:r>
+          </a:p>
+        </p:txBody>
+      </p:sp>
+      <p:sp>
+        <p:nvSpPr>
+          <p:cNvPr id="7" name="TextBox 6"/>
+          <p:cNvSpPr txBox="1"/>
+          <p:nvPr/>
+        </p:nvSpPr>
+        <p:spPr>
+          <a:xfrm>
+            <a:off x="4338218" y="2103120"/>
+            <a:ext cx="3515258" cy="1188720"/>
+          </a:xfrm>
+          <a:prstGeom prst="rect">
+            <a:avLst/>
+          </a:prstGeom>
+          <a:noFill/>
+        </p:spPr>
+        <p:txBody>
+          <a:bodyPr wrap="square" anchor="t">
+            <a:spAutoFit/>
+          </a:bodyPr>
+          <a:lstStyle/>
+          <a:p>
+            <a:pPr algn="ctr">
+              <a:lnSpc>
+                <a:spcPct val="100000"/>
+              </a:lnSpc>
+            </a:pPr>
+            <a:r>
+              <a:rPr sz="6000" b="1">
+                <a:solidFill>
+                  <a:srgbClr val="A85B00"/>
+                </a:solidFill>
+                <a:latin typeface="Calibri"/>
+              </a:rPr>
+              <a:t>$837</a:t>
+            </a:r>
+          </a:p>
+        </p:txBody>
+      </p:sp>
+      <p:sp>
+        <p:nvSpPr>
+          <p:cNvPr id="8" name="TextBox 7"/>
+          <p:cNvSpPr txBox="1"/>
+          <p:nvPr/>
+        </p:nvSpPr>
+        <p:spPr>
+          <a:xfrm>
+            <a:off x="4338218" y="3246120"/>
+            <a:ext cx="3515258" cy="731520"/>
+          </a:xfrm>
+          <a:prstGeom prst="rect">
+            <a:avLst/>
+          </a:prstGeom>
+          <a:noFill/>
+        </p:spPr>
+        <p:txBody>
+          <a:bodyPr wrap="square" anchor="t">
+            <a:spAutoFit/>
+          </a:bodyPr>
+          <a:lstStyle/>
+          <a:p>
+            <a:pPr algn="ctr">
+              <a:lnSpc>
+                <a:spcPct val="100000"/>
+              </a:lnSpc>
+            </a:pPr>
+            <a:r>
+              <a:rPr sz="1400" b="0">
+                <a:solidFill>
+                  <a:srgbClr val="545C6E"/>
+                </a:solidFill>
+                <a:latin typeface="Calibri"/>
+              </a:rPr>
+              <a:t>the cheapest it can
+actually be done for</a:t>
+            </a:r>
+          </a:p>
+        </p:txBody>
+      </p:sp>
+      <p:sp>
+        <p:nvSpPr>
+          <p:cNvPr id="9" name="TextBox 8"/>
+          <p:cNvSpPr txBox="1"/>
+          <p:nvPr/>
+        </p:nvSpPr>
+        <p:spPr>
+          <a:xfrm>
+            <a:off x="7853476" y="2103120"/>
+            <a:ext cx="3515258" cy="1188720"/>
+          </a:xfrm>
+          <a:prstGeom prst="rect">
+            <a:avLst/>
+          </a:prstGeom>
+          <a:noFill/>
+        </p:spPr>
+        <p:txBody>
+          <a:bodyPr wrap="square" anchor="t">
+            <a:spAutoFit/>
+          </a:bodyPr>
+          <a:lstStyle/>
+          <a:p>
+            <a:pPr algn="ctr">
+              <a:lnSpc>
+                <a:spcPct val="100000"/>
+              </a:lnSpc>
+            </a:pPr>
+            <a:r>
+              <a:rPr sz="6000" b="1">
+                <a:solidFill>
+                  <a:srgbClr val="A85B00"/>
+                </a:solidFill>
+                <a:latin typeface="Calibri"/>
+              </a:rPr>
+              <a:t>REFUSED</a:t>
+            </a:r>
+          </a:p>
+        </p:txBody>
+      </p:sp>
+      <p:sp>
+        <p:nvSpPr>
+          <p:cNvPr id="10" name="TextBox 9"/>
+          <p:cNvSpPr txBox="1"/>
+          <p:nvPr/>
+        </p:nvSpPr>
+        <p:spPr>
+          <a:xfrm>
+            <a:off x="7853476" y="3246120"/>
+            <a:ext cx="3515258" cy="731520"/>
+          </a:xfrm>
+          <a:prstGeom prst="rect">
+            <a:avLst/>
+          </a:prstGeom>
+          <a:noFill/>
+        </p:spPr>
+        <p:txBody>
+          <a:bodyPr wrap="square" anchor="t">
+            <a:spAutoFit/>
+          </a:bodyPr>
+          <a:lstStyle/>
+          <a:p>
+            <a:pPr algn="ctr">
+              <a:lnSpc>
+                <a:spcPct val="100000"/>
+              </a:lnSpc>
+            </a:pPr>
+            <a:r>
+              <a:rPr sz="1400" b="0">
+                <a:solidFill>
+                  <a:srgbClr val="545C6E"/>
+                </a:solidFill>
+                <a:latin typeface="Calibri"/>
+              </a:rPr>
+              <a:t>with the shortfall named,
+and three ways to fix it</a:t>
+            </a:r>
+          </a:p>
+        </p:txBody>
+      </p:sp>
+      <p:sp>
+        <p:nvSpPr>
+          <p:cNvPr id="11" name="TextBox 10"/>
+          <p:cNvSpPr txBox="1"/>
+          <p:nvPr/>
+        </p:nvSpPr>
+        <p:spPr>
+          <a:xfrm>
+            <a:off x="822960" y="4754880"/>
+            <a:ext cx="10515600" cy="1371600"/>
+          </a:xfrm>
+          <a:prstGeom prst="rect">
+            <a:avLst/>
+          </a:prstGeom>
+          <a:noFill/>
+        </p:spPr>
+        <p:txBody>
+          <a:bodyPr wrap="square" anchor="t">
+            <a:spAutoFit/>
+          </a:bodyPr>
+          <a:lstStyle/>
+          <a:p>
+            <a:pPr algn="l">
+              <a:lnSpc>
+                <a:spcPct val="130000"/>
+              </a:lnSpc>
+            </a:pPr>
+            <a:r>
+              <a:rPr sz="1900" b="1">
                 <a:solidFill>
                   <a:srgbClr val="161A23"/>
                 </a:solidFill>
                 <a:latin typeface="Calibri"/>
               </a:rPr>
-              <a:t>B sent 120,703 units of text.  D sent 7,840.  Same trip, same data, same AI.</a:t>
+              <a:t>Why $837? Because it checks the real recorded fare, not a built-in table.</a:t>
+            </a:r>
+          </a:p>
+          <a:p>
+            <a:pPr algn="l">
+              <a:lnSpc>
+                <a:spcPct val="130000"/>
+              </a:lnSpc>
+            </a:pPr>
+            <a:r>
+              <a:rPr sz="1700" b="0">
+                <a:solidFill>
+                  <a:srgbClr val="545C6E"/>
+                </a:solidFill>
+                <a:latin typeface="Calibri"/>
+              </a:rPr>
+              <a:t>The table said a medium-haul flight starts at $350. The API actually returned $734 — the table was 52% too low.</a:t>
             </a:r>
           </a:p>
         </p:txBody>
@@ -5116,7 +5171,7 @@
                 </a:solidFill>
                 <a:latin typeface="Calibri"/>
               </a:rPr>
-              <a:t>RESULT 2  ·  SETTINGS VS DESIGN</a:t>
+              <a:t>10  ·  RESULT: COST</a:t>
             </a:r>
           </a:p>
         </p:txBody>
@@ -5155,7 +5210,7 @@
                 </a:solidFill>
                 <a:latin typeface="Calibri"/>
               </a:rPr>
-              <a:t>Answering the obvious objection</a:t>
+              <a:t>Fetching data is where the money went</a:t>
             </a:r>
           </a:p>
         </p:txBody>
@@ -5206,7 +5261,7 @@
       </p:sp>
       <p:pic>
         <p:nvPicPr>
-          <p:cNvPr id="5" name="Picture 4" descr="tuning_effect.png"/>
+          <p:cNvPr id="5" name="Picture 4" descr="efficiency.png"/>
           <p:cNvPicPr>
             <a:picLocks noChangeAspect="1"/>
           </p:cNvPicPr>
@@ -5220,8 +5275,8 @@
         </p:blipFill>
         <p:spPr>
           <a:xfrm>
-            <a:off x="-465761" y="1783080"/>
-            <a:ext cx="13123217" cy="4023360"/>
+            <a:off x="2692927" y="1783080"/>
+            <a:ext cx="6805840" cy="4023360"/>
           </a:xfrm>
           <a:prstGeom prst="rect">
             <a:avLst/>
@@ -5262,7 +5317,7 @@
                 </a:solidFill>
                 <a:latin typeface="Calibri"/>
               </a:rPr>
-              <a:t>Just better settings: 89% less text.  Changing the design: 94%.</a:t>
+              <a:t>B sent 120,703 units of text.  D sent 7,840.  Same trip, same data, same AI model.</a:t>
             </a:r>
           </a:p>
         </p:txBody>
@@ -5319,7 +5374,7 @@
                 </a:solidFill>
                 <a:latin typeface="Calibri"/>
               </a:rPr>
-              <a:t>RESULT 3  ·  IS THE PLAN REAL?</a:t>
+              <a:t>11  ·  RESULT: IS THE PLAN REAL?</a:t>
             </a:r>
           </a:p>
         </p:txBody>
@@ -5465,7 +5520,7 @@
                 </a:solidFill>
                 <a:latin typeface="Calibri"/>
               </a:rPr>
-              <a:t>Prices that match a real fare:  A 1.7%  ·  B 22.9%  ·  C 56.3%  ·  D 46.6%</a:t>
+              <a:t>Prices matching a real fare:   A 1.7%   ·   B 22.9%   ·   C 56.3%   ·   D 46.6%</a:t>
             </a:r>
           </a:p>
         </p:txBody>
@@ -5522,7 +5577,7 @@
                 </a:solidFill>
                 <a:latin typeface="Calibri"/>
               </a:rPr>
-              <a:t>PROBLEMS IN MY OWN SYSTEM</a:t>
+              <a:t>12  ·  PROBLEMS IN MY OWN SYSTEM</a:t>
             </a:r>
           </a:p>
         </p:txBody>
@@ -5561,7 +5616,7 @@
                 </a:solidFill>
                 <a:latin typeface="Calibri"/>
               </a:rPr>
-              <a:t>Found by measuring it, and reported not hidden</a:t>
+              <a:t>Found by measuring it. Reported, not hidden</a:t>
             </a:r>
           </a:p>
         </p:txBody>
@@ -5619,7 +5674,7 @@
         <p:spPr>
           <a:xfrm>
             <a:off x="822960" y="2103120"/>
-            <a:ext cx="5272887" cy="1188720"/>
+            <a:ext cx="3515258" cy="1188720"/>
           </a:xfrm>
           <a:prstGeom prst="rect">
             <a:avLst/>
@@ -5658,7 +5713,7 @@
         <p:spPr>
           <a:xfrm>
             <a:off x="822960" y="3246120"/>
-            <a:ext cx="5272887" cy="731520"/>
+            <a:ext cx="3515258" cy="731520"/>
           </a:xfrm>
           <a:prstGeom prst="rect">
             <a:avLst/>
@@ -5684,7 +5739,7 @@
                 <a:latin typeface="Calibri"/>
               </a:rPr>
               <a:t>design checks pass.
-Six things I claimed, that do not happen</a:t>
+Six things I claimed do not happen</a:t>
             </a:r>
           </a:p>
         </p:txBody>
@@ -5697,8 +5752,8 @@
         </p:nvSpPr>
         <p:spPr>
           <a:xfrm>
-            <a:off x="6095847" y="2103120"/>
-            <a:ext cx="5272887" cy="1188720"/>
+            <a:off x="4338218" y="2103120"/>
+            <a:ext cx="3515258" cy="1188720"/>
           </a:xfrm>
           <a:prstGeom prst="rect">
             <a:avLst/>
@@ -5736,8 +5791,8 @@
         </p:nvSpPr>
         <p:spPr>
           <a:xfrm>
-            <a:off x="6095847" y="3246120"/>
-            <a:ext cx="5272887" cy="731520"/>
+            <a:off x="4338218" y="3246120"/>
+            <a:ext cx="3515258" cy="731520"/>
           </a:xfrm>
           <a:prstGeom prst="rect">
             <a:avLst/>
@@ -5771,6 +5826,85 @@
       <p:sp>
         <p:nvSpPr>
           <p:cNvPr id="9" name="TextBox 8"/>
+          <p:cNvSpPr txBox="1"/>
+          <p:nvPr/>
+        </p:nvSpPr>
+        <p:spPr>
+          <a:xfrm>
+            <a:off x="7853476" y="2103120"/>
+            <a:ext cx="3515258" cy="1188720"/>
+          </a:xfrm>
+          <a:prstGeom prst="rect">
+            <a:avLst/>
+          </a:prstGeom>
+          <a:noFill/>
+        </p:spPr>
+        <p:txBody>
+          <a:bodyPr wrap="square" anchor="t">
+            <a:spAutoFit/>
+          </a:bodyPr>
+          <a:lstStyle/>
+          <a:p>
+            <a:pPr algn="ctr">
+              <a:lnSpc>
+                <a:spcPct val="100000"/>
+              </a:lnSpc>
+            </a:pPr>
+            <a:r>
+              <a:rPr sz="6000" b="1">
+                <a:solidFill>
+                  <a:srgbClr val="A85B00"/>
+                </a:solidFill>
+                <a:latin typeface="Calibri"/>
+              </a:rPr>
+              <a:t>1/20</a:t>
+            </a:r>
+          </a:p>
+        </p:txBody>
+      </p:sp>
+      <p:sp>
+        <p:nvSpPr>
+          <p:cNvPr id="10" name="TextBox 9"/>
+          <p:cNvSpPr txBox="1"/>
+          <p:nvPr/>
+        </p:nvSpPr>
+        <p:spPr>
+          <a:xfrm>
+            <a:off x="7853476" y="3246120"/>
+            <a:ext cx="3515258" cy="731520"/>
+          </a:xfrm>
+          <a:prstGeom prst="rect">
+            <a:avLst/>
+          </a:prstGeom>
+          <a:noFill/>
+        </p:spPr>
+        <p:txBody>
+          <a:bodyPr wrap="square" anchor="t">
+            <a:spAutoFit/>
+          </a:bodyPr>
+          <a:lstStyle/>
+          <a:p>
+            <a:pPr algn="ctr">
+              <a:lnSpc>
+                <a:spcPct val="100000"/>
+              </a:lnSpc>
+            </a:pPr>
+            <a:r>
+              <a:rPr sz="1400" b="0">
+                <a:solidFill>
+                  <a:srgbClr val="545C6E"/>
+                </a:solidFill>
+                <a:latin typeface="Calibri"/>
+              </a:rPr>
+              <a:t>trips measured for cost.
+The API limits stopped me</a:t>
+            </a:r>
+          </a:p>
+        </p:txBody>
+      </p:sp>
+      <p:sp>
+        <p:nvSpPr>
+          <p:cNvPr id="11" name="TextBox 10"/>
           <p:cNvSpPr txBox="1"/>
           <p:nvPr/>
         </p:nvSpPr>
@@ -5802,7 +5936,7 @@
                 </a:solidFill>
                 <a:latin typeface="Calibri"/>
               </a:rPr>
-              <a:t>Both are in the report, with the evidence.</a:t>
+              <a:t>All three are in the report, with the evidence.</a:t>
             </a:r>
           </a:p>
           <a:p>
@@ -5812,13 +5946,13 @@
               </a:lnSpc>
             </a:pPr>
             <a:r>
-              <a:rPr sz="1600" b="0">
+              <a:rPr sz="1700" b="0">
                 <a:solidFill>
                   <a:srgbClr val="545C6E"/>
                 </a:solidFill>
                 <a:latin typeface="Calibri"/>
               </a:rPr>
-              <a:t>The budget check never wrongly refuses a workable trip (precision 100%), but it lets 1 impossible one through. Agreement score 0.643 - moderate, not good.</a:t>
+              <a:t>An evaluation that only confirms its author is not an evaluation.</a:t>
             </a:r>
           </a:p>
         </p:txBody>
@@ -5875,439 +6009,7 @@
                 </a:solidFill>
                 <a:latin typeface="Calibri"/>
               </a:rPr>
-              <a:t>THE BIGGEST RISK</a:t>
-            </a:r>
-          </a:p>
-        </p:txBody>
-      </p:sp>
-      <p:sp>
-        <p:nvSpPr>
-          <p:cNvPr id="3" name="TextBox 2"/>
-          <p:cNvSpPr txBox="1"/>
-          <p:nvPr/>
-        </p:nvSpPr>
-        <p:spPr>
-          <a:xfrm>
-            <a:off x="822960" y="777240"/>
-            <a:ext cx="10515600" cy="822960"/>
-          </a:xfrm>
-          <a:prstGeom prst="rect">
-            <a:avLst/>
-          </a:prstGeom>
-          <a:noFill/>
-        </p:spPr>
-        <p:txBody>
-          <a:bodyPr wrap="square" anchor="t">
-            <a:spAutoFit/>
-          </a:bodyPr>
-          <a:lstStyle/>
-          <a:p>
-            <a:pPr algn="l">
-              <a:lnSpc>
-                <a:spcPct val="100000"/>
-              </a:lnSpc>
-            </a:pPr>
-            <a:r>
-              <a:rPr sz="3200" b="1">
-                <a:solidFill>
-                  <a:srgbClr val="161A23"/>
-                </a:solidFill>
-                <a:latin typeface="Calibri"/>
-              </a:rPr>
-              <a:t>It was never the coding</a:t>
-            </a:r>
-          </a:p>
-        </p:txBody>
-      </p:sp>
-      <p:sp>
-        <p:nvSpPr>
-          <p:cNvPr id="4" name="Rectangle 3"/>
-          <p:cNvSpPr/>
-          <p:nvPr/>
-        </p:nvSpPr>
-        <p:spPr>
-          <a:xfrm>
-            <a:off x="822960" y="1572768"/>
-            <a:ext cx="1005840" cy="34000"/>
-          </a:xfrm>
-          <a:prstGeom prst="rect">
-            <a:avLst/>
-          </a:prstGeom>
-          <a:solidFill>
-            <a:srgbClr val="4338CA"/>
-          </a:solidFill>
-          <a:ln>
-            <a:noFill/>
-          </a:ln>
-          <a:effectLst/>
-        </p:spPr>
-        <p:style>
-          <a:lnRef idx="1">
-            <a:schemeClr val="accent1"/>
-          </a:lnRef>
-          <a:fillRef idx="3">
-            <a:schemeClr val="accent1"/>
-          </a:fillRef>
-          <a:effectRef idx="2">
-            <a:schemeClr val="accent1"/>
-          </a:effectRef>
-          <a:fontRef idx="minor">
-            <a:schemeClr val="lt1"/>
-          </a:fontRef>
-        </p:style>
-        <p:txBody>
-          <a:bodyPr rtlCol="0" anchor="ctr"/>
-          <a:lstStyle/>
-          <a:p>
-            <a:pPr algn="ctr"/>
-          </a:p>
-        </p:txBody>
-      </p:sp>
-      <p:sp>
-        <p:nvSpPr>
-          <p:cNvPr id="5" name="TextBox 4"/>
-          <p:cNvSpPr txBox="1"/>
-          <p:nvPr/>
-        </p:nvSpPr>
-        <p:spPr>
-          <a:xfrm>
-            <a:off x="822960" y="2103120"/>
-            <a:ext cx="3515258" cy="1188720"/>
-          </a:xfrm>
-          <a:prstGeom prst="rect">
-            <a:avLst/>
-          </a:prstGeom>
-          <a:noFill/>
-        </p:spPr>
-        <p:txBody>
-          <a:bodyPr wrap="square" anchor="t">
-            <a:spAutoFit/>
-          </a:bodyPr>
-          <a:lstStyle/>
-          <a:p>
-            <a:pPr algn="ctr">
-              <a:lnSpc>
-                <a:spcPct val="100000"/>
-              </a:lnSpc>
-            </a:pPr>
-            <a:r>
-              <a:rPr sz="6000" b="1">
-                <a:solidFill>
-                  <a:srgbClr val="A85B00"/>
-                </a:solidFill>
-                <a:latin typeface="Calibri"/>
-              </a:rPr>
-              <a:t>30</a:t>
-            </a:r>
-          </a:p>
-        </p:txBody>
-      </p:sp>
-      <p:sp>
-        <p:nvSpPr>
-          <p:cNvPr id="6" name="TextBox 5"/>
-          <p:cNvSpPr txBox="1"/>
-          <p:nvPr/>
-        </p:nvSpPr>
-        <p:spPr>
-          <a:xfrm>
-            <a:off x="822960" y="3246120"/>
-            <a:ext cx="3515258" cy="731520"/>
-          </a:xfrm>
-          <a:prstGeom prst="rect">
-            <a:avLst/>
-          </a:prstGeom>
-          <a:noFill/>
-        </p:spPr>
-        <p:txBody>
-          <a:bodyPr wrap="square" anchor="t">
-            <a:spAutoFit/>
-          </a:bodyPr>
-          <a:lstStyle/>
-          <a:p>
-            <a:pPr algn="ctr">
-              <a:lnSpc>
-                <a:spcPct val="100000"/>
-              </a:lnSpc>
-            </a:pPr>
-            <a:r>
-              <a:rPr sz="1400" b="0">
-                <a:solidFill>
-                  <a:srgbClr val="545C6E"/>
-                </a:solidFill>
-                <a:latin typeface="Calibri"/>
-              </a:rPr>
-              <a:t>flight searches a month.
-One search costs two</a:t>
-            </a:r>
-          </a:p>
-        </p:txBody>
-      </p:sp>
-      <p:sp>
-        <p:nvSpPr>
-          <p:cNvPr id="7" name="TextBox 6"/>
-          <p:cNvSpPr txBox="1"/>
-          <p:nvPr/>
-        </p:nvSpPr>
-        <p:spPr>
-          <a:xfrm>
-            <a:off x="4338218" y="2103120"/>
-            <a:ext cx="3515258" cy="1188720"/>
-          </a:xfrm>
-          <a:prstGeom prst="rect">
-            <a:avLst/>
-          </a:prstGeom>
-          <a:noFill/>
-        </p:spPr>
-        <p:txBody>
-          <a:bodyPr wrap="square" anchor="t">
-            <a:spAutoFit/>
-          </a:bodyPr>
-          <a:lstStyle/>
-          <a:p>
-            <a:pPr algn="ctr">
-              <a:lnSpc>
-                <a:spcPct val="100000"/>
-              </a:lnSpc>
-            </a:pPr>
-            <a:r>
-              <a:rPr sz="6000" b="1">
-                <a:solidFill>
-                  <a:srgbClr val="A85B00"/>
-                </a:solidFill>
-                <a:latin typeface="Calibri"/>
-              </a:rPr>
-              <a:t>50</a:t>
-            </a:r>
-          </a:p>
-        </p:txBody>
-      </p:sp>
-      <p:sp>
-        <p:nvSpPr>
-          <p:cNvPr id="8" name="TextBox 7"/>
-          <p:cNvSpPr txBox="1"/>
-          <p:nvPr/>
-        </p:nvSpPr>
-        <p:spPr>
-          <a:xfrm>
-            <a:off x="4338218" y="3246120"/>
-            <a:ext cx="3515258" cy="731520"/>
-          </a:xfrm>
-          <a:prstGeom prst="rect">
-            <a:avLst/>
-          </a:prstGeom>
-          <a:noFill/>
-        </p:spPr>
-        <p:txBody>
-          <a:bodyPr wrap="square" anchor="t">
-            <a:spAutoFit/>
-          </a:bodyPr>
-          <a:lstStyle/>
-          <a:p>
-            <a:pPr algn="ctr">
-              <a:lnSpc>
-                <a:spcPct val="100000"/>
-              </a:lnSpc>
-            </a:pPr>
-            <a:r>
-              <a:rPr sz="1400" b="0">
-                <a:solidFill>
-                  <a:srgbClr val="545C6E"/>
-                </a:solidFill>
-                <a:latin typeface="Calibri"/>
-              </a:rPr>
-              <a:t>hotel searches a month.
-Free plan, cannot buy more</a:t>
-            </a:r>
-          </a:p>
-        </p:txBody>
-      </p:sp>
-      <p:sp>
-        <p:nvSpPr>
-          <p:cNvPr id="9" name="TextBox 8"/>
-          <p:cNvSpPr txBox="1"/>
-          <p:nvPr/>
-        </p:nvSpPr>
-        <p:spPr>
-          <a:xfrm>
-            <a:off x="7853476" y="2103120"/>
-            <a:ext cx="3515258" cy="1188720"/>
-          </a:xfrm>
-          <a:prstGeom prst="rect">
-            <a:avLst/>
-          </a:prstGeom>
-          <a:noFill/>
-        </p:spPr>
-        <p:txBody>
-          <a:bodyPr wrap="square" anchor="t">
-            <a:spAutoFit/>
-          </a:bodyPr>
-          <a:lstStyle/>
-          <a:p>
-            <a:pPr algn="ctr">
-              <a:lnSpc>
-                <a:spcPct val="100000"/>
-              </a:lnSpc>
-            </a:pPr>
-            <a:r>
-              <a:rPr sz="6000" b="1">
-                <a:solidFill>
-                  <a:srgbClr val="A85B00"/>
-                </a:solidFill>
-                <a:latin typeface="Calibri"/>
-              </a:rPr>
-              <a:t>30</a:t>
-            </a:r>
-          </a:p>
-        </p:txBody>
-      </p:sp>
-      <p:sp>
-        <p:nvSpPr>
-          <p:cNvPr id="10" name="TextBox 9"/>
-          <p:cNvSpPr txBox="1"/>
-          <p:nvPr/>
-        </p:nvSpPr>
-        <p:spPr>
-          <a:xfrm>
-            <a:off x="7853476" y="3246120"/>
-            <a:ext cx="3515258" cy="731520"/>
-          </a:xfrm>
-          <a:prstGeom prst="rect">
-            <a:avLst/>
-          </a:prstGeom>
-          <a:noFill/>
-        </p:spPr>
-        <p:txBody>
-          <a:bodyPr wrap="square" anchor="t">
-            <a:spAutoFit/>
-          </a:bodyPr>
-          <a:lstStyle/>
-          <a:p>
-            <a:pPr algn="ctr">
-              <a:lnSpc>
-                <a:spcPct val="100000"/>
-              </a:lnSpc>
-            </a:pPr>
-            <a:r>
-              <a:rPr sz="1400" b="0">
-                <a:solidFill>
-                  <a:srgbClr val="545C6E"/>
-                </a:solidFill>
-                <a:latin typeface="Calibri"/>
-              </a:rPr>
-              <a:t>replies saved once,
-reused for ever</a:t>
-            </a:r>
-          </a:p>
-        </p:txBody>
-      </p:sp>
-      <p:sp>
-        <p:nvSpPr>
-          <p:cNvPr id="11" name="TextBox 10"/>
-          <p:cNvSpPr txBox="1"/>
-          <p:nvPr/>
-        </p:nvSpPr>
-        <p:spPr>
-          <a:xfrm>
-            <a:off x="822960" y="4846320"/>
-            <a:ext cx="10515600" cy="1280160"/>
-          </a:xfrm>
-          <a:prstGeom prst="rect">
-            <a:avLst/>
-          </a:prstGeom>
-          <a:noFill/>
-        </p:spPr>
-        <p:txBody>
-          <a:bodyPr wrap="square" anchor="t">
-            <a:spAutoFit/>
-          </a:bodyPr>
-          <a:lstStyle/>
-          <a:p>
-            <a:pPr algn="l">
-              <a:lnSpc>
-                <a:spcPct val="125000"/>
-              </a:lnSpc>
-            </a:pPr>
-            <a:r>
-              <a:rPr sz="2000" b="1">
-                <a:solidFill>
-                  <a:srgbClr val="161A23"/>
-                </a:solidFill>
-                <a:latin typeface="Calibri"/>
-              </a:rPr>
-              <a:t>Running out is not a delay. It is a month of waiting.</a:t>
-            </a:r>
-          </a:p>
-          <a:p>
-            <a:pPr algn="l">
-              <a:lnSpc>
-                <a:spcPct val="125000"/>
-              </a:lnSpc>
-            </a:pPr>
-            <a:r>
-              <a:rPr sz="1600" b="0">
-                <a:solidFill>
-                  <a:srgbClr val="545C6E"/>
-                </a:solidFill>
-                <a:latin typeface="Calibri"/>
-              </a:rPr>
-              <a:t>So I saved every reply to disk before building anything. That is why you can repeat my results with no API keys at all.</a:t>
-            </a:r>
-          </a:p>
-        </p:txBody>
-      </p:sp>
-    </p:spTree>
-  </p:cSld>
-  <p:clrMapOvr>
-    <a:masterClrMapping/>
-  </p:clrMapOvr>
-</p:sld>
-</file>
-
-<file path=ppt/slides/slide15.xml><?xml version="1.0" encoding="utf-8"?>
-<p:sld xmlns:a="http://schemas.openxmlformats.org/drawingml/2006/main" xmlns:p="http://schemas.openxmlformats.org/presentationml/2006/main" xmlns:r="http://schemas.openxmlformats.org/officeDocument/2006/relationships">
-  <p:cSld>
-    <p:spTree>
-      <p:nvGrpSpPr>
-        <p:cNvPr id="1" name=""/>
-        <p:cNvGrpSpPr/>
-        <p:nvPr/>
-      </p:nvGrpSpPr>
-      <p:grpSpPr/>
-      <p:sp>
-        <p:nvSpPr>
-          <p:cNvPr id="2" name="TextBox 1"/>
-          <p:cNvSpPr txBox="1"/>
-          <p:nvPr/>
-        </p:nvSpPr>
-        <p:spPr>
-          <a:xfrm>
-            <a:off x="822960" y="457200"/>
-            <a:ext cx="10515600" cy="365760"/>
-          </a:xfrm>
-          <a:prstGeom prst="rect">
-            <a:avLst/>
-          </a:prstGeom>
-          <a:noFill/>
-        </p:spPr>
-        <p:txBody>
-          <a:bodyPr wrap="square" anchor="t">
-            <a:spAutoFit/>
-          </a:bodyPr>
-          <a:lstStyle/>
-          <a:p>
-            <a:pPr algn="l">
-              <a:lnSpc>
-                <a:spcPct val="100000"/>
-              </a:lnSpc>
-            </a:pPr>
-            <a:r>
-              <a:rPr sz="1200" b="1">
-                <a:solidFill>
-                  <a:srgbClr val="4338CA"/>
-                </a:solidFill>
-                <a:latin typeface="Calibri"/>
-              </a:rPr>
-              <a:t>WHY THIS MATTERS</a:t>
+              <a:t>13  ·  WHY THIS MATTERS</a:t>
             </a:r>
           </a:p>
         </p:txBody>
@@ -6498,7 +6200,7 @@
                           </a:solidFill>
                           <a:latin typeface="Calibri"/>
                         </a:rPr>
-                        <a:t>AI agents are expensive by default, and most of the cost is spent on work that needs no intelligence</a:t>
+                        <a:t>AI agents are expensive by default, and most of the cost buys work that needs no intelligence</a:t>
                       </a:r>
                     </a:p>
                   </a:txBody>
@@ -6590,7 +6292,7 @@
                           </a:solidFill>
                           <a:latin typeface="Calibri"/>
                         </a:rPr>
-                        <a:t>You cannot tell a made-up plan from a real one by reading it. It has to be measured</a:t>
+                        <a:t>You cannot tell an invented plan from a real one by reading it. It has to be measured</a:t>
                       </a:r>
                     </a:p>
                   </a:txBody>
@@ -6636,7 +6338,7 @@
                           </a:solidFill>
                           <a:latin typeface="Calibri"/>
                         </a:rPr>
-                        <a:t>The same result comes out cheaper AND just as accurate, so there is no trade-off being hidden here</a:t>
+                        <a:t>The cheaper design was also just as accurate, so there is no hidden trade-off being sold here</a:t>
                       </a:r>
                     </a:p>
                   </a:txBody>
@@ -6698,7 +6400,242 @@
 </p:sld>
 </file>
 
-<file path=ppt/slides/slide16.xml><?xml version="1.0" encoding="utf-8"?>
+<file path=ppt/slides/slide15.xml><?xml version="1.0" encoding="utf-8"?>
+<p:sld xmlns:a="http://schemas.openxmlformats.org/drawingml/2006/main" xmlns:p="http://schemas.openxmlformats.org/presentationml/2006/main" xmlns:r="http://schemas.openxmlformats.org/officeDocument/2006/relationships">
+  <p:cSld>
+    <p:bg>
+      <p:bgPr>
+        <a:solidFill>
+          <a:srgbClr val="1E1B4B"/>
+        </a:solidFill>
+        <a:effectLst/>
+      </p:bgPr>
+    </p:bg>
+    <p:spTree>
+      <p:nvGrpSpPr>
+        <p:cNvPr id="1" name=""/>
+        <p:cNvGrpSpPr/>
+        <p:nvPr/>
+      </p:nvGrpSpPr>
+      <p:grpSpPr/>
+      <p:sp>
+        <p:nvSpPr>
+          <p:cNvPr id="2" name="TextBox 1"/>
+          <p:cNvSpPr txBox="1"/>
+          <p:nvPr/>
+        </p:nvSpPr>
+        <p:spPr>
+          <a:xfrm>
+            <a:off x="1005840" y="1554480"/>
+            <a:ext cx="10241280" cy="457200"/>
+          </a:xfrm>
+          <a:prstGeom prst="rect">
+            <a:avLst/>
+          </a:prstGeom>
+          <a:noFill/>
+        </p:spPr>
+        <p:txBody>
+          <a:bodyPr wrap="square" anchor="t">
+            <a:spAutoFit/>
+          </a:bodyPr>
+          <a:lstStyle/>
+          <a:p>
+            <a:pPr algn="l">
+              <a:lnSpc>
+                <a:spcPct val="100000"/>
+              </a:lnSpc>
+            </a:pPr>
+            <a:r>
+              <a:rPr sz="1400" b="1">
+                <a:solidFill>
+                  <a:srgbClr val="9CA3F5"/>
+                </a:solidFill>
+                <a:latin typeface="Calibri"/>
+              </a:rPr>
+              <a:t>IN ONE SENTENCE</a:t>
+            </a:r>
+          </a:p>
+        </p:txBody>
+      </p:sp>
+      <p:sp>
+        <p:nvSpPr>
+          <p:cNvPr id="3" name="TextBox 2"/>
+          <p:cNvSpPr txBox="1"/>
+          <p:nvPr/>
+        </p:nvSpPr>
+        <p:spPr>
+          <a:xfrm>
+            <a:off x="1005840" y="2011680"/>
+            <a:ext cx="10241280" cy="2194560"/>
+          </a:xfrm>
+          <a:prstGeom prst="rect">
+            <a:avLst/>
+          </a:prstGeom>
+          <a:noFill/>
+        </p:spPr>
+        <p:txBody>
+          <a:bodyPr wrap="square" anchor="t">
+            <a:spAutoFit/>
+          </a:bodyPr>
+          <a:lstStyle/>
+          <a:p>
+            <a:pPr algn="l">
+              <a:lnSpc>
+                <a:spcPct val="120000"/>
+              </a:lnSpc>
+            </a:pPr>
+            <a:r>
+              <a:rPr sz="3600" b="1">
+                <a:solidFill>
+                  <a:srgbClr val="FFFFFF"/>
+                </a:solidFill>
+                <a:latin typeface="Calibri"/>
+              </a:rPr>
+              <a:t>Use AI where a step needs thinking.</a:t>
+            </a:r>
+          </a:p>
+          <a:p>
+            <a:pPr algn="l">
+              <a:lnSpc>
+                <a:spcPct val="120000"/>
+              </a:lnSpc>
+            </a:pPr>
+            <a:r>
+              <a:rPr sz="3600" b="1">
+                <a:solidFill>
+                  <a:srgbClr val="6EE7DF"/>
+                </a:solidFill>
+                <a:latin typeface="Calibri"/>
+              </a:rPr>
+              <a:t>Everywhere else, it is just a bill.</a:t>
+            </a:r>
+          </a:p>
+        </p:txBody>
+      </p:sp>
+      <p:sp>
+        <p:nvSpPr>
+          <p:cNvPr id="4" name="Rectangle 3"/>
+          <p:cNvSpPr/>
+          <p:nvPr/>
+        </p:nvSpPr>
+        <p:spPr>
+          <a:xfrm>
+            <a:off x="1005840" y="4389120"/>
+            <a:ext cx="1463040" cy="34000"/>
+          </a:xfrm>
+          <a:prstGeom prst="rect">
+            <a:avLst/>
+          </a:prstGeom>
+          <a:solidFill>
+            <a:srgbClr val="0EA5A4"/>
+          </a:solidFill>
+          <a:ln>
+            <a:noFill/>
+          </a:ln>
+          <a:effectLst/>
+        </p:spPr>
+        <p:style>
+          <a:lnRef idx="1">
+            <a:schemeClr val="accent1"/>
+          </a:lnRef>
+          <a:fillRef idx="3">
+            <a:schemeClr val="accent1"/>
+          </a:fillRef>
+          <a:effectRef idx="2">
+            <a:schemeClr val="accent1"/>
+          </a:effectRef>
+          <a:fontRef idx="minor">
+            <a:schemeClr val="lt1"/>
+          </a:fontRef>
+        </p:style>
+        <p:txBody>
+          <a:bodyPr rtlCol="0" anchor="ctr"/>
+          <a:lstStyle/>
+          <a:p>
+            <a:pPr algn="ctr"/>
+          </a:p>
+        </p:txBody>
+      </p:sp>
+      <p:sp>
+        <p:nvSpPr>
+          <p:cNvPr id="5" name="TextBox 4"/>
+          <p:cNvSpPr txBox="1"/>
+          <p:nvPr/>
+        </p:nvSpPr>
+        <p:spPr>
+          <a:xfrm>
+            <a:off x="1005840" y="4709160"/>
+            <a:ext cx="10241280" cy="1463040"/>
+          </a:xfrm>
+          <a:prstGeom prst="rect">
+            <a:avLst/>
+          </a:prstGeom>
+          <a:noFill/>
+        </p:spPr>
+        <p:txBody>
+          <a:bodyPr wrap="square" anchor="t">
+            <a:spAutoFit/>
+          </a:bodyPr>
+          <a:lstStyle/>
+          <a:p>
+            <a:pPr algn="l">
+              <a:lnSpc>
+                <a:spcPct val="130000"/>
+              </a:lnSpc>
+            </a:pPr>
+            <a:r>
+              <a:rPr sz="1900" b="0">
+                <a:solidFill>
+                  <a:srgbClr val="C7D2FE"/>
+                </a:solidFill>
+                <a:latin typeface="Calibri"/>
+              </a:rPr>
+              <a:t>15x cheaper, no loss of accuracy, on 1 trip run 5 times.</a:t>
+            </a:r>
+          </a:p>
+          <a:p>
+            <a:pPr algn="l">
+              <a:lnSpc>
+                <a:spcPct val="130000"/>
+              </a:lnSpc>
+            </a:pPr>
+            <a:r>
+              <a:rPr sz="800" b="0">
+                <a:solidFill>
+                  <a:srgbClr val="FFFFFF"/>
+                </a:solidFill>
+                <a:latin typeface="Calibri"/>
+              </a:rPr>
+              <a:t/>
+            </a:r>
+          </a:p>
+          <a:p>
+            <a:pPr algn="l">
+              <a:lnSpc>
+                <a:spcPct val="130000"/>
+              </a:lnSpc>
+            </a:pPr>
+            <a:r>
+              <a:rPr sz="1500" b="0">
+                <a:solidFill>
+                  <a:srgbClr val="9CA3F5"/>
+                </a:solidFill>
+                <a:latin typeface="Calibri"/>
+              </a:rPr>
+              <a:t>Narrow coverage is the gap, and everything needed to widen it is saved and runs without keys.</a:t>
+            </a:r>
+          </a:p>
+        </p:txBody>
+      </p:sp>
+    </p:spTree>
+  </p:cSld>
+  <p:clrMapOvr>
+    <a:masterClrMapping/>
+  </p:clrMapOvr>
+</p:sld>
+</file>
+
+<file path=ppt/slides/slide2.xml><?xml version="1.0" encoding="utf-8"?>
 <p:sld xmlns:a="http://schemas.openxmlformats.org/drawingml/2006/main" xmlns:p="http://schemas.openxmlformats.org/presentationml/2006/main" xmlns:r="http://schemas.openxmlformats.org/officeDocument/2006/relationships">
   <p:cSld>
     <p:spTree>
@@ -6742,7 +6679,7 @@
                 </a:solidFill>
                 <a:latin typeface="Calibri"/>
               </a:rPr>
-              <a:t>WHAT I WOULD DO DIFFERENTLY</a:t>
+              <a:t>1  ·  THE PROBLEM</a:t>
             </a:r>
           </a:p>
         </p:txBody>
@@ -6781,7 +6718,7 @@
                 </a:solidFill>
                 <a:latin typeface="Calibri"/>
               </a:rPr>
-              <a:t>One mistake, and what it cost</a:t>
+              <a:t>AI is paid to do work that needs no thinking</a:t>
             </a:r>
           </a:p>
         </p:txBody>
@@ -6838,8 +6775,8 @@
         </p:nvSpPr>
         <p:spPr>
           <a:xfrm>
-            <a:off x="822960" y="2011680"/>
-            <a:ext cx="10515600" cy="3291840"/>
+            <a:off x="822960" y="2103120"/>
+            <a:ext cx="3515258" cy="1188720"/>
           </a:xfrm>
           <a:prstGeom prst="rect">
             <a:avLst/>
@@ -6852,83 +6789,272 @@
           </a:bodyPr>
           <a:lstStyle/>
           <a:p>
-            <a:pPr algn="l">
+            <a:pPr algn="ctr">
               <a:lnSpc>
-                <a:spcPct val="130000"/>
+                <a:spcPct val="100000"/>
               </a:lnSpc>
             </a:pPr>
             <a:r>
-              <a:rPr sz="2400" b="1">
+              <a:rPr sz="6000" b="1">
                 <a:solidFill>
-                  <a:srgbClr val="4338CA"/>
+                  <a:srgbClr val="A85B00"/>
                 </a:solidFill>
                 <a:latin typeface="Calibri"/>
               </a:rPr>
-              <a:t>I built the measuring last. It should have been first.</a:t>
-            </a:r>
-          </a:p>
+              <a:t>21</a:t>
+            </a:r>
+          </a:p>
+        </p:txBody>
+      </p:sp>
+      <p:sp>
+        <p:nvSpPr>
+          <p:cNvPr id="6" name="TextBox 5"/>
+          <p:cNvSpPr txBox="1"/>
+          <p:nvPr/>
+        </p:nvSpPr>
+        <p:spPr>
+          <a:xfrm>
+            <a:off x="822960" y="3246120"/>
+            <a:ext cx="3515258" cy="731520"/>
+          </a:xfrm>
+          <a:prstGeom prst="rect">
+            <a:avLst/>
+          </a:prstGeom>
+          <a:noFill/>
+        </p:spPr>
+        <p:txBody>
+          <a:bodyPr wrap="square" anchor="t">
+            <a:spAutoFit/>
+          </a:bodyPr>
+          <a:lstStyle/>
+          <a:p>
+            <a:pPr algn="ctr">
+              <a:lnSpc>
+                <a:spcPct val="100000"/>
+              </a:lnSpc>
+            </a:pPr>
+            <a:r>
+              <a:rPr sz="1400" b="0">
+                <a:solidFill>
+                  <a:srgbClr val="545C6E"/>
+                </a:solidFill>
+                <a:latin typeface="Calibri"/>
+              </a:rPr>
+              <a:t>AI calls to plan one trip
+when agents fetch the data</a:t>
+            </a:r>
+          </a:p>
+        </p:txBody>
+      </p:sp>
+      <p:sp>
+        <p:nvSpPr>
+          <p:cNvPr id="7" name="TextBox 6"/>
+          <p:cNvSpPr txBox="1"/>
+          <p:nvPr/>
+        </p:nvSpPr>
+        <p:spPr>
+          <a:xfrm>
+            <a:off x="4338218" y="2103120"/>
+            <a:ext cx="3515258" cy="1188720"/>
+          </a:xfrm>
+          <a:prstGeom prst="rect">
+            <a:avLst/>
+          </a:prstGeom>
+          <a:noFill/>
+        </p:spPr>
+        <p:txBody>
+          <a:bodyPr wrap="square" anchor="t">
+            <a:spAutoFit/>
+          </a:bodyPr>
+          <a:lstStyle/>
+          <a:p>
+            <a:pPr algn="ctr">
+              <a:lnSpc>
+                <a:spcPct val="100000"/>
+              </a:lnSpc>
+            </a:pPr>
+            <a:r>
+              <a:rPr sz="6000" b="1">
+                <a:solidFill>
+                  <a:srgbClr val="A85B00"/>
+                </a:solidFill>
+                <a:latin typeface="Calibri"/>
+              </a:rPr>
+              <a:t>2</a:t>
+            </a:r>
+          </a:p>
+        </p:txBody>
+      </p:sp>
+      <p:sp>
+        <p:nvSpPr>
+          <p:cNvPr id="8" name="TextBox 7"/>
+          <p:cNvSpPr txBox="1"/>
+          <p:nvPr/>
+        </p:nvSpPr>
+        <p:spPr>
+          <a:xfrm>
+            <a:off x="4338218" y="3246120"/>
+            <a:ext cx="3515258" cy="731520"/>
+          </a:xfrm>
+          <a:prstGeom prst="rect">
+            <a:avLst/>
+          </a:prstGeom>
+          <a:noFill/>
+        </p:spPr>
+        <p:txBody>
+          <a:bodyPr wrap="square" anchor="t">
+            <a:spAutoFit/>
+          </a:bodyPr>
+          <a:lstStyle/>
+          <a:p>
+            <a:pPr algn="ctr">
+              <a:lnSpc>
+                <a:spcPct val="100000"/>
+              </a:lnSpc>
+            </a:pPr>
+            <a:r>
+              <a:rPr sz="1400" b="0">
+                <a:solidFill>
+                  <a:srgbClr val="545C6E"/>
+                </a:solidFill>
+                <a:latin typeface="Calibri"/>
+              </a:rPr>
+              <a:t>AI calls for the same trip
+when normal code fetches it</a:t>
+            </a:r>
+          </a:p>
+        </p:txBody>
+      </p:sp>
+      <p:sp>
+        <p:nvSpPr>
+          <p:cNvPr id="9" name="TextBox 8"/>
+          <p:cNvSpPr txBox="1"/>
+          <p:nvPr/>
+        </p:nvSpPr>
+        <p:spPr>
+          <a:xfrm>
+            <a:off x="7853476" y="2103120"/>
+            <a:ext cx="3515258" cy="1188720"/>
+          </a:xfrm>
+          <a:prstGeom prst="rect">
+            <a:avLst/>
+          </a:prstGeom>
+          <a:noFill/>
+        </p:spPr>
+        <p:txBody>
+          <a:bodyPr wrap="square" anchor="t">
+            <a:spAutoFit/>
+          </a:bodyPr>
+          <a:lstStyle/>
+          <a:p>
+            <a:pPr algn="ctr">
+              <a:lnSpc>
+                <a:spcPct val="100000"/>
+              </a:lnSpc>
+            </a:pPr>
+            <a:r>
+              <a:rPr sz="6000" b="1">
+                <a:solidFill>
+                  <a:srgbClr val="A85B00"/>
+                </a:solidFill>
+                <a:latin typeface="Calibri"/>
+              </a:rPr>
+              <a:t>15x</a:t>
+            </a:r>
+          </a:p>
+        </p:txBody>
+      </p:sp>
+      <p:sp>
+        <p:nvSpPr>
+          <p:cNvPr id="10" name="TextBox 9"/>
+          <p:cNvSpPr txBox="1"/>
+          <p:nvPr/>
+        </p:nvSpPr>
+        <p:spPr>
+          <a:xfrm>
+            <a:off x="7853476" y="3246120"/>
+            <a:ext cx="3515258" cy="731520"/>
+          </a:xfrm>
+          <a:prstGeom prst="rect">
+            <a:avLst/>
+          </a:prstGeom>
+          <a:noFill/>
+        </p:spPr>
+        <p:txBody>
+          <a:bodyPr wrap="square" anchor="t">
+            <a:spAutoFit/>
+          </a:bodyPr>
+          <a:lstStyle/>
+          <a:p>
+            <a:pPr algn="ctr">
+              <a:lnSpc>
+                <a:spcPct val="100000"/>
+              </a:lnSpc>
+            </a:pPr>
+            <a:r>
+              <a:rPr sz="1400" b="0">
+                <a:solidFill>
+                  <a:srgbClr val="545C6E"/>
+                </a:solidFill>
+                <a:latin typeface="Calibri"/>
+              </a:rPr>
+              <a:t>more text sent to the AI,
+same finished plan</a:t>
+            </a:r>
+          </a:p>
+        </p:txBody>
+      </p:sp>
+      <p:sp>
+        <p:nvSpPr>
+          <p:cNvPr id="11" name="TextBox 10"/>
+          <p:cNvSpPr txBox="1"/>
+          <p:nvPr/>
+        </p:nvSpPr>
+        <p:spPr>
+          <a:xfrm>
+            <a:off x="822960" y="4846320"/>
+            <a:ext cx="10515600" cy="1280160"/>
+          </a:xfrm>
+          <a:prstGeom prst="rect">
+            <a:avLst/>
+          </a:prstGeom>
+          <a:noFill/>
+        </p:spPr>
+        <p:txBody>
+          <a:bodyPr wrap="square" anchor="t">
+            <a:spAutoFit/>
+          </a:bodyPr>
+          <a:lstStyle/>
           <a:p>
             <a:pPr algn="l">
               <a:lnSpc>
-                <a:spcPct val="130000"/>
+                <a:spcPct val="125000"/>
               </a:lnSpc>
             </a:pPr>
             <a:r>
-              <a:rPr sz="1000" b="0">
+              <a:rPr sz="2100" b="1">
                 <a:solidFill>
                   <a:srgbClr val="161A23"/>
                 </a:solidFill>
                 <a:latin typeface="Calibri"/>
               </a:rPr>
-              <a:t/>
+              <a:t>Looking up a flight price is one web request. It needs no thinking.</a:t>
             </a:r>
           </a:p>
           <a:p>
             <a:pPr algn="l">
               <a:lnSpc>
-                <a:spcPct val="130000"/>
+                <a:spcPct val="125000"/>
               </a:lnSpc>
             </a:pPr>
             <a:r>
               <a:rPr sz="1700" b="0">
                 <a:solidFill>
-                  <a:srgbClr val="161A23"/>
+                  <a:srgbClr val="545C6E"/>
                 </a:solidFill>
                 <a:latin typeface="Calibri"/>
               </a:rPr>
-              <a:t>Six agents became three only because measuring showed where the cost was going. That evidence arrived after the system was already built, so changing it meant rebuilding.</a:t>
-            </a:r>
-          </a:p>
-          <a:p>
-            <a:pPr algn="l">
-              <a:lnSpc>
-                <a:spcPct val="130000"/>
-              </a:lnSpc>
-            </a:pPr>
-            <a:r>
-              <a:rPr sz="800" b="0">
-                <a:solidFill>
-                  <a:srgbClr val="161A23"/>
-                </a:solidFill>
-                <a:latin typeface="Calibri"/>
-              </a:rPr>
-              <a:t/>
-            </a:r>
-          </a:p>
-          <a:p>
-            <a:pPr algn="l">
-              <a:lnSpc>
-                <a:spcPct val="130000"/>
-              </a:lnSpc>
-            </a:pPr>
-            <a:r>
-              <a:rPr sz="1900" b="1">
-                <a:solidFill>
-                  <a:srgbClr val="161A23"/>
-                </a:solidFill>
-                <a:latin typeface="Calibri"/>
-              </a:rPr>
-              <a:t>Build the counter before the thing being counted.</a:t>
+              <a:t>But when an AI agent does the looking up, you pay for every step it takes to decide.</a:t>
             </a:r>
           </a:p>
         </p:txBody>
@@ -6941,242 +7067,7 @@
 </p:sld>
 </file>
 
-<file path=ppt/slides/slide17.xml><?xml version="1.0" encoding="utf-8"?>
-<p:sld xmlns:a="http://schemas.openxmlformats.org/drawingml/2006/main" xmlns:p="http://schemas.openxmlformats.org/presentationml/2006/main" xmlns:r="http://schemas.openxmlformats.org/officeDocument/2006/relationships">
-  <p:cSld>
-    <p:bg>
-      <p:bgPr>
-        <a:solidFill>
-          <a:srgbClr val="1E1B4B"/>
-        </a:solidFill>
-        <a:effectLst/>
-      </p:bgPr>
-    </p:bg>
-    <p:spTree>
-      <p:nvGrpSpPr>
-        <p:cNvPr id="1" name=""/>
-        <p:cNvGrpSpPr/>
-        <p:nvPr/>
-      </p:nvGrpSpPr>
-      <p:grpSpPr/>
-      <p:sp>
-        <p:nvSpPr>
-          <p:cNvPr id="2" name="TextBox 1"/>
-          <p:cNvSpPr txBox="1"/>
-          <p:nvPr/>
-        </p:nvSpPr>
-        <p:spPr>
-          <a:xfrm>
-            <a:off x="1005840" y="1463040"/>
-            <a:ext cx="10241280" cy="457200"/>
-          </a:xfrm>
-          <a:prstGeom prst="rect">
-            <a:avLst/>
-          </a:prstGeom>
-          <a:noFill/>
-        </p:spPr>
-        <p:txBody>
-          <a:bodyPr wrap="square" anchor="t">
-            <a:spAutoFit/>
-          </a:bodyPr>
-          <a:lstStyle/>
-          <a:p>
-            <a:pPr algn="l">
-              <a:lnSpc>
-                <a:spcPct val="100000"/>
-              </a:lnSpc>
-            </a:pPr>
-            <a:r>
-              <a:rPr sz="1400" b="1">
-                <a:solidFill>
-                  <a:srgbClr val="9CA3F5"/>
-                </a:solidFill>
-                <a:latin typeface="Calibri"/>
-              </a:rPr>
-              <a:t>IN ONE SENTENCE</a:t>
-            </a:r>
-          </a:p>
-        </p:txBody>
-      </p:sp>
-      <p:sp>
-        <p:nvSpPr>
-          <p:cNvPr id="3" name="TextBox 2"/>
-          <p:cNvSpPr txBox="1"/>
-          <p:nvPr/>
-        </p:nvSpPr>
-        <p:spPr>
-          <a:xfrm>
-            <a:off x="1005840" y="1920240"/>
-            <a:ext cx="10241280" cy="2194560"/>
-          </a:xfrm>
-          <a:prstGeom prst="rect">
-            <a:avLst/>
-          </a:prstGeom>
-          <a:noFill/>
-        </p:spPr>
-        <p:txBody>
-          <a:bodyPr wrap="square" anchor="t">
-            <a:spAutoFit/>
-          </a:bodyPr>
-          <a:lstStyle/>
-          <a:p>
-            <a:pPr algn="l">
-              <a:lnSpc>
-                <a:spcPct val="120000"/>
-              </a:lnSpc>
-            </a:pPr>
-            <a:r>
-              <a:rPr sz="3400" b="1">
-                <a:solidFill>
-                  <a:srgbClr val="FFFFFF"/>
-                </a:solidFill>
-                <a:latin typeface="Calibri"/>
-              </a:rPr>
-              <a:t>Use AI where a step needs thinking.</a:t>
-            </a:r>
-          </a:p>
-          <a:p>
-            <a:pPr algn="l">
-              <a:lnSpc>
-                <a:spcPct val="120000"/>
-              </a:lnSpc>
-            </a:pPr>
-            <a:r>
-              <a:rPr sz="3400" b="1">
-                <a:solidFill>
-                  <a:srgbClr val="6EE7DF"/>
-                </a:solidFill>
-                <a:latin typeface="Calibri"/>
-              </a:rPr>
-              <a:t>Everywhere else, it is just a bill.</a:t>
-            </a:r>
-          </a:p>
-        </p:txBody>
-      </p:sp>
-      <p:sp>
-        <p:nvSpPr>
-          <p:cNvPr id="4" name="Rectangle 3"/>
-          <p:cNvSpPr/>
-          <p:nvPr/>
-        </p:nvSpPr>
-        <p:spPr>
-          <a:xfrm>
-            <a:off x="1005840" y="4297680"/>
-            <a:ext cx="1463040" cy="34000"/>
-          </a:xfrm>
-          <a:prstGeom prst="rect">
-            <a:avLst/>
-          </a:prstGeom>
-          <a:solidFill>
-            <a:srgbClr val="0EA5A4"/>
-          </a:solidFill>
-          <a:ln>
-            <a:noFill/>
-          </a:ln>
-          <a:effectLst/>
-        </p:spPr>
-        <p:style>
-          <a:lnRef idx="1">
-            <a:schemeClr val="accent1"/>
-          </a:lnRef>
-          <a:fillRef idx="3">
-            <a:schemeClr val="accent1"/>
-          </a:fillRef>
-          <a:effectRef idx="2">
-            <a:schemeClr val="accent1"/>
-          </a:effectRef>
-          <a:fontRef idx="minor">
-            <a:schemeClr val="lt1"/>
-          </a:fontRef>
-        </p:style>
-        <p:txBody>
-          <a:bodyPr rtlCol="0" anchor="ctr"/>
-          <a:lstStyle/>
-          <a:p>
-            <a:pPr algn="ctr"/>
-          </a:p>
-        </p:txBody>
-      </p:sp>
-      <p:sp>
-        <p:nvSpPr>
-          <p:cNvPr id="5" name="TextBox 4"/>
-          <p:cNvSpPr txBox="1"/>
-          <p:nvPr/>
-        </p:nvSpPr>
-        <p:spPr>
-          <a:xfrm>
-            <a:off x="1005840" y="4617720"/>
-            <a:ext cx="10241280" cy="1463040"/>
-          </a:xfrm>
-          <a:prstGeom prst="rect">
-            <a:avLst/>
-          </a:prstGeom>
-          <a:noFill/>
-        </p:spPr>
-        <p:txBody>
-          <a:bodyPr wrap="square" anchor="t">
-            <a:spAutoFit/>
-          </a:bodyPr>
-          <a:lstStyle/>
-          <a:p>
-            <a:pPr algn="l">
-              <a:lnSpc>
-                <a:spcPct val="130000"/>
-              </a:lnSpc>
-            </a:pPr>
-            <a:r>
-              <a:rPr sz="1800" b="0">
-                <a:solidFill>
-                  <a:srgbClr val="C7D2FE"/>
-                </a:solidFill>
-                <a:latin typeface="Calibri"/>
-              </a:rPr>
-              <a:t>15x cheaper, no loss of accuracy, measured on 1 trip run 5 times.</a:t>
-            </a:r>
-          </a:p>
-          <a:p>
-            <a:pPr algn="l">
-              <a:lnSpc>
-                <a:spcPct val="130000"/>
-              </a:lnSpc>
-            </a:pPr>
-            <a:r>
-              <a:rPr sz="800" b="0">
-                <a:solidFill>
-                  <a:srgbClr val="FFFFFF"/>
-                </a:solidFill>
-                <a:latin typeface="Calibri"/>
-              </a:rPr>
-              <a:t/>
-            </a:r>
-          </a:p>
-          <a:p>
-            <a:pPr algn="l">
-              <a:lnSpc>
-                <a:spcPct val="130000"/>
-              </a:lnSpc>
-            </a:pPr>
-            <a:r>
-              <a:rPr sz="1500" b="0">
-                <a:solidFill>
-                  <a:srgbClr val="9CA3F5"/>
-                </a:solidFill>
-                <a:latin typeface="Calibri"/>
-              </a:rPr>
-              <a:t>Narrow coverage is the gap. Everything needed to widen it is saved and runs without keys.</a:t>
-            </a:r>
-          </a:p>
-        </p:txBody>
-      </p:sp>
-    </p:spTree>
-  </p:cSld>
-  <p:clrMapOvr>
-    <a:masterClrMapping/>
-  </p:clrMapOvr>
-</p:sld>
-</file>
-
-<file path=ppt/slides/slide2.xml><?xml version="1.0" encoding="utf-8"?>
+<file path=ppt/slides/slide3.xml><?xml version="1.0" encoding="utf-8"?>
 <p:sld xmlns:a="http://schemas.openxmlformats.org/drawingml/2006/main" xmlns:p="http://schemas.openxmlformats.org/presentationml/2006/main" xmlns:r="http://schemas.openxmlformats.org/officeDocument/2006/relationships">
   <p:cSld>
     <p:spTree>
@@ -7220,7 +7111,7 @@
                 </a:solidFill>
                 <a:latin typeface="Calibri"/>
               </a:rPr>
-              <a:t>THE PROBLEM</a:t>
+              <a:t>2  ·  MY SOLUTION</a:t>
             </a:r>
           </a:p>
         </p:txBody>
@@ -7259,7 +7150,7 @@
                 </a:solidFill>
                 <a:latin typeface="Calibri"/>
               </a:rPr>
-              <a:t>AI is being used for jobs that do not need it</a:t>
+              <a:t>One rule, applied to every step</a:t>
             </a:r>
           </a:p>
         </p:txBody>
@@ -7316,244 +7207,7 @@
         </p:nvSpPr>
         <p:spPr>
           <a:xfrm>
-            <a:off x="822960" y="2103120"/>
-            <a:ext cx="3515258" cy="1188720"/>
-          </a:xfrm>
-          <a:prstGeom prst="rect">
-            <a:avLst/>
-          </a:prstGeom>
-          <a:noFill/>
-        </p:spPr>
-        <p:txBody>
-          <a:bodyPr wrap="square" anchor="t">
-            <a:spAutoFit/>
-          </a:bodyPr>
-          <a:lstStyle/>
-          <a:p>
-            <a:pPr algn="ctr">
-              <a:lnSpc>
-                <a:spcPct val="100000"/>
-              </a:lnSpc>
-            </a:pPr>
-            <a:r>
-              <a:rPr sz="6000" b="1">
-                <a:solidFill>
-                  <a:srgbClr val="4338CA"/>
-                </a:solidFill>
-                <a:latin typeface="Calibri"/>
-              </a:rPr>
-              <a:t>21</a:t>
-            </a:r>
-          </a:p>
-        </p:txBody>
-      </p:sp>
-      <p:sp>
-        <p:nvSpPr>
-          <p:cNvPr id="6" name="TextBox 5"/>
-          <p:cNvSpPr txBox="1"/>
-          <p:nvPr/>
-        </p:nvSpPr>
-        <p:spPr>
-          <a:xfrm>
-            <a:off x="822960" y="3246120"/>
-            <a:ext cx="3515258" cy="731520"/>
-          </a:xfrm>
-          <a:prstGeom prst="rect">
-            <a:avLst/>
-          </a:prstGeom>
-          <a:noFill/>
-        </p:spPr>
-        <p:txBody>
-          <a:bodyPr wrap="square" anchor="t">
-            <a:spAutoFit/>
-          </a:bodyPr>
-          <a:lstStyle/>
-          <a:p>
-            <a:pPr algn="ctr">
-              <a:lnSpc>
-                <a:spcPct val="100000"/>
-              </a:lnSpc>
-            </a:pPr>
-            <a:r>
-              <a:rPr sz="1400" b="0">
-                <a:solidFill>
-                  <a:srgbClr val="545C6E"/>
-                </a:solidFill>
-                <a:latin typeface="Calibri"/>
-              </a:rPr>
-              <a:t>AI calls to plan one trip
-when agents fetch the data</a:t>
-            </a:r>
-          </a:p>
-        </p:txBody>
-      </p:sp>
-      <p:sp>
-        <p:nvSpPr>
-          <p:cNvPr id="7" name="TextBox 6"/>
-          <p:cNvSpPr txBox="1"/>
-          <p:nvPr/>
-        </p:nvSpPr>
-        <p:spPr>
-          <a:xfrm>
-            <a:off x="4338218" y="2103120"/>
-            <a:ext cx="3515258" cy="1188720"/>
-          </a:xfrm>
-          <a:prstGeom prst="rect">
-            <a:avLst/>
-          </a:prstGeom>
-          <a:noFill/>
-        </p:spPr>
-        <p:txBody>
-          <a:bodyPr wrap="square" anchor="t">
-            <a:spAutoFit/>
-          </a:bodyPr>
-          <a:lstStyle/>
-          <a:p>
-            <a:pPr algn="ctr">
-              <a:lnSpc>
-                <a:spcPct val="100000"/>
-              </a:lnSpc>
-            </a:pPr>
-            <a:r>
-              <a:rPr sz="6000" b="1">
-                <a:solidFill>
-                  <a:srgbClr val="4338CA"/>
-                </a:solidFill>
-                <a:latin typeface="Calibri"/>
-              </a:rPr>
-              <a:t>2</a:t>
-            </a:r>
-          </a:p>
-        </p:txBody>
-      </p:sp>
-      <p:sp>
-        <p:nvSpPr>
-          <p:cNvPr id="8" name="TextBox 7"/>
-          <p:cNvSpPr txBox="1"/>
-          <p:nvPr/>
-        </p:nvSpPr>
-        <p:spPr>
-          <a:xfrm>
-            <a:off x="4338218" y="3246120"/>
-            <a:ext cx="3515258" cy="731520"/>
-          </a:xfrm>
-          <a:prstGeom prst="rect">
-            <a:avLst/>
-          </a:prstGeom>
-          <a:noFill/>
-        </p:spPr>
-        <p:txBody>
-          <a:bodyPr wrap="square" anchor="t">
-            <a:spAutoFit/>
-          </a:bodyPr>
-          <a:lstStyle/>
-          <a:p>
-            <a:pPr algn="ctr">
-              <a:lnSpc>
-                <a:spcPct val="100000"/>
-              </a:lnSpc>
-            </a:pPr>
-            <a:r>
-              <a:rPr sz="1400" b="0">
-                <a:solidFill>
-                  <a:srgbClr val="545C6E"/>
-                </a:solidFill>
-                <a:latin typeface="Calibri"/>
-              </a:rPr>
-              <a:t>AI calls for the same trip
-when normal code fetches it</a:t>
-            </a:r>
-          </a:p>
-        </p:txBody>
-      </p:sp>
-      <p:sp>
-        <p:nvSpPr>
-          <p:cNvPr id="9" name="TextBox 8"/>
-          <p:cNvSpPr txBox="1"/>
-          <p:nvPr/>
-        </p:nvSpPr>
-        <p:spPr>
-          <a:xfrm>
-            <a:off x="7853476" y="2103120"/>
-            <a:ext cx="3515258" cy="1188720"/>
-          </a:xfrm>
-          <a:prstGeom prst="rect">
-            <a:avLst/>
-          </a:prstGeom>
-          <a:noFill/>
-        </p:spPr>
-        <p:txBody>
-          <a:bodyPr wrap="square" anchor="t">
-            <a:spAutoFit/>
-          </a:bodyPr>
-          <a:lstStyle/>
-          <a:p>
-            <a:pPr algn="ctr">
-              <a:lnSpc>
-                <a:spcPct val="100000"/>
-              </a:lnSpc>
-            </a:pPr>
-            <a:r>
-              <a:rPr sz="6000" b="1">
-                <a:solidFill>
-                  <a:srgbClr val="4338CA"/>
-                </a:solidFill>
-                <a:latin typeface="Calibri"/>
-              </a:rPr>
-              <a:t>15x</a:t>
-            </a:r>
-          </a:p>
-        </p:txBody>
-      </p:sp>
-      <p:sp>
-        <p:nvSpPr>
-          <p:cNvPr id="10" name="TextBox 9"/>
-          <p:cNvSpPr txBox="1"/>
-          <p:nvPr/>
-        </p:nvSpPr>
-        <p:spPr>
-          <a:xfrm>
-            <a:off x="7853476" y="3246120"/>
-            <a:ext cx="3515258" cy="731520"/>
-          </a:xfrm>
-          <a:prstGeom prst="rect">
-            <a:avLst/>
-          </a:prstGeom>
-          <a:noFill/>
-        </p:spPr>
-        <p:txBody>
-          <a:bodyPr wrap="square" anchor="t">
-            <a:spAutoFit/>
-          </a:bodyPr>
-          <a:lstStyle/>
-          <a:p>
-            <a:pPr algn="ctr">
-              <a:lnSpc>
-                <a:spcPct val="100000"/>
-              </a:lnSpc>
-            </a:pPr>
-            <a:r>
-              <a:rPr sz="1400" b="0">
-                <a:solidFill>
-                  <a:srgbClr val="545C6E"/>
-                </a:solidFill>
-                <a:latin typeface="Calibri"/>
-              </a:rPr>
-              <a:t>more text sent to the AI,
-for the same finished plan</a:t>
-            </a:r>
-          </a:p>
-        </p:txBody>
-      </p:sp>
-      <p:sp>
-        <p:nvSpPr>
-          <p:cNvPr id="11" name="TextBox 10"/>
-          <p:cNvSpPr txBox="1"/>
-          <p:nvPr/>
-        </p:nvSpPr>
-        <p:spPr>
-          <a:xfrm>
-            <a:off x="822960" y="4846320"/>
+            <a:off x="822960" y="2011680"/>
             <a:ext cx="10515600" cy="1280160"/>
           </a:xfrm>
           <a:prstGeom prst="rect">
@@ -7569,6 +7223,276 @@
           <a:p>
             <a:pPr algn="l">
               <a:lnSpc>
+                <a:spcPct val="100000"/>
+              </a:lnSpc>
+            </a:pPr>
+            <a:r>
+              <a:rPr sz="3200" b="1">
+                <a:solidFill>
+                  <a:srgbClr val="4338CA"/>
+                </a:solidFill>
+                <a:latin typeface="Calibri"/>
+              </a:rPr>
+              <a:t>Could I write this step as ordinary code?</a:t>
+            </a:r>
+          </a:p>
+        </p:txBody>
+      </p:sp>
+      <p:graphicFrame>
+        <p:nvGraphicFramePr>
+          <p:cNvPr id="6" name="Table 5"/>
+          <p:cNvGraphicFramePr>
+            <a:graphicFrameLocks noGrp="1"/>
+          </p:cNvGraphicFramePr>
+          <p:nvPr/>
+        </p:nvGraphicFramePr>
+        <p:xfrm>
+          <a:off x="822960" y="3200400"/>
+          <a:ext cx="10515598" cy="1097280"/>
+        </p:xfrm>
+        <a:graphic>
+          <a:graphicData uri="http://schemas.openxmlformats.org/drawingml/2006/table">
+            <a:tbl>
+              <a:tblPr firstRow="1" bandRow="1">
+                <a:tableStyleId>{5C22544A-7EE6-4342-B048-85BDC9FD1C3A}</a:tableStyleId>
+              </a:tblPr>
+              <a:tblGrid>
+                <a:gridCol w="2426676"/>
+                <a:gridCol w="1617784"/>
+                <a:gridCol w="6471138"/>
+              </a:tblGrid>
+              <a:tr h="365760">
+                <a:tc>
+                  <a:txBody>
+                    <a:bodyPr/>
+                    <a:lstStyle/>
+                    <a:p>
+                      <a:r>
+                        <a:rPr sz="1400" b="1">
+                          <a:solidFill>
+                            <a:srgbClr val="FFFFFF"/>
+                          </a:solidFill>
+                          <a:latin typeface="Calibri"/>
+                        </a:rPr>
+                        <a:t>Answer</a:t>
+                      </a:r>
+                    </a:p>
+                  </a:txBody>
+                  <a:tcPr>
+                    <a:solidFill>
+                      <a:srgbClr val="4338CA"/>
+                    </a:solidFill>
+                  </a:tcPr>
+                </a:tc>
+                <a:tc>
+                  <a:txBody>
+                    <a:bodyPr/>
+                    <a:lstStyle/>
+                    <a:p>
+                      <a:r>
+                        <a:rPr sz="1400" b="1">
+                          <a:solidFill>
+                            <a:srgbClr val="FFFFFF"/>
+                          </a:solidFill>
+                          <a:latin typeface="Calibri"/>
+                        </a:rPr>
+                        <a:t>So</a:t>
+                      </a:r>
+                    </a:p>
+                  </a:txBody>
+                  <a:tcPr>
+                    <a:solidFill>
+                      <a:srgbClr val="4338CA"/>
+                    </a:solidFill>
+                  </a:tcPr>
+                </a:tc>
+                <a:tc>
+                  <a:txBody>
+                    <a:bodyPr/>
+                    <a:lstStyle/>
+                    <a:p>
+                      <a:r>
+                        <a:rPr sz="1400" b="1">
+                          <a:solidFill>
+                            <a:srgbClr val="FFFFFF"/>
+                          </a:solidFill>
+                          <a:latin typeface="Calibri"/>
+                        </a:rPr>
+                        <a:t>Which steps</a:t>
+                      </a:r>
+                    </a:p>
+                  </a:txBody>
+                  <a:tcPr>
+                    <a:solidFill>
+                      <a:srgbClr val="4338CA"/>
+                    </a:solidFill>
+                  </a:tcPr>
+                </a:tc>
+              </a:tr>
+              <a:tr h="365760">
+                <a:tc>
+                  <a:txBody>
+                    <a:bodyPr/>
+                    <a:lstStyle/>
+                    <a:p>
+                      <a:r>
+                        <a:rPr sz="1400" b="0">
+                          <a:solidFill>
+                            <a:srgbClr val="161A23"/>
+                          </a:solidFill>
+                          <a:latin typeface="Calibri"/>
+                        </a:rPr>
+                        <a:t>No — it needs judgement</a:t>
+                      </a:r>
+                    </a:p>
+                  </a:txBody>
+                  <a:tcPr>
+                    <a:solidFill>
+                      <a:srgbClr val="FFFFFF"/>
+                    </a:solidFill>
+                  </a:tcPr>
+                </a:tc>
+                <a:tc>
+                  <a:txBody>
+                    <a:bodyPr/>
+                    <a:lstStyle/>
+                    <a:p>
+                      <a:r>
+                        <a:rPr sz="1400" b="0">
+                          <a:solidFill>
+                            <a:srgbClr val="161A23"/>
+                          </a:solidFill>
+                          <a:latin typeface="Calibri"/>
+                        </a:rPr>
+                        <a:t>use AI</a:t>
+                      </a:r>
+                    </a:p>
+                  </a:txBody>
+                  <a:tcPr>
+                    <a:solidFill>
+                      <a:srgbClr val="FFFFFF"/>
+                    </a:solidFill>
+                  </a:tcPr>
+                </a:tc>
+                <a:tc>
+                  <a:txBody>
+                    <a:bodyPr/>
+                    <a:lstStyle/>
+                    <a:p>
+                      <a:r>
+                        <a:rPr sz="1400" b="0">
+                          <a:solidFill>
+                            <a:srgbClr val="161A23"/>
+                          </a:solidFill>
+                          <a:latin typeface="Calibri"/>
+                        </a:rPr>
+                        <a:t>Reading the request  ·  Writing the day-by-day plan</a:t>
+                      </a:r>
+                    </a:p>
+                  </a:txBody>
+                  <a:tcPr>
+                    <a:solidFill>
+                      <a:srgbClr val="FFFFFF"/>
+                    </a:solidFill>
+                  </a:tcPr>
+                </a:tc>
+              </a:tr>
+              <a:tr h="365760">
+                <a:tc>
+                  <a:txBody>
+                    <a:bodyPr/>
+                    <a:lstStyle/>
+                    <a:p>
+                      <a:r>
+                        <a:rPr sz="1400" b="0">
+                          <a:solidFill>
+                            <a:srgbClr val="161A23"/>
+                          </a:solidFill>
+                          <a:latin typeface="Calibri"/>
+                        </a:rPr>
+                        <a:t>Yes — the rule is fixed</a:t>
+                      </a:r>
+                    </a:p>
+                  </a:txBody>
+                  <a:tcPr>
+                    <a:solidFill>
+                      <a:srgbClr val="F7F8FC"/>
+                    </a:solidFill>
+                  </a:tcPr>
+                </a:tc>
+                <a:tc>
+                  <a:txBody>
+                    <a:bodyPr/>
+                    <a:lstStyle/>
+                    <a:p>
+                      <a:r>
+                        <a:rPr sz="1400" b="0">
+                          <a:solidFill>
+                            <a:srgbClr val="161A23"/>
+                          </a:solidFill>
+                          <a:latin typeface="Calibri"/>
+                        </a:rPr>
+                        <a:t>use plain code</a:t>
+                      </a:r>
+                    </a:p>
+                  </a:txBody>
+                  <a:tcPr>
+                    <a:solidFill>
+                      <a:srgbClr val="F7F8FC"/>
+                    </a:solidFill>
+                  </a:tcPr>
+                </a:tc>
+                <a:tc>
+                  <a:txBody>
+                    <a:bodyPr/>
+                    <a:lstStyle/>
+                    <a:p>
+                      <a:r>
+                        <a:rPr sz="1400" b="0">
+                          <a:solidFill>
+                            <a:srgbClr val="161A23"/>
+                          </a:solidFill>
+                          <a:latin typeface="Calibri"/>
+                        </a:rPr>
+                        <a:t>Flights  ·  Hotels  ·  Attractions  ·  Restaurants</a:t>
+                      </a:r>
+                    </a:p>
+                  </a:txBody>
+                  <a:tcPr>
+                    <a:solidFill>
+                      <a:srgbClr val="F7F8FC"/>
+                    </a:solidFill>
+                  </a:tcPr>
+                </a:tc>
+              </a:tr>
+            </a:tbl>
+          </a:graphicData>
+        </a:graphic>
+      </p:graphicFrame>
+      <p:sp>
+        <p:nvSpPr>
+          <p:cNvPr id="7" name="TextBox 6"/>
+          <p:cNvSpPr txBox="1"/>
+          <p:nvPr/>
+        </p:nvSpPr>
+        <p:spPr>
+          <a:xfrm>
+            <a:off x="822960" y="4937760"/>
+            <a:ext cx="10515600" cy="1188720"/>
+          </a:xfrm>
+          <a:prstGeom prst="rect">
+            <a:avLst/>
+          </a:prstGeom>
+          <a:noFill/>
+        </p:spPr>
+        <p:txBody>
+          <a:bodyPr wrap="square" anchor="t">
+            <a:spAutoFit/>
+          </a:bodyPr>
+          <a:lstStyle/>
+          <a:p>
+            <a:pPr algn="l">
+              <a:lnSpc>
                 <a:spcPct val="125000"/>
               </a:lnSpc>
             </a:pPr>
@@ -7579,7 +7503,7 @@
                 </a:solidFill>
                 <a:latin typeface="Calibri"/>
               </a:rPr>
-              <a:t>Looking up a flight price needs no thinking. It is one web request.</a:t>
+              <a:t>Two steps out of six need AI. The other four are IF statements.</a:t>
             </a:r>
           </a:p>
           <a:p>
@@ -7595,187 +7519,7 @@
                 </a:solidFill>
                 <a:latin typeface="Calibri"/>
               </a:rPr>
-              <a:t>But if an AI agent does the looking up, you pay for every step it takes to decide.</a:t>
-            </a:r>
-          </a:p>
-        </p:txBody>
-      </p:sp>
-    </p:spTree>
-  </p:cSld>
-  <p:clrMapOvr>
-    <a:masterClrMapping/>
-  </p:clrMapOvr>
-</p:sld>
-</file>
-
-<file path=ppt/slides/slide3.xml><?xml version="1.0" encoding="utf-8"?>
-<p:sld xmlns:a="http://schemas.openxmlformats.org/drawingml/2006/main" xmlns:p="http://schemas.openxmlformats.org/presentationml/2006/main" xmlns:r="http://schemas.openxmlformats.org/officeDocument/2006/relationships">
-  <p:cSld>
-    <p:bg>
-      <p:bgPr>
-        <a:solidFill>
-          <a:srgbClr val="F7F8FC"/>
-        </a:solidFill>
-        <a:effectLst/>
-      </p:bgPr>
-    </p:bg>
-    <p:spTree>
-      <p:nvGrpSpPr>
-        <p:cNvPr id="1" name=""/>
-        <p:cNvGrpSpPr/>
-        <p:nvPr/>
-      </p:nvGrpSpPr>
-      <p:grpSpPr/>
-      <p:sp>
-        <p:nvSpPr>
-          <p:cNvPr id="2" name="TextBox 1"/>
-          <p:cNvSpPr txBox="1"/>
-          <p:nvPr/>
-        </p:nvSpPr>
-        <p:spPr>
-          <a:xfrm>
-            <a:off x="1280160" y="2011680"/>
-            <a:ext cx="9601200" cy="2560320"/>
-          </a:xfrm>
-          <a:prstGeom prst="rect">
-            <a:avLst/>
-          </a:prstGeom>
-          <a:noFill/>
-        </p:spPr>
-        <p:txBody>
-          <a:bodyPr wrap="square" anchor="t">
-            <a:spAutoFit/>
-          </a:bodyPr>
-          <a:lstStyle/>
-          <a:p>
-            <a:pPr algn="l">
-              <a:lnSpc>
-                <a:spcPct val="115000"/>
-              </a:lnSpc>
-            </a:pPr>
-            <a:r>
-              <a:rPr sz="2600" b="0">
-                <a:solidFill>
-                  <a:srgbClr val="8A91A0"/>
-                </a:solidFill>
-                <a:latin typeface="Calibri"/>
-              </a:rPr>
-              <a:t>My question</a:t>
-            </a:r>
-          </a:p>
-          <a:p>
-            <a:pPr algn="l">
-              <a:lnSpc>
-                <a:spcPct val="115000"/>
-              </a:lnSpc>
-            </a:pPr>
-            <a:r>
-              <a:rPr sz="4000" b="1">
-                <a:solidFill>
-                  <a:srgbClr val="4338CA"/>
-                </a:solidFill>
-                <a:latin typeface="Calibri"/>
-              </a:rPr>
-              <a:t>Which steps really need AI,</a:t>
-            </a:r>
-          </a:p>
-          <a:p>
-            <a:pPr algn="l">
-              <a:lnSpc>
-                <a:spcPct val="115000"/>
-              </a:lnSpc>
-            </a:pPr>
-            <a:r>
-              <a:rPr sz="4000" b="1">
-                <a:solidFill>
-                  <a:srgbClr val="4338CA"/>
-                </a:solidFill>
-                <a:latin typeface="Calibri"/>
-              </a:rPr>
-              <a:t>and which are just expensive?</a:t>
-            </a:r>
-          </a:p>
-        </p:txBody>
-      </p:sp>
-      <p:sp>
-        <p:nvSpPr>
-          <p:cNvPr id="3" name="Rectangle 2"/>
-          <p:cNvSpPr/>
-          <p:nvPr/>
-        </p:nvSpPr>
-        <p:spPr>
-          <a:xfrm>
-            <a:off x="1280160" y="4846320"/>
-            <a:ext cx="1828800" cy="34000"/>
-          </a:xfrm>
-          <a:prstGeom prst="rect">
-            <a:avLst/>
-          </a:prstGeom>
-          <a:solidFill>
-            <a:srgbClr val="0EA5A4"/>
-          </a:solidFill>
-          <a:ln>
-            <a:noFill/>
-          </a:ln>
-          <a:effectLst/>
-        </p:spPr>
-        <p:style>
-          <a:lnRef idx="1">
-            <a:schemeClr val="accent1"/>
-          </a:lnRef>
-          <a:fillRef idx="3">
-            <a:schemeClr val="accent1"/>
-          </a:fillRef>
-          <a:effectRef idx="2">
-            <a:schemeClr val="accent1"/>
-          </a:effectRef>
-          <a:fontRef idx="minor">
-            <a:schemeClr val="lt1"/>
-          </a:fontRef>
-        </p:style>
-        <p:txBody>
-          <a:bodyPr rtlCol="0" anchor="ctr"/>
-          <a:lstStyle/>
-          <a:p>
-            <a:pPr algn="ctr"/>
-          </a:p>
-        </p:txBody>
-      </p:sp>
-      <p:sp>
-        <p:nvSpPr>
-          <p:cNvPr id="4" name="TextBox 3"/>
-          <p:cNvSpPr txBox="1"/>
-          <p:nvPr/>
-        </p:nvSpPr>
-        <p:spPr>
-          <a:xfrm>
-            <a:off x="1280160" y="5120640"/>
-            <a:ext cx="9601200" cy="731520"/>
-          </a:xfrm>
-          <a:prstGeom prst="rect">
-            <a:avLst/>
-          </a:prstGeom>
-          <a:noFill/>
-        </p:spPr>
-        <p:txBody>
-          <a:bodyPr wrap="square" anchor="t">
-            <a:spAutoFit/>
-          </a:bodyPr>
-          <a:lstStyle/>
-          <a:p>
-            <a:pPr algn="l">
-              <a:lnSpc>
-                <a:spcPct val="100000"/>
-              </a:lnSpc>
-            </a:pPr>
-            <a:r>
-              <a:rPr sz="1600" b="0">
-                <a:solidFill>
-                  <a:srgbClr val="545C6E"/>
-                </a:solidFill>
-                <a:latin typeface="Calibri"/>
-              </a:rPr>
-              <a:t>Everything else is kept identical. Only the data-fetching changes.</a:t>
+              <a:t>Same finished plan. A fraction of the cost.</a:t>
             </a:r>
           </a:p>
         </p:txBody>
@@ -7832,7 +7576,7 @@
                 </a:solidFill>
                 <a:latin typeface="Calibri"/>
               </a:rPr>
-              <a:t>WHAT IT DOES</a:t>
+              <a:t>3  ·  WHAT THE USER SEES</a:t>
             </a:r>
           </a:p>
         </p:txBody>
@@ -7871,7 +7615,7 @@
                 </a:solidFill>
                 <a:latin typeface="Calibri"/>
               </a:rPr>
-              <a:t>A working travel planner, not just an experiment</a:t>
+              <a:t>One form, live progress, plan in tabs</a:t>
             </a:r>
           </a:p>
         </p:txBody>
@@ -7920,308 +7664,30 @@
           </a:p>
         </p:txBody>
       </p:sp>
-      <p:graphicFrame>
-        <p:nvGraphicFramePr>
-          <p:cNvPr id="5" name="Table 4"/>
-          <p:cNvGraphicFramePr>
-            <a:graphicFrameLocks noGrp="1"/>
-          </p:cNvGraphicFramePr>
+      <p:pic>
+        <p:nvPicPr>
+          <p:cNvPr id="5" name="Picture 4" descr="frontend.png"/>
+          <p:cNvPicPr>
+            <a:picLocks noChangeAspect="1"/>
+          </p:cNvPicPr>
           <p:nvPr/>
-        </p:nvGraphicFramePr>
-        <p:xfrm>
-          <a:off x="822960" y="2011680"/>
-          <a:ext cx="10515600" cy="2194560"/>
-        </p:xfrm>
-        <a:graphic>
-          <a:graphicData uri="http://schemas.openxmlformats.org/drawingml/2006/table">
-            <a:tbl>
-              <a:tblPr firstRow="1" bandRow="1">
-                <a:tableStyleId>{5C22544A-7EE6-4342-B048-85BDC9FD1C3A}</a:tableStyleId>
-              </a:tblPr>
-              <a:tblGrid>
-                <a:gridCol w="1752600"/>
-                <a:gridCol w="8763000"/>
-              </a:tblGrid>
-              <a:tr h="365760">
-                <a:tc>
-                  <a:txBody>
-                    <a:bodyPr/>
-                    <a:lstStyle/>
-                    <a:p>
-                      <a:r>
-                        <a:rPr sz="1300" b="1">
-                          <a:solidFill>
-                            <a:srgbClr val="FFFFFF"/>
-                          </a:solidFill>
-                          <a:latin typeface="Calibri"/>
-                        </a:rPr>
-                        <a:t>The user</a:t>
-                      </a:r>
-                    </a:p>
-                  </a:txBody>
-                  <a:tcPr>
-                    <a:solidFill>
-                      <a:srgbClr val="4338CA"/>
-                    </a:solidFill>
-                  </a:tcPr>
-                </a:tc>
-                <a:tc>
-                  <a:txBody>
-                    <a:bodyPr/>
-                    <a:lstStyle/>
-                    <a:p>
-                      <a:r>
-                        <a:rPr sz="1300" b="1">
-                          <a:solidFill>
-                            <a:srgbClr val="FFFFFF"/>
-                          </a:solidFill>
-                          <a:latin typeface="Calibri"/>
-                        </a:rPr>
-                        <a:t>What happens</a:t>
-                      </a:r>
-                    </a:p>
-                  </a:txBody>
-                  <a:tcPr>
-                    <a:solidFill>
-                      <a:srgbClr val="4338CA"/>
-                    </a:solidFill>
-                  </a:tcPr>
-                </a:tc>
-              </a:tr>
-              <a:tr h="365760">
-                <a:tc>
-                  <a:txBody>
-                    <a:bodyPr/>
-                    <a:lstStyle/>
-                    <a:p>
-                      <a:r>
-                        <a:rPr sz="1300" b="0">
-                          <a:solidFill>
-                            <a:srgbClr val="161A23"/>
-                          </a:solidFill>
-                          <a:latin typeface="Calibri"/>
-                        </a:rPr>
-                        <a:t>Fills one form</a:t>
-                      </a:r>
-                    </a:p>
-                  </a:txBody>
-                  <a:tcPr>
-                    <a:solidFill>
-                      <a:srgbClr val="FFFFFF"/>
-                    </a:solidFill>
-                  </a:tcPr>
-                </a:tc>
-                <a:tc>
-                  <a:txBody>
-                    <a:bodyPr/>
-                    <a:lstStyle/>
-                    <a:p>
-                      <a:r>
-                        <a:rPr sz="1300" b="0">
-                          <a:solidFill>
-                            <a:srgbClr val="161A23"/>
-                          </a:solidFill>
-                          <a:latin typeface="Calibri"/>
-                        </a:rPr>
-                        <a:t>Where from, where to, dates, how many people, budget, interests</a:t>
-                      </a:r>
-                    </a:p>
-                  </a:txBody>
-                  <a:tcPr>
-                    <a:solidFill>
-                      <a:srgbClr val="FFFFFF"/>
-                    </a:solidFill>
-                  </a:tcPr>
-                </a:tc>
-              </a:tr>
-              <a:tr h="365760">
-                <a:tc>
-                  <a:txBody>
-                    <a:bodyPr/>
-                    <a:lstStyle/>
-                    <a:p>
-                      <a:r>
-                        <a:rPr sz="1300" b="0">
-                          <a:solidFill>
-                            <a:srgbClr val="161A23"/>
-                          </a:solidFill>
-                          <a:latin typeface="Calibri"/>
-                        </a:rPr>
-                        <a:t>Presses one button</a:t>
-                      </a:r>
-                    </a:p>
-                  </a:txBody>
-                  <a:tcPr>
-                    <a:solidFill>
-                      <a:srgbClr val="F7F8FC"/>
-                    </a:solidFill>
-                  </a:tcPr>
-                </a:tc>
-                <a:tc>
-                  <a:txBody>
-                    <a:bodyPr/>
-                    <a:lstStyle/>
-                    <a:p>
-                      <a:r>
-                        <a:rPr sz="1300" b="0">
-                          <a:solidFill>
-                            <a:srgbClr val="161A23"/>
-                          </a:solidFill>
-                          <a:latin typeface="Calibri"/>
-                        </a:rPr>
-                        <a:t>Seven steps run and update live on screen as each finishes</a:t>
-                      </a:r>
-                    </a:p>
-                  </a:txBody>
-                  <a:tcPr>
-                    <a:solidFill>
-                      <a:srgbClr val="F7F8FC"/>
-                    </a:solidFill>
-                  </a:tcPr>
-                </a:tc>
-              </a:tr>
-              <a:tr h="365760">
-                <a:tc>
-                  <a:txBody>
-                    <a:bodyPr/>
-                    <a:lstStyle/>
-                    <a:p>
-                      <a:r>
-                        <a:rPr sz="1300" b="0">
-                          <a:solidFill>
-                            <a:srgbClr val="161A23"/>
-                          </a:solidFill>
-                          <a:latin typeface="Calibri"/>
-                        </a:rPr>
-                        <a:t>Sees the plan</a:t>
-                      </a:r>
-                    </a:p>
-                  </a:txBody>
-                  <a:tcPr>
-                    <a:solidFill>
-                      <a:srgbClr val="FFFFFF"/>
-                    </a:solidFill>
-                  </a:tcPr>
-                </a:tc>
-                <a:tc>
-                  <a:txBody>
-                    <a:bodyPr/>
-                    <a:lstStyle/>
-                    <a:p>
-                      <a:r>
-                        <a:rPr sz="1300" b="0">
-                          <a:solidFill>
-                            <a:srgbClr val="161A23"/>
-                          </a:solidFill>
-                          <a:latin typeface="Calibri"/>
-                        </a:rPr>
-                        <a:t>A day-by-day itinerary in tabs: flights, hotels, each day, budget, tips</a:t>
-                      </a:r>
-                    </a:p>
-                  </a:txBody>
-                  <a:tcPr>
-                    <a:solidFill>
-                      <a:srgbClr val="FFFFFF"/>
-                    </a:solidFill>
-                  </a:tcPr>
-                </a:tc>
-              </a:tr>
-              <a:tr h="365760">
-                <a:tc>
-                  <a:txBody>
-                    <a:bodyPr/>
-                    <a:lstStyle/>
-                    <a:p>
-                      <a:r>
-                        <a:rPr sz="1300" b="0">
-                          <a:solidFill>
-                            <a:srgbClr val="161A23"/>
-                          </a:solidFill>
-                          <a:latin typeface="Calibri"/>
-                        </a:rPr>
-                        <a:t>Can trust the prices</a:t>
-                      </a:r>
-                    </a:p>
-                  </a:txBody>
-                  <a:tcPr>
-                    <a:solidFill>
-                      <a:srgbClr val="F7F8FC"/>
-                    </a:solidFill>
-                  </a:tcPr>
-                </a:tc>
-                <a:tc>
-                  <a:txBody>
-                    <a:bodyPr/>
-                    <a:lstStyle/>
-                    <a:p>
-                      <a:r>
-                        <a:rPr sz="1300" b="0">
-                          <a:solidFill>
-                            <a:srgbClr val="161A23"/>
-                          </a:solidFill>
-                          <a:latin typeface="Calibri"/>
-                        </a:rPr>
-                        <a:t>Real fares from live travel APIs. If a price is a guess, it says so</a:t>
-                      </a:r>
-                    </a:p>
-                  </a:txBody>
-                  <a:tcPr>
-                    <a:solidFill>
-                      <a:srgbClr val="F7F8FC"/>
-                    </a:solidFill>
-                  </a:tcPr>
-                </a:tc>
-              </a:tr>
-              <a:tr h="365760">
-                <a:tc>
-                  <a:txBody>
-                    <a:bodyPr/>
-                    <a:lstStyle/>
-                    <a:p>
-                      <a:r>
-                        <a:rPr sz="1300" b="0">
-                          <a:solidFill>
-                            <a:srgbClr val="161A23"/>
-                          </a:solidFill>
-                          <a:latin typeface="Calibri"/>
-                        </a:rPr>
-                        <a:t>Gets told the truth</a:t>
-                      </a:r>
-                    </a:p>
-                  </a:txBody>
-                  <a:tcPr>
-                    <a:solidFill>
-                      <a:srgbClr val="FFFFFF"/>
-                    </a:solidFill>
-                  </a:tcPr>
-                </a:tc>
-                <a:tc>
-                  <a:txBody>
-                    <a:bodyPr/>
-                    <a:lstStyle/>
-                    <a:p>
-                      <a:r>
-                        <a:rPr sz="1300" b="0">
-                          <a:solidFill>
-                            <a:srgbClr val="161A23"/>
-                          </a:solidFill>
-                          <a:latin typeface="Calibri"/>
-                        </a:rPr>
-                        <a:t>If the budget cannot cover the trip, it refuses and says what would work</a:t>
-                      </a:r>
-                    </a:p>
-                  </a:txBody>
-                  <a:tcPr>
-                    <a:solidFill>
-                      <a:srgbClr val="FFFFFF"/>
-                    </a:solidFill>
-                  </a:tcPr>
-                </a:tc>
-              </a:tr>
-            </a:tbl>
-          </a:graphicData>
-        </a:graphic>
-      </p:graphicFrame>
+        </p:nvPicPr>
+        <p:blipFill>
+          <a:blip r:embed="rId2"/>
+          <a:stretch>
+            <a:fillRect/>
+          </a:stretch>
+        </p:blipFill>
+        <p:spPr>
+          <a:xfrm>
+            <a:off x="2352101" y="1783080"/>
+            <a:ext cx="7487493" cy="4297680"/>
+          </a:xfrm>
+          <a:prstGeom prst="rect">
+            <a:avLst/>
+          </a:prstGeom>
+        </p:spPr>
+      </p:pic>
       <p:sp>
         <p:nvSpPr>
           <p:cNvPr id="6" name="TextBox 5"/>
@@ -8230,8 +7696,8 @@
         </p:nvSpPr>
         <p:spPr>
           <a:xfrm>
-            <a:off x="822960" y="5212080"/>
-            <a:ext cx="10515600" cy="822960"/>
+            <a:off x="822960" y="6172200"/>
+            <a:ext cx="10515600" cy="457200"/>
           </a:xfrm>
           <a:prstGeom prst="rect">
             <a:avLst/>
@@ -8250,13 +7716,13 @@
               </a:lnSpc>
             </a:pPr>
             <a:r>
-              <a:rPr sz="1700" b="0">
+              <a:rPr sz="1500" b="0">
                 <a:solidFill>
                   <a:srgbClr val="545C6E"/>
                 </a:solidFill>
                 <a:latin typeface="Calibri"/>
               </a:rPr>
-              <a:t>There is also a terminal version, and every step is narrated as it runs.</a:t>
+              <a:t>Purple steps use AI. Green steps are plain code. Both are narrated in the terminal as they run.</a:t>
             </a:r>
           </a:p>
         </p:txBody>
@@ -8313,7 +7779,7 @@
                 </a:solidFill>
                 <a:latin typeface="Calibri"/>
               </a:rPr>
-              <a:t>THE AGENTS</a:t>
+              <a:t>4  ·  THE FOUR VERSIONS</a:t>
             </a:r>
           </a:p>
         </p:txBody>
@@ -8352,7 +7818,7 @@
                 </a:solidFill>
                 <a:latin typeface="Calibri"/>
               </a:rPr>
-              <a:t>Three use AI. Four steps do not</a:t>
+              <a:t>Only one thing changes: who fetches the data</a:t>
             </a:r>
           </a:p>
         </p:txBody>
@@ -8411,679 +7877,6 @@
         </p:nvGraphicFramePr>
         <p:xfrm>
           <a:off x="822960" y="2011680"/>
-          <a:ext cx="10515599" cy="1828800"/>
-        </p:xfrm>
-        <a:graphic>
-          <a:graphicData uri="http://schemas.openxmlformats.org/drawingml/2006/table">
-            <a:tbl>
-              <a:tblPr firstRow="1" bandRow="1">
-                <a:tableStyleId>{5C22544A-7EE6-4342-B048-85BDC9FD1C3A}</a:tableStyleId>
-              </a:tblPr>
-              <a:tblGrid>
-                <a:gridCol w="491383"/>
-                <a:gridCol w="3341405"/>
-                <a:gridCol w="786213"/>
-                <a:gridCol w="5896598"/>
-              </a:tblGrid>
-              <a:tr h="365760">
-                <a:tc>
-                  <a:txBody>
-                    <a:bodyPr/>
-                    <a:lstStyle/>
-                    <a:p>
-                      <a:r>
-                        <a:rPr sz="1300" b="1">
-                          <a:solidFill>
-                            <a:srgbClr val="FFFFFF"/>
-                          </a:solidFill>
-                          <a:latin typeface="Calibri"/>
-                        </a:rPr>
-                        <a:t>Step</a:t>
-                      </a:r>
-                    </a:p>
-                  </a:txBody>
-                  <a:tcPr>
-                    <a:solidFill>
-                      <a:srgbClr val="4338CA"/>
-                    </a:solidFill>
-                  </a:tcPr>
-                </a:tc>
-                <a:tc>
-                  <a:txBody>
-                    <a:bodyPr/>
-                    <a:lstStyle/>
-                    <a:p>
-                      <a:r>
-                        <a:rPr sz="1300" b="1">
-                          <a:solidFill>
-                            <a:srgbClr val="FFFFFF"/>
-                          </a:solidFill>
-                          <a:latin typeface="Calibri"/>
-                        </a:rPr>
-                        <a:t>Who does it</a:t>
-                      </a:r>
-                    </a:p>
-                  </a:txBody>
-                  <a:tcPr>
-                    <a:solidFill>
-                      <a:srgbClr val="4338CA"/>
-                    </a:solidFill>
-                  </a:tcPr>
-                </a:tc>
-                <a:tc>
-                  <a:txBody>
-                    <a:bodyPr/>
-                    <a:lstStyle/>
-                    <a:p>
-                      <a:r>
-                        <a:rPr sz="1300" b="1">
-                          <a:solidFill>
-                            <a:srgbClr val="FFFFFF"/>
-                          </a:solidFill>
-                          <a:latin typeface="Calibri"/>
-                        </a:rPr>
-                        <a:t>AI?</a:t>
-                      </a:r>
-                    </a:p>
-                  </a:txBody>
-                  <a:tcPr>
-                    <a:solidFill>
-                      <a:srgbClr val="4338CA"/>
-                    </a:solidFill>
-                  </a:tcPr>
-                </a:tc>
-                <a:tc>
-                  <a:txBody>
-                    <a:bodyPr/>
-                    <a:lstStyle/>
-                    <a:p>
-                      <a:r>
-                        <a:rPr sz="1300" b="1">
-                          <a:solidFill>
-                            <a:srgbClr val="FFFFFF"/>
-                          </a:solidFill>
-                          <a:latin typeface="Calibri"/>
-                        </a:rPr>
-                        <a:t>Why</a:t>
-                      </a:r>
-                    </a:p>
-                  </a:txBody>
-                  <a:tcPr>
-                    <a:solidFill>
-                      <a:srgbClr val="4338CA"/>
-                    </a:solidFill>
-                  </a:tcPr>
-                </a:tc>
-              </a:tr>
-              <a:tr h="365760">
-                <a:tc>
-                  <a:txBody>
-                    <a:bodyPr/>
-                    <a:lstStyle/>
-                    <a:p>
-                      <a:r>
-                        <a:rPr sz="1300" b="0">
-                          <a:solidFill>
-                            <a:srgbClr val="161A23"/>
-                          </a:solidFill>
-                          <a:latin typeface="Calibri"/>
-                        </a:rPr>
-                        <a:t>1</a:t>
-                      </a:r>
-                    </a:p>
-                  </a:txBody>
-                  <a:tcPr>
-                    <a:solidFill>
-                      <a:srgbClr val="FFFFFF"/>
-                    </a:solidFill>
-                  </a:tcPr>
-                </a:tc>
-                <a:tc>
-                  <a:txBody>
-                    <a:bodyPr/>
-                    <a:lstStyle/>
-                    <a:p>
-                      <a:r>
-                        <a:rPr sz="1300" b="0">
-                          <a:solidFill>
-                            <a:srgbClr val="161A23"/>
-                          </a:solidFill>
-                          <a:latin typeface="Calibri"/>
-                        </a:rPr>
-                        <a:t>Conversation agent</a:t>
-                      </a:r>
-                    </a:p>
-                  </a:txBody>
-                  <a:tcPr>
-                    <a:solidFill>
-                      <a:srgbClr val="FFFFFF"/>
-                    </a:solidFill>
-                  </a:tcPr>
-                </a:tc>
-                <a:tc>
-                  <a:txBody>
-                    <a:bodyPr/>
-                    <a:lstStyle/>
-                    <a:p>
-                      <a:r>
-                        <a:rPr sz="1300" b="0">
-                          <a:solidFill>
-                            <a:srgbClr val="161A23"/>
-                          </a:solidFill>
-                          <a:latin typeface="Calibri"/>
-                        </a:rPr>
-                        <a:t>YES</a:t>
-                      </a:r>
-                    </a:p>
-                  </a:txBody>
-                  <a:tcPr>
-                    <a:solidFill>
-                      <a:srgbClr val="FFFFFF"/>
-                    </a:solidFill>
-                  </a:tcPr>
-                </a:tc>
-                <a:tc>
-                  <a:txBody>
-                    <a:bodyPr/>
-                    <a:lstStyle/>
-                    <a:p>
-                      <a:r>
-                        <a:rPr sz="1300" b="0">
-                          <a:solidFill>
-                            <a:srgbClr val="161A23"/>
-                          </a:solidFill>
-                          <a:latin typeface="Calibri"/>
-                        </a:rPr>
-                        <a:t>People write requests in a thousand different ways</a:t>
-                      </a:r>
-                    </a:p>
-                  </a:txBody>
-                  <a:tcPr>
-                    <a:solidFill>
-                      <a:srgbClr val="FFFFFF"/>
-                    </a:solidFill>
-                  </a:tcPr>
-                </a:tc>
-              </a:tr>
-              <a:tr h="365760">
-                <a:tc>
-                  <a:txBody>
-                    <a:bodyPr/>
-                    <a:lstStyle/>
-                    <a:p>
-                      <a:r>
-                        <a:rPr sz="1300" b="0">
-                          <a:solidFill>
-                            <a:srgbClr val="161A23"/>
-                          </a:solidFill>
-                          <a:latin typeface="Calibri"/>
-                        </a:rPr>
-                        <a:t>2</a:t>
-                      </a:r>
-                    </a:p>
-                  </a:txBody>
-                  <a:tcPr>
-                    <a:solidFill>
-                      <a:srgbClr val="F7F8FC"/>
-                    </a:solidFill>
-                  </a:tcPr>
-                </a:tc>
-                <a:tc>
-                  <a:txBody>
-                    <a:bodyPr/>
-                    <a:lstStyle/>
-                    <a:p>
-                      <a:r>
-                        <a:rPr sz="1300" b="0">
-                          <a:solidFill>
-                            <a:srgbClr val="161A23"/>
-                          </a:solidFill>
-                          <a:latin typeface="Calibri"/>
-                        </a:rPr>
-                        <a:t>Preferences agent</a:t>
-                      </a:r>
-                    </a:p>
-                  </a:txBody>
-                  <a:tcPr>
-                    <a:solidFill>
-                      <a:srgbClr val="F7F8FC"/>
-                    </a:solidFill>
-                  </a:tcPr>
-                </a:tc>
-                <a:tc>
-                  <a:txBody>
-                    <a:bodyPr/>
-                    <a:lstStyle/>
-                    <a:p>
-                      <a:r>
-                        <a:rPr sz="1300" b="0">
-                          <a:solidFill>
-                            <a:srgbClr val="161A23"/>
-                          </a:solidFill>
-                          <a:latin typeface="Calibri"/>
-                        </a:rPr>
-                        <a:t>YES</a:t>
-                      </a:r>
-                    </a:p>
-                  </a:txBody>
-                  <a:tcPr>
-                    <a:solidFill>
-                      <a:srgbClr val="F7F8FC"/>
-                    </a:solidFill>
-                  </a:tcPr>
-                </a:tc>
-                <a:tc>
-                  <a:txBody>
-                    <a:bodyPr/>
-                    <a:lstStyle/>
-                    <a:p>
-                      <a:r>
-                        <a:rPr sz="1300" b="0">
-                          <a:solidFill>
-                            <a:srgbClr val="161A23"/>
-                          </a:solidFill>
-                          <a:latin typeface="Calibri"/>
-                        </a:rPr>
-                        <a:t>Turns that writing into exact fields, then checks the budget</a:t>
-                      </a:r>
-                    </a:p>
-                  </a:txBody>
-                  <a:tcPr>
-                    <a:solidFill>
-                      <a:srgbClr val="F7F8FC"/>
-                    </a:solidFill>
-                  </a:tcPr>
-                </a:tc>
-              </a:tr>
-              <a:tr h="365760">
-                <a:tc>
-                  <a:txBody>
-                    <a:bodyPr/>
-                    <a:lstStyle/>
-                    <a:p>
-                      <a:r>
-                        <a:rPr sz="1300" b="0">
-                          <a:solidFill>
-                            <a:srgbClr val="161A23"/>
-                          </a:solidFill>
-                          <a:latin typeface="Calibri"/>
-                        </a:rPr>
-                        <a:t>3</a:t>
-                      </a:r>
-                    </a:p>
-                  </a:txBody>
-                  <a:tcPr>
-                    <a:solidFill>
-                      <a:srgbClr val="FFFFFF"/>
-                    </a:solidFill>
-                  </a:tcPr>
-                </a:tc>
-                <a:tc>
-                  <a:txBody>
-                    <a:bodyPr/>
-                    <a:lstStyle/>
-                    <a:p>
-                      <a:r>
-                        <a:rPr sz="1300" b="0">
-                          <a:solidFill>
-                            <a:srgbClr val="161A23"/>
-                          </a:solidFill>
-                          <a:latin typeface="Calibri"/>
-                        </a:rPr>
-                        <a:t>Flights, hotels, attractions, restaurants</a:t>
-                      </a:r>
-                    </a:p>
-                  </a:txBody>
-                  <a:tcPr>
-                    <a:solidFill>
-                      <a:srgbClr val="FFFFFF"/>
-                    </a:solidFill>
-                  </a:tcPr>
-                </a:tc>
-                <a:tc>
-                  <a:txBody>
-                    <a:bodyPr/>
-                    <a:lstStyle/>
-                    <a:p>
-                      <a:r>
-                        <a:rPr sz="1300" b="0">
-                          <a:solidFill>
-                            <a:srgbClr val="161A23"/>
-                          </a:solidFill>
-                          <a:latin typeface="Calibri"/>
-                        </a:rPr>
-                        <a:t>no</a:t>
-                      </a:r>
-                    </a:p>
-                  </a:txBody>
-                  <a:tcPr>
-                    <a:solidFill>
-                      <a:srgbClr val="FFFFFF"/>
-                    </a:solidFill>
-                  </a:tcPr>
-                </a:tc>
-                <a:tc>
-                  <a:txBody>
-                    <a:bodyPr/>
-                    <a:lstStyle/>
-                    <a:p>
-                      <a:r>
-                        <a:rPr sz="1300" b="0">
-                          <a:solidFill>
-                            <a:srgbClr val="161A23"/>
-                          </a:solidFill>
-                          <a:latin typeface="Calibri"/>
-                        </a:rPr>
-                        <a:t>One correct request each. An IF statement decides, not AI</a:t>
-                      </a:r>
-                    </a:p>
-                  </a:txBody>
-                  <a:tcPr>
-                    <a:solidFill>
-                      <a:srgbClr val="FFFFFF"/>
-                    </a:solidFill>
-                  </a:tcPr>
-                </a:tc>
-              </a:tr>
-              <a:tr h="365760">
-                <a:tc>
-                  <a:txBody>
-                    <a:bodyPr/>
-                    <a:lstStyle/>
-                    <a:p>
-                      <a:r>
-                        <a:rPr sz="1300" b="0">
-                          <a:solidFill>
-                            <a:srgbClr val="161A23"/>
-                          </a:solidFill>
-                          <a:latin typeface="Calibri"/>
-                        </a:rPr>
-                        <a:t>4</a:t>
-                      </a:r>
-                    </a:p>
-                  </a:txBody>
-                  <a:tcPr>
-                    <a:solidFill>
-                      <a:srgbClr val="F7F8FC"/>
-                    </a:solidFill>
-                  </a:tcPr>
-                </a:tc>
-                <a:tc>
-                  <a:txBody>
-                    <a:bodyPr/>
-                    <a:lstStyle/>
-                    <a:p>
-                      <a:r>
-                        <a:rPr sz="1300" b="0">
-                          <a:solidFill>
-                            <a:srgbClr val="161A23"/>
-                          </a:solidFill>
-                          <a:latin typeface="Calibri"/>
-                        </a:rPr>
-                        <a:t>Itinerary agent</a:t>
-                      </a:r>
-                    </a:p>
-                  </a:txBody>
-                  <a:tcPr>
-                    <a:solidFill>
-                      <a:srgbClr val="F7F8FC"/>
-                    </a:solidFill>
-                  </a:tcPr>
-                </a:tc>
-                <a:tc>
-                  <a:txBody>
-                    <a:bodyPr/>
-                    <a:lstStyle/>
-                    <a:p>
-                      <a:r>
-                        <a:rPr sz="1300" b="0">
-                          <a:solidFill>
-                            <a:srgbClr val="161A23"/>
-                          </a:solidFill>
-                          <a:latin typeface="Calibri"/>
-                        </a:rPr>
-                        <a:t>YES</a:t>
-                      </a:r>
-                    </a:p>
-                  </a:txBody>
-                  <a:tcPr>
-                    <a:solidFill>
-                      <a:srgbClr val="F7F8FC"/>
-                    </a:solidFill>
-                  </a:tcPr>
-                </a:tc>
-                <a:tc>
-                  <a:txBody>
-                    <a:bodyPr/>
-                    <a:lstStyle/>
-                    <a:p>
-                      <a:r>
-                        <a:rPr sz="1300" b="0">
-                          <a:solidFill>
-                            <a:srgbClr val="161A23"/>
-                          </a:solidFill>
-                          <a:latin typeface="Calibri"/>
-                        </a:rPr>
-                        <a:t>Deciding what to do on which day needs judgement</a:t>
-                      </a:r>
-                    </a:p>
-                  </a:txBody>
-                  <a:tcPr>
-                    <a:solidFill>
-                      <a:srgbClr val="F7F8FC"/>
-                    </a:solidFill>
-                  </a:tcPr>
-                </a:tc>
-              </a:tr>
-            </a:tbl>
-          </a:graphicData>
-        </a:graphic>
-      </p:graphicFrame>
-      <p:sp>
-        <p:nvSpPr>
-          <p:cNvPr id="6" name="TextBox 5"/>
-          <p:cNvSpPr txBox="1"/>
-          <p:nvPr/>
-        </p:nvSpPr>
-        <p:spPr>
-          <a:xfrm>
-            <a:off x="822960" y="5120640"/>
-            <a:ext cx="10515600" cy="1005840"/>
-          </a:xfrm>
-          <a:prstGeom prst="rect">
-            <a:avLst/>
-          </a:prstGeom>
-          <a:noFill/>
-        </p:spPr>
-        <p:txBody>
-          <a:bodyPr wrap="square" anchor="t">
-            <a:spAutoFit/>
-          </a:bodyPr>
-          <a:lstStyle/>
-          <a:p>
-            <a:pPr algn="l">
-              <a:lnSpc>
-                <a:spcPct val="125000"/>
-              </a:lnSpc>
-            </a:pPr>
-            <a:r>
-              <a:rPr sz="2000" b="1">
-                <a:solidFill>
-                  <a:srgbClr val="161A23"/>
-                </a:solidFill>
-                <a:latin typeface="Calibri"/>
-              </a:rPr>
-              <a:t>The test for every step: could I write this as ordinary code?</a:t>
-            </a:r>
-          </a:p>
-          <a:p>
-            <a:pPr algn="l">
-              <a:lnSpc>
-                <a:spcPct val="125000"/>
-              </a:lnSpc>
-            </a:pPr>
-            <a:r>
-              <a:rPr sz="1700" b="0">
-                <a:solidFill>
-                  <a:srgbClr val="545C6E"/>
-                </a:solidFill>
-                <a:latin typeface="Calibri"/>
-              </a:rPr>
-              <a:t>If yes, no AI. Two steps out of six need thinking. That is the whole design.</a:t>
-            </a:r>
-          </a:p>
-        </p:txBody>
-      </p:sp>
-    </p:spTree>
-  </p:cSld>
-  <p:clrMapOvr>
-    <a:masterClrMapping/>
-  </p:clrMapOvr>
-</p:sld>
-</file>
-
-<file path=ppt/slides/slide6.xml><?xml version="1.0" encoding="utf-8"?>
-<p:sld xmlns:a="http://schemas.openxmlformats.org/drawingml/2006/main" xmlns:p="http://schemas.openxmlformats.org/presentationml/2006/main" xmlns:r="http://schemas.openxmlformats.org/officeDocument/2006/relationships">
-  <p:cSld>
-    <p:spTree>
-      <p:nvGrpSpPr>
-        <p:cNvPr id="1" name=""/>
-        <p:cNvGrpSpPr/>
-        <p:nvPr/>
-      </p:nvGrpSpPr>
-      <p:grpSpPr/>
-      <p:sp>
-        <p:nvSpPr>
-          <p:cNvPr id="2" name="TextBox 1"/>
-          <p:cNvSpPr txBox="1"/>
-          <p:nvPr/>
-        </p:nvSpPr>
-        <p:spPr>
-          <a:xfrm>
-            <a:off x="822960" y="457200"/>
-            <a:ext cx="10515600" cy="365760"/>
-          </a:xfrm>
-          <a:prstGeom prst="rect">
-            <a:avLst/>
-          </a:prstGeom>
-          <a:noFill/>
-        </p:spPr>
-        <p:txBody>
-          <a:bodyPr wrap="square" anchor="t">
-            <a:spAutoFit/>
-          </a:bodyPr>
-          <a:lstStyle/>
-          <a:p>
-            <a:pPr algn="l">
-              <a:lnSpc>
-                <a:spcPct val="100000"/>
-              </a:lnSpc>
-            </a:pPr>
-            <a:r>
-              <a:rPr sz="1200" b="1">
-                <a:solidFill>
-                  <a:srgbClr val="4338CA"/>
-                </a:solidFill>
-                <a:latin typeface="Calibri"/>
-              </a:rPr>
-              <a:t>THE FOUR VERSIONS</a:t>
-            </a:r>
-          </a:p>
-        </p:txBody>
-      </p:sp>
-      <p:sp>
-        <p:nvSpPr>
-          <p:cNvPr id="3" name="TextBox 2"/>
-          <p:cNvSpPr txBox="1"/>
-          <p:nvPr/>
-        </p:nvSpPr>
-        <p:spPr>
-          <a:xfrm>
-            <a:off x="822960" y="777240"/>
-            <a:ext cx="10515600" cy="822960"/>
-          </a:xfrm>
-          <a:prstGeom prst="rect">
-            <a:avLst/>
-          </a:prstGeom>
-          <a:noFill/>
-        </p:spPr>
-        <p:txBody>
-          <a:bodyPr wrap="square" anchor="t">
-            <a:spAutoFit/>
-          </a:bodyPr>
-          <a:lstStyle/>
-          <a:p>
-            <a:pPr algn="l">
-              <a:lnSpc>
-                <a:spcPct val="100000"/>
-              </a:lnSpc>
-            </a:pPr>
-            <a:r>
-              <a:rPr sz="3200" b="1">
-                <a:solidFill>
-                  <a:srgbClr val="161A23"/>
-                </a:solidFill>
-                <a:latin typeface="Calibri"/>
-              </a:rPr>
-              <a:t>Only one thing changes: who fetches the data</a:t>
-            </a:r>
-          </a:p>
-        </p:txBody>
-      </p:sp>
-      <p:sp>
-        <p:nvSpPr>
-          <p:cNvPr id="4" name="Rectangle 3"/>
-          <p:cNvSpPr/>
-          <p:nvPr/>
-        </p:nvSpPr>
-        <p:spPr>
-          <a:xfrm>
-            <a:off x="822960" y="1572768"/>
-            <a:ext cx="1005840" cy="34000"/>
-          </a:xfrm>
-          <a:prstGeom prst="rect">
-            <a:avLst/>
-          </a:prstGeom>
-          <a:solidFill>
-            <a:srgbClr val="4338CA"/>
-          </a:solidFill>
-          <a:ln>
-            <a:noFill/>
-          </a:ln>
-          <a:effectLst/>
-        </p:spPr>
-        <p:style>
-          <a:lnRef idx="1">
-            <a:schemeClr val="accent1"/>
-          </a:lnRef>
-          <a:fillRef idx="3">
-            <a:schemeClr val="accent1"/>
-          </a:fillRef>
-          <a:effectRef idx="2">
-            <a:schemeClr val="accent1"/>
-          </a:effectRef>
-          <a:fontRef idx="minor">
-            <a:schemeClr val="lt1"/>
-          </a:fontRef>
-        </p:style>
-        <p:txBody>
-          <a:bodyPr rtlCol="0" anchor="ctr"/>
-          <a:lstStyle/>
-          <a:p>
-            <a:pPr algn="ctr"/>
-          </a:p>
-        </p:txBody>
-      </p:sp>
-      <p:graphicFrame>
-        <p:nvGraphicFramePr>
-          <p:cNvPr id="5" name="Table 4"/>
-          <p:cNvGraphicFramePr>
-            <a:graphicFrameLocks noGrp="1"/>
-          </p:cNvGraphicFramePr>
-          <p:nvPr/>
-        </p:nvGraphicFramePr>
-        <p:xfrm>
-          <a:off x="822960" y="2011680"/>
           <a:ext cx="10515598" cy="1828800"/>
         </p:xfrm>
         <a:graphic>
@@ -9094,8 +7887,8 @@
               </a:tblPr>
               <a:tblGrid>
                 <a:gridCol w="491383"/>
-                <a:gridCol w="3144852"/>
-                <a:gridCol w="1965532"/>
+                <a:gridCol w="2850022"/>
+                <a:gridCol w="2260362"/>
                 <a:gridCol w="4913831"/>
               </a:tblGrid>
               <a:tr h="365760">
@@ -9155,7 +7948,7 @@
                           </a:solidFill>
                           <a:latin typeface="Calibri"/>
                         </a:rPr>
-                        <a:t>Who fetches</a:t>
+                        <a:t>Who fetches the data</a:t>
                       </a:r>
                     </a:p>
                   </a:txBody>
@@ -9267,7 +8060,7 @@
                           </a:solidFill>
                           <a:latin typeface="Calibri"/>
                         </a:rPr>
-                        <a:t>The floor. Shows what AI alone produces with no real data</a:t>
+                        <a:t>The floor. Shows what AI invents with no real data</a:t>
                       </a:r>
                     </a:p>
                   </a:txBody>
@@ -9357,7 +8150,7 @@
                           </a:solidFill>
                           <a:latin typeface="Calibri"/>
                         </a:rPr>
-                        <a:t>My original proposal, untuned. The honest starting point</a:t>
+                        <a:t>My original proposal. The honest starting point</a:t>
                       </a:r>
                     </a:p>
                   </a:txBody>
@@ -9403,7 +8196,7 @@
                           </a:solidFill>
                           <a:latin typeface="Calibri"/>
                         </a:rPr>
-                        <a:t>Same six agents, tuned properly</a:t>
+                        <a:t>Same six agents, tuned</a:t>
                       </a:r>
                     </a:p>
                   </a:txBody>
@@ -9493,7 +8286,7 @@
                           </a:solidFill>
                           <a:latin typeface="Calibri"/>
                         </a:rPr>
-                        <a:t>Three agents, normal code fetches</a:t>
+                        <a:t>Three agents</a:t>
                       </a:r>
                     </a:p>
                   </a:txBody>
@@ -9515,7 +8308,7 @@
                           </a:solidFill>
                           <a:latin typeface="Calibri"/>
                         </a:rPr>
-                        <a:t>normal code</a:t>
+                        <a:t>plain code</a:t>
                       </a:r>
                     </a:p>
                   </a:txBody>
@@ -9537,7 +8330,7 @@
                           </a:solidFill>
                           <a:latin typeface="Calibri"/>
                         </a:rPr>
-                        <a:t>What I ship. This is the idea being tested</a:t>
+                        <a:t>What I ship. The idea being tested</a:t>
                       </a:r>
                     </a:p>
                   </a:txBody>
@@ -9586,7 +8379,1288 @@
                 </a:solidFill>
                 <a:latin typeface="Calibri"/>
               </a:rPr>
-              <a:t>C is the important one: without it, someone could say D only won because B was set up badly.</a:t>
+              <a:t>C is the important one. Without it, someone could say D only won because B was set up badly.</a:t>
+            </a:r>
+          </a:p>
+        </p:txBody>
+      </p:sp>
+    </p:spTree>
+  </p:cSld>
+  <p:clrMapOvr>
+    <a:masterClrMapping/>
+  </p:clrMapOvr>
+</p:sld>
+</file>
+
+<file path=ppt/slides/slide6.xml><?xml version="1.0" encoding="utf-8"?>
+<p:sld xmlns:a="http://schemas.openxmlformats.org/drawingml/2006/main" xmlns:p="http://schemas.openxmlformats.org/presentationml/2006/main" xmlns:r="http://schemas.openxmlformats.org/officeDocument/2006/relationships">
+  <p:cSld>
+    <p:spTree>
+      <p:nvGrpSpPr>
+        <p:cNvPr id="1" name=""/>
+        <p:cNvGrpSpPr/>
+        <p:nvPr/>
+      </p:nvGrpSpPr>
+      <p:grpSpPr/>
+      <p:sp>
+        <p:nvSpPr>
+          <p:cNvPr id="2" name="TextBox 1"/>
+          <p:cNvSpPr txBox="1"/>
+          <p:nvPr/>
+        </p:nvSpPr>
+        <p:spPr>
+          <a:xfrm>
+            <a:off x="822960" y="457200"/>
+            <a:ext cx="10515600" cy="365760"/>
+          </a:xfrm>
+          <a:prstGeom prst="rect">
+            <a:avLst/>
+          </a:prstGeom>
+          <a:noFill/>
+        </p:spPr>
+        <p:txBody>
+          <a:bodyPr wrap="square" anchor="t">
+            <a:spAutoFit/>
+          </a:bodyPr>
+          <a:lstStyle/>
+          <a:p>
+            <a:pPr algn="l">
+              <a:lnSpc>
+                <a:spcPct val="100000"/>
+              </a:lnSpc>
+            </a:pPr>
+            <a:r>
+              <a:rPr sz="1200" b="1">
+                <a:solidFill>
+                  <a:srgbClr val="4338CA"/>
+                </a:solidFill>
+                <a:latin typeface="Calibri"/>
+              </a:rPr>
+              <a:t>5  ·  AGENTS AND THEIR TOOLS</a:t>
+            </a:r>
+          </a:p>
+        </p:txBody>
+      </p:sp>
+      <p:sp>
+        <p:nvSpPr>
+          <p:cNvPr id="3" name="TextBox 2"/>
+          <p:cNvSpPr txBox="1"/>
+          <p:nvPr/>
+        </p:nvSpPr>
+        <p:spPr>
+          <a:xfrm>
+            <a:off x="822960" y="777240"/>
+            <a:ext cx="10515600" cy="822960"/>
+          </a:xfrm>
+          <a:prstGeom prst="rect">
+            <a:avLst/>
+          </a:prstGeom>
+          <a:noFill/>
+        </p:spPr>
+        <p:txBody>
+          <a:bodyPr wrap="square" anchor="t">
+            <a:spAutoFit/>
+          </a:bodyPr>
+          <a:lstStyle/>
+          <a:p>
+            <a:pPr algn="l">
+              <a:lnSpc>
+                <a:spcPct val="100000"/>
+              </a:lnSpc>
+            </a:pPr>
+            <a:r>
+              <a:rPr sz="3200" b="1">
+                <a:solidFill>
+                  <a:srgbClr val="161A23"/>
+                </a:solidFill>
+                <a:latin typeface="Calibri"/>
+              </a:rPr>
+              <a:t>Counted from the code, per version</a:t>
+            </a:r>
+          </a:p>
+        </p:txBody>
+      </p:sp>
+      <p:sp>
+        <p:nvSpPr>
+          <p:cNvPr id="4" name="Rectangle 3"/>
+          <p:cNvSpPr/>
+          <p:nvPr/>
+        </p:nvSpPr>
+        <p:spPr>
+          <a:xfrm>
+            <a:off x="822960" y="1572768"/>
+            <a:ext cx="1005840" cy="34000"/>
+          </a:xfrm>
+          <a:prstGeom prst="rect">
+            <a:avLst/>
+          </a:prstGeom>
+          <a:solidFill>
+            <a:srgbClr val="4338CA"/>
+          </a:solidFill>
+          <a:ln>
+            <a:noFill/>
+          </a:ln>
+          <a:effectLst/>
+        </p:spPr>
+        <p:style>
+          <a:lnRef idx="1">
+            <a:schemeClr val="accent1"/>
+          </a:lnRef>
+          <a:fillRef idx="3">
+            <a:schemeClr val="accent1"/>
+          </a:fillRef>
+          <a:effectRef idx="2">
+            <a:schemeClr val="accent1"/>
+          </a:effectRef>
+          <a:fontRef idx="minor">
+            <a:schemeClr val="lt1"/>
+          </a:fontRef>
+        </p:style>
+        <p:txBody>
+          <a:bodyPr rtlCol="0" anchor="ctr"/>
+          <a:lstStyle/>
+          <a:p>
+            <a:pPr algn="ctr"/>
+          </a:p>
+        </p:txBody>
+      </p:sp>
+      <p:graphicFrame>
+        <p:nvGraphicFramePr>
+          <p:cNvPr id="5" name="Table 4"/>
+          <p:cNvGraphicFramePr>
+            <a:graphicFrameLocks noGrp="1"/>
+          </p:cNvGraphicFramePr>
+          <p:nvPr/>
+        </p:nvGraphicFramePr>
+        <p:xfrm>
+          <a:off x="822960" y="1965960"/>
+          <a:ext cx="10515600" cy="2926080"/>
+        </p:xfrm>
+        <a:graphic>
+          <a:graphicData uri="http://schemas.openxmlformats.org/drawingml/2006/table">
+            <a:tbl>
+              <a:tblPr firstRow="1" bandRow="1">
+                <a:tableStyleId>{5C22544A-7EE6-4342-B048-85BDC9FD1C3A}</a:tableStyleId>
+              </a:tblPr>
+              <a:tblGrid>
+                <a:gridCol w="3657600"/>
+                <a:gridCol w="1257300"/>
+                <a:gridCol w="1257300"/>
+                <a:gridCol w="1257300"/>
+                <a:gridCol w="1257300"/>
+                <a:gridCol w="1828800"/>
+              </a:tblGrid>
+              <a:tr h="365760">
+                <a:tc>
+                  <a:txBody>
+                    <a:bodyPr/>
+                    <a:lstStyle/>
+                    <a:p>
+                      <a:r>
+                        <a:rPr sz="1250" b="1">
+                          <a:solidFill>
+                            <a:srgbClr val="FFFFFF"/>
+                          </a:solidFill>
+                          <a:latin typeface="Calibri"/>
+                        </a:rPr>
+                        <a:t>Agent</a:t>
+                      </a:r>
+                    </a:p>
+                  </a:txBody>
+                  <a:tcPr>
+                    <a:solidFill>
+                      <a:srgbClr val="4338CA"/>
+                    </a:solidFill>
+                  </a:tcPr>
+                </a:tc>
+                <a:tc>
+                  <a:txBody>
+                    <a:bodyPr/>
+                    <a:lstStyle/>
+                    <a:p>
+                      <a:r>
+                        <a:rPr sz="1250" b="1">
+                          <a:solidFill>
+                            <a:srgbClr val="FFFFFF"/>
+                          </a:solidFill>
+                          <a:latin typeface="Calibri"/>
+                        </a:rPr>
+                        <a:t>B  tools</a:t>
+                      </a:r>
+                    </a:p>
+                  </a:txBody>
+                  <a:tcPr>
+                    <a:solidFill>
+                      <a:srgbClr val="4338CA"/>
+                    </a:solidFill>
+                  </a:tcPr>
+                </a:tc>
+                <a:tc>
+                  <a:txBody>
+                    <a:bodyPr/>
+                    <a:lstStyle/>
+                    <a:p>
+                      <a:r>
+                        <a:rPr sz="1250" b="1">
+                          <a:solidFill>
+                            <a:srgbClr val="FFFFFF"/>
+                          </a:solidFill>
+                          <a:latin typeface="Calibri"/>
+                        </a:rPr>
+                        <a:t>B  steps</a:t>
+                      </a:r>
+                    </a:p>
+                  </a:txBody>
+                  <a:tcPr>
+                    <a:solidFill>
+                      <a:srgbClr val="4338CA"/>
+                    </a:solidFill>
+                  </a:tcPr>
+                </a:tc>
+                <a:tc>
+                  <a:txBody>
+                    <a:bodyPr/>
+                    <a:lstStyle/>
+                    <a:p>
+                      <a:r>
+                        <a:rPr sz="1250" b="1">
+                          <a:solidFill>
+                            <a:srgbClr val="FFFFFF"/>
+                          </a:solidFill>
+                          <a:latin typeface="Calibri"/>
+                        </a:rPr>
+                        <a:t>C  tools</a:t>
+                      </a:r>
+                    </a:p>
+                  </a:txBody>
+                  <a:tcPr>
+                    <a:solidFill>
+                      <a:srgbClr val="4338CA"/>
+                    </a:solidFill>
+                  </a:tcPr>
+                </a:tc>
+                <a:tc>
+                  <a:txBody>
+                    <a:bodyPr/>
+                    <a:lstStyle/>
+                    <a:p>
+                      <a:r>
+                        <a:rPr sz="1250" b="1">
+                          <a:solidFill>
+                            <a:srgbClr val="FFFFFF"/>
+                          </a:solidFill>
+                          <a:latin typeface="Calibri"/>
+                        </a:rPr>
+                        <a:t>C  steps</a:t>
+                      </a:r>
+                    </a:p>
+                  </a:txBody>
+                  <a:tcPr>
+                    <a:solidFill>
+                      <a:srgbClr val="4338CA"/>
+                    </a:solidFill>
+                  </a:tcPr>
+                </a:tc>
+                <a:tc>
+                  <a:txBody>
+                    <a:bodyPr/>
+                    <a:lstStyle/>
+                    <a:p>
+                      <a:r>
+                        <a:rPr sz="1250" b="1">
+                          <a:solidFill>
+                            <a:srgbClr val="FFFFFF"/>
+                          </a:solidFill>
+                          <a:latin typeface="Calibri"/>
+                        </a:rPr>
+                        <a:t>D</a:t>
+                      </a:r>
+                    </a:p>
+                  </a:txBody>
+                  <a:tcPr>
+                    <a:solidFill>
+                      <a:srgbClr val="4338CA"/>
+                    </a:solidFill>
+                  </a:tcPr>
+                </a:tc>
+              </a:tr>
+              <a:tr h="365760">
+                <a:tc>
+                  <a:txBody>
+                    <a:bodyPr/>
+                    <a:lstStyle/>
+                    <a:p>
+                      <a:r>
+                        <a:rPr sz="1250" b="0">
+                          <a:solidFill>
+                            <a:srgbClr val="161A23"/>
+                          </a:solidFill>
+                          <a:latin typeface="Calibri"/>
+                        </a:rPr>
+                        <a:t>Preferences extractor</a:t>
+                      </a:r>
+                    </a:p>
+                  </a:txBody>
+                  <a:tcPr>
+                    <a:solidFill>
+                      <a:srgbClr val="FFFFFF"/>
+                    </a:solidFill>
+                  </a:tcPr>
+                </a:tc>
+                <a:tc>
+                  <a:txBody>
+                    <a:bodyPr/>
+                    <a:lstStyle/>
+                    <a:p>
+                      <a:r>
+                        <a:rPr sz="1250" b="0">
+                          <a:solidFill>
+                            <a:srgbClr val="161A23"/>
+                          </a:solidFill>
+                          <a:latin typeface="Calibri"/>
+                        </a:rPr>
+                        <a:t>0</a:t>
+                      </a:r>
+                    </a:p>
+                  </a:txBody>
+                  <a:tcPr>
+                    <a:solidFill>
+                      <a:srgbClr val="FFFFFF"/>
+                    </a:solidFill>
+                  </a:tcPr>
+                </a:tc>
+                <a:tc>
+                  <a:txBody>
+                    <a:bodyPr/>
+                    <a:lstStyle/>
+                    <a:p>
+                      <a:r>
+                        <a:rPr sz="1250" b="0">
+                          <a:solidFill>
+                            <a:srgbClr val="161A23"/>
+                          </a:solidFill>
+                          <a:latin typeface="Calibri"/>
+                        </a:rPr>
+                        <a:t>3</a:t>
+                      </a:r>
+                    </a:p>
+                  </a:txBody>
+                  <a:tcPr>
+                    <a:solidFill>
+                      <a:srgbClr val="FFFFFF"/>
+                    </a:solidFill>
+                  </a:tcPr>
+                </a:tc>
+                <a:tc>
+                  <a:txBody>
+                    <a:bodyPr/>
+                    <a:lstStyle/>
+                    <a:p>
+                      <a:r>
+                        <a:rPr sz="1250" b="0">
+                          <a:solidFill>
+                            <a:srgbClr val="161A23"/>
+                          </a:solidFill>
+                          <a:latin typeface="Calibri"/>
+                        </a:rPr>
+                        <a:t>0</a:t>
+                      </a:r>
+                    </a:p>
+                  </a:txBody>
+                  <a:tcPr>
+                    <a:solidFill>
+                      <a:srgbClr val="FFFFFF"/>
+                    </a:solidFill>
+                  </a:tcPr>
+                </a:tc>
+                <a:tc>
+                  <a:txBody>
+                    <a:bodyPr/>
+                    <a:lstStyle/>
+                    <a:p>
+                      <a:r>
+                        <a:rPr sz="1250" b="0">
+                          <a:solidFill>
+                            <a:srgbClr val="161A23"/>
+                          </a:solidFill>
+                          <a:latin typeface="Calibri"/>
+                        </a:rPr>
+                        <a:t>3</a:t>
+                      </a:r>
+                    </a:p>
+                  </a:txBody>
+                  <a:tcPr>
+                    <a:solidFill>
+                      <a:srgbClr val="FFFFFF"/>
+                    </a:solidFill>
+                  </a:tcPr>
+                </a:tc>
+                <a:tc>
+                  <a:txBody>
+                    <a:bodyPr/>
+                    <a:lstStyle/>
+                    <a:p>
+                      <a:r>
+                        <a:rPr sz="1250" b="0">
+                          <a:solidFill>
+                            <a:srgbClr val="161A23"/>
+                          </a:solidFill>
+                          <a:latin typeface="Calibri"/>
+                        </a:rPr>
+                        <a:t>0 tools</a:t>
+                      </a:r>
+                    </a:p>
+                  </a:txBody>
+                  <a:tcPr>
+                    <a:solidFill>
+                      <a:srgbClr val="FFFFFF"/>
+                    </a:solidFill>
+                  </a:tcPr>
+                </a:tc>
+              </a:tr>
+              <a:tr h="365760">
+                <a:tc>
+                  <a:txBody>
+                    <a:bodyPr/>
+                    <a:lstStyle/>
+                    <a:p>
+                      <a:r>
+                        <a:rPr sz="1250" b="0">
+                          <a:solidFill>
+                            <a:srgbClr val="161A23"/>
+                          </a:solidFill>
+                          <a:latin typeface="Calibri"/>
+                        </a:rPr>
+                        <a:t>Flight search</a:t>
+                      </a:r>
+                    </a:p>
+                  </a:txBody>
+                  <a:tcPr>
+                    <a:solidFill>
+                      <a:srgbClr val="F7F8FC"/>
+                    </a:solidFill>
+                  </a:tcPr>
+                </a:tc>
+                <a:tc>
+                  <a:txBody>
+                    <a:bodyPr/>
+                    <a:lstStyle/>
+                    <a:p>
+                      <a:r>
+                        <a:rPr sz="1250" b="0">
+                          <a:solidFill>
+                            <a:srgbClr val="161A23"/>
+                          </a:solidFill>
+                          <a:latin typeface="Calibri"/>
+                        </a:rPr>
+                        <a:t>4</a:t>
+                      </a:r>
+                    </a:p>
+                  </a:txBody>
+                  <a:tcPr>
+                    <a:solidFill>
+                      <a:srgbClr val="F7F8FC"/>
+                    </a:solidFill>
+                  </a:tcPr>
+                </a:tc>
+                <a:tc>
+                  <a:txBody>
+                    <a:bodyPr/>
+                    <a:lstStyle/>
+                    <a:p>
+                      <a:r>
+                        <a:rPr sz="1250" b="0">
+                          <a:solidFill>
+                            <a:srgbClr val="161A23"/>
+                          </a:solidFill>
+                          <a:latin typeface="Calibri"/>
+                        </a:rPr>
+                        <a:t>8</a:t>
+                      </a:r>
+                    </a:p>
+                  </a:txBody>
+                  <a:tcPr>
+                    <a:solidFill>
+                      <a:srgbClr val="F7F8FC"/>
+                    </a:solidFill>
+                  </a:tcPr>
+                </a:tc>
+                <a:tc>
+                  <a:txBody>
+                    <a:bodyPr/>
+                    <a:lstStyle/>
+                    <a:p>
+                      <a:r>
+                        <a:rPr sz="1250" b="0">
+                          <a:solidFill>
+                            <a:srgbClr val="161A23"/>
+                          </a:solidFill>
+                          <a:latin typeface="Calibri"/>
+                        </a:rPr>
+                        <a:t>1</a:t>
+                      </a:r>
+                    </a:p>
+                  </a:txBody>
+                  <a:tcPr>
+                    <a:solidFill>
+                      <a:srgbClr val="F7F8FC"/>
+                    </a:solidFill>
+                  </a:tcPr>
+                </a:tc>
+                <a:tc>
+                  <a:txBody>
+                    <a:bodyPr/>
+                    <a:lstStyle/>
+                    <a:p>
+                      <a:r>
+                        <a:rPr sz="1250" b="0">
+                          <a:solidFill>
+                            <a:srgbClr val="161A23"/>
+                          </a:solidFill>
+                          <a:latin typeface="Calibri"/>
+                        </a:rPr>
+                        <a:t>3</a:t>
+                      </a:r>
+                    </a:p>
+                  </a:txBody>
+                  <a:tcPr>
+                    <a:solidFill>
+                      <a:srgbClr val="F7F8FC"/>
+                    </a:solidFill>
+                  </a:tcPr>
+                </a:tc>
+                <a:tc>
+                  <a:txBody>
+                    <a:bodyPr/>
+                    <a:lstStyle/>
+                    <a:p>
+                      <a:r>
+                        <a:rPr sz="1250" b="0">
+                          <a:solidFill>
+                            <a:srgbClr val="161A23"/>
+                          </a:solidFill>
+                          <a:latin typeface="Calibri"/>
+                        </a:rPr>
+                        <a:t>removed</a:t>
+                      </a:r>
+                    </a:p>
+                  </a:txBody>
+                  <a:tcPr>
+                    <a:solidFill>
+                      <a:srgbClr val="F7F8FC"/>
+                    </a:solidFill>
+                  </a:tcPr>
+                </a:tc>
+              </a:tr>
+              <a:tr h="365760">
+                <a:tc>
+                  <a:txBody>
+                    <a:bodyPr/>
+                    <a:lstStyle/>
+                    <a:p>
+                      <a:r>
+                        <a:rPr sz="1250" b="0">
+                          <a:solidFill>
+                            <a:srgbClr val="161A23"/>
+                          </a:solidFill>
+                          <a:latin typeface="Calibri"/>
+                        </a:rPr>
+                        <a:t>Hotel search</a:t>
+                      </a:r>
+                    </a:p>
+                  </a:txBody>
+                  <a:tcPr>
+                    <a:solidFill>
+                      <a:srgbClr val="FFFFFF"/>
+                    </a:solidFill>
+                  </a:tcPr>
+                </a:tc>
+                <a:tc>
+                  <a:txBody>
+                    <a:bodyPr/>
+                    <a:lstStyle/>
+                    <a:p>
+                      <a:r>
+                        <a:rPr sz="1250" b="0">
+                          <a:solidFill>
+                            <a:srgbClr val="161A23"/>
+                          </a:solidFill>
+                          <a:latin typeface="Calibri"/>
+                        </a:rPr>
+                        <a:t>8</a:t>
+                      </a:r>
+                    </a:p>
+                  </a:txBody>
+                  <a:tcPr>
+                    <a:solidFill>
+                      <a:srgbClr val="FFFFFF"/>
+                    </a:solidFill>
+                  </a:tcPr>
+                </a:tc>
+                <a:tc>
+                  <a:txBody>
+                    <a:bodyPr/>
+                    <a:lstStyle/>
+                    <a:p>
+                      <a:r>
+                        <a:rPr sz="1250" b="0">
+                          <a:solidFill>
+                            <a:srgbClr val="161A23"/>
+                          </a:solidFill>
+                          <a:latin typeface="Calibri"/>
+                        </a:rPr>
+                        <a:t>10</a:t>
+                      </a:r>
+                    </a:p>
+                  </a:txBody>
+                  <a:tcPr>
+                    <a:solidFill>
+                      <a:srgbClr val="FFFFFF"/>
+                    </a:solidFill>
+                  </a:tcPr>
+                </a:tc>
+                <a:tc>
+                  <a:txBody>
+                    <a:bodyPr/>
+                    <a:lstStyle/>
+                    <a:p>
+                      <a:r>
+                        <a:rPr sz="1250" b="0">
+                          <a:solidFill>
+                            <a:srgbClr val="161A23"/>
+                          </a:solidFill>
+                          <a:latin typeface="Calibri"/>
+                        </a:rPr>
+                        <a:t>1</a:t>
+                      </a:r>
+                    </a:p>
+                  </a:txBody>
+                  <a:tcPr>
+                    <a:solidFill>
+                      <a:srgbClr val="FFFFFF"/>
+                    </a:solidFill>
+                  </a:tcPr>
+                </a:tc>
+                <a:tc>
+                  <a:txBody>
+                    <a:bodyPr/>
+                    <a:lstStyle/>
+                    <a:p>
+                      <a:r>
+                        <a:rPr sz="1250" b="0">
+                          <a:solidFill>
+                            <a:srgbClr val="161A23"/>
+                          </a:solidFill>
+                          <a:latin typeface="Calibri"/>
+                        </a:rPr>
+                        <a:t>3</a:t>
+                      </a:r>
+                    </a:p>
+                  </a:txBody>
+                  <a:tcPr>
+                    <a:solidFill>
+                      <a:srgbClr val="FFFFFF"/>
+                    </a:solidFill>
+                  </a:tcPr>
+                </a:tc>
+                <a:tc>
+                  <a:txBody>
+                    <a:bodyPr/>
+                    <a:lstStyle/>
+                    <a:p>
+                      <a:r>
+                        <a:rPr sz="1250" b="0">
+                          <a:solidFill>
+                            <a:srgbClr val="161A23"/>
+                          </a:solidFill>
+                          <a:latin typeface="Calibri"/>
+                        </a:rPr>
+                        <a:t>removed</a:t>
+                      </a:r>
+                    </a:p>
+                  </a:txBody>
+                  <a:tcPr>
+                    <a:solidFill>
+                      <a:srgbClr val="FFFFFF"/>
+                    </a:solidFill>
+                  </a:tcPr>
+                </a:tc>
+              </a:tr>
+              <a:tr h="365760">
+                <a:tc>
+                  <a:txBody>
+                    <a:bodyPr/>
+                    <a:lstStyle/>
+                    <a:p>
+                      <a:r>
+                        <a:rPr sz="1250" b="0">
+                          <a:solidFill>
+                            <a:srgbClr val="161A23"/>
+                          </a:solidFill>
+                          <a:latin typeface="Calibri"/>
+                        </a:rPr>
+                        <a:t>Activities</a:t>
+                      </a:r>
+                    </a:p>
+                  </a:txBody>
+                  <a:tcPr>
+                    <a:solidFill>
+                      <a:srgbClr val="F7F8FC"/>
+                    </a:solidFill>
+                  </a:tcPr>
+                </a:tc>
+                <a:tc>
+                  <a:txBody>
+                    <a:bodyPr/>
+                    <a:lstStyle/>
+                    <a:p>
+                      <a:r>
+                        <a:rPr sz="1250" b="0">
+                          <a:solidFill>
+                            <a:srgbClr val="161A23"/>
+                          </a:solidFill>
+                          <a:latin typeface="Calibri"/>
+                        </a:rPr>
+                        <a:t>4</a:t>
+                      </a:r>
+                    </a:p>
+                  </a:txBody>
+                  <a:tcPr>
+                    <a:solidFill>
+                      <a:srgbClr val="F7F8FC"/>
+                    </a:solidFill>
+                  </a:tcPr>
+                </a:tc>
+                <a:tc>
+                  <a:txBody>
+                    <a:bodyPr/>
+                    <a:lstStyle/>
+                    <a:p>
+                      <a:r>
+                        <a:rPr sz="1250" b="0">
+                          <a:solidFill>
+                            <a:srgbClr val="161A23"/>
+                          </a:solidFill>
+                          <a:latin typeface="Calibri"/>
+                        </a:rPr>
+                        <a:t>10</a:t>
+                      </a:r>
+                    </a:p>
+                  </a:txBody>
+                  <a:tcPr>
+                    <a:solidFill>
+                      <a:srgbClr val="F7F8FC"/>
+                    </a:solidFill>
+                  </a:tcPr>
+                </a:tc>
+                <a:tc>
+                  <a:txBody>
+                    <a:bodyPr/>
+                    <a:lstStyle/>
+                    <a:p>
+                      <a:r>
+                        <a:rPr sz="1250" b="0">
+                          <a:solidFill>
+                            <a:srgbClr val="161A23"/>
+                          </a:solidFill>
+                          <a:latin typeface="Calibri"/>
+                        </a:rPr>
+                        <a:t>2</a:t>
+                      </a:r>
+                    </a:p>
+                  </a:txBody>
+                  <a:tcPr>
+                    <a:solidFill>
+                      <a:srgbClr val="F7F8FC"/>
+                    </a:solidFill>
+                  </a:tcPr>
+                </a:tc>
+                <a:tc>
+                  <a:txBody>
+                    <a:bodyPr/>
+                    <a:lstStyle/>
+                    <a:p>
+                      <a:r>
+                        <a:rPr sz="1250" b="0">
+                          <a:solidFill>
+                            <a:srgbClr val="161A23"/>
+                          </a:solidFill>
+                          <a:latin typeface="Calibri"/>
+                        </a:rPr>
+                        <a:t>3</a:t>
+                      </a:r>
+                    </a:p>
+                  </a:txBody>
+                  <a:tcPr>
+                    <a:solidFill>
+                      <a:srgbClr val="F7F8FC"/>
+                    </a:solidFill>
+                  </a:tcPr>
+                </a:tc>
+                <a:tc>
+                  <a:txBody>
+                    <a:bodyPr/>
+                    <a:lstStyle/>
+                    <a:p>
+                      <a:r>
+                        <a:rPr sz="1250" b="0">
+                          <a:solidFill>
+                            <a:srgbClr val="161A23"/>
+                          </a:solidFill>
+                          <a:latin typeface="Calibri"/>
+                        </a:rPr>
+                        <a:t>removed</a:t>
+                      </a:r>
+                    </a:p>
+                  </a:txBody>
+                  <a:tcPr>
+                    <a:solidFill>
+                      <a:srgbClr val="F7F8FC"/>
+                    </a:solidFill>
+                  </a:tcPr>
+                </a:tc>
+              </a:tr>
+              <a:tr h="365760">
+                <a:tc>
+                  <a:txBody>
+                    <a:bodyPr/>
+                    <a:lstStyle/>
+                    <a:p>
+                      <a:r>
+                        <a:rPr sz="1250" b="0">
+                          <a:solidFill>
+                            <a:srgbClr val="161A23"/>
+                          </a:solidFill>
+                          <a:latin typeface="Calibri"/>
+                        </a:rPr>
+                        <a:t>Itinerary coordinator</a:t>
+                      </a:r>
+                    </a:p>
+                  </a:txBody>
+                  <a:tcPr>
+                    <a:solidFill>
+                      <a:srgbClr val="FFFFFF"/>
+                    </a:solidFill>
+                  </a:tcPr>
+                </a:tc>
+                <a:tc>
+                  <a:txBody>
+                    <a:bodyPr/>
+                    <a:lstStyle/>
+                    <a:p>
+                      <a:r>
+                        <a:rPr sz="1250" b="0">
+                          <a:solidFill>
+                            <a:srgbClr val="161A23"/>
+                          </a:solidFill>
+                          <a:latin typeface="Calibri"/>
+                        </a:rPr>
+                        <a:t>4</a:t>
+                      </a:r>
+                    </a:p>
+                  </a:txBody>
+                  <a:tcPr>
+                    <a:solidFill>
+                      <a:srgbClr val="FFFFFF"/>
+                    </a:solidFill>
+                  </a:tcPr>
+                </a:tc>
+                <a:tc>
+                  <a:txBody>
+                    <a:bodyPr/>
+                    <a:lstStyle/>
+                    <a:p>
+                      <a:r>
+                        <a:rPr sz="1250" b="0">
+                          <a:solidFill>
+                            <a:srgbClr val="161A23"/>
+                          </a:solidFill>
+                          <a:latin typeface="Calibri"/>
+                        </a:rPr>
+                        <a:t>15</a:t>
+                      </a:r>
+                    </a:p>
+                  </a:txBody>
+                  <a:tcPr>
+                    <a:solidFill>
+                      <a:srgbClr val="FFFFFF"/>
+                    </a:solidFill>
+                  </a:tcPr>
+                </a:tc>
+                <a:tc>
+                  <a:txBody>
+                    <a:bodyPr/>
+                    <a:lstStyle/>
+                    <a:p>
+                      <a:r>
+                        <a:rPr sz="1250" b="0">
+                          <a:solidFill>
+                            <a:srgbClr val="161A23"/>
+                          </a:solidFill>
+                          <a:latin typeface="Calibri"/>
+                        </a:rPr>
+                        <a:t>0</a:t>
+                      </a:r>
+                    </a:p>
+                  </a:txBody>
+                  <a:tcPr>
+                    <a:solidFill>
+                      <a:srgbClr val="FFFFFF"/>
+                    </a:solidFill>
+                  </a:tcPr>
+                </a:tc>
+                <a:tc>
+                  <a:txBody>
+                    <a:bodyPr/>
+                    <a:lstStyle/>
+                    <a:p>
+                      <a:r>
+                        <a:rPr sz="1250" b="0">
+                          <a:solidFill>
+                            <a:srgbClr val="161A23"/>
+                          </a:solidFill>
+                          <a:latin typeface="Calibri"/>
+                        </a:rPr>
+                        <a:t>3</a:t>
+                      </a:r>
+                    </a:p>
+                  </a:txBody>
+                  <a:tcPr>
+                    <a:solidFill>
+                      <a:srgbClr val="FFFFFF"/>
+                    </a:solidFill>
+                  </a:tcPr>
+                </a:tc>
+                <a:tc>
+                  <a:txBody>
+                    <a:bodyPr/>
+                    <a:lstStyle/>
+                    <a:p>
+                      <a:r>
+                        <a:rPr sz="1250" b="0">
+                          <a:solidFill>
+                            <a:srgbClr val="161A23"/>
+                          </a:solidFill>
+                          <a:latin typeface="Calibri"/>
+                        </a:rPr>
+                        <a:t>4 tools</a:t>
+                      </a:r>
+                    </a:p>
+                  </a:txBody>
+                  <a:tcPr>
+                    <a:solidFill>
+                      <a:srgbClr val="FFFFFF"/>
+                    </a:solidFill>
+                  </a:tcPr>
+                </a:tc>
+              </a:tr>
+              <a:tr h="365760">
+                <a:tc>
+                  <a:txBody>
+                    <a:bodyPr/>
+                    <a:lstStyle/>
+                    <a:p>
+                      <a:r>
+                        <a:rPr sz="1250" b="0">
+                          <a:solidFill>
+                            <a:srgbClr val="161A23"/>
+                          </a:solidFill>
+                          <a:latin typeface="Calibri"/>
+                        </a:rPr>
+                        <a:t>Conversation</a:t>
+                      </a:r>
+                    </a:p>
+                  </a:txBody>
+                  <a:tcPr>
+                    <a:solidFill>
+                      <a:srgbClr val="F7F8FC"/>
+                    </a:solidFill>
+                  </a:tcPr>
+                </a:tc>
+                <a:tc>
+                  <a:txBody>
+                    <a:bodyPr/>
+                    <a:lstStyle/>
+                    <a:p>
+                      <a:r>
+                        <a:rPr sz="1250" b="0">
+                          <a:solidFill>
+                            <a:srgbClr val="161A23"/>
+                          </a:solidFill>
+                          <a:latin typeface="Calibri"/>
+                        </a:rPr>
+                        <a:t>—</a:t>
+                      </a:r>
+                    </a:p>
+                  </a:txBody>
+                  <a:tcPr>
+                    <a:solidFill>
+                      <a:srgbClr val="F7F8FC"/>
+                    </a:solidFill>
+                  </a:tcPr>
+                </a:tc>
+                <a:tc>
+                  <a:txBody>
+                    <a:bodyPr/>
+                    <a:lstStyle/>
+                    <a:p>
+                      <a:r>
+                        <a:rPr sz="1250" b="0">
+                          <a:solidFill>
+                            <a:srgbClr val="161A23"/>
+                          </a:solidFill>
+                          <a:latin typeface="Calibri"/>
+                        </a:rPr>
+                        <a:t>—</a:t>
+                      </a:r>
+                    </a:p>
+                  </a:txBody>
+                  <a:tcPr>
+                    <a:solidFill>
+                      <a:srgbClr val="F7F8FC"/>
+                    </a:solidFill>
+                  </a:tcPr>
+                </a:tc>
+                <a:tc>
+                  <a:txBody>
+                    <a:bodyPr/>
+                    <a:lstStyle/>
+                    <a:p>
+                      <a:r>
+                        <a:rPr sz="1250" b="0">
+                          <a:solidFill>
+                            <a:srgbClr val="161A23"/>
+                          </a:solidFill>
+                          <a:latin typeface="Calibri"/>
+                        </a:rPr>
+                        <a:t>—</a:t>
+                      </a:r>
+                    </a:p>
+                  </a:txBody>
+                  <a:tcPr>
+                    <a:solidFill>
+                      <a:srgbClr val="F7F8FC"/>
+                    </a:solidFill>
+                  </a:tcPr>
+                </a:tc>
+                <a:tc>
+                  <a:txBody>
+                    <a:bodyPr/>
+                    <a:lstStyle/>
+                    <a:p>
+                      <a:r>
+                        <a:rPr sz="1250" b="0">
+                          <a:solidFill>
+                            <a:srgbClr val="161A23"/>
+                          </a:solidFill>
+                          <a:latin typeface="Calibri"/>
+                        </a:rPr>
+                        <a:t>—</a:t>
+                      </a:r>
+                    </a:p>
+                  </a:txBody>
+                  <a:tcPr>
+                    <a:solidFill>
+                      <a:srgbClr val="F7F8FC"/>
+                    </a:solidFill>
+                  </a:tcPr>
+                </a:tc>
+                <a:tc>
+                  <a:txBody>
+                    <a:bodyPr/>
+                    <a:lstStyle/>
+                    <a:p>
+                      <a:r>
+                        <a:rPr sz="1250" b="0">
+                          <a:solidFill>
+                            <a:srgbClr val="161A23"/>
+                          </a:solidFill>
+                          <a:latin typeface="Calibri"/>
+                        </a:rPr>
+                        <a:t>0 tools</a:t>
+                      </a:r>
+                    </a:p>
+                  </a:txBody>
+                  <a:tcPr>
+                    <a:solidFill>
+                      <a:srgbClr val="F7F8FC"/>
+                    </a:solidFill>
+                  </a:tcPr>
+                </a:tc>
+              </a:tr>
+              <a:tr h="365760">
+                <a:tc>
+                  <a:txBody>
+                    <a:bodyPr/>
+                    <a:lstStyle/>
+                    <a:p>
+                      <a:r>
+                        <a:rPr sz="1250" b="0">
+                          <a:solidFill>
+                            <a:srgbClr val="161A23"/>
+                          </a:solidFill>
+                          <a:latin typeface="Calibri"/>
+                        </a:rPr>
+                        <a:t>TOTAL TOOL SLOTS</a:t>
+                      </a:r>
+                    </a:p>
+                  </a:txBody>
+                  <a:tcPr>
+                    <a:solidFill>
+                      <a:srgbClr val="FFFFFF"/>
+                    </a:solidFill>
+                  </a:tcPr>
+                </a:tc>
+                <a:tc>
+                  <a:txBody>
+                    <a:bodyPr/>
+                    <a:lstStyle/>
+                    <a:p>
+                      <a:r>
+                        <a:rPr sz="1250" b="0">
+                          <a:solidFill>
+                            <a:srgbClr val="161A23"/>
+                          </a:solidFill>
+                          <a:latin typeface="Calibri"/>
+                        </a:rPr>
+                        <a:t>20</a:t>
+                      </a:r>
+                    </a:p>
+                  </a:txBody>
+                  <a:tcPr>
+                    <a:solidFill>
+                      <a:srgbClr val="FFFFFF"/>
+                    </a:solidFill>
+                  </a:tcPr>
+                </a:tc>
+                <a:tc>
+                  <a:txBody>
+                    <a:bodyPr/>
+                    <a:lstStyle/>
+                    <a:p>
+                      <a:r>
+                        <a:rPr sz="1250" b="0">
+                          <a:solidFill>
+                            <a:srgbClr val="161A23"/>
+                          </a:solidFill>
+                          <a:latin typeface="Calibri"/>
+                        </a:rPr>
+                        <a:t> </a:t>
+                      </a:r>
+                    </a:p>
+                  </a:txBody>
+                  <a:tcPr>
+                    <a:solidFill>
+                      <a:srgbClr val="FFFFFF"/>
+                    </a:solidFill>
+                  </a:tcPr>
+                </a:tc>
+                <a:tc>
+                  <a:txBody>
+                    <a:bodyPr/>
+                    <a:lstStyle/>
+                    <a:p>
+                      <a:r>
+                        <a:rPr sz="1250" b="0">
+                          <a:solidFill>
+                            <a:srgbClr val="161A23"/>
+                          </a:solidFill>
+                          <a:latin typeface="Calibri"/>
+                        </a:rPr>
+                        <a:t>4</a:t>
+                      </a:r>
+                    </a:p>
+                  </a:txBody>
+                  <a:tcPr>
+                    <a:solidFill>
+                      <a:srgbClr val="FFFFFF"/>
+                    </a:solidFill>
+                  </a:tcPr>
+                </a:tc>
+                <a:tc>
+                  <a:txBody>
+                    <a:bodyPr/>
+                    <a:lstStyle/>
+                    <a:p>
+                      <a:r>
+                        <a:rPr sz="1250" b="0">
+                          <a:solidFill>
+                            <a:srgbClr val="161A23"/>
+                          </a:solidFill>
+                          <a:latin typeface="Calibri"/>
+                        </a:rPr>
+                        <a:t> </a:t>
+                      </a:r>
+                    </a:p>
+                  </a:txBody>
+                  <a:tcPr>
+                    <a:solidFill>
+                      <a:srgbClr val="FFFFFF"/>
+                    </a:solidFill>
+                  </a:tcPr>
+                </a:tc>
+                <a:tc>
+                  <a:txBody>
+                    <a:bodyPr/>
+                    <a:lstStyle/>
+                    <a:p>
+                      <a:r>
+                        <a:rPr sz="1250" b="0">
+                          <a:solidFill>
+                            <a:srgbClr val="161A23"/>
+                          </a:solidFill>
+                          <a:latin typeface="Calibri"/>
+                        </a:rPr>
+                        <a:t>4</a:t>
+                      </a:r>
+                    </a:p>
+                  </a:txBody>
+                  <a:tcPr>
+                    <a:solidFill>
+                      <a:srgbClr val="FFFFFF"/>
+                    </a:solidFill>
+                  </a:tcPr>
+                </a:tc>
+              </a:tr>
+            </a:tbl>
+          </a:graphicData>
+        </a:graphic>
+      </p:graphicFrame>
+      <p:sp>
+        <p:nvSpPr>
+          <p:cNvPr id="6" name="TextBox 5"/>
+          <p:cNvSpPr txBox="1"/>
+          <p:nvPr/>
+        </p:nvSpPr>
+        <p:spPr>
+          <a:xfrm>
+            <a:off x="822960" y="5394960"/>
+            <a:ext cx="10515600" cy="822960"/>
+          </a:xfrm>
+          <a:prstGeom prst="rect">
+            <a:avLst/>
+          </a:prstGeom>
+          <a:noFill/>
+        </p:spPr>
+        <p:txBody>
+          <a:bodyPr wrap="square" anchor="t">
+            <a:spAutoFit/>
+          </a:bodyPr>
+          <a:lstStyle/>
+          <a:p>
+            <a:pPr algn="l">
+              <a:lnSpc>
+                <a:spcPct val="100000"/>
+              </a:lnSpc>
+            </a:pPr>
+            <a:r>
+              <a:rPr sz="1700" b="1">
+                <a:solidFill>
+                  <a:srgbClr val="161A23"/>
+                </a:solidFill>
+                <a:latin typeface="Calibri"/>
+              </a:rPr>
+              <a:t>The hotel agent alone held 8 tools and 10 steps. Every step re-sent all 8 tool descriptions to the AI.</a:t>
             </a:r>
           </a:p>
         </p:txBody>
@@ -9643,7 +9717,210 @@
                 </a:solidFill>
                 <a:latin typeface="Calibri"/>
               </a:rPr>
-              <a:t>WHAT WENT WRONG IN EACH VERSION</a:t>
+              <a:t>6  ·  HOW A TOOL CALL WORKS</a:t>
+            </a:r>
+          </a:p>
+        </p:txBody>
+      </p:sp>
+      <p:sp>
+        <p:nvSpPr>
+          <p:cNvPr id="3" name="TextBox 2"/>
+          <p:cNvSpPr txBox="1"/>
+          <p:nvPr/>
+        </p:nvSpPr>
+        <p:spPr>
+          <a:xfrm>
+            <a:off x="822960" y="777240"/>
+            <a:ext cx="10515600" cy="822960"/>
+          </a:xfrm>
+          <a:prstGeom prst="rect">
+            <a:avLst/>
+          </a:prstGeom>
+          <a:noFill/>
+        </p:spPr>
+        <p:txBody>
+          <a:bodyPr wrap="square" anchor="t">
+            <a:spAutoFit/>
+          </a:bodyPr>
+          <a:lstStyle/>
+          <a:p>
+            <a:pPr algn="l">
+              <a:lnSpc>
+                <a:spcPct val="100000"/>
+              </a:lnSpc>
+            </a:pPr>
+            <a:r>
+              <a:rPr sz="3200" b="1">
+                <a:solidFill>
+                  <a:srgbClr val="161A23"/>
+                </a:solidFill>
+                <a:latin typeface="Calibri"/>
+              </a:rPr>
+              <a:t>12 tools, each with a checked input</a:t>
+            </a:r>
+          </a:p>
+        </p:txBody>
+      </p:sp>
+      <p:sp>
+        <p:nvSpPr>
+          <p:cNvPr id="4" name="Rectangle 3"/>
+          <p:cNvSpPr/>
+          <p:nvPr/>
+        </p:nvSpPr>
+        <p:spPr>
+          <a:xfrm>
+            <a:off x="822960" y="1572768"/>
+            <a:ext cx="1005840" cy="34000"/>
+          </a:xfrm>
+          <a:prstGeom prst="rect">
+            <a:avLst/>
+          </a:prstGeom>
+          <a:solidFill>
+            <a:srgbClr val="4338CA"/>
+          </a:solidFill>
+          <a:ln>
+            <a:noFill/>
+          </a:ln>
+          <a:effectLst/>
+        </p:spPr>
+        <p:style>
+          <a:lnRef idx="1">
+            <a:schemeClr val="accent1"/>
+          </a:lnRef>
+          <a:fillRef idx="3">
+            <a:schemeClr val="accent1"/>
+          </a:fillRef>
+          <a:effectRef idx="2">
+            <a:schemeClr val="accent1"/>
+          </a:effectRef>
+          <a:fontRef idx="minor">
+            <a:schemeClr val="lt1"/>
+          </a:fontRef>
+        </p:style>
+        <p:txBody>
+          <a:bodyPr rtlCol="0" anchor="ctr"/>
+          <a:lstStyle/>
+          <a:p>
+            <a:pPr algn="ctr"/>
+          </a:p>
+        </p:txBody>
+      </p:sp>
+      <p:pic>
+        <p:nvPicPr>
+          <p:cNvPr id="5" name="Picture 4" descr="mcp_lifecycle.png"/>
+          <p:cNvPicPr>
+            <a:picLocks noChangeAspect="1"/>
+          </p:cNvPicPr>
+          <p:nvPr/>
+        </p:nvPicPr>
+        <p:blipFill>
+          <a:blip r:embed="rId2"/>
+          <a:stretch>
+            <a:fillRect/>
+          </a:stretch>
+        </p:blipFill>
+        <p:spPr>
+          <a:xfrm>
+            <a:off x="2061943" y="1783080"/>
+            <a:ext cx="8067808" cy="3931920"/>
+          </a:xfrm>
+          <a:prstGeom prst="rect">
+            <a:avLst/>
+          </a:prstGeom>
+        </p:spPr>
+      </p:pic>
+      <p:sp>
+        <p:nvSpPr>
+          <p:cNvPr id="6" name="TextBox 5"/>
+          <p:cNvSpPr txBox="1"/>
+          <p:nvPr/>
+        </p:nvSpPr>
+        <p:spPr>
+          <a:xfrm>
+            <a:off x="822960" y="5852160"/>
+            <a:ext cx="10515600" cy="640080"/>
+          </a:xfrm>
+          <a:prstGeom prst="rect">
+            <a:avLst/>
+          </a:prstGeom>
+          <a:noFill/>
+        </p:spPr>
+        <p:txBody>
+          <a:bodyPr wrap="square" anchor="t">
+            <a:spAutoFit/>
+          </a:bodyPr>
+          <a:lstStyle/>
+          <a:p>
+            <a:pPr algn="l">
+              <a:lnSpc>
+                <a:spcPct val="100000"/>
+              </a:lnSpc>
+            </a:pPr>
+            <a:r>
+              <a:rPr sz="1500" b="0">
+                <a:solidFill>
+                  <a:srgbClr val="545C6E"/>
+                </a:solidFill>
+                <a:latin typeface="Calibri"/>
+              </a:rPr>
+              <a:t>The benefit: every input is checked against a schema before it reaches an API, and every reply is saved so the same request is never bought twice.</a:t>
+            </a:r>
+          </a:p>
+        </p:txBody>
+      </p:sp>
+    </p:spTree>
+  </p:cSld>
+  <p:clrMapOvr>
+    <a:masterClrMapping/>
+  </p:clrMapOvr>
+</p:sld>
+</file>
+
+<file path=ppt/slides/slide8.xml><?xml version="1.0" encoding="utf-8"?>
+<p:sld xmlns:a="http://schemas.openxmlformats.org/drawingml/2006/main" xmlns:p="http://schemas.openxmlformats.org/presentationml/2006/main" xmlns:r="http://schemas.openxmlformats.org/officeDocument/2006/relationships">
+  <p:cSld>
+    <p:spTree>
+      <p:nvGrpSpPr>
+        <p:cNvPr id="1" name=""/>
+        <p:cNvGrpSpPr/>
+        <p:nvPr/>
+      </p:nvGrpSpPr>
+      <p:grpSpPr/>
+      <p:sp>
+        <p:nvSpPr>
+          <p:cNvPr id="2" name="TextBox 1"/>
+          <p:cNvSpPr txBox="1"/>
+          <p:nvPr/>
+        </p:nvSpPr>
+        <p:spPr>
+          <a:xfrm>
+            <a:off x="822960" y="457200"/>
+            <a:ext cx="10515600" cy="365760"/>
+          </a:xfrm>
+          <a:prstGeom prst="rect">
+            <a:avLst/>
+          </a:prstGeom>
+          <a:noFill/>
+        </p:spPr>
+        <p:txBody>
+          <a:bodyPr wrap="square" anchor="t">
+            <a:spAutoFit/>
+          </a:bodyPr>
+          <a:lstStyle/>
+          <a:p>
+            <a:pPr algn="l">
+              <a:lnSpc>
+                <a:spcPct val="100000"/>
+              </a:lnSpc>
+            </a:pPr>
+            <a:r>
+              <a:rPr sz="1200" b="1">
+                <a:solidFill>
+                  <a:srgbClr val="4338CA"/>
+                </a:solidFill>
+                <a:latin typeface="Calibri"/>
+              </a:rPr>
+              <a:t>7  ·  WHAT WENT WRONG IN EACH VERSION</a:t>
             </a:r>
           </a:p>
         </p:txBody>
@@ -9834,7 +10111,7 @@
                           </a:solidFill>
                           <a:latin typeface="Calibri"/>
                         </a:rPr>
-                        <a:t>No tools at all, so it invents everything. Only 1.7% of its prices matched a real fare</a:t>
+                        <a:t>No tools, so it invents everything. Only 1.7% of its prices matched a real fare</a:t>
                       </a:r>
                     </a:p>
                   </a:txBody>
@@ -9880,7 +10157,7 @@
                           </a:solidFill>
                           <a:latin typeface="Calibri"/>
                         </a:rPr>
-                        <a:t>Skipped its own tools: never called the attractions or restaurant tool once. Twice produced broken output it had to redo</a:t>
+                        <a:t>Skipped its own tools: never called the attractions or the restaurant tool once. Twice produced broken output it had to redo</a:t>
                       </a:r>
                     </a:p>
                   </a:txBody>
@@ -9972,7 +10249,7 @@
                           </a:solidFill>
                           <a:latin typeface="Calibri"/>
                         </a:rPr>
-                        <a:t>Always makes exactly the same 5 requests, because code decides, not AI. Nothing gets skipped</a:t>
+                        <a:t>Always makes exactly the same 5 requests, because code decides, not AI. Nothing is skipped</a:t>
                       </a:r>
                     </a:p>
                   </a:txBody>
@@ -10015,13 +10292,13 @@
               </a:lnSpc>
             </a:pPr>
             <a:r>
-              <a:rPr sz="2000" b="1">
+              <a:rPr sz="2100" b="1">
                 <a:solidFill>
                   <a:srgbClr val="A85B00"/>
                 </a:solidFill>
                 <a:latin typeface="Calibri"/>
               </a:rPr>
-              <a:t>The pattern: when AI decides which tools to call, it sometimes does not call them.</a:t>
+              <a:t>When AI decides which tools to call, it sometimes does not call them.</a:t>
             </a:r>
           </a:p>
           <a:p>
@@ -10050,7 +10327,7 @@
 </p:sld>
 </file>
 
-<file path=ppt/slides/slide8.xml><?xml version="1.0" encoding="utf-8"?>
+<file path=ppt/slides/slide9.xml><?xml version="1.0" encoding="utf-8"?>
 <p:sld xmlns:a="http://schemas.openxmlformats.org/drawingml/2006/main" xmlns:p="http://schemas.openxmlformats.org/presentationml/2006/main" xmlns:r="http://schemas.openxmlformats.org/officeDocument/2006/relationships">
   <p:cSld>
     <p:spTree>
@@ -10094,7 +10371,7 @@
                 </a:solidFill>
                 <a:latin typeface="Calibri"/>
               </a:rPr>
-              <a:t>HOW IT IS BUILT</a:t>
+              <a:t>8  ·  BUDGET: DIVIDING THE MONEY</a:t>
             </a:r>
           </a:p>
         </p:txBody>
@@ -10133,7 +10410,7 @@
                 </a:solidFill>
                 <a:latin typeface="Calibri"/>
               </a:rPr>
-              <a:t>Four layers. Only the third one changes</a:t>
+              <a:t>Worked out from the trip, not a fixed percentage</a:t>
             </a:r>
           </a:p>
         </p:txBody>
@@ -10182,58 +10459,318 @@
           </a:p>
         </p:txBody>
       </p:sp>
-      <p:pic>
-        <p:nvPicPr>
-          <p:cNvPr id="5" name="Picture 4" descr="architecture.png"/>
-          <p:cNvPicPr>
-            <a:picLocks noChangeAspect="1"/>
-          </p:cNvPicPr>
+      <p:graphicFrame>
+        <p:nvGraphicFramePr>
+          <p:cNvPr id="5" name="Table 4"/>
+          <p:cNvGraphicFramePr>
+            <a:graphicFrameLocks noGrp="1"/>
+          </p:cNvGraphicFramePr>
           <p:nvPr/>
-        </p:nvPicPr>
-        <p:blipFill>
-          <a:blip r:embed="rId2"/>
-          <a:stretch>
-            <a:fillRect/>
-          </a:stretch>
-        </p:blipFill>
+        </p:nvGraphicFramePr>
+        <p:xfrm>
+          <a:off x="822960" y="2011680"/>
+          <a:ext cx="10515600" cy="2194560"/>
+        </p:xfrm>
+        <a:graphic>
+          <a:graphicData uri="http://schemas.openxmlformats.org/drawingml/2006/table">
+            <a:tbl>
+              <a:tblPr firstRow="1" bandRow="1">
+                <a:tableStyleId>{5C22544A-7EE6-4342-B048-85BDC9FD1C3A}</a:tableStyleId>
+              </a:tblPr>
+              <a:tblGrid>
+                <a:gridCol w="2628900"/>
+                <a:gridCol w="7886700"/>
+              </a:tblGrid>
+              <a:tr h="365760">
+                <a:tc>
+                  <a:txBody>
+                    <a:bodyPr/>
+                    <a:lstStyle/>
+                    <a:p>
+                      <a:r>
+                        <a:rPr sz="1350" b="1">
+                          <a:solidFill>
+                            <a:srgbClr val="FFFFFF"/>
+                          </a:solidFill>
+                          <a:latin typeface="Calibri"/>
+                        </a:rPr>
+                        <a:t>The traveller says</a:t>
+                      </a:r>
+                    </a:p>
+                  </a:txBody>
+                  <a:tcPr>
+                    <a:solidFill>
+                      <a:srgbClr val="4338CA"/>
+                    </a:solidFill>
+                  </a:tcPr>
+                </a:tc>
+                <a:tc>
+                  <a:txBody>
+                    <a:bodyPr/>
+                    <a:lstStyle/>
+                    <a:p>
+                      <a:r>
+                        <a:rPr sz="1350" b="1">
+                          <a:solidFill>
+                            <a:srgbClr val="FFFFFF"/>
+                          </a:solidFill>
+                          <a:latin typeface="Calibri"/>
+                        </a:rPr>
+                        <a:t>What changes</a:t>
+                      </a:r>
+                    </a:p>
+                  </a:txBody>
+                  <a:tcPr>
+                    <a:solidFill>
+                      <a:srgbClr val="4338CA"/>
+                    </a:solidFill>
+                  </a:tcPr>
+                </a:tc>
+              </a:tr>
+              <a:tr h="365760">
+                <a:tc>
+                  <a:txBody>
+                    <a:bodyPr/>
+                    <a:lstStyle/>
+                    <a:p>
+                      <a:r>
+                        <a:rPr sz="1350" b="0">
+                          <a:solidFill>
+                            <a:srgbClr val="161A23"/>
+                          </a:solidFill>
+                          <a:latin typeface="Calibri"/>
+                        </a:rPr>
+                        <a:t>nothing</a:t>
+                      </a:r>
+                    </a:p>
+                  </a:txBody>
+                  <a:tcPr>
+                    <a:solidFill>
+                      <a:srgbClr val="FFFFFF"/>
+                    </a:solidFill>
+                  </a:tcPr>
+                </a:tc>
+                <a:tc>
+                  <a:txBody>
+                    <a:bodyPr/>
+                    <a:lstStyle/>
+                    <a:p>
+                      <a:r>
+                        <a:rPr sz="1350" b="0">
+                          <a:solidFill>
+                            <a:srgbClr val="161A23"/>
+                          </a:solidFill>
+                          <a:latin typeface="Calibri"/>
+                        </a:rPr>
+                        <a:t>Split comes from what this trip's parts actually cost</a:t>
+                      </a:r>
+                    </a:p>
+                  </a:txBody>
+                  <a:tcPr>
+                    <a:solidFill>
+                      <a:srgbClr val="FFFFFF"/>
+                    </a:solidFill>
+                  </a:tcPr>
+                </a:tc>
+              </a:tr>
+              <a:tr h="365760">
+                <a:tc>
+                  <a:txBody>
+                    <a:bodyPr/>
+                    <a:lstStyle/>
+                    <a:p>
+                      <a:r>
+                        <a:rPr sz="1350" b="0">
+                          <a:solidFill>
+                            <a:srgbClr val="161A23"/>
+                          </a:solidFill>
+                          <a:latin typeface="Calibri"/>
+                        </a:rPr>
+                        <a:t>"a luxury stay"</a:t>
+                      </a:r>
+                    </a:p>
+                  </a:txBody>
+                  <a:tcPr>
+                    <a:solidFill>
+                      <a:srgbClr val="F7F8FC"/>
+                    </a:solidFill>
+                  </a:tcPr>
+                </a:tc>
+                <a:tc>
+                  <a:txBody>
+                    <a:bodyPr/>
+                    <a:lstStyle/>
+                    <a:p>
+                      <a:r>
+                        <a:rPr sz="1350" b="0">
+                          <a:solidFill>
+                            <a:srgbClr val="161A23"/>
+                          </a:solidFill>
+                          <a:latin typeface="Calibri"/>
+                        </a:rPr>
+                        <a:t>More to the room. Flights and food stay sensible</a:t>
+                      </a:r>
+                    </a:p>
+                  </a:txBody>
+                  <a:tcPr>
+                    <a:solidFill>
+                      <a:srgbClr val="F7F8FC"/>
+                    </a:solidFill>
+                  </a:tcPr>
+                </a:tc>
+              </a:tr>
+              <a:tr h="365760">
+                <a:tc>
+                  <a:txBody>
+                    <a:bodyPr/>
+                    <a:lstStyle/>
+                    <a:p>
+                      <a:r>
+                        <a:rPr sz="1350" b="0">
+                          <a:solidFill>
+                            <a:srgbClr val="161A23"/>
+                          </a:solidFill>
+                          <a:latin typeface="Calibri"/>
+                        </a:rPr>
+                        <a:t>"luxury trip"</a:t>
+                      </a:r>
+                    </a:p>
+                  </a:txBody>
+                  <a:tcPr>
+                    <a:solidFill>
+                      <a:srgbClr val="FFFFFF"/>
+                    </a:solidFill>
+                  </a:tcPr>
+                </a:tc>
+                <a:tc>
+                  <a:txBody>
+                    <a:bodyPr/>
+                    <a:lstStyle/>
+                    <a:p>
+                      <a:r>
+                        <a:rPr sz="1350" b="0">
+                          <a:solidFill>
+                            <a:srgbClr val="161A23"/>
+                          </a:solidFill>
+                          <a:latin typeface="Calibri"/>
+                        </a:rPr>
+                        <a:t>Spread across the room, the food and the doing</a:t>
+                      </a:r>
+                    </a:p>
+                  </a:txBody>
+                  <a:tcPr>
+                    <a:solidFill>
+                      <a:srgbClr val="FFFFFF"/>
+                    </a:solidFill>
+                  </a:tcPr>
+                </a:tc>
+              </a:tr>
+              <a:tr h="365760">
+                <a:tc>
+                  <a:txBody>
+                    <a:bodyPr/>
+                    <a:lstStyle/>
+                    <a:p>
+                      <a:r>
+                        <a:rPr sz="1350" b="0">
+                          <a:solidFill>
+                            <a:srgbClr val="161A23"/>
+                          </a:solidFill>
+                          <a:latin typeface="Calibri"/>
+                        </a:rPr>
+                        <a:t>"I can compromise"</a:t>
+                      </a:r>
+                    </a:p>
+                  </a:txBody>
+                  <a:tcPr>
+                    <a:solidFill>
+                      <a:srgbClr val="F7F8FC"/>
+                    </a:solidFill>
+                  </a:tcPr>
+                </a:tc>
+                <a:tc>
+                  <a:txBody>
+                    <a:bodyPr/>
+                    <a:lstStyle/>
+                    <a:p>
+                      <a:r>
+                        <a:rPr sz="1350" b="0">
+                          <a:solidFill>
+                            <a:srgbClr val="161A23"/>
+                          </a:solidFill>
+                          <a:latin typeface="Calibri"/>
+                        </a:rPr>
+                        <a:t>Money moves out of the room into experiences</a:t>
+                      </a:r>
+                    </a:p>
+                  </a:txBody>
+                  <a:tcPr>
+                    <a:solidFill>
+                      <a:srgbClr val="F7F8FC"/>
+                    </a:solidFill>
+                  </a:tcPr>
+                </a:tc>
+              </a:tr>
+              <a:tr h="365760">
+                <a:tc>
+                  <a:txBody>
+                    <a:bodyPr/>
+                    <a:lstStyle/>
+                    <a:p>
+                      <a:r>
+                        <a:rPr sz="1350" b="0">
+                          <a:solidFill>
+                            <a:srgbClr val="161A23"/>
+                          </a:solidFill>
+                          <a:latin typeface="Calibri"/>
+                        </a:rPr>
+                        <a:t>their own split</a:t>
+                      </a:r>
+                    </a:p>
+                  </a:txBody>
+                  <a:tcPr>
+                    <a:solidFill>
+                      <a:srgbClr val="FFFFFF"/>
+                    </a:solidFill>
+                  </a:tcPr>
+                </a:tc>
+                <a:tc>
+                  <a:txBody>
+                    <a:bodyPr/>
+                    <a:lstStyle/>
+                    <a:p>
+                      <a:r>
+                        <a:rPr sz="1350" b="0">
+                          <a:solidFill>
+                            <a:srgbClr val="161A23"/>
+                          </a:solidFill>
+                          <a:latin typeface="Calibri"/>
+                        </a:rPr>
+                        <a:t>Used exactly as given. It is their money</a:t>
+                      </a:r>
+                    </a:p>
+                  </a:txBody>
+                  <a:tcPr>
+                    <a:solidFill>
+                      <a:srgbClr val="FFFFFF"/>
+                    </a:solidFill>
+                  </a:tcPr>
+                </a:tc>
+              </a:tr>
+            </a:tbl>
+          </a:graphicData>
+        </a:graphic>
+      </p:graphicFrame>
+      <p:sp>
+        <p:nvSpPr>
+          <p:cNvPr id="6" name="TextBox 5"/>
+          <p:cNvSpPr txBox="1"/>
+          <p:nvPr/>
+        </p:nvSpPr>
         <p:spPr>
           <a:xfrm>
-            <a:off x="2903513" y="1828800"/>
-            <a:ext cx="6384669" cy="4297680"/>
-          </a:xfrm>
-          <a:prstGeom prst="rect">
-            <a:avLst/>
-          </a:prstGeom>
-        </p:spPr>
-      </p:pic>
-    </p:spTree>
-  </p:cSld>
-  <p:clrMapOvr>
-    <a:masterClrMapping/>
-  </p:clrMapOvr>
-</p:sld>
-</file>
-
-<file path=ppt/slides/slide9.xml><?xml version="1.0" encoding="utf-8"?>
-<p:sld xmlns:a="http://schemas.openxmlformats.org/drawingml/2006/main" xmlns:p="http://schemas.openxmlformats.org/presentationml/2006/main" xmlns:r="http://schemas.openxmlformats.org/officeDocument/2006/relationships">
-  <p:cSld>
-    <p:spTree>
-      <p:nvGrpSpPr>
-        <p:cNvPr id="1" name=""/>
-        <p:cNvGrpSpPr/>
-        <p:nvPr/>
-      </p:nvGrpSpPr>
-      <p:grpSpPr/>
-      <p:sp>
-        <p:nvSpPr>
-          <p:cNvPr id="2" name="TextBox 1"/>
-          <p:cNvSpPr txBox="1"/>
-          <p:nvPr/>
-        </p:nvSpPr>
-        <p:spPr>
-          <a:xfrm>
-            <a:off x="822960" y="457200"/>
-            <a:ext cx="10515600" cy="365760"/>
+            <a:off x="822960" y="5120640"/>
+            <a:ext cx="10515600" cy="1005840"/>
           </a:xfrm>
           <a:prstGeom prst="rect">
             <a:avLst/>
@@ -10252,467 +10789,13 @@
               </a:lnSpc>
             </a:pPr>
             <a:r>
-              <a:rPr sz="1200" b="1">
-                <a:solidFill>
-                  <a:srgbClr val="4338CA"/>
-                </a:solidFill>
-                <a:latin typeface="Calibri"/>
-              </a:rPr>
-              <a:t>HOW I MEASURED IT</a:t>
-            </a:r>
-          </a:p>
-        </p:txBody>
-      </p:sp>
-      <p:sp>
-        <p:nvSpPr>
-          <p:cNvPr id="3" name="TextBox 2"/>
-          <p:cNvSpPr txBox="1"/>
-          <p:nvPr/>
-        </p:nvSpPr>
-        <p:spPr>
-          <a:xfrm>
-            <a:off x="822960" y="777240"/>
-            <a:ext cx="10515600" cy="822960"/>
-          </a:xfrm>
-          <a:prstGeom prst="rect">
-            <a:avLst/>
-          </a:prstGeom>
-          <a:noFill/>
-        </p:spPr>
-        <p:txBody>
-          <a:bodyPr wrap="square" anchor="t">
-            <a:spAutoFit/>
-          </a:bodyPr>
-          <a:lstStyle/>
-          <a:p>
-            <a:pPr algn="l">
-              <a:lnSpc>
-                <a:spcPct val="100000"/>
-              </a:lnSpc>
-            </a:pPr>
-            <a:r>
-              <a:rPr sz="3200" b="1">
+              <a:rPr sz="1800" b="1">
                 <a:solidFill>
                   <a:srgbClr val="161A23"/>
                 </a:solidFill>
                 <a:latin typeface="Calibri"/>
               </a:rPr>
-              <a:t>Repeated runs, and no keys needed to check</a:t>
-            </a:r>
-          </a:p>
-        </p:txBody>
-      </p:sp>
-      <p:sp>
-        <p:nvSpPr>
-          <p:cNvPr id="4" name="Rectangle 3"/>
-          <p:cNvSpPr/>
-          <p:nvPr/>
-        </p:nvSpPr>
-        <p:spPr>
-          <a:xfrm>
-            <a:off x="822960" y="1572768"/>
-            <a:ext cx="1005840" cy="34000"/>
-          </a:xfrm>
-          <a:prstGeom prst="rect">
-            <a:avLst/>
-          </a:prstGeom>
-          <a:solidFill>
-            <a:srgbClr val="4338CA"/>
-          </a:solidFill>
-          <a:ln>
-            <a:noFill/>
-          </a:ln>
-          <a:effectLst/>
-        </p:spPr>
-        <p:style>
-          <a:lnRef idx="1">
-            <a:schemeClr val="accent1"/>
-          </a:lnRef>
-          <a:fillRef idx="3">
-            <a:schemeClr val="accent1"/>
-          </a:fillRef>
-          <a:effectRef idx="2">
-            <a:schemeClr val="accent1"/>
-          </a:effectRef>
-          <a:fontRef idx="minor">
-            <a:schemeClr val="lt1"/>
-          </a:fontRef>
-        </p:style>
-        <p:txBody>
-          <a:bodyPr rtlCol="0" anchor="ctr"/>
-          <a:lstStyle/>
-          <a:p>
-            <a:pPr algn="ctr"/>
-          </a:p>
-        </p:txBody>
-      </p:sp>
-      <p:sp>
-        <p:nvSpPr>
-          <p:cNvPr id="5" name="TextBox 4"/>
-          <p:cNvSpPr txBox="1"/>
-          <p:nvPr/>
-        </p:nvSpPr>
-        <p:spPr>
-          <a:xfrm>
-            <a:off x="822960" y="2103120"/>
-            <a:ext cx="2636443" cy="1188720"/>
-          </a:xfrm>
-          <a:prstGeom prst="rect">
-            <a:avLst/>
-          </a:prstGeom>
-          <a:noFill/>
-        </p:spPr>
-        <p:txBody>
-          <a:bodyPr wrap="square" anchor="t">
-            <a:spAutoFit/>
-          </a:bodyPr>
-          <a:lstStyle/>
-          <a:p>
-            <a:pPr algn="ctr">
-              <a:lnSpc>
-                <a:spcPct val="100000"/>
-              </a:lnSpc>
-            </a:pPr>
-            <a:r>
-              <a:rPr sz="6000" b="1">
-                <a:solidFill>
-                  <a:srgbClr val="4338CA"/>
-                </a:solidFill>
-                <a:latin typeface="Calibri"/>
-              </a:rPr>
-              <a:t>5</a:t>
-            </a:r>
-          </a:p>
-        </p:txBody>
-      </p:sp>
-      <p:sp>
-        <p:nvSpPr>
-          <p:cNvPr id="6" name="TextBox 5"/>
-          <p:cNvSpPr txBox="1"/>
-          <p:nvPr/>
-        </p:nvSpPr>
-        <p:spPr>
-          <a:xfrm>
-            <a:off x="822960" y="3246120"/>
-            <a:ext cx="2636443" cy="731520"/>
-          </a:xfrm>
-          <a:prstGeom prst="rect">
-            <a:avLst/>
-          </a:prstGeom>
-          <a:noFill/>
-        </p:spPr>
-        <p:txBody>
-          <a:bodyPr wrap="square" anchor="t">
-            <a:spAutoFit/>
-          </a:bodyPr>
-          <a:lstStyle/>
-          <a:p>
-            <a:pPr algn="ctr">
-              <a:lnSpc>
-                <a:spcPct val="100000"/>
-              </a:lnSpc>
-            </a:pPr>
-            <a:r>
-              <a:rPr sz="1400" b="0">
-                <a:solidFill>
-                  <a:srgbClr val="545C6E"/>
-                </a:solidFill>
-                <a:latin typeface="Calibri"/>
-              </a:rPr>
-              <a:t>runs of each version,
-so every number has a range</a:t>
-            </a:r>
-          </a:p>
-        </p:txBody>
-      </p:sp>
-      <p:sp>
-        <p:nvSpPr>
-          <p:cNvPr id="7" name="TextBox 6"/>
-          <p:cNvSpPr txBox="1"/>
-          <p:nvPr/>
-        </p:nvSpPr>
-        <p:spPr>
-          <a:xfrm>
-            <a:off x="3459403" y="2103120"/>
-            <a:ext cx="2636443" cy="1188720"/>
-          </a:xfrm>
-          <a:prstGeom prst="rect">
-            <a:avLst/>
-          </a:prstGeom>
-          <a:noFill/>
-        </p:spPr>
-        <p:txBody>
-          <a:bodyPr wrap="square" anchor="t">
-            <a:spAutoFit/>
-          </a:bodyPr>
-          <a:lstStyle/>
-          <a:p>
-            <a:pPr algn="ctr">
-              <a:lnSpc>
-                <a:spcPct val="100000"/>
-              </a:lnSpc>
-            </a:pPr>
-            <a:r>
-              <a:rPr sz="6000" b="1">
-                <a:solidFill>
-                  <a:srgbClr val="4338CA"/>
-                </a:solidFill>
-                <a:latin typeface="Calibri"/>
-              </a:rPr>
-              <a:t>1/20</a:t>
-            </a:r>
-          </a:p>
-        </p:txBody>
-      </p:sp>
-      <p:sp>
-        <p:nvSpPr>
-          <p:cNvPr id="8" name="TextBox 7"/>
-          <p:cNvSpPr txBox="1"/>
-          <p:nvPr/>
-        </p:nvSpPr>
-        <p:spPr>
-          <a:xfrm>
-            <a:off x="3459403" y="3246120"/>
-            <a:ext cx="2636443" cy="731520"/>
-          </a:xfrm>
-          <a:prstGeom prst="rect">
-            <a:avLst/>
-          </a:prstGeom>
-          <a:noFill/>
-        </p:spPr>
-        <p:txBody>
-          <a:bodyPr wrap="square" anchor="t">
-            <a:spAutoFit/>
-          </a:bodyPr>
-          <a:lstStyle/>
-          <a:p>
-            <a:pPr algn="ctr">
-              <a:lnSpc>
-                <a:spcPct val="100000"/>
-              </a:lnSpc>
-            </a:pPr>
-            <a:r>
-              <a:rPr sz="1400" b="0">
-                <a:solidFill>
-                  <a:srgbClr val="545C6E"/>
-                </a:solidFill>
-                <a:latin typeface="Calibri"/>
-              </a:rPr>
-              <a:t>trips measured for cost.
-The API limits stopped me</a:t>
-            </a:r>
-          </a:p>
-        </p:txBody>
-      </p:sp>
-      <p:sp>
-        <p:nvSpPr>
-          <p:cNvPr id="9" name="TextBox 8"/>
-          <p:cNvSpPr txBox="1"/>
-          <p:nvPr/>
-        </p:nvSpPr>
-        <p:spPr>
-          <a:xfrm>
-            <a:off x="6095847" y="2103120"/>
-            <a:ext cx="2636443" cy="1188720"/>
-          </a:xfrm>
-          <a:prstGeom prst="rect">
-            <a:avLst/>
-          </a:prstGeom>
-          <a:noFill/>
-        </p:spPr>
-        <p:txBody>
-          <a:bodyPr wrap="square" anchor="t">
-            <a:spAutoFit/>
-          </a:bodyPr>
-          <a:lstStyle/>
-          <a:p>
-            <a:pPr algn="ctr">
-              <a:lnSpc>
-                <a:spcPct val="100000"/>
-              </a:lnSpc>
-            </a:pPr>
-            <a:r>
-              <a:rPr sz="6000" b="1">
-                <a:solidFill>
-                  <a:srgbClr val="4338CA"/>
-                </a:solidFill>
-                <a:latin typeface="Calibri"/>
-              </a:rPr>
-              <a:t>30</a:t>
-            </a:r>
-          </a:p>
-        </p:txBody>
-      </p:sp>
-      <p:sp>
-        <p:nvSpPr>
-          <p:cNvPr id="10" name="TextBox 9"/>
-          <p:cNvSpPr txBox="1"/>
-          <p:nvPr/>
-        </p:nvSpPr>
-        <p:spPr>
-          <a:xfrm>
-            <a:off x="6095847" y="3246120"/>
-            <a:ext cx="2636443" cy="731520"/>
-          </a:xfrm>
-          <a:prstGeom prst="rect">
-            <a:avLst/>
-          </a:prstGeom>
-          <a:noFill/>
-        </p:spPr>
-        <p:txBody>
-          <a:bodyPr wrap="square" anchor="t">
-            <a:spAutoFit/>
-          </a:bodyPr>
-          <a:lstStyle/>
-          <a:p>
-            <a:pPr algn="ctr">
-              <a:lnSpc>
-                <a:spcPct val="100000"/>
-              </a:lnSpc>
-            </a:pPr>
-            <a:r>
-              <a:rPr sz="1400" b="0">
-                <a:solidFill>
-                  <a:srgbClr val="545C6E"/>
-                </a:solidFill>
-                <a:latin typeface="Calibri"/>
-              </a:rPr>
-              <a:t>saved API replies, so anyone
-can repeat this for free</a:t>
-            </a:r>
-          </a:p>
-        </p:txBody>
-      </p:sp>
-      <p:sp>
-        <p:nvSpPr>
-          <p:cNvPr id="11" name="TextBox 10"/>
-          <p:cNvSpPr txBox="1"/>
-          <p:nvPr/>
-        </p:nvSpPr>
-        <p:spPr>
-          <a:xfrm>
-            <a:off x="8732291" y="2103120"/>
-            <a:ext cx="2636443" cy="1188720"/>
-          </a:xfrm>
-          <a:prstGeom prst="rect">
-            <a:avLst/>
-          </a:prstGeom>
-          <a:noFill/>
-        </p:spPr>
-        <p:txBody>
-          <a:bodyPr wrap="square" anchor="t">
-            <a:spAutoFit/>
-          </a:bodyPr>
-          <a:lstStyle/>
-          <a:p>
-            <a:pPr algn="ctr">
-              <a:lnSpc>
-                <a:spcPct val="100000"/>
-              </a:lnSpc>
-            </a:pPr>
-            <a:r>
-              <a:rPr sz="6000" b="1">
-                <a:solidFill>
-                  <a:srgbClr val="4338CA"/>
-                </a:solidFill>
-                <a:latin typeface="Calibri"/>
-              </a:rPr>
-              <a:t>403</a:t>
-            </a:r>
-          </a:p>
-        </p:txBody>
-      </p:sp>
-      <p:sp>
-        <p:nvSpPr>
-          <p:cNvPr id="12" name="TextBox 11"/>
-          <p:cNvSpPr txBox="1"/>
-          <p:nvPr/>
-        </p:nvSpPr>
-        <p:spPr>
-          <a:xfrm>
-            <a:off x="8732291" y="3246120"/>
-            <a:ext cx="2636443" cy="731520"/>
-          </a:xfrm>
-          <a:prstGeom prst="rect">
-            <a:avLst/>
-          </a:prstGeom>
-          <a:noFill/>
-        </p:spPr>
-        <p:txBody>
-          <a:bodyPr wrap="square" anchor="t">
-            <a:spAutoFit/>
-          </a:bodyPr>
-          <a:lstStyle/>
-          <a:p>
-            <a:pPr algn="ctr">
-              <a:lnSpc>
-                <a:spcPct val="100000"/>
-              </a:lnSpc>
-            </a:pPr>
-            <a:r>
-              <a:rPr sz="1400" b="0">
-                <a:solidFill>
-                  <a:srgbClr val="545C6E"/>
-                </a:solidFill>
-                <a:latin typeface="Calibri"/>
-              </a:rPr>
-              <a:t>automated tests,
-no keys, no internet</a:t>
-            </a:r>
-          </a:p>
-        </p:txBody>
-      </p:sp>
-      <p:sp>
-        <p:nvSpPr>
-          <p:cNvPr id="13" name="TextBox 12"/>
-          <p:cNvSpPr txBox="1"/>
-          <p:nvPr/>
-        </p:nvSpPr>
-        <p:spPr>
-          <a:xfrm>
-            <a:off x="822960" y="4937760"/>
-            <a:ext cx="10515600" cy="1097280"/>
-          </a:xfrm>
-          <a:prstGeom prst="rect">
-            <a:avLst/>
-          </a:prstGeom>
-          <a:noFill/>
-        </p:spPr>
-        <p:txBody>
-          <a:bodyPr wrap="square" anchor="t">
-            <a:spAutoFit/>
-          </a:bodyPr>
-          <a:lstStyle/>
-          <a:p>
-            <a:pPr algn="l">
-              <a:lnSpc>
-                <a:spcPct val="130000"/>
-              </a:lnSpc>
-            </a:pPr>
-            <a:r>
-              <a:rPr sz="1700" b="0">
-                <a:solidFill>
-                  <a:srgbClr val="545C6E"/>
-                </a:solidFill>
-                <a:latin typeface="Calibri"/>
-              </a:rPr>
-              <a:t>AI calls are counted by the system itself, never by hand.</a:t>
-            </a:r>
-          </a:p>
-          <a:p>
-            <a:pPr algn="l">
-              <a:lnSpc>
-                <a:spcPct val="130000"/>
-              </a:lnSpc>
-            </a:pPr>
-            <a:r>
-              <a:rPr sz="1700" b="0">
-                <a:solidFill>
-                  <a:srgbClr val="545C6E"/>
-                </a:solidFill>
-                <a:latin typeface="Calibri"/>
-              </a:rPr>
-              <a:t>The limited coverage is printed on every chart, not hidden.</a:t>
+              <a:t>A fixed percentage cannot know that a long-haul flight eats the budget and a short one does not.</a:t>
             </a:r>
           </a:p>
         </p:txBody>

--- a/submission/CMP7200_Viva_Presentation.pptx
+++ b/submission/CMP7200_Viva_Presentation.pptx
@@ -15,11 +15,6 @@
     <p:sldId id="263" r:id="rId15"/>
     <p:sldId id="264" r:id="rId16"/>
     <p:sldId id="265" r:id="rId17"/>
-    <p:sldId id="266" r:id="rId18"/>
-    <p:sldId id="267" r:id="rId19"/>
-    <p:sldId id="268" r:id="rId20"/>
-    <p:sldId id="269" r:id="rId21"/>
-    <p:sldId id="270" r:id="rId22"/>
   </p:sldIdLst>
   <p:sldSz cx="12191695" cy="6858000" type="screen4x3"/>
   <p:notesSz cx="6858000" cy="9144000"/>
@@ -516,7 +511,7 @@
           <a:lstStyle/>
           <a:p>
             <a:r>
-              <a:t>Fifteen minutes, fourteen slides. One idea: AI is worth paying for when a step needs thinking, and is wasted money when it does not. I built the same travel planner four ways and measured all four.</a:t>
+              <a:t>Ten slides, fifteen minutes. The project is a working travel planner. The research question is which steps inside it actually need AI. I built it four ways and measured all four: the agent version needed 20.6 AI calls per trip and mine needs 2.0.</a:t>
             </a:r>
           </a:p>
         </p:txBody>
@@ -586,357 +581,7 @@
           <a:lstStyle/>
           <a:p>
             <a:r>
-              <a:t>Two parts. It estimates what the trip costs at minimum, comfortable and luxury standards, and refuses anything below the floor - then offers to shorten the trip, raise the budget, or pick a nearer city. And where a real fare has been recorded for that route it uses that instead of the table, and marks the line as measured rather than estimated. Tested on all 20 trips: it never wrongly refuses a workable one, and it misses 1 impossible one. Agreement score 0.643.</a:t>
-            </a:r>
-          </a:p>
-        </p:txBody>
-      </p:sp>
-      <p:sp>
-        <p:nvSpPr>
-          <p:cNvPr id="4" name="Slide Number Placeholder 3"/>
-          <p:cNvSpPr>
-            <a:spLocks noGrp="1"/>
-          </p:cNvSpPr>
-          <p:nvPr>
-            <p:ph type="sldNum" idx="5" sz="quarter"/>
-          </p:nvPr>
-        </p:nvSpPr>
-        <p:spPr/>
-      </p:sp>
-    </p:spTree>
-  </p:cSld>
-  <p:clrMapOvr>
-    <a:masterClrMapping/>
-  </p:clrMapOvr>
-</p:notes>
-</file>
-
-<file path=ppt/notesSlides/notesSlide11.xml><?xml version="1.0" encoding="utf-8"?>
-<p:notes xmlns:a="http://schemas.openxmlformats.org/drawingml/2006/main" xmlns:p="http://schemas.openxmlformats.org/presentationml/2006/main" xmlns:r="http://schemas.openxmlformats.org/officeDocument/2006/relationships">
-  <p:cSld>
-    <p:spTree>
-      <p:nvGrpSpPr>
-        <p:cNvPr id="1" name=""/>
-        <p:cNvGrpSpPr/>
-        <p:nvPr/>
-      </p:nvGrpSpPr>
-      <p:grpSpPr>
-        <a:xfrm>
-          <a:off x="0" y="0"/>
-          <a:ext cx="0" cy="0"/>
-          <a:chOff x="0" y="0"/>
-          <a:chExt cx="0" cy="0"/>
-        </a:xfrm>
-      </p:grpSpPr>
-      <p:sp>
-        <p:nvSpPr>
-          <p:cNvPr id="2" name="Slide Image Placeholder 1"/>
-          <p:cNvSpPr>
-            <a:spLocks noGrp="1"/>
-          </p:cNvSpPr>
-          <p:nvPr>
-            <p:ph type="sldImg" idx="2"/>
-          </p:nvPr>
-        </p:nvSpPr>
-        <p:spPr/>
-      </p:sp>
-      <p:sp>
-        <p:nvSpPr>
-          <p:cNvPr id="3" name="Notes Placeholder 2"/>
-          <p:cNvSpPr>
-            <a:spLocks noGrp="1"/>
-          </p:cNvSpPr>
-          <p:nvPr>
-            <p:ph type="body" idx="3" sz="quarter"/>
-          </p:nvPr>
-        </p:nvSpPr>
-        <p:spPr/>
-        <p:txBody>
-          <a:bodyPr/>
-          <a:lstStyle/>
-          <a:p>
-            <a:r>
-              <a:t>5 runs of each version, so every bar has a range. The ranges for B and D do not overlap, which is why this is reported as a real difference rather than noise. Tuning alone accounted for 89% and the design change reached 94% - the gap between those two is what I claim.</a:t>
-            </a:r>
-          </a:p>
-        </p:txBody>
-      </p:sp>
-      <p:sp>
-        <p:nvSpPr>
-          <p:cNvPr id="4" name="Slide Number Placeholder 3"/>
-          <p:cNvSpPr>
-            <a:spLocks noGrp="1"/>
-          </p:cNvSpPr>
-          <p:nvPr>
-            <p:ph type="sldNum" idx="5" sz="quarter"/>
-          </p:nvPr>
-        </p:nvSpPr>
-        <p:spPr/>
-      </p:sp>
-    </p:spTree>
-  </p:cSld>
-  <p:clrMapOvr>
-    <a:masterClrMapping/>
-  </p:clrMapOvr>
-</p:notes>
-</file>
-
-<file path=ppt/notesSlides/notesSlide12.xml><?xml version="1.0" encoding="utf-8"?>
-<p:notes xmlns:a="http://schemas.openxmlformats.org/drawingml/2006/main" xmlns:p="http://schemas.openxmlformats.org/presentationml/2006/main" xmlns:r="http://schemas.openxmlformats.org/officeDocument/2006/relationships">
-  <p:cSld>
-    <p:spTree>
-      <p:nvGrpSpPr>
-        <p:cNvPr id="1" name=""/>
-        <p:cNvGrpSpPr/>
-        <p:nvPr/>
-      </p:nvGrpSpPr>
-      <p:grpSpPr>
-        <a:xfrm>
-          <a:off x="0" y="0"/>
-          <a:ext cx="0" cy="0"/>
-          <a:chOff x="0" y="0"/>
-          <a:chExt cx="0" cy="0"/>
-        </a:xfrm>
-      </p:grpSpPr>
-      <p:sp>
-        <p:nvSpPr>
-          <p:cNvPr id="2" name="Slide Image Placeholder 1"/>
-          <p:cNvSpPr>
-            <a:spLocks noGrp="1"/>
-          </p:cNvSpPr>
-          <p:nvPr>
-            <p:ph type="sldImg" idx="2"/>
-          </p:nvPr>
-        </p:nvSpPr>
-        <p:spPr/>
-      </p:sp>
-      <p:sp>
-        <p:nvSpPr>
-          <p:cNvPr id="3" name="Notes Placeholder 2"/>
-          <p:cNvSpPr>
-            <a:spLocks noGrp="1"/>
-          </p:cNvSpPr>
-          <p:nvPr>
-            <p:ph type="body" idx="3" sz="quarter"/>
-          </p:nvPr>
-        </p:nvSpPr>
-        <p:spPr/>
-        <p:txBody>
-          <a:bodyPr/>
-          <a:lstStyle/>
-          <a:p>
-            <a:r>
-              <a:t>Saving money would be pointless if the plan got vaguer. A is the control and scores 1.7% - a confident itinerary invented from nothing, which is what this measure exists to catch. It caught a real one: my first working run produced a complete plan while every tool call was silently failing.</a:t>
-            </a:r>
-          </a:p>
-        </p:txBody>
-      </p:sp>
-      <p:sp>
-        <p:nvSpPr>
-          <p:cNvPr id="4" name="Slide Number Placeholder 3"/>
-          <p:cNvSpPr>
-            <a:spLocks noGrp="1"/>
-          </p:cNvSpPr>
-          <p:nvPr>
-            <p:ph type="sldNum" idx="5" sz="quarter"/>
-          </p:nvPr>
-        </p:nvSpPr>
-        <p:spPr/>
-      </p:sp>
-    </p:spTree>
-  </p:cSld>
-  <p:clrMapOvr>
-    <a:masterClrMapping/>
-  </p:clrMapOvr>
-</p:notes>
-</file>
-
-<file path=ppt/notesSlides/notesSlide13.xml><?xml version="1.0" encoding="utf-8"?>
-<p:notes xmlns:a="http://schemas.openxmlformats.org/drawingml/2006/main" xmlns:p="http://schemas.openxmlformats.org/presentationml/2006/main" xmlns:r="http://schemas.openxmlformats.org/officeDocument/2006/relationships">
-  <p:cSld>
-    <p:spTree>
-      <p:nvGrpSpPr>
-        <p:cNvPr id="1" name=""/>
-        <p:cNvGrpSpPr/>
-        <p:nvPr/>
-      </p:nvGrpSpPr>
-      <p:grpSpPr>
-        <a:xfrm>
-          <a:off x="0" y="0"/>
-          <a:ext cx="0" cy="0"/>
-          <a:chOff x="0" y="0"/>
-          <a:chExt cx="0" cy="0"/>
-        </a:xfrm>
-      </p:grpSpPr>
-      <p:sp>
-        <p:nvSpPr>
-          <p:cNvPr id="2" name="Slide Image Placeholder 1"/>
-          <p:cNvSpPr>
-            <a:spLocks noGrp="1"/>
-          </p:cNvSpPr>
-          <p:nvPr>
-            <p:ph type="sldImg" idx="2"/>
-          </p:nvPr>
-        </p:nvSpPr>
-        <p:spPr/>
-      </p:sp>
-      <p:sp>
-        <p:nvSpPr>
-          <p:cNvPr id="3" name="Notes Placeholder 2"/>
-          <p:cNvSpPr>
-            <a:spLocks noGrp="1"/>
-          </p:cNvSpPr>
-          <p:nvPr>
-            <p:ph type="body" idx="3" sz="quarter"/>
-          </p:nvPr>
-        </p:nvSpPr>
-        <p:spPr/>
-        <p:txBody>
-          <a:bodyPr/>
-          <a:lstStyle/>
-          <a:p>
-            <a:r>
-              <a:t>6 of 9 checks fail: message priority is declared and never used, permissions are declared and never enforced. The budget check never wrongly refuses a workable trip but misses half the impossible ones. And cost coverage is one trip because the free plans allow thirty flight searches a month. All three are stated in the abstract, not buried.</a:t>
-            </a:r>
-          </a:p>
-        </p:txBody>
-      </p:sp>
-      <p:sp>
-        <p:nvSpPr>
-          <p:cNvPr id="4" name="Slide Number Placeholder 3"/>
-          <p:cNvSpPr>
-            <a:spLocks noGrp="1"/>
-          </p:cNvSpPr>
-          <p:nvPr>
-            <p:ph type="sldNum" idx="5" sz="quarter"/>
-          </p:nvPr>
-        </p:nvSpPr>
-        <p:spPr/>
-      </p:sp>
-    </p:spTree>
-  </p:cSld>
-  <p:clrMapOvr>
-    <a:masterClrMapping/>
-  </p:clrMapOvr>
-</p:notes>
-</file>
-
-<file path=ppt/notesSlides/notesSlide14.xml><?xml version="1.0" encoding="utf-8"?>
-<p:notes xmlns:a="http://schemas.openxmlformats.org/drawingml/2006/main" xmlns:p="http://schemas.openxmlformats.org/presentationml/2006/main" xmlns:r="http://schemas.openxmlformats.org/officeDocument/2006/relationships">
-  <p:cSld>
-    <p:spTree>
-      <p:nvGrpSpPr>
-        <p:cNvPr id="1" name=""/>
-        <p:cNvGrpSpPr/>
-        <p:nvPr/>
-      </p:nvGrpSpPr>
-      <p:grpSpPr>
-        <a:xfrm>
-          <a:off x="0" y="0"/>
-          <a:ext cx="0" cy="0"/>
-          <a:chOff x="0" y="0"/>
-          <a:chExt cx="0" cy="0"/>
-        </a:xfrm>
-      </p:grpSpPr>
-      <p:sp>
-        <p:nvSpPr>
-          <p:cNvPr id="2" name="Slide Image Placeholder 1"/>
-          <p:cNvSpPr>
-            <a:spLocks noGrp="1"/>
-          </p:cNvSpPr>
-          <p:nvPr>
-            <p:ph type="sldImg" idx="2"/>
-          </p:nvPr>
-        </p:nvSpPr>
-        <p:spPr/>
-      </p:sp>
-      <p:sp>
-        <p:nvSpPr>
-          <p:cNvPr id="3" name="Notes Placeholder 2"/>
-          <p:cNvSpPr>
-            <a:spLocks noGrp="1"/>
-          </p:cNvSpPr>
-          <p:nvPr>
-            <p:ph type="body" idx="3" sz="quarter"/>
-          </p:nvPr>
-        </p:nvSpPr>
-        <p:spPr/>
-        <p:txBody>
-          <a:bodyPr/>
-          <a:lstStyle/>
-          <a:p>
-            <a:r>
-              <a:t>The "so what?" answer. The system is 16,169 lines with 403 tests, and the whole evaluation replays from disk with no API keys, so the method is reusable by anyone asking the same question about their own agents.</a:t>
-            </a:r>
-          </a:p>
-        </p:txBody>
-      </p:sp>
-      <p:sp>
-        <p:nvSpPr>
-          <p:cNvPr id="4" name="Slide Number Placeholder 3"/>
-          <p:cNvSpPr>
-            <a:spLocks noGrp="1"/>
-          </p:cNvSpPr>
-          <p:nvPr>
-            <p:ph type="sldNum" idx="5" sz="quarter"/>
-          </p:nvPr>
-        </p:nvSpPr>
-        <p:spPr/>
-      </p:sp>
-    </p:spTree>
-  </p:cSld>
-  <p:clrMapOvr>
-    <a:masterClrMapping/>
-  </p:clrMapOvr>
-</p:notes>
-</file>
-
-<file path=ppt/notesSlides/notesSlide15.xml><?xml version="1.0" encoding="utf-8"?>
-<p:notes xmlns:a="http://schemas.openxmlformats.org/drawingml/2006/main" xmlns:p="http://schemas.openxmlformats.org/presentationml/2006/main" xmlns:r="http://schemas.openxmlformats.org/officeDocument/2006/relationships">
-  <p:cSld>
-    <p:spTree>
-      <p:nvGrpSpPr>
-        <p:cNvPr id="1" name=""/>
-        <p:cNvGrpSpPr/>
-        <p:nvPr/>
-      </p:nvGrpSpPr>
-      <p:grpSpPr>
-        <a:xfrm>
-          <a:off x="0" y="0"/>
-          <a:ext cx="0" cy="0"/>
-          <a:chOff x="0" y="0"/>
-          <a:chExt cx="0" cy="0"/>
-        </a:xfrm>
-      </p:grpSpPr>
-      <p:sp>
-        <p:nvSpPr>
-          <p:cNvPr id="2" name="Slide Image Placeholder 1"/>
-          <p:cNvSpPr>
-            <a:spLocks noGrp="1"/>
-          </p:cNvSpPr>
-          <p:nvPr>
-            <p:ph type="sldImg" idx="2"/>
-          </p:nvPr>
-        </p:nvSpPr>
-        <p:spPr/>
-      </p:sp>
-      <p:sp>
-        <p:nvSpPr>
-          <p:cNvPr id="3" name="Notes Placeholder 2"/>
-          <p:cNvSpPr>
-            <a:spLocks noGrp="1"/>
-          </p:cNvSpPr>
-          <p:nvPr>
-            <p:ph type="body" idx="3" sz="quarter"/>
-          </p:nvPr>
-        </p:nvSpPr>
-        <p:spPr/>
-        <p:txBody>
-          <a:bodyPr/>
-          <a:lstStyle/>
-          <a:p>
-            <a:r>
-              <a:t>Land the claim and its limit in the same breath. The effect is large and the sample is narrow, and both are in the abstract. The saved replies, the harness and the twenty trips are all committed, so the next person - or me next month when the limits reset - can widen it without rebuilding.</a:t>
+              <a:t>Land the claim and its limit in the same breath. The effect is large and the sample is narrow, and both are in the abstract. The saved replies, the harness and the twenty trips are committed, so the next person - or me next month when the limits reset - can widen it without rebuilding.</a:t>
             </a:r>
           </a:p>
         </p:txBody>
@@ -1006,7 +651,7 @@
           <a:lstStyle/>
           <a:p>
             <a:r>
-              <a:t>Everyone gives agents tools. Nobody asks which jobs need one. The agent version used 20.6 AI calls per trip; mine uses 2.0. Every loop step re-sends the whole conversation and every tool description, which is why the text differs by 15 times.</a:t>
+              <a:t>Six agents became three. The three that stayed each fail the test "could I write this as ordinary code?" - you cannot write a rule that understands any phrasing a person might use, and you cannot write a rule that makes a day pleasant. The three that went were only ever making API calls, and an IF statement does that perfectly well.</a:t>
             </a:r>
           </a:p>
         </p:txBody>
@@ -1076,7 +721,7 @@
           <a:lstStyle/>
           <a:p>
             <a:r>
-              <a:t>This is the whole contribution in one slide. You cannot write a rule that understands any phrasing a person might use, and you cannot write a rule that makes a day pleasant. You absolutely can write a rule that calls a flight API with a date. It started as six agents and became three because measuring showed where the calls were going.</a:t>
+              <a:t>Tuning the six agents without changing the design cut the text sent by 89%. Comparing B against D alone would have mixed two effects together and claimed credit for both.</a:t>
             </a:r>
           </a:p>
         </p:txBody>
@@ -1146,7 +791,7 @@
           <a:lstStyle/>
           <a:p>
             <a:r>
-              <a:t>Worth demonstrating live. Ask for six nights in London on three thousand dollars and it refuses, gives the shortfall, and offers a shorter trip or a nearer city. The seven step rows tick over as each finishes, so the page never looks frozen. The plan arrives in six tabs with one block per day.</a:t>
+              <a:t>The single most useful table in the deck. The hotel agent held 8 tools and was allowed 10 loops. Every loop is a full AI call that re-sends the conversation and all 8 tool descriptions. Twenty tool slots in B, four in C, four in D - and in D they belong to the coordinator, which does not loop looking for data because the data is already there.</a:t>
             </a:r>
           </a:p>
         </p:txBody>
@@ -1216,7 +861,7 @@
           <a:lstStyle/>
           <a:p>
             <a:r>
-              <a:t>C makes the result defensible. Tuning the six agents without changing the design at all cut the text sent by 89%. Comparing B against D alone would have mixed two effects and claimed credit for both.</a:t>
+              <a:t>Worth demonstrating live. The seven rows tick over as each step finishes, so the page never looks frozen, and the same steps are narrated in the terminal at the same time. Ask for six nights in London on three thousand dollars and it refuses, names the shortfall, and offers a shorter trip or a nearer city.</a:t>
             </a:r>
           </a:p>
         </p:txBody>
@@ -1286,7 +931,7 @@
           <a:lstStyle/>
           <a:p>
             <a:r>
-              <a:t>"Steps" is the loop limit: how many times the agent may think, call a tool, and think again. Each step is a full AI call that re-sends the conversation and every tool description it holds. Eight tools times ten steps is where B's cost came from. C cut the same agents to one or two tools and three steps. D removes the fetching agents entirely, so the four tools that remain belong to the coordinator and nothing loops.</a:t>
+              <a:t>The heart of the argument. An agent that skips a tool still writes a confident, well-formatted itinerary, so you cannot tell by reading it. B never fetched attractions or restaurants at all and still produced a full plan. That is why groundedness is measured rather than judged by eye.</a:t>
             </a:r>
           </a:p>
         </p:txBody>
@@ -1356,7 +1001,7 @@
           <a:lstStyle/>
           <a:p>
             <a:r>
-              <a:t>The tool server runs as its own program and answers over JSON-RPC. Twelve tools, each declaring what input it accepts, so a malformed request is refused rather than sent. Every reply passes through a record-and-replay layer: 30 responses are saved, which is why anyone can reproduce my results with no API keys. Honest caveat: the shipped version calls these functions directly rather than over the protocol - the protocol is exercised by the six-agent versions, and the report says so.</a:t>
+              <a:t>Two features people ask about. Dividing: it used to be one fixed percentage for every trip, and now it reads the wording - on a two thousand dollar Istanbul trip the room budget moves from $327 to $664 depending on what the traveller says matters. Checking: tested on all 20 trips, it never wrongly refuses a workable one and misses 1 impossible one. Agreement score 0.643.</a:t>
             </a:r>
           </a:p>
         </p:txBody>
@@ -1426,7 +1071,7 @@
           <a:lstStyle/>
           <a:p>
             <a:r>
-              <a:t>The heart of the argument. An agent that skips a tool still writes a confident, well-formatted itinerary, so you cannot tell by reading it. B never once fetched attractions or restaurants and still produced a full plan. That is why groundedness is measured rather than judged by eye.</a:t>
+              <a:t>5 runs of each version, so every bar has a range, and the ranges for B and D do not overlap. On accuracy: A is the control and scores 1.7% - a confident itinerary invented from nothing, which is what that measure exists to catch. It caught a real one: my first working run produced a complete plan while every tool call was silently failing.</a:t>
             </a:r>
           </a:p>
         </p:txBody>
@@ -1496,7 +1141,7 @@
           <a:lstStyle/>
           <a:p>
             <a:r>
-              <a:t>It used to be one fixed percentage split for every trip. It now reads the wording, and no category is ever given more than it could possibly spend. On a two thousand dollar Istanbul trip the room budget moves from $327 if the traveller can compromise, to $443 at moderate, to $664 for a luxury stay. Same total, different trip.</a:t>
+              <a:t>6 of 9 checks fail: message priority is declared and never used, permissions declared and never enforced. Cost coverage is one trip because the free plans allow thirty flight searches a month, and 30 saved responses mean anyone can still reproduce every number with no API keys. All three are stated in the abstract, not buried.</a:t>
             </a:r>
           </a:p>
         </p:txBody>
@@ -4518,7 +4163,439 @@
         </p:nvSpPr>
         <p:spPr>
           <a:xfrm>
-            <a:off x="1005840" y="1828800"/>
+            <a:off x="822960" y="502920"/>
+            <a:ext cx="10515600" cy="365760"/>
+          </a:xfrm>
+          <a:prstGeom prst="rect">
+            <a:avLst/>
+          </a:prstGeom>
+          <a:noFill/>
+        </p:spPr>
+        <p:txBody>
+          <a:bodyPr wrap="square" anchor="t">
+            <a:spAutoFit/>
+          </a:bodyPr>
+          <a:lstStyle/>
+          <a:p>
+            <a:pPr algn="l">
+              <a:lnSpc>
+                <a:spcPct val="100000"/>
+              </a:lnSpc>
+            </a:pPr>
+            <a:r>
+              <a:rPr sz="1200" b="1">
+                <a:solidFill>
+                  <a:srgbClr val="9CA3F5"/>
+                </a:solidFill>
+                <a:latin typeface="Calibri"/>
+              </a:rPr>
+              <a:t>MSc DISSERTATION  ·  VIVA VOCE  ·  CMP7200 — Individual Master's Project</a:t>
+            </a:r>
+          </a:p>
+        </p:txBody>
+      </p:sp>
+      <p:sp>
+        <p:nvSpPr>
+          <p:cNvPr id="3" name="TextBox 2"/>
+          <p:cNvSpPr txBox="1"/>
+          <p:nvPr/>
+        </p:nvSpPr>
+        <p:spPr>
+          <a:xfrm>
+            <a:off x="822960" y="914400"/>
+            <a:ext cx="10515600" cy="1097280"/>
+          </a:xfrm>
+          <a:prstGeom prst="rect">
+            <a:avLst/>
+          </a:prstGeom>
+          <a:noFill/>
+        </p:spPr>
+        <p:txBody>
+          <a:bodyPr wrap="square" anchor="t">
+            <a:spAutoFit/>
+          </a:bodyPr>
+          <a:lstStyle/>
+          <a:p>
+            <a:pPr algn="l">
+              <a:lnSpc>
+                <a:spcPct val="100000"/>
+              </a:lnSpc>
+            </a:pPr>
+            <a:r>
+              <a:rPr sz="4600" b="1">
+                <a:solidFill>
+                  <a:srgbClr val="FFFFFF"/>
+                </a:solidFill>
+                <a:latin typeface="Calibri"/>
+              </a:rPr>
+              <a:t>AI Trip Planner</a:t>
+            </a:r>
+          </a:p>
+        </p:txBody>
+      </p:sp>
+      <p:sp>
+        <p:nvSpPr>
+          <p:cNvPr id="4" name="TextBox 3"/>
+          <p:cNvSpPr txBox="1"/>
+          <p:nvPr/>
+        </p:nvSpPr>
+        <p:spPr>
+          <a:xfrm>
+            <a:off x="822960" y="1965960"/>
+            <a:ext cx="10515600" cy="640080"/>
+          </a:xfrm>
+          <a:prstGeom prst="rect">
+            <a:avLst/>
+          </a:prstGeom>
+          <a:noFill/>
+        </p:spPr>
+        <p:txBody>
+          <a:bodyPr wrap="square" anchor="t">
+            <a:spAutoFit/>
+          </a:bodyPr>
+          <a:lstStyle/>
+          <a:p>
+            <a:pPr algn="l">
+              <a:lnSpc>
+                <a:spcPct val="100000"/>
+              </a:lnSpc>
+            </a:pPr>
+            <a:r>
+              <a:rPr sz="1700" b="0">
+                <a:solidFill>
+                  <a:srgbClr val="C7D2FE"/>
+                </a:solidFill>
+                <a:latin typeface="Calibri"/>
+              </a:rPr>
+              <a:t>Type where you want to go. Get a day-by-day plan built from real flight and hotel prices.</a:t>
+            </a:r>
+          </a:p>
+        </p:txBody>
+      </p:sp>
+      <p:sp>
+        <p:nvSpPr>
+          <p:cNvPr id="5" name="Rectangle 4"/>
+          <p:cNvSpPr/>
+          <p:nvPr/>
+        </p:nvSpPr>
+        <p:spPr>
+          <a:xfrm>
+            <a:off x="822960" y="2697480"/>
+            <a:ext cx="1280160" cy="34000"/>
+          </a:xfrm>
+          <a:prstGeom prst="rect">
+            <a:avLst/>
+          </a:prstGeom>
+          <a:solidFill>
+            <a:srgbClr val="0EA5A4"/>
+          </a:solidFill>
+          <a:ln>
+            <a:noFill/>
+          </a:ln>
+          <a:effectLst/>
+        </p:spPr>
+        <p:style>
+          <a:lnRef idx="1">
+            <a:schemeClr val="accent1"/>
+          </a:lnRef>
+          <a:fillRef idx="3">
+            <a:schemeClr val="accent1"/>
+          </a:fillRef>
+          <a:effectRef idx="2">
+            <a:schemeClr val="accent1"/>
+          </a:effectRef>
+          <a:fontRef idx="minor">
+            <a:schemeClr val="lt1"/>
+          </a:fontRef>
+        </p:style>
+        <p:txBody>
+          <a:bodyPr rtlCol="0" anchor="ctr"/>
+          <a:lstStyle/>
+          <a:p>
+            <a:pPr algn="ctr"/>
+          </a:p>
+        </p:txBody>
+      </p:sp>
+      <p:sp>
+        <p:nvSpPr>
+          <p:cNvPr id="6" name="TextBox 5"/>
+          <p:cNvSpPr txBox="1"/>
+          <p:nvPr/>
+        </p:nvSpPr>
+        <p:spPr>
+          <a:xfrm>
+            <a:off x="822960" y="3063240"/>
+            <a:ext cx="4937760" cy="2377440"/>
+          </a:xfrm>
+          <a:prstGeom prst="rect">
+            <a:avLst/>
+          </a:prstGeom>
+          <a:noFill/>
+        </p:spPr>
+        <p:txBody>
+          <a:bodyPr wrap="square" anchor="t">
+            <a:spAutoFit/>
+          </a:bodyPr>
+          <a:lstStyle/>
+          <a:p>
+            <a:pPr algn="l">
+              <a:lnSpc>
+                <a:spcPct val="125000"/>
+              </a:lnSpc>
+            </a:pPr>
+            <a:r>
+              <a:rPr sz="1300" b="1">
+                <a:solidFill>
+                  <a:srgbClr val="F0B46A"/>
+                </a:solidFill>
+                <a:latin typeface="Calibri"/>
+              </a:rPr>
+              <a:t>THE PROBLEM</a:t>
+            </a:r>
+          </a:p>
+          <a:p>
+            <a:pPr algn="l">
+              <a:lnSpc>
+                <a:spcPct val="125000"/>
+              </a:lnSpc>
+            </a:pPr>
+            <a:r>
+              <a:rPr sz="600" b="0">
+                <a:solidFill>
+                  <a:srgbClr val="FFFFFF"/>
+                </a:solidFill>
+                <a:latin typeface="Calibri"/>
+              </a:rPr>
+              <a:t/>
+            </a:r>
+          </a:p>
+          <a:p>
+            <a:pPr algn="l">
+              <a:lnSpc>
+                <a:spcPct val="125000"/>
+              </a:lnSpc>
+            </a:pPr>
+            <a:r>
+              <a:rPr sz="1700" b="0">
+                <a:solidFill>
+                  <a:srgbClr val="FFFFFF"/>
+                </a:solidFill>
+                <a:latin typeface="Calibri"/>
+              </a:rPr>
+              <a:t>AI agents are given tools and left to decide when to use them.</a:t>
+            </a:r>
+          </a:p>
+          <a:p>
+            <a:pPr algn="l">
+              <a:lnSpc>
+                <a:spcPct val="125000"/>
+              </a:lnSpc>
+            </a:pPr>
+            <a:r>
+              <a:rPr sz="500" b="0">
+                <a:solidFill>
+                  <a:srgbClr val="FFFFFF"/>
+                </a:solidFill>
+                <a:latin typeface="Calibri"/>
+              </a:rPr>
+              <a:t/>
+            </a:r>
+          </a:p>
+          <a:p>
+            <a:pPr algn="l">
+              <a:lnSpc>
+                <a:spcPct val="125000"/>
+              </a:lnSpc>
+            </a:pPr>
+            <a:r>
+              <a:rPr sz="1500" b="0">
+                <a:solidFill>
+                  <a:srgbClr val="C7D2FE"/>
+                </a:solidFill>
+                <a:latin typeface="Calibri"/>
+              </a:rPr>
+              <a:t>That cost 21 AI calls to plan one trip — and the agents still skipped their own tools.</a:t>
+            </a:r>
+          </a:p>
+        </p:txBody>
+      </p:sp>
+      <p:sp>
+        <p:nvSpPr>
+          <p:cNvPr id="7" name="TextBox 6"/>
+          <p:cNvSpPr txBox="1"/>
+          <p:nvPr/>
+        </p:nvSpPr>
+        <p:spPr>
+          <a:xfrm>
+            <a:off x="6309360" y="3063240"/>
+            <a:ext cx="5029200" cy="2377440"/>
+          </a:xfrm>
+          <a:prstGeom prst="rect">
+            <a:avLst/>
+          </a:prstGeom>
+          <a:noFill/>
+        </p:spPr>
+        <p:txBody>
+          <a:bodyPr wrap="square" anchor="t">
+            <a:spAutoFit/>
+          </a:bodyPr>
+          <a:lstStyle/>
+          <a:p>
+            <a:pPr algn="l">
+              <a:lnSpc>
+                <a:spcPct val="125000"/>
+              </a:lnSpc>
+            </a:pPr>
+            <a:r>
+              <a:rPr sz="1300" b="1">
+                <a:solidFill>
+                  <a:srgbClr val="6EE7DF"/>
+                </a:solidFill>
+                <a:latin typeface="Calibri"/>
+              </a:rPr>
+              <a:t>MY SOLUTION</a:t>
+            </a:r>
+          </a:p>
+          <a:p>
+            <a:pPr algn="l">
+              <a:lnSpc>
+                <a:spcPct val="125000"/>
+              </a:lnSpc>
+            </a:pPr>
+            <a:r>
+              <a:rPr sz="600" b="0">
+                <a:solidFill>
+                  <a:srgbClr val="FFFFFF"/>
+                </a:solidFill>
+                <a:latin typeface="Calibri"/>
+              </a:rPr>
+              <a:t/>
+            </a:r>
+          </a:p>
+          <a:p>
+            <a:pPr algn="l">
+              <a:lnSpc>
+                <a:spcPct val="125000"/>
+              </a:lnSpc>
+            </a:pPr>
+            <a:r>
+              <a:rPr sz="1700" b="0">
+                <a:solidFill>
+                  <a:srgbClr val="FFFFFF"/>
+                </a:solidFill>
+                <a:latin typeface="Calibri"/>
+              </a:rPr>
+              <a:t>Use AI only where a step needs thinking. Fetch data with plain code.</a:t>
+            </a:r>
+          </a:p>
+          <a:p>
+            <a:pPr algn="l">
+              <a:lnSpc>
+                <a:spcPct val="125000"/>
+              </a:lnSpc>
+            </a:pPr>
+            <a:r>
+              <a:rPr sz="500" b="0">
+                <a:solidFill>
+                  <a:srgbClr val="FFFFFF"/>
+                </a:solidFill>
+                <a:latin typeface="Calibri"/>
+              </a:rPr>
+              <a:t/>
+            </a:r>
+          </a:p>
+          <a:p>
+            <a:pPr algn="l">
+              <a:lnSpc>
+                <a:spcPct val="125000"/>
+              </a:lnSpc>
+            </a:pPr>
+            <a:r>
+              <a:rPr sz="1500" b="0">
+                <a:solidFill>
+                  <a:srgbClr val="6EE7DF"/>
+                </a:solidFill>
+                <a:latin typeface="Calibri"/>
+              </a:rPr>
+              <a:t>Same plan for 2 AI calls — 15x cheaper, just as accurate.</a:t>
+            </a:r>
+          </a:p>
+        </p:txBody>
+      </p:sp>
+      <p:sp>
+        <p:nvSpPr>
+          <p:cNvPr id="8" name="TextBox 7"/>
+          <p:cNvSpPr txBox="1"/>
+          <p:nvPr/>
+        </p:nvSpPr>
+        <p:spPr>
+          <a:xfrm>
+            <a:off x="822960" y="5806440"/>
+            <a:ext cx="10515600" cy="457200"/>
+          </a:xfrm>
+          <a:prstGeom prst="rect">
+            <a:avLst/>
+          </a:prstGeom>
+          <a:noFill/>
+        </p:spPr>
+        <p:txBody>
+          <a:bodyPr wrap="square" anchor="t">
+            <a:spAutoFit/>
+          </a:bodyPr>
+          <a:lstStyle/>
+          <a:p>
+            <a:pPr algn="l">
+              <a:lnSpc>
+                <a:spcPct val="100000"/>
+              </a:lnSpc>
+            </a:pPr>
+            <a:r>
+              <a:rPr sz="1200" b="0">
+                <a:solidFill>
+                  <a:srgbClr val="9CA3F5"/>
+                </a:solidFill>
+                <a:latin typeface="Calibri"/>
+              </a:rPr>
+              <a:t>Student 25182589</a:t>
+            </a:r>
+          </a:p>
+        </p:txBody>
+      </p:sp>
+    </p:spTree>
+  </p:cSld>
+  <p:clrMapOvr>
+    <a:masterClrMapping/>
+  </p:clrMapOvr>
+</p:sld>
+</file>
+
+<file path=ppt/slides/slide10.xml><?xml version="1.0" encoding="utf-8"?>
+<p:sld xmlns:a="http://schemas.openxmlformats.org/drawingml/2006/main" xmlns:p="http://schemas.openxmlformats.org/presentationml/2006/main" xmlns:r="http://schemas.openxmlformats.org/officeDocument/2006/relationships">
+  <p:cSld>
+    <p:bg>
+      <p:bgPr>
+        <a:solidFill>
+          <a:srgbClr val="1E1B4B"/>
+        </a:solidFill>
+        <a:effectLst/>
+      </p:bgPr>
+    </p:bg>
+    <p:spTree>
+      <p:nvGrpSpPr>
+        <p:cNvPr id="1" name=""/>
+        <p:cNvGrpSpPr/>
+        <p:nvPr/>
+      </p:nvGrpSpPr>
+      <p:grpSpPr/>
+      <p:sp>
+        <p:nvSpPr>
+          <p:cNvPr id="2" name="TextBox 1"/>
+          <p:cNvSpPr txBox="1"/>
+          <p:nvPr/>
+        </p:nvSpPr>
+        <p:spPr>
+          <a:xfrm>
+            <a:off x="1005840" y="1371600"/>
             <a:ext cx="10241280" cy="457200"/>
           </a:xfrm>
           <a:prstGeom prst="rect">
@@ -4544,7 +4621,7 @@
                 </a:solidFill>
                 <a:latin typeface="Calibri"/>
               </a:rPr>
-              <a:t>MSc DISSERTATION  ·  VIVA VOCE</a:t>
+              <a:t>IN ONE SENTENCE</a:t>
             </a:r>
           </a:p>
         </p:txBody>
@@ -4557,8 +4634,8 @@
         </p:nvSpPr>
         <p:spPr>
           <a:xfrm>
-            <a:off x="1005840" y="2286000"/>
-            <a:ext cx="10241280" cy="1737360"/>
+            <a:off x="1005840" y="1828800"/>
+            <a:ext cx="10241280" cy="2011680"/>
           </a:xfrm>
           <a:prstGeom prst="rect">
             <a:avLst/>
@@ -4573,33 +4650,33 @@
           <a:p>
             <a:pPr algn="l">
               <a:lnSpc>
-                <a:spcPct val="115000"/>
+                <a:spcPct val="120000"/>
               </a:lnSpc>
             </a:pPr>
             <a:r>
-              <a:rPr sz="4400" b="1">
+              <a:rPr sz="3600" b="1">
                 <a:solidFill>
                   <a:srgbClr val="FFFFFF"/>
                 </a:solidFill>
                 <a:latin typeface="Calibri"/>
               </a:rPr>
-              <a:t>When is AI worth paying for?</a:t>
+              <a:t>Use AI where a step needs thinking.</a:t>
             </a:r>
           </a:p>
           <a:p>
             <a:pPr algn="l">
               <a:lnSpc>
-                <a:spcPct val="115000"/>
+                <a:spcPct val="120000"/>
               </a:lnSpc>
             </a:pPr>
             <a:r>
-              <a:rPr sz="3200" b="1">
+              <a:rPr sz="3600" b="1">
                 <a:solidFill>
                   <a:srgbClr val="6EE7DF"/>
                 </a:solidFill>
                 <a:latin typeface="Calibri"/>
               </a:rPr>
-              <a:t>A travel planner, built four ways.</a:t>
+              <a:t>Everywhere else, it is just a bill.</a:t>
             </a:r>
           </a:p>
         </p:txBody>
@@ -4612,7 +4689,7 @@
         </p:nvSpPr>
         <p:spPr>
           <a:xfrm>
-            <a:off x="1005840" y="4389120"/>
+            <a:off x="1005840" y="4069080"/>
             <a:ext cx="1463040" cy="34000"/>
           </a:xfrm>
           <a:prstGeom prst="rect">
@@ -4656,8 +4733,8 @@
         </p:nvSpPr>
         <p:spPr>
           <a:xfrm>
-            <a:off x="1005840" y="4754880"/>
-            <a:ext cx="10241280" cy="1097280"/>
+            <a:off x="1005840" y="4389120"/>
+            <a:ext cx="10241280" cy="1828800"/>
           </a:xfrm>
           <a:prstGeom prst="rect">
             <a:avLst/>
@@ -4672,17 +4749,49 @@
           <a:p>
             <a:pPr algn="l">
               <a:lnSpc>
-                <a:spcPct val="100000"/>
+                <a:spcPct val="130000"/>
               </a:lnSpc>
             </a:pPr>
             <a:r>
-              <a:rPr sz="1400" b="0">
+              <a:rPr sz="1700" b="0">
+                <a:solidFill>
+                  <a:srgbClr val="C7D2FE"/>
+                </a:solidFill>
+                <a:latin typeface="Calibri"/>
+              </a:rPr>
+              <a:t>15x cheaper  ·  same accuracy  ·  403 tests  ·  30 saved API replies so anyone can repeat it</a:t>
+            </a:r>
+          </a:p>
+          <a:p>
+            <a:pPr algn="l">
+              <a:lnSpc>
+                <a:spcPct val="130000"/>
+              </a:lnSpc>
+            </a:pPr>
+            <a:r>
+              <a:rPr sz="800" b="0">
+                <a:solidFill>
+                  <a:srgbClr val="FFFFFF"/>
+                </a:solidFill>
+                <a:latin typeface="Calibri"/>
+              </a:rPr>
+              <a:t/>
+            </a:r>
+          </a:p>
+          <a:p>
+            <a:pPr algn="l">
+              <a:lnSpc>
+                <a:spcPct val="130000"/>
+              </a:lnSpc>
+            </a:pPr>
+            <a:r>
+              <a:rPr sz="1500" b="0">
                 <a:solidFill>
                   <a:srgbClr val="9CA3F5"/>
                 </a:solidFill>
                 <a:latin typeface="Calibri"/>
               </a:rPr>
-              <a:t>Student 25182589   ·   CMP7200 — Individual Master's Project</a:t>
+              <a:t>The gap: only 1 of 20 trips measured for cost. Everything needed to widen it is saved and runs without keys.</a:t>
             </a:r>
           </a:p>
         </p:txBody>
@@ -4695,7 +4804,7 @@
 </p:sld>
 </file>
 
-<file path=ppt/slides/slide10.xml><?xml version="1.0" encoding="utf-8"?>
+<file path=ppt/slides/slide2.xml><?xml version="1.0" encoding="utf-8"?>
 <p:sld xmlns:a="http://schemas.openxmlformats.org/drawingml/2006/main" xmlns:p="http://schemas.openxmlformats.org/presentationml/2006/main" xmlns:r="http://schemas.openxmlformats.org/officeDocument/2006/relationships">
   <p:cSld>
     <p:spTree>
@@ -4739,7 +4848,7 @@
                 </a:solidFill>
                 <a:latin typeface="Calibri"/>
               </a:rPr>
-              <a:t>9  ·  BUDGET: IS THE TRIP EVEN POSSIBLE?</a:t>
+              <a:t>1  ·  THE AGENTS</a:t>
             </a:r>
           </a:p>
         </p:txBody>
@@ -4778,7 +4887,7 @@
                 </a:solidFill>
                 <a:latin typeface="Calibri"/>
               </a:rPr>
-              <a:t>It refuses, and says what would work</a:t>
+              <a:t>Their real names, and what each one does</a:t>
             </a:r>
           </a:p>
         </p:txBody>
@@ -4827,1276 +4936,6 @@
           </a:p>
         </p:txBody>
       </p:sp>
-      <p:sp>
-        <p:nvSpPr>
-          <p:cNvPr id="5" name="TextBox 4"/>
-          <p:cNvSpPr txBox="1"/>
-          <p:nvPr/>
-        </p:nvSpPr>
-        <p:spPr>
-          <a:xfrm>
-            <a:off x="822960" y="2103120"/>
-            <a:ext cx="3515258" cy="1188720"/>
-          </a:xfrm>
-          <a:prstGeom prst="rect">
-            <a:avLst/>
-          </a:prstGeom>
-          <a:noFill/>
-        </p:spPr>
-        <p:txBody>
-          <a:bodyPr wrap="square" anchor="t">
-            <a:spAutoFit/>
-          </a:bodyPr>
-          <a:lstStyle/>
-          <a:p>
-            <a:pPr algn="ctr">
-              <a:lnSpc>
-                <a:spcPct val="100000"/>
-              </a:lnSpc>
-            </a:pPr>
-            <a:r>
-              <a:rPr sz="6000" b="1">
-                <a:solidFill>
-                  <a:srgbClr val="A85B00"/>
-                </a:solidFill>
-                <a:latin typeface="Calibri"/>
-              </a:rPr>
-              <a:t>$800</a:t>
-            </a:r>
-          </a:p>
-        </p:txBody>
-      </p:sp>
-      <p:sp>
-        <p:nvSpPr>
-          <p:cNvPr id="6" name="TextBox 5"/>
-          <p:cNvSpPr txBox="1"/>
-          <p:nvPr/>
-        </p:nvSpPr>
-        <p:spPr>
-          <a:xfrm>
-            <a:off x="822960" y="3246120"/>
-            <a:ext cx="3515258" cy="731520"/>
-          </a:xfrm>
-          <a:prstGeom prst="rect">
-            <a:avLst/>
-          </a:prstGeom>
-          <a:noFill/>
-        </p:spPr>
-        <p:txBody>
-          <a:bodyPr wrap="square" anchor="t">
-            <a:spAutoFit/>
-          </a:bodyPr>
-          <a:lstStyle/>
-          <a:p>
-            <a:pPr algn="ctr">
-              <a:lnSpc>
-                <a:spcPct val="100000"/>
-              </a:lnSpc>
-            </a:pPr>
-            <a:r>
-              <a:rPr sz="1400" b="0">
-                <a:solidFill>
-                  <a:srgbClr val="545C6E"/>
-                </a:solidFill>
-                <a:latin typeface="Calibri"/>
-              </a:rPr>
-              <a:t>asked for
-4 nights in Istanbul</a:t>
-            </a:r>
-          </a:p>
-        </p:txBody>
-      </p:sp>
-      <p:sp>
-        <p:nvSpPr>
-          <p:cNvPr id="7" name="TextBox 6"/>
-          <p:cNvSpPr txBox="1"/>
-          <p:nvPr/>
-        </p:nvSpPr>
-        <p:spPr>
-          <a:xfrm>
-            <a:off x="4338218" y="2103120"/>
-            <a:ext cx="3515258" cy="1188720"/>
-          </a:xfrm>
-          <a:prstGeom prst="rect">
-            <a:avLst/>
-          </a:prstGeom>
-          <a:noFill/>
-        </p:spPr>
-        <p:txBody>
-          <a:bodyPr wrap="square" anchor="t">
-            <a:spAutoFit/>
-          </a:bodyPr>
-          <a:lstStyle/>
-          <a:p>
-            <a:pPr algn="ctr">
-              <a:lnSpc>
-                <a:spcPct val="100000"/>
-              </a:lnSpc>
-            </a:pPr>
-            <a:r>
-              <a:rPr sz="6000" b="1">
-                <a:solidFill>
-                  <a:srgbClr val="A85B00"/>
-                </a:solidFill>
-                <a:latin typeface="Calibri"/>
-              </a:rPr>
-              <a:t>$837</a:t>
-            </a:r>
-          </a:p>
-        </p:txBody>
-      </p:sp>
-      <p:sp>
-        <p:nvSpPr>
-          <p:cNvPr id="8" name="TextBox 7"/>
-          <p:cNvSpPr txBox="1"/>
-          <p:nvPr/>
-        </p:nvSpPr>
-        <p:spPr>
-          <a:xfrm>
-            <a:off x="4338218" y="3246120"/>
-            <a:ext cx="3515258" cy="731520"/>
-          </a:xfrm>
-          <a:prstGeom prst="rect">
-            <a:avLst/>
-          </a:prstGeom>
-          <a:noFill/>
-        </p:spPr>
-        <p:txBody>
-          <a:bodyPr wrap="square" anchor="t">
-            <a:spAutoFit/>
-          </a:bodyPr>
-          <a:lstStyle/>
-          <a:p>
-            <a:pPr algn="ctr">
-              <a:lnSpc>
-                <a:spcPct val="100000"/>
-              </a:lnSpc>
-            </a:pPr>
-            <a:r>
-              <a:rPr sz="1400" b="0">
-                <a:solidFill>
-                  <a:srgbClr val="545C6E"/>
-                </a:solidFill>
-                <a:latin typeface="Calibri"/>
-              </a:rPr>
-              <a:t>the cheapest it can
-actually be done for</a:t>
-            </a:r>
-          </a:p>
-        </p:txBody>
-      </p:sp>
-      <p:sp>
-        <p:nvSpPr>
-          <p:cNvPr id="9" name="TextBox 8"/>
-          <p:cNvSpPr txBox="1"/>
-          <p:nvPr/>
-        </p:nvSpPr>
-        <p:spPr>
-          <a:xfrm>
-            <a:off x="7853476" y="2103120"/>
-            <a:ext cx="3515258" cy="1188720"/>
-          </a:xfrm>
-          <a:prstGeom prst="rect">
-            <a:avLst/>
-          </a:prstGeom>
-          <a:noFill/>
-        </p:spPr>
-        <p:txBody>
-          <a:bodyPr wrap="square" anchor="t">
-            <a:spAutoFit/>
-          </a:bodyPr>
-          <a:lstStyle/>
-          <a:p>
-            <a:pPr algn="ctr">
-              <a:lnSpc>
-                <a:spcPct val="100000"/>
-              </a:lnSpc>
-            </a:pPr>
-            <a:r>
-              <a:rPr sz="6000" b="1">
-                <a:solidFill>
-                  <a:srgbClr val="A85B00"/>
-                </a:solidFill>
-                <a:latin typeface="Calibri"/>
-              </a:rPr>
-              <a:t>REFUSED</a:t>
-            </a:r>
-          </a:p>
-        </p:txBody>
-      </p:sp>
-      <p:sp>
-        <p:nvSpPr>
-          <p:cNvPr id="10" name="TextBox 9"/>
-          <p:cNvSpPr txBox="1"/>
-          <p:nvPr/>
-        </p:nvSpPr>
-        <p:spPr>
-          <a:xfrm>
-            <a:off x="7853476" y="3246120"/>
-            <a:ext cx="3515258" cy="731520"/>
-          </a:xfrm>
-          <a:prstGeom prst="rect">
-            <a:avLst/>
-          </a:prstGeom>
-          <a:noFill/>
-        </p:spPr>
-        <p:txBody>
-          <a:bodyPr wrap="square" anchor="t">
-            <a:spAutoFit/>
-          </a:bodyPr>
-          <a:lstStyle/>
-          <a:p>
-            <a:pPr algn="ctr">
-              <a:lnSpc>
-                <a:spcPct val="100000"/>
-              </a:lnSpc>
-            </a:pPr>
-            <a:r>
-              <a:rPr sz="1400" b="0">
-                <a:solidFill>
-                  <a:srgbClr val="545C6E"/>
-                </a:solidFill>
-                <a:latin typeface="Calibri"/>
-              </a:rPr>
-              <a:t>with the shortfall named,
-and three ways to fix it</a:t>
-            </a:r>
-          </a:p>
-        </p:txBody>
-      </p:sp>
-      <p:sp>
-        <p:nvSpPr>
-          <p:cNvPr id="11" name="TextBox 10"/>
-          <p:cNvSpPr txBox="1"/>
-          <p:nvPr/>
-        </p:nvSpPr>
-        <p:spPr>
-          <a:xfrm>
-            <a:off x="822960" y="4754880"/>
-            <a:ext cx="10515600" cy="1371600"/>
-          </a:xfrm>
-          <a:prstGeom prst="rect">
-            <a:avLst/>
-          </a:prstGeom>
-          <a:noFill/>
-        </p:spPr>
-        <p:txBody>
-          <a:bodyPr wrap="square" anchor="t">
-            <a:spAutoFit/>
-          </a:bodyPr>
-          <a:lstStyle/>
-          <a:p>
-            <a:pPr algn="l">
-              <a:lnSpc>
-                <a:spcPct val="130000"/>
-              </a:lnSpc>
-            </a:pPr>
-            <a:r>
-              <a:rPr sz="1900" b="1">
-                <a:solidFill>
-                  <a:srgbClr val="161A23"/>
-                </a:solidFill>
-                <a:latin typeface="Calibri"/>
-              </a:rPr>
-              <a:t>Why $837? Because it checks the real recorded fare, not a built-in table.</a:t>
-            </a:r>
-          </a:p>
-          <a:p>
-            <a:pPr algn="l">
-              <a:lnSpc>
-                <a:spcPct val="130000"/>
-              </a:lnSpc>
-            </a:pPr>
-            <a:r>
-              <a:rPr sz="1700" b="0">
-                <a:solidFill>
-                  <a:srgbClr val="545C6E"/>
-                </a:solidFill>
-                <a:latin typeface="Calibri"/>
-              </a:rPr>
-              <a:t>The table said a medium-haul flight starts at $350. The API actually returned $734 — the table was 52% too low.</a:t>
-            </a:r>
-          </a:p>
-        </p:txBody>
-      </p:sp>
-    </p:spTree>
-  </p:cSld>
-  <p:clrMapOvr>
-    <a:masterClrMapping/>
-  </p:clrMapOvr>
-</p:sld>
-</file>
-
-<file path=ppt/slides/slide11.xml><?xml version="1.0" encoding="utf-8"?>
-<p:sld xmlns:a="http://schemas.openxmlformats.org/drawingml/2006/main" xmlns:p="http://schemas.openxmlformats.org/presentationml/2006/main" xmlns:r="http://schemas.openxmlformats.org/officeDocument/2006/relationships">
-  <p:cSld>
-    <p:spTree>
-      <p:nvGrpSpPr>
-        <p:cNvPr id="1" name=""/>
-        <p:cNvGrpSpPr/>
-        <p:nvPr/>
-      </p:nvGrpSpPr>
-      <p:grpSpPr/>
-      <p:sp>
-        <p:nvSpPr>
-          <p:cNvPr id="2" name="TextBox 1"/>
-          <p:cNvSpPr txBox="1"/>
-          <p:nvPr/>
-        </p:nvSpPr>
-        <p:spPr>
-          <a:xfrm>
-            <a:off x="822960" y="457200"/>
-            <a:ext cx="10515600" cy="365760"/>
-          </a:xfrm>
-          <a:prstGeom prst="rect">
-            <a:avLst/>
-          </a:prstGeom>
-          <a:noFill/>
-        </p:spPr>
-        <p:txBody>
-          <a:bodyPr wrap="square" anchor="t">
-            <a:spAutoFit/>
-          </a:bodyPr>
-          <a:lstStyle/>
-          <a:p>
-            <a:pPr algn="l">
-              <a:lnSpc>
-                <a:spcPct val="100000"/>
-              </a:lnSpc>
-            </a:pPr>
-            <a:r>
-              <a:rPr sz="1200" b="1">
-                <a:solidFill>
-                  <a:srgbClr val="4338CA"/>
-                </a:solidFill>
-                <a:latin typeface="Calibri"/>
-              </a:rPr>
-              <a:t>10  ·  RESULT: COST</a:t>
-            </a:r>
-          </a:p>
-        </p:txBody>
-      </p:sp>
-      <p:sp>
-        <p:nvSpPr>
-          <p:cNvPr id="3" name="TextBox 2"/>
-          <p:cNvSpPr txBox="1"/>
-          <p:nvPr/>
-        </p:nvSpPr>
-        <p:spPr>
-          <a:xfrm>
-            <a:off x="822960" y="777240"/>
-            <a:ext cx="10515600" cy="822960"/>
-          </a:xfrm>
-          <a:prstGeom prst="rect">
-            <a:avLst/>
-          </a:prstGeom>
-          <a:noFill/>
-        </p:spPr>
-        <p:txBody>
-          <a:bodyPr wrap="square" anchor="t">
-            <a:spAutoFit/>
-          </a:bodyPr>
-          <a:lstStyle/>
-          <a:p>
-            <a:pPr algn="l">
-              <a:lnSpc>
-                <a:spcPct val="100000"/>
-              </a:lnSpc>
-            </a:pPr>
-            <a:r>
-              <a:rPr sz="3200" b="1">
-                <a:solidFill>
-                  <a:srgbClr val="161A23"/>
-                </a:solidFill>
-                <a:latin typeface="Calibri"/>
-              </a:rPr>
-              <a:t>Fetching data is where the money went</a:t>
-            </a:r>
-          </a:p>
-        </p:txBody>
-      </p:sp>
-      <p:sp>
-        <p:nvSpPr>
-          <p:cNvPr id="4" name="Rectangle 3"/>
-          <p:cNvSpPr/>
-          <p:nvPr/>
-        </p:nvSpPr>
-        <p:spPr>
-          <a:xfrm>
-            <a:off x="822960" y="1572768"/>
-            <a:ext cx="1005840" cy="34000"/>
-          </a:xfrm>
-          <a:prstGeom prst="rect">
-            <a:avLst/>
-          </a:prstGeom>
-          <a:solidFill>
-            <a:srgbClr val="4338CA"/>
-          </a:solidFill>
-          <a:ln>
-            <a:noFill/>
-          </a:ln>
-          <a:effectLst/>
-        </p:spPr>
-        <p:style>
-          <a:lnRef idx="1">
-            <a:schemeClr val="accent1"/>
-          </a:lnRef>
-          <a:fillRef idx="3">
-            <a:schemeClr val="accent1"/>
-          </a:fillRef>
-          <a:effectRef idx="2">
-            <a:schemeClr val="accent1"/>
-          </a:effectRef>
-          <a:fontRef idx="minor">
-            <a:schemeClr val="lt1"/>
-          </a:fontRef>
-        </p:style>
-        <p:txBody>
-          <a:bodyPr rtlCol="0" anchor="ctr"/>
-          <a:lstStyle/>
-          <a:p>
-            <a:pPr algn="ctr"/>
-          </a:p>
-        </p:txBody>
-      </p:sp>
-      <p:pic>
-        <p:nvPicPr>
-          <p:cNvPr id="5" name="Picture 4" descr="efficiency.png"/>
-          <p:cNvPicPr>
-            <a:picLocks noChangeAspect="1"/>
-          </p:cNvPicPr>
-          <p:nvPr/>
-        </p:nvPicPr>
-        <p:blipFill>
-          <a:blip r:embed="rId2"/>
-          <a:stretch>
-            <a:fillRect/>
-          </a:stretch>
-        </p:blipFill>
-        <p:spPr>
-          <a:xfrm>
-            <a:off x="2692927" y="1783080"/>
-            <a:ext cx="6805840" cy="4023360"/>
-          </a:xfrm>
-          <a:prstGeom prst="rect">
-            <a:avLst/>
-          </a:prstGeom>
-        </p:spPr>
-      </p:pic>
-      <p:sp>
-        <p:nvSpPr>
-          <p:cNvPr id="6" name="TextBox 5"/>
-          <p:cNvSpPr txBox="1"/>
-          <p:nvPr/>
-        </p:nvSpPr>
-        <p:spPr>
-          <a:xfrm>
-            <a:off x="822960" y="5943600"/>
-            <a:ext cx="10515600" cy="548640"/>
-          </a:xfrm>
-          <a:prstGeom prst="rect">
-            <a:avLst/>
-          </a:prstGeom>
-          <a:noFill/>
-        </p:spPr>
-        <p:txBody>
-          <a:bodyPr wrap="square" anchor="t">
-            <a:spAutoFit/>
-          </a:bodyPr>
-          <a:lstStyle/>
-          <a:p>
-            <a:pPr algn="l">
-              <a:lnSpc>
-                <a:spcPct val="100000"/>
-              </a:lnSpc>
-            </a:pPr>
-            <a:r>
-              <a:rPr sz="1600" b="1">
-                <a:solidFill>
-                  <a:srgbClr val="161A23"/>
-                </a:solidFill>
-                <a:latin typeface="Calibri"/>
-              </a:rPr>
-              <a:t>B sent 120,703 units of text.  D sent 7,840.  Same trip, same data, same AI model.</a:t>
-            </a:r>
-          </a:p>
-        </p:txBody>
-      </p:sp>
-    </p:spTree>
-  </p:cSld>
-  <p:clrMapOvr>
-    <a:masterClrMapping/>
-  </p:clrMapOvr>
-</p:sld>
-</file>
-
-<file path=ppt/slides/slide12.xml><?xml version="1.0" encoding="utf-8"?>
-<p:sld xmlns:a="http://schemas.openxmlformats.org/drawingml/2006/main" xmlns:p="http://schemas.openxmlformats.org/presentationml/2006/main" xmlns:r="http://schemas.openxmlformats.org/officeDocument/2006/relationships">
-  <p:cSld>
-    <p:spTree>
-      <p:nvGrpSpPr>
-        <p:cNvPr id="1" name=""/>
-        <p:cNvGrpSpPr/>
-        <p:nvPr/>
-      </p:nvGrpSpPr>
-      <p:grpSpPr/>
-      <p:sp>
-        <p:nvSpPr>
-          <p:cNvPr id="2" name="TextBox 1"/>
-          <p:cNvSpPr txBox="1"/>
-          <p:nvPr/>
-        </p:nvSpPr>
-        <p:spPr>
-          <a:xfrm>
-            <a:off x="822960" y="457200"/>
-            <a:ext cx="10515600" cy="365760"/>
-          </a:xfrm>
-          <a:prstGeom prst="rect">
-            <a:avLst/>
-          </a:prstGeom>
-          <a:noFill/>
-        </p:spPr>
-        <p:txBody>
-          <a:bodyPr wrap="square" anchor="t">
-            <a:spAutoFit/>
-          </a:bodyPr>
-          <a:lstStyle/>
-          <a:p>
-            <a:pPr algn="l">
-              <a:lnSpc>
-                <a:spcPct val="100000"/>
-              </a:lnSpc>
-            </a:pPr>
-            <a:r>
-              <a:rPr sz="1200" b="1">
-                <a:solidFill>
-                  <a:srgbClr val="4338CA"/>
-                </a:solidFill>
-                <a:latin typeface="Calibri"/>
-              </a:rPr>
-              <a:t>11  ·  RESULT: IS THE PLAN REAL?</a:t>
-            </a:r>
-          </a:p>
-        </p:txBody>
-      </p:sp>
-      <p:sp>
-        <p:nvSpPr>
-          <p:cNvPr id="3" name="TextBox 2"/>
-          <p:cNvSpPr txBox="1"/>
-          <p:nvPr/>
-        </p:nvSpPr>
-        <p:spPr>
-          <a:xfrm>
-            <a:off x="822960" y="777240"/>
-            <a:ext cx="10515600" cy="822960"/>
-          </a:xfrm>
-          <a:prstGeom prst="rect">
-            <a:avLst/>
-          </a:prstGeom>
-          <a:noFill/>
-        </p:spPr>
-        <p:txBody>
-          <a:bodyPr wrap="square" anchor="t">
-            <a:spAutoFit/>
-          </a:bodyPr>
-          <a:lstStyle/>
-          <a:p>
-            <a:pPr algn="l">
-              <a:lnSpc>
-                <a:spcPct val="100000"/>
-              </a:lnSpc>
-            </a:pPr>
-            <a:r>
-              <a:rPr sz="3200" b="1">
-                <a:solidFill>
-                  <a:srgbClr val="161A23"/>
-                </a:solidFill>
-                <a:latin typeface="Calibri"/>
-              </a:rPr>
-              <a:t>Cheaper, and no less accurate</a:t>
-            </a:r>
-          </a:p>
-        </p:txBody>
-      </p:sp>
-      <p:sp>
-        <p:nvSpPr>
-          <p:cNvPr id="4" name="Rectangle 3"/>
-          <p:cNvSpPr/>
-          <p:nvPr/>
-        </p:nvSpPr>
-        <p:spPr>
-          <a:xfrm>
-            <a:off x="822960" y="1572768"/>
-            <a:ext cx="1005840" cy="34000"/>
-          </a:xfrm>
-          <a:prstGeom prst="rect">
-            <a:avLst/>
-          </a:prstGeom>
-          <a:solidFill>
-            <a:srgbClr val="4338CA"/>
-          </a:solidFill>
-          <a:ln>
-            <a:noFill/>
-          </a:ln>
-          <a:effectLst/>
-        </p:spPr>
-        <p:style>
-          <a:lnRef idx="1">
-            <a:schemeClr val="accent1"/>
-          </a:lnRef>
-          <a:fillRef idx="3">
-            <a:schemeClr val="accent1"/>
-          </a:fillRef>
-          <a:effectRef idx="2">
-            <a:schemeClr val="accent1"/>
-          </a:effectRef>
-          <a:fontRef idx="minor">
-            <a:schemeClr val="lt1"/>
-          </a:fontRef>
-        </p:style>
-        <p:txBody>
-          <a:bodyPr rtlCol="0" anchor="ctr"/>
-          <a:lstStyle/>
-          <a:p>
-            <a:pPr algn="ctr"/>
-          </a:p>
-        </p:txBody>
-      </p:sp>
-      <p:pic>
-        <p:nvPicPr>
-          <p:cNvPr id="5" name="Picture 4" descr="groundedness.png"/>
-          <p:cNvPicPr>
-            <a:picLocks noChangeAspect="1"/>
-          </p:cNvPicPr>
-          <p:nvPr/>
-        </p:nvPicPr>
-        <p:blipFill>
-          <a:blip r:embed="rId2"/>
-          <a:stretch>
-            <a:fillRect/>
-          </a:stretch>
-        </p:blipFill>
-        <p:spPr>
-          <a:xfrm>
-            <a:off x="-115629" y="1783080"/>
-            <a:ext cx="12422953" cy="4023360"/>
-          </a:xfrm>
-          <a:prstGeom prst="rect">
-            <a:avLst/>
-          </a:prstGeom>
-        </p:spPr>
-      </p:pic>
-      <p:sp>
-        <p:nvSpPr>
-          <p:cNvPr id="6" name="TextBox 5"/>
-          <p:cNvSpPr txBox="1"/>
-          <p:nvPr/>
-        </p:nvSpPr>
-        <p:spPr>
-          <a:xfrm>
-            <a:off x="822960" y="5943600"/>
-            <a:ext cx="10515600" cy="548640"/>
-          </a:xfrm>
-          <a:prstGeom prst="rect">
-            <a:avLst/>
-          </a:prstGeom>
-          <a:noFill/>
-        </p:spPr>
-        <p:txBody>
-          <a:bodyPr wrap="square" anchor="t">
-            <a:spAutoFit/>
-          </a:bodyPr>
-          <a:lstStyle/>
-          <a:p>
-            <a:pPr algn="l">
-              <a:lnSpc>
-                <a:spcPct val="100000"/>
-              </a:lnSpc>
-            </a:pPr>
-            <a:r>
-              <a:rPr sz="1600" b="1">
-                <a:solidFill>
-                  <a:srgbClr val="161A23"/>
-                </a:solidFill>
-                <a:latin typeface="Calibri"/>
-              </a:rPr>
-              <a:t>Prices matching a real fare:   A 1.7%   ·   B 22.9%   ·   C 56.3%   ·   D 46.6%</a:t>
-            </a:r>
-          </a:p>
-        </p:txBody>
-      </p:sp>
-    </p:spTree>
-  </p:cSld>
-  <p:clrMapOvr>
-    <a:masterClrMapping/>
-  </p:clrMapOvr>
-</p:sld>
-</file>
-
-<file path=ppt/slides/slide13.xml><?xml version="1.0" encoding="utf-8"?>
-<p:sld xmlns:a="http://schemas.openxmlformats.org/drawingml/2006/main" xmlns:p="http://schemas.openxmlformats.org/presentationml/2006/main" xmlns:r="http://schemas.openxmlformats.org/officeDocument/2006/relationships">
-  <p:cSld>
-    <p:spTree>
-      <p:nvGrpSpPr>
-        <p:cNvPr id="1" name=""/>
-        <p:cNvGrpSpPr/>
-        <p:nvPr/>
-      </p:nvGrpSpPr>
-      <p:grpSpPr/>
-      <p:sp>
-        <p:nvSpPr>
-          <p:cNvPr id="2" name="TextBox 1"/>
-          <p:cNvSpPr txBox="1"/>
-          <p:nvPr/>
-        </p:nvSpPr>
-        <p:spPr>
-          <a:xfrm>
-            <a:off x="822960" y="457200"/>
-            <a:ext cx="10515600" cy="365760"/>
-          </a:xfrm>
-          <a:prstGeom prst="rect">
-            <a:avLst/>
-          </a:prstGeom>
-          <a:noFill/>
-        </p:spPr>
-        <p:txBody>
-          <a:bodyPr wrap="square" anchor="t">
-            <a:spAutoFit/>
-          </a:bodyPr>
-          <a:lstStyle/>
-          <a:p>
-            <a:pPr algn="l">
-              <a:lnSpc>
-                <a:spcPct val="100000"/>
-              </a:lnSpc>
-            </a:pPr>
-            <a:r>
-              <a:rPr sz="1200" b="1">
-                <a:solidFill>
-                  <a:srgbClr val="4338CA"/>
-                </a:solidFill>
-                <a:latin typeface="Calibri"/>
-              </a:rPr>
-              <a:t>12  ·  PROBLEMS IN MY OWN SYSTEM</a:t>
-            </a:r>
-          </a:p>
-        </p:txBody>
-      </p:sp>
-      <p:sp>
-        <p:nvSpPr>
-          <p:cNvPr id="3" name="TextBox 2"/>
-          <p:cNvSpPr txBox="1"/>
-          <p:nvPr/>
-        </p:nvSpPr>
-        <p:spPr>
-          <a:xfrm>
-            <a:off x="822960" y="777240"/>
-            <a:ext cx="10515600" cy="822960"/>
-          </a:xfrm>
-          <a:prstGeom prst="rect">
-            <a:avLst/>
-          </a:prstGeom>
-          <a:noFill/>
-        </p:spPr>
-        <p:txBody>
-          <a:bodyPr wrap="square" anchor="t">
-            <a:spAutoFit/>
-          </a:bodyPr>
-          <a:lstStyle/>
-          <a:p>
-            <a:pPr algn="l">
-              <a:lnSpc>
-                <a:spcPct val="100000"/>
-              </a:lnSpc>
-            </a:pPr>
-            <a:r>
-              <a:rPr sz="3200" b="1">
-                <a:solidFill>
-                  <a:srgbClr val="161A23"/>
-                </a:solidFill>
-                <a:latin typeface="Calibri"/>
-              </a:rPr>
-              <a:t>Found by measuring it. Reported, not hidden</a:t>
-            </a:r>
-          </a:p>
-        </p:txBody>
-      </p:sp>
-      <p:sp>
-        <p:nvSpPr>
-          <p:cNvPr id="4" name="Rectangle 3"/>
-          <p:cNvSpPr/>
-          <p:nvPr/>
-        </p:nvSpPr>
-        <p:spPr>
-          <a:xfrm>
-            <a:off x="822960" y="1572768"/>
-            <a:ext cx="1005840" cy="34000"/>
-          </a:xfrm>
-          <a:prstGeom prst="rect">
-            <a:avLst/>
-          </a:prstGeom>
-          <a:solidFill>
-            <a:srgbClr val="4338CA"/>
-          </a:solidFill>
-          <a:ln>
-            <a:noFill/>
-          </a:ln>
-          <a:effectLst/>
-        </p:spPr>
-        <p:style>
-          <a:lnRef idx="1">
-            <a:schemeClr val="accent1"/>
-          </a:lnRef>
-          <a:fillRef idx="3">
-            <a:schemeClr val="accent1"/>
-          </a:fillRef>
-          <a:effectRef idx="2">
-            <a:schemeClr val="accent1"/>
-          </a:effectRef>
-          <a:fontRef idx="minor">
-            <a:schemeClr val="lt1"/>
-          </a:fontRef>
-        </p:style>
-        <p:txBody>
-          <a:bodyPr rtlCol="0" anchor="ctr"/>
-          <a:lstStyle/>
-          <a:p>
-            <a:pPr algn="ctr"/>
-          </a:p>
-        </p:txBody>
-      </p:sp>
-      <p:sp>
-        <p:nvSpPr>
-          <p:cNvPr id="5" name="TextBox 4"/>
-          <p:cNvSpPr txBox="1"/>
-          <p:nvPr/>
-        </p:nvSpPr>
-        <p:spPr>
-          <a:xfrm>
-            <a:off x="822960" y="2103120"/>
-            <a:ext cx="3515258" cy="1188720"/>
-          </a:xfrm>
-          <a:prstGeom prst="rect">
-            <a:avLst/>
-          </a:prstGeom>
-          <a:noFill/>
-        </p:spPr>
-        <p:txBody>
-          <a:bodyPr wrap="square" anchor="t">
-            <a:spAutoFit/>
-          </a:bodyPr>
-          <a:lstStyle/>
-          <a:p>
-            <a:pPr algn="ctr">
-              <a:lnSpc>
-                <a:spcPct val="100000"/>
-              </a:lnSpc>
-            </a:pPr>
-            <a:r>
-              <a:rPr sz="6000" b="1">
-                <a:solidFill>
-                  <a:srgbClr val="A85B00"/>
-                </a:solidFill>
-                <a:latin typeface="Calibri"/>
-              </a:rPr>
-              <a:t>3/9</a:t>
-            </a:r>
-          </a:p>
-        </p:txBody>
-      </p:sp>
-      <p:sp>
-        <p:nvSpPr>
-          <p:cNvPr id="6" name="TextBox 5"/>
-          <p:cNvSpPr txBox="1"/>
-          <p:nvPr/>
-        </p:nvSpPr>
-        <p:spPr>
-          <a:xfrm>
-            <a:off x="822960" y="3246120"/>
-            <a:ext cx="3515258" cy="731520"/>
-          </a:xfrm>
-          <a:prstGeom prst="rect">
-            <a:avLst/>
-          </a:prstGeom>
-          <a:noFill/>
-        </p:spPr>
-        <p:txBody>
-          <a:bodyPr wrap="square" anchor="t">
-            <a:spAutoFit/>
-          </a:bodyPr>
-          <a:lstStyle/>
-          <a:p>
-            <a:pPr algn="ctr">
-              <a:lnSpc>
-                <a:spcPct val="100000"/>
-              </a:lnSpc>
-            </a:pPr>
-            <a:r>
-              <a:rPr sz="1400" b="0">
-                <a:solidFill>
-                  <a:srgbClr val="545C6E"/>
-                </a:solidFill>
-                <a:latin typeface="Calibri"/>
-              </a:rPr>
-              <a:t>design checks pass.
-Six things I claimed do not happen</a:t>
-            </a:r>
-          </a:p>
-        </p:txBody>
-      </p:sp>
-      <p:sp>
-        <p:nvSpPr>
-          <p:cNvPr id="7" name="TextBox 6"/>
-          <p:cNvSpPr txBox="1"/>
-          <p:nvPr/>
-        </p:nvSpPr>
-        <p:spPr>
-          <a:xfrm>
-            <a:off x="4338218" y="2103120"/>
-            <a:ext cx="3515258" cy="1188720"/>
-          </a:xfrm>
-          <a:prstGeom prst="rect">
-            <a:avLst/>
-          </a:prstGeom>
-          <a:noFill/>
-        </p:spPr>
-        <p:txBody>
-          <a:bodyPr wrap="square" anchor="t">
-            <a:spAutoFit/>
-          </a:bodyPr>
-          <a:lstStyle/>
-          <a:p>
-            <a:pPr algn="ctr">
-              <a:lnSpc>
-                <a:spcPct val="100000"/>
-              </a:lnSpc>
-            </a:pPr>
-            <a:r>
-              <a:rPr sz="6000" b="1">
-                <a:solidFill>
-                  <a:srgbClr val="A85B00"/>
-                </a:solidFill>
-                <a:latin typeface="Calibri"/>
-              </a:rPr>
-              <a:t>50%</a:t>
-            </a:r>
-          </a:p>
-        </p:txBody>
-      </p:sp>
-      <p:sp>
-        <p:nvSpPr>
-          <p:cNvPr id="8" name="TextBox 7"/>
-          <p:cNvSpPr txBox="1"/>
-          <p:nvPr/>
-        </p:nvSpPr>
-        <p:spPr>
-          <a:xfrm>
-            <a:off x="4338218" y="3246120"/>
-            <a:ext cx="3515258" cy="731520"/>
-          </a:xfrm>
-          <a:prstGeom prst="rect">
-            <a:avLst/>
-          </a:prstGeom>
-          <a:noFill/>
-        </p:spPr>
-        <p:txBody>
-          <a:bodyPr wrap="square" anchor="t">
-            <a:spAutoFit/>
-          </a:bodyPr>
-          <a:lstStyle/>
-          <a:p>
-            <a:pPr algn="ctr">
-              <a:lnSpc>
-                <a:spcPct val="100000"/>
-              </a:lnSpc>
-            </a:pPr>
-            <a:r>
-              <a:rPr sz="1400" b="0">
-                <a:solidFill>
-                  <a:srgbClr val="545C6E"/>
-                </a:solidFill>
-                <a:latin typeface="Calibri"/>
-              </a:rPr>
-              <a:t>of impossible budgets caught.
-It misses the other half</a:t>
-            </a:r>
-          </a:p>
-        </p:txBody>
-      </p:sp>
-      <p:sp>
-        <p:nvSpPr>
-          <p:cNvPr id="9" name="TextBox 8"/>
-          <p:cNvSpPr txBox="1"/>
-          <p:nvPr/>
-        </p:nvSpPr>
-        <p:spPr>
-          <a:xfrm>
-            <a:off x="7853476" y="2103120"/>
-            <a:ext cx="3515258" cy="1188720"/>
-          </a:xfrm>
-          <a:prstGeom prst="rect">
-            <a:avLst/>
-          </a:prstGeom>
-          <a:noFill/>
-        </p:spPr>
-        <p:txBody>
-          <a:bodyPr wrap="square" anchor="t">
-            <a:spAutoFit/>
-          </a:bodyPr>
-          <a:lstStyle/>
-          <a:p>
-            <a:pPr algn="ctr">
-              <a:lnSpc>
-                <a:spcPct val="100000"/>
-              </a:lnSpc>
-            </a:pPr>
-            <a:r>
-              <a:rPr sz="6000" b="1">
-                <a:solidFill>
-                  <a:srgbClr val="A85B00"/>
-                </a:solidFill>
-                <a:latin typeface="Calibri"/>
-              </a:rPr>
-              <a:t>1/20</a:t>
-            </a:r>
-          </a:p>
-        </p:txBody>
-      </p:sp>
-      <p:sp>
-        <p:nvSpPr>
-          <p:cNvPr id="10" name="TextBox 9"/>
-          <p:cNvSpPr txBox="1"/>
-          <p:nvPr/>
-        </p:nvSpPr>
-        <p:spPr>
-          <a:xfrm>
-            <a:off x="7853476" y="3246120"/>
-            <a:ext cx="3515258" cy="731520"/>
-          </a:xfrm>
-          <a:prstGeom prst="rect">
-            <a:avLst/>
-          </a:prstGeom>
-          <a:noFill/>
-        </p:spPr>
-        <p:txBody>
-          <a:bodyPr wrap="square" anchor="t">
-            <a:spAutoFit/>
-          </a:bodyPr>
-          <a:lstStyle/>
-          <a:p>
-            <a:pPr algn="ctr">
-              <a:lnSpc>
-                <a:spcPct val="100000"/>
-              </a:lnSpc>
-            </a:pPr>
-            <a:r>
-              <a:rPr sz="1400" b="0">
-                <a:solidFill>
-                  <a:srgbClr val="545C6E"/>
-                </a:solidFill>
-                <a:latin typeface="Calibri"/>
-              </a:rPr>
-              <a:t>trips measured for cost.
-The API limits stopped me</a:t>
-            </a:r>
-          </a:p>
-        </p:txBody>
-      </p:sp>
-      <p:sp>
-        <p:nvSpPr>
-          <p:cNvPr id="11" name="TextBox 10"/>
-          <p:cNvSpPr txBox="1"/>
-          <p:nvPr/>
-        </p:nvSpPr>
-        <p:spPr>
-          <a:xfrm>
-            <a:off x="822960" y="4846320"/>
-            <a:ext cx="10515600" cy="1280160"/>
-          </a:xfrm>
-          <a:prstGeom prst="rect">
-            <a:avLst/>
-          </a:prstGeom>
-          <a:noFill/>
-        </p:spPr>
-        <p:txBody>
-          <a:bodyPr wrap="square" anchor="t">
-            <a:spAutoFit/>
-          </a:bodyPr>
-          <a:lstStyle/>
-          <a:p>
-            <a:pPr algn="l">
-              <a:lnSpc>
-                <a:spcPct val="125000"/>
-              </a:lnSpc>
-            </a:pPr>
-            <a:r>
-              <a:rPr sz="2000" b="1">
-                <a:solidFill>
-                  <a:srgbClr val="161A23"/>
-                </a:solidFill>
-                <a:latin typeface="Calibri"/>
-              </a:rPr>
-              <a:t>All three are in the report, with the evidence.</a:t>
-            </a:r>
-          </a:p>
-          <a:p>
-            <a:pPr algn="l">
-              <a:lnSpc>
-                <a:spcPct val="125000"/>
-              </a:lnSpc>
-            </a:pPr>
-            <a:r>
-              <a:rPr sz="1700" b="0">
-                <a:solidFill>
-                  <a:srgbClr val="545C6E"/>
-                </a:solidFill>
-                <a:latin typeface="Calibri"/>
-              </a:rPr>
-              <a:t>An evaluation that only confirms its author is not an evaluation.</a:t>
-            </a:r>
-          </a:p>
-        </p:txBody>
-      </p:sp>
-    </p:spTree>
-  </p:cSld>
-  <p:clrMapOvr>
-    <a:masterClrMapping/>
-  </p:clrMapOvr>
-</p:sld>
-</file>
-
-<file path=ppt/slides/slide14.xml><?xml version="1.0" encoding="utf-8"?>
-<p:sld xmlns:a="http://schemas.openxmlformats.org/drawingml/2006/main" xmlns:p="http://schemas.openxmlformats.org/presentationml/2006/main" xmlns:r="http://schemas.openxmlformats.org/officeDocument/2006/relationships">
-  <p:cSld>
-    <p:spTree>
-      <p:nvGrpSpPr>
-        <p:cNvPr id="1" name=""/>
-        <p:cNvGrpSpPr/>
-        <p:nvPr/>
-      </p:nvGrpSpPr>
-      <p:grpSpPr/>
-      <p:sp>
-        <p:nvSpPr>
-          <p:cNvPr id="2" name="TextBox 1"/>
-          <p:cNvSpPr txBox="1"/>
-          <p:nvPr/>
-        </p:nvSpPr>
-        <p:spPr>
-          <a:xfrm>
-            <a:off x="822960" y="457200"/>
-            <a:ext cx="10515600" cy="365760"/>
-          </a:xfrm>
-          <a:prstGeom prst="rect">
-            <a:avLst/>
-          </a:prstGeom>
-          <a:noFill/>
-        </p:spPr>
-        <p:txBody>
-          <a:bodyPr wrap="square" anchor="t">
-            <a:spAutoFit/>
-          </a:bodyPr>
-          <a:lstStyle/>
-          <a:p>
-            <a:pPr algn="l">
-              <a:lnSpc>
-                <a:spcPct val="100000"/>
-              </a:lnSpc>
-            </a:pPr>
-            <a:r>
-              <a:rPr sz="1200" b="1">
-                <a:solidFill>
-                  <a:srgbClr val="4338CA"/>
-                </a:solidFill>
-                <a:latin typeface="Calibri"/>
-              </a:rPr>
-              <a:t>13  ·  WHY THIS MATTERS</a:t>
-            </a:r>
-          </a:p>
-        </p:txBody>
-      </p:sp>
-      <p:sp>
-        <p:nvSpPr>
-          <p:cNvPr id="3" name="TextBox 2"/>
-          <p:cNvSpPr txBox="1"/>
-          <p:nvPr/>
-        </p:nvSpPr>
-        <p:spPr>
-          <a:xfrm>
-            <a:off x="822960" y="777240"/>
-            <a:ext cx="10515600" cy="822960"/>
-          </a:xfrm>
-          <a:prstGeom prst="rect">
-            <a:avLst/>
-          </a:prstGeom>
-          <a:noFill/>
-        </p:spPr>
-        <p:txBody>
-          <a:bodyPr wrap="square" anchor="t">
-            <a:spAutoFit/>
-          </a:bodyPr>
-          <a:lstStyle/>
-          <a:p>
-            <a:pPr algn="l">
-              <a:lnSpc>
-                <a:spcPct val="100000"/>
-              </a:lnSpc>
-            </a:pPr>
-            <a:r>
-              <a:rPr sz="3200" b="1">
-                <a:solidFill>
-                  <a:srgbClr val="161A23"/>
-                </a:solidFill>
-                <a:latin typeface="Calibri"/>
-              </a:rPr>
-              <a:t>Beyond one travel planner</a:t>
-            </a:r>
-          </a:p>
-        </p:txBody>
-      </p:sp>
-      <p:sp>
-        <p:nvSpPr>
-          <p:cNvPr id="4" name="Rectangle 3"/>
-          <p:cNvSpPr/>
-          <p:nvPr/>
-        </p:nvSpPr>
-        <p:spPr>
-          <a:xfrm>
-            <a:off x="822960" y="1572768"/>
-            <a:ext cx="1005840" cy="34000"/>
-          </a:xfrm>
-          <a:prstGeom prst="rect">
-            <a:avLst/>
-          </a:prstGeom>
-          <a:solidFill>
-            <a:srgbClr val="4338CA"/>
-          </a:solidFill>
-          <a:ln>
-            <a:noFill/>
-          </a:ln>
-          <a:effectLst/>
-        </p:spPr>
-        <p:style>
-          <a:lnRef idx="1">
-            <a:schemeClr val="accent1"/>
-          </a:lnRef>
-          <a:fillRef idx="3">
-            <a:schemeClr val="accent1"/>
-          </a:fillRef>
-          <a:effectRef idx="2">
-            <a:schemeClr val="accent1"/>
-          </a:effectRef>
-          <a:fontRef idx="minor">
-            <a:schemeClr val="lt1"/>
-          </a:fontRef>
-        </p:style>
-        <p:txBody>
-          <a:bodyPr rtlCol="0" anchor="ctr"/>
-          <a:lstStyle/>
-          <a:p>
-            <a:pPr algn="ctr"/>
-          </a:p>
-        </p:txBody>
-      </p:sp>
       <p:graphicFrame>
         <p:nvGraphicFramePr>
           <p:cNvPr id="5" name="Table 4"/>
@@ -6107,7 +4946,7 @@
         </p:nvGraphicFramePr>
         <p:xfrm>
           <a:off x="822960" y="2011680"/>
-          <a:ext cx="10515599" cy="1828800"/>
+          <a:ext cx="10515599" cy="2560320"/>
         </p:xfrm>
         <a:graphic>
           <a:graphicData uri="http://schemas.openxmlformats.org/drawingml/2006/table">
@@ -6116,8 +4955,9 @@
                 <a:tableStyleId>{5C22544A-7EE6-4342-B048-85BDC9FD1C3A}</a:tableStyleId>
               </a:tblPr>
               <a:tblGrid>
-                <a:gridCol w="477981"/>
-                <a:gridCol w="10037618"/>
+                <a:gridCol w="3250276"/>
+                <a:gridCol w="5162203"/>
+                <a:gridCol w="2103120"/>
               </a:tblGrid>
               <a:tr h="365760">
                 <a:tc>
@@ -6126,13 +4966,13 @@
                     <a:lstStyle/>
                     <a:p>
                       <a:r>
-                        <a:rPr sz="1400" b="1">
+                        <a:rPr sz="1300" b="1">
                           <a:solidFill>
                             <a:srgbClr val="FFFFFF"/>
                           </a:solidFill>
                           <a:latin typeface="Calibri"/>
                         </a:rPr>
-                        <a:t> </a:t>
+                        <a:t>Agent name</a:t>
                       </a:r>
                     </a:p>
                   </a:txBody>
@@ -6148,13 +4988,35 @@
                     <a:lstStyle/>
                     <a:p>
                       <a:r>
-                        <a:rPr sz="1400" b="1">
+                        <a:rPr sz="1300" b="1">
                           <a:solidFill>
                             <a:srgbClr val="FFFFFF"/>
                           </a:solidFill>
                           <a:latin typeface="Calibri"/>
                         </a:rPr>
-                        <a:t>What this project shows</a:t>
+                        <a:t>Its job</a:t>
+                      </a:r>
+                    </a:p>
+                  </a:txBody>
+                  <a:tcPr>
+                    <a:solidFill>
+                      <a:srgbClr val="4338CA"/>
+                    </a:solidFill>
+                  </a:tcPr>
+                </a:tc>
+                <a:tc>
+                  <a:txBody>
+                    <a:bodyPr/>
+                    <a:lstStyle/>
+                    <a:p>
+                      <a:r>
+                        <a:rPr sz="1300" b="1">
+                          <a:solidFill>
+                            <a:srgbClr val="FFFFFF"/>
+                          </a:solidFill>
+                          <a:latin typeface="Calibri"/>
+                        </a:rPr>
+                        <a:t>Uses AI?</a:t>
                       </a:r>
                     </a:p>
                   </a:txBody>
@@ -6172,13 +5034,13 @@
                     <a:lstStyle/>
                     <a:p>
                       <a:r>
-                        <a:rPr sz="1400" b="0">
+                        <a:rPr sz="1300" b="0">
                           <a:solidFill>
                             <a:srgbClr val="161A23"/>
                           </a:solidFill>
                           <a:latin typeface="Calibri"/>
                         </a:rPr>
-                        <a:t>1</a:t>
+                        <a:t>Travel Conversation Assistant</a:t>
                       </a:r>
                     </a:p>
                   </a:txBody>
@@ -6194,13 +5056,35 @@
                     <a:lstStyle/>
                     <a:p>
                       <a:r>
-                        <a:rPr sz="1400" b="0">
+                        <a:rPr sz="1300" b="0">
                           <a:solidFill>
                             <a:srgbClr val="161A23"/>
                           </a:solidFill>
                           <a:latin typeface="Calibri"/>
                         </a:rPr>
-                        <a:t>AI agents are expensive by default, and most of the cost buys work that needs no intelligence</a:t>
+                        <a:t>Asks the traveller for anything missing</a:t>
+                      </a:r>
+                    </a:p>
+                  </a:txBody>
+                  <a:tcPr>
+                    <a:solidFill>
+                      <a:srgbClr val="FFFFFF"/>
+                    </a:solidFill>
+                  </a:tcPr>
+                </a:tc>
+                <a:tc>
+                  <a:txBody>
+                    <a:bodyPr/>
+                    <a:lstStyle/>
+                    <a:p>
+                      <a:r>
+                        <a:rPr sz="1300" b="0">
+                          <a:solidFill>
+                            <a:srgbClr val="161A23"/>
+                          </a:solidFill>
+                          <a:latin typeface="Calibri"/>
+                        </a:rPr>
+                        <a:t>YES</a:t>
                       </a:r>
                     </a:p>
                   </a:txBody>
@@ -6218,13 +5102,13 @@
                     <a:lstStyle/>
                     <a:p>
                       <a:r>
-                        <a:rPr sz="1400" b="0">
+                        <a:rPr sz="1300" b="0">
                           <a:solidFill>
                             <a:srgbClr val="161A23"/>
                           </a:solidFill>
                           <a:latin typeface="Calibri"/>
                         </a:rPr>
-                        <a:t>2</a:t>
+                        <a:t>Travel Preferences Extractor</a:t>
                       </a:r>
                     </a:p>
                   </a:txBody>
@@ -6240,13 +5124,35 @@
                     <a:lstStyle/>
                     <a:p>
                       <a:r>
-                        <a:rPr sz="1400" b="0">
+                        <a:rPr sz="1300" b="0">
                           <a:solidFill>
                             <a:srgbClr val="161A23"/>
                           </a:solidFill>
                           <a:latin typeface="Calibri"/>
                         </a:rPr>
-                        <a:t>Giving an agent a tool does not mean it will use it. Mine skipped tools and still produced confident plans</a:t>
+                        <a:t>Turns the words into exact fields, then checks the budget</a:t>
+                      </a:r>
+                    </a:p>
+                  </a:txBody>
+                  <a:tcPr>
+                    <a:solidFill>
+                      <a:srgbClr val="F7F8FC"/>
+                    </a:solidFill>
+                  </a:tcPr>
+                </a:tc>
+                <a:tc>
+                  <a:txBody>
+                    <a:bodyPr/>
+                    <a:lstStyle/>
+                    <a:p>
+                      <a:r>
+                        <a:rPr sz="1300" b="0">
+                          <a:solidFill>
+                            <a:srgbClr val="161A23"/>
+                          </a:solidFill>
+                          <a:latin typeface="Calibri"/>
+                        </a:rPr>
+                        <a:t>YES</a:t>
                       </a:r>
                     </a:p>
                   </a:txBody>
@@ -6264,13 +5170,13 @@
                     <a:lstStyle/>
                     <a:p>
                       <a:r>
-                        <a:rPr sz="1400" b="0">
+                        <a:rPr sz="1300" b="0">
                           <a:solidFill>
                             <a:srgbClr val="161A23"/>
                           </a:solidFill>
                           <a:latin typeface="Calibri"/>
                         </a:rPr>
-                        <a:t>3</a:t>
+                        <a:t>Flight Search Specialist</a:t>
                       </a:r>
                     </a:p>
                   </a:txBody>
@@ -6286,13 +5192,35 @@
                     <a:lstStyle/>
                     <a:p>
                       <a:r>
-                        <a:rPr sz="1400" b="0">
+                        <a:rPr sz="1300" b="0">
                           <a:solidFill>
                             <a:srgbClr val="161A23"/>
                           </a:solidFill>
                           <a:latin typeface="Calibri"/>
                         </a:rPr>
-                        <a:t>You cannot tell an invented plan from a real one by reading it. It has to be measured</a:t>
+                        <a:t>Finds flights</a:t>
+                      </a:r>
+                    </a:p>
+                  </a:txBody>
+                  <a:tcPr>
+                    <a:solidFill>
+                      <a:srgbClr val="FFFFFF"/>
+                    </a:solidFill>
+                  </a:tcPr>
+                </a:tc>
+                <a:tc>
+                  <a:txBody>
+                    <a:bodyPr/>
+                    <a:lstStyle/>
+                    <a:p>
+                      <a:r>
+                        <a:rPr sz="1300" b="0">
+                          <a:solidFill>
+                            <a:srgbClr val="161A23"/>
+                          </a:solidFill>
+                          <a:latin typeface="Calibri"/>
+                        </a:rPr>
+                        <a:t>no — removed in D</a:t>
                       </a:r>
                     </a:p>
                   </a:txBody>
@@ -6310,13 +5238,13 @@
                     <a:lstStyle/>
                     <a:p>
                       <a:r>
-                        <a:rPr sz="1400" b="0">
+                        <a:rPr sz="1300" b="0">
                           <a:solidFill>
                             <a:srgbClr val="161A23"/>
                           </a:solidFill>
                           <a:latin typeface="Calibri"/>
                         </a:rPr>
-                        <a:t>4</a:t>
+                        <a:t>Hotel Search Specialist</a:t>
                       </a:r>
                     </a:p>
                   </a:txBody>
@@ -6332,13 +5260,171 @@
                     <a:lstStyle/>
                     <a:p>
                       <a:r>
-                        <a:rPr sz="1400" b="0">
+                        <a:rPr sz="1300" b="0">
                           <a:solidFill>
                             <a:srgbClr val="161A23"/>
                           </a:solidFill>
                           <a:latin typeface="Calibri"/>
                         </a:rPr>
-                        <a:t>The cheaper design was also just as accurate, so there is no hidden trade-off being sold here</a:t>
+                        <a:t>Finds hotels</a:t>
+                      </a:r>
+                    </a:p>
+                  </a:txBody>
+                  <a:tcPr>
+                    <a:solidFill>
+                      <a:srgbClr val="F7F8FC"/>
+                    </a:solidFill>
+                  </a:tcPr>
+                </a:tc>
+                <a:tc>
+                  <a:txBody>
+                    <a:bodyPr/>
+                    <a:lstStyle/>
+                    <a:p>
+                      <a:r>
+                        <a:rPr sz="1300" b="0">
+                          <a:solidFill>
+                            <a:srgbClr val="161A23"/>
+                          </a:solidFill>
+                          <a:latin typeface="Calibri"/>
+                        </a:rPr>
+                        <a:t>no — removed in D</a:t>
+                      </a:r>
+                    </a:p>
+                  </a:txBody>
+                  <a:tcPr>
+                    <a:solidFill>
+                      <a:srgbClr val="F7F8FC"/>
+                    </a:solidFill>
+                  </a:tcPr>
+                </a:tc>
+              </a:tr>
+              <a:tr h="365760">
+                <a:tc>
+                  <a:txBody>
+                    <a:bodyPr/>
+                    <a:lstStyle/>
+                    <a:p>
+                      <a:r>
+                        <a:rPr sz="1300" b="0">
+                          <a:solidFill>
+                            <a:srgbClr val="161A23"/>
+                          </a:solidFill>
+                          <a:latin typeface="Calibri"/>
+                        </a:rPr>
+                        <a:t>Activities Specialist</a:t>
+                      </a:r>
+                    </a:p>
+                  </a:txBody>
+                  <a:tcPr>
+                    <a:solidFill>
+                      <a:srgbClr val="FFFFFF"/>
+                    </a:solidFill>
+                  </a:tcPr>
+                </a:tc>
+                <a:tc>
+                  <a:txBody>
+                    <a:bodyPr/>
+                    <a:lstStyle/>
+                    <a:p>
+                      <a:r>
+                        <a:rPr sz="1300" b="0">
+                          <a:solidFill>
+                            <a:srgbClr val="161A23"/>
+                          </a:solidFill>
+                          <a:latin typeface="Calibri"/>
+                        </a:rPr>
+                        <a:t>Finds attractions and restaurants</a:t>
+                      </a:r>
+                    </a:p>
+                  </a:txBody>
+                  <a:tcPr>
+                    <a:solidFill>
+                      <a:srgbClr val="FFFFFF"/>
+                    </a:solidFill>
+                  </a:tcPr>
+                </a:tc>
+                <a:tc>
+                  <a:txBody>
+                    <a:bodyPr/>
+                    <a:lstStyle/>
+                    <a:p>
+                      <a:r>
+                        <a:rPr sz="1300" b="0">
+                          <a:solidFill>
+                            <a:srgbClr val="161A23"/>
+                          </a:solidFill>
+                          <a:latin typeface="Calibri"/>
+                        </a:rPr>
+                        <a:t>no — removed in D</a:t>
+                      </a:r>
+                    </a:p>
+                  </a:txBody>
+                  <a:tcPr>
+                    <a:solidFill>
+                      <a:srgbClr val="FFFFFF"/>
+                    </a:solidFill>
+                  </a:tcPr>
+                </a:tc>
+              </a:tr>
+              <a:tr h="365760">
+                <a:tc>
+                  <a:txBody>
+                    <a:bodyPr/>
+                    <a:lstStyle/>
+                    <a:p>
+                      <a:r>
+                        <a:rPr sz="1300" b="0">
+                          <a:solidFill>
+                            <a:srgbClr val="161A23"/>
+                          </a:solidFill>
+                          <a:latin typeface="Calibri"/>
+                        </a:rPr>
+                        <a:t>Itinerary Coordinator</a:t>
+                      </a:r>
+                    </a:p>
+                  </a:txBody>
+                  <a:tcPr>
+                    <a:solidFill>
+                      <a:srgbClr val="F7F8FC"/>
+                    </a:solidFill>
+                  </a:tcPr>
+                </a:tc>
+                <a:tc>
+                  <a:txBody>
+                    <a:bodyPr/>
+                    <a:lstStyle/>
+                    <a:p>
+                      <a:r>
+                        <a:rPr sz="1300" b="0">
+                          <a:solidFill>
+                            <a:srgbClr val="161A23"/>
+                          </a:solidFill>
+                          <a:latin typeface="Calibri"/>
+                        </a:rPr>
+                        <a:t>Writes the day-by-day plan from what was found</a:t>
+                      </a:r>
+                    </a:p>
+                  </a:txBody>
+                  <a:tcPr>
+                    <a:solidFill>
+                      <a:srgbClr val="F7F8FC"/>
+                    </a:solidFill>
+                  </a:tcPr>
+                </a:tc>
+                <a:tc>
+                  <a:txBody>
+                    <a:bodyPr/>
+                    <a:lstStyle/>
+                    <a:p>
+                      <a:r>
+                        <a:rPr sz="1300" b="0">
+                          <a:solidFill>
+                            <a:srgbClr val="161A23"/>
+                          </a:solidFill>
+                          <a:latin typeface="Calibri"/>
+                        </a:rPr>
+                        <a:t>YES</a:t>
                       </a:r>
                     </a:p>
                   </a:txBody>
@@ -6361,338 +5447,7 @@
         </p:nvSpPr>
         <p:spPr>
           <a:xfrm>
-            <a:off x="822960" y="5029200"/>
-            <a:ext cx="10515600" cy="1005840"/>
-          </a:xfrm>
-          <a:prstGeom prst="rect">
-            <a:avLst/>
-          </a:prstGeom>
-          <a:noFill/>
-        </p:spPr>
-        <p:txBody>
-          <a:bodyPr wrap="square" anchor="t">
-            <a:spAutoFit/>
-          </a:bodyPr>
-          <a:lstStyle/>
-          <a:p>
-            <a:pPr algn="l">
-              <a:lnSpc>
-                <a:spcPct val="100000"/>
-              </a:lnSpc>
-            </a:pPr>
-            <a:r>
-              <a:rPr sz="1900" b="1">
-                <a:solidFill>
-                  <a:srgbClr val="4338CA"/>
-                </a:solidFill>
-                <a:latin typeface="Calibri"/>
-              </a:rPr>
-              <a:t>Anyone building with AI agents faces this choice. Most do not measure it.</a:t>
-            </a:r>
-          </a:p>
-        </p:txBody>
-      </p:sp>
-    </p:spTree>
-  </p:cSld>
-  <p:clrMapOvr>
-    <a:masterClrMapping/>
-  </p:clrMapOvr>
-</p:sld>
-</file>
-
-<file path=ppt/slides/slide15.xml><?xml version="1.0" encoding="utf-8"?>
-<p:sld xmlns:a="http://schemas.openxmlformats.org/drawingml/2006/main" xmlns:p="http://schemas.openxmlformats.org/presentationml/2006/main" xmlns:r="http://schemas.openxmlformats.org/officeDocument/2006/relationships">
-  <p:cSld>
-    <p:bg>
-      <p:bgPr>
-        <a:solidFill>
-          <a:srgbClr val="1E1B4B"/>
-        </a:solidFill>
-        <a:effectLst/>
-      </p:bgPr>
-    </p:bg>
-    <p:spTree>
-      <p:nvGrpSpPr>
-        <p:cNvPr id="1" name=""/>
-        <p:cNvGrpSpPr/>
-        <p:nvPr/>
-      </p:nvGrpSpPr>
-      <p:grpSpPr/>
-      <p:sp>
-        <p:nvSpPr>
-          <p:cNvPr id="2" name="TextBox 1"/>
-          <p:cNvSpPr txBox="1"/>
-          <p:nvPr/>
-        </p:nvSpPr>
-        <p:spPr>
-          <a:xfrm>
-            <a:off x="1005840" y="1554480"/>
-            <a:ext cx="10241280" cy="457200"/>
-          </a:xfrm>
-          <a:prstGeom prst="rect">
-            <a:avLst/>
-          </a:prstGeom>
-          <a:noFill/>
-        </p:spPr>
-        <p:txBody>
-          <a:bodyPr wrap="square" anchor="t">
-            <a:spAutoFit/>
-          </a:bodyPr>
-          <a:lstStyle/>
-          <a:p>
-            <a:pPr algn="l">
-              <a:lnSpc>
-                <a:spcPct val="100000"/>
-              </a:lnSpc>
-            </a:pPr>
-            <a:r>
-              <a:rPr sz="1400" b="1">
-                <a:solidFill>
-                  <a:srgbClr val="9CA3F5"/>
-                </a:solidFill>
-                <a:latin typeface="Calibri"/>
-              </a:rPr>
-              <a:t>IN ONE SENTENCE</a:t>
-            </a:r>
-          </a:p>
-        </p:txBody>
-      </p:sp>
-      <p:sp>
-        <p:nvSpPr>
-          <p:cNvPr id="3" name="TextBox 2"/>
-          <p:cNvSpPr txBox="1"/>
-          <p:nvPr/>
-        </p:nvSpPr>
-        <p:spPr>
-          <a:xfrm>
-            <a:off x="1005840" y="2011680"/>
-            <a:ext cx="10241280" cy="2194560"/>
-          </a:xfrm>
-          <a:prstGeom prst="rect">
-            <a:avLst/>
-          </a:prstGeom>
-          <a:noFill/>
-        </p:spPr>
-        <p:txBody>
-          <a:bodyPr wrap="square" anchor="t">
-            <a:spAutoFit/>
-          </a:bodyPr>
-          <a:lstStyle/>
-          <a:p>
-            <a:pPr algn="l">
-              <a:lnSpc>
-                <a:spcPct val="120000"/>
-              </a:lnSpc>
-            </a:pPr>
-            <a:r>
-              <a:rPr sz="3600" b="1">
-                <a:solidFill>
-                  <a:srgbClr val="FFFFFF"/>
-                </a:solidFill>
-                <a:latin typeface="Calibri"/>
-              </a:rPr>
-              <a:t>Use AI where a step needs thinking.</a:t>
-            </a:r>
-          </a:p>
-          <a:p>
-            <a:pPr algn="l">
-              <a:lnSpc>
-                <a:spcPct val="120000"/>
-              </a:lnSpc>
-            </a:pPr>
-            <a:r>
-              <a:rPr sz="3600" b="1">
-                <a:solidFill>
-                  <a:srgbClr val="6EE7DF"/>
-                </a:solidFill>
-                <a:latin typeface="Calibri"/>
-              </a:rPr>
-              <a:t>Everywhere else, it is just a bill.</a:t>
-            </a:r>
-          </a:p>
-        </p:txBody>
-      </p:sp>
-      <p:sp>
-        <p:nvSpPr>
-          <p:cNvPr id="4" name="Rectangle 3"/>
-          <p:cNvSpPr/>
-          <p:nvPr/>
-        </p:nvSpPr>
-        <p:spPr>
-          <a:xfrm>
-            <a:off x="1005840" y="4389120"/>
-            <a:ext cx="1463040" cy="34000"/>
-          </a:xfrm>
-          <a:prstGeom prst="rect">
-            <a:avLst/>
-          </a:prstGeom>
-          <a:solidFill>
-            <a:srgbClr val="0EA5A4"/>
-          </a:solidFill>
-          <a:ln>
-            <a:noFill/>
-          </a:ln>
-          <a:effectLst/>
-        </p:spPr>
-        <p:style>
-          <a:lnRef idx="1">
-            <a:schemeClr val="accent1"/>
-          </a:lnRef>
-          <a:fillRef idx="3">
-            <a:schemeClr val="accent1"/>
-          </a:fillRef>
-          <a:effectRef idx="2">
-            <a:schemeClr val="accent1"/>
-          </a:effectRef>
-          <a:fontRef idx="minor">
-            <a:schemeClr val="lt1"/>
-          </a:fontRef>
-        </p:style>
-        <p:txBody>
-          <a:bodyPr rtlCol="0" anchor="ctr"/>
-          <a:lstStyle/>
-          <a:p>
-            <a:pPr algn="ctr"/>
-          </a:p>
-        </p:txBody>
-      </p:sp>
-      <p:sp>
-        <p:nvSpPr>
-          <p:cNvPr id="5" name="TextBox 4"/>
-          <p:cNvSpPr txBox="1"/>
-          <p:nvPr/>
-        </p:nvSpPr>
-        <p:spPr>
-          <a:xfrm>
-            <a:off x="1005840" y="4709160"/>
-            <a:ext cx="10241280" cy="1463040"/>
-          </a:xfrm>
-          <a:prstGeom prst="rect">
-            <a:avLst/>
-          </a:prstGeom>
-          <a:noFill/>
-        </p:spPr>
-        <p:txBody>
-          <a:bodyPr wrap="square" anchor="t">
-            <a:spAutoFit/>
-          </a:bodyPr>
-          <a:lstStyle/>
-          <a:p>
-            <a:pPr algn="l">
-              <a:lnSpc>
-                <a:spcPct val="130000"/>
-              </a:lnSpc>
-            </a:pPr>
-            <a:r>
-              <a:rPr sz="1900" b="0">
-                <a:solidFill>
-                  <a:srgbClr val="C7D2FE"/>
-                </a:solidFill>
-                <a:latin typeface="Calibri"/>
-              </a:rPr>
-              <a:t>15x cheaper, no loss of accuracy, on 1 trip run 5 times.</a:t>
-            </a:r>
-          </a:p>
-          <a:p>
-            <a:pPr algn="l">
-              <a:lnSpc>
-                <a:spcPct val="130000"/>
-              </a:lnSpc>
-            </a:pPr>
-            <a:r>
-              <a:rPr sz="800" b="0">
-                <a:solidFill>
-                  <a:srgbClr val="FFFFFF"/>
-                </a:solidFill>
-                <a:latin typeface="Calibri"/>
-              </a:rPr>
-              <a:t/>
-            </a:r>
-          </a:p>
-          <a:p>
-            <a:pPr algn="l">
-              <a:lnSpc>
-                <a:spcPct val="130000"/>
-              </a:lnSpc>
-            </a:pPr>
-            <a:r>
-              <a:rPr sz="1500" b="0">
-                <a:solidFill>
-                  <a:srgbClr val="9CA3F5"/>
-                </a:solidFill>
-                <a:latin typeface="Calibri"/>
-              </a:rPr>
-              <a:t>Narrow coverage is the gap, and everything needed to widen it is saved and runs without keys.</a:t>
-            </a:r>
-          </a:p>
-        </p:txBody>
-      </p:sp>
-    </p:spTree>
-  </p:cSld>
-  <p:clrMapOvr>
-    <a:masterClrMapping/>
-  </p:clrMapOvr>
-</p:sld>
-</file>
-
-<file path=ppt/slides/slide2.xml><?xml version="1.0" encoding="utf-8"?>
-<p:sld xmlns:a="http://schemas.openxmlformats.org/drawingml/2006/main" xmlns:p="http://schemas.openxmlformats.org/presentationml/2006/main" xmlns:r="http://schemas.openxmlformats.org/officeDocument/2006/relationships">
-  <p:cSld>
-    <p:spTree>
-      <p:nvGrpSpPr>
-        <p:cNvPr id="1" name=""/>
-        <p:cNvGrpSpPr/>
-        <p:nvPr/>
-      </p:nvGrpSpPr>
-      <p:grpSpPr/>
-      <p:sp>
-        <p:nvSpPr>
-          <p:cNvPr id="2" name="TextBox 1"/>
-          <p:cNvSpPr txBox="1"/>
-          <p:nvPr/>
-        </p:nvSpPr>
-        <p:spPr>
-          <a:xfrm>
-            <a:off x="822960" y="457200"/>
-            <a:ext cx="10515600" cy="365760"/>
-          </a:xfrm>
-          <a:prstGeom prst="rect">
-            <a:avLst/>
-          </a:prstGeom>
-          <a:noFill/>
-        </p:spPr>
-        <p:txBody>
-          <a:bodyPr wrap="square" anchor="t">
-            <a:spAutoFit/>
-          </a:bodyPr>
-          <a:lstStyle/>
-          <a:p>
-            <a:pPr algn="l">
-              <a:lnSpc>
-                <a:spcPct val="100000"/>
-              </a:lnSpc>
-            </a:pPr>
-            <a:r>
-              <a:rPr sz="1200" b="1">
-                <a:solidFill>
-                  <a:srgbClr val="4338CA"/>
-                </a:solidFill>
-                <a:latin typeface="Calibri"/>
-              </a:rPr>
-              <a:t>1  ·  THE PROBLEM</a:t>
-            </a:r>
-          </a:p>
-        </p:txBody>
-      </p:sp>
-      <p:sp>
-        <p:nvSpPr>
-          <p:cNvPr id="3" name="TextBox 2"/>
-          <p:cNvSpPr txBox="1"/>
-          <p:nvPr/>
-        </p:nvSpPr>
-        <p:spPr>
-          <a:xfrm>
-            <a:off x="822960" y="777240"/>
+            <a:off x="822960" y="5394960"/>
             <a:ext cx="10515600" cy="822960"/>
           </a:xfrm>
           <a:prstGeom prst="rect">
@@ -6712,349 +5467,13 @@
               </a:lnSpc>
             </a:pPr>
             <a:r>
-              <a:rPr sz="3200" b="1">
+              <a:rPr sz="1800" b="1">
                 <a:solidFill>
-                  <a:srgbClr val="161A23"/>
+                  <a:srgbClr val="4338CA"/>
                 </a:solidFill>
                 <a:latin typeface="Calibri"/>
               </a:rPr>
-              <a:t>AI is paid to do work that needs no thinking</a:t>
-            </a:r>
-          </a:p>
-        </p:txBody>
-      </p:sp>
-      <p:sp>
-        <p:nvSpPr>
-          <p:cNvPr id="4" name="Rectangle 3"/>
-          <p:cNvSpPr/>
-          <p:nvPr/>
-        </p:nvSpPr>
-        <p:spPr>
-          <a:xfrm>
-            <a:off x="822960" y="1572768"/>
-            <a:ext cx="1005840" cy="34000"/>
-          </a:xfrm>
-          <a:prstGeom prst="rect">
-            <a:avLst/>
-          </a:prstGeom>
-          <a:solidFill>
-            <a:srgbClr val="4338CA"/>
-          </a:solidFill>
-          <a:ln>
-            <a:noFill/>
-          </a:ln>
-          <a:effectLst/>
-        </p:spPr>
-        <p:style>
-          <a:lnRef idx="1">
-            <a:schemeClr val="accent1"/>
-          </a:lnRef>
-          <a:fillRef idx="3">
-            <a:schemeClr val="accent1"/>
-          </a:fillRef>
-          <a:effectRef idx="2">
-            <a:schemeClr val="accent1"/>
-          </a:effectRef>
-          <a:fontRef idx="minor">
-            <a:schemeClr val="lt1"/>
-          </a:fontRef>
-        </p:style>
-        <p:txBody>
-          <a:bodyPr rtlCol="0" anchor="ctr"/>
-          <a:lstStyle/>
-          <a:p>
-            <a:pPr algn="ctr"/>
-          </a:p>
-        </p:txBody>
-      </p:sp>
-      <p:sp>
-        <p:nvSpPr>
-          <p:cNvPr id="5" name="TextBox 4"/>
-          <p:cNvSpPr txBox="1"/>
-          <p:nvPr/>
-        </p:nvSpPr>
-        <p:spPr>
-          <a:xfrm>
-            <a:off x="822960" y="2103120"/>
-            <a:ext cx="3515258" cy="1188720"/>
-          </a:xfrm>
-          <a:prstGeom prst="rect">
-            <a:avLst/>
-          </a:prstGeom>
-          <a:noFill/>
-        </p:spPr>
-        <p:txBody>
-          <a:bodyPr wrap="square" anchor="t">
-            <a:spAutoFit/>
-          </a:bodyPr>
-          <a:lstStyle/>
-          <a:p>
-            <a:pPr algn="ctr">
-              <a:lnSpc>
-                <a:spcPct val="100000"/>
-              </a:lnSpc>
-            </a:pPr>
-            <a:r>
-              <a:rPr sz="6000" b="1">
-                <a:solidFill>
-                  <a:srgbClr val="A85B00"/>
-                </a:solidFill>
-                <a:latin typeface="Calibri"/>
-              </a:rPr>
-              <a:t>21</a:t>
-            </a:r>
-          </a:p>
-        </p:txBody>
-      </p:sp>
-      <p:sp>
-        <p:nvSpPr>
-          <p:cNvPr id="6" name="TextBox 5"/>
-          <p:cNvSpPr txBox="1"/>
-          <p:nvPr/>
-        </p:nvSpPr>
-        <p:spPr>
-          <a:xfrm>
-            <a:off x="822960" y="3246120"/>
-            <a:ext cx="3515258" cy="731520"/>
-          </a:xfrm>
-          <a:prstGeom prst="rect">
-            <a:avLst/>
-          </a:prstGeom>
-          <a:noFill/>
-        </p:spPr>
-        <p:txBody>
-          <a:bodyPr wrap="square" anchor="t">
-            <a:spAutoFit/>
-          </a:bodyPr>
-          <a:lstStyle/>
-          <a:p>
-            <a:pPr algn="ctr">
-              <a:lnSpc>
-                <a:spcPct val="100000"/>
-              </a:lnSpc>
-            </a:pPr>
-            <a:r>
-              <a:rPr sz="1400" b="0">
-                <a:solidFill>
-                  <a:srgbClr val="545C6E"/>
-                </a:solidFill>
-                <a:latin typeface="Calibri"/>
-              </a:rPr>
-              <a:t>AI calls to plan one trip
-when agents fetch the data</a:t>
-            </a:r>
-          </a:p>
-        </p:txBody>
-      </p:sp>
-      <p:sp>
-        <p:nvSpPr>
-          <p:cNvPr id="7" name="TextBox 6"/>
-          <p:cNvSpPr txBox="1"/>
-          <p:nvPr/>
-        </p:nvSpPr>
-        <p:spPr>
-          <a:xfrm>
-            <a:off x="4338218" y="2103120"/>
-            <a:ext cx="3515258" cy="1188720"/>
-          </a:xfrm>
-          <a:prstGeom prst="rect">
-            <a:avLst/>
-          </a:prstGeom>
-          <a:noFill/>
-        </p:spPr>
-        <p:txBody>
-          <a:bodyPr wrap="square" anchor="t">
-            <a:spAutoFit/>
-          </a:bodyPr>
-          <a:lstStyle/>
-          <a:p>
-            <a:pPr algn="ctr">
-              <a:lnSpc>
-                <a:spcPct val="100000"/>
-              </a:lnSpc>
-            </a:pPr>
-            <a:r>
-              <a:rPr sz="6000" b="1">
-                <a:solidFill>
-                  <a:srgbClr val="A85B00"/>
-                </a:solidFill>
-                <a:latin typeface="Calibri"/>
-              </a:rPr>
-              <a:t>2</a:t>
-            </a:r>
-          </a:p>
-        </p:txBody>
-      </p:sp>
-      <p:sp>
-        <p:nvSpPr>
-          <p:cNvPr id="8" name="TextBox 7"/>
-          <p:cNvSpPr txBox="1"/>
-          <p:nvPr/>
-        </p:nvSpPr>
-        <p:spPr>
-          <a:xfrm>
-            <a:off x="4338218" y="3246120"/>
-            <a:ext cx="3515258" cy="731520"/>
-          </a:xfrm>
-          <a:prstGeom prst="rect">
-            <a:avLst/>
-          </a:prstGeom>
-          <a:noFill/>
-        </p:spPr>
-        <p:txBody>
-          <a:bodyPr wrap="square" anchor="t">
-            <a:spAutoFit/>
-          </a:bodyPr>
-          <a:lstStyle/>
-          <a:p>
-            <a:pPr algn="ctr">
-              <a:lnSpc>
-                <a:spcPct val="100000"/>
-              </a:lnSpc>
-            </a:pPr>
-            <a:r>
-              <a:rPr sz="1400" b="0">
-                <a:solidFill>
-                  <a:srgbClr val="545C6E"/>
-                </a:solidFill>
-                <a:latin typeface="Calibri"/>
-              </a:rPr>
-              <a:t>AI calls for the same trip
-when normal code fetches it</a:t>
-            </a:r>
-          </a:p>
-        </p:txBody>
-      </p:sp>
-      <p:sp>
-        <p:nvSpPr>
-          <p:cNvPr id="9" name="TextBox 8"/>
-          <p:cNvSpPr txBox="1"/>
-          <p:nvPr/>
-        </p:nvSpPr>
-        <p:spPr>
-          <a:xfrm>
-            <a:off x="7853476" y="2103120"/>
-            <a:ext cx="3515258" cy="1188720"/>
-          </a:xfrm>
-          <a:prstGeom prst="rect">
-            <a:avLst/>
-          </a:prstGeom>
-          <a:noFill/>
-        </p:spPr>
-        <p:txBody>
-          <a:bodyPr wrap="square" anchor="t">
-            <a:spAutoFit/>
-          </a:bodyPr>
-          <a:lstStyle/>
-          <a:p>
-            <a:pPr algn="ctr">
-              <a:lnSpc>
-                <a:spcPct val="100000"/>
-              </a:lnSpc>
-            </a:pPr>
-            <a:r>
-              <a:rPr sz="6000" b="1">
-                <a:solidFill>
-                  <a:srgbClr val="A85B00"/>
-                </a:solidFill>
-                <a:latin typeface="Calibri"/>
-              </a:rPr>
-              <a:t>15x</a:t>
-            </a:r>
-          </a:p>
-        </p:txBody>
-      </p:sp>
-      <p:sp>
-        <p:nvSpPr>
-          <p:cNvPr id="10" name="TextBox 9"/>
-          <p:cNvSpPr txBox="1"/>
-          <p:nvPr/>
-        </p:nvSpPr>
-        <p:spPr>
-          <a:xfrm>
-            <a:off x="7853476" y="3246120"/>
-            <a:ext cx="3515258" cy="731520"/>
-          </a:xfrm>
-          <a:prstGeom prst="rect">
-            <a:avLst/>
-          </a:prstGeom>
-          <a:noFill/>
-        </p:spPr>
-        <p:txBody>
-          <a:bodyPr wrap="square" anchor="t">
-            <a:spAutoFit/>
-          </a:bodyPr>
-          <a:lstStyle/>
-          <a:p>
-            <a:pPr algn="ctr">
-              <a:lnSpc>
-                <a:spcPct val="100000"/>
-              </a:lnSpc>
-            </a:pPr>
-            <a:r>
-              <a:rPr sz="1400" b="0">
-                <a:solidFill>
-                  <a:srgbClr val="545C6E"/>
-                </a:solidFill>
-                <a:latin typeface="Calibri"/>
-              </a:rPr>
-              <a:t>more text sent to the AI,
-same finished plan</a:t>
-            </a:r>
-          </a:p>
-        </p:txBody>
-      </p:sp>
-      <p:sp>
-        <p:nvSpPr>
-          <p:cNvPr id="11" name="TextBox 10"/>
-          <p:cNvSpPr txBox="1"/>
-          <p:nvPr/>
-        </p:nvSpPr>
-        <p:spPr>
-          <a:xfrm>
-            <a:off x="822960" y="4846320"/>
-            <a:ext cx="10515600" cy="1280160"/>
-          </a:xfrm>
-          <a:prstGeom prst="rect">
-            <a:avLst/>
-          </a:prstGeom>
-          <a:noFill/>
-        </p:spPr>
-        <p:txBody>
-          <a:bodyPr wrap="square" anchor="t">
-            <a:spAutoFit/>
-          </a:bodyPr>
-          <a:lstStyle/>
-          <a:p>
-            <a:pPr algn="l">
-              <a:lnSpc>
-                <a:spcPct val="125000"/>
-              </a:lnSpc>
-            </a:pPr>
-            <a:r>
-              <a:rPr sz="2100" b="1">
-                <a:solidFill>
-                  <a:srgbClr val="161A23"/>
-                </a:solidFill>
-                <a:latin typeface="Calibri"/>
-              </a:rPr>
-              <a:t>Looking up a flight price is one web request. It needs no thinking.</a:t>
-            </a:r>
-          </a:p>
-          <a:p>
-            <a:pPr algn="l">
-              <a:lnSpc>
-                <a:spcPct val="125000"/>
-              </a:lnSpc>
-            </a:pPr>
-            <a:r>
-              <a:rPr sz="1700" b="0">
-                <a:solidFill>
-                  <a:srgbClr val="545C6E"/>
-                </a:solidFill>
-                <a:latin typeface="Calibri"/>
-              </a:rPr>
-              <a:t>But when an AI agent does the looking up, you pay for every step it takes to decide.</a:t>
+              <a:t>The three search agents were removed. Plain code does their job for a fraction of the cost.</a:t>
             </a:r>
           </a:p>
         </p:txBody>
@@ -7111,675 +5530,7 @@
                 </a:solidFill>
                 <a:latin typeface="Calibri"/>
               </a:rPr>
-              <a:t>2  ·  MY SOLUTION</a:t>
-            </a:r>
-          </a:p>
-        </p:txBody>
-      </p:sp>
-      <p:sp>
-        <p:nvSpPr>
-          <p:cNvPr id="3" name="TextBox 2"/>
-          <p:cNvSpPr txBox="1"/>
-          <p:nvPr/>
-        </p:nvSpPr>
-        <p:spPr>
-          <a:xfrm>
-            <a:off x="822960" y="777240"/>
-            <a:ext cx="10515600" cy="822960"/>
-          </a:xfrm>
-          <a:prstGeom prst="rect">
-            <a:avLst/>
-          </a:prstGeom>
-          <a:noFill/>
-        </p:spPr>
-        <p:txBody>
-          <a:bodyPr wrap="square" anchor="t">
-            <a:spAutoFit/>
-          </a:bodyPr>
-          <a:lstStyle/>
-          <a:p>
-            <a:pPr algn="l">
-              <a:lnSpc>
-                <a:spcPct val="100000"/>
-              </a:lnSpc>
-            </a:pPr>
-            <a:r>
-              <a:rPr sz="3200" b="1">
-                <a:solidFill>
-                  <a:srgbClr val="161A23"/>
-                </a:solidFill>
-                <a:latin typeface="Calibri"/>
-              </a:rPr>
-              <a:t>One rule, applied to every step</a:t>
-            </a:r>
-          </a:p>
-        </p:txBody>
-      </p:sp>
-      <p:sp>
-        <p:nvSpPr>
-          <p:cNvPr id="4" name="Rectangle 3"/>
-          <p:cNvSpPr/>
-          <p:nvPr/>
-        </p:nvSpPr>
-        <p:spPr>
-          <a:xfrm>
-            <a:off x="822960" y="1572768"/>
-            <a:ext cx="1005840" cy="34000"/>
-          </a:xfrm>
-          <a:prstGeom prst="rect">
-            <a:avLst/>
-          </a:prstGeom>
-          <a:solidFill>
-            <a:srgbClr val="4338CA"/>
-          </a:solidFill>
-          <a:ln>
-            <a:noFill/>
-          </a:ln>
-          <a:effectLst/>
-        </p:spPr>
-        <p:style>
-          <a:lnRef idx="1">
-            <a:schemeClr val="accent1"/>
-          </a:lnRef>
-          <a:fillRef idx="3">
-            <a:schemeClr val="accent1"/>
-          </a:fillRef>
-          <a:effectRef idx="2">
-            <a:schemeClr val="accent1"/>
-          </a:effectRef>
-          <a:fontRef idx="minor">
-            <a:schemeClr val="lt1"/>
-          </a:fontRef>
-        </p:style>
-        <p:txBody>
-          <a:bodyPr rtlCol="0" anchor="ctr"/>
-          <a:lstStyle/>
-          <a:p>
-            <a:pPr algn="ctr"/>
-          </a:p>
-        </p:txBody>
-      </p:sp>
-      <p:sp>
-        <p:nvSpPr>
-          <p:cNvPr id="5" name="TextBox 4"/>
-          <p:cNvSpPr txBox="1"/>
-          <p:nvPr/>
-        </p:nvSpPr>
-        <p:spPr>
-          <a:xfrm>
-            <a:off x="822960" y="2011680"/>
-            <a:ext cx="10515600" cy="1280160"/>
-          </a:xfrm>
-          <a:prstGeom prst="rect">
-            <a:avLst/>
-          </a:prstGeom>
-          <a:noFill/>
-        </p:spPr>
-        <p:txBody>
-          <a:bodyPr wrap="square" anchor="t">
-            <a:spAutoFit/>
-          </a:bodyPr>
-          <a:lstStyle/>
-          <a:p>
-            <a:pPr algn="l">
-              <a:lnSpc>
-                <a:spcPct val="100000"/>
-              </a:lnSpc>
-            </a:pPr>
-            <a:r>
-              <a:rPr sz="3200" b="1">
-                <a:solidFill>
-                  <a:srgbClr val="4338CA"/>
-                </a:solidFill>
-                <a:latin typeface="Calibri"/>
-              </a:rPr>
-              <a:t>Could I write this step as ordinary code?</a:t>
-            </a:r>
-          </a:p>
-        </p:txBody>
-      </p:sp>
-      <p:graphicFrame>
-        <p:nvGraphicFramePr>
-          <p:cNvPr id="6" name="Table 5"/>
-          <p:cNvGraphicFramePr>
-            <a:graphicFrameLocks noGrp="1"/>
-          </p:cNvGraphicFramePr>
-          <p:nvPr/>
-        </p:nvGraphicFramePr>
-        <p:xfrm>
-          <a:off x="822960" y="3200400"/>
-          <a:ext cx="10515598" cy="1097280"/>
-        </p:xfrm>
-        <a:graphic>
-          <a:graphicData uri="http://schemas.openxmlformats.org/drawingml/2006/table">
-            <a:tbl>
-              <a:tblPr firstRow="1" bandRow="1">
-                <a:tableStyleId>{5C22544A-7EE6-4342-B048-85BDC9FD1C3A}</a:tableStyleId>
-              </a:tblPr>
-              <a:tblGrid>
-                <a:gridCol w="2426676"/>
-                <a:gridCol w="1617784"/>
-                <a:gridCol w="6471138"/>
-              </a:tblGrid>
-              <a:tr h="365760">
-                <a:tc>
-                  <a:txBody>
-                    <a:bodyPr/>
-                    <a:lstStyle/>
-                    <a:p>
-                      <a:r>
-                        <a:rPr sz="1400" b="1">
-                          <a:solidFill>
-                            <a:srgbClr val="FFFFFF"/>
-                          </a:solidFill>
-                          <a:latin typeface="Calibri"/>
-                        </a:rPr>
-                        <a:t>Answer</a:t>
-                      </a:r>
-                    </a:p>
-                  </a:txBody>
-                  <a:tcPr>
-                    <a:solidFill>
-                      <a:srgbClr val="4338CA"/>
-                    </a:solidFill>
-                  </a:tcPr>
-                </a:tc>
-                <a:tc>
-                  <a:txBody>
-                    <a:bodyPr/>
-                    <a:lstStyle/>
-                    <a:p>
-                      <a:r>
-                        <a:rPr sz="1400" b="1">
-                          <a:solidFill>
-                            <a:srgbClr val="FFFFFF"/>
-                          </a:solidFill>
-                          <a:latin typeface="Calibri"/>
-                        </a:rPr>
-                        <a:t>So</a:t>
-                      </a:r>
-                    </a:p>
-                  </a:txBody>
-                  <a:tcPr>
-                    <a:solidFill>
-                      <a:srgbClr val="4338CA"/>
-                    </a:solidFill>
-                  </a:tcPr>
-                </a:tc>
-                <a:tc>
-                  <a:txBody>
-                    <a:bodyPr/>
-                    <a:lstStyle/>
-                    <a:p>
-                      <a:r>
-                        <a:rPr sz="1400" b="1">
-                          <a:solidFill>
-                            <a:srgbClr val="FFFFFF"/>
-                          </a:solidFill>
-                          <a:latin typeface="Calibri"/>
-                        </a:rPr>
-                        <a:t>Which steps</a:t>
-                      </a:r>
-                    </a:p>
-                  </a:txBody>
-                  <a:tcPr>
-                    <a:solidFill>
-                      <a:srgbClr val="4338CA"/>
-                    </a:solidFill>
-                  </a:tcPr>
-                </a:tc>
-              </a:tr>
-              <a:tr h="365760">
-                <a:tc>
-                  <a:txBody>
-                    <a:bodyPr/>
-                    <a:lstStyle/>
-                    <a:p>
-                      <a:r>
-                        <a:rPr sz="1400" b="0">
-                          <a:solidFill>
-                            <a:srgbClr val="161A23"/>
-                          </a:solidFill>
-                          <a:latin typeface="Calibri"/>
-                        </a:rPr>
-                        <a:t>No — it needs judgement</a:t>
-                      </a:r>
-                    </a:p>
-                  </a:txBody>
-                  <a:tcPr>
-                    <a:solidFill>
-                      <a:srgbClr val="FFFFFF"/>
-                    </a:solidFill>
-                  </a:tcPr>
-                </a:tc>
-                <a:tc>
-                  <a:txBody>
-                    <a:bodyPr/>
-                    <a:lstStyle/>
-                    <a:p>
-                      <a:r>
-                        <a:rPr sz="1400" b="0">
-                          <a:solidFill>
-                            <a:srgbClr val="161A23"/>
-                          </a:solidFill>
-                          <a:latin typeface="Calibri"/>
-                        </a:rPr>
-                        <a:t>use AI</a:t>
-                      </a:r>
-                    </a:p>
-                  </a:txBody>
-                  <a:tcPr>
-                    <a:solidFill>
-                      <a:srgbClr val="FFFFFF"/>
-                    </a:solidFill>
-                  </a:tcPr>
-                </a:tc>
-                <a:tc>
-                  <a:txBody>
-                    <a:bodyPr/>
-                    <a:lstStyle/>
-                    <a:p>
-                      <a:r>
-                        <a:rPr sz="1400" b="0">
-                          <a:solidFill>
-                            <a:srgbClr val="161A23"/>
-                          </a:solidFill>
-                          <a:latin typeface="Calibri"/>
-                        </a:rPr>
-                        <a:t>Reading the request  ·  Writing the day-by-day plan</a:t>
-                      </a:r>
-                    </a:p>
-                  </a:txBody>
-                  <a:tcPr>
-                    <a:solidFill>
-                      <a:srgbClr val="FFFFFF"/>
-                    </a:solidFill>
-                  </a:tcPr>
-                </a:tc>
-              </a:tr>
-              <a:tr h="365760">
-                <a:tc>
-                  <a:txBody>
-                    <a:bodyPr/>
-                    <a:lstStyle/>
-                    <a:p>
-                      <a:r>
-                        <a:rPr sz="1400" b="0">
-                          <a:solidFill>
-                            <a:srgbClr val="161A23"/>
-                          </a:solidFill>
-                          <a:latin typeface="Calibri"/>
-                        </a:rPr>
-                        <a:t>Yes — the rule is fixed</a:t>
-                      </a:r>
-                    </a:p>
-                  </a:txBody>
-                  <a:tcPr>
-                    <a:solidFill>
-                      <a:srgbClr val="F7F8FC"/>
-                    </a:solidFill>
-                  </a:tcPr>
-                </a:tc>
-                <a:tc>
-                  <a:txBody>
-                    <a:bodyPr/>
-                    <a:lstStyle/>
-                    <a:p>
-                      <a:r>
-                        <a:rPr sz="1400" b="0">
-                          <a:solidFill>
-                            <a:srgbClr val="161A23"/>
-                          </a:solidFill>
-                          <a:latin typeface="Calibri"/>
-                        </a:rPr>
-                        <a:t>use plain code</a:t>
-                      </a:r>
-                    </a:p>
-                  </a:txBody>
-                  <a:tcPr>
-                    <a:solidFill>
-                      <a:srgbClr val="F7F8FC"/>
-                    </a:solidFill>
-                  </a:tcPr>
-                </a:tc>
-                <a:tc>
-                  <a:txBody>
-                    <a:bodyPr/>
-                    <a:lstStyle/>
-                    <a:p>
-                      <a:r>
-                        <a:rPr sz="1400" b="0">
-                          <a:solidFill>
-                            <a:srgbClr val="161A23"/>
-                          </a:solidFill>
-                          <a:latin typeface="Calibri"/>
-                        </a:rPr>
-                        <a:t>Flights  ·  Hotels  ·  Attractions  ·  Restaurants</a:t>
-                      </a:r>
-                    </a:p>
-                  </a:txBody>
-                  <a:tcPr>
-                    <a:solidFill>
-                      <a:srgbClr val="F7F8FC"/>
-                    </a:solidFill>
-                  </a:tcPr>
-                </a:tc>
-              </a:tr>
-            </a:tbl>
-          </a:graphicData>
-        </a:graphic>
-      </p:graphicFrame>
-      <p:sp>
-        <p:nvSpPr>
-          <p:cNvPr id="7" name="TextBox 6"/>
-          <p:cNvSpPr txBox="1"/>
-          <p:nvPr/>
-        </p:nvSpPr>
-        <p:spPr>
-          <a:xfrm>
-            <a:off x="822960" y="4937760"/>
-            <a:ext cx="10515600" cy="1188720"/>
-          </a:xfrm>
-          <a:prstGeom prst="rect">
-            <a:avLst/>
-          </a:prstGeom>
-          <a:noFill/>
-        </p:spPr>
-        <p:txBody>
-          <a:bodyPr wrap="square" anchor="t">
-            <a:spAutoFit/>
-          </a:bodyPr>
-          <a:lstStyle/>
-          <a:p>
-            <a:pPr algn="l">
-              <a:lnSpc>
-                <a:spcPct val="125000"/>
-              </a:lnSpc>
-            </a:pPr>
-            <a:r>
-              <a:rPr sz="2100" b="1">
-                <a:solidFill>
-                  <a:srgbClr val="161A23"/>
-                </a:solidFill>
-                <a:latin typeface="Calibri"/>
-              </a:rPr>
-              <a:t>Two steps out of six need AI. The other four are IF statements.</a:t>
-            </a:r>
-          </a:p>
-          <a:p>
-            <a:pPr algn="l">
-              <a:lnSpc>
-                <a:spcPct val="125000"/>
-              </a:lnSpc>
-            </a:pPr>
-            <a:r>
-              <a:rPr sz="1700" b="0">
-                <a:solidFill>
-                  <a:srgbClr val="545C6E"/>
-                </a:solidFill>
-                <a:latin typeface="Calibri"/>
-              </a:rPr>
-              <a:t>Same finished plan. A fraction of the cost.</a:t>
-            </a:r>
-          </a:p>
-        </p:txBody>
-      </p:sp>
-    </p:spTree>
-  </p:cSld>
-  <p:clrMapOvr>
-    <a:masterClrMapping/>
-  </p:clrMapOvr>
-</p:sld>
-</file>
-
-<file path=ppt/slides/slide4.xml><?xml version="1.0" encoding="utf-8"?>
-<p:sld xmlns:a="http://schemas.openxmlformats.org/drawingml/2006/main" xmlns:p="http://schemas.openxmlformats.org/presentationml/2006/main" xmlns:r="http://schemas.openxmlformats.org/officeDocument/2006/relationships">
-  <p:cSld>
-    <p:spTree>
-      <p:nvGrpSpPr>
-        <p:cNvPr id="1" name=""/>
-        <p:cNvGrpSpPr/>
-        <p:nvPr/>
-      </p:nvGrpSpPr>
-      <p:grpSpPr/>
-      <p:sp>
-        <p:nvSpPr>
-          <p:cNvPr id="2" name="TextBox 1"/>
-          <p:cNvSpPr txBox="1"/>
-          <p:nvPr/>
-        </p:nvSpPr>
-        <p:spPr>
-          <a:xfrm>
-            <a:off x="822960" y="457200"/>
-            <a:ext cx="10515600" cy="365760"/>
-          </a:xfrm>
-          <a:prstGeom prst="rect">
-            <a:avLst/>
-          </a:prstGeom>
-          <a:noFill/>
-        </p:spPr>
-        <p:txBody>
-          <a:bodyPr wrap="square" anchor="t">
-            <a:spAutoFit/>
-          </a:bodyPr>
-          <a:lstStyle/>
-          <a:p>
-            <a:pPr algn="l">
-              <a:lnSpc>
-                <a:spcPct val="100000"/>
-              </a:lnSpc>
-            </a:pPr>
-            <a:r>
-              <a:rPr sz="1200" b="1">
-                <a:solidFill>
-                  <a:srgbClr val="4338CA"/>
-                </a:solidFill>
-                <a:latin typeface="Calibri"/>
-              </a:rPr>
-              <a:t>3  ·  WHAT THE USER SEES</a:t>
-            </a:r>
-          </a:p>
-        </p:txBody>
-      </p:sp>
-      <p:sp>
-        <p:nvSpPr>
-          <p:cNvPr id="3" name="TextBox 2"/>
-          <p:cNvSpPr txBox="1"/>
-          <p:nvPr/>
-        </p:nvSpPr>
-        <p:spPr>
-          <a:xfrm>
-            <a:off x="822960" y="777240"/>
-            <a:ext cx="10515600" cy="822960"/>
-          </a:xfrm>
-          <a:prstGeom prst="rect">
-            <a:avLst/>
-          </a:prstGeom>
-          <a:noFill/>
-        </p:spPr>
-        <p:txBody>
-          <a:bodyPr wrap="square" anchor="t">
-            <a:spAutoFit/>
-          </a:bodyPr>
-          <a:lstStyle/>
-          <a:p>
-            <a:pPr algn="l">
-              <a:lnSpc>
-                <a:spcPct val="100000"/>
-              </a:lnSpc>
-            </a:pPr>
-            <a:r>
-              <a:rPr sz="3200" b="1">
-                <a:solidFill>
-                  <a:srgbClr val="161A23"/>
-                </a:solidFill>
-                <a:latin typeface="Calibri"/>
-              </a:rPr>
-              <a:t>One form, live progress, plan in tabs</a:t>
-            </a:r>
-          </a:p>
-        </p:txBody>
-      </p:sp>
-      <p:sp>
-        <p:nvSpPr>
-          <p:cNvPr id="4" name="Rectangle 3"/>
-          <p:cNvSpPr/>
-          <p:nvPr/>
-        </p:nvSpPr>
-        <p:spPr>
-          <a:xfrm>
-            <a:off x="822960" y="1572768"/>
-            <a:ext cx="1005840" cy="34000"/>
-          </a:xfrm>
-          <a:prstGeom prst="rect">
-            <a:avLst/>
-          </a:prstGeom>
-          <a:solidFill>
-            <a:srgbClr val="4338CA"/>
-          </a:solidFill>
-          <a:ln>
-            <a:noFill/>
-          </a:ln>
-          <a:effectLst/>
-        </p:spPr>
-        <p:style>
-          <a:lnRef idx="1">
-            <a:schemeClr val="accent1"/>
-          </a:lnRef>
-          <a:fillRef idx="3">
-            <a:schemeClr val="accent1"/>
-          </a:fillRef>
-          <a:effectRef idx="2">
-            <a:schemeClr val="accent1"/>
-          </a:effectRef>
-          <a:fontRef idx="minor">
-            <a:schemeClr val="lt1"/>
-          </a:fontRef>
-        </p:style>
-        <p:txBody>
-          <a:bodyPr rtlCol="0" anchor="ctr"/>
-          <a:lstStyle/>
-          <a:p>
-            <a:pPr algn="ctr"/>
-          </a:p>
-        </p:txBody>
-      </p:sp>
-      <p:pic>
-        <p:nvPicPr>
-          <p:cNvPr id="5" name="Picture 4" descr="frontend.png"/>
-          <p:cNvPicPr>
-            <a:picLocks noChangeAspect="1"/>
-          </p:cNvPicPr>
-          <p:nvPr/>
-        </p:nvPicPr>
-        <p:blipFill>
-          <a:blip r:embed="rId2"/>
-          <a:stretch>
-            <a:fillRect/>
-          </a:stretch>
-        </p:blipFill>
-        <p:spPr>
-          <a:xfrm>
-            <a:off x="2352101" y="1783080"/>
-            <a:ext cx="7487493" cy="4297680"/>
-          </a:xfrm>
-          <a:prstGeom prst="rect">
-            <a:avLst/>
-          </a:prstGeom>
-        </p:spPr>
-      </p:pic>
-      <p:sp>
-        <p:nvSpPr>
-          <p:cNvPr id="6" name="TextBox 5"/>
-          <p:cNvSpPr txBox="1"/>
-          <p:nvPr/>
-        </p:nvSpPr>
-        <p:spPr>
-          <a:xfrm>
-            <a:off x="822960" y="6172200"/>
-            <a:ext cx="10515600" cy="457200"/>
-          </a:xfrm>
-          <a:prstGeom prst="rect">
-            <a:avLst/>
-          </a:prstGeom>
-          <a:noFill/>
-        </p:spPr>
-        <p:txBody>
-          <a:bodyPr wrap="square" anchor="t">
-            <a:spAutoFit/>
-          </a:bodyPr>
-          <a:lstStyle/>
-          <a:p>
-            <a:pPr algn="l">
-              <a:lnSpc>
-                <a:spcPct val="100000"/>
-              </a:lnSpc>
-            </a:pPr>
-            <a:r>
-              <a:rPr sz="1500" b="0">
-                <a:solidFill>
-                  <a:srgbClr val="545C6E"/>
-                </a:solidFill>
-                <a:latin typeface="Calibri"/>
-              </a:rPr>
-              <a:t>Purple steps use AI. Green steps are plain code. Both are narrated in the terminal as they run.</a:t>
-            </a:r>
-          </a:p>
-        </p:txBody>
-      </p:sp>
-    </p:spTree>
-  </p:cSld>
-  <p:clrMapOvr>
-    <a:masterClrMapping/>
-  </p:clrMapOvr>
-</p:sld>
-</file>
-
-<file path=ppt/slides/slide5.xml><?xml version="1.0" encoding="utf-8"?>
-<p:sld xmlns:a="http://schemas.openxmlformats.org/drawingml/2006/main" xmlns:p="http://schemas.openxmlformats.org/presentationml/2006/main" xmlns:r="http://schemas.openxmlformats.org/officeDocument/2006/relationships">
-  <p:cSld>
-    <p:spTree>
-      <p:nvGrpSpPr>
-        <p:cNvPr id="1" name=""/>
-        <p:cNvGrpSpPr/>
-        <p:nvPr/>
-      </p:nvGrpSpPr>
-      <p:grpSpPr/>
-      <p:sp>
-        <p:nvSpPr>
-          <p:cNvPr id="2" name="TextBox 1"/>
-          <p:cNvSpPr txBox="1"/>
-          <p:nvPr/>
-        </p:nvSpPr>
-        <p:spPr>
-          <a:xfrm>
-            <a:off x="822960" y="457200"/>
-            <a:ext cx="10515600" cy="365760"/>
-          </a:xfrm>
-          <a:prstGeom prst="rect">
-            <a:avLst/>
-          </a:prstGeom>
-          <a:noFill/>
-        </p:spPr>
-        <p:txBody>
-          <a:bodyPr wrap="square" anchor="t">
-            <a:spAutoFit/>
-          </a:bodyPr>
-          <a:lstStyle/>
-          <a:p>
-            <a:pPr algn="l">
-              <a:lnSpc>
-                <a:spcPct val="100000"/>
-              </a:lnSpc>
-            </a:pPr>
-            <a:r>
-              <a:rPr sz="1200" b="1">
-                <a:solidFill>
-                  <a:srgbClr val="4338CA"/>
-                </a:solidFill>
-                <a:latin typeface="Calibri"/>
-              </a:rPr>
-              <a:t>4  ·  THE FOUR VERSIONS</a:t>
+              <a:t>2  ·  THE FOUR APPROACHES</a:t>
             </a:r>
           </a:p>
         </p:txBody>
@@ -7898,7 +5649,7 @@
                     <a:lstStyle/>
                     <a:p>
                       <a:r>
-                        <a:rPr sz="1300" b="1">
+                        <a:rPr sz="1350" b="1">
                           <a:solidFill>
                             <a:srgbClr val="FFFFFF"/>
                           </a:solidFill>
@@ -7920,13 +5671,13 @@
                     <a:lstStyle/>
                     <a:p>
                       <a:r>
-                        <a:rPr sz="1300" b="1">
+                        <a:rPr sz="1350" b="1">
                           <a:solidFill>
                             <a:srgbClr val="FFFFFF"/>
                           </a:solidFill>
                           <a:latin typeface="Calibri"/>
                         </a:rPr>
-                        <a:t>How it works</a:t>
+                        <a:t>Approach</a:t>
                       </a:r>
                     </a:p>
                   </a:txBody>
@@ -7942,7 +5693,7 @@
                     <a:lstStyle/>
                     <a:p>
                       <a:r>
-                        <a:rPr sz="1300" b="1">
+                        <a:rPr sz="1350" b="1">
                           <a:solidFill>
                             <a:srgbClr val="FFFFFF"/>
                           </a:solidFill>
@@ -7964,13 +5715,13 @@
                     <a:lstStyle/>
                     <a:p>
                       <a:r>
-                        <a:rPr sz="1300" b="1">
+                        <a:rPr sz="1350" b="1">
                           <a:solidFill>
                             <a:srgbClr val="FFFFFF"/>
                           </a:solidFill>
                           <a:latin typeface="Calibri"/>
                         </a:rPr>
-                        <a:t>Why I built it</a:t>
+                        <a:t>Why it exists</a:t>
                       </a:r>
                     </a:p>
                   </a:txBody>
@@ -7988,7 +5739,7 @@
                     <a:lstStyle/>
                     <a:p>
                       <a:r>
-                        <a:rPr sz="1300" b="0">
+                        <a:rPr sz="1350" b="0">
                           <a:solidFill>
                             <a:srgbClr val="161A23"/>
                           </a:solidFill>
@@ -8010,7 +5761,7 @@
                     <a:lstStyle/>
                     <a:p>
                       <a:r>
-                        <a:rPr sz="1300" b="0">
+                        <a:rPr sz="1350" b="0">
                           <a:solidFill>
                             <a:srgbClr val="161A23"/>
                           </a:solidFill>
@@ -8032,7 +5783,7 @@
                     <a:lstStyle/>
                     <a:p>
                       <a:r>
-                        <a:rPr sz="1300" b="0">
+                        <a:rPr sz="1350" b="0">
                           <a:solidFill>
                             <a:srgbClr val="161A23"/>
                           </a:solidFill>
@@ -8054,13 +5805,13 @@
                     <a:lstStyle/>
                     <a:p>
                       <a:r>
-                        <a:rPr sz="1300" b="0">
+                        <a:rPr sz="1350" b="0">
                           <a:solidFill>
                             <a:srgbClr val="161A23"/>
                           </a:solidFill>
                           <a:latin typeface="Calibri"/>
                         </a:rPr>
-                        <a:t>The floor. Shows what AI invents with no real data</a:t>
+                        <a:t>The floor. Shows what AI invents with no data</a:t>
                       </a:r>
                     </a:p>
                   </a:txBody>
@@ -8078,7 +5829,7 @@
                     <a:lstStyle/>
                     <a:p>
                       <a:r>
-                        <a:rPr sz="1300" b="0">
+                        <a:rPr sz="1350" b="0">
                           <a:solidFill>
                             <a:srgbClr val="161A23"/>
                           </a:solidFill>
@@ -8100,7 +5851,7 @@
                     <a:lstStyle/>
                     <a:p>
                       <a:r>
-                        <a:rPr sz="1300" b="0">
+                        <a:rPr sz="1350" b="0">
                           <a:solidFill>
                             <a:srgbClr val="161A23"/>
                           </a:solidFill>
@@ -8122,7 +5873,7 @@
                     <a:lstStyle/>
                     <a:p>
                       <a:r>
-                        <a:rPr sz="1300" b="0">
+                        <a:rPr sz="1350" b="0">
                           <a:solidFill>
                             <a:srgbClr val="161A23"/>
                           </a:solidFill>
@@ -8144,13 +5895,13 @@
                     <a:lstStyle/>
                     <a:p>
                       <a:r>
-                        <a:rPr sz="1300" b="0">
+                        <a:rPr sz="1350" b="0">
                           <a:solidFill>
                             <a:srgbClr val="161A23"/>
                           </a:solidFill>
                           <a:latin typeface="Calibri"/>
                         </a:rPr>
-                        <a:t>My original proposal. The honest starting point</a:t>
+                        <a:t>My original proposal, untuned</a:t>
                       </a:r>
                     </a:p>
                   </a:txBody>
@@ -8168,7 +5919,7 @@
                     <a:lstStyle/>
                     <a:p>
                       <a:r>
-                        <a:rPr sz="1300" b="0">
+                        <a:rPr sz="1350" b="0">
                           <a:solidFill>
                             <a:srgbClr val="161A23"/>
                           </a:solidFill>
@@ -8190,13 +5941,13 @@
                     <a:lstStyle/>
                     <a:p>
                       <a:r>
-                        <a:rPr sz="1300" b="0">
+                        <a:rPr sz="1350" b="0">
                           <a:solidFill>
                             <a:srgbClr val="161A23"/>
                           </a:solidFill>
                           <a:latin typeface="Calibri"/>
                         </a:rPr>
-                        <a:t>Same six agents, tuned</a:t>
+                        <a:t>Six agents, tuned</a:t>
                       </a:r>
                     </a:p>
                   </a:txBody>
@@ -8212,7 +5963,7 @@
                     <a:lstStyle/>
                     <a:p>
                       <a:r>
-                        <a:rPr sz="1300" b="0">
+                        <a:rPr sz="1350" b="0">
                           <a:solidFill>
                             <a:srgbClr val="161A23"/>
                           </a:solidFill>
@@ -8234,13 +5985,13 @@
                     <a:lstStyle/>
                     <a:p>
                       <a:r>
-                        <a:rPr sz="1300" b="0">
+                        <a:rPr sz="1350" b="0">
                           <a:solidFill>
                             <a:srgbClr val="161A23"/>
                           </a:solidFill>
                           <a:latin typeface="Calibri"/>
                         </a:rPr>
-                        <a:t>Proves the gain is the design, not just better settings</a:t>
+                        <a:t>Proves the gain is the design, not the settings</a:t>
                       </a:r>
                     </a:p>
                   </a:txBody>
@@ -8258,7 +6009,7 @@
                     <a:lstStyle/>
                     <a:p>
                       <a:r>
-                        <a:rPr sz="1300" b="0">
+                        <a:rPr sz="1350" b="0">
                           <a:solidFill>
                             <a:srgbClr val="161A23"/>
                           </a:solidFill>
@@ -8280,7 +6031,7 @@
                     <a:lstStyle/>
                     <a:p>
                       <a:r>
-                        <a:rPr sz="1300" b="0">
+                        <a:rPr sz="1350" b="0">
                           <a:solidFill>
                             <a:srgbClr val="161A23"/>
                           </a:solidFill>
@@ -8302,7 +6053,7 @@
                     <a:lstStyle/>
                     <a:p>
                       <a:r>
-                        <a:rPr sz="1300" b="0">
+                        <a:rPr sz="1350" b="0">
                           <a:solidFill>
                             <a:srgbClr val="161A23"/>
                           </a:solidFill>
@@ -8324,7 +6075,7 @@
                     <a:lstStyle/>
                     <a:p>
                       <a:r>
-                        <a:rPr sz="1300" b="0">
+                        <a:rPr sz="1350" b="0">
                           <a:solidFill>
                             <a:srgbClr val="161A23"/>
                           </a:solidFill>
@@ -8353,7 +6104,7 @@
         </p:nvSpPr>
         <p:spPr>
           <a:xfrm>
-            <a:off x="822960" y="5120640"/>
+            <a:off x="822960" y="5212080"/>
             <a:ext cx="10515600" cy="914400"/>
           </a:xfrm>
           <a:prstGeom prst="rect">
@@ -8379,7 +6130,7 @@
                 </a:solidFill>
                 <a:latin typeface="Calibri"/>
               </a:rPr>
-              <a:t>C is the important one. Without it, someone could say D only won because B was set up badly.</a:t>
+              <a:t>C matters most. Without it, someone could say D only won because B was set up badly.</a:t>
             </a:r>
           </a:p>
         </p:txBody>
@@ -8392,7 +6143,7 @@
 </p:sld>
 </file>
 
-<file path=ppt/slides/slide6.xml><?xml version="1.0" encoding="utf-8"?>
+<file path=ppt/slides/slide4.xml><?xml version="1.0" encoding="utf-8"?>
 <p:sld xmlns:a="http://schemas.openxmlformats.org/drawingml/2006/main" xmlns:p="http://schemas.openxmlformats.org/presentationml/2006/main" xmlns:r="http://schemas.openxmlformats.org/officeDocument/2006/relationships">
   <p:cSld>
     <p:spTree>
@@ -8436,7 +6187,7 @@
                 </a:solidFill>
                 <a:latin typeface="Calibri"/>
               </a:rPr>
-              <a:t>5  ·  AGENTS AND THEIR TOOLS</a:t>
+              <a:t>3  ·  TOOLS GIVEN TO EACH AGENT</a:t>
             </a:r>
           </a:p>
         </p:txBody>
@@ -8475,7 +6226,7 @@
                 </a:solidFill>
                 <a:latin typeface="Calibri"/>
               </a:rPr>
-              <a:t>Counted from the code, per version</a:t>
+              <a:t>Counted from the code. This is where the cost came from</a:t>
             </a:r>
           </a:p>
         </p:txBody>
@@ -8534,7 +6285,7 @@
         </p:nvGraphicFramePr>
         <p:xfrm>
           <a:off x="822960" y="1965960"/>
-          <a:ext cx="10515600" cy="2926080"/>
+          <a:ext cx="10515598" cy="2926080"/>
         </p:xfrm>
         <a:graphic>
           <a:graphicData uri="http://schemas.openxmlformats.org/drawingml/2006/table">
@@ -8543,12 +6294,11 @@
                 <a:tableStyleId>{5C22544A-7EE6-4342-B048-85BDC9FD1C3A}</a:tableStyleId>
               </a:tblPr>
               <a:tblGrid>
-                <a:gridCol w="3657600"/>
-                <a:gridCol w="1257300"/>
-                <a:gridCol w="1257300"/>
-                <a:gridCol w="1257300"/>
-                <a:gridCol w="1257300"/>
-                <a:gridCol w="1828800"/>
+                <a:gridCol w="3605348"/>
+                <a:gridCol w="901337"/>
+                <a:gridCol w="2403565"/>
+                <a:gridCol w="2002971"/>
+                <a:gridCol w="1602377"/>
               </a:tblGrid>
               <a:tr h="365760">
                 <a:tc>
@@ -8585,7 +6335,7 @@
                           </a:solidFill>
                           <a:latin typeface="Calibri"/>
                         </a:rPr>
-                        <a:t>B  tools</a:t>
+                        <a:t>A</a:t>
                       </a:r>
                     </a:p>
                   </a:txBody>
@@ -8607,7 +6357,7 @@
                           </a:solidFill>
                           <a:latin typeface="Calibri"/>
                         </a:rPr>
-                        <a:t>B  steps</a:t>
+                        <a:t>B</a:t>
                       </a:r>
                     </a:p>
                   </a:txBody>
@@ -8629,29 +6379,7 @@
                           </a:solidFill>
                           <a:latin typeface="Calibri"/>
                         </a:rPr>
-                        <a:t>C  tools</a:t>
-                      </a:r>
-                    </a:p>
-                  </a:txBody>
-                  <a:tcPr>
-                    <a:solidFill>
-                      <a:srgbClr val="4338CA"/>
-                    </a:solidFill>
-                  </a:tcPr>
-                </a:tc>
-                <a:tc>
-                  <a:txBody>
-                    <a:bodyPr/>
-                    <a:lstStyle/>
-                    <a:p>
-                      <a:r>
-                        <a:rPr sz="1250" b="1">
-                          <a:solidFill>
-                            <a:srgbClr val="FFFFFF"/>
-                          </a:solidFill>
-                          <a:latin typeface="Calibri"/>
-                        </a:rPr>
-                        <a:t>C  steps</a:t>
+                        <a:t>C</a:t>
                       </a:r>
                     </a:p>
                   </a:txBody>
@@ -8697,7 +6425,7 @@
                           </a:solidFill>
                           <a:latin typeface="Calibri"/>
                         </a:rPr>
-                        <a:t>Preferences extractor</a:t>
+                        <a:t>Travel Preferences Extractor</a:t>
                       </a:r>
                     </a:p>
                   </a:txBody>
@@ -8719,7 +6447,7 @@
                           </a:solidFill>
                           <a:latin typeface="Calibri"/>
                         </a:rPr>
-                        <a:t>0</a:t>
+                        <a:t>—</a:t>
                       </a:r>
                     </a:p>
                   </a:txBody>
@@ -8741,7 +6469,7 @@
                           </a:solidFill>
                           <a:latin typeface="Calibri"/>
                         </a:rPr>
-                        <a:t>3</a:t>
+                        <a:t>0 tools</a:t>
                       </a:r>
                     </a:p>
                   </a:txBody>
@@ -8763,29 +6491,7 @@
                           </a:solidFill>
                           <a:latin typeface="Calibri"/>
                         </a:rPr>
-                        <a:t>0</a:t>
-                      </a:r>
-                    </a:p>
-                  </a:txBody>
-                  <a:tcPr>
-                    <a:solidFill>
-                      <a:srgbClr val="FFFFFF"/>
-                    </a:solidFill>
-                  </a:tcPr>
-                </a:tc>
-                <a:tc>
-                  <a:txBody>
-                    <a:bodyPr/>
-                    <a:lstStyle/>
-                    <a:p>
-                      <a:r>
-                        <a:rPr sz="1250" b="0">
-                          <a:solidFill>
-                            <a:srgbClr val="161A23"/>
-                          </a:solidFill>
-                          <a:latin typeface="Calibri"/>
-                        </a:rPr>
-                        <a:t>3</a:t>
+                        <a:t>0 tools</a:t>
                       </a:r>
                     </a:p>
                   </a:txBody>
@@ -8831,7 +6537,7 @@
                           </a:solidFill>
                           <a:latin typeface="Calibri"/>
                         </a:rPr>
-                        <a:t>Flight search</a:t>
+                        <a:t>Flight Search Specialist</a:t>
                       </a:r>
                     </a:p>
                   </a:txBody>
@@ -8853,7 +6559,7 @@
                           </a:solidFill>
                           <a:latin typeface="Calibri"/>
                         </a:rPr>
-                        <a:t>4</a:t>
+                        <a:t>—</a:t>
                       </a:r>
                     </a:p>
                   </a:txBody>
@@ -8875,7 +6581,7 @@
                           </a:solidFill>
                           <a:latin typeface="Calibri"/>
                         </a:rPr>
-                        <a:t>8</a:t>
+                        <a:t>4 tools, 8 steps</a:t>
                       </a:r>
                     </a:p>
                   </a:txBody>
@@ -8897,29 +6603,7 @@
                           </a:solidFill>
                           <a:latin typeface="Calibri"/>
                         </a:rPr>
-                        <a:t>1</a:t>
-                      </a:r>
-                    </a:p>
-                  </a:txBody>
-                  <a:tcPr>
-                    <a:solidFill>
-                      <a:srgbClr val="F7F8FC"/>
-                    </a:solidFill>
-                  </a:tcPr>
-                </a:tc>
-                <a:tc>
-                  <a:txBody>
-                    <a:bodyPr/>
-                    <a:lstStyle/>
-                    <a:p>
-                      <a:r>
-                        <a:rPr sz="1250" b="0">
-                          <a:solidFill>
-                            <a:srgbClr val="161A23"/>
-                          </a:solidFill>
-                          <a:latin typeface="Calibri"/>
-                        </a:rPr>
-                        <a:t>3</a:t>
+                        <a:t>1 tool, 3 steps</a:t>
                       </a:r>
                     </a:p>
                   </a:txBody>
@@ -8965,7 +6649,7 @@
                           </a:solidFill>
                           <a:latin typeface="Calibri"/>
                         </a:rPr>
-                        <a:t>Hotel search</a:t>
+                        <a:t>Hotel Search Specialist</a:t>
                       </a:r>
                     </a:p>
                   </a:txBody>
@@ -8987,7 +6671,7 @@
                           </a:solidFill>
                           <a:latin typeface="Calibri"/>
                         </a:rPr>
-                        <a:t>8</a:t>
+                        <a:t>—</a:t>
                       </a:r>
                     </a:p>
                   </a:txBody>
@@ -9009,7 +6693,7 @@
                           </a:solidFill>
                           <a:latin typeface="Calibri"/>
                         </a:rPr>
-                        <a:t>10</a:t>
+                        <a:t>8 tools, 10 steps</a:t>
                       </a:r>
                     </a:p>
                   </a:txBody>
@@ -9031,29 +6715,7 @@
                           </a:solidFill>
                           <a:latin typeface="Calibri"/>
                         </a:rPr>
-                        <a:t>1</a:t>
-                      </a:r>
-                    </a:p>
-                  </a:txBody>
-                  <a:tcPr>
-                    <a:solidFill>
-                      <a:srgbClr val="FFFFFF"/>
-                    </a:solidFill>
-                  </a:tcPr>
-                </a:tc>
-                <a:tc>
-                  <a:txBody>
-                    <a:bodyPr/>
-                    <a:lstStyle/>
-                    <a:p>
-                      <a:r>
-                        <a:rPr sz="1250" b="0">
-                          <a:solidFill>
-                            <a:srgbClr val="161A23"/>
-                          </a:solidFill>
-                          <a:latin typeface="Calibri"/>
-                        </a:rPr>
-                        <a:t>3</a:t>
+                        <a:t>1 tool, 3 steps</a:t>
                       </a:r>
                     </a:p>
                   </a:txBody>
@@ -9099,7 +6761,7 @@
                           </a:solidFill>
                           <a:latin typeface="Calibri"/>
                         </a:rPr>
-                        <a:t>Activities</a:t>
+                        <a:t>Activities Specialist</a:t>
                       </a:r>
                     </a:p>
                   </a:txBody>
@@ -9121,7 +6783,7 @@
                           </a:solidFill>
                           <a:latin typeface="Calibri"/>
                         </a:rPr>
-                        <a:t>4</a:t>
+                        <a:t>—</a:t>
                       </a:r>
                     </a:p>
                   </a:txBody>
@@ -9143,7 +6805,7 @@
                           </a:solidFill>
                           <a:latin typeface="Calibri"/>
                         </a:rPr>
-                        <a:t>10</a:t>
+                        <a:t>4 tools, 10 steps</a:t>
                       </a:r>
                     </a:p>
                   </a:txBody>
@@ -9165,29 +6827,7 @@
                           </a:solidFill>
                           <a:latin typeface="Calibri"/>
                         </a:rPr>
-                        <a:t>2</a:t>
-                      </a:r>
-                    </a:p>
-                  </a:txBody>
-                  <a:tcPr>
-                    <a:solidFill>
-                      <a:srgbClr val="F7F8FC"/>
-                    </a:solidFill>
-                  </a:tcPr>
-                </a:tc>
-                <a:tc>
-                  <a:txBody>
-                    <a:bodyPr/>
-                    <a:lstStyle/>
-                    <a:p>
-                      <a:r>
-                        <a:rPr sz="1250" b="0">
-                          <a:solidFill>
-                            <a:srgbClr val="161A23"/>
-                          </a:solidFill>
-                          <a:latin typeface="Calibri"/>
-                        </a:rPr>
-                        <a:t>3</a:t>
+                        <a:t>2 tools, 3 steps</a:t>
                       </a:r>
                     </a:p>
                   </a:txBody>
@@ -9233,7 +6873,7 @@
                           </a:solidFill>
                           <a:latin typeface="Calibri"/>
                         </a:rPr>
-                        <a:t>Itinerary coordinator</a:t>
+                        <a:t>Itinerary Coordinator</a:t>
                       </a:r>
                     </a:p>
                   </a:txBody>
@@ -9255,7 +6895,7 @@
                           </a:solidFill>
                           <a:latin typeface="Calibri"/>
                         </a:rPr>
-                        <a:t>4</a:t>
+                        <a:t>—</a:t>
                       </a:r>
                     </a:p>
                   </a:txBody>
@@ -9277,7 +6917,7 @@
                           </a:solidFill>
                           <a:latin typeface="Calibri"/>
                         </a:rPr>
-                        <a:t>15</a:t>
+                        <a:t>4 tools, 15 steps</a:t>
                       </a:r>
                     </a:p>
                   </a:txBody>
@@ -9299,29 +6939,7 @@
                           </a:solidFill>
                           <a:latin typeface="Calibri"/>
                         </a:rPr>
-                        <a:t>0</a:t>
-                      </a:r>
-                    </a:p>
-                  </a:txBody>
-                  <a:tcPr>
-                    <a:solidFill>
-                      <a:srgbClr val="FFFFFF"/>
-                    </a:solidFill>
-                  </a:tcPr>
-                </a:tc>
-                <a:tc>
-                  <a:txBody>
-                    <a:bodyPr/>
-                    <a:lstStyle/>
-                    <a:p>
-                      <a:r>
-                        <a:rPr sz="1250" b="0">
-                          <a:solidFill>
-                            <a:srgbClr val="161A23"/>
-                          </a:solidFill>
-                          <a:latin typeface="Calibri"/>
-                        </a:rPr>
-                        <a:t>3</a:t>
+                        <a:t>0 tools</a:t>
                       </a:r>
                     </a:p>
                   </a:txBody>
@@ -9367,29 +6985,7 @@
                           </a:solidFill>
                           <a:latin typeface="Calibri"/>
                         </a:rPr>
-                        <a:t>Conversation</a:t>
-                      </a:r>
-                    </a:p>
-                  </a:txBody>
-                  <a:tcPr>
-                    <a:solidFill>
-                      <a:srgbClr val="F7F8FC"/>
-                    </a:solidFill>
-                  </a:tcPr>
-                </a:tc>
-                <a:tc>
-                  <a:txBody>
-                    <a:bodyPr/>
-                    <a:lstStyle/>
-                    <a:p>
-                      <a:r>
-                        <a:rPr sz="1250" b="0">
-                          <a:solidFill>
-                            <a:srgbClr val="161A23"/>
-                          </a:solidFill>
-                          <a:latin typeface="Calibri"/>
-                        </a:rPr>
-                        <a:t>—</a:t>
+                        <a:t>Travel Conversation Assistant</a:t>
                       </a:r>
                     </a:p>
                   </a:txBody>
@@ -9501,7 +7097,29 @@
                           </a:solidFill>
                           <a:latin typeface="Calibri"/>
                         </a:rPr>
-                        <a:t>TOTAL TOOL SLOTS</a:t>
+                        <a:t>TOTAL TOOLS</a:t>
+                      </a:r>
+                    </a:p>
+                  </a:txBody>
+                  <a:tcPr>
+                    <a:solidFill>
+                      <a:srgbClr val="FFFFFF"/>
+                    </a:solidFill>
+                  </a:tcPr>
+                </a:tc>
+                <a:tc>
+                  <a:txBody>
+                    <a:bodyPr/>
+                    <a:lstStyle/>
+                    <a:p>
+                      <a:r>
+                        <a:rPr sz="1250" b="0">
+                          <a:solidFill>
+                            <a:srgbClr val="161A23"/>
+                          </a:solidFill>
+                          <a:latin typeface="Calibri"/>
+                        </a:rPr>
+                        <a:t>0</a:t>
                       </a:r>
                     </a:p>
                   </a:txBody>
@@ -9545,51 +7163,7 @@
                           </a:solidFill>
                           <a:latin typeface="Calibri"/>
                         </a:rPr>
-                        <a:t> </a:t>
-                      </a:r>
-                    </a:p>
-                  </a:txBody>
-                  <a:tcPr>
-                    <a:solidFill>
-                      <a:srgbClr val="FFFFFF"/>
-                    </a:solidFill>
-                  </a:tcPr>
-                </a:tc>
-                <a:tc>
-                  <a:txBody>
-                    <a:bodyPr/>
-                    <a:lstStyle/>
-                    <a:p>
-                      <a:r>
-                        <a:rPr sz="1250" b="0">
-                          <a:solidFill>
-                            <a:srgbClr val="161A23"/>
-                          </a:solidFill>
-                          <a:latin typeface="Calibri"/>
-                        </a:rPr>
                         <a:t>4</a:t>
-                      </a:r>
-                    </a:p>
-                  </a:txBody>
-                  <a:tcPr>
-                    <a:solidFill>
-                      <a:srgbClr val="FFFFFF"/>
-                    </a:solidFill>
-                  </a:tcPr>
-                </a:tc>
-                <a:tc>
-                  <a:txBody>
-                    <a:bodyPr/>
-                    <a:lstStyle/>
-                    <a:p>
-                      <a:r>
-                        <a:rPr sz="1250" b="0">
-                          <a:solidFill>
-                            <a:srgbClr val="161A23"/>
-                          </a:solidFill>
-                          <a:latin typeface="Calibri"/>
-                        </a:rPr>
-                        <a:t> </a:t>
                       </a:r>
                     </a:p>
                   </a:txBody>
@@ -9634,7 +7208,7 @@
         </p:nvSpPr>
         <p:spPr>
           <a:xfrm>
-            <a:off x="822960" y="5394960"/>
+            <a:off x="822960" y="5440680"/>
             <a:ext cx="10515600" cy="822960"/>
           </a:xfrm>
           <a:prstGeom prst="rect">
@@ -9660,7 +7234,7 @@
                 </a:solidFill>
                 <a:latin typeface="Calibri"/>
               </a:rPr>
-              <a:t>The hotel agent alone held 8 tools and 10 steps. Every step re-sent all 8 tool descriptions to the AI.</a:t>
+              <a:t>"Steps" is how many times an agent may loop. Each loop re-sends every tool description to the AI — that is the bill.</a:t>
             </a:r>
           </a:p>
         </p:txBody>
@@ -9673,7 +7247,7 @@
 </p:sld>
 </file>
 
-<file path=ppt/slides/slide7.xml><?xml version="1.0" encoding="utf-8"?>
+<file path=ppt/slides/slide5.xml><?xml version="1.0" encoding="utf-8"?>
 <p:sld xmlns:a="http://schemas.openxmlformats.org/drawingml/2006/main" xmlns:p="http://schemas.openxmlformats.org/presentationml/2006/main" xmlns:r="http://schemas.openxmlformats.org/officeDocument/2006/relationships">
   <p:cSld>
     <p:spTree>
@@ -9717,7 +7291,7 @@
                 </a:solidFill>
                 <a:latin typeface="Calibri"/>
               </a:rPr>
-              <a:t>6  ·  HOW A TOOL CALL WORKS</a:t>
+              <a:t>4  ·  WHAT THE USER SEES</a:t>
             </a:r>
           </a:p>
         </p:txBody>
@@ -9756,7 +7330,7 @@
                 </a:solidFill>
                 <a:latin typeface="Calibri"/>
               </a:rPr>
-              <a:t>12 tools, each with a checked input</a:t>
+              <a:t>One form, live progress, the plan in tabs</a:t>
             </a:r>
           </a:p>
         </p:txBody>
@@ -9807,7 +7381,7 @@
       </p:sp>
       <p:pic>
         <p:nvPicPr>
-          <p:cNvPr id="5" name="Picture 4" descr="mcp_lifecycle.png"/>
+          <p:cNvPr id="5" name="Picture 4" descr="frontend.png"/>
           <p:cNvPicPr>
             <a:picLocks noChangeAspect="1"/>
           </p:cNvPicPr>
@@ -9821,8 +7395,8 @@
         </p:blipFill>
         <p:spPr>
           <a:xfrm>
-            <a:off x="2061943" y="1783080"/>
-            <a:ext cx="8067808" cy="3931920"/>
+            <a:off x="2352101" y="1783080"/>
+            <a:ext cx="7487493" cy="4297680"/>
           </a:xfrm>
           <a:prstGeom prst="rect">
             <a:avLst/>
@@ -9837,8 +7411,8 @@
         </p:nvSpPr>
         <p:spPr>
           <a:xfrm>
-            <a:off x="822960" y="5852160"/>
-            <a:ext cx="10515600" cy="640080"/>
+            <a:off x="822960" y="6172200"/>
+            <a:ext cx="10515600" cy="457200"/>
           </a:xfrm>
           <a:prstGeom prst="rect">
             <a:avLst/>
@@ -9863,7 +7437,7 @@
                 </a:solidFill>
                 <a:latin typeface="Calibri"/>
               </a:rPr>
-              <a:t>The benefit: every input is checked against a schema before it reaches an API, and every reply is saved so the same request is never bought twice.</a:t>
+              <a:t>Purple steps use AI. Green steps are plain code.</a:t>
             </a:r>
           </a:p>
         </p:txBody>
@@ -9876,7 +7450,7 @@
 </p:sld>
 </file>
 
-<file path=ppt/slides/slide8.xml><?xml version="1.0" encoding="utf-8"?>
+<file path=ppt/slides/slide6.xml><?xml version="1.0" encoding="utf-8"?>
 <p:sld xmlns:a="http://schemas.openxmlformats.org/drawingml/2006/main" xmlns:p="http://schemas.openxmlformats.org/presentationml/2006/main" xmlns:r="http://schemas.openxmlformats.org/officeDocument/2006/relationships">
   <p:cSld>
     <p:spTree>
@@ -9920,7 +7494,7 @@
                 </a:solidFill>
                 <a:latin typeface="Calibri"/>
               </a:rPr>
-              <a:t>7  ·  WHAT WENT WRONG IN EACH VERSION</a:t>
+              <a:t>5  ·  WHAT WENT WRONG IN EACH APPROACH</a:t>
             </a:r>
           </a:p>
         </p:txBody>
@@ -10037,7 +7611,7 @@
                     <a:lstStyle/>
                     <a:p>
                       <a:r>
-                        <a:rPr sz="1300" b="1">
+                        <a:rPr sz="1350" b="1">
                           <a:solidFill>
                             <a:srgbClr val="FFFFFF"/>
                           </a:solidFill>
@@ -10059,7 +7633,7 @@
                     <a:lstStyle/>
                     <a:p>
                       <a:r>
-                        <a:rPr sz="1300" b="1">
+                        <a:rPr sz="1350" b="1">
                           <a:solidFill>
                             <a:srgbClr val="FFFFFF"/>
                           </a:solidFill>
@@ -10083,7 +7657,7 @@
                     <a:lstStyle/>
                     <a:p>
                       <a:r>
-                        <a:rPr sz="1300" b="0">
+                        <a:rPr sz="1350" b="0">
                           <a:solidFill>
                             <a:srgbClr val="161A23"/>
                           </a:solidFill>
@@ -10105,7 +7679,7 @@
                     <a:lstStyle/>
                     <a:p>
                       <a:r>
-                        <a:rPr sz="1300" b="0">
+                        <a:rPr sz="1350" b="0">
                           <a:solidFill>
                             <a:srgbClr val="161A23"/>
                           </a:solidFill>
@@ -10129,7 +7703,7 @@
                     <a:lstStyle/>
                     <a:p>
                       <a:r>
-                        <a:rPr sz="1300" b="0">
+                        <a:rPr sz="1350" b="0">
                           <a:solidFill>
                             <a:srgbClr val="161A23"/>
                           </a:solidFill>
@@ -10151,13 +7725,13 @@
                     <a:lstStyle/>
                     <a:p>
                       <a:r>
-                        <a:rPr sz="1300" b="0">
+                        <a:rPr sz="1350" b="0">
                           <a:solidFill>
                             <a:srgbClr val="161A23"/>
                           </a:solidFill>
                           <a:latin typeface="Calibri"/>
                         </a:rPr>
-                        <a:t>Skipped its own tools: never called the attractions or the restaurant tool once. Twice produced broken output it had to redo</a:t>
+                        <a:t>Skipped its own tools: never called the attractions or the restaurant tool once. Twice produced broken output</a:t>
                       </a:r>
                     </a:p>
                   </a:txBody>
@@ -10175,7 +7749,7 @@
                     <a:lstStyle/>
                     <a:p>
                       <a:r>
-                        <a:rPr sz="1300" b="0">
+                        <a:rPr sz="1350" b="0">
                           <a:solidFill>
                             <a:srgbClr val="161A23"/>
                           </a:solidFill>
@@ -10197,7 +7771,7 @@
                     <a:lstStyle/>
                     <a:p>
                       <a:r>
-                        <a:rPr sz="1300" b="0">
+                        <a:rPr sz="1350" b="0">
                           <a:solidFill>
                             <a:srgbClr val="161A23"/>
                           </a:solidFill>
@@ -10221,7 +7795,7 @@
                     <a:lstStyle/>
                     <a:p>
                       <a:r>
-                        <a:rPr sz="1300" b="0">
+                        <a:rPr sz="1350" b="0">
                           <a:solidFill>
                             <a:srgbClr val="161A23"/>
                           </a:solidFill>
@@ -10243,13 +7817,13 @@
                     <a:lstStyle/>
                     <a:p>
                       <a:r>
-                        <a:rPr sz="1300" b="0">
+                        <a:rPr sz="1350" b="0">
                           <a:solidFill>
                             <a:srgbClr val="161A23"/>
                           </a:solidFill>
                           <a:latin typeface="Calibri"/>
                         </a:rPr>
-                        <a:t>Always makes exactly the same 5 requests, because code decides, not AI. Nothing is skipped</a:t>
+                        <a:t>Always makes the same 5 requests, because code decides, not AI. Nothing is skipped</a:t>
                       </a:r>
                     </a:p>
                   </a:txBody>
@@ -10327,7 +7901,7 @@
 </p:sld>
 </file>
 
-<file path=ppt/slides/slide9.xml><?xml version="1.0" encoding="utf-8"?>
+<file path=ppt/slides/slide7.xml><?xml version="1.0" encoding="utf-8"?>
 <p:sld xmlns:a="http://schemas.openxmlformats.org/drawingml/2006/main" xmlns:p="http://schemas.openxmlformats.org/presentationml/2006/main" xmlns:r="http://schemas.openxmlformats.org/officeDocument/2006/relationships">
   <p:cSld>
     <p:spTree>
@@ -10371,7 +7945,7 @@
                 </a:solidFill>
                 <a:latin typeface="Calibri"/>
               </a:rPr>
-              <a:t>8  ·  BUDGET: DIVIDING THE MONEY</a:t>
+              <a:t>6  ·  THE BUDGET CHECK</a:t>
             </a:r>
           </a:p>
         </p:txBody>
@@ -10410,7 +7984,7 @@
                 </a:solidFill>
                 <a:latin typeface="Calibri"/>
               </a:rPr>
-              <a:t>Worked out from the trip, not a fixed percentage</a:t>
+              <a:t>It divides the money, then refuses the impossible</a:t>
             </a:r>
           </a:p>
         </p:txBody>
@@ -10468,8 +8042,8 @@
           <p:nvPr/>
         </p:nvGraphicFramePr>
         <p:xfrm>
-          <a:off x="822960" y="2011680"/>
-          <a:ext cx="10515600" cy="2194560"/>
+          <a:off x="822960" y="1965960"/>
+          <a:ext cx="10515599" cy="1828800"/>
         </p:xfrm>
         <a:graphic>
           <a:graphicData uri="http://schemas.openxmlformats.org/drawingml/2006/table">
@@ -10478,8 +8052,8 @@
                 <a:tableStyleId>{5C22544A-7EE6-4342-B048-85BDC9FD1C3A}</a:tableStyleId>
               </a:tblPr>
               <a:tblGrid>
-                <a:gridCol w="2628900"/>
-                <a:gridCol w="7886700"/>
+                <a:gridCol w="1702525"/>
+                <a:gridCol w="8813074"/>
               </a:tblGrid>
               <a:tr h="365760">
                 <a:tc>
@@ -10494,7 +8068,7 @@
                           </a:solidFill>
                           <a:latin typeface="Calibri"/>
                         </a:rPr>
-                        <a:t>The traveller says</a:t>
+                        <a:t>Step</a:t>
                       </a:r>
                     </a:p>
                   </a:txBody>
@@ -10516,7 +8090,7 @@
                           </a:solidFill>
                           <a:latin typeface="Calibri"/>
                         </a:rPr>
-                        <a:t>What changes</a:t>
+                        <a:t>What it does</a:t>
                       </a:r>
                     </a:p>
                   </a:txBody>
@@ -10540,7 +8114,7 @@
                           </a:solidFill>
                           <a:latin typeface="Calibri"/>
                         </a:rPr>
-                        <a:t>nothing</a:t>
+                        <a:t>1  Divide</a:t>
                       </a:r>
                     </a:p>
                   </a:txBody>
@@ -10562,7 +8136,7 @@
                           </a:solidFill>
                           <a:latin typeface="Calibri"/>
                         </a:rPr>
-                        <a:t>Split comes from what this trip's parts actually cost</a:t>
+                        <a:t>Splits the budget across flights, hotel, food and activities — worked out from this trip, not a fixed %</a:t>
                       </a:r>
                     </a:p>
                   </a:txBody>
@@ -10586,7 +8160,7 @@
                           </a:solidFill>
                           <a:latin typeface="Calibri"/>
                         </a:rPr>
-                        <a:t>"a luxury stay"</a:t>
+                        <a:t>2  Listen</a:t>
                       </a:r>
                     </a:p>
                   </a:txBody>
@@ -10608,7 +8182,7 @@
                           </a:solidFill>
                           <a:latin typeface="Calibri"/>
                         </a:rPr>
-                        <a:t>More to the room. Flights and food stay sensible</a:t>
+                        <a:t>"a luxury stay" moves money to the room; "I can compromise" moves it to experiences</a:t>
                       </a:r>
                     </a:p>
                   </a:txBody>
@@ -10632,7 +8206,7 @@
                           </a:solidFill>
                           <a:latin typeface="Calibri"/>
                         </a:rPr>
-                        <a:t>"luxury trip"</a:t>
+                        <a:t>3  Check</a:t>
                       </a:r>
                     </a:p>
                   </a:txBody>
@@ -10654,7 +8228,7 @@
                           </a:solidFill>
                           <a:latin typeface="Calibri"/>
                         </a:rPr>
-                        <a:t>Spread across the room, the food and the doing</a:t>
+                        <a:t>Works out the cheapest this trip could possibly cost</a:t>
                       </a:r>
                     </a:p>
                   </a:txBody>
@@ -10678,7 +8252,7 @@
                           </a:solidFill>
                           <a:latin typeface="Calibri"/>
                         </a:rPr>
-                        <a:t>"I can compromise"</a:t>
+                        <a:t>4  Refuse</a:t>
                       </a:r>
                     </a:p>
                   </a:txBody>
@@ -10700,7 +8274,7 @@
                           </a:solidFill>
                           <a:latin typeface="Calibri"/>
                         </a:rPr>
-                        <a:t>Money moves out of the room into experiences</a:t>
+                        <a:t>If the budget is below that, it says so and offers three ways to fix it</a:t>
                       </a:r>
                     </a:p>
                   </a:txBody>
@@ -10711,52 +8285,6 @@
                   </a:tcPr>
                 </a:tc>
               </a:tr>
-              <a:tr h="365760">
-                <a:tc>
-                  <a:txBody>
-                    <a:bodyPr/>
-                    <a:lstStyle/>
-                    <a:p>
-                      <a:r>
-                        <a:rPr sz="1350" b="0">
-                          <a:solidFill>
-                            <a:srgbClr val="161A23"/>
-                          </a:solidFill>
-                          <a:latin typeface="Calibri"/>
-                        </a:rPr>
-                        <a:t>their own split</a:t>
-                      </a:r>
-                    </a:p>
-                  </a:txBody>
-                  <a:tcPr>
-                    <a:solidFill>
-                      <a:srgbClr val="FFFFFF"/>
-                    </a:solidFill>
-                  </a:tcPr>
-                </a:tc>
-                <a:tc>
-                  <a:txBody>
-                    <a:bodyPr/>
-                    <a:lstStyle/>
-                    <a:p>
-                      <a:r>
-                        <a:rPr sz="1350" b="0">
-                          <a:solidFill>
-                            <a:srgbClr val="161A23"/>
-                          </a:solidFill>
-                          <a:latin typeface="Calibri"/>
-                        </a:rPr>
-                        <a:t>Used exactly as given. It is their money</a:t>
-                      </a:r>
-                    </a:p>
-                  </a:txBody>
-                  <a:tcPr>
-                    <a:solidFill>
-                      <a:srgbClr val="FFFFFF"/>
-                    </a:solidFill>
-                  </a:tcPr>
-                </a:tc>
-              </a:tr>
             </a:tbl>
           </a:graphicData>
         </a:graphic>
@@ -10769,8 +8297,8 @@
         </p:nvSpPr>
         <p:spPr>
           <a:xfrm>
-            <a:off x="822960" y="5120640"/>
-            <a:ext cx="10515600" cy="1005840"/>
+            <a:off x="822960" y="4617720"/>
+            <a:ext cx="3515258" cy="1188720"/>
           </a:xfrm>
           <a:prstGeom prst="rect">
             <a:avLst/>
@@ -10783,19 +8311,1083 @@
           </a:bodyPr>
           <a:lstStyle/>
           <a:p>
+            <a:pPr algn="ctr">
+              <a:lnSpc>
+                <a:spcPct val="100000"/>
+              </a:lnSpc>
+            </a:pPr>
+            <a:r>
+              <a:rPr sz="6000" b="1">
+                <a:solidFill>
+                  <a:srgbClr val="A85B00"/>
+                </a:solidFill>
+                <a:latin typeface="Calibri"/>
+              </a:rPr>
+              <a:t>$800</a:t>
+            </a:r>
+          </a:p>
+        </p:txBody>
+      </p:sp>
+      <p:sp>
+        <p:nvSpPr>
+          <p:cNvPr id="7" name="TextBox 6"/>
+          <p:cNvSpPr txBox="1"/>
+          <p:nvPr/>
+        </p:nvSpPr>
+        <p:spPr>
+          <a:xfrm>
+            <a:off x="822960" y="5760720"/>
+            <a:ext cx="3515258" cy="731520"/>
+          </a:xfrm>
+          <a:prstGeom prst="rect">
+            <a:avLst/>
+          </a:prstGeom>
+          <a:noFill/>
+        </p:spPr>
+        <p:txBody>
+          <a:bodyPr wrap="square" anchor="t">
+            <a:spAutoFit/>
+          </a:bodyPr>
+          <a:lstStyle/>
+          <a:p>
+            <a:pPr algn="ctr">
+              <a:lnSpc>
+                <a:spcPct val="100000"/>
+              </a:lnSpc>
+            </a:pPr>
+            <a:r>
+              <a:rPr sz="1400" b="0">
+                <a:solidFill>
+                  <a:srgbClr val="545C6E"/>
+                </a:solidFill>
+                <a:latin typeface="Calibri"/>
+              </a:rPr>
+              <a:t>asked for</a:t>
+            </a:r>
+          </a:p>
+        </p:txBody>
+      </p:sp>
+      <p:sp>
+        <p:nvSpPr>
+          <p:cNvPr id="8" name="TextBox 7"/>
+          <p:cNvSpPr txBox="1"/>
+          <p:nvPr/>
+        </p:nvSpPr>
+        <p:spPr>
+          <a:xfrm>
+            <a:off x="4338218" y="4617720"/>
+            <a:ext cx="3515258" cy="1188720"/>
+          </a:xfrm>
+          <a:prstGeom prst="rect">
+            <a:avLst/>
+          </a:prstGeom>
+          <a:noFill/>
+        </p:spPr>
+        <p:txBody>
+          <a:bodyPr wrap="square" anchor="t">
+            <a:spAutoFit/>
+          </a:bodyPr>
+          <a:lstStyle/>
+          <a:p>
+            <a:pPr algn="ctr">
+              <a:lnSpc>
+                <a:spcPct val="100000"/>
+              </a:lnSpc>
+            </a:pPr>
+            <a:r>
+              <a:rPr sz="6000" b="1">
+                <a:solidFill>
+                  <a:srgbClr val="A85B00"/>
+                </a:solidFill>
+                <a:latin typeface="Calibri"/>
+              </a:rPr>
+              <a:t>$837</a:t>
+            </a:r>
+          </a:p>
+        </p:txBody>
+      </p:sp>
+      <p:sp>
+        <p:nvSpPr>
+          <p:cNvPr id="9" name="TextBox 8"/>
+          <p:cNvSpPr txBox="1"/>
+          <p:nvPr/>
+        </p:nvSpPr>
+        <p:spPr>
+          <a:xfrm>
+            <a:off x="4338218" y="5760720"/>
+            <a:ext cx="3515258" cy="731520"/>
+          </a:xfrm>
+          <a:prstGeom prst="rect">
+            <a:avLst/>
+          </a:prstGeom>
+          <a:noFill/>
+        </p:spPr>
+        <p:txBody>
+          <a:bodyPr wrap="square" anchor="t">
+            <a:spAutoFit/>
+          </a:bodyPr>
+          <a:lstStyle/>
+          <a:p>
+            <a:pPr algn="ctr">
+              <a:lnSpc>
+                <a:spcPct val="100000"/>
+              </a:lnSpc>
+            </a:pPr>
+            <a:r>
+              <a:rPr sz="1400" b="0">
+                <a:solidFill>
+                  <a:srgbClr val="545C6E"/>
+                </a:solidFill>
+                <a:latin typeface="Calibri"/>
+              </a:rPr>
+              <a:t>cheapest it can be done</a:t>
+            </a:r>
+          </a:p>
+        </p:txBody>
+      </p:sp>
+      <p:sp>
+        <p:nvSpPr>
+          <p:cNvPr id="10" name="TextBox 9"/>
+          <p:cNvSpPr txBox="1"/>
+          <p:nvPr/>
+        </p:nvSpPr>
+        <p:spPr>
+          <a:xfrm>
+            <a:off x="7853476" y="4617720"/>
+            <a:ext cx="3515258" cy="1188720"/>
+          </a:xfrm>
+          <a:prstGeom prst="rect">
+            <a:avLst/>
+          </a:prstGeom>
+          <a:noFill/>
+        </p:spPr>
+        <p:txBody>
+          <a:bodyPr wrap="square" anchor="t">
+            <a:spAutoFit/>
+          </a:bodyPr>
+          <a:lstStyle/>
+          <a:p>
+            <a:pPr algn="ctr">
+              <a:lnSpc>
+                <a:spcPct val="100000"/>
+              </a:lnSpc>
+            </a:pPr>
+            <a:r>
+              <a:rPr sz="6000" b="1">
+                <a:solidFill>
+                  <a:srgbClr val="A85B00"/>
+                </a:solidFill>
+                <a:latin typeface="Calibri"/>
+              </a:rPr>
+              <a:t>REFUSED</a:t>
+            </a:r>
+          </a:p>
+        </p:txBody>
+      </p:sp>
+      <p:sp>
+        <p:nvSpPr>
+          <p:cNvPr id="11" name="TextBox 10"/>
+          <p:cNvSpPr txBox="1"/>
+          <p:nvPr/>
+        </p:nvSpPr>
+        <p:spPr>
+          <a:xfrm>
+            <a:off x="7853476" y="5760720"/>
+            <a:ext cx="3515258" cy="731520"/>
+          </a:xfrm>
+          <a:prstGeom prst="rect">
+            <a:avLst/>
+          </a:prstGeom>
+          <a:noFill/>
+        </p:spPr>
+        <p:txBody>
+          <a:bodyPr wrap="square" anchor="t">
+            <a:spAutoFit/>
+          </a:bodyPr>
+          <a:lstStyle/>
+          <a:p>
+            <a:pPr algn="ctr">
+              <a:lnSpc>
+                <a:spcPct val="100000"/>
+              </a:lnSpc>
+            </a:pPr>
+            <a:r>
+              <a:rPr sz="1400" b="0">
+                <a:solidFill>
+                  <a:srgbClr val="545C6E"/>
+                </a:solidFill>
+                <a:latin typeface="Calibri"/>
+              </a:rPr>
+              <a:t>with reasons given</a:t>
+            </a:r>
+          </a:p>
+        </p:txBody>
+      </p:sp>
+      <p:sp>
+        <p:nvSpPr>
+          <p:cNvPr id="12" name="TextBox 11"/>
+          <p:cNvSpPr txBox="1"/>
+          <p:nvPr/>
+        </p:nvSpPr>
+        <p:spPr>
+          <a:xfrm>
+            <a:off x="822960" y="6035040"/>
+            <a:ext cx="10515600" cy="548640"/>
+          </a:xfrm>
+          <a:prstGeom prst="rect">
+            <a:avLst/>
+          </a:prstGeom>
+          <a:noFill/>
+        </p:spPr>
+        <p:txBody>
+          <a:bodyPr wrap="square" anchor="t">
+            <a:spAutoFit/>
+          </a:bodyPr>
+          <a:lstStyle/>
+          <a:p>
             <a:pPr algn="l">
               <a:lnSpc>
                 <a:spcPct val="100000"/>
               </a:lnSpc>
             </a:pPr>
             <a:r>
-              <a:rPr sz="1800" b="1">
+              <a:rPr sz="1500" b="0">
+                <a:solidFill>
+                  <a:srgbClr val="545C6E"/>
+                </a:solidFill>
+                <a:latin typeface="Calibri"/>
+              </a:rPr>
+              <a:t>It uses the real recorded fare. The built-in table said $350 — the API returned $734.</a:t>
+            </a:r>
+          </a:p>
+        </p:txBody>
+      </p:sp>
+    </p:spTree>
+  </p:cSld>
+  <p:clrMapOvr>
+    <a:masterClrMapping/>
+  </p:clrMapOvr>
+</p:sld>
+</file>
+
+<file path=ppt/slides/slide8.xml><?xml version="1.0" encoding="utf-8"?>
+<p:sld xmlns:a="http://schemas.openxmlformats.org/drawingml/2006/main" xmlns:p="http://schemas.openxmlformats.org/presentationml/2006/main" xmlns:r="http://schemas.openxmlformats.org/officeDocument/2006/relationships">
+  <p:cSld>
+    <p:spTree>
+      <p:nvGrpSpPr>
+        <p:cNvPr id="1" name=""/>
+        <p:cNvGrpSpPr/>
+        <p:nvPr/>
+      </p:nvGrpSpPr>
+      <p:grpSpPr/>
+      <p:sp>
+        <p:nvSpPr>
+          <p:cNvPr id="2" name="TextBox 1"/>
+          <p:cNvSpPr txBox="1"/>
+          <p:nvPr/>
+        </p:nvSpPr>
+        <p:spPr>
+          <a:xfrm>
+            <a:off x="822960" y="457200"/>
+            <a:ext cx="10515600" cy="365760"/>
+          </a:xfrm>
+          <a:prstGeom prst="rect">
+            <a:avLst/>
+          </a:prstGeom>
+          <a:noFill/>
+        </p:spPr>
+        <p:txBody>
+          <a:bodyPr wrap="square" anchor="t">
+            <a:spAutoFit/>
+          </a:bodyPr>
+          <a:lstStyle/>
+          <a:p>
+            <a:pPr algn="l">
+              <a:lnSpc>
+                <a:spcPct val="100000"/>
+              </a:lnSpc>
+            </a:pPr>
+            <a:r>
+              <a:rPr sz="1200" b="1">
+                <a:solidFill>
+                  <a:srgbClr val="4338CA"/>
+                </a:solidFill>
+                <a:latin typeface="Calibri"/>
+              </a:rPr>
+              <a:t>7  ·  RESULTS</a:t>
+            </a:r>
+          </a:p>
+        </p:txBody>
+      </p:sp>
+      <p:sp>
+        <p:nvSpPr>
+          <p:cNvPr id="3" name="TextBox 2"/>
+          <p:cNvSpPr txBox="1"/>
+          <p:nvPr/>
+        </p:nvSpPr>
+        <p:spPr>
+          <a:xfrm>
+            <a:off x="822960" y="777240"/>
+            <a:ext cx="10515600" cy="822960"/>
+          </a:xfrm>
+          <a:prstGeom prst="rect">
+            <a:avLst/>
+          </a:prstGeom>
+          <a:noFill/>
+        </p:spPr>
+        <p:txBody>
+          <a:bodyPr wrap="square" anchor="t">
+            <a:spAutoFit/>
+          </a:bodyPr>
+          <a:lstStyle/>
+          <a:p>
+            <a:pPr algn="l">
+              <a:lnSpc>
+                <a:spcPct val="100000"/>
+              </a:lnSpc>
+            </a:pPr>
+            <a:r>
+              <a:rPr sz="3200" b="1">
                 <a:solidFill>
                   <a:srgbClr val="161A23"/>
                 </a:solidFill>
                 <a:latin typeface="Calibri"/>
               </a:rPr>
-              <a:t>A fixed percentage cannot know that a long-haul flight eats the budget and a short one does not.</a:t>
+              <a:t>Cheaper, and no less accurate</a:t>
+            </a:r>
+          </a:p>
+        </p:txBody>
+      </p:sp>
+      <p:sp>
+        <p:nvSpPr>
+          <p:cNvPr id="4" name="Rectangle 3"/>
+          <p:cNvSpPr/>
+          <p:nvPr/>
+        </p:nvSpPr>
+        <p:spPr>
+          <a:xfrm>
+            <a:off x="822960" y="1572768"/>
+            <a:ext cx="1005840" cy="34000"/>
+          </a:xfrm>
+          <a:prstGeom prst="rect">
+            <a:avLst/>
+          </a:prstGeom>
+          <a:solidFill>
+            <a:srgbClr val="4338CA"/>
+          </a:solidFill>
+          <a:ln>
+            <a:noFill/>
+          </a:ln>
+          <a:effectLst/>
+        </p:spPr>
+        <p:style>
+          <a:lnRef idx="1">
+            <a:schemeClr val="accent1"/>
+          </a:lnRef>
+          <a:fillRef idx="3">
+            <a:schemeClr val="accent1"/>
+          </a:fillRef>
+          <a:effectRef idx="2">
+            <a:schemeClr val="accent1"/>
+          </a:effectRef>
+          <a:fontRef idx="minor">
+            <a:schemeClr val="lt1"/>
+          </a:fontRef>
+        </p:style>
+        <p:txBody>
+          <a:bodyPr rtlCol="0" anchor="ctr"/>
+          <a:lstStyle/>
+          <a:p>
+            <a:pPr algn="ctr"/>
+          </a:p>
+        </p:txBody>
+      </p:sp>
+      <p:pic>
+        <p:nvPicPr>
+          <p:cNvPr id="5" name="Picture 4" descr="efficiency.png"/>
+          <p:cNvPicPr>
+            <a:picLocks noChangeAspect="1"/>
+          </p:cNvPicPr>
+          <p:nvPr/>
+        </p:nvPicPr>
+        <p:blipFill>
+          <a:blip r:embed="rId2"/>
+          <a:stretch>
+            <a:fillRect/>
+          </a:stretch>
+        </p:blipFill>
+        <p:spPr>
+          <a:xfrm>
+            <a:off x="3079623" y="1737360"/>
+            <a:ext cx="6032449" cy="3566160"/>
+          </a:xfrm>
+          <a:prstGeom prst="rect">
+            <a:avLst/>
+          </a:prstGeom>
+        </p:spPr>
+      </p:pic>
+      <p:sp>
+        <p:nvSpPr>
+          <p:cNvPr id="6" name="TextBox 5"/>
+          <p:cNvSpPr txBox="1"/>
+          <p:nvPr/>
+        </p:nvSpPr>
+        <p:spPr>
+          <a:xfrm>
+            <a:off x="822960" y="5440680"/>
+            <a:ext cx="3515258" cy="1188720"/>
+          </a:xfrm>
+          <a:prstGeom prst="rect">
+            <a:avLst/>
+          </a:prstGeom>
+          <a:noFill/>
+        </p:spPr>
+        <p:txBody>
+          <a:bodyPr wrap="square" anchor="t">
+            <a:spAutoFit/>
+          </a:bodyPr>
+          <a:lstStyle/>
+          <a:p>
+            <a:pPr algn="ctr">
+              <a:lnSpc>
+                <a:spcPct val="100000"/>
+              </a:lnSpc>
+            </a:pPr>
+            <a:r>
+              <a:rPr sz="6000" b="1">
+                <a:solidFill>
+                  <a:srgbClr val="4338CA"/>
+                </a:solidFill>
+                <a:latin typeface="Calibri"/>
+              </a:rPr>
+              <a:t>15x</a:t>
+            </a:r>
+          </a:p>
+        </p:txBody>
+      </p:sp>
+      <p:sp>
+        <p:nvSpPr>
+          <p:cNvPr id="7" name="TextBox 6"/>
+          <p:cNvSpPr txBox="1"/>
+          <p:nvPr/>
+        </p:nvSpPr>
+        <p:spPr>
+          <a:xfrm>
+            <a:off x="822960" y="6583680"/>
+            <a:ext cx="3515258" cy="731520"/>
+          </a:xfrm>
+          <a:prstGeom prst="rect">
+            <a:avLst/>
+          </a:prstGeom>
+          <a:noFill/>
+        </p:spPr>
+        <p:txBody>
+          <a:bodyPr wrap="square" anchor="t">
+            <a:spAutoFit/>
+          </a:bodyPr>
+          <a:lstStyle/>
+          <a:p>
+            <a:pPr algn="ctr">
+              <a:lnSpc>
+                <a:spcPct val="100000"/>
+              </a:lnSpc>
+            </a:pPr>
+            <a:r>
+              <a:rPr sz="1400" b="0">
+                <a:solidFill>
+                  <a:srgbClr val="545C6E"/>
+                </a:solidFill>
+                <a:latin typeface="Calibri"/>
+              </a:rPr>
+              <a:t>cheaper than the agent version</a:t>
+            </a:r>
+          </a:p>
+        </p:txBody>
+      </p:sp>
+      <p:sp>
+        <p:nvSpPr>
+          <p:cNvPr id="8" name="TextBox 7"/>
+          <p:cNvSpPr txBox="1"/>
+          <p:nvPr/>
+        </p:nvSpPr>
+        <p:spPr>
+          <a:xfrm>
+            <a:off x="4338218" y="5440680"/>
+            <a:ext cx="3515258" cy="1188720"/>
+          </a:xfrm>
+          <a:prstGeom prst="rect">
+            <a:avLst/>
+          </a:prstGeom>
+          <a:noFill/>
+        </p:spPr>
+        <p:txBody>
+          <a:bodyPr wrap="square" anchor="t">
+            <a:spAutoFit/>
+          </a:bodyPr>
+          <a:lstStyle/>
+          <a:p>
+            <a:pPr algn="ctr">
+              <a:lnSpc>
+                <a:spcPct val="100000"/>
+              </a:lnSpc>
+            </a:pPr>
+            <a:r>
+              <a:rPr sz="6000" b="1">
+                <a:solidFill>
+                  <a:srgbClr val="4338CA"/>
+                </a:solidFill>
+                <a:latin typeface="Calibri"/>
+              </a:rPr>
+              <a:t>47%</a:t>
+            </a:r>
+          </a:p>
+        </p:txBody>
+      </p:sp>
+      <p:sp>
+        <p:nvSpPr>
+          <p:cNvPr id="9" name="TextBox 8"/>
+          <p:cNvSpPr txBox="1"/>
+          <p:nvPr/>
+        </p:nvSpPr>
+        <p:spPr>
+          <a:xfrm>
+            <a:off x="4338218" y="6583680"/>
+            <a:ext cx="3515258" cy="731520"/>
+          </a:xfrm>
+          <a:prstGeom prst="rect">
+            <a:avLst/>
+          </a:prstGeom>
+          <a:noFill/>
+        </p:spPr>
+        <p:txBody>
+          <a:bodyPr wrap="square" anchor="t">
+            <a:spAutoFit/>
+          </a:bodyPr>
+          <a:lstStyle/>
+          <a:p>
+            <a:pPr algn="ctr">
+              <a:lnSpc>
+                <a:spcPct val="100000"/>
+              </a:lnSpc>
+            </a:pPr>
+            <a:r>
+              <a:rPr sz="1400" b="0">
+                <a:solidFill>
+                  <a:srgbClr val="545C6E"/>
+                </a:solidFill>
+                <a:latin typeface="Calibri"/>
+              </a:rPr>
+              <a:t>of D's prices match a real fare</a:t>
+            </a:r>
+          </a:p>
+        </p:txBody>
+      </p:sp>
+      <p:sp>
+        <p:nvSpPr>
+          <p:cNvPr id="10" name="TextBox 9"/>
+          <p:cNvSpPr txBox="1"/>
+          <p:nvPr/>
+        </p:nvSpPr>
+        <p:spPr>
+          <a:xfrm>
+            <a:off x="7853476" y="5440680"/>
+            <a:ext cx="3515258" cy="1188720"/>
+          </a:xfrm>
+          <a:prstGeom prst="rect">
+            <a:avLst/>
+          </a:prstGeom>
+          <a:noFill/>
+        </p:spPr>
+        <p:txBody>
+          <a:bodyPr wrap="square" anchor="t">
+            <a:spAutoFit/>
+          </a:bodyPr>
+          <a:lstStyle/>
+          <a:p>
+            <a:pPr algn="ctr">
+              <a:lnSpc>
+                <a:spcPct val="100000"/>
+              </a:lnSpc>
+            </a:pPr>
+            <a:r>
+              <a:rPr sz="6000" b="1">
+                <a:solidFill>
+                  <a:srgbClr val="4338CA"/>
+                </a:solidFill>
+                <a:latin typeface="Calibri"/>
+              </a:rPr>
+              <a:t>1.7%</a:t>
+            </a:r>
+          </a:p>
+        </p:txBody>
+      </p:sp>
+      <p:sp>
+        <p:nvSpPr>
+          <p:cNvPr id="11" name="TextBox 10"/>
+          <p:cNvSpPr txBox="1"/>
+          <p:nvPr/>
+        </p:nvSpPr>
+        <p:spPr>
+          <a:xfrm>
+            <a:off x="7853476" y="6583680"/>
+            <a:ext cx="3515258" cy="731520"/>
+          </a:xfrm>
+          <a:prstGeom prst="rect">
+            <a:avLst/>
+          </a:prstGeom>
+          <a:noFill/>
+        </p:spPr>
+        <p:txBody>
+          <a:bodyPr wrap="square" anchor="t">
+            <a:spAutoFit/>
+          </a:bodyPr>
+          <a:lstStyle/>
+          <a:p>
+            <a:pPr algn="ctr">
+              <a:lnSpc>
+                <a:spcPct val="100000"/>
+              </a:lnSpc>
+            </a:pPr>
+            <a:r>
+              <a:rPr sz="1400" b="0">
+                <a:solidFill>
+                  <a:srgbClr val="545C6E"/>
+                </a:solidFill>
+                <a:latin typeface="Calibri"/>
+              </a:rPr>
+              <a:t>of A's do — it has no tools</a:t>
+            </a:r>
+          </a:p>
+        </p:txBody>
+      </p:sp>
+    </p:spTree>
+  </p:cSld>
+  <p:clrMapOvr>
+    <a:masterClrMapping/>
+  </p:clrMapOvr>
+</p:sld>
+</file>
+
+<file path=ppt/slides/slide9.xml><?xml version="1.0" encoding="utf-8"?>
+<p:sld xmlns:a="http://schemas.openxmlformats.org/drawingml/2006/main" xmlns:p="http://schemas.openxmlformats.org/presentationml/2006/main" xmlns:r="http://schemas.openxmlformats.org/officeDocument/2006/relationships">
+  <p:cSld>
+    <p:spTree>
+      <p:nvGrpSpPr>
+        <p:cNvPr id="1" name=""/>
+        <p:cNvGrpSpPr/>
+        <p:nvPr/>
+      </p:nvGrpSpPr>
+      <p:grpSpPr/>
+      <p:sp>
+        <p:nvSpPr>
+          <p:cNvPr id="2" name="TextBox 1"/>
+          <p:cNvSpPr txBox="1"/>
+          <p:nvPr/>
+        </p:nvSpPr>
+        <p:spPr>
+          <a:xfrm>
+            <a:off x="822960" y="457200"/>
+            <a:ext cx="10515600" cy="365760"/>
+          </a:xfrm>
+          <a:prstGeom prst="rect">
+            <a:avLst/>
+          </a:prstGeom>
+          <a:noFill/>
+        </p:spPr>
+        <p:txBody>
+          <a:bodyPr wrap="square" anchor="t">
+            <a:spAutoFit/>
+          </a:bodyPr>
+          <a:lstStyle/>
+          <a:p>
+            <a:pPr algn="l">
+              <a:lnSpc>
+                <a:spcPct val="100000"/>
+              </a:lnSpc>
+            </a:pPr>
+            <a:r>
+              <a:rPr sz="1200" b="1">
+                <a:solidFill>
+                  <a:srgbClr val="4338CA"/>
+                </a:solidFill>
+                <a:latin typeface="Calibri"/>
+              </a:rPr>
+              <a:t>8  ·  PROBLEMS IN MY OWN SYSTEM</a:t>
+            </a:r>
+          </a:p>
+        </p:txBody>
+      </p:sp>
+      <p:sp>
+        <p:nvSpPr>
+          <p:cNvPr id="3" name="TextBox 2"/>
+          <p:cNvSpPr txBox="1"/>
+          <p:nvPr/>
+        </p:nvSpPr>
+        <p:spPr>
+          <a:xfrm>
+            <a:off x="822960" y="777240"/>
+            <a:ext cx="10515600" cy="822960"/>
+          </a:xfrm>
+          <a:prstGeom prst="rect">
+            <a:avLst/>
+          </a:prstGeom>
+          <a:noFill/>
+        </p:spPr>
+        <p:txBody>
+          <a:bodyPr wrap="square" anchor="t">
+            <a:spAutoFit/>
+          </a:bodyPr>
+          <a:lstStyle/>
+          <a:p>
+            <a:pPr algn="l">
+              <a:lnSpc>
+                <a:spcPct val="100000"/>
+              </a:lnSpc>
+            </a:pPr>
+            <a:r>
+              <a:rPr sz="3200" b="1">
+                <a:solidFill>
+                  <a:srgbClr val="161A23"/>
+                </a:solidFill>
+                <a:latin typeface="Calibri"/>
+              </a:rPr>
+              <a:t>Found by measuring it. Reported, not hidden</a:t>
+            </a:r>
+          </a:p>
+        </p:txBody>
+      </p:sp>
+      <p:sp>
+        <p:nvSpPr>
+          <p:cNvPr id="4" name="Rectangle 3"/>
+          <p:cNvSpPr/>
+          <p:nvPr/>
+        </p:nvSpPr>
+        <p:spPr>
+          <a:xfrm>
+            <a:off x="822960" y="1572768"/>
+            <a:ext cx="1005840" cy="34000"/>
+          </a:xfrm>
+          <a:prstGeom prst="rect">
+            <a:avLst/>
+          </a:prstGeom>
+          <a:solidFill>
+            <a:srgbClr val="4338CA"/>
+          </a:solidFill>
+          <a:ln>
+            <a:noFill/>
+          </a:ln>
+          <a:effectLst/>
+        </p:spPr>
+        <p:style>
+          <a:lnRef idx="1">
+            <a:schemeClr val="accent1"/>
+          </a:lnRef>
+          <a:fillRef idx="3">
+            <a:schemeClr val="accent1"/>
+          </a:fillRef>
+          <a:effectRef idx="2">
+            <a:schemeClr val="accent1"/>
+          </a:effectRef>
+          <a:fontRef idx="minor">
+            <a:schemeClr val="lt1"/>
+          </a:fontRef>
+        </p:style>
+        <p:txBody>
+          <a:bodyPr rtlCol="0" anchor="ctr"/>
+          <a:lstStyle/>
+          <a:p>
+            <a:pPr algn="ctr"/>
+          </a:p>
+        </p:txBody>
+      </p:sp>
+      <p:sp>
+        <p:nvSpPr>
+          <p:cNvPr id="5" name="TextBox 4"/>
+          <p:cNvSpPr txBox="1"/>
+          <p:nvPr/>
+        </p:nvSpPr>
+        <p:spPr>
+          <a:xfrm>
+            <a:off x="822960" y="2103120"/>
+            <a:ext cx="3515258" cy="1188720"/>
+          </a:xfrm>
+          <a:prstGeom prst="rect">
+            <a:avLst/>
+          </a:prstGeom>
+          <a:noFill/>
+        </p:spPr>
+        <p:txBody>
+          <a:bodyPr wrap="square" anchor="t">
+            <a:spAutoFit/>
+          </a:bodyPr>
+          <a:lstStyle/>
+          <a:p>
+            <a:pPr algn="ctr">
+              <a:lnSpc>
+                <a:spcPct val="100000"/>
+              </a:lnSpc>
+            </a:pPr>
+            <a:r>
+              <a:rPr sz="6000" b="1">
+                <a:solidFill>
+                  <a:srgbClr val="A85B00"/>
+                </a:solidFill>
+                <a:latin typeface="Calibri"/>
+              </a:rPr>
+              <a:t>3/9</a:t>
+            </a:r>
+          </a:p>
+        </p:txBody>
+      </p:sp>
+      <p:sp>
+        <p:nvSpPr>
+          <p:cNvPr id="6" name="TextBox 5"/>
+          <p:cNvSpPr txBox="1"/>
+          <p:nvPr/>
+        </p:nvSpPr>
+        <p:spPr>
+          <a:xfrm>
+            <a:off x="822960" y="3246120"/>
+            <a:ext cx="3515258" cy="731520"/>
+          </a:xfrm>
+          <a:prstGeom prst="rect">
+            <a:avLst/>
+          </a:prstGeom>
+          <a:noFill/>
+        </p:spPr>
+        <p:txBody>
+          <a:bodyPr wrap="square" anchor="t">
+            <a:spAutoFit/>
+          </a:bodyPr>
+          <a:lstStyle/>
+          <a:p>
+            <a:pPr algn="ctr">
+              <a:lnSpc>
+                <a:spcPct val="100000"/>
+              </a:lnSpc>
+            </a:pPr>
+            <a:r>
+              <a:rPr sz="1400" b="0">
+                <a:solidFill>
+                  <a:srgbClr val="545C6E"/>
+                </a:solidFill>
+                <a:latin typeface="Calibri"/>
+              </a:rPr>
+              <a:t>design checks pass.
+Six things I claimed do not happen</a:t>
+            </a:r>
+          </a:p>
+        </p:txBody>
+      </p:sp>
+      <p:sp>
+        <p:nvSpPr>
+          <p:cNvPr id="7" name="TextBox 6"/>
+          <p:cNvSpPr txBox="1"/>
+          <p:nvPr/>
+        </p:nvSpPr>
+        <p:spPr>
+          <a:xfrm>
+            <a:off x="4338218" y="2103120"/>
+            <a:ext cx="3515258" cy="1188720"/>
+          </a:xfrm>
+          <a:prstGeom prst="rect">
+            <a:avLst/>
+          </a:prstGeom>
+          <a:noFill/>
+        </p:spPr>
+        <p:txBody>
+          <a:bodyPr wrap="square" anchor="t">
+            <a:spAutoFit/>
+          </a:bodyPr>
+          <a:lstStyle/>
+          <a:p>
+            <a:pPr algn="ctr">
+              <a:lnSpc>
+                <a:spcPct val="100000"/>
+              </a:lnSpc>
+            </a:pPr>
+            <a:r>
+              <a:rPr sz="6000" b="1">
+                <a:solidFill>
+                  <a:srgbClr val="A85B00"/>
+                </a:solidFill>
+                <a:latin typeface="Calibri"/>
+              </a:rPr>
+              <a:t>50%</a:t>
+            </a:r>
+          </a:p>
+        </p:txBody>
+      </p:sp>
+      <p:sp>
+        <p:nvSpPr>
+          <p:cNvPr id="8" name="TextBox 7"/>
+          <p:cNvSpPr txBox="1"/>
+          <p:nvPr/>
+        </p:nvSpPr>
+        <p:spPr>
+          <a:xfrm>
+            <a:off x="4338218" y="3246120"/>
+            <a:ext cx="3515258" cy="731520"/>
+          </a:xfrm>
+          <a:prstGeom prst="rect">
+            <a:avLst/>
+          </a:prstGeom>
+          <a:noFill/>
+        </p:spPr>
+        <p:txBody>
+          <a:bodyPr wrap="square" anchor="t">
+            <a:spAutoFit/>
+          </a:bodyPr>
+          <a:lstStyle/>
+          <a:p>
+            <a:pPr algn="ctr">
+              <a:lnSpc>
+                <a:spcPct val="100000"/>
+              </a:lnSpc>
+            </a:pPr>
+            <a:r>
+              <a:rPr sz="1400" b="0">
+                <a:solidFill>
+                  <a:srgbClr val="545C6E"/>
+                </a:solidFill>
+                <a:latin typeface="Calibri"/>
+              </a:rPr>
+              <a:t>of impossible budgets caught.
+It misses the other half</a:t>
+            </a:r>
+          </a:p>
+        </p:txBody>
+      </p:sp>
+      <p:sp>
+        <p:nvSpPr>
+          <p:cNvPr id="9" name="TextBox 8"/>
+          <p:cNvSpPr txBox="1"/>
+          <p:nvPr/>
+        </p:nvSpPr>
+        <p:spPr>
+          <a:xfrm>
+            <a:off x="7853476" y="2103120"/>
+            <a:ext cx="3515258" cy="1188720"/>
+          </a:xfrm>
+          <a:prstGeom prst="rect">
+            <a:avLst/>
+          </a:prstGeom>
+          <a:noFill/>
+        </p:spPr>
+        <p:txBody>
+          <a:bodyPr wrap="square" anchor="t">
+            <a:spAutoFit/>
+          </a:bodyPr>
+          <a:lstStyle/>
+          <a:p>
+            <a:pPr algn="ctr">
+              <a:lnSpc>
+                <a:spcPct val="100000"/>
+              </a:lnSpc>
+            </a:pPr>
+            <a:r>
+              <a:rPr sz="6000" b="1">
+                <a:solidFill>
+                  <a:srgbClr val="A85B00"/>
+                </a:solidFill>
+                <a:latin typeface="Calibri"/>
+              </a:rPr>
+              <a:t>1/20</a:t>
+            </a:r>
+          </a:p>
+        </p:txBody>
+      </p:sp>
+      <p:sp>
+        <p:nvSpPr>
+          <p:cNvPr id="10" name="TextBox 9"/>
+          <p:cNvSpPr txBox="1"/>
+          <p:nvPr/>
+        </p:nvSpPr>
+        <p:spPr>
+          <a:xfrm>
+            <a:off x="7853476" y="3246120"/>
+            <a:ext cx="3515258" cy="731520"/>
+          </a:xfrm>
+          <a:prstGeom prst="rect">
+            <a:avLst/>
+          </a:prstGeom>
+          <a:noFill/>
+        </p:spPr>
+        <p:txBody>
+          <a:bodyPr wrap="square" anchor="t">
+            <a:spAutoFit/>
+          </a:bodyPr>
+          <a:lstStyle/>
+          <a:p>
+            <a:pPr algn="ctr">
+              <a:lnSpc>
+                <a:spcPct val="100000"/>
+              </a:lnSpc>
+            </a:pPr>
+            <a:r>
+              <a:rPr sz="1400" b="0">
+                <a:solidFill>
+                  <a:srgbClr val="545C6E"/>
+                </a:solidFill>
+                <a:latin typeface="Calibri"/>
+              </a:rPr>
+              <a:t>trips measured for cost.
+The free API limits stopped me</a:t>
+            </a:r>
+          </a:p>
+        </p:txBody>
+      </p:sp>
+      <p:sp>
+        <p:nvSpPr>
+          <p:cNvPr id="11" name="TextBox 10"/>
+          <p:cNvSpPr txBox="1"/>
+          <p:nvPr/>
+        </p:nvSpPr>
+        <p:spPr>
+          <a:xfrm>
+            <a:off x="822960" y="4846320"/>
+            <a:ext cx="10515600" cy="1280160"/>
+          </a:xfrm>
+          <a:prstGeom prst="rect">
+            <a:avLst/>
+          </a:prstGeom>
+          <a:noFill/>
+        </p:spPr>
+        <p:txBody>
+          <a:bodyPr wrap="square" anchor="t">
+            <a:spAutoFit/>
+          </a:bodyPr>
+          <a:lstStyle/>
+          <a:p>
+            <a:pPr algn="l">
+              <a:lnSpc>
+                <a:spcPct val="125000"/>
+              </a:lnSpc>
+            </a:pPr>
+            <a:r>
+              <a:rPr sz="2000" b="1">
+                <a:solidFill>
+                  <a:srgbClr val="161A23"/>
+                </a:solidFill>
+                <a:latin typeface="Calibri"/>
+              </a:rPr>
+              <a:t>All three are in the report, with the evidence.</a:t>
+            </a:r>
+          </a:p>
+          <a:p>
+            <a:pPr algn="l">
+              <a:lnSpc>
+                <a:spcPct val="125000"/>
+              </a:lnSpc>
+            </a:pPr>
+            <a:r>
+              <a:rPr sz="1700" b="0">
+                <a:solidFill>
+                  <a:srgbClr val="545C6E"/>
+                </a:solidFill>
+                <a:latin typeface="Calibri"/>
+              </a:rPr>
+              <a:t>An evaluation that only confirms its author is not an evaluation.</a:t>
             </a:r>
           </a:p>
         </p:txBody>

--- a/submission/CMP7200_Viva_Presentation.pptx
+++ b/submission/CMP7200_Viva_Presentation.pptx
@@ -511,7 +511,7 @@
           <a:lstStyle/>
           <a:p>
             <a:r>
-              <a:t>Ten slides, fifteen minutes. The project is a working travel planner. The research question is which steps inside it actually need AI. I built it four ways and measured all four: the agent version needed 20.6 AI calls per trip and mine needs 2.0.</a:t>
+              <a:t>Ten slides. The project is a working travel planner. The question is which parts of it actually need AI. I built it four different ways and measured all four: the all-agent version needs 20.6 AI calls per trip and mine needs 2.0.</a:t>
             </a:r>
           </a:p>
         </p:txBody>
@@ -581,7 +581,7 @@
           <a:lstStyle/>
           <a:p>
             <a:r>
-              <a:t>Land the claim and its limit in the same breath. The effect is large and the sample is narrow, and both are in the abstract. The saved replies, the harness and the twenty trips are committed, so the next person - or me next month when the limits reset - can widen it without rebuilding.</a:t>
+              <a:t>Land the claim and its limit together. The effect is large and the sample is narrow, and both are in the abstract. The saved replies, the test harness and the twenty trips are all committed, so this can be widened next month when the API limits reset, without rebuilding anything.</a:t>
             </a:r>
           </a:p>
         </p:txBody>
@@ -651,7 +651,7 @@
           <a:lstStyle/>
           <a:p>
             <a:r>
-              <a:t>Six agents became three. The three that stayed each fail the test "could I write this as ordinary code?" - you cannot write a rule that understands any phrasing a person might use, and you cannot write a rule that makes a day pleasant. The three that went were only ever making API calls, and an IF statement does that perfectly well.</a:t>
+              <a:t>The test for each agent: could I write its job as ordinary code? You cannot write a rule that understands any way a person might phrase a request, and you cannot write a rule that makes a day pleasant. You can absolutely write a rule that calls a flight API with a date.</a:t>
             </a:r>
           </a:p>
         </p:txBody>
@@ -721,7 +721,7 @@
           <a:lstStyle/>
           <a:p>
             <a:r>
-              <a:t>Tuning the six agents without changing the design cut the text sent by 89%. Comparing B against D alone would have mixed two effects together and claimed credit for both.</a:t>
+              <a:t>A is the floor: it shows what AI produces with no real data. B is my original proposal. C is the same design with sensible settings, which is what makes the comparison honest. D is the idea being tested.</a:t>
             </a:r>
           </a:p>
         </p:txBody>
@@ -791,7 +791,7 @@
           <a:lstStyle/>
           <a:p>
             <a:r>
-              <a:t>The single most useful table in the deck. The hotel agent held 8 tools and was allowed 10 loops. Every loop is a full AI call that re-sends the conversation and all 8 tool descriptions. Twenty tool slots in B, four in C, four in D - and in D they belong to the coordinator, which does not loop looking for data because the data is already there.</a:t>
+              <a:t>The most useful slide for a question. In B the hotel agent had eight tools and was allowed ten thinking steps; each step is a full AI call that re-sends the conversation and all eight tool descriptions. In C the same agent has one tool that returns the best three hotels already trimmed. In D there is no hotel agent at all - four lines of Python make the call.</a:t>
             </a:r>
           </a:p>
         </p:txBody>
@@ -861,7 +861,7 @@
           <a:lstStyle/>
           <a:p>
             <a:r>
-              <a:t>Worth demonstrating live. The seven rows tick over as each step finishes, so the page never looks frozen, and the same steps are narrated in the terminal at the same time. Ask for six nights in London on three thousand dollars and it refuses, names the shortfall, and offers a shorter trip or a nearer city.</a:t>
+              <a:t>Averages over 5 runs each. A looks cheap but it retrieves nothing, so its plan is invented - the next slide but one shows that. The interesting pair is B and D: same task, same data, same AI model, 15 times the text.</a:t>
             </a:r>
           </a:p>
         </p:txBody>
@@ -931,7 +931,7 @@
           <a:lstStyle/>
           <a:p>
             <a:r>
-              <a:t>The heart of the argument. An agent that skips a tool still writes a confident, well-formatted itinerary, so you cannot tell by reading it. B never fetched attractions or restaurants at all and still produced a full plan. That is why groundedness is measured rather than judged by eye.</a:t>
+              <a:t>Worth showing live. The seven rows tick over as each step finishes, so the page never looks frozen, and the same steps are printed in the terminal at the same time. Ask for six nights in London on three thousand dollars and it refuses, says how much short you are, and offers a shorter trip or a cheaper city.</a:t>
             </a:r>
           </a:p>
         </p:txBody>
@@ -1001,7 +1001,7 @@
           <a:lstStyle/>
           <a:p>
             <a:r>
-              <a:t>Two features people ask about. Dividing: it used to be one fixed percentage for every trip, and now it reads the wording - on a two thousand dollar Istanbul trip the room budget moves from $327 to $664 depending on what the traveller says matters. Checking: tested on all 20 trips, it never wrongly refuses a workable one and misses 1 impossible one. Agreement score 0.643.</a:t>
+              <a:t>The heart of the argument. An agent that skips a tool still writes a confident, tidy itinerary, so you cannot tell by reading it. B never fetched attractions or restaurants at all and still produced a full plan. That is why I measure how much of a plan came from real data.</a:t>
             </a:r>
           </a:p>
         </p:txBody>
@@ -1071,7 +1071,7 @@
           <a:lstStyle/>
           <a:p>
             <a:r>
-              <a:t>5 runs of each version, so every bar has a range, and the ranges for B and D do not overlap. On accuracy: A is the control and scores 1.7% - a confident itinerary invented from nothing, which is what that measure exists to catch. It caught a real one: my first working run produced a complete plan while every tool call was silently failing.</a:t>
+              <a:t>Two things people ask about. Splitting: it used to be one fixed percentage for every trip; now it reads the wording, and on a two thousand dollar Istanbul trip the hotel budget moves from $327 to $664 depending on what the traveller says matters. Checking: tested on all 20 trips, it never wrongly refuses a trip that works, and misses 1 impossible one.</a:t>
             </a:r>
           </a:p>
         </p:txBody>
@@ -1141,7 +1141,7 @@
           <a:lstStyle/>
           <a:p>
             <a:r>
-              <a:t>6 of 9 checks fail: message priority is declared and never used, permissions declared and never enforced. Cost coverage is one trip because the free plans allow thirty flight searches a month, and 30 saved responses mean anyone can still reproduce every number with no API keys. All three are stated in the abstract, not buried.</a:t>
+              <a:t>Cheaper and no less accurate, so there is no hidden trade-off. The third number is deliberately on this slide: 6 of my own design checks fail - message priority is declared and never used, and permissions are declared and never enforced. Cost coverage is also only 1 of 20 trips because the free API plans allow thirty flight searches a month. All of it is in the report rather than hidden.</a:t>
             </a:r>
           </a:p>
         </p:txBody>
@@ -4163,7 +4163,7 @@
         </p:nvSpPr>
         <p:spPr>
           <a:xfrm>
-            <a:off x="822960" y="502920"/>
+            <a:off x="822960" y="548640"/>
             <a:ext cx="10515600" cy="365760"/>
           </a:xfrm>
           <a:prstGeom prst="rect">
@@ -4202,8 +4202,8 @@
         </p:nvSpPr>
         <p:spPr>
           <a:xfrm>
-            <a:off x="822960" y="914400"/>
-            <a:ext cx="10515600" cy="1097280"/>
+            <a:off x="822960" y="960120"/>
+            <a:ext cx="10515600" cy="1005840"/>
           </a:xfrm>
           <a:prstGeom prst="rect">
             <a:avLst/>
@@ -4242,7 +4242,7 @@
         <p:spPr>
           <a:xfrm>
             <a:off x="822960" y="1965960"/>
-            <a:ext cx="10515600" cy="640080"/>
+            <a:ext cx="10515600" cy="548640"/>
           </a:xfrm>
           <a:prstGeom prst="rect">
             <a:avLst/>
@@ -4267,7 +4267,7 @@
                 </a:solidFill>
                 <a:latin typeface="Calibri"/>
               </a:rPr>
-              <a:t>Type where you want to go. Get a day-by-day plan built from real flight and hotel prices.</a:t>
+              <a:t>You type where you want to go. It gives you a day-by-day plan with real flight and hotel prices.</a:t>
             </a:r>
           </a:p>
         </p:txBody>
@@ -4324,8 +4324,8 @@
         </p:nvSpPr>
         <p:spPr>
           <a:xfrm>
-            <a:off x="822960" y="3063240"/>
-            <a:ext cx="4937760" cy="2377440"/>
+            <a:off x="822960" y="3108960"/>
+            <a:ext cx="4937760" cy="2286000"/>
           </a:xfrm>
           <a:prstGeom prst="rect">
             <a:avLst/>
@@ -4382,7 +4382,7 @@
                 </a:solidFill>
                 <a:latin typeface="Calibri"/>
               </a:rPr>
-              <a:t>AI agents are given tools and left to decide when to use them.</a:t>
+              <a:t>Planning a trip needs flights, hotels, places to visit and a budget that adds up.</a:t>
             </a:r>
           </a:p>
           <a:p>
@@ -4392,7 +4392,7 @@
               </a:lnSpc>
             </a:pPr>
             <a:r>
-              <a:rPr sz="500" b="0">
+              <a:rPr sz="400" b="0">
                 <a:solidFill>
                   <a:srgbClr val="FFFFFF"/>
                 </a:solidFill>
@@ -4408,13 +4408,13 @@
               </a:lnSpc>
             </a:pPr>
             <a:r>
-              <a:rPr sz="1500" b="0">
+              <a:rPr sz="1700" b="0">
                 <a:solidFill>
-                  <a:srgbClr val="C7D2FE"/>
+                  <a:srgbClr val="FFFFFF"/>
                 </a:solidFill>
                 <a:latin typeface="Calibri"/>
               </a:rPr>
-              <a:t>That cost 21 AI calls to plan one trip — and the agents still skipped their own tools.</a:t>
+              <a:t>One AI doing all of it is slow, expensive, and makes prices up.</a:t>
             </a:r>
           </a:p>
         </p:txBody>
@@ -4427,8 +4427,8 @@
         </p:nvSpPr>
         <p:spPr>
           <a:xfrm>
-            <a:off x="6309360" y="3063240"/>
-            <a:ext cx="5029200" cy="2377440"/>
+            <a:off x="6309360" y="3108960"/>
+            <a:ext cx="5029200" cy="2286000"/>
           </a:xfrm>
           <a:prstGeom prst="rect">
             <a:avLst/>
@@ -4485,7 +4485,7 @@
                 </a:solidFill>
                 <a:latin typeface="Calibri"/>
               </a:rPr>
-              <a:t>Use AI only where a step needs thinking. Fetch data with plain code.</a:t>
+              <a:t>Split the job between several small agents, each with one clear task.</a:t>
             </a:r>
           </a:p>
           <a:p>
@@ -4495,7 +4495,7 @@
               </a:lnSpc>
             </a:pPr>
             <a:r>
-              <a:rPr sz="500" b="0">
+              <a:rPr sz="400" b="0">
                 <a:solidFill>
                   <a:srgbClr val="FFFFFF"/>
                 </a:solidFill>
@@ -4511,13 +4511,13 @@
               </a:lnSpc>
             </a:pPr>
             <a:r>
-              <a:rPr sz="1500" b="0">
+              <a:rPr sz="1700" b="0">
                 <a:solidFill>
                   <a:srgbClr val="6EE7DF"/>
                 </a:solidFill>
                 <a:latin typeface="Calibri"/>
               </a:rPr>
-              <a:t>Same plan for 2 AI calls — 15x cheaper, just as accurate.</a:t>
+              <a:t>Then give AI only to the agents that need to think.</a:t>
             </a:r>
           </a:p>
         </p:txBody>
@@ -4595,7 +4595,7 @@
         </p:nvSpPr>
         <p:spPr>
           <a:xfrm>
-            <a:off x="1005840" y="1371600"/>
+            <a:off x="1005840" y="1463040"/>
             <a:ext cx="10241280" cy="457200"/>
           </a:xfrm>
           <a:prstGeom prst="rect">
@@ -4634,7 +4634,7 @@
         </p:nvSpPr>
         <p:spPr>
           <a:xfrm>
-            <a:off x="1005840" y="1828800"/>
+            <a:off x="1005840" y="1920240"/>
             <a:ext cx="10241280" cy="2011680"/>
           </a:xfrm>
           <a:prstGeom prst="rect">
@@ -4660,7 +4660,7 @@
                 </a:solidFill>
                 <a:latin typeface="Calibri"/>
               </a:rPr>
-              <a:t>Use AI where a step needs thinking.</a:t>
+              <a:t>Give AI the steps that need thinking.</a:t>
             </a:r>
           </a:p>
           <a:p>
@@ -4676,7 +4676,7 @@
                 </a:solidFill>
                 <a:latin typeface="Calibri"/>
               </a:rPr>
-              <a:t>Everywhere else, it is just a bill.</a:t>
+              <a:t>Let normal code do the looking up.</a:t>
             </a:r>
           </a:p>
         </p:txBody>
@@ -4689,7 +4689,7 @@
         </p:nvSpPr>
         <p:spPr>
           <a:xfrm>
-            <a:off x="1005840" y="4069080"/>
+            <a:off x="1005840" y="4160520"/>
             <a:ext cx="1463040" cy="34000"/>
           </a:xfrm>
           <a:prstGeom prst="rect">
@@ -4733,7 +4733,7 @@
         </p:nvSpPr>
         <p:spPr>
           <a:xfrm>
-            <a:off x="1005840" y="4389120"/>
+            <a:off x="1005840" y="4480560"/>
             <a:ext cx="10241280" cy="1828800"/>
           </a:xfrm>
           <a:prstGeom prst="rect">
@@ -4791,7 +4791,7 @@
                 </a:solidFill>
                 <a:latin typeface="Calibri"/>
               </a:rPr>
-              <a:t>The gap: only 1 of 20 trips measured for cost. Everything needed to widen it is saved and runs without keys.</a:t>
+              <a:t>The gap: only 1 of 20 trips measured for cost, because of the free API limits.</a:t>
             </a:r>
           </a:p>
         </p:txBody>
@@ -4848,7 +4848,7 @@
                 </a:solidFill>
                 <a:latin typeface="Calibri"/>
               </a:rPr>
-              <a:t>1  ·  THE AGENTS</a:t>
+              <a:t>1  ·  WE USE SEVERAL AGENTS</a:t>
             </a:r>
           </a:p>
         </p:txBody>
@@ -4887,7 +4887,7 @@
                 </a:solidFill>
                 <a:latin typeface="Calibri"/>
               </a:rPr>
-              <a:t>Their real names, and what each one does</a:t>
+              <a:t>Each one has a name and one job</a:t>
             </a:r>
           </a:p>
         </p:txBody>
@@ -4946,7 +4946,7 @@
         </p:nvGraphicFramePr>
         <p:xfrm>
           <a:off x="822960" y="2011680"/>
-          <a:ext cx="10515599" cy="2560320"/>
+          <a:ext cx="10515598" cy="2560320"/>
         </p:xfrm>
         <a:graphic>
           <a:graphicData uri="http://schemas.openxmlformats.org/drawingml/2006/table">
@@ -4956,8 +4956,8 @@
               </a:tblPr>
               <a:tblGrid>
                 <a:gridCol w="3250276"/>
-                <a:gridCol w="5162203"/>
-                <a:gridCol w="2103120"/>
+                <a:gridCol w="4397432"/>
+                <a:gridCol w="2867890"/>
               </a:tblGrid>
               <a:tr h="365760">
                 <a:tc>
@@ -4972,7 +4972,7 @@
                           </a:solidFill>
                           <a:latin typeface="Calibri"/>
                         </a:rPr>
-                        <a:t>Agent name</a:t>
+                        <a:t>Agent</a:t>
                       </a:r>
                     </a:p>
                   </a:txBody>
@@ -4994,7 +4994,7 @@
                           </a:solidFill>
                           <a:latin typeface="Calibri"/>
                         </a:rPr>
-                        <a:t>Its job</a:t>
+                        <a:t>What it does</a:t>
                       </a:r>
                     </a:p>
                   </a:txBody>
@@ -5016,7 +5016,7 @@
                           </a:solidFill>
                           <a:latin typeface="Calibri"/>
                         </a:rPr>
-                        <a:t>Uses AI?</a:t>
+                        <a:t>Needs AI?</a:t>
                       </a:r>
                     </a:p>
                   </a:txBody>
@@ -5084,7 +5084,7 @@
                           </a:solidFill>
                           <a:latin typeface="Calibri"/>
                         </a:rPr>
-                        <a:t>YES</a:t>
+                        <a:t>Yes - people write in many ways</a:t>
                       </a:r>
                     </a:p>
                   </a:txBody>
@@ -5130,7 +5130,7 @@
                           </a:solidFill>
                           <a:latin typeface="Calibri"/>
                         </a:rPr>
-                        <a:t>Turns the words into exact fields, then checks the budget</a:t>
+                        <a:t>Turns those words into exact fields</a:t>
                       </a:r>
                     </a:p>
                   </a:txBody>
@@ -5152,7 +5152,7 @@
                           </a:solidFill>
                           <a:latin typeface="Calibri"/>
                         </a:rPr>
-                        <a:t>YES</a:t>
+                        <a:t>Yes - same reason</a:t>
                       </a:r>
                     </a:p>
                   </a:txBody>
@@ -5198,7 +5198,7 @@
                           </a:solidFill>
                           <a:latin typeface="Calibri"/>
                         </a:rPr>
-                        <a:t>Finds flights</a:t>
+                        <a:t>Looks up flights</a:t>
                       </a:r>
                     </a:p>
                   </a:txBody>
@@ -5220,7 +5220,7 @@
                           </a:solidFill>
                           <a:latin typeface="Calibri"/>
                         </a:rPr>
-                        <a:t>no — removed in D</a:t>
+                        <a:t>No</a:t>
                       </a:r>
                     </a:p>
                   </a:txBody>
@@ -5266,7 +5266,7 @@
                           </a:solidFill>
                           <a:latin typeface="Calibri"/>
                         </a:rPr>
-                        <a:t>Finds hotels</a:t>
+                        <a:t>Looks up hotels</a:t>
                       </a:r>
                     </a:p>
                   </a:txBody>
@@ -5288,7 +5288,7 @@
                           </a:solidFill>
                           <a:latin typeface="Calibri"/>
                         </a:rPr>
-                        <a:t>no — removed in D</a:t>
+                        <a:t>No</a:t>
                       </a:r>
                     </a:p>
                   </a:txBody>
@@ -5334,7 +5334,7 @@
                           </a:solidFill>
                           <a:latin typeface="Calibri"/>
                         </a:rPr>
-                        <a:t>Finds attractions and restaurants</a:t>
+                        <a:t>Looks up places to visit and eat</a:t>
                       </a:r>
                     </a:p>
                   </a:txBody>
@@ -5356,7 +5356,7 @@
                           </a:solidFill>
                           <a:latin typeface="Calibri"/>
                         </a:rPr>
-                        <a:t>no — removed in D</a:t>
+                        <a:t>No</a:t>
                       </a:r>
                     </a:p>
                   </a:txBody>
@@ -5402,7 +5402,7 @@
                           </a:solidFill>
                           <a:latin typeface="Calibri"/>
                         </a:rPr>
-                        <a:t>Writes the day-by-day plan from what was found</a:t>
+                        <a:t>Writes the day-by-day plan</a:t>
                       </a:r>
                     </a:p>
                   </a:txBody>
@@ -5424,7 +5424,7 @@
                           </a:solidFill>
                           <a:latin typeface="Calibri"/>
                         </a:rPr>
-                        <a:t>YES</a:t>
+                        <a:t>Yes - which day, what order</a:t>
                       </a:r>
                     </a:p>
                   </a:txBody>
@@ -5467,13 +5467,13 @@
               </a:lnSpc>
             </a:pPr>
             <a:r>
-              <a:rPr sz="1800" b="1">
+              <a:rPr sz="1900" b="1">
                 <a:solidFill>
                   <a:srgbClr val="4338CA"/>
                 </a:solidFill>
                 <a:latin typeface="Calibri"/>
               </a:rPr>
-              <a:t>The three search agents were removed. Plain code does their job for a fraction of the cost.</a:t>
+              <a:t>Looking something up does not need thinking. Only three agents really need AI.</a:t>
             </a:r>
           </a:p>
         </p:txBody>
@@ -5530,7 +5530,7 @@
                 </a:solidFill>
                 <a:latin typeface="Calibri"/>
               </a:rPr>
-              <a:t>2  ·  THE FOUR APPROACHES</a:t>
+              <a:t>2  ·  I BUILT IT FOUR WAYS</a:t>
             </a:r>
           </a:p>
         </p:txBody>
@@ -5569,7 +5569,7 @@
                 </a:solidFill>
                 <a:latin typeface="Calibri"/>
               </a:rPr>
-              <a:t>Only one thing changes: who fetches the data</a:t>
+              <a:t>So I could compare them fairly</a:t>
             </a:r>
           </a:p>
         </p:txBody>
@@ -5628,7 +5628,7 @@
         </p:nvGraphicFramePr>
         <p:xfrm>
           <a:off x="822960" y="2011680"/>
-          <a:ext cx="10515598" cy="1828800"/>
+          <a:ext cx="10515599" cy="1828800"/>
         </p:xfrm>
         <a:graphic>
           <a:graphicData uri="http://schemas.openxmlformats.org/drawingml/2006/table">
@@ -5637,10 +5637,9 @@
                 <a:tableStyleId>{5C22544A-7EE6-4342-B048-85BDC9FD1C3A}</a:tableStyleId>
               </a:tblPr>
               <a:tblGrid>
-                <a:gridCol w="491383"/>
-                <a:gridCol w="2850022"/>
-                <a:gridCol w="2260362"/>
-                <a:gridCol w="4913831"/>
+                <a:gridCol w="477981"/>
+                <a:gridCol w="2389909"/>
+                <a:gridCol w="7647709"/>
               </a:tblGrid>
               <a:tr h="365760">
                 <a:tc>
@@ -5677,7 +5676,7 @@
                           </a:solidFill>
                           <a:latin typeface="Calibri"/>
                         </a:rPr>
-                        <a:t>Approach</a:t>
+                        <a:t>Name</a:t>
                       </a:r>
                     </a:p>
                   </a:txBody>
@@ -5699,29 +5698,7 @@
                           </a:solidFill>
                           <a:latin typeface="Calibri"/>
                         </a:rPr>
-                        <a:t>Who fetches the data</a:t>
-                      </a:r>
-                    </a:p>
-                  </a:txBody>
-                  <a:tcPr>
-                    <a:solidFill>
-                      <a:srgbClr val="4338CA"/>
-                    </a:solidFill>
-                  </a:tcPr>
-                </a:tc>
-                <a:tc>
-                  <a:txBody>
-                    <a:bodyPr/>
-                    <a:lstStyle/>
-                    <a:p>
-                      <a:r>
-                        <a:rPr sz="1350" b="1">
-                          <a:solidFill>
-                            <a:srgbClr val="FFFFFF"/>
-                          </a:solidFill>
-                          <a:latin typeface="Calibri"/>
-                        </a:rPr>
-                        <a:t>Why it exists</a:t>
+                        <a:t>What it is</a:t>
                       </a:r>
                     </a:p>
                   </a:txBody>
@@ -5767,7 +5744,7 @@
                           </a:solidFill>
                           <a:latin typeface="Calibri"/>
                         </a:rPr>
-                        <a:t>One AI call, no tools</a:t>
+                        <a:t>One AI, no tools</a:t>
                       </a:r>
                     </a:p>
                   </a:txBody>
@@ -5789,29 +5766,7 @@
                           </a:solidFill>
                           <a:latin typeface="Calibri"/>
                         </a:rPr>
-                        <a:t>nobody</a:t>
-                      </a:r>
-                    </a:p>
-                  </a:txBody>
-                  <a:tcPr>
-                    <a:solidFill>
-                      <a:srgbClr val="FFFFFF"/>
-                    </a:solidFill>
-                  </a:tcPr>
-                </a:tc>
-                <a:tc>
-                  <a:txBody>
-                    <a:bodyPr/>
-                    <a:lstStyle/>
-                    <a:p>
-                      <a:r>
-                        <a:rPr sz="1350" b="0">
-                          <a:solidFill>
-                            <a:srgbClr val="161A23"/>
-                          </a:solidFill>
-                          <a:latin typeface="Calibri"/>
-                        </a:rPr>
-                        <a:t>The floor. Shows what AI invents with no data</a:t>
+                        <a:t>A single AI call. It has no way to look anything up, so it invents the whole plan</a:t>
                       </a:r>
                     </a:p>
                   </a:txBody>
@@ -5857,7 +5812,7 @@
                           </a:solidFill>
                           <a:latin typeface="Calibri"/>
                         </a:rPr>
-                        <a:t>Six agents, first attempt</a:t>
+                        <a:t>Six agents, first try</a:t>
                       </a:r>
                     </a:p>
                   </a:txBody>
@@ -5879,29 +5834,7 @@
                           </a:solidFill>
                           <a:latin typeface="Calibri"/>
                         </a:rPr>
-                        <a:t>each agent decides</a:t>
-                      </a:r>
-                    </a:p>
-                  </a:txBody>
-                  <a:tcPr>
-                    <a:solidFill>
-                      <a:srgbClr val="F7F8FC"/>
-                    </a:solidFill>
-                  </a:tcPr>
-                </a:tc>
-                <a:tc>
-                  <a:txBody>
-                    <a:bodyPr/>
-                    <a:lstStyle/>
-                    <a:p>
-                      <a:r>
-                        <a:rPr sz="1350" b="0">
-                          <a:solidFill>
-                            <a:srgbClr val="161A23"/>
-                          </a:solidFill>
-                          <a:latin typeface="Calibri"/>
-                        </a:rPr>
-                        <a:t>My original proposal, untuned</a:t>
+                        <a:t>Every agent gets tools and decides for itself when to use them. This was my original plan</a:t>
                       </a:r>
                     </a:p>
                   </a:txBody>
@@ -5947,7 +5880,7 @@
                           </a:solidFill>
                           <a:latin typeface="Calibri"/>
                         </a:rPr>
-                        <a:t>Six agents, tuned</a:t>
+                        <a:t>Six agents, tidied up</a:t>
                       </a:r>
                     </a:p>
                   </a:txBody>
@@ -5969,29 +5902,7 @@
                           </a:solidFill>
                           <a:latin typeface="Calibri"/>
                         </a:rPr>
-                        <a:t>each agent decides</a:t>
-                      </a:r>
-                    </a:p>
-                  </a:txBody>
-                  <a:tcPr>
-                    <a:solidFill>
-                      <a:srgbClr val="FFFFFF"/>
-                    </a:solidFill>
-                  </a:tcPr>
-                </a:tc>
-                <a:tc>
-                  <a:txBody>
-                    <a:bodyPr/>
-                    <a:lstStyle/>
-                    <a:p>
-                      <a:r>
-                        <a:rPr sz="1350" b="0">
-                          <a:solidFill>
-                            <a:srgbClr val="161A23"/>
-                          </a:solidFill>
-                          <a:latin typeface="Calibri"/>
-                        </a:rPr>
-                        <a:t>Proves the gain is the design, not the settings</a:t>
+                        <a:t>Same six agents, but fewer tools each and a tighter limit on how long they can think</a:t>
                       </a:r>
                     </a:p>
                   </a:txBody>
@@ -6059,29 +5970,7 @@
                           </a:solidFill>
                           <a:latin typeface="Calibri"/>
                         </a:rPr>
-                        <a:t>plain code</a:t>
-                      </a:r>
-                    </a:p>
-                  </a:txBody>
-                  <a:tcPr>
-                    <a:solidFill>
-                      <a:srgbClr val="F7F8FC"/>
-                    </a:solidFill>
-                  </a:tcPr>
-                </a:tc>
-                <a:tc>
-                  <a:txBody>
-                    <a:bodyPr/>
-                    <a:lstStyle/>
-                    <a:p>
-                      <a:r>
-                        <a:rPr sz="1350" b="0">
-                          <a:solidFill>
-                            <a:srgbClr val="161A23"/>
-                          </a:solidFill>
-                          <a:latin typeface="Calibri"/>
-                        </a:rPr>
-                        <a:t>What I ship. The idea being tested</a:t>
+                        <a:t>The look-up agents are gone. Normal code fetches the data. This is what I ship</a:t>
                       </a:r>
                     </a:p>
                   </a:txBody>
@@ -6124,13 +6013,13 @@
               </a:lnSpc>
             </a:pPr>
             <a:r>
-              <a:rPr sz="1800" b="1">
+              <a:rPr sz="1900" b="1">
                 <a:solidFill>
                   <a:srgbClr val="4338CA"/>
                 </a:solidFill>
                 <a:latin typeface="Calibri"/>
               </a:rPr>
-              <a:t>C matters most. Without it, someone could say D only won because B was set up badly.</a:t>
+              <a:t>C exists so nobody can say D only won because B was set up badly.</a:t>
             </a:r>
           </a:p>
         </p:txBody>
@@ -6187,7 +6076,7 @@
                 </a:solidFill>
                 <a:latin typeface="Calibri"/>
               </a:rPr>
-              <a:t>3  ·  TOOLS GIVEN TO EACH AGENT</a:t>
+              <a:t>3  ·  WHICH TOOLS EACH AGENT GETS</a:t>
             </a:r>
           </a:p>
         </p:txBody>
@@ -6226,7 +6115,7 @@
                 </a:solidFill>
                 <a:latin typeface="Calibri"/>
               </a:rPr>
-              <a:t>Counted from the code. This is where the cost came from</a:t>
+              <a:t>Read from the code. A has none at all</a:t>
             </a:r>
           </a:p>
         </p:txBody>
@@ -6284,7 +6173,7 @@
           <p:nvPr/>
         </p:nvGraphicFramePr>
         <p:xfrm>
-          <a:off x="822960" y="1965960"/>
+          <a:off x="822960" y="1920240"/>
           <a:ext cx="10515598" cy="2926080"/>
         </p:xfrm>
         <a:graphic>
@@ -6294,11 +6183,10 @@
                 <a:tableStyleId>{5C22544A-7EE6-4342-B048-85BDC9FD1C3A}</a:tableStyleId>
               </a:tblPr>
               <a:tblGrid>
-                <a:gridCol w="3605348"/>
-                <a:gridCol w="901337"/>
-                <a:gridCol w="2403565"/>
-                <a:gridCol w="2002971"/>
-                <a:gridCol w="1602377"/>
+                <a:gridCol w="2029326"/>
+                <a:gridCol w="3874168"/>
+                <a:gridCol w="2398294"/>
+                <a:gridCol w="2213810"/>
               </a:tblGrid>
               <a:tr h="365760">
                 <a:tc>
@@ -6307,7 +6195,7 @@
                     <a:lstStyle/>
                     <a:p>
                       <a:r>
-                        <a:rPr sz="1250" b="1">
+                        <a:rPr sz="950" b="1">
                           <a:solidFill>
                             <a:srgbClr val="FFFFFF"/>
                           </a:solidFill>
@@ -6329,13 +6217,13 @@
                     <a:lstStyle/>
                     <a:p>
                       <a:r>
-                        <a:rPr sz="1250" b="1">
+                        <a:rPr sz="950" b="1">
                           <a:solidFill>
                             <a:srgbClr val="FFFFFF"/>
                           </a:solidFill>
                           <a:latin typeface="Calibri"/>
                         </a:rPr>
-                        <a:t>A</a:t>
+                        <a:t>B  (first try)</a:t>
                       </a:r>
                     </a:p>
                   </a:txBody>
@@ -6351,13 +6239,13 @@
                     <a:lstStyle/>
                     <a:p>
                       <a:r>
-                        <a:rPr sz="1250" b="1">
+                        <a:rPr sz="950" b="1">
                           <a:solidFill>
                             <a:srgbClr val="FFFFFF"/>
                           </a:solidFill>
                           <a:latin typeface="Calibri"/>
                         </a:rPr>
-                        <a:t>B</a:t>
+                        <a:t>C  (tidied)</a:t>
                       </a:r>
                     </a:p>
                   </a:txBody>
@@ -6373,35 +6261,13 @@
                     <a:lstStyle/>
                     <a:p>
                       <a:r>
-                        <a:rPr sz="1250" b="1">
+                        <a:rPr sz="950" b="1">
                           <a:solidFill>
                             <a:srgbClr val="FFFFFF"/>
                           </a:solidFill>
                           <a:latin typeface="Calibri"/>
                         </a:rPr>
-                        <a:t>C</a:t>
-                      </a:r>
-                    </a:p>
-                  </a:txBody>
-                  <a:tcPr>
-                    <a:solidFill>
-                      <a:srgbClr val="4338CA"/>
-                    </a:solidFill>
-                  </a:tcPr>
-                </a:tc>
-                <a:tc>
-                  <a:txBody>
-                    <a:bodyPr/>
-                    <a:lstStyle/>
-                    <a:p>
-                      <a:r>
-                        <a:rPr sz="1250" b="1">
-                          <a:solidFill>
-                            <a:srgbClr val="FFFFFF"/>
-                          </a:solidFill>
-                          <a:latin typeface="Calibri"/>
-                        </a:rPr>
-                        <a:t>D</a:t>
+                        <a:t>D  (shipped)</a:t>
                       </a:r>
                     </a:p>
                   </a:txBody>
@@ -6419,13 +6285,13 @@
                     <a:lstStyle/>
                     <a:p>
                       <a:r>
-                        <a:rPr sz="1250" b="0">
+                        <a:rPr sz="950" b="0">
                           <a:solidFill>
                             <a:srgbClr val="161A23"/>
                           </a:solidFill>
                           <a:latin typeface="Calibri"/>
                         </a:rPr>
-                        <a:t>Travel Preferences Extractor</a:t>
+                        <a:t>Preferences Extractor</a:t>
                       </a:r>
                     </a:p>
                   </a:txBody>
@@ -6441,13 +6307,13 @@
                     <a:lstStyle/>
                     <a:p>
                       <a:r>
-                        <a:rPr sz="1250" b="0">
+                        <a:rPr sz="950" b="0">
                           <a:solidFill>
                             <a:srgbClr val="161A23"/>
                           </a:solidFill>
                           <a:latin typeface="Calibri"/>
                         </a:rPr>
-                        <a:t>—</a:t>
+                        <a:t>none</a:t>
                       </a:r>
                     </a:p>
                   </a:txBody>
@@ -6463,13 +6329,13 @@
                     <a:lstStyle/>
                     <a:p>
                       <a:r>
-                        <a:rPr sz="1250" b="0">
+                        <a:rPr sz="950" b="0">
                           <a:solidFill>
                             <a:srgbClr val="161A23"/>
                           </a:solidFill>
                           <a:latin typeface="Calibri"/>
                         </a:rPr>
-                        <a:t>0 tools</a:t>
+                        <a:t>none</a:t>
                       </a:r>
                     </a:p>
                   </a:txBody>
@@ -6485,35 +6351,13 @@
                     <a:lstStyle/>
                     <a:p>
                       <a:r>
-                        <a:rPr sz="1250" b="0">
+                        <a:rPr sz="950" b="0">
                           <a:solidFill>
                             <a:srgbClr val="161A23"/>
                           </a:solidFill>
                           <a:latin typeface="Calibri"/>
                         </a:rPr>
-                        <a:t>0 tools</a:t>
-                      </a:r>
-                    </a:p>
-                  </a:txBody>
-                  <a:tcPr>
-                    <a:solidFill>
-                      <a:srgbClr val="FFFFFF"/>
-                    </a:solidFill>
-                  </a:tcPr>
-                </a:tc>
-                <a:tc>
-                  <a:txBody>
-                    <a:bodyPr/>
-                    <a:lstStyle/>
-                    <a:p>
-                      <a:r>
-                        <a:rPr sz="1250" b="0">
-                          <a:solidFill>
-                            <a:srgbClr val="161A23"/>
-                          </a:solidFill>
-                          <a:latin typeface="Calibri"/>
-                        </a:rPr>
-                        <a:t>0 tools</a:t>
+                        <a:t>none</a:t>
                       </a:r>
                     </a:p>
                   </a:txBody>
@@ -6531,13 +6375,13 @@
                     <a:lstStyle/>
                     <a:p>
                       <a:r>
-                        <a:rPr sz="1250" b="0">
+                        <a:rPr sz="950" b="0">
                           <a:solidFill>
                             <a:srgbClr val="161A23"/>
                           </a:solidFill>
                           <a:latin typeface="Calibri"/>
                         </a:rPr>
-                        <a:t>Flight Search Specialist</a:t>
+                        <a:t>Conversation Assistant</a:t>
                       </a:r>
                     </a:p>
                   </a:txBody>
@@ -6553,13 +6397,13 @@
                     <a:lstStyle/>
                     <a:p>
                       <a:r>
-                        <a:rPr sz="1250" b="0">
+                        <a:rPr sz="950" b="0">
                           <a:solidFill>
                             <a:srgbClr val="161A23"/>
                           </a:solidFill>
                           <a:latin typeface="Calibri"/>
                         </a:rPr>
-                        <a:t>—</a:t>
+                        <a:t>not used</a:t>
                       </a:r>
                     </a:p>
                   </a:txBody>
@@ -6575,13 +6419,13 @@
                     <a:lstStyle/>
                     <a:p>
                       <a:r>
-                        <a:rPr sz="1250" b="0">
+                        <a:rPr sz="950" b="0">
                           <a:solidFill>
                             <a:srgbClr val="161A23"/>
                           </a:solidFill>
                           <a:latin typeface="Calibri"/>
                         </a:rPr>
-                        <a:t>4 tools, 8 steps</a:t>
+                        <a:t>not used</a:t>
                       </a:r>
                     </a:p>
                   </a:txBody>
@@ -6597,35 +6441,13 @@
                     <a:lstStyle/>
                     <a:p>
                       <a:r>
-                        <a:rPr sz="1250" b="0">
+                        <a:rPr sz="950" b="0">
                           <a:solidFill>
                             <a:srgbClr val="161A23"/>
                           </a:solidFill>
                           <a:latin typeface="Calibri"/>
                         </a:rPr>
-                        <a:t>1 tool, 3 steps</a:t>
-                      </a:r>
-                    </a:p>
-                  </a:txBody>
-                  <a:tcPr>
-                    <a:solidFill>
-                      <a:srgbClr val="F7F8FC"/>
-                    </a:solidFill>
-                  </a:tcPr>
-                </a:tc>
-                <a:tc>
-                  <a:txBody>
-                    <a:bodyPr/>
-                    <a:lstStyle/>
-                    <a:p>
-                      <a:r>
-                        <a:rPr sz="1250" b="0">
-                          <a:solidFill>
-                            <a:srgbClr val="161A23"/>
-                          </a:solidFill>
-                          <a:latin typeface="Calibri"/>
-                        </a:rPr>
-                        <a:t>removed</a:t>
+                        <a:t>none</a:t>
                       </a:r>
                     </a:p>
                   </a:txBody>
@@ -6643,13 +6465,13 @@
                     <a:lstStyle/>
                     <a:p>
                       <a:r>
-                        <a:rPr sz="1250" b="0">
+                        <a:rPr sz="950" b="0">
                           <a:solidFill>
                             <a:srgbClr val="161A23"/>
                           </a:solidFill>
                           <a:latin typeface="Calibri"/>
                         </a:rPr>
-                        <a:t>Hotel Search Specialist</a:t>
+                        <a:t>Flight Search</a:t>
                       </a:r>
                     </a:p>
                   </a:txBody>
@@ -6665,13 +6487,13 @@
                     <a:lstStyle/>
                     <a:p>
                       <a:r>
-                        <a:rPr sz="1250" b="0">
+                        <a:rPr sz="950" b="0">
                           <a:solidFill>
                             <a:srgbClr val="161A23"/>
                           </a:solidFill>
                           <a:latin typeface="Calibri"/>
                         </a:rPr>
-                        <a:t>—</a:t>
+                        <a:t>search_comprehensive_flights, search_round_trip_flights, search_internet, calculate</a:t>
                       </a:r>
                     </a:p>
                   </a:txBody>
@@ -6687,13 +6509,13 @@
                     <a:lstStyle/>
                     <a:p>
                       <a:r>
-                        <a:rPr sz="1250" b="0">
+                        <a:rPr sz="950" b="0">
                           <a:solidFill>
                             <a:srgbClr val="161A23"/>
                           </a:solidFill>
                           <a:latin typeface="Calibri"/>
                         </a:rPr>
-                        <a:t>8 tools, 10 steps</a:t>
+                        <a:t>distilled_search_flights</a:t>
                       </a:r>
                     </a:p>
                   </a:txBody>
@@ -6709,35 +6531,13 @@
                     <a:lstStyle/>
                     <a:p>
                       <a:r>
-                        <a:rPr sz="1250" b="0">
+                        <a:rPr sz="950" b="0">
                           <a:solidFill>
                             <a:srgbClr val="161A23"/>
                           </a:solidFill>
                           <a:latin typeface="Calibri"/>
                         </a:rPr>
-                        <a:t>1 tool, 3 steps</a:t>
-                      </a:r>
-                    </a:p>
-                  </a:txBody>
-                  <a:tcPr>
-                    <a:solidFill>
-                      <a:srgbClr val="FFFFFF"/>
-                    </a:solidFill>
-                  </a:tcPr>
-                </a:tc>
-                <a:tc>
-                  <a:txBody>
-                    <a:bodyPr/>
-                    <a:lstStyle/>
-                    <a:p>
-                      <a:r>
-                        <a:rPr sz="1250" b="0">
-                          <a:solidFill>
-                            <a:srgbClr val="161A23"/>
-                          </a:solidFill>
-                          <a:latin typeface="Calibri"/>
-                        </a:rPr>
-                        <a:t>removed</a:t>
+                        <a:t>agent removed</a:t>
                       </a:r>
                     </a:p>
                   </a:txBody>
@@ -6755,13 +6555,13 @@
                     <a:lstStyle/>
                     <a:p>
                       <a:r>
-                        <a:rPr sz="1250" b="0">
+                        <a:rPr sz="950" b="0">
                           <a:solidFill>
                             <a:srgbClr val="161A23"/>
                           </a:solidFill>
                           <a:latin typeface="Calibri"/>
                         </a:rPr>
-                        <a:t>Activities Specialist</a:t>
+                        <a:t>Hotel Search</a:t>
                       </a:r>
                     </a:p>
                   </a:txBody>
@@ -6777,13 +6577,13 @@
                     <a:lstStyle/>
                     <a:p>
                       <a:r>
-                        <a:rPr sz="1250" b="0">
+                        <a:rPr sz="950" b="0">
                           <a:solidFill>
                             <a:srgbClr val="161A23"/>
                           </a:solidFill>
                           <a:latin typeface="Calibri"/>
                         </a:rPr>
-                        <a:t>—</a:t>
+                        <a:t>search_hotels_comprehensive, search_accommodations_with_location, search_hotel_destination, search_hotels_by_dest_id, get_hotel_reviews, get_attractions_near_hotel, search_internet, calculate</a:t>
                       </a:r>
                     </a:p>
                   </a:txBody>
@@ -6799,13 +6599,13 @@
                     <a:lstStyle/>
                     <a:p>
                       <a:r>
-                        <a:rPr sz="1250" b="0">
+                        <a:rPr sz="950" b="0">
                           <a:solidFill>
                             <a:srgbClr val="161A23"/>
                           </a:solidFill>
                           <a:latin typeface="Calibri"/>
                         </a:rPr>
-                        <a:t>4 tools, 10 steps</a:t>
+                        <a:t>distilled_search_hotels</a:t>
                       </a:r>
                     </a:p>
                   </a:txBody>
@@ -6821,35 +6621,13 @@
                     <a:lstStyle/>
                     <a:p>
                       <a:r>
-                        <a:rPr sz="1250" b="0">
+                        <a:rPr sz="950" b="0">
                           <a:solidFill>
                             <a:srgbClr val="161A23"/>
                           </a:solidFill>
                           <a:latin typeface="Calibri"/>
                         </a:rPr>
-                        <a:t>2 tools, 3 steps</a:t>
-                      </a:r>
-                    </a:p>
-                  </a:txBody>
-                  <a:tcPr>
-                    <a:solidFill>
-                      <a:srgbClr val="F7F8FC"/>
-                    </a:solidFill>
-                  </a:tcPr>
-                </a:tc>
-                <a:tc>
-                  <a:txBody>
-                    <a:bodyPr/>
-                    <a:lstStyle/>
-                    <a:p>
-                      <a:r>
-                        <a:rPr sz="1250" b="0">
-                          <a:solidFill>
-                            <a:srgbClr val="161A23"/>
-                          </a:solidFill>
-                          <a:latin typeface="Calibri"/>
-                        </a:rPr>
-                        <a:t>removed</a:t>
+                        <a:t>agent removed</a:t>
                       </a:r>
                     </a:p>
                   </a:txBody>
@@ -6867,13 +6645,13 @@
                     <a:lstStyle/>
                     <a:p>
                       <a:r>
-                        <a:rPr sz="1250" b="0">
+                        <a:rPr sz="950" b="0">
                           <a:solidFill>
                             <a:srgbClr val="161A23"/>
                           </a:solidFill>
                           <a:latin typeface="Calibri"/>
                         </a:rPr>
-                        <a:t>Itinerary Coordinator</a:t>
+                        <a:t>Activities</a:t>
                       </a:r>
                     </a:p>
                   </a:txBody>
@@ -6889,13 +6667,13 @@
                     <a:lstStyle/>
                     <a:p>
                       <a:r>
-                        <a:rPr sz="1250" b="0">
+                        <a:rPr sz="950" b="0">
                           <a:solidFill>
                             <a:srgbClr val="161A23"/>
                           </a:solidFill>
                           <a:latin typeface="Calibri"/>
                         </a:rPr>
-                        <a:t>—</a:t>
+                        <a:t>search_attractions, search_restaurants, search_internet, calculate</a:t>
                       </a:r>
                     </a:p>
                   </a:txBody>
@@ -6911,13 +6689,13 @@
                     <a:lstStyle/>
                     <a:p>
                       <a:r>
-                        <a:rPr sz="1250" b="0">
+                        <a:rPr sz="950" b="0">
                           <a:solidFill>
                             <a:srgbClr val="161A23"/>
                           </a:solidFill>
                           <a:latin typeface="Calibri"/>
                         </a:rPr>
-                        <a:t>4 tools, 15 steps</a:t>
+                        <a:t>distilled_search_attractions, distilled_search_restaurants</a:t>
                       </a:r>
                     </a:p>
                   </a:txBody>
@@ -6933,35 +6711,13 @@
                     <a:lstStyle/>
                     <a:p>
                       <a:r>
-                        <a:rPr sz="1250" b="0">
+                        <a:rPr sz="950" b="0">
                           <a:solidFill>
                             <a:srgbClr val="161A23"/>
                           </a:solidFill>
                           <a:latin typeface="Calibri"/>
                         </a:rPr>
-                        <a:t>0 tools</a:t>
-                      </a:r>
-                    </a:p>
-                  </a:txBody>
-                  <a:tcPr>
-                    <a:solidFill>
-                      <a:srgbClr val="FFFFFF"/>
-                    </a:solidFill>
-                  </a:tcPr>
-                </a:tc>
-                <a:tc>
-                  <a:txBody>
-                    <a:bodyPr/>
-                    <a:lstStyle/>
-                    <a:p>
-                      <a:r>
-                        <a:rPr sz="1250" b="0">
-                          <a:solidFill>
-                            <a:srgbClr val="161A23"/>
-                          </a:solidFill>
-                          <a:latin typeface="Calibri"/>
-                        </a:rPr>
-                        <a:t>4 tools</a:t>
+                        <a:t>agent removed</a:t>
                       </a:r>
                     </a:p>
                   </a:txBody>
@@ -6979,13 +6735,13 @@
                     <a:lstStyle/>
                     <a:p>
                       <a:r>
-                        <a:rPr sz="1250" b="0">
+                        <a:rPr sz="950" b="0">
                           <a:solidFill>
                             <a:srgbClr val="161A23"/>
                           </a:solidFill>
                           <a:latin typeface="Calibri"/>
                         </a:rPr>
-                        <a:t>Travel Conversation Assistant</a:t>
+                        <a:t>Itinerary Coordinator</a:t>
                       </a:r>
                     </a:p>
                   </a:txBody>
@@ -7001,13 +6757,13 @@
                     <a:lstStyle/>
                     <a:p>
                       <a:r>
-                        <a:rPr sz="1250" b="0">
+                        <a:rPr sz="950" b="0">
                           <a:solidFill>
                             <a:srgbClr val="161A23"/>
                           </a:solidFill>
                           <a:latin typeface="Calibri"/>
                         </a:rPr>
-                        <a:t>—</a:t>
+                        <a:t>calculate, search_internet, search_attractions, search_restaurants</a:t>
                       </a:r>
                     </a:p>
                   </a:txBody>
@@ -7023,13 +6779,13 @@
                     <a:lstStyle/>
                     <a:p>
                       <a:r>
-                        <a:rPr sz="1250" b="0">
+                        <a:rPr sz="950" b="0">
                           <a:solidFill>
                             <a:srgbClr val="161A23"/>
                           </a:solidFill>
                           <a:latin typeface="Calibri"/>
                         </a:rPr>
-                        <a:t>—</a:t>
+                        <a:t>none</a:t>
                       </a:r>
                     </a:p>
                   </a:txBody>
@@ -7045,35 +6801,13 @@
                     <a:lstStyle/>
                     <a:p>
                       <a:r>
-                        <a:rPr sz="1250" b="0">
+                        <a:rPr sz="950" b="0">
                           <a:solidFill>
                             <a:srgbClr val="161A23"/>
                           </a:solidFill>
                           <a:latin typeface="Calibri"/>
                         </a:rPr>
-                        <a:t>—</a:t>
-                      </a:r>
-                    </a:p>
-                  </a:txBody>
-                  <a:tcPr>
-                    <a:solidFill>
-                      <a:srgbClr val="F7F8FC"/>
-                    </a:solidFill>
-                  </a:tcPr>
-                </a:tc>
-                <a:tc>
-                  <a:txBody>
-                    <a:bodyPr/>
-                    <a:lstStyle/>
-                    <a:p>
-                      <a:r>
-                        <a:rPr sz="1250" b="0">
-                          <a:solidFill>
-                            <a:srgbClr val="161A23"/>
-                          </a:solidFill>
-                          <a:latin typeface="Calibri"/>
-                        </a:rPr>
-                        <a:t>0 tools</a:t>
+                        <a:t>calculate, search_internet, search_attractions, search_restaurants</a:t>
                       </a:r>
                     </a:p>
                   </a:txBody>
@@ -7091,7 +6825,7 @@
                     <a:lstStyle/>
                     <a:p>
                       <a:r>
-                        <a:rPr sz="1250" b="0">
+                        <a:rPr sz="950" b="0">
                           <a:solidFill>
                             <a:srgbClr val="161A23"/>
                           </a:solidFill>
@@ -7113,13 +6847,13 @@
                     <a:lstStyle/>
                     <a:p>
                       <a:r>
-                        <a:rPr sz="1250" b="0">
+                        <a:rPr sz="950" b="0">
                           <a:solidFill>
                             <a:srgbClr val="161A23"/>
                           </a:solidFill>
                           <a:latin typeface="Calibri"/>
                         </a:rPr>
-                        <a:t>0</a:t>
+                        <a:t>20</a:t>
                       </a:r>
                     </a:p>
                   </a:txBody>
@@ -7135,13 +6869,13 @@
                     <a:lstStyle/>
                     <a:p>
                       <a:r>
-                        <a:rPr sz="1250" b="0">
+                        <a:rPr sz="950" b="0">
                           <a:solidFill>
                             <a:srgbClr val="161A23"/>
                           </a:solidFill>
                           <a:latin typeface="Calibri"/>
                         </a:rPr>
-                        <a:t>20</a:t>
+                        <a:t>4</a:t>
                       </a:r>
                     </a:p>
                   </a:txBody>
@@ -7157,29 +6891,7 @@
                     <a:lstStyle/>
                     <a:p>
                       <a:r>
-                        <a:rPr sz="1250" b="0">
-                          <a:solidFill>
-                            <a:srgbClr val="161A23"/>
-                          </a:solidFill>
-                          <a:latin typeface="Calibri"/>
-                        </a:rPr>
-                        <a:t>4</a:t>
-                      </a:r>
-                    </a:p>
-                  </a:txBody>
-                  <a:tcPr>
-                    <a:solidFill>
-                      <a:srgbClr val="FFFFFF"/>
-                    </a:solidFill>
-                  </a:tcPr>
-                </a:tc>
-                <a:tc>
-                  <a:txBody>
-                    <a:bodyPr/>
-                    <a:lstStyle/>
-                    <a:p>
-                      <a:r>
-                        <a:rPr sz="1250" b="0">
+                        <a:rPr sz="950" b="0">
                           <a:solidFill>
                             <a:srgbClr val="161A23"/>
                           </a:solidFill>
@@ -7208,8 +6920,8 @@
         </p:nvSpPr>
         <p:spPr>
           <a:xfrm>
-            <a:off x="822960" y="5440680"/>
-            <a:ext cx="10515600" cy="822960"/>
+            <a:off x="822960" y="5852160"/>
+            <a:ext cx="10515600" cy="640080"/>
           </a:xfrm>
           <a:prstGeom prst="rect">
             <a:avLst/>
@@ -7228,13 +6940,13 @@
               </a:lnSpc>
             </a:pPr>
             <a:r>
-              <a:rPr sz="1700" b="1">
+              <a:rPr sz="1600" b="1">
                 <a:solidFill>
                   <a:srgbClr val="161A23"/>
                 </a:solidFill>
                 <a:latin typeface="Calibri"/>
               </a:rPr>
-              <a:t>"Steps" is how many times an agent may loop. Each loop re-sends every tool description to the AI — that is the bill.</a:t>
+              <a:t>The hotel agent alone had 8 tools. Every time it thinks, all 8 tool descriptions are sent to the AI again.</a:t>
             </a:r>
           </a:p>
         </p:txBody>
@@ -7291,7 +7003,7 @@
                 </a:solidFill>
                 <a:latin typeface="Calibri"/>
               </a:rPr>
-              <a:t>4  ·  WHAT THE USER SEES</a:t>
+              <a:t>4  ·  HOW MANY AI CALLS EACH ONE MAKES</a:t>
             </a:r>
           </a:p>
         </p:txBody>
@@ -7330,7 +7042,7 @@
                 </a:solidFill>
                 <a:latin typeface="Calibri"/>
               </a:rPr>
-              <a:t>One form, live progress, the plan in tabs</a:t>
+              <a:t>Per trip planned</a:t>
             </a:r>
           </a:p>
         </p:txBody>
@@ -7379,30 +7091,595 @@
           </a:p>
         </p:txBody>
       </p:sp>
-      <p:pic>
-        <p:nvPicPr>
-          <p:cNvPr id="5" name="Picture 4" descr="frontend.png"/>
-          <p:cNvPicPr>
-            <a:picLocks noChangeAspect="1"/>
-          </p:cNvPicPr>
+      <p:graphicFrame>
+        <p:nvGraphicFramePr>
+          <p:cNvPr id="5" name="Table 4"/>
+          <p:cNvGraphicFramePr>
+            <a:graphicFrameLocks noGrp="1"/>
+          </p:cNvGraphicFramePr>
           <p:nvPr/>
-        </p:nvPicPr>
-        <p:blipFill>
-          <a:blip r:embed="rId2"/>
-          <a:stretch>
-            <a:fillRect/>
-          </a:stretch>
-        </p:blipFill>
-        <p:spPr>
-          <a:xfrm>
-            <a:off x="2352101" y="1783080"/>
-            <a:ext cx="7487493" cy="4297680"/>
-          </a:xfrm>
-          <a:prstGeom prst="rect">
-            <a:avLst/>
-          </a:prstGeom>
-        </p:spPr>
-      </p:pic>
+        </p:nvGraphicFramePr>
+        <p:xfrm>
+          <a:off x="822960" y="2103120"/>
+          <a:ext cx="10515598" cy="1828800"/>
+        </p:xfrm>
+        <a:graphic>
+          <a:graphicData uri="http://schemas.openxmlformats.org/drawingml/2006/table">
+            <a:tbl>
+              <a:tblPr firstRow="1" bandRow="1">
+                <a:tableStyleId>{5C22544A-7EE6-4342-B048-85BDC9FD1C3A}</a:tableStyleId>
+              </a:tblPr>
+              <a:tblGrid>
+                <a:gridCol w="510466"/>
+                <a:gridCol w="3471168"/>
+                <a:gridCol w="1633491"/>
+                <a:gridCol w="2654423"/>
+                <a:gridCol w="2246050"/>
+              </a:tblGrid>
+              <a:tr h="365760">
+                <a:tc>
+                  <a:txBody>
+                    <a:bodyPr/>
+                    <a:lstStyle/>
+                    <a:p>
+                      <a:r>
+                        <a:rPr sz="1400" b="1">
+                          <a:solidFill>
+                            <a:srgbClr val="FFFFFF"/>
+                          </a:solidFill>
+                          <a:latin typeface="Calibri"/>
+                        </a:rPr>
+                        <a:t> </a:t>
+                      </a:r>
+                    </a:p>
+                  </a:txBody>
+                  <a:tcPr>
+                    <a:solidFill>
+                      <a:srgbClr val="4338CA"/>
+                    </a:solidFill>
+                  </a:tcPr>
+                </a:tc>
+                <a:tc>
+                  <a:txBody>
+                    <a:bodyPr/>
+                    <a:lstStyle/>
+                    <a:p>
+                      <a:r>
+                        <a:rPr sz="1400" b="1">
+                          <a:solidFill>
+                            <a:srgbClr val="FFFFFF"/>
+                          </a:solidFill>
+                          <a:latin typeface="Calibri"/>
+                        </a:rPr>
+                        <a:t>Approach</a:t>
+                      </a:r>
+                    </a:p>
+                  </a:txBody>
+                  <a:tcPr>
+                    <a:solidFill>
+                      <a:srgbClr val="4338CA"/>
+                    </a:solidFill>
+                  </a:tcPr>
+                </a:tc>
+                <a:tc>
+                  <a:txBody>
+                    <a:bodyPr/>
+                    <a:lstStyle/>
+                    <a:p>
+                      <a:r>
+                        <a:rPr sz="1400" b="1">
+                          <a:solidFill>
+                            <a:srgbClr val="FFFFFF"/>
+                          </a:solidFill>
+                          <a:latin typeface="Calibri"/>
+                        </a:rPr>
+                        <a:t>AI calls</a:t>
+                      </a:r>
+                    </a:p>
+                  </a:txBody>
+                  <a:tcPr>
+                    <a:solidFill>
+                      <a:srgbClr val="4338CA"/>
+                    </a:solidFill>
+                  </a:tcPr>
+                </a:tc>
+                <a:tc>
+                  <a:txBody>
+                    <a:bodyPr/>
+                    <a:lstStyle/>
+                    <a:p>
+                      <a:r>
+                        <a:rPr sz="1400" b="1">
+                          <a:solidFill>
+                            <a:srgbClr val="FFFFFF"/>
+                          </a:solidFill>
+                          <a:latin typeface="Calibri"/>
+                        </a:rPr>
+                        <a:t>Text sent to the AI</a:t>
+                      </a:r>
+                    </a:p>
+                  </a:txBody>
+                  <a:tcPr>
+                    <a:solidFill>
+                      <a:srgbClr val="4338CA"/>
+                    </a:solidFill>
+                  </a:tcPr>
+                </a:tc>
+                <a:tc>
+                  <a:txBody>
+                    <a:bodyPr/>
+                    <a:lstStyle/>
+                    <a:p>
+                      <a:r>
+                        <a:rPr sz="1400" b="1">
+                          <a:solidFill>
+                            <a:srgbClr val="FFFFFF"/>
+                          </a:solidFill>
+                          <a:latin typeface="Calibri"/>
+                        </a:rPr>
+                        <a:t>Cost per trip</a:t>
+                      </a:r>
+                    </a:p>
+                  </a:txBody>
+                  <a:tcPr>
+                    <a:solidFill>
+                      <a:srgbClr val="4338CA"/>
+                    </a:solidFill>
+                  </a:tcPr>
+                </a:tc>
+              </a:tr>
+              <a:tr h="365760">
+                <a:tc>
+                  <a:txBody>
+                    <a:bodyPr/>
+                    <a:lstStyle/>
+                    <a:p>
+                      <a:r>
+                        <a:rPr sz="1400" b="0">
+                          <a:solidFill>
+                            <a:srgbClr val="161A23"/>
+                          </a:solidFill>
+                          <a:latin typeface="Calibri"/>
+                        </a:rPr>
+                        <a:t>A</a:t>
+                      </a:r>
+                    </a:p>
+                  </a:txBody>
+                  <a:tcPr>
+                    <a:solidFill>
+                      <a:srgbClr val="FFFFFF"/>
+                    </a:solidFill>
+                  </a:tcPr>
+                </a:tc>
+                <a:tc>
+                  <a:txBody>
+                    <a:bodyPr/>
+                    <a:lstStyle/>
+                    <a:p>
+                      <a:r>
+                        <a:rPr sz="1400" b="0">
+                          <a:solidFill>
+                            <a:srgbClr val="161A23"/>
+                          </a:solidFill>
+                          <a:latin typeface="Calibri"/>
+                        </a:rPr>
+                        <a:t>One AI, no tools</a:t>
+                      </a:r>
+                    </a:p>
+                  </a:txBody>
+                  <a:tcPr>
+                    <a:solidFill>
+                      <a:srgbClr val="FFFFFF"/>
+                    </a:solidFill>
+                  </a:tcPr>
+                </a:tc>
+                <a:tc>
+                  <a:txBody>
+                    <a:bodyPr/>
+                    <a:lstStyle/>
+                    <a:p>
+                      <a:r>
+                        <a:rPr sz="1400" b="0">
+                          <a:solidFill>
+                            <a:srgbClr val="161A23"/>
+                          </a:solidFill>
+                          <a:latin typeface="Calibri"/>
+                        </a:rPr>
+                        <a:t>1</a:t>
+                      </a:r>
+                    </a:p>
+                  </a:txBody>
+                  <a:tcPr>
+                    <a:solidFill>
+                      <a:srgbClr val="FFFFFF"/>
+                    </a:solidFill>
+                  </a:tcPr>
+                </a:tc>
+                <a:tc>
+                  <a:txBody>
+                    <a:bodyPr/>
+                    <a:lstStyle/>
+                    <a:p>
+                      <a:r>
+                        <a:rPr sz="1400" b="0">
+                          <a:solidFill>
+                            <a:srgbClr val="161A23"/>
+                          </a:solidFill>
+                          <a:latin typeface="Calibri"/>
+                        </a:rPr>
+                        <a:t>4,644</a:t>
+                      </a:r>
+                    </a:p>
+                  </a:txBody>
+                  <a:tcPr>
+                    <a:solidFill>
+                      <a:srgbClr val="FFFFFF"/>
+                    </a:solidFill>
+                  </a:tcPr>
+                </a:tc>
+                <a:tc>
+                  <a:txBody>
+                    <a:bodyPr/>
+                    <a:lstStyle/>
+                    <a:p>
+                      <a:r>
+                        <a:rPr sz="1400" b="0">
+                          <a:solidFill>
+                            <a:srgbClr val="161A23"/>
+                          </a:solidFill>
+                          <a:latin typeface="Calibri"/>
+                        </a:rPr>
+                        <a:t>$0.017</a:t>
+                      </a:r>
+                    </a:p>
+                  </a:txBody>
+                  <a:tcPr>
+                    <a:solidFill>
+                      <a:srgbClr val="FFFFFF"/>
+                    </a:solidFill>
+                  </a:tcPr>
+                </a:tc>
+              </a:tr>
+              <a:tr h="365760">
+                <a:tc>
+                  <a:txBody>
+                    <a:bodyPr/>
+                    <a:lstStyle/>
+                    <a:p>
+                      <a:r>
+                        <a:rPr sz="1400" b="0">
+                          <a:solidFill>
+                            <a:srgbClr val="161A23"/>
+                          </a:solidFill>
+                          <a:latin typeface="Calibri"/>
+                        </a:rPr>
+                        <a:t>B</a:t>
+                      </a:r>
+                    </a:p>
+                  </a:txBody>
+                  <a:tcPr>
+                    <a:solidFill>
+                      <a:srgbClr val="F7F8FC"/>
+                    </a:solidFill>
+                  </a:tcPr>
+                </a:tc>
+                <a:tc>
+                  <a:txBody>
+                    <a:bodyPr/>
+                    <a:lstStyle/>
+                    <a:p>
+                      <a:r>
+                        <a:rPr sz="1400" b="0">
+                          <a:solidFill>
+                            <a:srgbClr val="161A23"/>
+                          </a:solidFill>
+                          <a:latin typeface="Calibri"/>
+                        </a:rPr>
+                        <a:t>Six agents, first try</a:t>
+                      </a:r>
+                    </a:p>
+                  </a:txBody>
+                  <a:tcPr>
+                    <a:solidFill>
+                      <a:srgbClr val="F7F8FC"/>
+                    </a:solidFill>
+                  </a:tcPr>
+                </a:tc>
+                <a:tc>
+                  <a:txBody>
+                    <a:bodyPr/>
+                    <a:lstStyle/>
+                    <a:p>
+                      <a:r>
+                        <a:rPr sz="1400" b="0">
+                          <a:solidFill>
+                            <a:srgbClr val="161A23"/>
+                          </a:solidFill>
+                          <a:latin typeface="Calibri"/>
+                        </a:rPr>
+                        <a:t>21</a:t>
+                      </a:r>
+                    </a:p>
+                  </a:txBody>
+                  <a:tcPr>
+                    <a:solidFill>
+                      <a:srgbClr val="F7F8FC"/>
+                    </a:solidFill>
+                  </a:tcPr>
+                </a:tc>
+                <a:tc>
+                  <a:txBody>
+                    <a:bodyPr/>
+                    <a:lstStyle/>
+                    <a:p>
+                      <a:r>
+                        <a:rPr sz="1400" b="0">
+                          <a:solidFill>
+                            <a:srgbClr val="161A23"/>
+                          </a:solidFill>
+                          <a:latin typeface="Calibri"/>
+                        </a:rPr>
+                        <a:t>120,703</a:t>
+                      </a:r>
+                    </a:p>
+                  </a:txBody>
+                  <a:tcPr>
+                    <a:solidFill>
+                      <a:srgbClr val="F7F8FC"/>
+                    </a:solidFill>
+                  </a:tcPr>
+                </a:tc>
+                <a:tc>
+                  <a:txBody>
+                    <a:bodyPr/>
+                    <a:lstStyle/>
+                    <a:p>
+                      <a:r>
+                        <a:rPr sz="1400" b="0">
+                          <a:solidFill>
+                            <a:srgbClr val="161A23"/>
+                          </a:solidFill>
+                          <a:latin typeface="Calibri"/>
+                        </a:rPr>
+                        <a:t>$0.186</a:t>
+                      </a:r>
+                    </a:p>
+                  </a:txBody>
+                  <a:tcPr>
+                    <a:solidFill>
+                      <a:srgbClr val="F7F8FC"/>
+                    </a:solidFill>
+                  </a:tcPr>
+                </a:tc>
+              </a:tr>
+              <a:tr h="365760">
+                <a:tc>
+                  <a:txBody>
+                    <a:bodyPr/>
+                    <a:lstStyle/>
+                    <a:p>
+                      <a:r>
+                        <a:rPr sz="1400" b="0">
+                          <a:solidFill>
+                            <a:srgbClr val="161A23"/>
+                          </a:solidFill>
+                          <a:latin typeface="Calibri"/>
+                        </a:rPr>
+                        <a:t>C</a:t>
+                      </a:r>
+                    </a:p>
+                  </a:txBody>
+                  <a:tcPr>
+                    <a:solidFill>
+                      <a:srgbClr val="FFFFFF"/>
+                    </a:solidFill>
+                  </a:tcPr>
+                </a:tc>
+                <a:tc>
+                  <a:txBody>
+                    <a:bodyPr/>
+                    <a:lstStyle/>
+                    <a:p>
+                      <a:r>
+                        <a:rPr sz="1400" b="0">
+                          <a:solidFill>
+                            <a:srgbClr val="161A23"/>
+                          </a:solidFill>
+                          <a:latin typeface="Calibri"/>
+                        </a:rPr>
+                        <a:t>Six agents, tidied up</a:t>
+                      </a:r>
+                    </a:p>
+                  </a:txBody>
+                  <a:tcPr>
+                    <a:solidFill>
+                      <a:srgbClr val="FFFFFF"/>
+                    </a:solidFill>
+                  </a:tcPr>
+                </a:tc>
+                <a:tc>
+                  <a:txBody>
+                    <a:bodyPr/>
+                    <a:lstStyle/>
+                    <a:p>
+                      <a:r>
+                        <a:rPr sz="1400" b="0">
+                          <a:solidFill>
+                            <a:srgbClr val="161A23"/>
+                          </a:solidFill>
+                          <a:latin typeface="Calibri"/>
+                        </a:rPr>
+                        <a:t>10</a:t>
+                      </a:r>
+                    </a:p>
+                  </a:txBody>
+                  <a:tcPr>
+                    <a:solidFill>
+                      <a:srgbClr val="FFFFFF"/>
+                    </a:solidFill>
+                  </a:tcPr>
+                </a:tc>
+                <a:tc>
+                  <a:txBody>
+                    <a:bodyPr/>
+                    <a:lstStyle/>
+                    <a:p>
+                      <a:r>
+                        <a:rPr sz="1400" b="0">
+                          <a:solidFill>
+                            <a:srgbClr val="161A23"/>
+                          </a:solidFill>
+                          <a:latin typeface="Calibri"/>
+                        </a:rPr>
+                        <a:t>13,521</a:t>
+                      </a:r>
+                    </a:p>
+                  </a:txBody>
+                  <a:tcPr>
+                    <a:solidFill>
+                      <a:srgbClr val="FFFFFF"/>
+                    </a:solidFill>
+                  </a:tcPr>
+                </a:tc>
+                <a:tc>
+                  <a:txBody>
+                    <a:bodyPr/>
+                    <a:lstStyle/>
+                    <a:p>
+                      <a:r>
+                        <a:rPr sz="1400" b="0">
+                          <a:solidFill>
+                            <a:srgbClr val="161A23"/>
+                          </a:solidFill>
+                          <a:latin typeface="Calibri"/>
+                        </a:rPr>
+                        <a:t>$0.031</a:t>
+                      </a:r>
+                    </a:p>
+                  </a:txBody>
+                  <a:tcPr>
+                    <a:solidFill>
+                      <a:srgbClr val="FFFFFF"/>
+                    </a:solidFill>
+                  </a:tcPr>
+                </a:tc>
+              </a:tr>
+              <a:tr h="365760">
+                <a:tc>
+                  <a:txBody>
+                    <a:bodyPr/>
+                    <a:lstStyle/>
+                    <a:p>
+                      <a:r>
+                        <a:rPr sz="1400" b="0">
+                          <a:solidFill>
+                            <a:srgbClr val="161A23"/>
+                          </a:solidFill>
+                          <a:latin typeface="Calibri"/>
+                        </a:rPr>
+                        <a:t>D</a:t>
+                      </a:r>
+                    </a:p>
+                  </a:txBody>
+                  <a:tcPr>
+                    <a:solidFill>
+                      <a:srgbClr val="F7F8FC"/>
+                    </a:solidFill>
+                  </a:tcPr>
+                </a:tc>
+                <a:tc>
+                  <a:txBody>
+                    <a:bodyPr/>
+                    <a:lstStyle/>
+                    <a:p>
+                      <a:r>
+                        <a:rPr sz="1400" b="0">
+                          <a:solidFill>
+                            <a:srgbClr val="161A23"/>
+                          </a:solidFill>
+                          <a:latin typeface="Calibri"/>
+                        </a:rPr>
+                        <a:t>Three agents  (shipped)</a:t>
+                      </a:r>
+                    </a:p>
+                  </a:txBody>
+                  <a:tcPr>
+                    <a:solidFill>
+                      <a:srgbClr val="F7F8FC"/>
+                    </a:solidFill>
+                  </a:tcPr>
+                </a:tc>
+                <a:tc>
+                  <a:txBody>
+                    <a:bodyPr/>
+                    <a:lstStyle/>
+                    <a:p>
+                      <a:r>
+                        <a:rPr sz="1400" b="0">
+                          <a:solidFill>
+                            <a:srgbClr val="161A23"/>
+                          </a:solidFill>
+                          <a:latin typeface="Calibri"/>
+                        </a:rPr>
+                        <a:t>2</a:t>
+                      </a:r>
+                    </a:p>
+                  </a:txBody>
+                  <a:tcPr>
+                    <a:solidFill>
+                      <a:srgbClr val="F7F8FC"/>
+                    </a:solidFill>
+                  </a:tcPr>
+                </a:tc>
+                <a:tc>
+                  <a:txBody>
+                    <a:bodyPr/>
+                    <a:lstStyle/>
+                    <a:p>
+                      <a:r>
+                        <a:rPr sz="1400" b="0">
+                          <a:solidFill>
+                            <a:srgbClr val="161A23"/>
+                          </a:solidFill>
+                          <a:latin typeface="Calibri"/>
+                        </a:rPr>
+                        <a:t>7,840</a:t>
+                      </a:r>
+                    </a:p>
+                  </a:txBody>
+                  <a:tcPr>
+                    <a:solidFill>
+                      <a:srgbClr val="F7F8FC"/>
+                    </a:solidFill>
+                  </a:tcPr>
+                </a:tc>
+                <a:tc>
+                  <a:txBody>
+                    <a:bodyPr/>
+                    <a:lstStyle/>
+                    <a:p>
+                      <a:r>
+                        <a:rPr sz="1400" b="0">
+                          <a:solidFill>
+                            <a:srgbClr val="161A23"/>
+                          </a:solidFill>
+                          <a:latin typeface="Calibri"/>
+                        </a:rPr>
+                        <a:t>$0.018</a:t>
+                      </a:r>
+                    </a:p>
+                  </a:txBody>
+                  <a:tcPr>
+                    <a:solidFill>
+                      <a:srgbClr val="F7F8FC"/>
+                    </a:solidFill>
+                  </a:tcPr>
+                </a:tc>
+              </a:tr>
+            </a:tbl>
+          </a:graphicData>
+        </a:graphic>
+      </p:graphicFrame>
       <p:sp>
         <p:nvSpPr>
           <p:cNvPr id="6" name="TextBox 5"/>
@@ -7411,8 +7688,8 @@
         </p:nvSpPr>
         <p:spPr>
           <a:xfrm>
-            <a:off x="822960" y="6172200"/>
-            <a:ext cx="10515600" cy="457200"/>
+            <a:off x="822960" y="4480560"/>
+            <a:ext cx="10515600" cy="1463040"/>
           </a:xfrm>
           <a:prstGeom prst="rect">
             <a:avLst/>
@@ -7427,17 +7704,49 @@
           <a:p>
             <a:pPr algn="l">
               <a:lnSpc>
-                <a:spcPct val="100000"/>
+                <a:spcPct val="125000"/>
               </a:lnSpc>
             </a:pPr>
             <a:r>
-              <a:rPr sz="1500" b="0">
+              <a:rPr sz="2600" b="1">
+                <a:solidFill>
+                  <a:srgbClr val="4338CA"/>
+                </a:solidFill>
+                <a:latin typeface="Calibri"/>
+              </a:rPr>
+              <a:t>B needs 21 AI calls. D needs 2.</a:t>
+            </a:r>
+          </a:p>
+          <a:p>
+            <a:pPr algn="l">
+              <a:lnSpc>
+                <a:spcPct val="125000"/>
+              </a:lnSpc>
+            </a:pPr>
+            <a:r>
+              <a:rPr sz="600" b="0">
+                <a:solidFill>
+                  <a:srgbClr val="161A23"/>
+                </a:solidFill>
+                <a:latin typeface="Calibri"/>
+              </a:rPr>
+              <a:t/>
+            </a:r>
+          </a:p>
+          <a:p>
+            <a:pPr algn="l">
+              <a:lnSpc>
+                <a:spcPct val="125000"/>
+              </a:lnSpc>
+            </a:pPr>
+            <a:r>
+              <a:rPr sz="1900" b="0">
                 <a:solidFill>
                   <a:srgbClr val="545C6E"/>
                 </a:solidFill>
                 <a:latin typeface="Calibri"/>
               </a:rPr>
-              <a:t>Purple steps use AI. Green steps are plain code.</a:t>
+              <a:t>That is 15 times less text, for the same finished plan.</a:t>
             </a:r>
           </a:p>
         </p:txBody>
@@ -7494,7 +7803,7 @@
                 </a:solidFill>
                 <a:latin typeface="Calibri"/>
               </a:rPr>
-              <a:t>5  ·  WHAT WENT WRONG IN EACH APPROACH</a:t>
+              <a:t>5  ·  WHAT THE USER SEES</a:t>
             </a:r>
           </a:p>
         </p:txBody>
@@ -7533,7 +7842,7 @@
                 </a:solidFill>
                 <a:latin typeface="Calibri"/>
               </a:rPr>
-              <a:t>Measured, not guessed. This is why D exists</a:t>
+              <a:t>One form, live progress, the plan in tabs</a:t>
             </a:r>
           </a:p>
         </p:txBody>
@@ -7582,262 +7891,30 @@
           </a:p>
         </p:txBody>
       </p:sp>
-      <p:graphicFrame>
-        <p:nvGraphicFramePr>
-          <p:cNvPr id="5" name="Table 4"/>
-          <p:cNvGraphicFramePr>
-            <a:graphicFrameLocks noGrp="1"/>
-          </p:cNvGraphicFramePr>
+      <p:pic>
+        <p:nvPicPr>
+          <p:cNvPr id="5" name="Picture 4" descr="frontend.png"/>
+          <p:cNvPicPr>
+            <a:picLocks noChangeAspect="1"/>
+          </p:cNvPicPr>
           <p:nvPr/>
-        </p:nvGraphicFramePr>
-        <p:xfrm>
-          <a:off x="822960" y="2011680"/>
-          <a:ext cx="10515599" cy="1828800"/>
-        </p:xfrm>
-        <a:graphic>
-          <a:graphicData uri="http://schemas.openxmlformats.org/drawingml/2006/table">
-            <a:tbl>
-              <a:tblPr firstRow="1" bandRow="1">
-                <a:tableStyleId>{5C22544A-7EE6-4342-B048-85BDC9FD1C3A}</a:tableStyleId>
-              </a:tblPr>
-              <a:tblGrid>
-                <a:gridCol w="477981"/>
-                <a:gridCol w="10037618"/>
-              </a:tblGrid>
-              <a:tr h="365760">
-                <a:tc>
-                  <a:txBody>
-                    <a:bodyPr/>
-                    <a:lstStyle/>
-                    <a:p>
-                      <a:r>
-                        <a:rPr sz="1350" b="1">
-                          <a:solidFill>
-                            <a:srgbClr val="FFFFFF"/>
-                          </a:solidFill>
-                          <a:latin typeface="Calibri"/>
-                        </a:rPr>
-                        <a:t> </a:t>
-                      </a:r>
-                    </a:p>
-                  </a:txBody>
-                  <a:tcPr>
-                    <a:solidFill>
-                      <a:srgbClr val="4338CA"/>
-                    </a:solidFill>
-                  </a:tcPr>
-                </a:tc>
-                <a:tc>
-                  <a:txBody>
-                    <a:bodyPr/>
-                    <a:lstStyle/>
-                    <a:p>
-                      <a:r>
-                        <a:rPr sz="1350" b="1">
-                          <a:solidFill>
-                            <a:srgbClr val="FFFFFF"/>
-                          </a:solidFill>
-                          <a:latin typeface="Calibri"/>
-                        </a:rPr>
-                        <a:t>The problem I measured</a:t>
-                      </a:r>
-                    </a:p>
-                  </a:txBody>
-                  <a:tcPr>
-                    <a:solidFill>
-                      <a:srgbClr val="4338CA"/>
-                    </a:solidFill>
-                  </a:tcPr>
-                </a:tc>
-              </a:tr>
-              <a:tr h="365760">
-                <a:tc>
-                  <a:txBody>
-                    <a:bodyPr/>
-                    <a:lstStyle/>
-                    <a:p>
-                      <a:r>
-                        <a:rPr sz="1350" b="0">
-                          <a:solidFill>
-                            <a:srgbClr val="161A23"/>
-                          </a:solidFill>
-                          <a:latin typeface="Calibri"/>
-                        </a:rPr>
-                        <a:t>A</a:t>
-                      </a:r>
-                    </a:p>
-                  </a:txBody>
-                  <a:tcPr>
-                    <a:solidFill>
-                      <a:srgbClr val="FFFFFF"/>
-                    </a:solidFill>
-                  </a:tcPr>
-                </a:tc>
-                <a:tc>
-                  <a:txBody>
-                    <a:bodyPr/>
-                    <a:lstStyle/>
-                    <a:p>
-                      <a:r>
-                        <a:rPr sz="1350" b="0">
-                          <a:solidFill>
-                            <a:srgbClr val="161A23"/>
-                          </a:solidFill>
-                          <a:latin typeface="Calibri"/>
-                        </a:rPr>
-                        <a:t>No tools, so it invents everything. Only 1.7% of its prices matched a real fare</a:t>
-                      </a:r>
-                    </a:p>
-                  </a:txBody>
-                  <a:tcPr>
-                    <a:solidFill>
-                      <a:srgbClr val="FFFFFF"/>
-                    </a:solidFill>
-                  </a:tcPr>
-                </a:tc>
-              </a:tr>
-              <a:tr h="365760">
-                <a:tc>
-                  <a:txBody>
-                    <a:bodyPr/>
-                    <a:lstStyle/>
-                    <a:p>
-                      <a:r>
-                        <a:rPr sz="1350" b="0">
-                          <a:solidFill>
-                            <a:srgbClr val="161A23"/>
-                          </a:solidFill>
-                          <a:latin typeface="Calibri"/>
-                        </a:rPr>
-                        <a:t>B</a:t>
-                      </a:r>
-                    </a:p>
-                  </a:txBody>
-                  <a:tcPr>
-                    <a:solidFill>
-                      <a:srgbClr val="F7F8FC"/>
-                    </a:solidFill>
-                  </a:tcPr>
-                </a:tc>
-                <a:tc>
-                  <a:txBody>
-                    <a:bodyPr/>
-                    <a:lstStyle/>
-                    <a:p>
-                      <a:r>
-                        <a:rPr sz="1350" b="0">
-                          <a:solidFill>
-                            <a:srgbClr val="161A23"/>
-                          </a:solidFill>
-                          <a:latin typeface="Calibri"/>
-                        </a:rPr>
-                        <a:t>Skipped its own tools: never called the attractions or the restaurant tool once. Twice produced broken output</a:t>
-                      </a:r>
-                    </a:p>
-                  </a:txBody>
-                  <a:tcPr>
-                    <a:solidFill>
-                      <a:srgbClr val="F7F8FC"/>
-                    </a:solidFill>
-                  </a:tcPr>
-                </a:tc>
-              </a:tr>
-              <a:tr h="365760">
-                <a:tc>
-                  <a:txBody>
-                    <a:bodyPr/>
-                    <a:lstStyle/>
-                    <a:p>
-                      <a:r>
-                        <a:rPr sz="1350" b="0">
-                          <a:solidFill>
-                            <a:srgbClr val="161A23"/>
-                          </a:solidFill>
-                          <a:latin typeface="Calibri"/>
-                        </a:rPr>
-                        <a:t>C</a:t>
-                      </a:r>
-                    </a:p>
-                  </a:txBody>
-                  <a:tcPr>
-                    <a:solidFill>
-                      <a:srgbClr val="FFFFFF"/>
-                    </a:solidFill>
-                  </a:tcPr>
-                </a:tc>
-                <a:tc>
-                  <a:txBody>
-                    <a:bodyPr/>
-                    <a:lstStyle/>
-                    <a:p>
-                      <a:r>
-                        <a:rPr sz="1350" b="0">
-                          <a:solidFill>
-                            <a:srgbClr val="161A23"/>
-                          </a:solidFill>
-                          <a:latin typeface="Calibri"/>
-                        </a:rPr>
-                        <a:t>Better, but still unreliable: never called the flight tool at all on the recorded run</a:t>
-                      </a:r>
-                    </a:p>
-                  </a:txBody>
-                  <a:tcPr>
-                    <a:solidFill>
-                      <a:srgbClr val="FFFFFF"/>
-                    </a:solidFill>
-                  </a:tcPr>
-                </a:tc>
-              </a:tr>
-              <a:tr h="365760">
-                <a:tc>
-                  <a:txBody>
-                    <a:bodyPr/>
-                    <a:lstStyle/>
-                    <a:p>
-                      <a:r>
-                        <a:rPr sz="1350" b="0">
-                          <a:solidFill>
-                            <a:srgbClr val="161A23"/>
-                          </a:solidFill>
-                          <a:latin typeface="Calibri"/>
-                        </a:rPr>
-                        <a:t>D</a:t>
-                      </a:r>
-                    </a:p>
-                  </a:txBody>
-                  <a:tcPr>
-                    <a:solidFill>
-                      <a:srgbClr val="F7F8FC"/>
-                    </a:solidFill>
-                  </a:tcPr>
-                </a:tc>
-                <a:tc>
-                  <a:txBody>
-                    <a:bodyPr/>
-                    <a:lstStyle/>
-                    <a:p>
-                      <a:r>
-                        <a:rPr sz="1350" b="0">
-                          <a:solidFill>
-                            <a:srgbClr val="161A23"/>
-                          </a:solidFill>
-                          <a:latin typeface="Calibri"/>
-                        </a:rPr>
-                        <a:t>Always makes the same 5 requests, because code decides, not AI. Nothing is skipped</a:t>
-                      </a:r>
-                    </a:p>
-                  </a:txBody>
-                  <a:tcPr>
-                    <a:solidFill>
-                      <a:srgbClr val="F7F8FC"/>
-                    </a:solidFill>
-                  </a:tcPr>
-                </a:tc>
-              </a:tr>
-            </a:tbl>
-          </a:graphicData>
-        </a:graphic>
-      </p:graphicFrame>
+        </p:nvPicPr>
+        <p:blipFill>
+          <a:blip r:embed="rId2"/>
+          <a:stretch>
+            <a:fillRect/>
+          </a:stretch>
+        </p:blipFill>
+        <p:spPr>
+          <a:xfrm>
+            <a:off x="2352101" y="1783080"/>
+            <a:ext cx="7487493" cy="4297680"/>
+          </a:xfrm>
+          <a:prstGeom prst="rect">
+            <a:avLst/>
+          </a:prstGeom>
+        </p:spPr>
+      </p:pic>
       <p:sp>
         <p:nvSpPr>
           <p:cNvPr id="6" name="TextBox 5"/>
@@ -7846,8 +7923,8 @@
         </p:nvSpPr>
         <p:spPr>
           <a:xfrm>
-            <a:off x="822960" y="4937760"/>
-            <a:ext cx="10515600" cy="1188720"/>
+            <a:off x="822960" y="6172200"/>
+            <a:ext cx="10515600" cy="457200"/>
           </a:xfrm>
           <a:prstGeom prst="rect">
             <a:avLst/>
@@ -7862,33 +7939,17 @@
           <a:p>
             <a:pPr algn="l">
               <a:lnSpc>
-                <a:spcPct val="125000"/>
+                <a:spcPct val="100000"/>
               </a:lnSpc>
             </a:pPr>
             <a:r>
-              <a:rPr sz="2100" b="1">
-                <a:solidFill>
-                  <a:srgbClr val="A85B00"/>
-                </a:solidFill>
-                <a:latin typeface="Calibri"/>
-              </a:rPr>
-              <a:t>When AI decides which tools to call, it sometimes does not call them.</a:t>
-            </a:r>
-          </a:p>
-          <a:p>
-            <a:pPr algn="l">
-              <a:lnSpc>
-                <a:spcPct val="125000"/>
-              </a:lnSpc>
-            </a:pPr>
-            <a:r>
-              <a:rPr sz="1700" b="0">
+              <a:rPr sz="1500" b="0">
                 <a:solidFill>
                   <a:srgbClr val="545C6E"/>
                 </a:solidFill>
                 <a:latin typeface="Calibri"/>
               </a:rPr>
-              <a:t>The plan still looks finished. That is what makes it dangerous.</a:t>
+              <a:t>Purple steps use AI. Green steps are normal code.</a:t>
             </a:r>
           </a:p>
         </p:txBody>
@@ -7945,7 +8006,7 @@
                 </a:solidFill>
                 <a:latin typeface="Calibri"/>
               </a:rPr>
-              <a:t>6  ·  THE BUDGET CHECK</a:t>
+              <a:t>6  ·  WHAT WENT WRONG IN EACH ONE</a:t>
             </a:r>
           </a:p>
         </p:txBody>
@@ -7984,7 +8045,7 @@
                 </a:solidFill>
                 <a:latin typeface="Calibri"/>
               </a:rPr>
-              <a:t>It divides the money, then refuses the impossible</a:t>
+              <a:t>Measured, not guessed. This is why D exists</a:t>
             </a:r>
           </a:p>
         </p:txBody>
@@ -8042,7 +8103,7 @@
           <p:nvPr/>
         </p:nvGraphicFramePr>
         <p:xfrm>
-          <a:off x="822960" y="1965960"/>
+          <a:off x="822960" y="2011680"/>
           <a:ext cx="10515599" cy="1828800"/>
         </p:xfrm>
         <a:graphic>
@@ -8052,8 +8113,8 @@
                 <a:tableStyleId>{5C22544A-7EE6-4342-B048-85BDC9FD1C3A}</a:tableStyleId>
               </a:tblPr>
               <a:tblGrid>
-                <a:gridCol w="1702525"/>
-                <a:gridCol w="8813074"/>
+                <a:gridCol w="477981"/>
+                <a:gridCol w="10037618"/>
               </a:tblGrid>
               <a:tr h="365760">
                 <a:tc>
@@ -8068,7 +8129,7 @@
                           </a:solidFill>
                           <a:latin typeface="Calibri"/>
                         </a:rPr>
-                        <a:t>Step</a:t>
+                        <a:t> </a:t>
                       </a:r>
                     </a:p>
                   </a:txBody>
@@ -8090,7 +8151,7 @@
                           </a:solidFill>
                           <a:latin typeface="Calibri"/>
                         </a:rPr>
-                        <a:t>What it does</a:t>
+                        <a:t>The problem I measured</a:t>
                       </a:r>
                     </a:p>
                   </a:txBody>
@@ -8114,7 +8175,7 @@
                           </a:solidFill>
                           <a:latin typeface="Calibri"/>
                         </a:rPr>
-                        <a:t>1  Divide</a:t>
+                        <a:t>A</a:t>
                       </a:r>
                     </a:p>
                   </a:txBody>
@@ -8136,7 +8197,7 @@
                           </a:solidFill>
                           <a:latin typeface="Calibri"/>
                         </a:rPr>
-                        <a:t>Splits the budget across flights, hotel, food and activities — worked out from this trip, not a fixed %</a:t>
+                        <a:t>No tools, so it invents everything. Only 1.7% of its prices matched a real one</a:t>
                       </a:r>
                     </a:p>
                   </a:txBody>
@@ -8160,7 +8221,7 @@
                           </a:solidFill>
                           <a:latin typeface="Calibri"/>
                         </a:rPr>
-                        <a:t>2  Listen</a:t>
+                        <a:t>B</a:t>
                       </a:r>
                     </a:p>
                   </a:txBody>
@@ -8182,7 +8243,7 @@
                           </a:solidFill>
                           <a:latin typeface="Calibri"/>
                         </a:rPr>
-                        <a:t>"a luxury stay" moves money to the room; "I can compromise" moves it to experiences</a:t>
+                        <a:t>Did not use its own tools: never called the attractions or the restaurant tool once. Twice gave broken output</a:t>
                       </a:r>
                     </a:p>
                   </a:txBody>
@@ -8206,7 +8267,7 @@
                           </a:solidFill>
                           <a:latin typeface="Calibri"/>
                         </a:rPr>
-                        <a:t>3  Check</a:t>
+                        <a:t>C</a:t>
                       </a:r>
                     </a:p>
                   </a:txBody>
@@ -8228,7 +8289,7 @@
                           </a:solidFill>
                           <a:latin typeface="Calibri"/>
                         </a:rPr>
-                        <a:t>Works out the cheapest this trip could possibly cost</a:t>
+                        <a:t>Better, but still missed things: never called the flight tool at all on the recorded run</a:t>
                       </a:r>
                     </a:p>
                   </a:txBody>
@@ -8252,7 +8313,7 @@
                           </a:solidFill>
                           <a:latin typeface="Calibri"/>
                         </a:rPr>
-                        <a:t>4  Refuse</a:t>
+                        <a:t>D</a:t>
                       </a:r>
                     </a:p>
                   </a:txBody>
@@ -8274,7 +8335,7 @@
                           </a:solidFill>
                           <a:latin typeface="Calibri"/>
                         </a:rPr>
-                        <a:t>If the budget is below that, it says so and offers three ways to fix it</a:t>
+                        <a:t>Always makes the same 5 requests, because code decides, not AI. Nothing gets skipped</a:t>
                       </a:r>
                     </a:p>
                   </a:txBody>
@@ -8297,8 +8358,8 @@
         </p:nvSpPr>
         <p:spPr>
           <a:xfrm>
-            <a:off x="822960" y="4617720"/>
-            <a:ext cx="3515258" cy="1188720"/>
+            <a:off x="822960" y="4937760"/>
+            <a:ext cx="10515600" cy="1188720"/>
           </a:xfrm>
           <a:prstGeom prst="rect">
             <a:avLst/>
@@ -8311,253 +8372,35 @@
           </a:bodyPr>
           <a:lstStyle/>
           <a:p>
-            <a:pPr algn="ctr">
+            <a:pPr algn="l">
               <a:lnSpc>
-                <a:spcPct val="100000"/>
+                <a:spcPct val="125000"/>
               </a:lnSpc>
             </a:pPr>
             <a:r>
-              <a:rPr sz="6000" b="1">
+              <a:rPr sz="2100" b="1">
                 <a:solidFill>
                   <a:srgbClr val="A85B00"/>
                 </a:solidFill>
                 <a:latin typeface="Calibri"/>
               </a:rPr>
-              <a:t>$800</a:t>
-            </a:r>
-          </a:p>
-        </p:txBody>
-      </p:sp>
-      <p:sp>
-        <p:nvSpPr>
-          <p:cNvPr id="7" name="TextBox 6"/>
-          <p:cNvSpPr txBox="1"/>
-          <p:nvPr/>
-        </p:nvSpPr>
-        <p:spPr>
-          <a:xfrm>
-            <a:off x="822960" y="5760720"/>
-            <a:ext cx="3515258" cy="731520"/>
-          </a:xfrm>
-          <a:prstGeom prst="rect">
-            <a:avLst/>
-          </a:prstGeom>
-          <a:noFill/>
-        </p:spPr>
-        <p:txBody>
-          <a:bodyPr wrap="square" anchor="t">
-            <a:spAutoFit/>
-          </a:bodyPr>
-          <a:lstStyle/>
-          <a:p>
-            <a:pPr algn="ctr">
+              <a:t>When AI decides which tools to use, sometimes it just does not use them.</a:t>
+            </a:r>
+          </a:p>
+          <a:p>
+            <a:pPr algn="l">
               <a:lnSpc>
-                <a:spcPct val="100000"/>
+                <a:spcPct val="125000"/>
               </a:lnSpc>
             </a:pPr>
             <a:r>
-              <a:rPr sz="1400" b="0">
+              <a:rPr sz="1700" b="0">
                 <a:solidFill>
                   <a:srgbClr val="545C6E"/>
                 </a:solidFill>
                 <a:latin typeface="Calibri"/>
               </a:rPr>
-              <a:t>asked for</a:t>
-            </a:r>
-          </a:p>
-        </p:txBody>
-      </p:sp>
-      <p:sp>
-        <p:nvSpPr>
-          <p:cNvPr id="8" name="TextBox 7"/>
-          <p:cNvSpPr txBox="1"/>
-          <p:nvPr/>
-        </p:nvSpPr>
-        <p:spPr>
-          <a:xfrm>
-            <a:off x="4338218" y="4617720"/>
-            <a:ext cx="3515258" cy="1188720"/>
-          </a:xfrm>
-          <a:prstGeom prst="rect">
-            <a:avLst/>
-          </a:prstGeom>
-          <a:noFill/>
-        </p:spPr>
-        <p:txBody>
-          <a:bodyPr wrap="square" anchor="t">
-            <a:spAutoFit/>
-          </a:bodyPr>
-          <a:lstStyle/>
-          <a:p>
-            <a:pPr algn="ctr">
-              <a:lnSpc>
-                <a:spcPct val="100000"/>
-              </a:lnSpc>
-            </a:pPr>
-            <a:r>
-              <a:rPr sz="6000" b="1">
-                <a:solidFill>
-                  <a:srgbClr val="A85B00"/>
-                </a:solidFill>
-                <a:latin typeface="Calibri"/>
-              </a:rPr>
-              <a:t>$837</a:t>
-            </a:r>
-          </a:p>
-        </p:txBody>
-      </p:sp>
-      <p:sp>
-        <p:nvSpPr>
-          <p:cNvPr id="9" name="TextBox 8"/>
-          <p:cNvSpPr txBox="1"/>
-          <p:nvPr/>
-        </p:nvSpPr>
-        <p:spPr>
-          <a:xfrm>
-            <a:off x="4338218" y="5760720"/>
-            <a:ext cx="3515258" cy="731520"/>
-          </a:xfrm>
-          <a:prstGeom prst="rect">
-            <a:avLst/>
-          </a:prstGeom>
-          <a:noFill/>
-        </p:spPr>
-        <p:txBody>
-          <a:bodyPr wrap="square" anchor="t">
-            <a:spAutoFit/>
-          </a:bodyPr>
-          <a:lstStyle/>
-          <a:p>
-            <a:pPr algn="ctr">
-              <a:lnSpc>
-                <a:spcPct val="100000"/>
-              </a:lnSpc>
-            </a:pPr>
-            <a:r>
-              <a:rPr sz="1400" b="0">
-                <a:solidFill>
-                  <a:srgbClr val="545C6E"/>
-                </a:solidFill>
-                <a:latin typeface="Calibri"/>
-              </a:rPr>
-              <a:t>cheapest it can be done</a:t>
-            </a:r>
-          </a:p>
-        </p:txBody>
-      </p:sp>
-      <p:sp>
-        <p:nvSpPr>
-          <p:cNvPr id="10" name="TextBox 9"/>
-          <p:cNvSpPr txBox="1"/>
-          <p:nvPr/>
-        </p:nvSpPr>
-        <p:spPr>
-          <a:xfrm>
-            <a:off x="7853476" y="4617720"/>
-            <a:ext cx="3515258" cy="1188720"/>
-          </a:xfrm>
-          <a:prstGeom prst="rect">
-            <a:avLst/>
-          </a:prstGeom>
-          <a:noFill/>
-        </p:spPr>
-        <p:txBody>
-          <a:bodyPr wrap="square" anchor="t">
-            <a:spAutoFit/>
-          </a:bodyPr>
-          <a:lstStyle/>
-          <a:p>
-            <a:pPr algn="ctr">
-              <a:lnSpc>
-                <a:spcPct val="100000"/>
-              </a:lnSpc>
-            </a:pPr>
-            <a:r>
-              <a:rPr sz="6000" b="1">
-                <a:solidFill>
-                  <a:srgbClr val="A85B00"/>
-                </a:solidFill>
-                <a:latin typeface="Calibri"/>
-              </a:rPr>
-              <a:t>REFUSED</a:t>
-            </a:r>
-          </a:p>
-        </p:txBody>
-      </p:sp>
-      <p:sp>
-        <p:nvSpPr>
-          <p:cNvPr id="11" name="TextBox 10"/>
-          <p:cNvSpPr txBox="1"/>
-          <p:nvPr/>
-        </p:nvSpPr>
-        <p:spPr>
-          <a:xfrm>
-            <a:off x="7853476" y="5760720"/>
-            <a:ext cx="3515258" cy="731520"/>
-          </a:xfrm>
-          <a:prstGeom prst="rect">
-            <a:avLst/>
-          </a:prstGeom>
-          <a:noFill/>
-        </p:spPr>
-        <p:txBody>
-          <a:bodyPr wrap="square" anchor="t">
-            <a:spAutoFit/>
-          </a:bodyPr>
-          <a:lstStyle/>
-          <a:p>
-            <a:pPr algn="ctr">
-              <a:lnSpc>
-                <a:spcPct val="100000"/>
-              </a:lnSpc>
-            </a:pPr>
-            <a:r>
-              <a:rPr sz="1400" b="0">
-                <a:solidFill>
-                  <a:srgbClr val="545C6E"/>
-                </a:solidFill>
-                <a:latin typeface="Calibri"/>
-              </a:rPr>
-              <a:t>with reasons given</a:t>
-            </a:r>
-          </a:p>
-        </p:txBody>
-      </p:sp>
-      <p:sp>
-        <p:nvSpPr>
-          <p:cNvPr id="12" name="TextBox 11"/>
-          <p:cNvSpPr txBox="1"/>
-          <p:nvPr/>
-        </p:nvSpPr>
-        <p:spPr>
-          <a:xfrm>
-            <a:off x="822960" y="6035040"/>
-            <a:ext cx="10515600" cy="548640"/>
-          </a:xfrm>
-          <a:prstGeom prst="rect">
-            <a:avLst/>
-          </a:prstGeom>
-          <a:noFill/>
-        </p:spPr>
-        <p:txBody>
-          <a:bodyPr wrap="square" anchor="t">
-            <a:spAutoFit/>
-          </a:bodyPr>
-          <a:lstStyle/>
-          <a:p>
-            <a:pPr algn="l">
-              <a:lnSpc>
-                <a:spcPct val="100000"/>
-              </a:lnSpc>
-            </a:pPr>
-            <a:r>
-              <a:rPr sz="1500" b="0">
-                <a:solidFill>
-                  <a:srgbClr val="545C6E"/>
-                </a:solidFill>
-                <a:latin typeface="Calibri"/>
-              </a:rPr>
-              <a:t>It uses the real recorded fare. The built-in table said $350 — the API returned $734.</a:t>
+              <a:t>The plan still looks complete. That is what makes it dangerous.</a:t>
             </a:r>
           </a:p>
         </p:txBody>
@@ -8614,7 +8457,7 @@
                 </a:solidFill>
                 <a:latin typeface="Calibri"/>
               </a:rPr>
-              <a:t>7  ·  RESULTS</a:t>
+              <a:t>7  ·  THE BUDGET CHECK</a:t>
             </a:r>
           </a:p>
         </p:txBody>
@@ -8653,7 +8496,7 @@
                 </a:solidFill>
                 <a:latin typeface="Calibri"/>
               </a:rPr>
-              <a:t>Cheaper, and no less accurate</a:t>
+              <a:t>It splits the money, then refuses the impossible</a:t>
             </a:r>
           </a:p>
         </p:txBody>
@@ -8702,30 +8545,262 @@
           </a:p>
         </p:txBody>
       </p:sp>
-      <p:pic>
-        <p:nvPicPr>
-          <p:cNvPr id="5" name="Picture 4" descr="efficiency.png"/>
-          <p:cNvPicPr>
-            <a:picLocks noChangeAspect="1"/>
-          </p:cNvPicPr>
+      <p:graphicFrame>
+        <p:nvGraphicFramePr>
+          <p:cNvPr id="5" name="Table 4"/>
+          <p:cNvGraphicFramePr>
+            <a:graphicFrameLocks noGrp="1"/>
+          </p:cNvGraphicFramePr>
           <p:nvPr/>
-        </p:nvPicPr>
-        <p:blipFill>
-          <a:blip r:embed="rId2"/>
-          <a:stretch>
-            <a:fillRect/>
-          </a:stretch>
-        </p:blipFill>
-        <p:spPr>
-          <a:xfrm>
-            <a:off x="3079623" y="1737360"/>
-            <a:ext cx="6032449" cy="3566160"/>
-          </a:xfrm>
-          <a:prstGeom prst="rect">
-            <a:avLst/>
-          </a:prstGeom>
-        </p:spPr>
-      </p:pic>
+        </p:nvGraphicFramePr>
+        <p:xfrm>
+          <a:off x="822960" y="1965960"/>
+          <a:ext cx="10515599" cy="1828800"/>
+        </p:xfrm>
+        <a:graphic>
+          <a:graphicData uri="http://schemas.openxmlformats.org/drawingml/2006/table">
+            <a:tbl>
+              <a:tblPr firstRow="1" bandRow="1">
+                <a:tableStyleId>{5C22544A-7EE6-4342-B048-85BDC9FD1C3A}</a:tableStyleId>
+              </a:tblPr>
+              <a:tblGrid>
+                <a:gridCol w="1602377"/>
+                <a:gridCol w="8913222"/>
+              </a:tblGrid>
+              <a:tr h="365760">
+                <a:tc>
+                  <a:txBody>
+                    <a:bodyPr/>
+                    <a:lstStyle/>
+                    <a:p>
+                      <a:r>
+                        <a:rPr sz="1350" b="1">
+                          <a:solidFill>
+                            <a:srgbClr val="FFFFFF"/>
+                          </a:solidFill>
+                          <a:latin typeface="Calibri"/>
+                        </a:rPr>
+                        <a:t>Step</a:t>
+                      </a:r>
+                    </a:p>
+                  </a:txBody>
+                  <a:tcPr>
+                    <a:solidFill>
+                      <a:srgbClr val="4338CA"/>
+                    </a:solidFill>
+                  </a:tcPr>
+                </a:tc>
+                <a:tc>
+                  <a:txBody>
+                    <a:bodyPr/>
+                    <a:lstStyle/>
+                    <a:p>
+                      <a:r>
+                        <a:rPr sz="1350" b="1">
+                          <a:solidFill>
+                            <a:srgbClr val="FFFFFF"/>
+                          </a:solidFill>
+                          <a:latin typeface="Calibri"/>
+                        </a:rPr>
+                        <a:t>What it does</a:t>
+                      </a:r>
+                    </a:p>
+                  </a:txBody>
+                  <a:tcPr>
+                    <a:solidFill>
+                      <a:srgbClr val="4338CA"/>
+                    </a:solidFill>
+                  </a:tcPr>
+                </a:tc>
+              </a:tr>
+              <a:tr h="365760">
+                <a:tc>
+                  <a:txBody>
+                    <a:bodyPr/>
+                    <a:lstStyle/>
+                    <a:p>
+                      <a:r>
+                        <a:rPr sz="1350" b="0">
+                          <a:solidFill>
+                            <a:srgbClr val="161A23"/>
+                          </a:solidFill>
+                          <a:latin typeface="Calibri"/>
+                        </a:rPr>
+                        <a:t>1  Split</a:t>
+                      </a:r>
+                    </a:p>
+                  </a:txBody>
+                  <a:tcPr>
+                    <a:solidFill>
+                      <a:srgbClr val="FFFFFF"/>
+                    </a:solidFill>
+                  </a:tcPr>
+                </a:tc>
+                <a:tc>
+                  <a:txBody>
+                    <a:bodyPr/>
+                    <a:lstStyle/>
+                    <a:p>
+                      <a:r>
+                        <a:rPr sz="1350" b="0">
+                          <a:solidFill>
+                            <a:srgbClr val="161A23"/>
+                          </a:solidFill>
+                          <a:latin typeface="Calibri"/>
+                        </a:rPr>
+                        <a:t>Divides the budget across flights, hotel, food and things to do - based on this trip, not a fixed share</a:t>
+                      </a:r>
+                    </a:p>
+                  </a:txBody>
+                  <a:tcPr>
+                    <a:solidFill>
+                      <a:srgbClr val="FFFFFF"/>
+                    </a:solidFill>
+                  </a:tcPr>
+                </a:tc>
+              </a:tr>
+              <a:tr h="365760">
+                <a:tc>
+                  <a:txBody>
+                    <a:bodyPr/>
+                    <a:lstStyle/>
+                    <a:p>
+                      <a:r>
+                        <a:rPr sz="1350" b="0">
+                          <a:solidFill>
+                            <a:srgbClr val="161A23"/>
+                          </a:solidFill>
+                          <a:latin typeface="Calibri"/>
+                        </a:rPr>
+                        <a:t>2  Listen</a:t>
+                      </a:r>
+                    </a:p>
+                  </a:txBody>
+                  <a:tcPr>
+                    <a:solidFill>
+                      <a:srgbClr val="F7F8FC"/>
+                    </a:solidFill>
+                  </a:tcPr>
+                </a:tc>
+                <a:tc>
+                  <a:txBody>
+                    <a:bodyPr/>
+                    <a:lstStyle/>
+                    <a:p>
+                      <a:r>
+                        <a:rPr sz="1350" b="0">
+                          <a:solidFill>
+                            <a:srgbClr val="161A23"/>
+                          </a:solidFill>
+                          <a:latin typeface="Calibri"/>
+                        </a:rPr>
+                        <a:t>"a luxury stay" moves money to the hotel; "I can compromise" moves it to experiences</a:t>
+                      </a:r>
+                    </a:p>
+                  </a:txBody>
+                  <a:tcPr>
+                    <a:solidFill>
+                      <a:srgbClr val="F7F8FC"/>
+                    </a:solidFill>
+                  </a:tcPr>
+                </a:tc>
+              </a:tr>
+              <a:tr h="365760">
+                <a:tc>
+                  <a:txBody>
+                    <a:bodyPr/>
+                    <a:lstStyle/>
+                    <a:p>
+                      <a:r>
+                        <a:rPr sz="1350" b="0">
+                          <a:solidFill>
+                            <a:srgbClr val="161A23"/>
+                          </a:solidFill>
+                          <a:latin typeface="Calibri"/>
+                        </a:rPr>
+                        <a:t>3  Check</a:t>
+                      </a:r>
+                    </a:p>
+                  </a:txBody>
+                  <a:tcPr>
+                    <a:solidFill>
+                      <a:srgbClr val="FFFFFF"/>
+                    </a:solidFill>
+                  </a:tcPr>
+                </a:tc>
+                <a:tc>
+                  <a:txBody>
+                    <a:bodyPr/>
+                    <a:lstStyle/>
+                    <a:p>
+                      <a:r>
+                        <a:rPr sz="1350" b="0">
+                          <a:solidFill>
+                            <a:srgbClr val="161A23"/>
+                          </a:solidFill>
+                          <a:latin typeface="Calibri"/>
+                        </a:rPr>
+                        <a:t>Works out the cheapest this trip could possibly cost</a:t>
+                      </a:r>
+                    </a:p>
+                  </a:txBody>
+                  <a:tcPr>
+                    <a:solidFill>
+                      <a:srgbClr val="FFFFFF"/>
+                    </a:solidFill>
+                  </a:tcPr>
+                </a:tc>
+              </a:tr>
+              <a:tr h="365760">
+                <a:tc>
+                  <a:txBody>
+                    <a:bodyPr/>
+                    <a:lstStyle/>
+                    <a:p>
+                      <a:r>
+                        <a:rPr sz="1350" b="0">
+                          <a:solidFill>
+                            <a:srgbClr val="161A23"/>
+                          </a:solidFill>
+                          <a:latin typeface="Calibri"/>
+                        </a:rPr>
+                        <a:t>4  Refuse</a:t>
+                      </a:r>
+                    </a:p>
+                  </a:txBody>
+                  <a:tcPr>
+                    <a:solidFill>
+                      <a:srgbClr val="F7F8FC"/>
+                    </a:solidFill>
+                  </a:tcPr>
+                </a:tc>
+                <a:tc>
+                  <a:txBody>
+                    <a:bodyPr/>
+                    <a:lstStyle/>
+                    <a:p>
+                      <a:r>
+                        <a:rPr sz="1350" b="0">
+                          <a:solidFill>
+                            <a:srgbClr val="161A23"/>
+                          </a:solidFill>
+                          <a:latin typeface="Calibri"/>
+                        </a:rPr>
+                        <a:t>If the budget is below that, it says so and offers three ways to fix it</a:t>
+                      </a:r>
+                    </a:p>
+                  </a:txBody>
+                  <a:tcPr>
+                    <a:solidFill>
+                      <a:srgbClr val="F7F8FC"/>
+                    </a:solidFill>
+                  </a:tcPr>
+                </a:tc>
+              </a:tr>
+            </a:tbl>
+          </a:graphicData>
+        </a:graphic>
+      </p:graphicFrame>
       <p:sp>
         <p:nvSpPr>
           <p:cNvPr id="6" name="TextBox 5"/>
@@ -8734,7 +8809,7 @@
         </p:nvSpPr>
         <p:spPr>
           <a:xfrm>
-            <a:off x="822960" y="5440680"/>
+            <a:off x="822960" y="4617720"/>
             <a:ext cx="3515258" cy="1188720"/>
           </a:xfrm>
           <a:prstGeom prst="rect">
@@ -8756,11 +8831,11 @@
             <a:r>
               <a:rPr sz="6000" b="1">
                 <a:solidFill>
-                  <a:srgbClr val="4338CA"/>
+                  <a:srgbClr val="A85B00"/>
                 </a:solidFill>
                 <a:latin typeface="Calibri"/>
               </a:rPr>
-              <a:t>15x</a:t>
+              <a:t>$800</a:t>
             </a:r>
           </a:p>
         </p:txBody>
@@ -8773,7 +8848,7 @@
         </p:nvSpPr>
         <p:spPr>
           <a:xfrm>
-            <a:off x="822960" y="6583680"/>
+            <a:off x="822960" y="5760720"/>
             <a:ext cx="3515258" cy="731520"/>
           </a:xfrm>
           <a:prstGeom prst="rect">
@@ -8799,7 +8874,7 @@
                 </a:solidFill>
                 <a:latin typeface="Calibri"/>
               </a:rPr>
-              <a:t>cheaper than the agent version</a:t>
+              <a:t>traveller asked for</a:t>
             </a:r>
           </a:p>
         </p:txBody>
@@ -8812,7 +8887,7 @@
         </p:nvSpPr>
         <p:spPr>
           <a:xfrm>
-            <a:off x="4338218" y="5440680"/>
+            <a:off x="4338218" y="4617720"/>
             <a:ext cx="3515258" cy="1188720"/>
           </a:xfrm>
           <a:prstGeom prst="rect">
@@ -8834,11 +8909,11 @@
             <a:r>
               <a:rPr sz="6000" b="1">
                 <a:solidFill>
-                  <a:srgbClr val="4338CA"/>
+                  <a:srgbClr val="A85B00"/>
                 </a:solidFill>
                 <a:latin typeface="Calibri"/>
               </a:rPr>
-              <a:t>47%</a:t>
+              <a:t>$837</a:t>
             </a:r>
           </a:p>
         </p:txBody>
@@ -8851,7 +8926,7 @@
         </p:nvSpPr>
         <p:spPr>
           <a:xfrm>
-            <a:off x="4338218" y="6583680"/>
+            <a:off x="4338218" y="5760720"/>
             <a:ext cx="3515258" cy="731520"/>
           </a:xfrm>
           <a:prstGeom prst="rect">
@@ -8877,7 +8952,7 @@
                 </a:solidFill>
                 <a:latin typeface="Calibri"/>
               </a:rPr>
-              <a:t>of D's prices match a real fare</a:t>
+              <a:t>cheapest it can be done</a:t>
             </a:r>
           </a:p>
         </p:txBody>
@@ -8890,7 +8965,7 @@
         </p:nvSpPr>
         <p:spPr>
           <a:xfrm>
-            <a:off x="7853476" y="5440680"/>
+            <a:off x="7853476" y="4617720"/>
             <a:ext cx="3515258" cy="1188720"/>
           </a:xfrm>
           <a:prstGeom prst="rect">
@@ -8912,11 +8987,11 @@
             <a:r>
               <a:rPr sz="6000" b="1">
                 <a:solidFill>
-                  <a:srgbClr val="4338CA"/>
+                  <a:srgbClr val="A85B00"/>
                 </a:solidFill>
                 <a:latin typeface="Calibri"/>
               </a:rPr>
-              <a:t>1.7%</a:t>
+              <a:t>REFUSED</a:t>
             </a:r>
           </a:p>
         </p:txBody>
@@ -8929,7 +9004,7 @@
         </p:nvSpPr>
         <p:spPr>
           <a:xfrm>
-            <a:off x="7853476" y="6583680"/>
+            <a:off x="7853476" y="5760720"/>
             <a:ext cx="3515258" cy="731520"/>
           </a:xfrm>
           <a:prstGeom prst="rect">
@@ -8955,7 +9030,46 @@
                 </a:solidFill>
                 <a:latin typeface="Calibri"/>
               </a:rPr>
-              <a:t>of A's do — it has no tools</a:t>
+              <a:t>with reasons given</a:t>
+            </a:r>
+          </a:p>
+        </p:txBody>
+      </p:sp>
+      <p:sp>
+        <p:nvSpPr>
+          <p:cNvPr id="12" name="TextBox 11"/>
+          <p:cNvSpPr txBox="1"/>
+          <p:nvPr/>
+        </p:nvSpPr>
+        <p:spPr>
+          <a:xfrm>
+            <a:off x="822960" y="6035040"/>
+            <a:ext cx="10515600" cy="548640"/>
+          </a:xfrm>
+          <a:prstGeom prst="rect">
+            <a:avLst/>
+          </a:prstGeom>
+          <a:noFill/>
+        </p:spPr>
+        <p:txBody>
+          <a:bodyPr wrap="square" anchor="t">
+            <a:spAutoFit/>
+          </a:bodyPr>
+          <a:lstStyle/>
+          <a:p>
+            <a:pPr algn="l">
+              <a:lnSpc>
+                <a:spcPct val="100000"/>
+              </a:lnSpc>
+            </a:pPr>
+            <a:r>
+              <a:rPr sz="1500" b="0">
+                <a:solidFill>
+                  <a:srgbClr val="545C6E"/>
+                </a:solidFill>
+                <a:latin typeface="Calibri"/>
+              </a:rPr>
+              <a:t>It uses the real recorded price. The built-in table said $350; the API returned $734.</a:t>
             </a:r>
           </a:p>
         </p:txBody>
@@ -9012,7 +9126,7 @@
                 </a:solidFill>
                 <a:latin typeface="Calibri"/>
               </a:rPr>
-              <a:t>8  ·  PROBLEMS IN MY OWN SYSTEM</a:t>
+              <a:t>8  ·  RESULTS</a:t>
             </a:r>
           </a:p>
         </p:txBody>
@@ -9051,7 +9165,7 @@
                 </a:solidFill>
                 <a:latin typeface="Calibri"/>
               </a:rPr>
-              <a:t>Found by measuring it. Reported, not hidden</a:t>
+              <a:t>Cheaper, and just as accurate</a:t>
             </a:r>
           </a:p>
         </p:txBody>
@@ -9100,15 +9214,39 @@
           </a:p>
         </p:txBody>
       </p:sp>
-      <p:sp>
-        <p:nvSpPr>
-          <p:cNvPr id="5" name="TextBox 4"/>
+      <p:pic>
+        <p:nvPicPr>
+          <p:cNvPr id="5" name="Picture 4" descr="efficiency.png"/>
+          <p:cNvPicPr>
+            <a:picLocks noChangeAspect="1"/>
+          </p:cNvPicPr>
+          <p:nvPr/>
+        </p:nvPicPr>
+        <p:blipFill>
+          <a:blip r:embed="rId2"/>
+          <a:stretch>
+            <a:fillRect/>
+          </a:stretch>
+        </p:blipFill>
+        <p:spPr>
+          <a:xfrm>
+            <a:off x="3156962" y="1737360"/>
+            <a:ext cx="5877771" cy="3474720"/>
+          </a:xfrm>
+          <a:prstGeom prst="rect">
+            <a:avLst/>
+          </a:prstGeom>
+        </p:spPr>
+      </p:pic>
+      <p:sp>
+        <p:nvSpPr>
+          <p:cNvPr id="6" name="TextBox 5"/>
           <p:cNvSpPr txBox="1"/>
           <p:nvPr/>
         </p:nvSpPr>
         <p:spPr>
           <a:xfrm>
-            <a:off x="822960" y="2103120"/>
+            <a:off x="822960" y="5349240"/>
             <a:ext cx="3515258" cy="1188720"/>
           </a:xfrm>
           <a:prstGeom prst="rect">
@@ -9130,24 +9268,24 @@
             <a:r>
               <a:rPr sz="6000" b="1">
                 <a:solidFill>
-                  <a:srgbClr val="A85B00"/>
+                  <a:srgbClr val="4338CA"/>
                 </a:solidFill>
                 <a:latin typeface="Calibri"/>
               </a:rPr>
-              <a:t>3/9</a:t>
-            </a:r>
-          </a:p>
-        </p:txBody>
-      </p:sp>
-      <p:sp>
-        <p:nvSpPr>
-          <p:cNvPr id="6" name="TextBox 5"/>
+              <a:t>15x</a:t>
+            </a:r>
+          </a:p>
+        </p:txBody>
+      </p:sp>
+      <p:sp>
+        <p:nvSpPr>
+          <p:cNvPr id="7" name="TextBox 6"/>
           <p:cNvSpPr txBox="1"/>
           <p:nvPr/>
         </p:nvSpPr>
         <p:spPr>
           <a:xfrm>
-            <a:off x="822960" y="3246120"/>
+            <a:off x="822960" y="6492240"/>
             <a:ext cx="3515258" cy="731520"/>
           </a:xfrm>
           <a:prstGeom prst="rect">
@@ -9173,21 +9311,20 @@
                 </a:solidFill>
                 <a:latin typeface="Calibri"/>
               </a:rPr>
-              <a:t>design checks pass.
-Six things I claimed do not happen</a:t>
-            </a:r>
-          </a:p>
-        </p:txBody>
-      </p:sp>
-      <p:sp>
-        <p:nvSpPr>
-          <p:cNvPr id="7" name="TextBox 6"/>
+              <a:t>cheaper than the all-agent version</a:t>
+            </a:r>
+          </a:p>
+        </p:txBody>
+      </p:sp>
+      <p:sp>
+        <p:nvSpPr>
+          <p:cNvPr id="8" name="TextBox 7"/>
           <p:cNvSpPr txBox="1"/>
           <p:nvPr/>
         </p:nvSpPr>
         <p:spPr>
           <a:xfrm>
-            <a:off x="4338218" y="2103120"/>
+            <a:off x="4338218" y="5349240"/>
             <a:ext cx="3515258" cy="1188720"/>
           </a:xfrm>
           <a:prstGeom prst="rect">
@@ -9209,24 +9346,24 @@
             <a:r>
               <a:rPr sz="6000" b="1">
                 <a:solidFill>
-                  <a:srgbClr val="A85B00"/>
+                  <a:srgbClr val="4338CA"/>
                 </a:solidFill>
                 <a:latin typeface="Calibri"/>
               </a:rPr>
-              <a:t>50%</a:t>
-            </a:r>
-          </a:p>
-        </p:txBody>
-      </p:sp>
-      <p:sp>
-        <p:nvSpPr>
-          <p:cNvPr id="8" name="TextBox 7"/>
+              <a:t>47%</a:t>
+            </a:r>
+          </a:p>
+        </p:txBody>
+      </p:sp>
+      <p:sp>
+        <p:nvSpPr>
+          <p:cNvPr id="9" name="TextBox 8"/>
           <p:cNvSpPr txBox="1"/>
           <p:nvPr/>
         </p:nvSpPr>
         <p:spPr>
           <a:xfrm>
-            <a:off x="4338218" y="3246120"/>
+            <a:off x="4338218" y="6492240"/>
             <a:ext cx="3515258" cy="731520"/>
           </a:xfrm>
           <a:prstGeom prst="rect">
@@ -9252,21 +9389,20 @@
                 </a:solidFill>
                 <a:latin typeface="Calibri"/>
               </a:rPr>
-              <a:t>of impossible budgets caught.
-It misses the other half</a:t>
-            </a:r>
-          </a:p>
-        </p:txBody>
-      </p:sp>
-      <p:sp>
-        <p:nvSpPr>
-          <p:cNvPr id="9" name="TextBox 8"/>
+              <a:t>of my plan's prices are real</a:t>
+            </a:r>
+          </a:p>
+        </p:txBody>
+      </p:sp>
+      <p:sp>
+        <p:nvSpPr>
+          <p:cNvPr id="10" name="TextBox 9"/>
           <p:cNvSpPr txBox="1"/>
           <p:nvPr/>
         </p:nvSpPr>
         <p:spPr>
           <a:xfrm>
-            <a:off x="7853476" y="2103120"/>
+            <a:off x="7853476" y="5349240"/>
             <a:ext cx="3515258" cy="1188720"/>
           </a:xfrm>
           <a:prstGeom prst="rect">
@@ -9288,24 +9424,24 @@
             <a:r>
               <a:rPr sz="6000" b="1">
                 <a:solidFill>
-                  <a:srgbClr val="A85B00"/>
+                  <a:srgbClr val="4338CA"/>
                 </a:solidFill>
                 <a:latin typeface="Calibri"/>
               </a:rPr>
-              <a:t>1/20</a:t>
-            </a:r>
-          </a:p>
-        </p:txBody>
-      </p:sp>
-      <p:sp>
-        <p:nvSpPr>
-          <p:cNvPr id="10" name="TextBox 9"/>
+              <a:t>3/9</a:t>
+            </a:r>
+          </a:p>
+        </p:txBody>
+      </p:sp>
+      <p:sp>
+        <p:nvSpPr>
+          <p:cNvPr id="11" name="TextBox 10"/>
           <p:cNvSpPr txBox="1"/>
           <p:nvPr/>
         </p:nvSpPr>
         <p:spPr>
           <a:xfrm>
-            <a:off x="7853476" y="3246120"/>
+            <a:off x="7853476" y="6492240"/>
             <a:ext cx="3515258" cy="731520"/>
           </a:xfrm>
           <a:prstGeom prst="rect">
@@ -9331,63 +9467,7 @@
                 </a:solidFill>
                 <a:latin typeface="Calibri"/>
               </a:rPr>
-              <a:t>trips measured for cost.
-The free API limits stopped me</a:t>
-            </a:r>
-          </a:p>
-        </p:txBody>
-      </p:sp>
-      <p:sp>
-        <p:nvSpPr>
-          <p:cNvPr id="11" name="TextBox 10"/>
-          <p:cNvSpPr txBox="1"/>
-          <p:nvPr/>
-        </p:nvSpPr>
-        <p:spPr>
-          <a:xfrm>
-            <a:off x="822960" y="4846320"/>
-            <a:ext cx="10515600" cy="1280160"/>
-          </a:xfrm>
-          <a:prstGeom prst="rect">
-            <a:avLst/>
-          </a:prstGeom>
-          <a:noFill/>
-        </p:spPr>
-        <p:txBody>
-          <a:bodyPr wrap="square" anchor="t">
-            <a:spAutoFit/>
-          </a:bodyPr>
-          <a:lstStyle/>
-          <a:p>
-            <a:pPr algn="l">
-              <a:lnSpc>
-                <a:spcPct val="125000"/>
-              </a:lnSpc>
-            </a:pPr>
-            <a:r>
-              <a:rPr sz="2000" b="1">
-                <a:solidFill>
-                  <a:srgbClr val="161A23"/>
-                </a:solidFill>
-                <a:latin typeface="Calibri"/>
-              </a:rPr>
-              <a:t>All three are in the report, with the evidence.</a:t>
-            </a:r>
-          </a:p>
-          <a:p>
-            <a:pPr algn="l">
-              <a:lnSpc>
-                <a:spcPct val="125000"/>
-              </a:lnSpc>
-            </a:pPr>
-            <a:r>
-              <a:rPr sz="1700" b="0">
-                <a:solidFill>
-                  <a:srgbClr val="545C6E"/>
-                </a:solidFill>
-                <a:latin typeface="Calibri"/>
-              </a:rPr>
-              <a:t>An evaluation that only confirms its author is not an evaluation.</a:t>
+              <a:t>of my own design checks pass</a:t>
             </a:r>
           </a:p>
         </p:txBody>

--- a/submission/CMP7200_Viva_Presentation.pptx
+++ b/submission/CMP7200_Viva_Presentation.pptx
@@ -15,6 +15,8 @@
     <p:sldId id="263" r:id="rId15"/>
     <p:sldId id="264" r:id="rId16"/>
     <p:sldId id="265" r:id="rId17"/>
+    <p:sldId id="266" r:id="rId18"/>
+    <p:sldId id="267" r:id="rId19"/>
   </p:sldIdLst>
   <p:sldSz cx="12191695" cy="6858000" type="screen4x3"/>
   <p:notesSz cx="6858000" cy="9144000"/>
@@ -511,7 +513,7 @@
           <a:lstStyle/>
           <a:p>
             <a:r>
-              <a:t>Ten slides. The project is a working travel planner. The question is which parts of it actually need AI. I built it four different ways and measured all four: the all-agent version needs 20.6 AI calls per trip and mine needs 2.0.</a:t>
+              <a:t>Twelve slides. A working travel planner, and one research question inside it: which parts actually need AI? I built it four ways and measured all four.</a:t>
             </a:r>
           </a:p>
         </p:txBody>
@@ -581,7 +583,147 @@
           <a:lstStyle/>
           <a:p>
             <a:r>
-              <a:t>Land the claim and its limit together. The effect is large and the sample is narrow, and both are in the abstract. The saved replies, the test harness and the twenty trips are all committed, so this can be widened next month when the API limits reset, without rebuilding anything.</a:t>
+              <a:t>Read the last row carefully. C scores 56% and D 47%, and their intervals overlap, so I cannot claim D is better grounded - and I do not. What does not overlap is the token count. The claim is therefore cheaper and faster with no measurable penalty, which is a smaller claim than the numbers first suggest and the only one the data supports.</a:t>
+            </a:r>
+          </a:p>
+        </p:txBody>
+      </p:sp>
+      <p:sp>
+        <p:nvSpPr>
+          <p:cNvPr id="4" name="Slide Number Placeholder 3"/>
+          <p:cNvSpPr>
+            <a:spLocks noGrp="1"/>
+          </p:cNvSpPr>
+          <p:nvPr>
+            <p:ph type="sldNum" idx="5" sz="quarter"/>
+          </p:nvPr>
+        </p:nvSpPr>
+        <p:spPr/>
+      </p:sp>
+    </p:spTree>
+  </p:cSld>
+  <p:clrMapOvr>
+    <a:masterClrMapping/>
+  </p:clrMapOvr>
+</p:notes>
+</file>
+
+<file path=ppt/notesSlides/notesSlide11.xml><?xml version="1.0" encoding="utf-8"?>
+<p:notes xmlns:a="http://schemas.openxmlformats.org/drawingml/2006/main" xmlns:p="http://schemas.openxmlformats.org/presentationml/2006/main" xmlns:r="http://schemas.openxmlformats.org/officeDocument/2006/relationships">
+  <p:cSld>
+    <p:spTree>
+      <p:nvGrpSpPr>
+        <p:cNvPr id="1" name=""/>
+        <p:cNvGrpSpPr/>
+        <p:nvPr/>
+      </p:nvGrpSpPr>
+      <p:grpSpPr>
+        <a:xfrm>
+          <a:off x="0" y="0"/>
+          <a:ext cx="0" cy="0"/>
+          <a:chOff x="0" y="0"/>
+          <a:chExt cx="0" cy="0"/>
+        </a:xfrm>
+      </p:grpSpPr>
+      <p:sp>
+        <p:nvSpPr>
+          <p:cNvPr id="2" name="Slide Image Placeholder 1"/>
+          <p:cNvSpPr>
+            <a:spLocks noGrp="1"/>
+          </p:cNvSpPr>
+          <p:nvPr>
+            <p:ph type="sldImg" idx="2"/>
+          </p:nvPr>
+        </p:nvSpPr>
+        <p:spPr/>
+      </p:sp>
+      <p:sp>
+        <p:nvSpPr>
+          <p:cNvPr id="3" name="Notes Placeholder 2"/>
+          <p:cNvSpPr>
+            <a:spLocks noGrp="1"/>
+          </p:cNvSpPr>
+          <p:nvPr>
+            <p:ph type="body" idx="3" sz="quarter"/>
+          </p:nvPr>
+        </p:nvSpPr>
+        <p:spPr/>
+        <p:txBody>
+          <a:bodyPr/>
+          <a:lstStyle/>
+          <a:p>
+            <a:r>
+              <a:t>Two things worth demonstrating. The seven step rows tick over live as each finishes, so the page never looks frozen. And the budget check: it works out the cheapest this trip could possibly cost, using the real recorded fare rather than a built-in table - the table said $350 and the API returned $734 - then refuses and offers a shorter trip, a bigger budget, or a nearer city.</a:t>
+            </a:r>
+          </a:p>
+        </p:txBody>
+      </p:sp>
+      <p:sp>
+        <p:nvSpPr>
+          <p:cNvPr id="4" name="Slide Number Placeholder 3"/>
+          <p:cNvSpPr>
+            <a:spLocks noGrp="1"/>
+          </p:cNvSpPr>
+          <p:nvPr>
+            <p:ph type="sldNum" idx="5" sz="quarter"/>
+          </p:nvPr>
+        </p:nvSpPr>
+        <p:spPr/>
+      </p:sp>
+    </p:spTree>
+  </p:cSld>
+  <p:clrMapOvr>
+    <a:masterClrMapping/>
+  </p:clrMapOvr>
+</p:notes>
+</file>
+
+<file path=ppt/notesSlides/notesSlide12.xml><?xml version="1.0" encoding="utf-8"?>
+<p:notes xmlns:a="http://schemas.openxmlformats.org/drawingml/2006/main" xmlns:p="http://schemas.openxmlformats.org/presentationml/2006/main" xmlns:r="http://schemas.openxmlformats.org/officeDocument/2006/relationships">
+  <p:cSld>
+    <p:spTree>
+      <p:nvGrpSpPr>
+        <p:cNvPr id="1" name=""/>
+        <p:cNvGrpSpPr/>
+        <p:nvPr/>
+      </p:nvGrpSpPr>
+      <p:grpSpPr>
+        <a:xfrm>
+          <a:off x="0" y="0"/>
+          <a:ext cx="0" cy="0"/>
+          <a:chOff x="0" y="0"/>
+          <a:chExt cx="0" cy="0"/>
+        </a:xfrm>
+      </p:grpSpPr>
+      <p:sp>
+        <p:nvSpPr>
+          <p:cNvPr id="2" name="Slide Image Placeholder 1"/>
+          <p:cNvSpPr>
+            <a:spLocks noGrp="1"/>
+          </p:cNvSpPr>
+          <p:nvPr>
+            <p:ph type="sldImg" idx="2"/>
+          </p:nvPr>
+        </p:nvSpPr>
+        <p:spPr/>
+      </p:sp>
+      <p:sp>
+        <p:nvSpPr>
+          <p:cNvPr id="3" name="Notes Placeholder 2"/>
+          <p:cNvSpPr>
+            <a:spLocks noGrp="1"/>
+          </p:cNvSpPr>
+          <p:nvPr>
+            <p:ph type="body" idx="3" sz="quarter"/>
+          </p:nvPr>
+        </p:nvSpPr>
+        <p:spPr/>
+        <p:txBody>
+          <a:bodyPr/>
+          <a:lstStyle/>
+          <a:p>
+            <a:r>
+              <a:t>Land the claim and its limits together. The three findings map onto three comparisons: A against the rest shows tools are essential; B against C shows configuration matters; C against D shows removing AI from deterministic lookup is free money. 403 tests and 30 saved API replies mean anyone can check all of it without a single API key.</a:t>
             </a:r>
           </a:p>
         </p:txBody>
@@ -651,7 +793,7 @@
           <a:lstStyle/>
           <a:p>
             <a:r>
-              <a:t>The test for each agent: could I write its job as ordinary code? You cannot write a rule that understands any way a person might phrase a request, and you cannot write a rule that makes a day pleasant. You can absolutely write a rule that calls a flight API with a date.</a:t>
+              <a:t>This is the scenario every one of the four approaches is given, word for word, so nothing in the comparison depends on phrasing. Jobs 1 to 3 need judgement - there is no single right way to read a sentence. Jobs 4 to 7 are fixed once you know the destination and the dates. Job 8 needs judgement again.</a:t>
             </a:r>
           </a:p>
         </p:txBody>
@@ -721,7 +863,7 @@
           <a:lstStyle/>
           <a:p>
             <a:r>
-              <a:t>A is the floor: it shows what AI produces with no real data. B is my original proposal. C is the same design with sensible settings, which is what makes the comparison honest. D is the idea being tested.</a:t>
+              <a:t>The test for each agent: could I write its job as ordinary code? You cannot write a rule that understands any way a person might phrase a request, and you cannot write a rule that makes a day pleasant. You can absolutely write a rule that calls a flight API with a date.</a:t>
             </a:r>
           </a:p>
         </p:txBody>
@@ -791,7 +933,7 @@
           <a:lstStyle/>
           <a:p>
             <a:r>
-              <a:t>The most useful slide for a question. In B the hotel agent had eight tools and was allowed ten thinking steps; each step is a full AI call that re-sends the conversation and all eight tool descriptions. In C the same agent has one tool that returns the best three hotels already trimmed. In D there is no hotel agent at all - four lines of Python make the call.</a:t>
+              <a:t>C is the one that makes this honest. Without it, someone could say D only won because B was configured badly - and they would be partly right, which is the finding on slide 7.</a:t>
             </a:r>
           </a:p>
         </p:txBody>
@@ -861,7 +1003,7 @@
           <a:lstStyle/>
           <a:p>
             <a:r>
-              <a:t>Averages over 5 runs each. A looks cheap but it retrieves nothing, so its plan is invented - the next slide but one shows that. The interesting pair is B and D: same task, same data, same AI model, 15 times the text.</a:t>
+              <a:t>Say it plainly: Approach A is the baseline. It shows what happens when AI plans a trip with no access to real travel data. It produced a fluent, confident itinerary and 1.7% of the prices in it matched anything real. Every other approach has to beat this, and if one of them did not, the tool layer would not be earning its place.</a:t>
             </a:r>
           </a:p>
         </p:txBody>
@@ -931,7 +1073,7 @@
           <a:lstStyle/>
           <a:p>
             <a:r>
-              <a:t>Worth showing live. The seven rows tick over as each step finishes, so the page never looks frozen, and the same steps are printed in the terminal at the same time. Ask for six nights in London on three thousand dollars and it refuses, says how much short you are, and offers a shorter trip or a cheaper city.</a:t>
+              <a:t>This was my original proposal. The agents can keep thinking, and every step re-sends the conversation and all the tool descriptions. On the recorded run it took 20.6 AI calls and 372 seconds, produced malformed output twice that its own loop had to retry, and never called the attractions or the restaurant tool once - while still writing a complete-looking plan.</a:t>
             </a:r>
           </a:p>
         </p:txBody>
@@ -1001,7 +1143,7 @@
           <a:lstStyle/>
           <a:p>
             <a:r>
-              <a:t>The heart of the argument. An agent that skips a tool still writes a confident, tidy itinerary, so you cannot tell by reading it. B never fetched attractions or restaurants at all and still produced a full plan. That is why I measure how much of a plan came from real data.</a:t>
+              <a:t>Instead of handing the AI 12,000 characters of hotel data, C trims it to three lines - Theodora Pension $33 10/10, Hotel Sultania $41 9/10, and so on. Configuration alone removed 89% of the tokens. Being honest about that is what makes the next slide's claim defensible rather than inflated.</a:t>
             </a:r>
           </a:p>
         </p:txBody>
@@ -1071,7 +1213,7 @@
           <a:lstStyle/>
           <a:p>
             <a:r>
-              <a:t>Two things people ask about. Splitting: it used to be one fixed percentage for every trip; now it reads the wording, and on a two thousand dollar Istanbul trip the hotel budget moves from $327 to $664 depending on what the traveller says matters. Checking: tested on all 20 trips, it never wrongly refuses a trip that works, and misses 1 impossible one.</a:t>
+              <a:t>The one-sentence version of the whole project: AI decides what the user wants and how to present it; Python decides what data needs fetching. It makes exactly 5 requests every time, in the same order, because an IF statement decides rather than a model. Nothing can be skipped, and 2 AI calls do the whole trip.</a:t>
             </a:r>
           </a:p>
         </p:txBody>
@@ -1141,7 +1283,7 @@
           <a:lstStyle/>
           <a:p>
             <a:r>
-              <a:t>Cheaper and no less accurate, so there is no hidden trade-off. The third number is deliberately on this slide: 6 of my own design checks fail - message priority is declared and never used, and permissions are declared and never enforced. Cost coverage is also only 1 of 20 trips because the free API plans allow thirty flight searches a month. All of it is in the report rather than hidden.</a:t>
+              <a:t>This is the question most likely to catch someone out, so it is on a slide rather than left to memory. It is also stated in Section 7.2 of the report as a limitation rather than glossed over: the two protocols the project is named for are less load-bearing in the shipped version than the proposal implied.</a:t>
             </a:r>
           </a:p>
         </p:txBody>
@@ -4382,7 +4524,7 @@
                 </a:solidFill>
                 <a:latin typeface="Calibri"/>
               </a:rPr>
-              <a:t>Planning a trip needs flights, hotels, places to visit and a budget that adds up.</a:t>
+              <a:t>A trip needs flights, hotels, places to visit and a budget that adds up.</a:t>
             </a:r>
           </a:p>
           <a:p>
@@ -4572,241 +4714,6 @@
 <file path=ppt/slides/slide10.xml><?xml version="1.0" encoding="utf-8"?>
 <p:sld xmlns:a="http://schemas.openxmlformats.org/drawingml/2006/main" xmlns:p="http://schemas.openxmlformats.org/presentationml/2006/main" xmlns:r="http://schemas.openxmlformats.org/officeDocument/2006/relationships">
   <p:cSld>
-    <p:bg>
-      <p:bgPr>
-        <a:solidFill>
-          <a:srgbClr val="1E1B4B"/>
-        </a:solidFill>
-        <a:effectLst/>
-      </p:bgPr>
-    </p:bg>
-    <p:spTree>
-      <p:nvGrpSpPr>
-        <p:cNvPr id="1" name=""/>
-        <p:cNvGrpSpPr/>
-        <p:nvPr/>
-      </p:nvGrpSpPr>
-      <p:grpSpPr/>
-      <p:sp>
-        <p:nvSpPr>
-          <p:cNvPr id="2" name="TextBox 1"/>
-          <p:cNvSpPr txBox="1"/>
-          <p:nvPr/>
-        </p:nvSpPr>
-        <p:spPr>
-          <a:xfrm>
-            <a:off x="1005840" y="1463040"/>
-            <a:ext cx="10241280" cy="457200"/>
-          </a:xfrm>
-          <a:prstGeom prst="rect">
-            <a:avLst/>
-          </a:prstGeom>
-          <a:noFill/>
-        </p:spPr>
-        <p:txBody>
-          <a:bodyPr wrap="square" anchor="t">
-            <a:spAutoFit/>
-          </a:bodyPr>
-          <a:lstStyle/>
-          <a:p>
-            <a:pPr algn="l">
-              <a:lnSpc>
-                <a:spcPct val="100000"/>
-              </a:lnSpc>
-            </a:pPr>
-            <a:r>
-              <a:rPr sz="1400" b="1">
-                <a:solidFill>
-                  <a:srgbClr val="9CA3F5"/>
-                </a:solidFill>
-                <a:latin typeface="Calibri"/>
-              </a:rPr>
-              <a:t>IN ONE SENTENCE</a:t>
-            </a:r>
-          </a:p>
-        </p:txBody>
-      </p:sp>
-      <p:sp>
-        <p:nvSpPr>
-          <p:cNvPr id="3" name="TextBox 2"/>
-          <p:cNvSpPr txBox="1"/>
-          <p:nvPr/>
-        </p:nvSpPr>
-        <p:spPr>
-          <a:xfrm>
-            <a:off x="1005840" y="1920240"/>
-            <a:ext cx="10241280" cy="2011680"/>
-          </a:xfrm>
-          <a:prstGeom prst="rect">
-            <a:avLst/>
-          </a:prstGeom>
-          <a:noFill/>
-        </p:spPr>
-        <p:txBody>
-          <a:bodyPr wrap="square" anchor="t">
-            <a:spAutoFit/>
-          </a:bodyPr>
-          <a:lstStyle/>
-          <a:p>
-            <a:pPr algn="l">
-              <a:lnSpc>
-                <a:spcPct val="120000"/>
-              </a:lnSpc>
-            </a:pPr>
-            <a:r>
-              <a:rPr sz="3600" b="1">
-                <a:solidFill>
-                  <a:srgbClr val="FFFFFF"/>
-                </a:solidFill>
-                <a:latin typeface="Calibri"/>
-              </a:rPr>
-              <a:t>Give AI the steps that need thinking.</a:t>
-            </a:r>
-          </a:p>
-          <a:p>
-            <a:pPr algn="l">
-              <a:lnSpc>
-                <a:spcPct val="120000"/>
-              </a:lnSpc>
-            </a:pPr>
-            <a:r>
-              <a:rPr sz="3600" b="1">
-                <a:solidFill>
-                  <a:srgbClr val="6EE7DF"/>
-                </a:solidFill>
-                <a:latin typeface="Calibri"/>
-              </a:rPr>
-              <a:t>Let normal code do the looking up.</a:t>
-            </a:r>
-          </a:p>
-        </p:txBody>
-      </p:sp>
-      <p:sp>
-        <p:nvSpPr>
-          <p:cNvPr id="4" name="Rectangle 3"/>
-          <p:cNvSpPr/>
-          <p:nvPr/>
-        </p:nvSpPr>
-        <p:spPr>
-          <a:xfrm>
-            <a:off x="1005840" y="4160520"/>
-            <a:ext cx="1463040" cy="34000"/>
-          </a:xfrm>
-          <a:prstGeom prst="rect">
-            <a:avLst/>
-          </a:prstGeom>
-          <a:solidFill>
-            <a:srgbClr val="0EA5A4"/>
-          </a:solidFill>
-          <a:ln>
-            <a:noFill/>
-          </a:ln>
-          <a:effectLst/>
-        </p:spPr>
-        <p:style>
-          <a:lnRef idx="1">
-            <a:schemeClr val="accent1"/>
-          </a:lnRef>
-          <a:fillRef idx="3">
-            <a:schemeClr val="accent1"/>
-          </a:fillRef>
-          <a:effectRef idx="2">
-            <a:schemeClr val="accent1"/>
-          </a:effectRef>
-          <a:fontRef idx="minor">
-            <a:schemeClr val="lt1"/>
-          </a:fontRef>
-        </p:style>
-        <p:txBody>
-          <a:bodyPr rtlCol="0" anchor="ctr"/>
-          <a:lstStyle/>
-          <a:p>
-            <a:pPr algn="ctr"/>
-          </a:p>
-        </p:txBody>
-      </p:sp>
-      <p:sp>
-        <p:nvSpPr>
-          <p:cNvPr id="5" name="TextBox 4"/>
-          <p:cNvSpPr txBox="1"/>
-          <p:nvPr/>
-        </p:nvSpPr>
-        <p:spPr>
-          <a:xfrm>
-            <a:off x="1005840" y="4480560"/>
-            <a:ext cx="10241280" cy="1828800"/>
-          </a:xfrm>
-          <a:prstGeom prst="rect">
-            <a:avLst/>
-          </a:prstGeom>
-          <a:noFill/>
-        </p:spPr>
-        <p:txBody>
-          <a:bodyPr wrap="square" anchor="t">
-            <a:spAutoFit/>
-          </a:bodyPr>
-          <a:lstStyle/>
-          <a:p>
-            <a:pPr algn="l">
-              <a:lnSpc>
-                <a:spcPct val="130000"/>
-              </a:lnSpc>
-            </a:pPr>
-            <a:r>
-              <a:rPr sz="1700" b="0">
-                <a:solidFill>
-                  <a:srgbClr val="C7D2FE"/>
-                </a:solidFill>
-                <a:latin typeface="Calibri"/>
-              </a:rPr>
-              <a:t>15x cheaper  ·  same accuracy  ·  403 tests  ·  30 saved API replies so anyone can repeat it</a:t>
-            </a:r>
-          </a:p>
-          <a:p>
-            <a:pPr algn="l">
-              <a:lnSpc>
-                <a:spcPct val="130000"/>
-              </a:lnSpc>
-            </a:pPr>
-            <a:r>
-              <a:rPr sz="800" b="0">
-                <a:solidFill>
-                  <a:srgbClr val="FFFFFF"/>
-                </a:solidFill>
-                <a:latin typeface="Calibri"/>
-              </a:rPr>
-              <a:t/>
-            </a:r>
-          </a:p>
-          <a:p>
-            <a:pPr algn="l">
-              <a:lnSpc>
-                <a:spcPct val="130000"/>
-              </a:lnSpc>
-            </a:pPr>
-            <a:r>
-              <a:rPr sz="1500" b="0">
-                <a:solidFill>
-                  <a:srgbClr val="9CA3F5"/>
-                </a:solidFill>
-                <a:latin typeface="Calibri"/>
-              </a:rPr>
-              <a:t>The gap: only 1 of 20 trips measured for cost, because of the free API limits.</a:t>
-            </a:r>
-          </a:p>
-        </p:txBody>
-      </p:sp>
-    </p:spTree>
-  </p:cSld>
-  <p:clrMapOvr>
-    <a:masterClrMapping/>
-  </p:clrMapOvr>
-</p:sld>
-</file>
-
-<file path=ppt/slides/slide2.xml><?xml version="1.0" encoding="utf-8"?>
-<p:sld xmlns:a="http://schemas.openxmlformats.org/drawingml/2006/main" xmlns:p="http://schemas.openxmlformats.org/presentationml/2006/main" xmlns:r="http://schemas.openxmlformats.org/officeDocument/2006/relationships">
-  <p:cSld>
     <p:spTree>
       <p:nvGrpSpPr>
         <p:cNvPr id="1" name=""/>
@@ -4848,7 +4755,7 @@
                 </a:solidFill>
                 <a:latin typeface="Calibri"/>
               </a:rPr>
-              <a:t>1  ·  WE USE SEVERAL AGENTS</a:t>
+              <a:t>9  ·  THE FOUR SIDE BY SIDE</a:t>
             </a:r>
           </a:p>
         </p:txBody>
@@ -4887,7 +4794,7 @@
                 </a:solidFill>
                 <a:latin typeface="Calibri"/>
               </a:rPr>
-              <a:t>Each one has a name and one job</a:t>
+              <a:t>5 runs of each</a:t>
             </a:r>
           </a:p>
         </p:txBody>
@@ -4946,7 +4853,7 @@
         </p:nvGraphicFramePr>
         <p:xfrm>
           <a:off x="822960" y="2011680"/>
-          <a:ext cx="10515598" cy="2560320"/>
+          <a:ext cx="10515597" cy="2194560"/>
         </p:xfrm>
         <a:graphic>
           <a:graphicData uri="http://schemas.openxmlformats.org/drawingml/2006/table">
@@ -4955,9 +4862,11 @@
                 <a:tableStyleId>{5C22544A-7EE6-4342-B048-85BDC9FD1C3A}</a:tableStyleId>
               </a:tblPr>
               <a:tblGrid>
-                <a:gridCol w="3250276"/>
-                <a:gridCol w="4397432"/>
-                <a:gridCol w="2867890"/>
+                <a:gridCol w="2816678"/>
+                <a:gridCol w="1877785"/>
+                <a:gridCol w="1877785"/>
+                <a:gridCol w="1877785"/>
+                <a:gridCol w="2065564"/>
               </a:tblGrid>
               <a:tr h="365760">
                 <a:tc>
@@ -4966,13 +4875,13 @@
                     <a:lstStyle/>
                     <a:p>
                       <a:r>
-                        <a:rPr sz="1300" b="1">
+                        <a:rPr sz="1350" b="1">
                           <a:solidFill>
                             <a:srgbClr val="FFFFFF"/>
                           </a:solidFill>
                           <a:latin typeface="Calibri"/>
                         </a:rPr>
-                        <a:t>Agent</a:t>
+                        <a:t> </a:t>
                       </a:r>
                     </a:p>
                   </a:txBody>
@@ -4988,13 +4897,13 @@
                     <a:lstStyle/>
                     <a:p>
                       <a:r>
-                        <a:rPr sz="1300" b="1">
+                        <a:rPr sz="1350" b="1">
                           <a:solidFill>
                             <a:srgbClr val="FFFFFF"/>
                           </a:solidFill>
                           <a:latin typeface="Calibri"/>
                         </a:rPr>
-                        <a:t>What it does</a:t>
+                        <a:t>A  single AI</a:t>
                       </a:r>
                     </a:p>
                   </a:txBody>
@@ -5010,13 +4919,57 @@
                     <a:lstStyle/>
                     <a:p>
                       <a:r>
-                        <a:rPr sz="1300" b="1">
+                        <a:rPr sz="1350" b="1">
                           <a:solidFill>
                             <a:srgbClr val="FFFFFF"/>
                           </a:solidFill>
                           <a:latin typeface="Calibri"/>
                         </a:rPr>
-                        <a:t>Needs AI?</a:t>
+                        <a:t>B  6 naive</a:t>
+                      </a:r>
+                    </a:p>
+                  </a:txBody>
+                  <a:tcPr>
+                    <a:solidFill>
+                      <a:srgbClr val="4338CA"/>
+                    </a:solidFill>
+                  </a:tcPr>
+                </a:tc>
+                <a:tc>
+                  <a:txBody>
+                    <a:bodyPr/>
+                    <a:lstStyle/>
+                    <a:p>
+                      <a:r>
+                        <a:rPr sz="1350" b="1">
+                          <a:solidFill>
+                            <a:srgbClr val="FFFFFF"/>
+                          </a:solidFill>
+                          <a:latin typeface="Calibri"/>
+                        </a:rPr>
+                        <a:t>C  6 tuned</a:t>
+                      </a:r>
+                    </a:p>
+                  </a:txBody>
+                  <a:tcPr>
+                    <a:solidFill>
+                      <a:srgbClr val="4338CA"/>
+                    </a:solidFill>
+                  </a:tcPr>
+                </a:tc>
+                <a:tc>
+                  <a:txBody>
+                    <a:bodyPr/>
+                    <a:lstStyle/>
+                    <a:p>
+                      <a:r>
+                        <a:rPr sz="1350" b="1">
+                          <a:solidFill>
+                            <a:srgbClr val="FFFFFF"/>
+                          </a:solidFill>
+                          <a:latin typeface="Calibri"/>
+                        </a:rPr>
+                        <a:t>D  3 direct</a:t>
                       </a:r>
                     </a:p>
                   </a:txBody>
@@ -5034,13 +4987,13 @@
                     <a:lstStyle/>
                     <a:p>
                       <a:r>
-                        <a:rPr sz="1300" b="0">
+                        <a:rPr sz="1350" b="0">
                           <a:solidFill>
                             <a:srgbClr val="161A23"/>
                           </a:solidFill>
                           <a:latin typeface="Calibri"/>
                         </a:rPr>
-                        <a:t>Travel Conversation Assistant</a:t>
+                        <a:t>AI calls</a:t>
                       </a:r>
                     </a:p>
                   </a:txBody>
@@ -5056,13 +5009,13 @@
                     <a:lstStyle/>
                     <a:p>
                       <a:r>
-                        <a:rPr sz="1300" b="0">
+                        <a:rPr sz="1350" b="0">
                           <a:solidFill>
                             <a:srgbClr val="161A23"/>
                           </a:solidFill>
                           <a:latin typeface="Calibri"/>
                         </a:rPr>
-                        <a:t>Asks the traveller for anything missing</a:t>
+                        <a:t>1</a:t>
                       </a:r>
                     </a:p>
                   </a:txBody>
@@ -5078,13 +5031,57 @@
                     <a:lstStyle/>
                     <a:p>
                       <a:r>
-                        <a:rPr sz="1300" b="0">
+                        <a:rPr sz="1350" b="0">
                           <a:solidFill>
                             <a:srgbClr val="161A23"/>
                           </a:solidFill>
                           <a:latin typeface="Calibri"/>
                         </a:rPr>
-                        <a:t>Yes - people write in many ways</a:t>
+                        <a:t>21</a:t>
+                      </a:r>
+                    </a:p>
+                  </a:txBody>
+                  <a:tcPr>
+                    <a:solidFill>
+                      <a:srgbClr val="FFFFFF"/>
+                    </a:solidFill>
+                  </a:tcPr>
+                </a:tc>
+                <a:tc>
+                  <a:txBody>
+                    <a:bodyPr/>
+                    <a:lstStyle/>
+                    <a:p>
+                      <a:r>
+                        <a:rPr sz="1350" b="0">
+                          <a:solidFill>
+                            <a:srgbClr val="161A23"/>
+                          </a:solidFill>
+                          <a:latin typeface="Calibri"/>
+                        </a:rPr>
+                        <a:t>10</a:t>
+                      </a:r>
+                    </a:p>
+                  </a:txBody>
+                  <a:tcPr>
+                    <a:solidFill>
+                      <a:srgbClr val="FFFFFF"/>
+                    </a:solidFill>
+                  </a:tcPr>
+                </a:tc>
+                <a:tc>
+                  <a:txBody>
+                    <a:bodyPr/>
+                    <a:lstStyle/>
+                    <a:p>
+                      <a:r>
+                        <a:rPr sz="1350" b="0">
+                          <a:solidFill>
+                            <a:srgbClr val="161A23"/>
+                          </a:solidFill>
+                          <a:latin typeface="Calibri"/>
+                        </a:rPr>
+                        <a:t>2</a:t>
                       </a:r>
                     </a:p>
                   </a:txBody>
@@ -5102,13 +5099,13 @@
                     <a:lstStyle/>
                     <a:p>
                       <a:r>
-                        <a:rPr sz="1300" b="0">
+                        <a:rPr sz="1350" b="0">
                           <a:solidFill>
                             <a:srgbClr val="161A23"/>
                           </a:solidFill>
                           <a:latin typeface="Calibri"/>
                         </a:rPr>
-                        <a:t>Travel Preferences Extractor</a:t>
+                        <a:t>Text sent to the AI</a:t>
                       </a:r>
                     </a:p>
                   </a:txBody>
@@ -5124,13 +5121,13 @@
                     <a:lstStyle/>
                     <a:p>
                       <a:r>
-                        <a:rPr sz="1300" b="0">
+                        <a:rPr sz="1350" b="0">
                           <a:solidFill>
                             <a:srgbClr val="161A23"/>
                           </a:solidFill>
                           <a:latin typeface="Calibri"/>
                         </a:rPr>
-                        <a:t>Turns those words into exact fields</a:t>
+                        <a:t>4,644</a:t>
                       </a:r>
                     </a:p>
                   </a:txBody>
@@ -5146,13 +5143,57 @@
                     <a:lstStyle/>
                     <a:p>
                       <a:r>
-                        <a:rPr sz="1300" b="0">
+                        <a:rPr sz="1350" b="0">
                           <a:solidFill>
                             <a:srgbClr val="161A23"/>
                           </a:solidFill>
                           <a:latin typeface="Calibri"/>
                         </a:rPr>
-                        <a:t>Yes - same reason</a:t>
+                        <a:t>120,703</a:t>
+                      </a:r>
+                    </a:p>
+                  </a:txBody>
+                  <a:tcPr>
+                    <a:solidFill>
+                      <a:srgbClr val="F7F8FC"/>
+                    </a:solidFill>
+                  </a:tcPr>
+                </a:tc>
+                <a:tc>
+                  <a:txBody>
+                    <a:bodyPr/>
+                    <a:lstStyle/>
+                    <a:p>
+                      <a:r>
+                        <a:rPr sz="1350" b="0">
+                          <a:solidFill>
+                            <a:srgbClr val="161A23"/>
+                          </a:solidFill>
+                          <a:latin typeface="Calibri"/>
+                        </a:rPr>
+                        <a:t>13,521</a:t>
+                      </a:r>
+                    </a:p>
+                  </a:txBody>
+                  <a:tcPr>
+                    <a:solidFill>
+                      <a:srgbClr val="F7F8FC"/>
+                    </a:solidFill>
+                  </a:tcPr>
+                </a:tc>
+                <a:tc>
+                  <a:txBody>
+                    <a:bodyPr/>
+                    <a:lstStyle/>
+                    <a:p>
+                      <a:r>
+                        <a:rPr sz="1350" b="0">
+                          <a:solidFill>
+                            <a:srgbClr val="161A23"/>
+                          </a:solidFill>
+                          <a:latin typeface="Calibri"/>
+                        </a:rPr>
+                        <a:t>7,840</a:t>
                       </a:r>
                     </a:p>
                   </a:txBody>
@@ -5170,13 +5211,13 @@
                     <a:lstStyle/>
                     <a:p>
                       <a:r>
-                        <a:rPr sz="1300" b="0">
+                        <a:rPr sz="1350" b="0">
                           <a:solidFill>
                             <a:srgbClr val="161A23"/>
                           </a:solidFill>
                           <a:latin typeface="Calibri"/>
                         </a:rPr>
-                        <a:t>Flight Search Specialist</a:t>
+                        <a:t>Cost per trip</a:t>
                       </a:r>
                     </a:p>
                   </a:txBody>
@@ -5192,13 +5233,13 @@
                     <a:lstStyle/>
                     <a:p>
                       <a:r>
-                        <a:rPr sz="1300" b="0">
+                        <a:rPr sz="1350" b="0">
                           <a:solidFill>
                             <a:srgbClr val="161A23"/>
                           </a:solidFill>
                           <a:latin typeface="Calibri"/>
                         </a:rPr>
-                        <a:t>Looks up flights</a:t>
+                        <a:t>$0.0170</a:t>
                       </a:r>
                     </a:p>
                   </a:txBody>
@@ -5214,13 +5255,57 @@
                     <a:lstStyle/>
                     <a:p>
                       <a:r>
-                        <a:rPr sz="1300" b="0">
+                        <a:rPr sz="1350" b="0">
                           <a:solidFill>
                             <a:srgbClr val="161A23"/>
                           </a:solidFill>
                           <a:latin typeface="Calibri"/>
                         </a:rPr>
-                        <a:t>No</a:t>
+                        <a:t>$0.1859</a:t>
+                      </a:r>
+                    </a:p>
+                  </a:txBody>
+                  <a:tcPr>
+                    <a:solidFill>
+                      <a:srgbClr val="FFFFFF"/>
+                    </a:solidFill>
+                  </a:tcPr>
+                </a:tc>
+                <a:tc>
+                  <a:txBody>
+                    <a:bodyPr/>
+                    <a:lstStyle/>
+                    <a:p>
+                      <a:r>
+                        <a:rPr sz="1350" b="0">
+                          <a:solidFill>
+                            <a:srgbClr val="161A23"/>
+                          </a:solidFill>
+                          <a:latin typeface="Calibri"/>
+                        </a:rPr>
+                        <a:t>$0.0313</a:t>
+                      </a:r>
+                    </a:p>
+                  </a:txBody>
+                  <a:tcPr>
+                    <a:solidFill>
+                      <a:srgbClr val="FFFFFF"/>
+                    </a:solidFill>
+                  </a:tcPr>
+                </a:tc>
+                <a:tc>
+                  <a:txBody>
+                    <a:bodyPr/>
+                    <a:lstStyle/>
+                    <a:p>
+                      <a:r>
+                        <a:rPr sz="1350" b="0">
+                          <a:solidFill>
+                            <a:srgbClr val="161A23"/>
+                          </a:solidFill>
+                          <a:latin typeface="Calibri"/>
+                        </a:rPr>
+                        <a:t>$0.0179</a:t>
                       </a:r>
                     </a:p>
                   </a:txBody>
@@ -5238,13 +5323,13 @@
                     <a:lstStyle/>
                     <a:p>
                       <a:r>
-                        <a:rPr sz="1300" b="0">
+                        <a:rPr sz="1350" b="0">
                           <a:solidFill>
                             <a:srgbClr val="161A23"/>
                           </a:solidFill>
                           <a:latin typeface="Calibri"/>
                         </a:rPr>
-                        <a:t>Hotel Search Specialist</a:t>
+                        <a:t>Time</a:t>
                       </a:r>
                     </a:p>
                   </a:txBody>
@@ -5260,13 +5345,13 @@
                     <a:lstStyle/>
                     <a:p>
                       <a:r>
-                        <a:rPr sz="1300" b="0">
+                        <a:rPr sz="1350" b="0">
                           <a:solidFill>
                             <a:srgbClr val="161A23"/>
                           </a:solidFill>
                           <a:latin typeface="Calibri"/>
                         </a:rPr>
-                        <a:t>Looks up hotels</a:t>
+                        <a:t>27s</a:t>
                       </a:r>
                     </a:p>
                   </a:txBody>
@@ -5282,13 +5367,57 @@
                     <a:lstStyle/>
                     <a:p>
                       <a:r>
-                        <a:rPr sz="1300" b="0">
+                        <a:rPr sz="1350" b="0">
                           <a:solidFill>
                             <a:srgbClr val="161A23"/>
                           </a:solidFill>
                           <a:latin typeface="Calibri"/>
                         </a:rPr>
-                        <a:t>No</a:t>
+                        <a:t>372s</a:t>
+                      </a:r>
+                    </a:p>
+                  </a:txBody>
+                  <a:tcPr>
+                    <a:solidFill>
+                      <a:srgbClr val="F7F8FC"/>
+                    </a:solidFill>
+                  </a:tcPr>
+                </a:tc>
+                <a:tc>
+                  <a:txBody>
+                    <a:bodyPr/>
+                    <a:lstStyle/>
+                    <a:p>
+                      <a:r>
+                        <a:rPr sz="1350" b="0">
+                          <a:solidFill>
+                            <a:srgbClr val="161A23"/>
+                          </a:solidFill>
+                          <a:latin typeface="Calibri"/>
+                        </a:rPr>
+                        <a:t>37s</a:t>
+                      </a:r>
+                    </a:p>
+                  </a:txBody>
+                  <a:tcPr>
+                    <a:solidFill>
+                      <a:srgbClr val="F7F8FC"/>
+                    </a:solidFill>
+                  </a:tcPr>
+                </a:tc>
+                <a:tc>
+                  <a:txBody>
+                    <a:bodyPr/>
+                    <a:lstStyle/>
+                    <a:p>
+                      <a:r>
+                        <a:rPr sz="1350" b="0">
+                          <a:solidFill>
+                            <a:srgbClr val="161A23"/>
+                          </a:solidFill>
+                          <a:latin typeface="Calibri"/>
+                        </a:rPr>
+                        <a:t>23s</a:t>
                       </a:r>
                     </a:p>
                   </a:txBody>
@@ -5306,13 +5435,13 @@
                     <a:lstStyle/>
                     <a:p>
                       <a:r>
-                        <a:rPr sz="1300" b="0">
+                        <a:rPr sz="1350" b="0">
                           <a:solidFill>
                             <a:srgbClr val="161A23"/>
                           </a:solidFill>
                           <a:latin typeface="Calibri"/>
                         </a:rPr>
-                        <a:t>Activities Specialist</a:t>
+                        <a:t>Prices that are real</a:t>
                       </a:r>
                     </a:p>
                   </a:txBody>
@@ -5328,13 +5457,13 @@
                     <a:lstStyle/>
                     <a:p>
                       <a:r>
-                        <a:rPr sz="1300" b="0">
+                        <a:rPr sz="1350" b="0">
                           <a:solidFill>
                             <a:srgbClr val="161A23"/>
                           </a:solidFill>
                           <a:latin typeface="Calibri"/>
                         </a:rPr>
-                        <a:t>Looks up places to visit and eat</a:t>
+                        <a:t>1.7%</a:t>
                       </a:r>
                     </a:p>
                   </a:txBody>
@@ -5350,13 +5479,13 @@
                     <a:lstStyle/>
                     <a:p>
                       <a:r>
-                        <a:rPr sz="1300" b="0">
+                        <a:rPr sz="1350" b="0">
                           <a:solidFill>
                             <a:srgbClr val="161A23"/>
                           </a:solidFill>
                           <a:latin typeface="Calibri"/>
                         </a:rPr>
-                        <a:t>No</a:t>
+                        <a:t>23%</a:t>
                       </a:r>
                     </a:p>
                   </a:txBody>
@@ -5366,71 +5495,47 @@
                     </a:solidFill>
                   </a:tcPr>
                 </a:tc>
-              </a:tr>
-              <a:tr h="365760">
-                <a:tc>
-                  <a:txBody>
-                    <a:bodyPr/>
-                    <a:lstStyle/>
-                    <a:p>
-                      <a:r>
-                        <a:rPr sz="1300" b="0">
+                <a:tc>
+                  <a:txBody>
+                    <a:bodyPr/>
+                    <a:lstStyle/>
+                    <a:p>
+                      <a:r>
+                        <a:rPr sz="1350" b="0">
                           <a:solidFill>
                             <a:srgbClr val="161A23"/>
                           </a:solidFill>
                           <a:latin typeface="Calibri"/>
                         </a:rPr>
-                        <a:t>Itinerary Coordinator</a:t>
-                      </a:r>
-                    </a:p>
-                  </a:txBody>
-                  <a:tcPr>
-                    <a:solidFill>
-                      <a:srgbClr val="F7F8FC"/>
-                    </a:solidFill>
-                  </a:tcPr>
-                </a:tc>
-                <a:tc>
-                  <a:txBody>
-                    <a:bodyPr/>
-                    <a:lstStyle/>
-                    <a:p>
-                      <a:r>
-                        <a:rPr sz="1300" b="0">
+                        <a:t>56%</a:t>
+                      </a:r>
+                    </a:p>
+                  </a:txBody>
+                  <a:tcPr>
+                    <a:solidFill>
+                      <a:srgbClr val="FFFFFF"/>
+                    </a:solidFill>
+                  </a:tcPr>
+                </a:tc>
+                <a:tc>
+                  <a:txBody>
+                    <a:bodyPr/>
+                    <a:lstStyle/>
+                    <a:p>
+                      <a:r>
+                        <a:rPr sz="1350" b="0">
                           <a:solidFill>
                             <a:srgbClr val="161A23"/>
                           </a:solidFill>
                           <a:latin typeface="Calibri"/>
                         </a:rPr>
-                        <a:t>Writes the day-by-day plan</a:t>
-                      </a:r>
-                    </a:p>
-                  </a:txBody>
-                  <a:tcPr>
-                    <a:solidFill>
-                      <a:srgbClr val="F7F8FC"/>
-                    </a:solidFill>
-                  </a:tcPr>
-                </a:tc>
-                <a:tc>
-                  <a:txBody>
-                    <a:bodyPr/>
-                    <a:lstStyle/>
-                    <a:p>
-                      <a:r>
-                        <a:rPr sz="1300" b="0">
-                          <a:solidFill>
-                            <a:srgbClr val="161A23"/>
-                          </a:solidFill>
-                          <a:latin typeface="Calibri"/>
-                        </a:rPr>
-                        <a:t>Yes - which day, what order</a:t>
-                      </a:r>
-                    </a:p>
-                  </a:txBody>
-                  <a:tcPr>
-                    <a:solidFill>
-                      <a:srgbClr val="F7F8FC"/>
+                        <a:t>47%</a:t>
+                      </a:r>
+                    </a:p>
+                  </a:txBody>
+                  <a:tcPr>
+                    <a:solidFill>
+                      <a:srgbClr val="FFFFFF"/>
                     </a:solidFill>
                   </a:tcPr>
                 </a:tc>
@@ -5447,8 +5552,8 @@
         </p:nvSpPr>
         <p:spPr>
           <a:xfrm>
-            <a:off x="822960" y="5394960"/>
-            <a:ext cx="10515600" cy="822960"/>
+            <a:off x="822960" y="4846320"/>
+            <a:ext cx="10515600" cy="1371600"/>
           </a:xfrm>
           <a:prstGeom prst="rect">
             <a:avLst/>
@@ -5463,17 +5568,33 @@
           <a:p>
             <a:pPr algn="l">
               <a:lnSpc>
-                <a:spcPct val="100000"/>
+                <a:spcPct val="130000"/>
               </a:lnSpc>
             </a:pPr>
             <a:r>
-              <a:rPr sz="1900" b="1">
+              <a:rPr sz="1600" b="0">
+                <a:solidFill>
+                  <a:srgbClr val="545C6E"/>
+                </a:solidFill>
+                <a:latin typeface="Calibri"/>
+              </a:rPr>
+              <a:t>The honest reading, not the flattering one:</a:t>
+            </a:r>
+          </a:p>
+          <a:p>
+            <a:pPr algn="l">
+              <a:lnSpc>
+                <a:spcPct val="130000"/>
+              </a:lnSpc>
+            </a:pPr>
+            <a:r>
+              <a:rPr sz="1800" b="1">
                 <a:solidFill>
                   <a:srgbClr val="4338CA"/>
                 </a:solidFill>
                 <a:latin typeface="Calibri"/>
               </a:rPr>
-              <a:t>Looking something up does not need thinking. Only three agents really need AI.</a:t>
+              <a:t>D is not more accurate than C — their ranges overlap. D is 1.7x cheaper than C and 15x cheaper than B, with no detectable loss of accuracy.</a:t>
             </a:r>
           </a:p>
         </p:txBody>
@@ -5486,7 +5607,7 @@
 </p:sld>
 </file>
 
-<file path=ppt/slides/slide3.xml><?xml version="1.0" encoding="utf-8"?>
+<file path=ppt/slides/slide11.xml><?xml version="1.0" encoding="utf-8"?>
 <p:sld xmlns:a="http://schemas.openxmlformats.org/drawingml/2006/main" xmlns:p="http://schemas.openxmlformats.org/presentationml/2006/main" xmlns:r="http://schemas.openxmlformats.org/officeDocument/2006/relationships">
   <p:cSld>
     <p:spTree>
@@ -5530,7 +5651,7 @@
                 </a:solidFill>
                 <a:latin typeface="Calibri"/>
               </a:rPr>
-              <a:t>2  ·  I BUILT IT FOUR WAYS</a:t>
+              <a:t>10  ·  WHAT THE USER SEES</a:t>
             </a:r>
           </a:p>
         </p:txBody>
@@ -5569,7 +5690,7 @@
                 </a:solidFill>
                 <a:latin typeface="Calibri"/>
               </a:rPr>
-              <a:t>So I could compare them fairly</a:t>
+              <a:t>And the check that stops a fantasy trip</a:t>
             </a:r>
           </a:p>
         </p:txBody>
@@ -5618,373 +5739,30 @@
           </a:p>
         </p:txBody>
       </p:sp>
-      <p:graphicFrame>
-        <p:nvGraphicFramePr>
-          <p:cNvPr id="5" name="Table 4"/>
-          <p:cNvGraphicFramePr>
-            <a:graphicFrameLocks noGrp="1"/>
-          </p:cNvGraphicFramePr>
+      <p:pic>
+        <p:nvPicPr>
+          <p:cNvPr id="5" name="Picture 4" descr="frontend.png"/>
+          <p:cNvPicPr>
+            <a:picLocks noChangeAspect="1"/>
+          </p:cNvPicPr>
           <p:nvPr/>
-        </p:nvGraphicFramePr>
-        <p:xfrm>
-          <a:off x="822960" y="2011680"/>
-          <a:ext cx="10515599" cy="1828800"/>
-        </p:xfrm>
-        <a:graphic>
-          <a:graphicData uri="http://schemas.openxmlformats.org/drawingml/2006/table">
-            <a:tbl>
-              <a:tblPr firstRow="1" bandRow="1">
-                <a:tableStyleId>{5C22544A-7EE6-4342-B048-85BDC9FD1C3A}</a:tableStyleId>
-              </a:tblPr>
-              <a:tblGrid>
-                <a:gridCol w="477981"/>
-                <a:gridCol w="2389909"/>
-                <a:gridCol w="7647709"/>
-              </a:tblGrid>
-              <a:tr h="365760">
-                <a:tc>
-                  <a:txBody>
-                    <a:bodyPr/>
-                    <a:lstStyle/>
-                    <a:p>
-                      <a:r>
-                        <a:rPr sz="1350" b="1">
-                          <a:solidFill>
-                            <a:srgbClr val="FFFFFF"/>
-                          </a:solidFill>
-                          <a:latin typeface="Calibri"/>
-                        </a:rPr>
-                        <a:t> </a:t>
-                      </a:r>
-                    </a:p>
-                  </a:txBody>
-                  <a:tcPr>
-                    <a:solidFill>
-                      <a:srgbClr val="4338CA"/>
-                    </a:solidFill>
-                  </a:tcPr>
-                </a:tc>
-                <a:tc>
-                  <a:txBody>
-                    <a:bodyPr/>
-                    <a:lstStyle/>
-                    <a:p>
-                      <a:r>
-                        <a:rPr sz="1350" b="1">
-                          <a:solidFill>
-                            <a:srgbClr val="FFFFFF"/>
-                          </a:solidFill>
-                          <a:latin typeface="Calibri"/>
-                        </a:rPr>
-                        <a:t>Name</a:t>
-                      </a:r>
-                    </a:p>
-                  </a:txBody>
-                  <a:tcPr>
-                    <a:solidFill>
-                      <a:srgbClr val="4338CA"/>
-                    </a:solidFill>
-                  </a:tcPr>
-                </a:tc>
-                <a:tc>
-                  <a:txBody>
-                    <a:bodyPr/>
-                    <a:lstStyle/>
-                    <a:p>
-                      <a:r>
-                        <a:rPr sz="1350" b="1">
-                          <a:solidFill>
-                            <a:srgbClr val="FFFFFF"/>
-                          </a:solidFill>
-                          <a:latin typeface="Calibri"/>
-                        </a:rPr>
-                        <a:t>What it is</a:t>
-                      </a:r>
-                    </a:p>
-                  </a:txBody>
-                  <a:tcPr>
-                    <a:solidFill>
-                      <a:srgbClr val="4338CA"/>
-                    </a:solidFill>
-                  </a:tcPr>
-                </a:tc>
-              </a:tr>
-              <a:tr h="365760">
-                <a:tc>
-                  <a:txBody>
-                    <a:bodyPr/>
-                    <a:lstStyle/>
-                    <a:p>
-                      <a:r>
-                        <a:rPr sz="1350" b="0">
-                          <a:solidFill>
-                            <a:srgbClr val="161A23"/>
-                          </a:solidFill>
-                          <a:latin typeface="Calibri"/>
-                        </a:rPr>
-                        <a:t>A</a:t>
-                      </a:r>
-                    </a:p>
-                  </a:txBody>
-                  <a:tcPr>
-                    <a:solidFill>
-                      <a:srgbClr val="FFFFFF"/>
-                    </a:solidFill>
-                  </a:tcPr>
-                </a:tc>
-                <a:tc>
-                  <a:txBody>
-                    <a:bodyPr/>
-                    <a:lstStyle/>
-                    <a:p>
-                      <a:r>
-                        <a:rPr sz="1350" b="0">
-                          <a:solidFill>
-                            <a:srgbClr val="161A23"/>
-                          </a:solidFill>
-                          <a:latin typeface="Calibri"/>
-                        </a:rPr>
-                        <a:t>One AI, no tools</a:t>
-                      </a:r>
-                    </a:p>
-                  </a:txBody>
-                  <a:tcPr>
-                    <a:solidFill>
-                      <a:srgbClr val="FFFFFF"/>
-                    </a:solidFill>
-                  </a:tcPr>
-                </a:tc>
-                <a:tc>
-                  <a:txBody>
-                    <a:bodyPr/>
-                    <a:lstStyle/>
-                    <a:p>
-                      <a:r>
-                        <a:rPr sz="1350" b="0">
-                          <a:solidFill>
-                            <a:srgbClr val="161A23"/>
-                          </a:solidFill>
-                          <a:latin typeface="Calibri"/>
-                        </a:rPr>
-                        <a:t>A single AI call. It has no way to look anything up, so it invents the whole plan</a:t>
-                      </a:r>
-                    </a:p>
-                  </a:txBody>
-                  <a:tcPr>
-                    <a:solidFill>
-                      <a:srgbClr val="FFFFFF"/>
-                    </a:solidFill>
-                  </a:tcPr>
-                </a:tc>
-              </a:tr>
-              <a:tr h="365760">
-                <a:tc>
-                  <a:txBody>
-                    <a:bodyPr/>
-                    <a:lstStyle/>
-                    <a:p>
-                      <a:r>
-                        <a:rPr sz="1350" b="0">
-                          <a:solidFill>
-                            <a:srgbClr val="161A23"/>
-                          </a:solidFill>
-                          <a:latin typeface="Calibri"/>
-                        </a:rPr>
-                        <a:t>B</a:t>
-                      </a:r>
-                    </a:p>
-                  </a:txBody>
-                  <a:tcPr>
-                    <a:solidFill>
-                      <a:srgbClr val="F7F8FC"/>
-                    </a:solidFill>
-                  </a:tcPr>
-                </a:tc>
-                <a:tc>
-                  <a:txBody>
-                    <a:bodyPr/>
-                    <a:lstStyle/>
-                    <a:p>
-                      <a:r>
-                        <a:rPr sz="1350" b="0">
-                          <a:solidFill>
-                            <a:srgbClr val="161A23"/>
-                          </a:solidFill>
-                          <a:latin typeface="Calibri"/>
-                        </a:rPr>
-                        <a:t>Six agents, first try</a:t>
-                      </a:r>
-                    </a:p>
-                  </a:txBody>
-                  <a:tcPr>
-                    <a:solidFill>
-                      <a:srgbClr val="F7F8FC"/>
-                    </a:solidFill>
-                  </a:tcPr>
-                </a:tc>
-                <a:tc>
-                  <a:txBody>
-                    <a:bodyPr/>
-                    <a:lstStyle/>
-                    <a:p>
-                      <a:r>
-                        <a:rPr sz="1350" b="0">
-                          <a:solidFill>
-                            <a:srgbClr val="161A23"/>
-                          </a:solidFill>
-                          <a:latin typeface="Calibri"/>
-                        </a:rPr>
-                        <a:t>Every agent gets tools and decides for itself when to use them. This was my original plan</a:t>
-                      </a:r>
-                    </a:p>
-                  </a:txBody>
-                  <a:tcPr>
-                    <a:solidFill>
-                      <a:srgbClr val="F7F8FC"/>
-                    </a:solidFill>
-                  </a:tcPr>
-                </a:tc>
-              </a:tr>
-              <a:tr h="365760">
-                <a:tc>
-                  <a:txBody>
-                    <a:bodyPr/>
-                    <a:lstStyle/>
-                    <a:p>
-                      <a:r>
-                        <a:rPr sz="1350" b="0">
-                          <a:solidFill>
-                            <a:srgbClr val="161A23"/>
-                          </a:solidFill>
-                          <a:latin typeface="Calibri"/>
-                        </a:rPr>
-                        <a:t>C</a:t>
-                      </a:r>
-                    </a:p>
-                  </a:txBody>
-                  <a:tcPr>
-                    <a:solidFill>
-                      <a:srgbClr val="FFFFFF"/>
-                    </a:solidFill>
-                  </a:tcPr>
-                </a:tc>
-                <a:tc>
-                  <a:txBody>
-                    <a:bodyPr/>
-                    <a:lstStyle/>
-                    <a:p>
-                      <a:r>
-                        <a:rPr sz="1350" b="0">
-                          <a:solidFill>
-                            <a:srgbClr val="161A23"/>
-                          </a:solidFill>
-                          <a:latin typeface="Calibri"/>
-                        </a:rPr>
-                        <a:t>Six agents, tidied up</a:t>
-                      </a:r>
-                    </a:p>
-                  </a:txBody>
-                  <a:tcPr>
-                    <a:solidFill>
-                      <a:srgbClr val="FFFFFF"/>
-                    </a:solidFill>
-                  </a:tcPr>
-                </a:tc>
-                <a:tc>
-                  <a:txBody>
-                    <a:bodyPr/>
-                    <a:lstStyle/>
-                    <a:p>
-                      <a:r>
-                        <a:rPr sz="1350" b="0">
-                          <a:solidFill>
-                            <a:srgbClr val="161A23"/>
-                          </a:solidFill>
-                          <a:latin typeface="Calibri"/>
-                        </a:rPr>
-                        <a:t>Same six agents, but fewer tools each and a tighter limit on how long they can think</a:t>
-                      </a:r>
-                    </a:p>
-                  </a:txBody>
-                  <a:tcPr>
-                    <a:solidFill>
-                      <a:srgbClr val="FFFFFF"/>
-                    </a:solidFill>
-                  </a:tcPr>
-                </a:tc>
-              </a:tr>
-              <a:tr h="365760">
-                <a:tc>
-                  <a:txBody>
-                    <a:bodyPr/>
-                    <a:lstStyle/>
-                    <a:p>
-                      <a:r>
-                        <a:rPr sz="1350" b="0">
-                          <a:solidFill>
-                            <a:srgbClr val="161A23"/>
-                          </a:solidFill>
-                          <a:latin typeface="Calibri"/>
-                        </a:rPr>
-                        <a:t>D</a:t>
-                      </a:r>
-                    </a:p>
-                  </a:txBody>
-                  <a:tcPr>
-                    <a:solidFill>
-                      <a:srgbClr val="F7F8FC"/>
-                    </a:solidFill>
-                  </a:tcPr>
-                </a:tc>
-                <a:tc>
-                  <a:txBody>
-                    <a:bodyPr/>
-                    <a:lstStyle/>
-                    <a:p>
-                      <a:r>
-                        <a:rPr sz="1350" b="0">
-                          <a:solidFill>
-                            <a:srgbClr val="161A23"/>
-                          </a:solidFill>
-                          <a:latin typeface="Calibri"/>
-                        </a:rPr>
-                        <a:t>Three agents</a:t>
-                      </a:r>
-                    </a:p>
-                  </a:txBody>
-                  <a:tcPr>
-                    <a:solidFill>
-                      <a:srgbClr val="F7F8FC"/>
-                    </a:solidFill>
-                  </a:tcPr>
-                </a:tc>
-                <a:tc>
-                  <a:txBody>
-                    <a:bodyPr/>
-                    <a:lstStyle/>
-                    <a:p>
-                      <a:r>
-                        <a:rPr sz="1350" b="0">
-                          <a:solidFill>
-                            <a:srgbClr val="161A23"/>
-                          </a:solidFill>
-                          <a:latin typeface="Calibri"/>
-                        </a:rPr>
-                        <a:t>The look-up agents are gone. Normal code fetches the data. This is what I ship</a:t>
-                      </a:r>
-                    </a:p>
-                  </a:txBody>
-                  <a:tcPr>
-                    <a:solidFill>
-                      <a:srgbClr val="F7F8FC"/>
-                    </a:solidFill>
-                  </a:tcPr>
-                </a:tc>
-              </a:tr>
-            </a:tbl>
-          </a:graphicData>
-        </a:graphic>
-      </p:graphicFrame>
+        </p:nvPicPr>
+        <p:blipFill>
+          <a:blip r:embed="rId2"/>
+          <a:stretch>
+            <a:fillRect/>
+          </a:stretch>
+        </p:blipFill>
+        <p:spPr>
+          <a:xfrm>
+            <a:off x="3148643" y="1737360"/>
+            <a:ext cx="5894409" cy="3383280"/>
+          </a:xfrm>
+          <a:prstGeom prst="rect">
+            <a:avLst/>
+          </a:prstGeom>
+        </p:spPr>
+      </p:pic>
       <p:sp>
         <p:nvSpPr>
           <p:cNvPr id="6" name="TextBox 5"/>
@@ -5993,8 +5771,8 @@
         </p:nvSpPr>
         <p:spPr>
           <a:xfrm>
-            <a:off x="822960" y="5212080"/>
-            <a:ext cx="10515600" cy="914400"/>
+            <a:off x="822960" y="5257800"/>
+            <a:ext cx="3515258" cy="1188720"/>
           </a:xfrm>
           <a:prstGeom prst="rect">
             <a:avLst/>
@@ -6007,19 +5785,214 @@
           </a:bodyPr>
           <a:lstStyle/>
           <a:p>
-            <a:pPr algn="l">
+            <a:pPr algn="ctr">
               <a:lnSpc>
                 <a:spcPct val="100000"/>
               </a:lnSpc>
             </a:pPr>
             <a:r>
-              <a:rPr sz="1900" b="1">
+              <a:rPr sz="6000" b="1">
                 <a:solidFill>
-                  <a:srgbClr val="4338CA"/>
+                  <a:srgbClr val="A85B00"/>
                 </a:solidFill>
                 <a:latin typeface="Calibri"/>
               </a:rPr>
-              <a:t>C exists so nobody can say D only won because B was set up badly.</a:t>
+              <a:t>$800</a:t>
+            </a:r>
+          </a:p>
+        </p:txBody>
+      </p:sp>
+      <p:sp>
+        <p:nvSpPr>
+          <p:cNvPr id="7" name="TextBox 6"/>
+          <p:cNvSpPr txBox="1"/>
+          <p:nvPr/>
+        </p:nvSpPr>
+        <p:spPr>
+          <a:xfrm>
+            <a:off x="822960" y="6400800"/>
+            <a:ext cx="3515258" cy="731520"/>
+          </a:xfrm>
+          <a:prstGeom prst="rect">
+            <a:avLst/>
+          </a:prstGeom>
+          <a:noFill/>
+        </p:spPr>
+        <p:txBody>
+          <a:bodyPr wrap="square" anchor="t">
+            <a:spAutoFit/>
+          </a:bodyPr>
+          <a:lstStyle/>
+          <a:p>
+            <a:pPr algn="ctr">
+              <a:lnSpc>
+                <a:spcPct val="100000"/>
+              </a:lnSpc>
+            </a:pPr>
+            <a:r>
+              <a:rPr sz="1400" b="0">
+                <a:solidFill>
+                  <a:srgbClr val="545C6E"/>
+                </a:solidFill>
+                <a:latin typeface="Calibri"/>
+              </a:rPr>
+              <a:t>traveller asked for</a:t>
+            </a:r>
+          </a:p>
+        </p:txBody>
+      </p:sp>
+      <p:sp>
+        <p:nvSpPr>
+          <p:cNvPr id="8" name="TextBox 7"/>
+          <p:cNvSpPr txBox="1"/>
+          <p:nvPr/>
+        </p:nvSpPr>
+        <p:spPr>
+          <a:xfrm>
+            <a:off x="4338218" y="5257800"/>
+            <a:ext cx="3515258" cy="1188720"/>
+          </a:xfrm>
+          <a:prstGeom prst="rect">
+            <a:avLst/>
+          </a:prstGeom>
+          <a:noFill/>
+        </p:spPr>
+        <p:txBody>
+          <a:bodyPr wrap="square" anchor="t">
+            <a:spAutoFit/>
+          </a:bodyPr>
+          <a:lstStyle/>
+          <a:p>
+            <a:pPr algn="ctr">
+              <a:lnSpc>
+                <a:spcPct val="100000"/>
+              </a:lnSpc>
+            </a:pPr>
+            <a:r>
+              <a:rPr sz="6000" b="1">
+                <a:solidFill>
+                  <a:srgbClr val="A85B00"/>
+                </a:solidFill>
+                <a:latin typeface="Calibri"/>
+              </a:rPr>
+              <a:t>$837</a:t>
+            </a:r>
+          </a:p>
+        </p:txBody>
+      </p:sp>
+      <p:sp>
+        <p:nvSpPr>
+          <p:cNvPr id="9" name="TextBox 8"/>
+          <p:cNvSpPr txBox="1"/>
+          <p:nvPr/>
+        </p:nvSpPr>
+        <p:spPr>
+          <a:xfrm>
+            <a:off x="4338218" y="6400800"/>
+            <a:ext cx="3515258" cy="731520"/>
+          </a:xfrm>
+          <a:prstGeom prst="rect">
+            <a:avLst/>
+          </a:prstGeom>
+          <a:noFill/>
+        </p:spPr>
+        <p:txBody>
+          <a:bodyPr wrap="square" anchor="t">
+            <a:spAutoFit/>
+          </a:bodyPr>
+          <a:lstStyle/>
+          <a:p>
+            <a:pPr algn="ctr">
+              <a:lnSpc>
+                <a:spcPct val="100000"/>
+              </a:lnSpc>
+            </a:pPr>
+            <a:r>
+              <a:rPr sz="1400" b="0">
+                <a:solidFill>
+                  <a:srgbClr val="545C6E"/>
+                </a:solidFill>
+                <a:latin typeface="Calibri"/>
+              </a:rPr>
+              <a:t>cheapest it can be done</a:t>
+            </a:r>
+          </a:p>
+        </p:txBody>
+      </p:sp>
+      <p:sp>
+        <p:nvSpPr>
+          <p:cNvPr id="10" name="TextBox 9"/>
+          <p:cNvSpPr txBox="1"/>
+          <p:nvPr/>
+        </p:nvSpPr>
+        <p:spPr>
+          <a:xfrm>
+            <a:off x="7853476" y="5257800"/>
+            <a:ext cx="3515258" cy="1188720"/>
+          </a:xfrm>
+          <a:prstGeom prst="rect">
+            <a:avLst/>
+          </a:prstGeom>
+          <a:noFill/>
+        </p:spPr>
+        <p:txBody>
+          <a:bodyPr wrap="square" anchor="t">
+            <a:spAutoFit/>
+          </a:bodyPr>
+          <a:lstStyle/>
+          <a:p>
+            <a:pPr algn="ctr">
+              <a:lnSpc>
+                <a:spcPct val="100000"/>
+              </a:lnSpc>
+            </a:pPr>
+            <a:r>
+              <a:rPr sz="6000" b="1">
+                <a:solidFill>
+                  <a:srgbClr val="A85B00"/>
+                </a:solidFill>
+                <a:latin typeface="Calibri"/>
+              </a:rPr>
+              <a:t>REFUSED</a:t>
+            </a:r>
+          </a:p>
+        </p:txBody>
+      </p:sp>
+      <p:sp>
+        <p:nvSpPr>
+          <p:cNvPr id="11" name="TextBox 10"/>
+          <p:cNvSpPr txBox="1"/>
+          <p:nvPr/>
+        </p:nvSpPr>
+        <p:spPr>
+          <a:xfrm>
+            <a:off x="7853476" y="6400800"/>
+            <a:ext cx="3515258" cy="731520"/>
+          </a:xfrm>
+          <a:prstGeom prst="rect">
+            <a:avLst/>
+          </a:prstGeom>
+          <a:noFill/>
+        </p:spPr>
+        <p:txBody>
+          <a:bodyPr wrap="square" anchor="t">
+            <a:spAutoFit/>
+          </a:bodyPr>
+          <a:lstStyle/>
+          <a:p>
+            <a:pPr algn="ctr">
+              <a:lnSpc>
+                <a:spcPct val="100000"/>
+              </a:lnSpc>
+            </a:pPr>
+            <a:r>
+              <a:rPr sz="1400" b="0">
+                <a:solidFill>
+                  <a:srgbClr val="545C6E"/>
+                </a:solidFill>
+                <a:latin typeface="Calibri"/>
+              </a:rPr>
+              <a:t>with three ways to fix it</a:t>
             </a:r>
           </a:p>
         </p:txBody>
@@ -6032,7 +6005,306 @@
 </p:sld>
 </file>
 
-<file path=ppt/slides/slide4.xml><?xml version="1.0" encoding="utf-8"?>
+<file path=ppt/slides/slide12.xml><?xml version="1.0" encoding="utf-8"?>
+<p:sld xmlns:a="http://schemas.openxmlformats.org/drawingml/2006/main" xmlns:p="http://schemas.openxmlformats.org/presentationml/2006/main" xmlns:r="http://schemas.openxmlformats.org/officeDocument/2006/relationships">
+  <p:cSld>
+    <p:bg>
+      <p:bgPr>
+        <a:solidFill>
+          <a:srgbClr val="1E1B4B"/>
+        </a:solidFill>
+        <a:effectLst/>
+      </p:bgPr>
+    </p:bg>
+    <p:spTree>
+      <p:nvGrpSpPr>
+        <p:cNvPr id="1" name=""/>
+        <p:cNvGrpSpPr/>
+        <p:nvPr/>
+      </p:nvGrpSpPr>
+      <p:grpSpPr/>
+      <p:sp>
+        <p:nvSpPr>
+          <p:cNvPr id="2" name="TextBox 1"/>
+          <p:cNvSpPr txBox="1"/>
+          <p:nvPr/>
+        </p:nvSpPr>
+        <p:spPr>
+          <a:xfrm>
+            <a:off x="1005840" y="1051560"/>
+            <a:ext cx="10241280" cy="457200"/>
+          </a:xfrm>
+          <a:prstGeom prst="rect">
+            <a:avLst/>
+          </a:prstGeom>
+          <a:noFill/>
+        </p:spPr>
+        <p:txBody>
+          <a:bodyPr wrap="square" anchor="t">
+            <a:spAutoFit/>
+          </a:bodyPr>
+          <a:lstStyle/>
+          <a:p>
+            <a:pPr algn="l">
+              <a:lnSpc>
+                <a:spcPct val="100000"/>
+              </a:lnSpc>
+            </a:pPr>
+            <a:r>
+              <a:rPr sz="1400" b="1">
+                <a:solidFill>
+                  <a:srgbClr val="9CA3F5"/>
+                </a:solidFill>
+                <a:latin typeface="Calibri"/>
+              </a:rPr>
+              <a:t>IN ONE SENTENCE</a:t>
+            </a:r>
+          </a:p>
+        </p:txBody>
+      </p:sp>
+      <p:sp>
+        <p:nvSpPr>
+          <p:cNvPr id="3" name="TextBox 2"/>
+          <p:cNvSpPr txBox="1"/>
+          <p:nvPr/>
+        </p:nvSpPr>
+        <p:spPr>
+          <a:xfrm>
+            <a:off x="1005840" y="1508760"/>
+            <a:ext cx="10241280" cy="1828800"/>
+          </a:xfrm>
+          <a:prstGeom prst="rect">
+            <a:avLst/>
+          </a:prstGeom>
+          <a:noFill/>
+        </p:spPr>
+        <p:txBody>
+          <a:bodyPr wrap="square" anchor="t">
+            <a:spAutoFit/>
+          </a:bodyPr>
+          <a:lstStyle/>
+          <a:p>
+            <a:pPr algn="l">
+              <a:lnSpc>
+                <a:spcPct val="120000"/>
+              </a:lnSpc>
+            </a:pPr>
+            <a:r>
+              <a:rPr sz="3000" b="1">
+                <a:solidFill>
+                  <a:srgbClr val="FFFFFF"/>
+                </a:solidFill>
+                <a:latin typeface="Calibri"/>
+              </a:rPr>
+              <a:t>AI decides what the user wants and how to present it.</a:t>
+            </a:r>
+          </a:p>
+          <a:p>
+            <a:pPr algn="l">
+              <a:lnSpc>
+                <a:spcPct val="120000"/>
+              </a:lnSpc>
+            </a:pPr>
+            <a:r>
+              <a:rPr sz="3000" b="1">
+                <a:solidFill>
+                  <a:srgbClr val="6EE7DF"/>
+                </a:solidFill>
+                <a:latin typeface="Calibri"/>
+              </a:rPr>
+              <a:t>Python decides what data needs to be fetched.</a:t>
+            </a:r>
+          </a:p>
+        </p:txBody>
+      </p:sp>
+      <p:sp>
+        <p:nvSpPr>
+          <p:cNvPr id="4" name="Rectangle 3"/>
+          <p:cNvSpPr/>
+          <p:nvPr/>
+        </p:nvSpPr>
+        <p:spPr>
+          <a:xfrm>
+            <a:off x="1005840" y="3520440"/>
+            <a:ext cx="1463040" cy="34000"/>
+          </a:xfrm>
+          <a:prstGeom prst="rect">
+            <a:avLst/>
+          </a:prstGeom>
+          <a:solidFill>
+            <a:srgbClr val="0EA5A4"/>
+          </a:solidFill>
+          <a:ln>
+            <a:noFill/>
+          </a:ln>
+          <a:effectLst/>
+        </p:spPr>
+        <p:style>
+          <a:lnRef idx="1">
+            <a:schemeClr val="accent1"/>
+          </a:lnRef>
+          <a:fillRef idx="3">
+            <a:schemeClr val="accent1"/>
+          </a:fillRef>
+          <a:effectRef idx="2">
+            <a:schemeClr val="accent1"/>
+          </a:effectRef>
+          <a:fontRef idx="minor">
+            <a:schemeClr val="lt1"/>
+          </a:fontRef>
+        </p:style>
+        <p:txBody>
+          <a:bodyPr rtlCol="0" anchor="ctr"/>
+          <a:lstStyle/>
+          <a:p>
+            <a:pPr algn="ctr"/>
+          </a:p>
+        </p:txBody>
+      </p:sp>
+      <p:sp>
+        <p:nvSpPr>
+          <p:cNvPr id="5" name="TextBox 4"/>
+          <p:cNvSpPr txBox="1"/>
+          <p:nvPr/>
+        </p:nvSpPr>
+        <p:spPr>
+          <a:xfrm>
+            <a:off x="1005840" y="3840480"/>
+            <a:ext cx="10241280" cy="2377440"/>
+          </a:xfrm>
+          <a:prstGeom prst="rect">
+            <a:avLst/>
+          </a:prstGeom>
+          <a:noFill/>
+        </p:spPr>
+        <p:txBody>
+          <a:bodyPr wrap="square" anchor="t">
+            <a:spAutoFit/>
+          </a:bodyPr>
+          <a:lstStyle/>
+          <a:p>
+            <a:pPr algn="l">
+              <a:lnSpc>
+                <a:spcPct val="125000"/>
+              </a:lnSpc>
+            </a:pPr>
+            <a:r>
+              <a:rPr sz="1200" b="1">
+                <a:solidFill>
+                  <a:srgbClr val="9CA3F5"/>
+                </a:solidFill>
+                <a:latin typeface="Calibri"/>
+              </a:rPr>
+              <a:t>WHAT I FOUND</a:t>
+            </a:r>
+          </a:p>
+          <a:p>
+            <a:pPr algn="l">
+              <a:lnSpc>
+                <a:spcPct val="125000"/>
+              </a:lnSpc>
+            </a:pPr>
+            <a:r>
+              <a:rPr sz="500" b="0">
+                <a:solidFill>
+                  <a:srgbClr val="FFFFFF"/>
+                </a:solidFill>
+                <a:latin typeface="Calibri"/>
+              </a:rPr>
+              <a:t/>
+            </a:r>
+          </a:p>
+          <a:p>
+            <a:pPr algn="l">
+              <a:lnSpc>
+                <a:spcPct val="125000"/>
+              </a:lnSpc>
+            </a:pPr>
+            <a:r>
+              <a:rPr sz="1600" b="0">
+                <a:solidFill>
+                  <a:srgbClr val="C7D2FE"/>
+                </a:solidFill>
+                <a:latin typeface="Calibri"/>
+              </a:rPr>
+              <a:t>Without tools, AI invents travel information. Tools are essential.</a:t>
+            </a:r>
+          </a:p>
+          <a:p>
+            <a:pPr algn="l">
+              <a:lnSpc>
+                <a:spcPct val="125000"/>
+              </a:lnSpc>
+            </a:pPr>
+            <a:r>
+              <a:rPr sz="1600" b="0">
+                <a:solidFill>
+                  <a:srgbClr val="C7D2FE"/>
+                </a:solidFill>
+                <a:latin typeface="Calibri"/>
+              </a:rPr>
+              <a:t>Configuration matters enormously — settings alone saved 89%.</a:t>
+            </a:r>
+          </a:p>
+          <a:p>
+            <a:pPr algn="l">
+              <a:lnSpc>
+                <a:spcPct val="125000"/>
+              </a:lnSpc>
+            </a:pPr>
+            <a:r>
+              <a:rPr sz="1600" b="0">
+                <a:solidFill>
+                  <a:srgbClr val="6EE7DF"/>
+                </a:solidFill>
+                <a:latin typeface="Calibri"/>
+              </a:rPr>
+              <a:t>Taking AI out of the lookup step is cheaper and faster, with no detectable loss of accuracy.</a:t>
+            </a:r>
+          </a:p>
+          <a:p>
+            <a:pPr algn="l">
+              <a:lnSpc>
+                <a:spcPct val="125000"/>
+              </a:lnSpc>
+            </a:pPr>
+            <a:r>
+              <a:rPr sz="500" b="0">
+                <a:solidFill>
+                  <a:srgbClr val="FFFFFF"/>
+                </a:solidFill>
+                <a:latin typeface="Calibri"/>
+              </a:rPr>
+              <a:t/>
+            </a:r>
+          </a:p>
+          <a:p>
+            <a:pPr algn="l">
+              <a:lnSpc>
+                <a:spcPct val="125000"/>
+              </a:lnSpc>
+            </a:pPr>
+            <a:r>
+              <a:rPr sz="1400" b="0">
+                <a:solidFill>
+                  <a:srgbClr val="9CA3F5"/>
+                </a:solidFill>
+                <a:latin typeface="Calibri"/>
+              </a:rPr>
+              <a:t>The gap: 1 of 20 trips measured for cost, because of the free API limits. 3 of 9 of my own design checks pass. Both are in the report.</a:t>
+            </a:r>
+          </a:p>
+        </p:txBody>
+      </p:sp>
+    </p:spTree>
+  </p:cSld>
+  <p:clrMapOvr>
+    <a:masterClrMapping/>
+  </p:clrMapOvr>
+</p:sld>
+</file>
+
+<file path=ppt/slides/slide2.xml><?xml version="1.0" encoding="utf-8"?>
 <p:sld xmlns:a="http://schemas.openxmlformats.org/drawingml/2006/main" xmlns:p="http://schemas.openxmlformats.org/presentationml/2006/main" xmlns:r="http://schemas.openxmlformats.org/officeDocument/2006/relationships">
   <p:cSld>
     <p:spTree>
@@ -6076,7 +6348,7 @@
                 </a:solidFill>
                 <a:latin typeface="Calibri"/>
               </a:rPr>
-              <a:t>3  ·  WHICH TOOLS EACH AGENT GETS</a:t>
+              <a:t>1  ·  WHAT THE SYSTEM HAS TO DO</a:t>
             </a:r>
           </a:p>
         </p:txBody>
@@ -6115,7 +6387,7 @@
                 </a:solidFill>
                 <a:latin typeface="Calibri"/>
               </a:rPr>
-              <a:t>Read from the code. A has none at all</a:t>
+              <a:t>One request, eight jobs</a:t>
             </a:r>
           </a:p>
         </p:txBody>
@@ -6164,17 +6436,72 @@
           </a:p>
         </p:txBody>
       </p:sp>
+      <p:sp>
+        <p:nvSpPr>
+          <p:cNvPr id="5" name="Rounded Rectangle 4"/>
+          <p:cNvSpPr/>
+          <p:nvPr/>
+        </p:nvSpPr>
+        <p:spPr>
+          <a:xfrm>
+            <a:off x="822960" y="1874519"/>
+            <a:ext cx="10515600" cy="685800"/>
+          </a:xfrm>
+          <a:prstGeom prst="roundRect">
+            <a:avLst/>
+          </a:prstGeom>
+          <a:solidFill>
+            <a:srgbClr val="F7F8FC"/>
+          </a:solidFill>
+          <a:ln w="15875">
+            <a:solidFill>
+              <a:srgbClr val="E3E7F0"/>
+            </a:solidFill>
+          </a:ln>
+          <a:effectLst/>
+        </p:spPr>
+        <p:style>
+          <a:lnRef idx="1">
+            <a:schemeClr val="accent1"/>
+          </a:lnRef>
+          <a:fillRef idx="3">
+            <a:schemeClr val="accent1"/>
+          </a:fillRef>
+          <a:effectRef idx="2">
+            <a:schemeClr val="accent1"/>
+          </a:effectRef>
+          <a:fontRef idx="minor">
+            <a:schemeClr val="lt1"/>
+          </a:fontRef>
+        </p:style>
+        <p:txBody>
+          <a:bodyPr rtlCol="0" anchor="ctr" wrap="square"/>
+          <a:lstStyle/>
+          <a:p>
+            <a:pPr algn="ctr"/>
+            <a:r>
+              <a:rPr sz="1500" b="0">
+                <a:solidFill>
+                  <a:srgbClr val="545C6E"/>
+                </a:solidFill>
+                <a:latin typeface="Calibri"/>
+              </a:rPr>
+              <a:t>"I want to plan a trip from Lahore to Istanbul for 4 nights, departing 2026-08-15. Budget is $800 for one person. I like history, food, and shopping."</a:t>
+            </a:r>
+          </a:p>
+        </p:txBody>
+      </p:sp>
       <p:graphicFrame>
         <p:nvGraphicFramePr>
-          <p:cNvPr id="5" name="Table 4"/>
+          <p:cNvPr id="6" name="Table 5"/>
           <p:cNvGraphicFramePr>
             <a:graphicFrameLocks noGrp="1"/>
           </p:cNvGraphicFramePr>
           <p:nvPr/>
         </p:nvGraphicFramePr>
         <p:xfrm>
-          <a:off x="822960" y="1920240"/>
-          <a:ext cx="10515598" cy="2926080"/>
+          <a:off x="822960" y="2834640"/>
+          <a:ext cx="10515600" cy="1828800"/>
         </p:xfrm>
         <a:graphic>
           <a:graphicData uri="http://schemas.openxmlformats.org/drawingml/2006/table">
@@ -6183,10 +6510,9 @@
                 <a:tableStyleId>{5C22544A-7EE6-4342-B048-85BDC9FD1C3A}</a:tableStyleId>
               </a:tblPr>
               <a:tblGrid>
-                <a:gridCol w="2029326"/>
-                <a:gridCol w="3874168"/>
-                <a:gridCol w="2398294"/>
-                <a:gridCol w="2213810"/>
+                <a:gridCol w="3108960"/>
+                <a:gridCol w="3291840"/>
+                <a:gridCol w="4114800"/>
               </a:tblGrid>
               <a:tr h="365760">
                 <a:tc>
@@ -6195,13 +6521,13 @@
                     <a:lstStyle/>
                     <a:p>
                       <a:r>
-                        <a:rPr sz="950" b="1">
+                        <a:rPr sz="1350" b="1">
                           <a:solidFill>
                             <a:srgbClr val="FFFFFF"/>
                           </a:solidFill>
                           <a:latin typeface="Calibri"/>
                         </a:rPr>
-                        <a:t>Agent</a:t>
+                        <a:t>Understand the request</a:t>
                       </a:r>
                     </a:p>
                   </a:txBody>
@@ -6217,13 +6543,13 @@
                     <a:lstStyle/>
                     <a:p>
                       <a:r>
-                        <a:rPr sz="950" b="1">
+                        <a:rPr sz="1350" b="1">
                           <a:solidFill>
                             <a:srgbClr val="FFFFFF"/>
                           </a:solidFill>
                           <a:latin typeface="Calibri"/>
                         </a:rPr>
-                        <a:t>B  (first try)</a:t>
+                        <a:t>Get real information</a:t>
                       </a:r>
                     </a:p>
                   </a:txBody>
@@ -6239,35 +6565,13 @@
                     <a:lstStyle/>
                     <a:p>
                       <a:r>
-                        <a:rPr sz="950" b="1">
+                        <a:rPr sz="1350" b="1">
                           <a:solidFill>
                             <a:srgbClr val="FFFFFF"/>
                           </a:solidFill>
                           <a:latin typeface="Calibri"/>
                         </a:rPr>
-                        <a:t>C  (tidied)</a:t>
-                      </a:r>
-                    </a:p>
-                  </a:txBody>
-                  <a:tcPr>
-                    <a:solidFill>
-                      <a:srgbClr val="4338CA"/>
-                    </a:solidFill>
-                  </a:tcPr>
-                </a:tc>
-                <a:tc>
-                  <a:txBody>
-                    <a:bodyPr/>
-                    <a:lstStyle/>
-                    <a:p>
-                      <a:r>
-                        <a:rPr sz="950" b="1">
-                          <a:solidFill>
-                            <a:srgbClr val="FFFFFF"/>
-                          </a:solidFill>
-                          <a:latin typeface="Calibri"/>
-                        </a:rPr>
-                        <a:t>D  (shipped)</a:t>
+                        <a:t>Then</a:t>
                       </a:r>
                     </a:p>
                   </a:txBody>
@@ -6285,13 +6589,13 @@
                     <a:lstStyle/>
                     <a:p>
                       <a:r>
-                        <a:rPr sz="950" b="0">
+                        <a:rPr sz="1350" b="0">
                           <a:solidFill>
                             <a:srgbClr val="161A23"/>
                           </a:solidFill>
                           <a:latin typeface="Calibri"/>
                         </a:rPr>
-                        <a:t>Preferences Extractor</a:t>
+                        <a:t>1  Lahore to Istanbul</a:t>
                       </a:r>
                     </a:p>
                   </a:txBody>
@@ -6307,13 +6611,13 @@
                     <a:lstStyle/>
                     <a:p>
                       <a:r>
-                        <a:rPr sz="950" b="0">
+                        <a:rPr sz="1350" b="0">
                           <a:solidFill>
                             <a:srgbClr val="161A23"/>
                           </a:solidFill>
                           <a:latin typeface="Calibri"/>
                         </a:rPr>
-                        <a:t>none</a:t>
+                        <a:t>4  Find real flights</a:t>
                       </a:r>
                     </a:p>
                   </a:txBody>
@@ -6329,35 +6633,13 @@
                     <a:lstStyle/>
                     <a:p>
                       <a:r>
-                        <a:rPr sz="950" b="0">
+                        <a:rPr sz="1350" b="0">
                           <a:solidFill>
                             <a:srgbClr val="161A23"/>
                           </a:solidFill>
                           <a:latin typeface="Calibri"/>
                         </a:rPr>
-                        <a:t>none</a:t>
-                      </a:r>
-                    </a:p>
-                  </a:txBody>
-                  <a:tcPr>
-                    <a:solidFill>
-                      <a:srgbClr val="FFFFFF"/>
-                    </a:solidFill>
-                  </a:tcPr>
-                </a:tc>
-                <a:tc>
-                  <a:txBody>
-                    <a:bodyPr/>
-                    <a:lstStyle/>
-                    <a:p>
-                      <a:r>
-                        <a:rPr sz="950" b="0">
-                          <a:solidFill>
-                            <a:srgbClr val="161A23"/>
-                          </a:solidFill>
-                          <a:latin typeface="Calibri"/>
-                        </a:rPr>
-                        <a:t>none</a:t>
+                        <a:t>8  Build the day-by-day plan</a:t>
                       </a:r>
                     </a:p>
                   </a:txBody>
@@ -6375,13 +6657,13 @@
                     <a:lstStyle/>
                     <a:p>
                       <a:r>
-                        <a:rPr sz="950" b="0">
+                        <a:rPr sz="1350" b="0">
                           <a:solidFill>
                             <a:srgbClr val="161A23"/>
                           </a:solidFill>
                           <a:latin typeface="Calibri"/>
                         </a:rPr>
-                        <a:t>Conversation Assistant</a:t>
+                        <a:t>2  The dates</a:t>
                       </a:r>
                     </a:p>
                   </a:txBody>
@@ -6397,13 +6679,13 @@
                     <a:lstStyle/>
                     <a:p>
                       <a:r>
-                        <a:rPr sz="950" b="0">
+                        <a:rPr sz="1350" b="0">
                           <a:solidFill>
                             <a:srgbClr val="161A23"/>
                           </a:solidFill>
                           <a:latin typeface="Calibri"/>
                         </a:rPr>
-                        <a:t>not used</a:t>
+                        <a:t>5  Find real hotels</a:t>
                       </a:r>
                     </a:p>
                   </a:txBody>
@@ -6419,35 +6701,13 @@
                     <a:lstStyle/>
                     <a:p>
                       <a:r>
-                        <a:rPr sz="950" b="0">
+                        <a:rPr sz="1350" b="0">
                           <a:solidFill>
                             <a:srgbClr val="161A23"/>
                           </a:solidFill>
                           <a:latin typeface="Calibri"/>
                         </a:rPr>
-                        <a:t>not used</a:t>
-                      </a:r>
-                    </a:p>
-                  </a:txBody>
-                  <a:tcPr>
-                    <a:solidFill>
-                      <a:srgbClr val="F7F8FC"/>
-                    </a:solidFill>
-                  </a:tcPr>
-                </a:tc>
-                <a:tc>
-                  <a:txBody>
-                    <a:bodyPr/>
-                    <a:lstStyle/>
-                    <a:p>
-                      <a:r>
-                        <a:rPr sz="950" b="0">
-                          <a:solidFill>
-                            <a:srgbClr val="161A23"/>
-                          </a:solidFill>
-                          <a:latin typeface="Calibri"/>
-                        </a:rPr>
-                        <a:t>none</a:t>
+                        <a:t> </a:t>
                       </a:r>
                     </a:p>
                   </a:txBody>
@@ -6465,13 +6725,13 @@
                     <a:lstStyle/>
                     <a:p>
                       <a:r>
-                        <a:rPr sz="950" b="0">
+                        <a:rPr sz="1350" b="0">
                           <a:solidFill>
                             <a:srgbClr val="161A23"/>
                           </a:solidFill>
                           <a:latin typeface="Calibri"/>
                         </a:rPr>
-                        <a:t>Flight Search</a:t>
+                        <a:t>3  The budget</a:t>
                       </a:r>
                     </a:p>
                   </a:txBody>
@@ -6487,13 +6747,13 @@
                     <a:lstStyle/>
                     <a:p>
                       <a:r>
-                        <a:rPr sz="950" b="0">
+                        <a:rPr sz="1350" b="0">
                           <a:solidFill>
                             <a:srgbClr val="161A23"/>
                           </a:solidFill>
                           <a:latin typeface="Calibri"/>
                         </a:rPr>
-                        <a:t>search_comprehensive_flights, search_round_trip_flights, search_internet, calculate</a:t>
+                        <a:t>6  Find real attractions</a:t>
                       </a:r>
                     </a:p>
                   </a:txBody>
@@ -6509,35 +6769,13 @@
                     <a:lstStyle/>
                     <a:p>
                       <a:r>
-                        <a:rPr sz="950" b="0">
+                        <a:rPr sz="1350" b="0">
                           <a:solidFill>
                             <a:srgbClr val="161A23"/>
                           </a:solidFill>
                           <a:latin typeface="Calibri"/>
                         </a:rPr>
-                        <a:t>distilled_search_flights</a:t>
-                      </a:r>
-                    </a:p>
-                  </a:txBody>
-                  <a:tcPr>
-                    <a:solidFill>
-                      <a:srgbClr val="FFFFFF"/>
-                    </a:solidFill>
-                  </a:tcPr>
-                </a:tc>
-                <a:tc>
-                  <a:txBody>
-                    <a:bodyPr/>
-                    <a:lstStyle/>
-                    <a:p>
-                      <a:r>
-                        <a:rPr sz="950" b="0">
-                          <a:solidFill>
-                            <a:srgbClr val="161A23"/>
-                          </a:solidFill>
-                          <a:latin typeface="Calibri"/>
-                        </a:rPr>
-                        <a:t>agent removed</a:t>
+                        <a:t> </a:t>
                       </a:r>
                     </a:p>
                   </a:txBody>
@@ -6555,13 +6793,13 @@
                     <a:lstStyle/>
                     <a:p>
                       <a:r>
-                        <a:rPr sz="950" b="0">
+                        <a:rPr sz="1350" b="0">
                           <a:solidFill>
                             <a:srgbClr val="161A23"/>
                           </a:solidFill>
                           <a:latin typeface="Calibri"/>
                         </a:rPr>
-                        <a:t>Hotel Search</a:t>
+                        <a:t> </a:t>
                       </a:r>
                     </a:p>
                   </a:txBody>
@@ -6577,13 +6815,13 @@
                     <a:lstStyle/>
                     <a:p>
                       <a:r>
-                        <a:rPr sz="950" b="0">
+                        <a:rPr sz="1350" b="0">
                           <a:solidFill>
                             <a:srgbClr val="161A23"/>
                           </a:solidFill>
                           <a:latin typeface="Calibri"/>
                         </a:rPr>
-                        <a:t>search_hotels_comprehensive, search_accommodations_with_location, search_hotel_destination, search_hotels_by_dest_id, get_hotel_reviews, get_attractions_near_hotel, search_internet, calculate</a:t>
+                        <a:t>7  Find real restaurants</a:t>
                       </a:r>
                     </a:p>
                   </a:txBody>
@@ -6599,311 +6837,19 @@
                     <a:lstStyle/>
                     <a:p>
                       <a:r>
-                        <a:rPr sz="950" b="0">
+                        <a:rPr sz="1350" b="0">
                           <a:solidFill>
                             <a:srgbClr val="161A23"/>
                           </a:solidFill>
                           <a:latin typeface="Calibri"/>
                         </a:rPr>
-                        <a:t>distilled_search_hotels</a:t>
+                        <a:t> </a:t>
                       </a:r>
                     </a:p>
                   </a:txBody>
                   <a:tcPr>
                     <a:solidFill>
                       <a:srgbClr val="F7F8FC"/>
-                    </a:solidFill>
-                  </a:tcPr>
-                </a:tc>
-                <a:tc>
-                  <a:txBody>
-                    <a:bodyPr/>
-                    <a:lstStyle/>
-                    <a:p>
-                      <a:r>
-                        <a:rPr sz="950" b="0">
-                          <a:solidFill>
-                            <a:srgbClr val="161A23"/>
-                          </a:solidFill>
-                          <a:latin typeface="Calibri"/>
-                        </a:rPr>
-                        <a:t>agent removed</a:t>
-                      </a:r>
-                    </a:p>
-                  </a:txBody>
-                  <a:tcPr>
-                    <a:solidFill>
-                      <a:srgbClr val="F7F8FC"/>
-                    </a:solidFill>
-                  </a:tcPr>
-                </a:tc>
-              </a:tr>
-              <a:tr h="365760">
-                <a:tc>
-                  <a:txBody>
-                    <a:bodyPr/>
-                    <a:lstStyle/>
-                    <a:p>
-                      <a:r>
-                        <a:rPr sz="950" b="0">
-                          <a:solidFill>
-                            <a:srgbClr val="161A23"/>
-                          </a:solidFill>
-                          <a:latin typeface="Calibri"/>
-                        </a:rPr>
-                        <a:t>Activities</a:t>
-                      </a:r>
-                    </a:p>
-                  </a:txBody>
-                  <a:tcPr>
-                    <a:solidFill>
-                      <a:srgbClr val="FFFFFF"/>
-                    </a:solidFill>
-                  </a:tcPr>
-                </a:tc>
-                <a:tc>
-                  <a:txBody>
-                    <a:bodyPr/>
-                    <a:lstStyle/>
-                    <a:p>
-                      <a:r>
-                        <a:rPr sz="950" b="0">
-                          <a:solidFill>
-                            <a:srgbClr val="161A23"/>
-                          </a:solidFill>
-                          <a:latin typeface="Calibri"/>
-                        </a:rPr>
-                        <a:t>search_attractions, search_restaurants, search_internet, calculate</a:t>
-                      </a:r>
-                    </a:p>
-                  </a:txBody>
-                  <a:tcPr>
-                    <a:solidFill>
-                      <a:srgbClr val="FFFFFF"/>
-                    </a:solidFill>
-                  </a:tcPr>
-                </a:tc>
-                <a:tc>
-                  <a:txBody>
-                    <a:bodyPr/>
-                    <a:lstStyle/>
-                    <a:p>
-                      <a:r>
-                        <a:rPr sz="950" b="0">
-                          <a:solidFill>
-                            <a:srgbClr val="161A23"/>
-                          </a:solidFill>
-                          <a:latin typeface="Calibri"/>
-                        </a:rPr>
-                        <a:t>distilled_search_attractions, distilled_search_restaurants</a:t>
-                      </a:r>
-                    </a:p>
-                  </a:txBody>
-                  <a:tcPr>
-                    <a:solidFill>
-                      <a:srgbClr val="FFFFFF"/>
-                    </a:solidFill>
-                  </a:tcPr>
-                </a:tc>
-                <a:tc>
-                  <a:txBody>
-                    <a:bodyPr/>
-                    <a:lstStyle/>
-                    <a:p>
-                      <a:r>
-                        <a:rPr sz="950" b="0">
-                          <a:solidFill>
-                            <a:srgbClr val="161A23"/>
-                          </a:solidFill>
-                          <a:latin typeface="Calibri"/>
-                        </a:rPr>
-                        <a:t>agent removed</a:t>
-                      </a:r>
-                    </a:p>
-                  </a:txBody>
-                  <a:tcPr>
-                    <a:solidFill>
-                      <a:srgbClr val="FFFFFF"/>
-                    </a:solidFill>
-                  </a:tcPr>
-                </a:tc>
-              </a:tr>
-              <a:tr h="365760">
-                <a:tc>
-                  <a:txBody>
-                    <a:bodyPr/>
-                    <a:lstStyle/>
-                    <a:p>
-                      <a:r>
-                        <a:rPr sz="950" b="0">
-                          <a:solidFill>
-                            <a:srgbClr val="161A23"/>
-                          </a:solidFill>
-                          <a:latin typeface="Calibri"/>
-                        </a:rPr>
-                        <a:t>Itinerary Coordinator</a:t>
-                      </a:r>
-                    </a:p>
-                  </a:txBody>
-                  <a:tcPr>
-                    <a:solidFill>
-                      <a:srgbClr val="F7F8FC"/>
-                    </a:solidFill>
-                  </a:tcPr>
-                </a:tc>
-                <a:tc>
-                  <a:txBody>
-                    <a:bodyPr/>
-                    <a:lstStyle/>
-                    <a:p>
-                      <a:r>
-                        <a:rPr sz="950" b="0">
-                          <a:solidFill>
-                            <a:srgbClr val="161A23"/>
-                          </a:solidFill>
-                          <a:latin typeface="Calibri"/>
-                        </a:rPr>
-                        <a:t>calculate, search_internet, search_attractions, search_restaurants</a:t>
-                      </a:r>
-                    </a:p>
-                  </a:txBody>
-                  <a:tcPr>
-                    <a:solidFill>
-                      <a:srgbClr val="F7F8FC"/>
-                    </a:solidFill>
-                  </a:tcPr>
-                </a:tc>
-                <a:tc>
-                  <a:txBody>
-                    <a:bodyPr/>
-                    <a:lstStyle/>
-                    <a:p>
-                      <a:r>
-                        <a:rPr sz="950" b="0">
-                          <a:solidFill>
-                            <a:srgbClr val="161A23"/>
-                          </a:solidFill>
-                          <a:latin typeface="Calibri"/>
-                        </a:rPr>
-                        <a:t>none</a:t>
-                      </a:r>
-                    </a:p>
-                  </a:txBody>
-                  <a:tcPr>
-                    <a:solidFill>
-                      <a:srgbClr val="F7F8FC"/>
-                    </a:solidFill>
-                  </a:tcPr>
-                </a:tc>
-                <a:tc>
-                  <a:txBody>
-                    <a:bodyPr/>
-                    <a:lstStyle/>
-                    <a:p>
-                      <a:r>
-                        <a:rPr sz="950" b="0">
-                          <a:solidFill>
-                            <a:srgbClr val="161A23"/>
-                          </a:solidFill>
-                          <a:latin typeface="Calibri"/>
-                        </a:rPr>
-                        <a:t>calculate, search_internet, search_attractions, search_restaurants</a:t>
-                      </a:r>
-                    </a:p>
-                  </a:txBody>
-                  <a:tcPr>
-                    <a:solidFill>
-                      <a:srgbClr val="F7F8FC"/>
-                    </a:solidFill>
-                  </a:tcPr>
-                </a:tc>
-              </a:tr>
-              <a:tr h="365760">
-                <a:tc>
-                  <a:txBody>
-                    <a:bodyPr/>
-                    <a:lstStyle/>
-                    <a:p>
-                      <a:r>
-                        <a:rPr sz="950" b="0">
-                          <a:solidFill>
-                            <a:srgbClr val="161A23"/>
-                          </a:solidFill>
-                          <a:latin typeface="Calibri"/>
-                        </a:rPr>
-                        <a:t>TOTAL TOOLS</a:t>
-                      </a:r>
-                    </a:p>
-                  </a:txBody>
-                  <a:tcPr>
-                    <a:solidFill>
-                      <a:srgbClr val="FFFFFF"/>
-                    </a:solidFill>
-                  </a:tcPr>
-                </a:tc>
-                <a:tc>
-                  <a:txBody>
-                    <a:bodyPr/>
-                    <a:lstStyle/>
-                    <a:p>
-                      <a:r>
-                        <a:rPr sz="950" b="0">
-                          <a:solidFill>
-                            <a:srgbClr val="161A23"/>
-                          </a:solidFill>
-                          <a:latin typeface="Calibri"/>
-                        </a:rPr>
-                        <a:t>20</a:t>
-                      </a:r>
-                    </a:p>
-                  </a:txBody>
-                  <a:tcPr>
-                    <a:solidFill>
-                      <a:srgbClr val="FFFFFF"/>
-                    </a:solidFill>
-                  </a:tcPr>
-                </a:tc>
-                <a:tc>
-                  <a:txBody>
-                    <a:bodyPr/>
-                    <a:lstStyle/>
-                    <a:p>
-                      <a:r>
-                        <a:rPr sz="950" b="0">
-                          <a:solidFill>
-                            <a:srgbClr val="161A23"/>
-                          </a:solidFill>
-                          <a:latin typeface="Calibri"/>
-                        </a:rPr>
-                        <a:t>4</a:t>
-                      </a:r>
-                    </a:p>
-                  </a:txBody>
-                  <a:tcPr>
-                    <a:solidFill>
-                      <a:srgbClr val="FFFFFF"/>
-                    </a:solidFill>
-                  </a:tcPr>
-                </a:tc>
-                <a:tc>
-                  <a:txBody>
-                    <a:bodyPr/>
-                    <a:lstStyle/>
-                    <a:p>
-                      <a:r>
-                        <a:rPr sz="950" b="0">
-                          <a:solidFill>
-                            <a:srgbClr val="161A23"/>
-                          </a:solidFill>
-                          <a:latin typeface="Calibri"/>
-                        </a:rPr>
-                        <a:t>4</a:t>
-                      </a:r>
-                    </a:p>
-                  </a:txBody>
-                  <a:tcPr>
-                    <a:solidFill>
-                      <a:srgbClr val="FFFFFF"/>
                     </a:solidFill>
                   </a:tcPr>
                 </a:tc>
@@ -6914,14 +6860,14 @@
       </p:graphicFrame>
       <p:sp>
         <p:nvSpPr>
-          <p:cNvPr id="6" name="TextBox 5"/>
+          <p:cNvPr id="7" name="TextBox 6"/>
           <p:cNvSpPr txBox="1"/>
           <p:nvPr/>
         </p:nvSpPr>
         <p:spPr>
           <a:xfrm>
-            <a:off x="822960" y="5852160"/>
-            <a:ext cx="10515600" cy="640080"/>
+            <a:off x="822960" y="5029200"/>
+            <a:ext cx="10515600" cy="1280160"/>
           </a:xfrm>
           <a:prstGeom prst="rect">
             <a:avLst/>
@@ -6936,17 +6882,33 @@
           <a:p>
             <a:pPr algn="l">
               <a:lnSpc>
-                <a:spcPct val="100000"/>
+                <a:spcPct val="130000"/>
               </a:lnSpc>
             </a:pPr>
             <a:r>
-              <a:rPr sz="1600" b="1">
+              <a:rPr sz="1600" b="0">
                 <a:solidFill>
-                  <a:srgbClr val="161A23"/>
+                  <a:srgbClr val="545C6E"/>
                 </a:solidFill>
                 <a:latin typeface="Calibri"/>
               </a:rPr>
-              <a:t>The hotel agent alone had 8 tools. Every time it thinks, all 8 tool descriptions are sent to the AI again.</a:t>
+              <a:t>So the real question is:</a:t>
+            </a:r>
+          </a:p>
+          <a:p>
+            <a:pPr algn="l">
+              <a:lnSpc>
+                <a:spcPct val="130000"/>
+              </a:lnSpc>
+            </a:pPr>
+            <a:r>
+              <a:rPr sz="2100" b="1">
+                <a:solidFill>
+                  <a:srgbClr val="4338CA"/>
+                </a:solidFill>
+                <a:latin typeface="Calibri"/>
+              </a:rPr>
+              <a:t>Should AI decide when to search for flights and hotels, or should normal code just do it?</a:t>
             </a:r>
           </a:p>
         </p:txBody>
@@ -6959,7 +6921,7 @@
 </p:sld>
 </file>
 
-<file path=ppt/slides/slide5.xml><?xml version="1.0" encoding="utf-8"?>
+<file path=ppt/slides/slide3.xml><?xml version="1.0" encoding="utf-8"?>
 <p:sld xmlns:a="http://schemas.openxmlformats.org/drawingml/2006/main" xmlns:p="http://schemas.openxmlformats.org/presentationml/2006/main" xmlns:r="http://schemas.openxmlformats.org/officeDocument/2006/relationships">
   <p:cSld>
     <p:spTree>
@@ -7003,7 +6965,7 @@
                 </a:solidFill>
                 <a:latin typeface="Calibri"/>
               </a:rPr>
-              <a:t>4  ·  HOW MANY AI CALLS EACH ONE MAKES</a:t>
+              <a:t>2  ·  THE AGENTS WE USE</a:t>
             </a:r>
           </a:p>
         </p:txBody>
@@ -7042,7 +7004,7 @@
                 </a:solidFill>
                 <a:latin typeface="Calibri"/>
               </a:rPr>
-              <a:t>Per trip planned</a:t>
+              <a:t>Each has a name and one job</a:t>
             </a:r>
           </a:p>
         </p:txBody>
@@ -7100,8 +7062,8 @@
           <p:nvPr/>
         </p:nvGraphicFramePr>
         <p:xfrm>
-          <a:off x="822960" y="2103120"/>
-          <a:ext cx="10515598" cy="1828800"/>
+          <a:off x="822960" y="2011680"/>
+          <a:ext cx="10515598" cy="2560320"/>
         </p:xfrm>
         <a:graphic>
           <a:graphicData uri="http://schemas.openxmlformats.org/drawingml/2006/table">
@@ -7110,11 +7072,9 @@
                 <a:tableStyleId>{5C22544A-7EE6-4342-B048-85BDC9FD1C3A}</a:tableStyleId>
               </a:tblPr>
               <a:tblGrid>
-                <a:gridCol w="510466"/>
-                <a:gridCol w="3471168"/>
-                <a:gridCol w="1633491"/>
-                <a:gridCol w="2654423"/>
-                <a:gridCol w="2246050"/>
+                <a:gridCol w="3250276"/>
+                <a:gridCol w="4397432"/>
+                <a:gridCol w="2867890"/>
               </a:tblGrid>
               <a:tr h="365760">
                 <a:tc>
@@ -7123,13 +7083,13 @@
                     <a:lstStyle/>
                     <a:p>
                       <a:r>
-                        <a:rPr sz="1400" b="1">
+                        <a:rPr sz="1300" b="1">
                           <a:solidFill>
                             <a:srgbClr val="FFFFFF"/>
                           </a:solidFill>
                           <a:latin typeface="Calibri"/>
                         </a:rPr>
-                        <a:t> </a:t>
+                        <a:t>Agent</a:t>
                       </a:r>
                     </a:p>
                   </a:txBody>
@@ -7145,13 +7105,13 @@
                     <a:lstStyle/>
                     <a:p>
                       <a:r>
-                        <a:rPr sz="1400" b="1">
+                        <a:rPr sz="1300" b="1">
                           <a:solidFill>
                             <a:srgbClr val="FFFFFF"/>
                           </a:solidFill>
                           <a:latin typeface="Calibri"/>
                         </a:rPr>
-                        <a:t>Approach</a:t>
+                        <a:t>What it does</a:t>
                       </a:r>
                     </a:p>
                   </a:txBody>
@@ -7167,57 +7127,13 @@
                     <a:lstStyle/>
                     <a:p>
                       <a:r>
-                        <a:rPr sz="1400" b="1">
+                        <a:rPr sz="1300" b="1">
                           <a:solidFill>
                             <a:srgbClr val="FFFFFF"/>
                           </a:solidFill>
                           <a:latin typeface="Calibri"/>
                         </a:rPr>
-                        <a:t>AI calls</a:t>
-                      </a:r>
-                    </a:p>
-                  </a:txBody>
-                  <a:tcPr>
-                    <a:solidFill>
-                      <a:srgbClr val="4338CA"/>
-                    </a:solidFill>
-                  </a:tcPr>
-                </a:tc>
-                <a:tc>
-                  <a:txBody>
-                    <a:bodyPr/>
-                    <a:lstStyle/>
-                    <a:p>
-                      <a:r>
-                        <a:rPr sz="1400" b="1">
-                          <a:solidFill>
-                            <a:srgbClr val="FFFFFF"/>
-                          </a:solidFill>
-                          <a:latin typeface="Calibri"/>
-                        </a:rPr>
-                        <a:t>Text sent to the AI</a:t>
-                      </a:r>
-                    </a:p>
-                  </a:txBody>
-                  <a:tcPr>
-                    <a:solidFill>
-                      <a:srgbClr val="4338CA"/>
-                    </a:solidFill>
-                  </a:tcPr>
-                </a:tc>
-                <a:tc>
-                  <a:txBody>
-                    <a:bodyPr/>
-                    <a:lstStyle/>
-                    <a:p>
-                      <a:r>
-                        <a:rPr sz="1400" b="1">
-                          <a:solidFill>
-                            <a:srgbClr val="FFFFFF"/>
-                          </a:solidFill>
-                          <a:latin typeface="Calibri"/>
-                        </a:rPr>
-                        <a:t>Cost per trip</a:t>
+                        <a:t>Needs AI?</a:t>
                       </a:r>
                     </a:p>
                   </a:txBody>
@@ -7235,13 +7151,13 @@
                     <a:lstStyle/>
                     <a:p>
                       <a:r>
-                        <a:rPr sz="1400" b="0">
+                        <a:rPr sz="1300" b="0">
                           <a:solidFill>
                             <a:srgbClr val="161A23"/>
                           </a:solidFill>
                           <a:latin typeface="Calibri"/>
                         </a:rPr>
-                        <a:t>A</a:t>
+                        <a:t>Travel Conversation Assistant</a:t>
                       </a:r>
                     </a:p>
                   </a:txBody>
@@ -7257,13 +7173,13 @@
                     <a:lstStyle/>
                     <a:p>
                       <a:r>
-                        <a:rPr sz="1400" b="0">
+                        <a:rPr sz="1300" b="0">
                           <a:solidFill>
                             <a:srgbClr val="161A23"/>
                           </a:solidFill>
                           <a:latin typeface="Calibri"/>
                         </a:rPr>
-                        <a:t>One AI, no tools</a:t>
+                        <a:t>Asks for anything missing</a:t>
                       </a:r>
                     </a:p>
                   </a:txBody>
@@ -7279,57 +7195,13 @@
                     <a:lstStyle/>
                     <a:p>
                       <a:r>
-                        <a:rPr sz="1400" b="0">
+                        <a:rPr sz="1300" b="0">
                           <a:solidFill>
                             <a:srgbClr val="161A23"/>
                           </a:solidFill>
                           <a:latin typeface="Calibri"/>
                         </a:rPr>
-                        <a:t>1</a:t>
-                      </a:r>
-                    </a:p>
-                  </a:txBody>
-                  <a:tcPr>
-                    <a:solidFill>
-                      <a:srgbClr val="FFFFFF"/>
-                    </a:solidFill>
-                  </a:tcPr>
-                </a:tc>
-                <a:tc>
-                  <a:txBody>
-                    <a:bodyPr/>
-                    <a:lstStyle/>
-                    <a:p>
-                      <a:r>
-                        <a:rPr sz="1400" b="0">
-                          <a:solidFill>
-                            <a:srgbClr val="161A23"/>
-                          </a:solidFill>
-                          <a:latin typeface="Calibri"/>
-                        </a:rPr>
-                        <a:t>4,644</a:t>
-                      </a:r>
-                    </a:p>
-                  </a:txBody>
-                  <a:tcPr>
-                    <a:solidFill>
-                      <a:srgbClr val="FFFFFF"/>
-                    </a:solidFill>
-                  </a:tcPr>
-                </a:tc>
-                <a:tc>
-                  <a:txBody>
-                    <a:bodyPr/>
-                    <a:lstStyle/>
-                    <a:p>
-                      <a:r>
-                        <a:rPr sz="1400" b="0">
-                          <a:solidFill>
-                            <a:srgbClr val="161A23"/>
-                          </a:solidFill>
-                          <a:latin typeface="Calibri"/>
-                        </a:rPr>
-                        <a:t>$0.017</a:t>
+                        <a:t>Yes - people write in many ways</a:t>
                       </a:r>
                     </a:p>
                   </a:txBody>
@@ -7347,13 +7219,13 @@
                     <a:lstStyle/>
                     <a:p>
                       <a:r>
-                        <a:rPr sz="1400" b="0">
+                        <a:rPr sz="1300" b="0">
                           <a:solidFill>
                             <a:srgbClr val="161A23"/>
                           </a:solidFill>
                           <a:latin typeface="Calibri"/>
                         </a:rPr>
-                        <a:t>B</a:t>
+                        <a:t>Travel Preferences Extractor</a:t>
                       </a:r>
                     </a:p>
                   </a:txBody>
@@ -7369,13 +7241,13 @@
                     <a:lstStyle/>
                     <a:p>
                       <a:r>
-                        <a:rPr sz="1400" b="0">
+                        <a:rPr sz="1300" b="0">
                           <a:solidFill>
                             <a:srgbClr val="161A23"/>
                           </a:solidFill>
                           <a:latin typeface="Calibri"/>
                         </a:rPr>
-                        <a:t>Six agents, first try</a:t>
+                        <a:t>Turns those words into exact fields</a:t>
                       </a:r>
                     </a:p>
                   </a:txBody>
@@ -7391,57 +7263,13 @@
                     <a:lstStyle/>
                     <a:p>
                       <a:r>
-                        <a:rPr sz="1400" b="0">
+                        <a:rPr sz="1300" b="0">
                           <a:solidFill>
                             <a:srgbClr val="161A23"/>
                           </a:solidFill>
                           <a:latin typeface="Calibri"/>
                         </a:rPr>
-                        <a:t>21</a:t>
-                      </a:r>
-                    </a:p>
-                  </a:txBody>
-                  <a:tcPr>
-                    <a:solidFill>
-                      <a:srgbClr val="F7F8FC"/>
-                    </a:solidFill>
-                  </a:tcPr>
-                </a:tc>
-                <a:tc>
-                  <a:txBody>
-                    <a:bodyPr/>
-                    <a:lstStyle/>
-                    <a:p>
-                      <a:r>
-                        <a:rPr sz="1400" b="0">
-                          <a:solidFill>
-                            <a:srgbClr val="161A23"/>
-                          </a:solidFill>
-                          <a:latin typeface="Calibri"/>
-                        </a:rPr>
-                        <a:t>120,703</a:t>
-                      </a:r>
-                    </a:p>
-                  </a:txBody>
-                  <a:tcPr>
-                    <a:solidFill>
-                      <a:srgbClr val="F7F8FC"/>
-                    </a:solidFill>
-                  </a:tcPr>
-                </a:tc>
-                <a:tc>
-                  <a:txBody>
-                    <a:bodyPr/>
-                    <a:lstStyle/>
-                    <a:p>
-                      <a:r>
-                        <a:rPr sz="1400" b="0">
-                          <a:solidFill>
-                            <a:srgbClr val="161A23"/>
-                          </a:solidFill>
-                          <a:latin typeface="Calibri"/>
-                        </a:rPr>
-                        <a:t>$0.186</a:t>
+                        <a:t>Yes - same reason</a:t>
                       </a:r>
                     </a:p>
                   </a:txBody>
@@ -7459,13 +7287,13 @@
                     <a:lstStyle/>
                     <a:p>
                       <a:r>
-                        <a:rPr sz="1400" b="0">
+                        <a:rPr sz="1300" b="0">
                           <a:solidFill>
                             <a:srgbClr val="161A23"/>
                           </a:solidFill>
                           <a:latin typeface="Calibri"/>
                         </a:rPr>
-                        <a:t>C</a:t>
+                        <a:t>Flight Search Specialist</a:t>
                       </a:r>
                     </a:p>
                   </a:txBody>
@@ -7481,13 +7309,13 @@
                     <a:lstStyle/>
                     <a:p>
                       <a:r>
-                        <a:rPr sz="1400" b="0">
+                        <a:rPr sz="1300" b="0">
                           <a:solidFill>
                             <a:srgbClr val="161A23"/>
                           </a:solidFill>
                           <a:latin typeface="Calibri"/>
                         </a:rPr>
-                        <a:t>Six agents, tidied up</a:t>
+                        <a:t>Looks up flights</a:t>
                       </a:r>
                     </a:p>
                   </a:txBody>
@@ -7503,57 +7331,13 @@
                     <a:lstStyle/>
                     <a:p>
                       <a:r>
-                        <a:rPr sz="1400" b="0">
+                        <a:rPr sz="1300" b="0">
                           <a:solidFill>
                             <a:srgbClr val="161A23"/>
                           </a:solidFill>
                           <a:latin typeface="Calibri"/>
                         </a:rPr>
-                        <a:t>10</a:t>
-                      </a:r>
-                    </a:p>
-                  </a:txBody>
-                  <a:tcPr>
-                    <a:solidFill>
-                      <a:srgbClr val="FFFFFF"/>
-                    </a:solidFill>
-                  </a:tcPr>
-                </a:tc>
-                <a:tc>
-                  <a:txBody>
-                    <a:bodyPr/>
-                    <a:lstStyle/>
-                    <a:p>
-                      <a:r>
-                        <a:rPr sz="1400" b="0">
-                          <a:solidFill>
-                            <a:srgbClr val="161A23"/>
-                          </a:solidFill>
-                          <a:latin typeface="Calibri"/>
-                        </a:rPr>
-                        <a:t>13,521</a:t>
-                      </a:r>
-                    </a:p>
-                  </a:txBody>
-                  <a:tcPr>
-                    <a:solidFill>
-                      <a:srgbClr val="FFFFFF"/>
-                    </a:solidFill>
-                  </a:tcPr>
-                </a:tc>
-                <a:tc>
-                  <a:txBody>
-                    <a:bodyPr/>
-                    <a:lstStyle/>
-                    <a:p>
-                      <a:r>
-                        <a:rPr sz="1400" b="0">
-                          <a:solidFill>
-                            <a:srgbClr val="161A23"/>
-                          </a:solidFill>
-                          <a:latin typeface="Calibri"/>
-                        </a:rPr>
-                        <a:t>$0.031</a:t>
+                        <a:t>No</a:t>
                       </a:r>
                     </a:p>
                   </a:txBody>
@@ -7571,13 +7355,13 @@
                     <a:lstStyle/>
                     <a:p>
                       <a:r>
-                        <a:rPr sz="1400" b="0">
+                        <a:rPr sz="1300" b="0">
                           <a:solidFill>
                             <a:srgbClr val="161A23"/>
                           </a:solidFill>
                           <a:latin typeface="Calibri"/>
                         </a:rPr>
-                        <a:t>D</a:t>
+                        <a:t>Hotel Search Specialist</a:t>
                       </a:r>
                     </a:p>
                   </a:txBody>
@@ -7593,13 +7377,13 @@
                     <a:lstStyle/>
                     <a:p>
                       <a:r>
-                        <a:rPr sz="1400" b="0">
+                        <a:rPr sz="1300" b="0">
                           <a:solidFill>
                             <a:srgbClr val="161A23"/>
                           </a:solidFill>
                           <a:latin typeface="Calibri"/>
                         </a:rPr>
-                        <a:t>Three agents  (shipped)</a:t>
+                        <a:t>Looks up hotels</a:t>
                       </a:r>
                     </a:p>
                   </a:txBody>
@@ -7615,13 +7399,13 @@
                     <a:lstStyle/>
                     <a:p>
                       <a:r>
-                        <a:rPr sz="1400" b="0">
+                        <a:rPr sz="1300" b="0">
                           <a:solidFill>
                             <a:srgbClr val="161A23"/>
                           </a:solidFill>
                           <a:latin typeface="Calibri"/>
                         </a:rPr>
-                        <a:t>2</a:t>
+                        <a:t>No</a:t>
                       </a:r>
                     </a:p>
                   </a:txBody>
@@ -7631,19 +7415,89 @@
                     </a:solidFill>
                   </a:tcPr>
                 </a:tc>
-                <a:tc>
-                  <a:txBody>
-                    <a:bodyPr/>
-                    <a:lstStyle/>
-                    <a:p>
-                      <a:r>
-                        <a:rPr sz="1400" b="0">
+              </a:tr>
+              <a:tr h="365760">
+                <a:tc>
+                  <a:txBody>
+                    <a:bodyPr/>
+                    <a:lstStyle/>
+                    <a:p>
+                      <a:r>
+                        <a:rPr sz="1300" b="0">
                           <a:solidFill>
                             <a:srgbClr val="161A23"/>
                           </a:solidFill>
                           <a:latin typeface="Calibri"/>
                         </a:rPr>
-                        <a:t>7,840</a:t>
+                        <a:t>Activities Specialist</a:t>
+                      </a:r>
+                    </a:p>
+                  </a:txBody>
+                  <a:tcPr>
+                    <a:solidFill>
+                      <a:srgbClr val="FFFFFF"/>
+                    </a:solidFill>
+                  </a:tcPr>
+                </a:tc>
+                <a:tc>
+                  <a:txBody>
+                    <a:bodyPr/>
+                    <a:lstStyle/>
+                    <a:p>
+                      <a:r>
+                        <a:rPr sz="1300" b="0">
+                          <a:solidFill>
+                            <a:srgbClr val="161A23"/>
+                          </a:solidFill>
+                          <a:latin typeface="Calibri"/>
+                        </a:rPr>
+                        <a:t>Looks up places to visit and eat</a:t>
+                      </a:r>
+                    </a:p>
+                  </a:txBody>
+                  <a:tcPr>
+                    <a:solidFill>
+                      <a:srgbClr val="FFFFFF"/>
+                    </a:solidFill>
+                  </a:tcPr>
+                </a:tc>
+                <a:tc>
+                  <a:txBody>
+                    <a:bodyPr/>
+                    <a:lstStyle/>
+                    <a:p>
+                      <a:r>
+                        <a:rPr sz="1300" b="0">
+                          <a:solidFill>
+                            <a:srgbClr val="161A23"/>
+                          </a:solidFill>
+                          <a:latin typeface="Calibri"/>
+                        </a:rPr>
+                        <a:t>No</a:t>
+                      </a:r>
+                    </a:p>
+                  </a:txBody>
+                  <a:tcPr>
+                    <a:solidFill>
+                      <a:srgbClr val="FFFFFF"/>
+                    </a:solidFill>
+                  </a:tcPr>
+                </a:tc>
+              </a:tr>
+              <a:tr h="365760">
+                <a:tc>
+                  <a:txBody>
+                    <a:bodyPr/>
+                    <a:lstStyle/>
+                    <a:p>
+                      <a:r>
+                        <a:rPr sz="1300" b="0">
+                          <a:solidFill>
+                            <a:srgbClr val="161A23"/>
+                          </a:solidFill>
+                          <a:latin typeface="Calibri"/>
+                        </a:rPr>
+                        <a:t>Itinerary Coordinator</a:t>
                       </a:r>
                     </a:p>
                   </a:txBody>
@@ -7659,13 +7513,35 @@
                     <a:lstStyle/>
                     <a:p>
                       <a:r>
-                        <a:rPr sz="1400" b="0">
+                        <a:rPr sz="1300" b="0">
                           <a:solidFill>
                             <a:srgbClr val="161A23"/>
                           </a:solidFill>
                           <a:latin typeface="Calibri"/>
                         </a:rPr>
-                        <a:t>$0.018</a:t>
+                        <a:t>Writes the day-by-day plan</a:t>
+                      </a:r>
+                    </a:p>
+                  </a:txBody>
+                  <a:tcPr>
+                    <a:solidFill>
+                      <a:srgbClr val="F7F8FC"/>
+                    </a:solidFill>
+                  </a:tcPr>
+                </a:tc>
+                <a:tc>
+                  <a:txBody>
+                    <a:bodyPr/>
+                    <a:lstStyle/>
+                    <a:p>
+                      <a:r>
+                        <a:rPr sz="1300" b="0">
+                          <a:solidFill>
+                            <a:srgbClr val="161A23"/>
+                          </a:solidFill>
+                          <a:latin typeface="Calibri"/>
+                        </a:rPr>
+                        <a:t>Yes - which day, what order</a:t>
                       </a:r>
                     </a:p>
                   </a:txBody>
@@ -7688,8 +7564,8 @@
         </p:nvSpPr>
         <p:spPr>
           <a:xfrm>
-            <a:off x="822960" y="4480560"/>
-            <a:ext cx="10515600" cy="1463040"/>
+            <a:off x="822960" y="5394960"/>
+            <a:ext cx="10515600" cy="822960"/>
           </a:xfrm>
           <a:prstGeom prst="rect">
             <a:avLst/>
@@ -7704,49 +7580,17 @@
           <a:p>
             <a:pPr algn="l">
               <a:lnSpc>
-                <a:spcPct val="125000"/>
+                <a:spcPct val="100000"/>
               </a:lnSpc>
             </a:pPr>
             <a:r>
-              <a:rPr sz="2600" b="1">
+              <a:rPr sz="1900" b="1">
                 <a:solidFill>
                   <a:srgbClr val="4338CA"/>
                 </a:solidFill>
                 <a:latin typeface="Calibri"/>
               </a:rPr>
-              <a:t>B needs 21 AI calls. D needs 2.</a:t>
-            </a:r>
-          </a:p>
-          <a:p>
-            <a:pPr algn="l">
-              <a:lnSpc>
-                <a:spcPct val="125000"/>
-              </a:lnSpc>
-            </a:pPr>
-            <a:r>
-              <a:rPr sz="600" b="0">
-                <a:solidFill>
-                  <a:srgbClr val="161A23"/>
-                </a:solidFill>
-                <a:latin typeface="Calibri"/>
-              </a:rPr>
-              <a:t/>
-            </a:r>
-          </a:p>
-          <a:p>
-            <a:pPr algn="l">
-              <a:lnSpc>
-                <a:spcPct val="125000"/>
-              </a:lnSpc>
-            </a:pPr>
-            <a:r>
-              <a:rPr sz="1900" b="0">
-                <a:solidFill>
-                  <a:srgbClr val="545C6E"/>
-                </a:solidFill>
-                <a:latin typeface="Calibri"/>
-              </a:rPr>
-              <a:t>That is 15 times less text, for the same finished plan.</a:t>
+              <a:t>Looking something up does not need thinking. Only three of the six really need AI.</a:t>
             </a:r>
           </a:p>
         </p:txBody>
@@ -7759,7 +7603,7 @@
 </p:sld>
 </file>
 
-<file path=ppt/slides/slide6.xml><?xml version="1.0" encoding="utf-8"?>
+<file path=ppt/slides/slide4.xml><?xml version="1.0" encoding="utf-8"?>
 <p:sld xmlns:a="http://schemas.openxmlformats.org/drawingml/2006/main" xmlns:p="http://schemas.openxmlformats.org/presentationml/2006/main" xmlns:r="http://schemas.openxmlformats.org/officeDocument/2006/relationships">
   <p:cSld>
     <p:spTree>
@@ -7803,7 +7647,7 @@
                 </a:solidFill>
                 <a:latin typeface="Calibri"/>
               </a:rPr>
-              <a:t>5  ·  WHAT THE USER SEES</a:t>
+              <a:t>3  ·  I BUILT IT FOUR WAYS</a:t>
             </a:r>
           </a:p>
         </p:txBody>
@@ -7842,7 +7686,7 @@
                 </a:solidFill>
                 <a:latin typeface="Calibri"/>
               </a:rPr>
-              <a:t>One form, live progress, the plan in tabs</a:t>
+              <a:t>Same request, same data</a:t>
             </a:r>
           </a:p>
         </p:txBody>
@@ -7891,30 +7735,595 @@
           </a:p>
         </p:txBody>
       </p:sp>
-      <p:pic>
-        <p:nvPicPr>
-          <p:cNvPr id="5" name="Picture 4" descr="frontend.png"/>
-          <p:cNvPicPr>
-            <a:picLocks noChangeAspect="1"/>
-          </p:cNvPicPr>
+      <p:graphicFrame>
+        <p:nvGraphicFramePr>
+          <p:cNvPr id="5" name="Table 4"/>
+          <p:cNvGraphicFramePr>
+            <a:graphicFrameLocks noGrp="1"/>
+          </p:cNvGraphicFramePr>
           <p:nvPr/>
-        </p:nvPicPr>
-        <p:blipFill>
-          <a:blip r:embed="rId2"/>
-          <a:stretch>
-            <a:fillRect/>
-          </a:stretch>
-        </p:blipFill>
-        <p:spPr>
-          <a:xfrm>
-            <a:off x="2352101" y="1783080"/>
-            <a:ext cx="7487493" cy="4297680"/>
-          </a:xfrm>
-          <a:prstGeom prst="rect">
-            <a:avLst/>
-          </a:prstGeom>
-        </p:spPr>
-      </p:pic>
+        </p:nvGraphicFramePr>
+        <p:xfrm>
+          <a:off x="822960" y="2011680"/>
+          <a:ext cx="10515598" cy="1828800"/>
+        </p:xfrm>
+        <a:graphic>
+          <a:graphicData uri="http://schemas.openxmlformats.org/drawingml/2006/table">
+            <a:tbl>
+              <a:tblPr firstRow="1" bandRow="1">
+                <a:tableStyleId>{5C22544A-7EE6-4342-B048-85BDC9FD1C3A}</a:tableStyleId>
+              </a:tblPr>
+              <a:tblGrid>
+                <a:gridCol w="382385"/>
+                <a:gridCol w="1911927"/>
+                <a:gridCol w="3728258"/>
+                <a:gridCol w="860367"/>
+                <a:gridCol w="3632661"/>
+              </a:tblGrid>
+              <a:tr h="365760">
+                <a:tc>
+                  <a:txBody>
+                    <a:bodyPr/>
+                    <a:lstStyle/>
+                    <a:p>
+                      <a:r>
+                        <a:rPr sz="1300" b="1">
+                          <a:solidFill>
+                            <a:srgbClr val="FFFFFF"/>
+                          </a:solidFill>
+                          <a:latin typeface="Calibri"/>
+                        </a:rPr>
+                        <a:t> </a:t>
+                      </a:r>
+                    </a:p>
+                  </a:txBody>
+                  <a:tcPr>
+                    <a:solidFill>
+                      <a:srgbClr val="4338CA"/>
+                    </a:solidFill>
+                  </a:tcPr>
+                </a:tc>
+                <a:tc>
+                  <a:txBody>
+                    <a:bodyPr/>
+                    <a:lstStyle/>
+                    <a:p>
+                      <a:r>
+                        <a:rPr sz="1300" b="1">
+                          <a:solidFill>
+                            <a:srgbClr val="FFFFFF"/>
+                          </a:solidFill>
+                          <a:latin typeface="Calibri"/>
+                        </a:rPr>
+                        <a:t>Name</a:t>
+                      </a:r>
+                    </a:p>
+                  </a:txBody>
+                  <a:tcPr>
+                    <a:solidFill>
+                      <a:srgbClr val="4338CA"/>
+                    </a:solidFill>
+                  </a:tcPr>
+                </a:tc>
+                <a:tc>
+                  <a:txBody>
+                    <a:bodyPr/>
+                    <a:lstStyle/>
+                    <a:p>
+                      <a:r>
+                        <a:rPr sz="1300" b="1">
+                          <a:solidFill>
+                            <a:srgbClr val="FFFFFF"/>
+                          </a:solidFill>
+                          <a:latin typeface="Calibri"/>
+                        </a:rPr>
+                        <a:t>Simple meaning</a:t>
+                      </a:r>
+                    </a:p>
+                  </a:txBody>
+                  <a:tcPr>
+                    <a:solidFill>
+                      <a:srgbClr val="4338CA"/>
+                    </a:solidFill>
+                  </a:tcPr>
+                </a:tc>
+                <a:tc>
+                  <a:txBody>
+                    <a:bodyPr/>
+                    <a:lstStyle/>
+                    <a:p>
+                      <a:r>
+                        <a:rPr sz="1300" b="1">
+                          <a:solidFill>
+                            <a:srgbClr val="FFFFFF"/>
+                          </a:solidFill>
+                          <a:latin typeface="Calibri"/>
+                        </a:rPr>
+                        <a:t>Agents</a:t>
+                      </a:r>
+                    </a:p>
+                  </a:txBody>
+                  <a:tcPr>
+                    <a:solidFill>
+                      <a:srgbClr val="4338CA"/>
+                    </a:solidFill>
+                  </a:tcPr>
+                </a:tc>
+                <a:tc>
+                  <a:txBody>
+                    <a:bodyPr/>
+                    <a:lstStyle/>
+                    <a:p>
+                      <a:r>
+                        <a:rPr sz="1300" b="1">
+                          <a:solidFill>
+                            <a:srgbClr val="FFFFFF"/>
+                          </a:solidFill>
+                          <a:latin typeface="Calibri"/>
+                        </a:rPr>
+                        <a:t>Who fetches the data</a:t>
+                      </a:r>
+                    </a:p>
+                  </a:txBody>
+                  <a:tcPr>
+                    <a:solidFill>
+                      <a:srgbClr val="4338CA"/>
+                    </a:solidFill>
+                  </a:tcPr>
+                </a:tc>
+              </a:tr>
+              <a:tr h="365760">
+                <a:tc>
+                  <a:txBody>
+                    <a:bodyPr/>
+                    <a:lstStyle/>
+                    <a:p>
+                      <a:r>
+                        <a:rPr sz="1300" b="0">
+                          <a:solidFill>
+                            <a:srgbClr val="161A23"/>
+                          </a:solidFill>
+                          <a:latin typeface="Calibri"/>
+                        </a:rPr>
+                        <a:t>A</a:t>
+                      </a:r>
+                    </a:p>
+                  </a:txBody>
+                  <a:tcPr>
+                    <a:solidFill>
+                      <a:srgbClr val="FFFFFF"/>
+                    </a:solidFill>
+                  </a:tcPr>
+                </a:tc>
+                <a:tc>
+                  <a:txBody>
+                    <a:bodyPr/>
+                    <a:lstStyle/>
+                    <a:p>
+                      <a:r>
+                        <a:rPr sz="1300" b="0">
+                          <a:solidFill>
+                            <a:srgbClr val="161A23"/>
+                          </a:solidFill>
+                          <a:latin typeface="Calibri"/>
+                        </a:rPr>
+                        <a:t>Single AI</a:t>
+                      </a:r>
+                    </a:p>
+                  </a:txBody>
+                  <a:tcPr>
+                    <a:solidFill>
+                      <a:srgbClr val="FFFFFF"/>
+                    </a:solidFill>
+                  </a:tcPr>
+                </a:tc>
+                <a:tc>
+                  <a:txBody>
+                    <a:bodyPr/>
+                    <a:lstStyle/>
+                    <a:p>
+                      <a:r>
+                        <a:rPr sz="1300" b="0">
+                          <a:solidFill>
+                            <a:srgbClr val="161A23"/>
+                          </a:solidFill>
+                          <a:latin typeface="Calibri"/>
+                        </a:rPr>
+                        <a:t>AI answers from its own knowledge</a:t>
+                      </a:r>
+                    </a:p>
+                  </a:txBody>
+                  <a:tcPr>
+                    <a:solidFill>
+                      <a:srgbClr val="FFFFFF"/>
+                    </a:solidFill>
+                  </a:tcPr>
+                </a:tc>
+                <a:tc>
+                  <a:txBody>
+                    <a:bodyPr/>
+                    <a:lstStyle/>
+                    <a:p>
+                      <a:r>
+                        <a:rPr sz="1300" b="0">
+                          <a:solidFill>
+                            <a:srgbClr val="161A23"/>
+                          </a:solidFill>
+                          <a:latin typeface="Calibri"/>
+                        </a:rPr>
+                        <a:t>1</a:t>
+                      </a:r>
+                    </a:p>
+                  </a:txBody>
+                  <a:tcPr>
+                    <a:solidFill>
+                      <a:srgbClr val="FFFFFF"/>
+                    </a:solidFill>
+                  </a:tcPr>
+                </a:tc>
+                <a:tc>
+                  <a:txBody>
+                    <a:bodyPr/>
+                    <a:lstStyle/>
+                    <a:p>
+                      <a:r>
+                        <a:rPr sz="1300" b="0">
+                          <a:solidFill>
+                            <a:srgbClr val="161A23"/>
+                          </a:solidFill>
+                          <a:latin typeface="Calibri"/>
+                        </a:rPr>
+                        <a:t>nobody - no APIs at all</a:t>
+                      </a:r>
+                    </a:p>
+                  </a:txBody>
+                  <a:tcPr>
+                    <a:solidFill>
+                      <a:srgbClr val="FFFFFF"/>
+                    </a:solidFill>
+                  </a:tcPr>
+                </a:tc>
+              </a:tr>
+              <a:tr h="365760">
+                <a:tc>
+                  <a:txBody>
+                    <a:bodyPr/>
+                    <a:lstStyle/>
+                    <a:p>
+                      <a:r>
+                        <a:rPr sz="1300" b="0">
+                          <a:solidFill>
+                            <a:srgbClr val="161A23"/>
+                          </a:solidFill>
+                          <a:latin typeface="Calibri"/>
+                        </a:rPr>
+                        <a:t>B</a:t>
+                      </a:r>
+                    </a:p>
+                  </a:txBody>
+                  <a:tcPr>
+                    <a:solidFill>
+                      <a:srgbClr val="F7F8FC"/>
+                    </a:solidFill>
+                  </a:tcPr>
+                </a:tc>
+                <a:tc>
+                  <a:txBody>
+                    <a:bodyPr/>
+                    <a:lstStyle/>
+                    <a:p>
+                      <a:r>
+                        <a:rPr sz="1300" b="0">
+                          <a:solidFill>
+                            <a:srgbClr val="161A23"/>
+                          </a:solidFill>
+                          <a:latin typeface="Calibri"/>
+                        </a:rPr>
+                        <a:t>6 agents, naive</a:t>
+                      </a:r>
+                    </a:p>
+                  </a:txBody>
+                  <a:tcPr>
+                    <a:solidFill>
+                      <a:srgbClr val="F7F8FC"/>
+                    </a:solidFill>
+                  </a:tcPr>
+                </a:tc>
+                <a:tc>
+                  <a:txBody>
+                    <a:bodyPr/>
+                    <a:lstStyle/>
+                    <a:p>
+                      <a:r>
+                        <a:rPr sz="1300" b="0">
+                          <a:solidFill>
+                            <a:srgbClr val="161A23"/>
+                          </a:solidFill>
+                          <a:latin typeface="Calibri"/>
+                        </a:rPr>
+                        <a:t>Each agent decides its own tool use</a:t>
+                      </a:r>
+                    </a:p>
+                  </a:txBody>
+                  <a:tcPr>
+                    <a:solidFill>
+                      <a:srgbClr val="F7F8FC"/>
+                    </a:solidFill>
+                  </a:tcPr>
+                </a:tc>
+                <a:tc>
+                  <a:txBody>
+                    <a:bodyPr/>
+                    <a:lstStyle/>
+                    <a:p>
+                      <a:r>
+                        <a:rPr sz="1300" b="0">
+                          <a:solidFill>
+                            <a:srgbClr val="161A23"/>
+                          </a:solidFill>
+                          <a:latin typeface="Calibri"/>
+                        </a:rPr>
+                        <a:t>6</a:t>
+                      </a:r>
+                    </a:p>
+                  </a:txBody>
+                  <a:tcPr>
+                    <a:solidFill>
+                      <a:srgbClr val="F7F8FC"/>
+                    </a:solidFill>
+                  </a:tcPr>
+                </a:tc>
+                <a:tc>
+                  <a:txBody>
+                    <a:bodyPr/>
+                    <a:lstStyle/>
+                    <a:p>
+                      <a:r>
+                        <a:rPr sz="1300" b="0">
+                          <a:solidFill>
+                            <a:srgbClr val="161A23"/>
+                          </a:solidFill>
+                          <a:latin typeface="Calibri"/>
+                        </a:rPr>
+                        <a:t>the agents, through the tool server</a:t>
+                      </a:r>
+                    </a:p>
+                  </a:txBody>
+                  <a:tcPr>
+                    <a:solidFill>
+                      <a:srgbClr val="F7F8FC"/>
+                    </a:solidFill>
+                  </a:tcPr>
+                </a:tc>
+              </a:tr>
+              <a:tr h="365760">
+                <a:tc>
+                  <a:txBody>
+                    <a:bodyPr/>
+                    <a:lstStyle/>
+                    <a:p>
+                      <a:r>
+                        <a:rPr sz="1300" b="0">
+                          <a:solidFill>
+                            <a:srgbClr val="161A23"/>
+                          </a:solidFill>
+                          <a:latin typeface="Calibri"/>
+                        </a:rPr>
+                        <a:t>C</a:t>
+                      </a:r>
+                    </a:p>
+                  </a:txBody>
+                  <a:tcPr>
+                    <a:solidFill>
+                      <a:srgbClr val="FFFFFF"/>
+                    </a:solidFill>
+                  </a:tcPr>
+                </a:tc>
+                <a:tc>
+                  <a:txBody>
+                    <a:bodyPr/>
+                    <a:lstStyle/>
+                    <a:p>
+                      <a:r>
+                        <a:rPr sz="1300" b="0">
+                          <a:solidFill>
+                            <a:srgbClr val="161A23"/>
+                          </a:solidFill>
+                          <a:latin typeface="Calibri"/>
+                        </a:rPr>
+                        <a:t>6 agents, tuned</a:t>
+                      </a:r>
+                    </a:p>
+                  </a:txBody>
+                  <a:tcPr>
+                    <a:solidFill>
+                      <a:srgbClr val="FFFFFF"/>
+                    </a:solidFill>
+                  </a:tcPr>
+                </a:tc>
+                <a:tc>
+                  <a:txBody>
+                    <a:bodyPr/>
+                    <a:lstStyle/>
+                    <a:p>
+                      <a:r>
+                        <a:rPr sz="1300" b="0">
+                          <a:solidFill>
+                            <a:srgbClr val="161A23"/>
+                          </a:solidFill>
+                          <a:latin typeface="Calibri"/>
+                        </a:rPr>
+                        <a:t>Same six, configured properly</a:t>
+                      </a:r>
+                    </a:p>
+                  </a:txBody>
+                  <a:tcPr>
+                    <a:solidFill>
+                      <a:srgbClr val="FFFFFF"/>
+                    </a:solidFill>
+                  </a:tcPr>
+                </a:tc>
+                <a:tc>
+                  <a:txBody>
+                    <a:bodyPr/>
+                    <a:lstStyle/>
+                    <a:p>
+                      <a:r>
+                        <a:rPr sz="1300" b="0">
+                          <a:solidFill>
+                            <a:srgbClr val="161A23"/>
+                          </a:solidFill>
+                          <a:latin typeface="Calibri"/>
+                        </a:rPr>
+                        <a:t>6</a:t>
+                      </a:r>
+                    </a:p>
+                  </a:txBody>
+                  <a:tcPr>
+                    <a:solidFill>
+                      <a:srgbClr val="FFFFFF"/>
+                    </a:solidFill>
+                  </a:tcPr>
+                </a:tc>
+                <a:tc>
+                  <a:txBody>
+                    <a:bodyPr/>
+                    <a:lstStyle/>
+                    <a:p>
+                      <a:r>
+                        <a:rPr sz="1300" b="0">
+                          <a:solidFill>
+                            <a:srgbClr val="161A23"/>
+                          </a:solidFill>
+                          <a:latin typeface="Calibri"/>
+                        </a:rPr>
+                        <a:t>the agents, calling directly</a:t>
+                      </a:r>
+                    </a:p>
+                  </a:txBody>
+                  <a:tcPr>
+                    <a:solidFill>
+                      <a:srgbClr val="FFFFFF"/>
+                    </a:solidFill>
+                  </a:tcPr>
+                </a:tc>
+              </a:tr>
+              <a:tr h="365760">
+                <a:tc>
+                  <a:txBody>
+                    <a:bodyPr/>
+                    <a:lstStyle/>
+                    <a:p>
+                      <a:r>
+                        <a:rPr sz="1300" b="0">
+                          <a:solidFill>
+                            <a:srgbClr val="161A23"/>
+                          </a:solidFill>
+                          <a:latin typeface="Calibri"/>
+                        </a:rPr>
+                        <a:t>D</a:t>
+                      </a:r>
+                    </a:p>
+                  </a:txBody>
+                  <a:tcPr>
+                    <a:solidFill>
+                      <a:srgbClr val="F7F8FC"/>
+                    </a:solidFill>
+                  </a:tcPr>
+                </a:tc>
+                <a:tc>
+                  <a:txBody>
+                    <a:bodyPr/>
+                    <a:lstStyle/>
+                    <a:p>
+                      <a:r>
+                        <a:rPr sz="1300" b="0">
+                          <a:solidFill>
+                            <a:srgbClr val="161A23"/>
+                          </a:solidFill>
+                          <a:latin typeface="Calibri"/>
+                        </a:rPr>
+                        <a:t>3 agents, direct</a:t>
+                      </a:r>
+                    </a:p>
+                  </a:txBody>
+                  <a:tcPr>
+                    <a:solidFill>
+                      <a:srgbClr val="F7F8FC"/>
+                    </a:solidFill>
+                  </a:tcPr>
+                </a:tc>
+                <a:tc>
+                  <a:txBody>
+                    <a:bodyPr/>
+                    <a:lstStyle/>
+                    <a:p>
+                      <a:r>
+                        <a:rPr sz="1300" b="0">
+                          <a:solidFill>
+                            <a:srgbClr val="161A23"/>
+                          </a:solidFill>
+                          <a:latin typeface="Calibri"/>
+                        </a:rPr>
+                        <a:t>AI thinks; code does the searching</a:t>
+                      </a:r>
+                    </a:p>
+                  </a:txBody>
+                  <a:tcPr>
+                    <a:solidFill>
+                      <a:srgbClr val="F7F8FC"/>
+                    </a:solidFill>
+                  </a:tcPr>
+                </a:tc>
+                <a:tc>
+                  <a:txBody>
+                    <a:bodyPr/>
+                    <a:lstStyle/>
+                    <a:p>
+                      <a:r>
+                        <a:rPr sz="1300" b="0">
+                          <a:solidFill>
+                            <a:srgbClr val="161A23"/>
+                          </a:solidFill>
+                          <a:latin typeface="Calibri"/>
+                        </a:rPr>
+                        <a:t>3</a:t>
+                      </a:r>
+                    </a:p>
+                  </a:txBody>
+                  <a:tcPr>
+                    <a:solidFill>
+                      <a:srgbClr val="F7F8FC"/>
+                    </a:solidFill>
+                  </a:tcPr>
+                </a:tc>
+                <a:tc>
+                  <a:txBody>
+                    <a:bodyPr/>
+                    <a:lstStyle/>
+                    <a:p>
+                      <a:r>
+                        <a:rPr sz="1300" b="0">
+                          <a:solidFill>
+                            <a:srgbClr val="161A23"/>
+                          </a:solidFill>
+                          <a:latin typeface="Calibri"/>
+                        </a:rPr>
+                        <a:t>plain Python</a:t>
+                      </a:r>
+                    </a:p>
+                  </a:txBody>
+                  <a:tcPr>
+                    <a:solidFill>
+                      <a:srgbClr val="F7F8FC"/>
+                    </a:solidFill>
+                  </a:tcPr>
+                </a:tc>
+              </a:tr>
+            </a:tbl>
+          </a:graphicData>
+        </a:graphic>
+      </p:graphicFrame>
       <p:sp>
         <p:nvSpPr>
           <p:cNvPr id="6" name="TextBox 5"/>
@@ -7923,8 +8332,8 @@
         </p:nvSpPr>
         <p:spPr>
           <a:xfrm>
-            <a:off x="822960" y="6172200"/>
-            <a:ext cx="10515600" cy="457200"/>
+            <a:off x="822960" y="4937760"/>
+            <a:ext cx="10515600" cy="1188720"/>
           </a:xfrm>
           <a:prstGeom prst="rect">
             <a:avLst/>
@@ -7939,17 +8348,33 @@
           <a:p>
             <a:pPr algn="l">
               <a:lnSpc>
-                <a:spcPct val="100000"/>
+                <a:spcPct val="125000"/>
               </a:lnSpc>
             </a:pPr>
             <a:r>
-              <a:rPr sz="1500" b="0">
+              <a:rPr sz="1800" b="1">
+                <a:solidFill>
+                  <a:srgbClr val="161A23"/>
+                </a:solidFill>
+                <a:latin typeface="Calibri"/>
+              </a:rPr>
+              <a:t>All four get the identical request and the identical travel data.</a:t>
+            </a:r>
+          </a:p>
+          <a:p>
+            <a:pPr algn="l">
+              <a:lnSpc>
+                <a:spcPct val="125000"/>
+              </a:lnSpc>
+            </a:pPr>
+            <a:r>
+              <a:rPr sz="1700" b="0">
                 <a:solidFill>
                   <a:srgbClr val="545C6E"/>
                 </a:solidFill>
                 <a:latin typeface="Calibri"/>
               </a:rPr>
-              <a:t>Purple steps use AI. Green steps are normal code.</a:t>
+              <a:t>So the only thing being tested is who decides when to fetch it.</a:t>
             </a:r>
           </a:p>
         </p:txBody>
@@ -7962,7 +8387,7 @@
 </p:sld>
 </file>
 
-<file path=ppt/slides/slide7.xml><?xml version="1.0" encoding="utf-8"?>
+<file path=ppt/slides/slide5.xml><?xml version="1.0" encoding="utf-8"?>
 <p:sld xmlns:a="http://schemas.openxmlformats.org/drawingml/2006/main" xmlns:p="http://schemas.openxmlformats.org/presentationml/2006/main" xmlns:r="http://schemas.openxmlformats.org/officeDocument/2006/relationships">
   <p:cSld>
     <p:spTree>
@@ -8006,7 +8431,7 @@
                 </a:solidFill>
                 <a:latin typeface="Calibri"/>
               </a:rPr>
-              <a:t>6  ·  WHAT WENT WRONG IN EACH ONE</a:t>
+              <a:t>4  ·  APPROACH A  —  SINGLE AI</a:t>
             </a:r>
           </a:p>
         </p:txBody>
@@ -8045,7 +8470,7 @@
                 </a:solidFill>
                 <a:latin typeface="Calibri"/>
               </a:rPr>
-              <a:t>Measured, not guessed. This is why D exists</a:t>
+              <a:t>The baseline</a:t>
             </a:r>
           </a:p>
         </p:txBody>
@@ -8094,272 +8519,175 @@
           </a:p>
         </p:txBody>
       </p:sp>
-      <p:graphicFrame>
-        <p:nvGraphicFramePr>
-          <p:cNvPr id="5" name="Table 4"/>
-          <p:cNvGraphicFramePr>
-            <a:graphicFrameLocks noGrp="1"/>
-          </p:cNvGraphicFramePr>
+      <p:sp>
+        <p:nvSpPr>
+          <p:cNvPr id="5" name="Rounded Rectangle 4"/>
+          <p:cNvSpPr/>
           <p:nvPr/>
-        </p:nvGraphicFramePr>
-        <p:xfrm>
-          <a:off x="822960" y="2011680"/>
-          <a:ext cx="10515599" cy="1828800"/>
-        </p:xfrm>
-        <a:graphic>
-          <a:graphicData uri="http://schemas.openxmlformats.org/drawingml/2006/table">
-            <a:tbl>
-              <a:tblPr firstRow="1" bandRow="1">
-                <a:tableStyleId>{5C22544A-7EE6-4342-B048-85BDC9FD1C3A}</a:tableStyleId>
-              </a:tblPr>
-              <a:tblGrid>
-                <a:gridCol w="477981"/>
-                <a:gridCol w="10037618"/>
-              </a:tblGrid>
-              <a:tr h="365760">
-                <a:tc>
-                  <a:txBody>
-                    <a:bodyPr/>
-                    <a:lstStyle/>
-                    <a:p>
-                      <a:r>
-                        <a:rPr sz="1350" b="1">
-                          <a:solidFill>
-                            <a:srgbClr val="FFFFFF"/>
-                          </a:solidFill>
-                          <a:latin typeface="Calibri"/>
-                        </a:rPr>
-                        <a:t> </a:t>
-                      </a:r>
-                    </a:p>
-                  </a:txBody>
-                  <a:tcPr>
-                    <a:solidFill>
-                      <a:srgbClr val="4338CA"/>
-                    </a:solidFill>
-                  </a:tcPr>
-                </a:tc>
-                <a:tc>
-                  <a:txBody>
-                    <a:bodyPr/>
-                    <a:lstStyle/>
-                    <a:p>
-                      <a:r>
-                        <a:rPr sz="1350" b="1">
-                          <a:solidFill>
-                            <a:srgbClr val="FFFFFF"/>
-                          </a:solidFill>
-                          <a:latin typeface="Calibri"/>
-                        </a:rPr>
-                        <a:t>The problem I measured</a:t>
-                      </a:r>
-                    </a:p>
-                  </a:txBody>
-                  <a:tcPr>
-                    <a:solidFill>
-                      <a:srgbClr val="4338CA"/>
-                    </a:solidFill>
-                  </a:tcPr>
-                </a:tc>
-              </a:tr>
-              <a:tr h="365760">
-                <a:tc>
-                  <a:txBody>
-                    <a:bodyPr/>
-                    <a:lstStyle/>
-                    <a:p>
-                      <a:r>
-                        <a:rPr sz="1350" b="0">
-                          <a:solidFill>
-                            <a:srgbClr val="161A23"/>
-                          </a:solidFill>
-                          <a:latin typeface="Calibri"/>
-                        </a:rPr>
-                        <a:t>A</a:t>
-                      </a:r>
-                    </a:p>
-                  </a:txBody>
-                  <a:tcPr>
-                    <a:solidFill>
-                      <a:srgbClr val="FFFFFF"/>
-                    </a:solidFill>
-                  </a:tcPr>
-                </a:tc>
-                <a:tc>
-                  <a:txBody>
-                    <a:bodyPr/>
-                    <a:lstStyle/>
-                    <a:p>
-                      <a:r>
-                        <a:rPr sz="1350" b="0">
-                          <a:solidFill>
-                            <a:srgbClr val="161A23"/>
-                          </a:solidFill>
-                          <a:latin typeface="Calibri"/>
-                        </a:rPr>
-                        <a:t>No tools, so it invents everything. Only 1.7% of its prices matched a real one</a:t>
-                      </a:r>
-                    </a:p>
-                  </a:txBody>
-                  <a:tcPr>
-                    <a:solidFill>
-                      <a:srgbClr val="FFFFFF"/>
-                    </a:solidFill>
-                  </a:tcPr>
-                </a:tc>
-              </a:tr>
-              <a:tr h="365760">
-                <a:tc>
-                  <a:txBody>
-                    <a:bodyPr/>
-                    <a:lstStyle/>
-                    <a:p>
-                      <a:r>
-                        <a:rPr sz="1350" b="0">
-                          <a:solidFill>
-                            <a:srgbClr val="161A23"/>
-                          </a:solidFill>
-                          <a:latin typeface="Calibri"/>
-                        </a:rPr>
-                        <a:t>B</a:t>
-                      </a:r>
-                    </a:p>
-                  </a:txBody>
-                  <a:tcPr>
-                    <a:solidFill>
-                      <a:srgbClr val="F7F8FC"/>
-                    </a:solidFill>
-                  </a:tcPr>
-                </a:tc>
-                <a:tc>
-                  <a:txBody>
-                    <a:bodyPr/>
-                    <a:lstStyle/>
-                    <a:p>
-                      <a:r>
-                        <a:rPr sz="1350" b="0">
-                          <a:solidFill>
-                            <a:srgbClr val="161A23"/>
-                          </a:solidFill>
-                          <a:latin typeface="Calibri"/>
-                        </a:rPr>
-                        <a:t>Did not use its own tools: never called the attractions or the restaurant tool once. Twice gave broken output</a:t>
-                      </a:r>
-                    </a:p>
-                  </a:txBody>
-                  <a:tcPr>
-                    <a:solidFill>
-                      <a:srgbClr val="F7F8FC"/>
-                    </a:solidFill>
-                  </a:tcPr>
-                </a:tc>
-              </a:tr>
-              <a:tr h="365760">
-                <a:tc>
-                  <a:txBody>
-                    <a:bodyPr/>
-                    <a:lstStyle/>
-                    <a:p>
-                      <a:r>
-                        <a:rPr sz="1350" b="0">
-                          <a:solidFill>
-                            <a:srgbClr val="161A23"/>
-                          </a:solidFill>
-                          <a:latin typeface="Calibri"/>
-                        </a:rPr>
-                        <a:t>C</a:t>
-                      </a:r>
-                    </a:p>
-                  </a:txBody>
-                  <a:tcPr>
-                    <a:solidFill>
-                      <a:srgbClr val="FFFFFF"/>
-                    </a:solidFill>
-                  </a:tcPr>
-                </a:tc>
-                <a:tc>
-                  <a:txBody>
-                    <a:bodyPr/>
-                    <a:lstStyle/>
-                    <a:p>
-                      <a:r>
-                        <a:rPr sz="1350" b="0">
-                          <a:solidFill>
-                            <a:srgbClr val="161A23"/>
-                          </a:solidFill>
-                          <a:latin typeface="Calibri"/>
-                        </a:rPr>
-                        <a:t>Better, but still missed things: never called the flight tool at all on the recorded run</a:t>
-                      </a:r>
-                    </a:p>
-                  </a:txBody>
-                  <a:tcPr>
-                    <a:solidFill>
-                      <a:srgbClr val="FFFFFF"/>
-                    </a:solidFill>
-                  </a:tcPr>
-                </a:tc>
-              </a:tr>
-              <a:tr h="365760">
-                <a:tc>
-                  <a:txBody>
-                    <a:bodyPr/>
-                    <a:lstStyle/>
-                    <a:p>
-                      <a:r>
-                        <a:rPr sz="1350" b="0">
-                          <a:solidFill>
-                            <a:srgbClr val="161A23"/>
-                          </a:solidFill>
-                          <a:latin typeface="Calibri"/>
-                        </a:rPr>
-                        <a:t>D</a:t>
-                      </a:r>
-                    </a:p>
-                  </a:txBody>
-                  <a:tcPr>
-                    <a:solidFill>
-                      <a:srgbClr val="F7F8FC"/>
-                    </a:solidFill>
-                  </a:tcPr>
-                </a:tc>
-                <a:tc>
-                  <a:txBody>
-                    <a:bodyPr/>
-                    <a:lstStyle/>
-                    <a:p>
-                      <a:r>
-                        <a:rPr sz="1350" b="0">
-                          <a:solidFill>
-                            <a:srgbClr val="161A23"/>
-                          </a:solidFill>
-                          <a:latin typeface="Calibri"/>
-                        </a:rPr>
-                        <a:t>Always makes the same 5 requests, because code decides, not AI. Nothing gets skipped</a:t>
-                      </a:r>
-                    </a:p>
-                  </a:txBody>
-                  <a:tcPr>
-                    <a:solidFill>
-                      <a:srgbClr val="F7F8FC"/>
-                    </a:solidFill>
-                  </a:tcPr>
-                </a:tc>
-              </a:tr>
-            </a:tbl>
-          </a:graphicData>
-        </a:graphic>
-      </p:graphicFrame>
-      <p:sp>
-        <p:nvSpPr>
-          <p:cNvPr id="6" name="TextBox 5"/>
+        </p:nvSpPr>
+        <p:spPr>
+          <a:xfrm>
+            <a:off x="2377440" y="1920240"/>
+            <a:ext cx="2194560" cy="777240"/>
+          </a:xfrm>
+          <a:prstGeom prst="roundRect">
+            <a:avLst/>
+          </a:prstGeom>
+          <a:solidFill>
+            <a:srgbClr val="EFEEEA"/>
+          </a:solidFill>
+          <a:ln>
+            <a:noFill/>
+          </a:ln>
+          <a:effectLst/>
+        </p:spPr>
+        <p:style>
+          <a:lnRef idx="1">
+            <a:schemeClr val="accent1"/>
+          </a:lnRef>
+          <a:fillRef idx="3">
+            <a:schemeClr val="accent1"/>
+          </a:fillRef>
+          <a:effectRef idx="2">
+            <a:schemeClr val="accent1"/>
+          </a:effectRef>
+          <a:fontRef idx="minor">
+            <a:schemeClr val="lt1"/>
+          </a:fontRef>
+        </p:style>
+        <p:txBody>
+          <a:bodyPr rtlCol="0" anchor="ctr" wrap="square"/>
+          <a:lstStyle/>
+          <a:p>
+            <a:pPr algn="ctr"/>
+            <a:r>
+              <a:rPr sz="1400" b="1">
+                <a:solidFill>
+                  <a:srgbClr val="161A23"/>
+                </a:solidFill>
+                <a:latin typeface="Calibri"/>
+              </a:rPr>
+              <a:t>USER</a:t>
+            </a:r>
+          </a:p>
+        </p:txBody>
+      </p:sp>
+      <p:sp>
+        <p:nvSpPr>
+          <p:cNvPr id="6" name="Rounded Rectangle 5"/>
+          <p:cNvSpPr/>
+          <p:nvPr/>
+        </p:nvSpPr>
+        <p:spPr>
+          <a:xfrm>
+            <a:off x="5029200" y="1920240"/>
+            <a:ext cx="2194560" cy="777240"/>
+          </a:xfrm>
+          <a:prstGeom prst="roundRect">
+            <a:avLst/>
+          </a:prstGeom>
+          <a:solidFill>
+            <a:srgbClr val="4E3FB8"/>
+          </a:solidFill>
+          <a:ln>
+            <a:noFill/>
+          </a:ln>
+          <a:effectLst/>
+        </p:spPr>
+        <p:style>
+          <a:lnRef idx="1">
+            <a:schemeClr val="accent1"/>
+          </a:lnRef>
+          <a:fillRef idx="3">
+            <a:schemeClr val="accent1"/>
+          </a:fillRef>
+          <a:effectRef idx="2">
+            <a:schemeClr val="accent1"/>
+          </a:effectRef>
+          <a:fontRef idx="minor">
+            <a:schemeClr val="lt1"/>
+          </a:fontRef>
+        </p:style>
+        <p:txBody>
+          <a:bodyPr rtlCol="0" anchor="ctr" wrap="square"/>
+          <a:lstStyle/>
+          <a:p>
+            <a:pPr algn="ctr"/>
+            <a:r>
+              <a:rPr sz="1400" b="1">
+                <a:solidFill>
+                  <a:srgbClr val="FFFFFF"/>
+                </a:solidFill>
+                <a:latin typeface="Calibri"/>
+              </a:rPr>
+              <a:t>AI</a:t>
+            </a:r>
+          </a:p>
+        </p:txBody>
+      </p:sp>
+      <p:sp>
+        <p:nvSpPr>
+          <p:cNvPr id="7" name="Rounded Rectangle 6"/>
+          <p:cNvSpPr/>
+          <p:nvPr/>
+        </p:nvSpPr>
+        <p:spPr>
+          <a:xfrm>
+            <a:off x="7680960" y="1920240"/>
+            <a:ext cx="2194560" cy="777240"/>
+          </a:xfrm>
+          <a:prstGeom prst="roundRect">
+            <a:avLst/>
+          </a:prstGeom>
+          <a:solidFill>
+            <a:srgbClr val="EFEEEA"/>
+          </a:solidFill>
+          <a:ln>
+            <a:noFill/>
+          </a:ln>
+          <a:effectLst/>
+        </p:spPr>
+        <p:style>
+          <a:lnRef idx="1">
+            <a:schemeClr val="accent1"/>
+          </a:lnRef>
+          <a:fillRef idx="3">
+            <a:schemeClr val="accent1"/>
+          </a:fillRef>
+          <a:effectRef idx="2">
+            <a:schemeClr val="accent1"/>
+          </a:effectRef>
+          <a:fontRef idx="minor">
+            <a:schemeClr val="lt1"/>
+          </a:fontRef>
+        </p:style>
+        <p:txBody>
+          <a:bodyPr rtlCol="0" anchor="ctr" wrap="square"/>
+          <a:lstStyle/>
+          <a:p>
+            <a:pPr algn="ctr"/>
+            <a:r>
+              <a:rPr sz="1400" b="1">
+                <a:solidFill>
+                  <a:srgbClr val="161A23"/>
+                </a:solidFill>
+                <a:latin typeface="Calibri"/>
+              </a:rPr>
+              <a:t>ITINERARY</a:t>
+            </a:r>
+          </a:p>
+        </p:txBody>
+      </p:sp>
+      <p:sp>
+        <p:nvSpPr>
+          <p:cNvPr id="8" name="TextBox 7"/>
           <p:cNvSpPr txBox="1"/>
           <p:nvPr/>
         </p:nvSpPr>
         <p:spPr>
           <a:xfrm>
-            <a:off x="822960" y="4937760"/>
-            <a:ext cx="10515600" cy="1188720"/>
+            <a:off x="4572000" y="2057400"/>
+            <a:ext cx="457200" cy="457200"/>
           </a:xfrm>
           <a:prstGeom prst="rect">
             <a:avLst/>
@@ -8372,25 +8700,87 @@
           </a:bodyPr>
           <a:lstStyle/>
           <a:p>
-            <a:pPr algn="l">
+            <a:pPr algn="ctr">
               <a:lnSpc>
-                <a:spcPct val="125000"/>
+                <a:spcPct val="100000"/>
               </a:lnSpc>
             </a:pPr>
             <a:r>
-              <a:rPr sz="2100" b="1">
+              <a:rPr sz="1400" b="0">
                 <a:solidFill>
-                  <a:srgbClr val="A85B00"/>
+                  <a:srgbClr val="8A91A0"/>
                 </a:solidFill>
                 <a:latin typeface="Calibri"/>
               </a:rPr>
-              <a:t>When AI decides which tools to use, sometimes it just does not use them.</a:t>
-            </a:r>
-          </a:p>
-          <a:p>
-            <a:pPr algn="l">
+              <a:t>▶</a:t>
+            </a:r>
+          </a:p>
+        </p:txBody>
+      </p:sp>
+      <p:sp>
+        <p:nvSpPr>
+          <p:cNvPr id="9" name="TextBox 8"/>
+          <p:cNvSpPr txBox="1"/>
+          <p:nvPr/>
+        </p:nvSpPr>
+        <p:spPr>
+          <a:xfrm>
+            <a:off x="7223760" y="2057400"/>
+            <a:ext cx="457200" cy="457200"/>
+          </a:xfrm>
+          <a:prstGeom prst="rect">
+            <a:avLst/>
+          </a:prstGeom>
+          <a:noFill/>
+        </p:spPr>
+        <p:txBody>
+          <a:bodyPr wrap="square" anchor="t">
+            <a:spAutoFit/>
+          </a:bodyPr>
+          <a:lstStyle/>
+          <a:p>
+            <a:pPr algn="ctr">
               <a:lnSpc>
-                <a:spcPct val="125000"/>
+                <a:spcPct val="100000"/>
+              </a:lnSpc>
+            </a:pPr>
+            <a:r>
+              <a:rPr sz="1400" b="0">
+                <a:solidFill>
+                  <a:srgbClr val="8A91A0"/>
+                </a:solidFill>
+                <a:latin typeface="Calibri"/>
+              </a:rPr>
+              <a:t>▶</a:t>
+            </a:r>
+          </a:p>
+        </p:txBody>
+      </p:sp>
+      <p:sp>
+        <p:nvSpPr>
+          <p:cNvPr id="10" name="TextBox 9"/>
+          <p:cNvSpPr txBox="1"/>
+          <p:nvPr/>
+        </p:nvSpPr>
+        <p:spPr>
+          <a:xfrm>
+            <a:off x="822960" y="3017520"/>
+            <a:ext cx="10515600" cy="548640"/>
+          </a:xfrm>
+          <a:prstGeom prst="rect">
+            <a:avLst/>
+          </a:prstGeom>
+          <a:noFill/>
+        </p:spPr>
+        <p:txBody>
+          <a:bodyPr wrap="square" anchor="t">
+            <a:spAutoFit/>
+          </a:bodyPr>
+          <a:lstStyle/>
+          <a:p>
+            <a:pPr algn="ctr">
+              <a:lnSpc>
+                <a:spcPct val="100000"/>
               </a:lnSpc>
             </a:pPr>
             <a:r>
@@ -8400,7 +8790,280 @@
                 </a:solidFill>
                 <a:latin typeface="Calibri"/>
               </a:rPr>
-              <a:t>The plan still looks complete. That is what makes it dangerous.</a:t>
+              <a:t>No tools. No APIs. The AI writes the plan from what it already knows.</a:t>
+            </a:r>
+          </a:p>
+        </p:txBody>
+      </p:sp>
+      <p:sp>
+        <p:nvSpPr>
+          <p:cNvPr id="11" name="TextBox 10"/>
+          <p:cNvSpPr txBox="1"/>
+          <p:nvPr/>
+        </p:nvSpPr>
+        <p:spPr>
+          <a:xfrm>
+            <a:off x="822960" y="3749039"/>
+            <a:ext cx="3515258" cy="1188720"/>
+          </a:xfrm>
+          <a:prstGeom prst="rect">
+            <a:avLst/>
+          </a:prstGeom>
+          <a:noFill/>
+        </p:spPr>
+        <p:txBody>
+          <a:bodyPr wrap="square" anchor="t">
+            <a:spAutoFit/>
+          </a:bodyPr>
+          <a:lstStyle/>
+          <a:p>
+            <a:pPr algn="ctr">
+              <a:lnSpc>
+                <a:spcPct val="100000"/>
+              </a:lnSpc>
+            </a:pPr>
+            <a:r>
+              <a:rPr sz="6000" b="1">
+                <a:solidFill>
+                  <a:srgbClr val="A85B00"/>
+                </a:solidFill>
+                <a:latin typeface="Calibri"/>
+              </a:rPr>
+              <a:t>1</a:t>
+            </a:r>
+          </a:p>
+        </p:txBody>
+      </p:sp>
+      <p:sp>
+        <p:nvSpPr>
+          <p:cNvPr id="12" name="TextBox 11"/>
+          <p:cNvSpPr txBox="1"/>
+          <p:nvPr/>
+        </p:nvSpPr>
+        <p:spPr>
+          <a:xfrm>
+            <a:off x="822960" y="4892039"/>
+            <a:ext cx="3515258" cy="731520"/>
+          </a:xfrm>
+          <a:prstGeom prst="rect">
+            <a:avLst/>
+          </a:prstGeom>
+          <a:noFill/>
+        </p:spPr>
+        <p:txBody>
+          <a:bodyPr wrap="square" anchor="t">
+            <a:spAutoFit/>
+          </a:bodyPr>
+          <a:lstStyle/>
+          <a:p>
+            <a:pPr algn="ctr">
+              <a:lnSpc>
+                <a:spcPct val="100000"/>
+              </a:lnSpc>
+            </a:pPr>
+            <a:r>
+              <a:rPr sz="1400" b="0">
+                <a:solidFill>
+                  <a:srgbClr val="545C6E"/>
+                </a:solidFill>
+                <a:latin typeface="Calibri"/>
+              </a:rPr>
+              <a:t>AI call</a:t>
+            </a:r>
+          </a:p>
+        </p:txBody>
+      </p:sp>
+      <p:sp>
+        <p:nvSpPr>
+          <p:cNvPr id="13" name="TextBox 12"/>
+          <p:cNvSpPr txBox="1"/>
+          <p:nvPr/>
+        </p:nvSpPr>
+        <p:spPr>
+          <a:xfrm>
+            <a:off x="4338218" y="3749039"/>
+            <a:ext cx="3515258" cy="1188720"/>
+          </a:xfrm>
+          <a:prstGeom prst="rect">
+            <a:avLst/>
+          </a:prstGeom>
+          <a:noFill/>
+        </p:spPr>
+        <p:txBody>
+          <a:bodyPr wrap="square" anchor="t">
+            <a:spAutoFit/>
+          </a:bodyPr>
+          <a:lstStyle/>
+          <a:p>
+            <a:pPr algn="ctr">
+              <a:lnSpc>
+                <a:spcPct val="100000"/>
+              </a:lnSpc>
+            </a:pPr>
+            <a:r>
+              <a:rPr sz="6000" b="1">
+                <a:solidFill>
+                  <a:srgbClr val="A85B00"/>
+                </a:solidFill>
+                <a:latin typeface="Calibri"/>
+              </a:rPr>
+              <a:t>1.7%</a:t>
+            </a:r>
+          </a:p>
+        </p:txBody>
+      </p:sp>
+      <p:sp>
+        <p:nvSpPr>
+          <p:cNvPr id="14" name="TextBox 13"/>
+          <p:cNvSpPr txBox="1"/>
+          <p:nvPr/>
+        </p:nvSpPr>
+        <p:spPr>
+          <a:xfrm>
+            <a:off x="4338218" y="4892039"/>
+            <a:ext cx="3515258" cy="731520"/>
+          </a:xfrm>
+          <a:prstGeom prst="rect">
+            <a:avLst/>
+          </a:prstGeom>
+          <a:noFill/>
+        </p:spPr>
+        <p:txBody>
+          <a:bodyPr wrap="square" anchor="t">
+            <a:spAutoFit/>
+          </a:bodyPr>
+          <a:lstStyle/>
+          <a:p>
+            <a:pPr algn="ctr">
+              <a:lnSpc>
+                <a:spcPct val="100000"/>
+              </a:lnSpc>
+            </a:pPr>
+            <a:r>
+              <a:rPr sz="1400" b="0">
+                <a:solidFill>
+                  <a:srgbClr val="545C6E"/>
+                </a:solidFill>
+                <a:latin typeface="Calibri"/>
+              </a:rPr>
+              <a:t>of its prices matched a real fare</a:t>
+            </a:r>
+          </a:p>
+        </p:txBody>
+      </p:sp>
+      <p:sp>
+        <p:nvSpPr>
+          <p:cNvPr id="15" name="TextBox 14"/>
+          <p:cNvSpPr txBox="1"/>
+          <p:nvPr/>
+        </p:nvSpPr>
+        <p:spPr>
+          <a:xfrm>
+            <a:off x="7853476" y="3749039"/>
+            <a:ext cx="3515258" cy="1188720"/>
+          </a:xfrm>
+          <a:prstGeom prst="rect">
+            <a:avLst/>
+          </a:prstGeom>
+          <a:noFill/>
+        </p:spPr>
+        <p:txBody>
+          <a:bodyPr wrap="square" anchor="t">
+            <a:spAutoFit/>
+          </a:bodyPr>
+          <a:lstStyle/>
+          <a:p>
+            <a:pPr algn="ctr">
+              <a:lnSpc>
+                <a:spcPct val="100000"/>
+              </a:lnSpc>
+            </a:pPr>
+            <a:r>
+              <a:rPr sz="6000" b="1">
+                <a:solidFill>
+                  <a:srgbClr val="A85B00"/>
+                </a:solidFill>
+                <a:latin typeface="Calibri"/>
+              </a:rPr>
+              <a:t>27s</a:t>
+            </a:r>
+          </a:p>
+        </p:txBody>
+      </p:sp>
+      <p:sp>
+        <p:nvSpPr>
+          <p:cNvPr id="16" name="TextBox 15"/>
+          <p:cNvSpPr txBox="1"/>
+          <p:nvPr/>
+        </p:nvSpPr>
+        <p:spPr>
+          <a:xfrm>
+            <a:off x="7853476" y="4892039"/>
+            <a:ext cx="3515258" cy="731520"/>
+          </a:xfrm>
+          <a:prstGeom prst="rect">
+            <a:avLst/>
+          </a:prstGeom>
+          <a:noFill/>
+        </p:spPr>
+        <p:txBody>
+          <a:bodyPr wrap="square" anchor="t">
+            <a:spAutoFit/>
+          </a:bodyPr>
+          <a:lstStyle/>
+          <a:p>
+            <a:pPr algn="ctr">
+              <a:lnSpc>
+                <a:spcPct val="100000"/>
+              </a:lnSpc>
+            </a:pPr>
+            <a:r>
+              <a:rPr sz="1400" b="0">
+                <a:solidFill>
+                  <a:srgbClr val="545C6E"/>
+                </a:solidFill>
+                <a:latin typeface="Calibri"/>
+              </a:rPr>
+              <a:t>to produce the plan</a:t>
+            </a:r>
+          </a:p>
+        </p:txBody>
+      </p:sp>
+      <p:sp>
+        <p:nvSpPr>
+          <p:cNvPr id="17" name="TextBox 16"/>
+          <p:cNvSpPr txBox="1"/>
+          <p:nvPr/>
+        </p:nvSpPr>
+        <p:spPr>
+          <a:xfrm>
+            <a:off x="822960" y="5532120"/>
+            <a:ext cx="10515600" cy="822960"/>
+          </a:xfrm>
+          <a:prstGeom prst="rect">
+            <a:avLst/>
+          </a:prstGeom>
+          <a:noFill/>
+        </p:spPr>
+        <p:txBody>
+          <a:bodyPr wrap="square" anchor="t">
+            <a:spAutoFit/>
+          </a:bodyPr>
+          <a:lstStyle/>
+          <a:p>
+            <a:pPr algn="l">
+              <a:lnSpc>
+                <a:spcPct val="100000"/>
+              </a:lnSpc>
+            </a:pPr>
+            <a:r>
+              <a:rPr sz="1800" b="1">
+                <a:solidFill>
+                  <a:srgbClr val="A85B00"/>
+                </a:solidFill>
+                <a:latin typeface="Calibri"/>
+              </a:rPr>
+              <a:t>Cheap and fast, and the information cannot be trusted. That is what this approach is here to show.</a:t>
             </a:r>
           </a:p>
         </p:txBody>
@@ -8413,7 +9076,7 @@
 </p:sld>
 </file>
 
-<file path=ppt/slides/slide8.xml><?xml version="1.0" encoding="utf-8"?>
+<file path=ppt/slides/slide6.xml><?xml version="1.0" encoding="utf-8"?>
 <p:sld xmlns:a="http://schemas.openxmlformats.org/drawingml/2006/main" xmlns:p="http://schemas.openxmlformats.org/presentationml/2006/main" xmlns:r="http://schemas.openxmlformats.org/officeDocument/2006/relationships">
   <p:cSld>
     <p:spTree>
@@ -8457,7 +9120,7 @@
                 </a:solidFill>
                 <a:latin typeface="Calibri"/>
               </a:rPr>
-              <a:t>7  ·  THE BUDGET CHECK</a:t>
+              <a:t>5  ·  APPROACH B  —  6 AGENTS, NAIVE</a:t>
             </a:r>
           </a:p>
         </p:txBody>
@@ -8496,7 +9159,7 @@
                 </a:solidFill>
                 <a:latin typeface="Calibri"/>
               </a:rPr>
-              <a:t>It splits the money, then refuses the impossible</a:t>
+              <a:t>Every agent decides for itself</a:t>
             </a:r>
           </a:p>
         </p:txBody>
@@ -8555,7 +9218,7 @@
         </p:nvGraphicFramePr>
         <p:xfrm>
           <a:off x="822960" y="1965960"/>
-          <a:ext cx="10515599" cy="1828800"/>
+          <a:ext cx="10515599" cy="2194560"/>
         </p:xfrm>
         <a:graphic>
           <a:graphicData uri="http://schemas.openxmlformats.org/drawingml/2006/table">
@@ -8564,8 +9227,8 @@
                 <a:tableStyleId>{5C22544A-7EE6-4342-B048-85BDC9FD1C3A}</a:tableStyleId>
               </a:tblPr>
               <a:tblGrid>
-                <a:gridCol w="1602377"/>
-                <a:gridCol w="8913222"/>
+                <a:gridCol w="6036733"/>
+                <a:gridCol w="4478866"/>
               </a:tblGrid>
               <a:tr h="365760">
                 <a:tc>
@@ -8574,13 +9237,13 @@
                     <a:lstStyle/>
                     <a:p>
                       <a:r>
-                        <a:rPr sz="1350" b="1">
+                        <a:rPr sz="1300" b="1">
                           <a:solidFill>
                             <a:srgbClr val="FFFFFF"/>
                           </a:solidFill>
                           <a:latin typeface="Calibri"/>
                         </a:rPr>
-                        <a:t>Step</a:t>
+                        <a:t>The hotel agent's thinking</a:t>
                       </a:r>
                     </a:p>
                   </a:txBody>
@@ -8596,13 +9259,13 @@
                     <a:lstStyle/>
                     <a:p>
                       <a:r>
-                        <a:rPr sz="1350" b="1">
+                        <a:rPr sz="1300" b="1">
                           <a:solidFill>
                             <a:srgbClr val="FFFFFF"/>
                           </a:solidFill>
                           <a:latin typeface="Calibri"/>
                         </a:rPr>
-                        <a:t>What it does</a:t>
+                        <a:t>Each line is a separate AI call</a:t>
                       </a:r>
                     </a:p>
                   </a:txBody>
@@ -8620,13 +9283,13 @@
                     <a:lstStyle/>
                     <a:p>
                       <a:r>
-                        <a:rPr sz="1350" b="0">
+                        <a:rPr sz="1300" b="0">
                           <a:solidFill>
                             <a:srgbClr val="161A23"/>
                           </a:solidFill>
                           <a:latin typeface="Calibri"/>
                         </a:rPr>
-                        <a:t>1  Split</a:t>
+                        <a:t>"I need Istanbul's destination ID"</a:t>
                       </a:r>
                     </a:p>
                   </a:txBody>
@@ -8642,13 +9305,13 @@
                     <a:lstStyle/>
                     <a:p>
                       <a:r>
-                        <a:rPr sz="1350" b="0">
+                        <a:rPr sz="1300" b="0">
                           <a:solidFill>
                             <a:srgbClr val="161A23"/>
                           </a:solidFill>
                           <a:latin typeface="Calibri"/>
                         </a:rPr>
-                        <a:t>Divides the budget across flights, hotel, food and things to do - based on this trip, not a fixed share</a:t>
+                        <a:t>tool call</a:t>
                       </a:r>
                     </a:p>
                   </a:txBody>
@@ -8666,13 +9329,13 @@
                     <a:lstStyle/>
                     <a:p>
                       <a:r>
-                        <a:rPr sz="1350" b="0">
+                        <a:rPr sz="1300" b="0">
                           <a:solidFill>
                             <a:srgbClr val="161A23"/>
                           </a:solidFill>
                           <a:latin typeface="Calibri"/>
                         </a:rPr>
-                        <a:t>2  Listen</a:t>
+                        <a:t>"Now I'll search hotels"</a:t>
                       </a:r>
                     </a:p>
                   </a:txBody>
@@ -8688,13 +9351,13 @@
                     <a:lstStyle/>
                     <a:p>
                       <a:r>
-                        <a:rPr sz="1350" b="0">
+                        <a:rPr sz="1300" b="0">
                           <a:solidFill>
                             <a:srgbClr val="161A23"/>
                           </a:solidFill>
                           <a:latin typeface="Calibri"/>
                         </a:rPr>
-                        <a:t>"a luxury stay" moves money to the hotel; "I can compromise" moves it to experiences</a:t>
+                        <a:t>tool call - 12,000 characters back</a:t>
                       </a:r>
                     </a:p>
                   </a:txBody>
@@ -8712,13 +9375,13 @@
                     <a:lstStyle/>
                     <a:p>
                       <a:r>
-                        <a:rPr sz="1350" b="0">
+                        <a:rPr sz="1300" b="0">
                           <a:solidFill>
                             <a:srgbClr val="161A23"/>
                           </a:solidFill>
                           <a:latin typeface="Calibri"/>
                         </a:rPr>
-                        <a:t>3  Check</a:t>
+                        <a:t>"Maybe I should check the reviews"</a:t>
                       </a:r>
                     </a:p>
                   </a:txBody>
@@ -8734,13 +9397,13 @@
                     <a:lstStyle/>
                     <a:p>
                       <a:r>
-                        <a:rPr sz="1350" b="0">
+                        <a:rPr sz="1300" b="0">
                           <a:solidFill>
                             <a:srgbClr val="161A23"/>
                           </a:solidFill>
                           <a:latin typeface="Calibri"/>
                         </a:rPr>
-                        <a:t>Works out the cheapest this trip could possibly cost</a:t>
+                        <a:t>tool call</a:t>
                       </a:r>
                     </a:p>
                   </a:txBody>
@@ -8758,13 +9421,13 @@
                     <a:lstStyle/>
                     <a:p>
                       <a:r>
-                        <a:rPr sz="1350" b="0">
+                        <a:rPr sz="1300" b="0">
                           <a:solidFill>
                             <a:srgbClr val="161A23"/>
                           </a:solidFill>
                           <a:latin typeface="Calibri"/>
                         </a:rPr>
-                        <a:t>4  Refuse</a:t>
+                        <a:t>"Maybe I should look at nearby attractions"</a:t>
                       </a:r>
                     </a:p>
                   </a:txBody>
@@ -8780,19 +9443,65 @@
                     <a:lstStyle/>
                     <a:p>
                       <a:r>
-                        <a:rPr sz="1350" b="0">
+                        <a:rPr sz="1300" b="0">
                           <a:solidFill>
                             <a:srgbClr val="161A23"/>
                           </a:solidFill>
                           <a:latin typeface="Calibri"/>
                         </a:rPr>
-                        <a:t>If the budget is below that, it says so and offers three ways to fix it</a:t>
+                        <a:t>tool call</a:t>
                       </a:r>
                     </a:p>
                   </a:txBody>
                   <a:tcPr>
                     <a:solidFill>
                       <a:srgbClr val="F7F8FC"/>
+                    </a:solidFill>
+                  </a:tcPr>
+                </a:tc>
+              </a:tr>
+              <a:tr h="365760">
+                <a:tc>
+                  <a:txBody>
+                    <a:bodyPr/>
+                    <a:lstStyle/>
+                    <a:p>
+                      <a:r>
+                        <a:rPr sz="1300" b="0">
+                          <a:solidFill>
+                            <a:srgbClr val="161A23"/>
+                          </a:solidFill>
+                          <a:latin typeface="Calibri"/>
+                        </a:rPr>
+                        <a:t>...and it may keep going, up to 10 steps</a:t>
+                      </a:r>
+                    </a:p>
+                  </a:txBody>
+                  <a:tcPr>
+                    <a:solidFill>
+                      <a:srgbClr val="FFFFFF"/>
+                    </a:solidFill>
+                  </a:tcPr>
+                </a:tc>
+                <a:tc>
+                  <a:txBody>
+                    <a:bodyPr/>
+                    <a:lstStyle/>
+                    <a:p>
+                      <a:r>
+                        <a:rPr sz="1300" b="0">
+                          <a:solidFill>
+                            <a:srgbClr val="161A23"/>
+                          </a:solidFill>
+                          <a:latin typeface="Calibri"/>
+                        </a:rPr>
+                        <a:t>8 tool descriptions re-sent every single time</a:t>
+                      </a:r>
+                    </a:p>
+                  </a:txBody>
+                  <a:tcPr>
+                    <a:solidFill>
+                      <a:srgbClr val="FFFFFF"/>
                     </a:solidFill>
                   </a:tcPr>
                 </a:tc>
@@ -8809,7 +9518,7 @@
         </p:nvSpPr>
         <p:spPr>
           <a:xfrm>
-            <a:off x="822960" y="4617720"/>
+            <a:off x="822960" y="4297680"/>
             <a:ext cx="3515258" cy="1188720"/>
           </a:xfrm>
           <a:prstGeom prst="rect">
@@ -8835,7 +9544,7 @@
                 </a:solidFill>
                 <a:latin typeface="Calibri"/>
               </a:rPr>
-              <a:t>$800</a:t>
+              <a:t>21</a:t>
             </a:r>
           </a:p>
         </p:txBody>
@@ -8848,7 +9557,7 @@
         </p:nvSpPr>
         <p:spPr>
           <a:xfrm>
-            <a:off x="822960" y="5760720"/>
+            <a:off x="822960" y="5440680"/>
             <a:ext cx="3515258" cy="731520"/>
           </a:xfrm>
           <a:prstGeom prst="rect">
@@ -8874,7 +9583,7 @@
                 </a:solidFill>
                 <a:latin typeface="Calibri"/>
               </a:rPr>
-              <a:t>traveller asked for</a:t>
+              <a:t>AI calls per trip</a:t>
             </a:r>
           </a:p>
         </p:txBody>
@@ -8887,7 +9596,7 @@
         </p:nvSpPr>
         <p:spPr>
           <a:xfrm>
-            <a:off x="4338218" y="4617720"/>
+            <a:off x="4338218" y="4297680"/>
             <a:ext cx="3515258" cy="1188720"/>
           </a:xfrm>
           <a:prstGeom prst="rect">
@@ -8913,7 +9622,7 @@
                 </a:solidFill>
                 <a:latin typeface="Calibri"/>
               </a:rPr>
-              <a:t>$837</a:t>
+              <a:t>372s</a:t>
             </a:r>
           </a:p>
         </p:txBody>
@@ -8926,7 +9635,7 @@
         </p:nvSpPr>
         <p:spPr>
           <a:xfrm>
-            <a:off x="4338218" y="5760720"/>
+            <a:off x="4338218" y="5440680"/>
             <a:ext cx="3515258" cy="731520"/>
           </a:xfrm>
           <a:prstGeom prst="rect">
@@ -8952,7 +9661,7 @@
                 </a:solidFill>
                 <a:latin typeface="Calibri"/>
               </a:rPr>
-              <a:t>cheapest it can be done</a:t>
+              <a:t>to plan one trip</a:t>
             </a:r>
           </a:p>
         </p:txBody>
@@ -8965,7 +9674,7 @@
         </p:nvSpPr>
         <p:spPr>
           <a:xfrm>
-            <a:off x="7853476" y="4617720"/>
+            <a:off x="7853476" y="4297680"/>
             <a:ext cx="3515258" cy="1188720"/>
           </a:xfrm>
           <a:prstGeom prst="rect">
@@ -8991,7 +9700,7 @@
                 </a:solidFill>
                 <a:latin typeface="Calibri"/>
               </a:rPr>
-              <a:t>REFUSED</a:t>
+              <a:t>2</a:t>
             </a:r>
           </a:p>
         </p:txBody>
@@ -9004,7 +9713,7 @@
         </p:nvSpPr>
         <p:spPr>
           <a:xfrm>
-            <a:off x="7853476" y="5760720"/>
+            <a:off x="7853476" y="5440680"/>
             <a:ext cx="3515258" cy="731520"/>
           </a:xfrm>
           <a:prstGeom prst="rect">
@@ -9030,7 +9739,7 @@
                 </a:solidFill>
                 <a:latin typeface="Calibri"/>
               </a:rPr>
-              <a:t>with reasons given</a:t>
+              <a:t>tools it never called at all</a:t>
             </a:r>
           </a:p>
         </p:txBody>
@@ -9043,8 +9752,8 @@
         </p:nvSpPr>
         <p:spPr>
           <a:xfrm>
-            <a:off x="822960" y="6035040"/>
-            <a:ext cx="10515600" cy="548640"/>
+            <a:off x="822960" y="5943600"/>
+            <a:ext cx="10515600" cy="640080"/>
           </a:xfrm>
           <a:prstGeom prst="rect">
             <a:avLst/>
@@ -9063,13 +9772,13 @@
               </a:lnSpc>
             </a:pPr>
             <a:r>
-              <a:rPr sz="1500" b="0">
+              <a:rPr sz="1700" b="1">
                 <a:solidFill>
-                  <a:srgbClr val="545C6E"/>
+                  <a:srgbClr val="A85B00"/>
                 </a:solidFill>
                 <a:latin typeface="Calibri"/>
               </a:rPr>
-              <a:t>It uses the real recorded price. The built-in table said $350; the API returned $734.</a:t>
+              <a:t>Too much freedom: it keeps thinking and searching when it does not need to - and still skipped tools.</a:t>
             </a:r>
           </a:p>
         </p:txBody>
@@ -9082,7 +9791,7 @@
 </p:sld>
 </file>
 
-<file path=ppt/slides/slide9.xml><?xml version="1.0" encoding="utf-8"?>
+<file path=ppt/slides/slide7.xml><?xml version="1.0" encoding="utf-8"?>
 <p:sld xmlns:a="http://schemas.openxmlformats.org/drawingml/2006/main" xmlns:p="http://schemas.openxmlformats.org/presentationml/2006/main" xmlns:r="http://schemas.openxmlformats.org/officeDocument/2006/relationships">
   <p:cSld>
     <p:spTree>
@@ -9126,7 +9835,7 @@
                 </a:solidFill>
                 <a:latin typeface="Calibri"/>
               </a:rPr>
-              <a:t>8  ·  RESULTS</a:t>
+              <a:t>6  ·  APPROACH C  —  6 AGENTS, TUNED</a:t>
             </a:r>
           </a:p>
         </p:txBody>
@@ -9165,7 +9874,7 @@
                 </a:solidFill>
                 <a:latin typeface="Calibri"/>
               </a:rPr>
-              <a:t>Cheaper, and just as accurate</a:t>
+              <a:t>Approach B done properly</a:t>
             </a:r>
           </a:p>
         </p:txBody>
@@ -9214,30 +9923,373 @@
           </a:p>
         </p:txBody>
       </p:sp>
-      <p:pic>
-        <p:nvPicPr>
-          <p:cNvPr id="5" name="Picture 4" descr="efficiency.png"/>
-          <p:cNvPicPr>
-            <a:picLocks noChangeAspect="1"/>
-          </p:cNvPicPr>
+      <p:graphicFrame>
+        <p:nvGraphicFramePr>
+          <p:cNvPr id="5" name="Table 4"/>
+          <p:cNvGraphicFramePr>
+            <a:graphicFrameLocks noGrp="1"/>
+          </p:cNvGraphicFramePr>
           <p:nvPr/>
-        </p:nvPicPr>
-        <p:blipFill>
-          <a:blip r:embed="rId2"/>
-          <a:stretch>
-            <a:fillRect/>
-          </a:stretch>
-        </p:blipFill>
-        <p:spPr>
-          <a:xfrm>
-            <a:off x="3156962" y="1737360"/>
-            <a:ext cx="5877771" cy="3474720"/>
-          </a:xfrm>
-          <a:prstGeom prst="rect">
-            <a:avLst/>
-          </a:prstGeom>
-        </p:spPr>
-      </p:pic>
+        </p:nvGraphicFramePr>
+        <p:xfrm>
+          <a:off x="822960" y="2011680"/>
+          <a:ext cx="10515598" cy="1828800"/>
+        </p:xfrm>
+        <a:graphic>
+          <a:graphicData uri="http://schemas.openxmlformats.org/drawingml/2006/table">
+            <a:tbl>
+              <a:tblPr firstRow="1" bandRow="1">
+                <a:tableStyleId>{5C22544A-7EE6-4342-B048-85BDC9FD1C3A}</a:tableStyleId>
+              </a:tblPr>
+              <a:tblGrid>
+                <a:gridCol w="2804159"/>
+                <a:gridCol w="4005942"/>
+                <a:gridCol w="3705497"/>
+              </a:tblGrid>
+              <a:tr h="365760">
+                <a:tc>
+                  <a:txBody>
+                    <a:bodyPr/>
+                    <a:lstStyle/>
+                    <a:p>
+                      <a:r>
+                        <a:rPr sz="1350" b="1">
+                          <a:solidFill>
+                            <a:srgbClr val="FFFFFF"/>
+                          </a:solidFill>
+                          <a:latin typeface="Calibri"/>
+                        </a:rPr>
+                        <a:t> </a:t>
+                      </a:r>
+                    </a:p>
+                  </a:txBody>
+                  <a:tcPr>
+                    <a:solidFill>
+                      <a:srgbClr val="4338CA"/>
+                    </a:solidFill>
+                  </a:tcPr>
+                </a:tc>
+                <a:tc>
+                  <a:txBody>
+                    <a:bodyPr/>
+                    <a:lstStyle/>
+                    <a:p>
+                      <a:r>
+                        <a:rPr sz="1350" b="1">
+                          <a:solidFill>
+                            <a:srgbClr val="FFFFFF"/>
+                          </a:solidFill>
+                          <a:latin typeface="Calibri"/>
+                        </a:rPr>
+                        <a:t>Approach B</a:t>
+                      </a:r>
+                    </a:p>
+                  </a:txBody>
+                  <a:tcPr>
+                    <a:solidFill>
+                      <a:srgbClr val="4338CA"/>
+                    </a:solidFill>
+                  </a:tcPr>
+                </a:tc>
+                <a:tc>
+                  <a:txBody>
+                    <a:bodyPr/>
+                    <a:lstStyle/>
+                    <a:p>
+                      <a:r>
+                        <a:rPr sz="1350" b="1">
+                          <a:solidFill>
+                            <a:srgbClr val="FFFFFF"/>
+                          </a:solidFill>
+                          <a:latin typeface="Calibri"/>
+                        </a:rPr>
+                        <a:t>Approach C</a:t>
+                      </a:r>
+                    </a:p>
+                  </a:txBody>
+                  <a:tcPr>
+                    <a:solidFill>
+                      <a:srgbClr val="4338CA"/>
+                    </a:solidFill>
+                  </a:tcPr>
+                </a:tc>
+              </a:tr>
+              <a:tr h="365760">
+                <a:tc>
+                  <a:txBody>
+                    <a:bodyPr/>
+                    <a:lstStyle/>
+                    <a:p>
+                      <a:r>
+                        <a:rPr sz="1350" b="0">
+                          <a:solidFill>
+                            <a:srgbClr val="161A23"/>
+                          </a:solidFill>
+                          <a:latin typeface="Calibri"/>
+                        </a:rPr>
+                        <a:t>Tools per agent</a:t>
+                      </a:r>
+                    </a:p>
+                  </a:txBody>
+                  <a:tcPr>
+                    <a:solidFill>
+                      <a:srgbClr val="FFFFFF"/>
+                    </a:solidFill>
+                  </a:tcPr>
+                </a:tc>
+                <a:tc>
+                  <a:txBody>
+                    <a:bodyPr/>
+                    <a:lstStyle/>
+                    <a:p>
+                      <a:r>
+                        <a:rPr sz="1350" b="0">
+                          <a:solidFill>
+                            <a:srgbClr val="161A23"/>
+                          </a:solidFill>
+                          <a:latin typeface="Calibri"/>
+                        </a:rPr>
+                        <a:t>up to 8</a:t>
+                      </a:r>
+                    </a:p>
+                  </a:txBody>
+                  <a:tcPr>
+                    <a:solidFill>
+                      <a:srgbClr val="FFFFFF"/>
+                    </a:solidFill>
+                  </a:tcPr>
+                </a:tc>
+                <a:tc>
+                  <a:txBody>
+                    <a:bodyPr/>
+                    <a:lstStyle/>
+                    <a:p>
+                      <a:r>
+                        <a:rPr sz="1350" b="0">
+                          <a:solidFill>
+                            <a:srgbClr val="161A23"/>
+                          </a:solidFill>
+                          <a:latin typeface="Calibri"/>
+                        </a:rPr>
+                        <a:t>1 or 2</a:t>
+                      </a:r>
+                    </a:p>
+                  </a:txBody>
+                  <a:tcPr>
+                    <a:solidFill>
+                      <a:srgbClr val="FFFFFF"/>
+                    </a:solidFill>
+                  </a:tcPr>
+                </a:tc>
+              </a:tr>
+              <a:tr h="365760">
+                <a:tc>
+                  <a:txBody>
+                    <a:bodyPr/>
+                    <a:lstStyle/>
+                    <a:p>
+                      <a:r>
+                        <a:rPr sz="1350" b="0">
+                          <a:solidFill>
+                            <a:srgbClr val="161A23"/>
+                          </a:solidFill>
+                          <a:latin typeface="Calibri"/>
+                        </a:rPr>
+                        <a:t>Thinking steps allowed</a:t>
+                      </a:r>
+                    </a:p>
+                  </a:txBody>
+                  <a:tcPr>
+                    <a:solidFill>
+                      <a:srgbClr val="F7F8FC"/>
+                    </a:solidFill>
+                  </a:tcPr>
+                </a:tc>
+                <a:tc>
+                  <a:txBody>
+                    <a:bodyPr/>
+                    <a:lstStyle/>
+                    <a:p>
+                      <a:r>
+                        <a:rPr sz="1350" b="0">
+                          <a:solidFill>
+                            <a:srgbClr val="161A23"/>
+                          </a:solidFill>
+                          <a:latin typeface="Calibri"/>
+                        </a:rPr>
+                        <a:t>8 to 15</a:t>
+                      </a:r>
+                    </a:p>
+                  </a:txBody>
+                  <a:tcPr>
+                    <a:solidFill>
+                      <a:srgbClr val="F7F8FC"/>
+                    </a:solidFill>
+                  </a:tcPr>
+                </a:tc>
+                <a:tc>
+                  <a:txBody>
+                    <a:bodyPr/>
+                    <a:lstStyle/>
+                    <a:p>
+                      <a:r>
+                        <a:rPr sz="1350" b="0">
+                          <a:solidFill>
+                            <a:srgbClr val="161A23"/>
+                          </a:solidFill>
+                          <a:latin typeface="Calibri"/>
+                        </a:rPr>
+                        <a:t>3</a:t>
+                      </a:r>
+                    </a:p>
+                  </a:txBody>
+                  <a:tcPr>
+                    <a:solidFill>
+                      <a:srgbClr val="F7F8FC"/>
+                    </a:solidFill>
+                  </a:tcPr>
+                </a:tc>
+              </a:tr>
+              <a:tr h="365760">
+                <a:tc>
+                  <a:txBody>
+                    <a:bodyPr/>
+                    <a:lstStyle/>
+                    <a:p>
+                      <a:r>
+                        <a:rPr sz="1350" b="0">
+                          <a:solidFill>
+                            <a:srgbClr val="161A23"/>
+                          </a:solidFill>
+                          <a:latin typeface="Calibri"/>
+                        </a:rPr>
+                        <a:t>What the AI is sent</a:t>
+                      </a:r>
+                    </a:p>
+                  </a:txBody>
+                  <a:tcPr>
+                    <a:solidFill>
+                      <a:srgbClr val="FFFFFF"/>
+                    </a:solidFill>
+                  </a:tcPr>
+                </a:tc>
+                <a:tc>
+                  <a:txBody>
+                    <a:bodyPr/>
+                    <a:lstStyle/>
+                    <a:p>
+                      <a:r>
+                        <a:rPr sz="1350" b="0">
+                          <a:solidFill>
+                            <a:srgbClr val="161A23"/>
+                          </a:solidFill>
+                          <a:latin typeface="Calibri"/>
+                        </a:rPr>
+                        <a:t>the full 12,000-character API reply</a:t>
+                      </a:r>
+                    </a:p>
+                  </a:txBody>
+                  <a:tcPr>
+                    <a:solidFill>
+                      <a:srgbClr val="FFFFFF"/>
+                    </a:solidFill>
+                  </a:tcPr>
+                </a:tc>
+                <a:tc>
+                  <a:txBody>
+                    <a:bodyPr/>
+                    <a:lstStyle/>
+                    <a:p>
+                      <a:r>
+                        <a:rPr sz="1350" b="0">
+                          <a:solidFill>
+                            <a:srgbClr val="161A23"/>
+                          </a:solidFill>
+                          <a:latin typeface="Calibri"/>
+                        </a:rPr>
+                        <a:t>the best 3 results, trimmed</a:t>
+                      </a:r>
+                    </a:p>
+                  </a:txBody>
+                  <a:tcPr>
+                    <a:solidFill>
+                      <a:srgbClr val="FFFFFF"/>
+                    </a:solidFill>
+                  </a:tcPr>
+                </a:tc>
+              </a:tr>
+              <a:tr h="365760">
+                <a:tc>
+                  <a:txBody>
+                    <a:bodyPr/>
+                    <a:lstStyle/>
+                    <a:p>
+                      <a:r>
+                        <a:rPr sz="1350" b="0">
+                          <a:solidFill>
+                            <a:srgbClr val="161A23"/>
+                          </a:solidFill>
+                          <a:latin typeface="Calibri"/>
+                        </a:rPr>
+                        <a:t>When agents run</a:t>
+                      </a:r>
+                    </a:p>
+                  </a:txBody>
+                  <a:tcPr>
+                    <a:solidFill>
+                      <a:srgbClr val="F7F8FC"/>
+                    </a:solidFill>
+                  </a:tcPr>
+                </a:tc>
+                <a:tc>
+                  <a:txBody>
+                    <a:bodyPr/>
+                    <a:lstStyle/>
+                    <a:p>
+                      <a:r>
+                        <a:rPr sz="1350" b="0">
+                          <a:solidFill>
+                            <a:srgbClr val="161A23"/>
+                          </a:solidFill>
+                          <a:latin typeface="Calibri"/>
+                        </a:rPr>
+                        <a:t>one after another</a:t>
+                      </a:r>
+                    </a:p>
+                  </a:txBody>
+                  <a:tcPr>
+                    <a:solidFill>
+                      <a:srgbClr val="F7F8FC"/>
+                    </a:solidFill>
+                  </a:tcPr>
+                </a:tc>
+                <a:tc>
+                  <a:txBody>
+                    <a:bodyPr/>
+                    <a:lstStyle/>
+                    <a:p>
+                      <a:r>
+                        <a:rPr sz="1350" b="0">
+                          <a:solidFill>
+                            <a:srgbClr val="161A23"/>
+                          </a:solidFill>
+                          <a:latin typeface="Calibri"/>
+                        </a:rPr>
+                        <a:t>at the same time</a:t>
+                      </a:r>
+                    </a:p>
+                  </a:txBody>
+                  <a:tcPr>
+                    <a:solidFill>
+                      <a:srgbClr val="F7F8FC"/>
+                    </a:solidFill>
+                  </a:tcPr>
+                </a:tc>
+              </a:tr>
+            </a:tbl>
+          </a:graphicData>
+        </a:graphic>
+      </p:graphicFrame>
       <p:sp>
         <p:nvSpPr>
           <p:cNvPr id="6" name="TextBox 5"/>
@@ -9246,7 +10298,7 @@
         </p:nvSpPr>
         <p:spPr>
           <a:xfrm>
-            <a:off x="822960" y="5349240"/>
+            <a:off x="822960" y="4206240"/>
             <a:ext cx="3515258" cy="1188720"/>
           </a:xfrm>
           <a:prstGeom prst="rect">
@@ -9272,7 +10324,7 @@
                 </a:solidFill>
                 <a:latin typeface="Calibri"/>
               </a:rPr>
-              <a:t>15x</a:t>
+              <a:t>89%</a:t>
             </a:r>
           </a:p>
         </p:txBody>
@@ -9285,7 +10337,7 @@
         </p:nvSpPr>
         <p:spPr>
           <a:xfrm>
-            <a:off x="822960" y="6492240"/>
+            <a:off x="822960" y="5349240"/>
             <a:ext cx="3515258" cy="731520"/>
           </a:xfrm>
           <a:prstGeom prst="rect">
@@ -9311,7 +10363,7 @@
                 </a:solidFill>
                 <a:latin typeface="Calibri"/>
               </a:rPr>
-              <a:t>cheaper than the all-agent version</a:t>
+              <a:t>less text sent, from settings alone</a:t>
             </a:r>
           </a:p>
         </p:txBody>
@@ -9324,7 +10376,7 @@
         </p:nvSpPr>
         <p:spPr>
           <a:xfrm>
-            <a:off x="4338218" y="5349240"/>
+            <a:off x="4338218" y="4206240"/>
             <a:ext cx="3515258" cy="1188720"/>
           </a:xfrm>
           <a:prstGeom prst="rect">
@@ -9350,7 +10402,7 @@
                 </a:solidFill>
                 <a:latin typeface="Calibri"/>
               </a:rPr>
-              <a:t>47%</a:t>
+              <a:t>10</a:t>
             </a:r>
           </a:p>
         </p:txBody>
@@ -9363,7 +10415,7 @@
         </p:nvSpPr>
         <p:spPr>
           <a:xfrm>
-            <a:off x="4338218" y="6492240"/>
+            <a:off x="4338218" y="5349240"/>
             <a:ext cx="3515258" cy="731520"/>
           </a:xfrm>
           <a:prstGeom prst="rect">
@@ -9389,7 +10441,7 @@
                 </a:solidFill>
                 <a:latin typeface="Calibri"/>
               </a:rPr>
-              <a:t>of my plan's prices are real</a:t>
+              <a:t>AI calls, down from 21</a:t>
             </a:r>
           </a:p>
         </p:txBody>
@@ -9402,7 +10454,7 @@
         </p:nvSpPr>
         <p:spPr>
           <a:xfrm>
-            <a:off x="7853476" y="5349240"/>
+            <a:off x="7853476" y="4206240"/>
             <a:ext cx="3515258" cy="1188720"/>
           </a:xfrm>
           <a:prstGeom prst="rect">
@@ -9428,7 +10480,7 @@
                 </a:solidFill>
                 <a:latin typeface="Calibri"/>
               </a:rPr>
-              <a:t>3/9</a:t>
+              <a:t>56%</a:t>
             </a:r>
           </a:p>
         </p:txBody>
@@ -9441,7 +10493,7 @@
         </p:nvSpPr>
         <p:spPr>
           <a:xfrm>
-            <a:off x="7853476" y="6492240"/>
+            <a:off x="7853476" y="5349240"/>
             <a:ext cx="3515258" cy="731520"/>
           </a:xfrm>
           <a:prstGeom prst="rect">
@@ -9467,7 +10519,914 @@
                 </a:solidFill>
                 <a:latin typeface="Calibri"/>
               </a:rPr>
-              <a:t>of my own design checks pass</a:t>
+              <a:t>of its prices are real</a:t>
+            </a:r>
+          </a:p>
+        </p:txBody>
+      </p:sp>
+      <p:sp>
+        <p:nvSpPr>
+          <p:cNvPr id="12" name="TextBox 11"/>
+          <p:cNvSpPr txBox="1"/>
+          <p:nvPr/>
+        </p:nvSpPr>
+        <p:spPr>
+          <a:xfrm>
+            <a:off x="822960" y="5852160"/>
+            <a:ext cx="10515600" cy="731520"/>
+          </a:xfrm>
+          <a:prstGeom prst="rect">
+            <a:avLst/>
+          </a:prstGeom>
+          <a:noFill/>
+        </p:spPr>
+        <p:txBody>
+          <a:bodyPr wrap="square" anchor="t">
+            <a:spAutoFit/>
+          </a:bodyPr>
+          <a:lstStyle/>
+          <a:p>
+            <a:pPr algn="l">
+              <a:lnSpc>
+                <a:spcPct val="100000"/>
+              </a:lnSpc>
+            </a:pPr>
+            <a:r>
+              <a:rPr sz="1800" b="1">
+                <a:solidFill>
+                  <a:srgbClr val="4338CA"/>
+                </a:solidFill>
+                <a:latin typeface="Calibri"/>
+              </a:rPr>
+              <a:t>This is one of the biggest findings: most of B's cost was bad configuration, not the design.</a:t>
+            </a:r>
+          </a:p>
+        </p:txBody>
+      </p:sp>
+    </p:spTree>
+  </p:cSld>
+  <p:clrMapOvr>
+    <a:masterClrMapping/>
+  </p:clrMapOvr>
+</p:sld>
+</file>
+
+<file path=ppt/slides/slide8.xml><?xml version="1.0" encoding="utf-8"?>
+<p:sld xmlns:a="http://schemas.openxmlformats.org/drawingml/2006/main" xmlns:p="http://schemas.openxmlformats.org/presentationml/2006/main" xmlns:r="http://schemas.openxmlformats.org/officeDocument/2006/relationships">
+  <p:cSld>
+    <p:spTree>
+      <p:nvGrpSpPr>
+        <p:cNvPr id="1" name=""/>
+        <p:cNvGrpSpPr/>
+        <p:nvPr/>
+      </p:nvGrpSpPr>
+      <p:grpSpPr/>
+      <p:sp>
+        <p:nvSpPr>
+          <p:cNvPr id="2" name="TextBox 1"/>
+          <p:cNvSpPr txBox="1"/>
+          <p:nvPr/>
+        </p:nvSpPr>
+        <p:spPr>
+          <a:xfrm>
+            <a:off x="822960" y="457200"/>
+            <a:ext cx="10515600" cy="365760"/>
+          </a:xfrm>
+          <a:prstGeom prst="rect">
+            <a:avLst/>
+          </a:prstGeom>
+          <a:noFill/>
+        </p:spPr>
+        <p:txBody>
+          <a:bodyPr wrap="square" anchor="t">
+            <a:spAutoFit/>
+          </a:bodyPr>
+          <a:lstStyle/>
+          <a:p>
+            <a:pPr algn="l">
+              <a:lnSpc>
+                <a:spcPct val="100000"/>
+              </a:lnSpc>
+            </a:pPr>
+            <a:r>
+              <a:rPr sz="1200" b="1">
+                <a:solidFill>
+                  <a:srgbClr val="4338CA"/>
+                </a:solidFill>
+                <a:latin typeface="Calibri"/>
+              </a:rPr>
+              <a:t>7  ·  APPROACH D  —  3 AGENTS, DIRECT</a:t>
+            </a:r>
+          </a:p>
+        </p:txBody>
+      </p:sp>
+      <p:sp>
+        <p:nvSpPr>
+          <p:cNvPr id="3" name="TextBox 2"/>
+          <p:cNvSpPr txBox="1"/>
+          <p:nvPr/>
+        </p:nvSpPr>
+        <p:spPr>
+          <a:xfrm>
+            <a:off x="822960" y="777240"/>
+            <a:ext cx="10515600" cy="822960"/>
+          </a:xfrm>
+          <a:prstGeom prst="rect">
+            <a:avLst/>
+          </a:prstGeom>
+          <a:noFill/>
+        </p:spPr>
+        <p:txBody>
+          <a:bodyPr wrap="square" anchor="t">
+            <a:spAutoFit/>
+          </a:bodyPr>
+          <a:lstStyle/>
+          <a:p>
+            <a:pPr algn="l">
+              <a:lnSpc>
+                <a:spcPct val="100000"/>
+              </a:lnSpc>
+            </a:pPr>
+            <a:r>
+              <a:rPr sz="3200" b="1">
+                <a:solidFill>
+                  <a:srgbClr val="161A23"/>
+                </a:solidFill>
+                <a:latin typeface="Calibri"/>
+              </a:rPr>
+              <a:t>The design that ships</a:t>
+            </a:r>
+          </a:p>
+        </p:txBody>
+      </p:sp>
+      <p:sp>
+        <p:nvSpPr>
+          <p:cNvPr id="4" name="Rectangle 3"/>
+          <p:cNvSpPr/>
+          <p:nvPr/>
+        </p:nvSpPr>
+        <p:spPr>
+          <a:xfrm>
+            <a:off x="822960" y="1572768"/>
+            <a:ext cx="1005840" cy="34000"/>
+          </a:xfrm>
+          <a:prstGeom prst="rect">
+            <a:avLst/>
+          </a:prstGeom>
+          <a:solidFill>
+            <a:srgbClr val="4338CA"/>
+          </a:solidFill>
+          <a:ln>
+            <a:noFill/>
+          </a:ln>
+          <a:effectLst/>
+        </p:spPr>
+        <p:style>
+          <a:lnRef idx="1">
+            <a:schemeClr val="accent1"/>
+          </a:lnRef>
+          <a:fillRef idx="3">
+            <a:schemeClr val="accent1"/>
+          </a:fillRef>
+          <a:effectRef idx="2">
+            <a:schemeClr val="accent1"/>
+          </a:effectRef>
+          <a:fontRef idx="minor">
+            <a:schemeClr val="lt1"/>
+          </a:fontRef>
+        </p:style>
+        <p:txBody>
+          <a:bodyPr rtlCol="0" anchor="ctr"/>
+          <a:lstStyle/>
+          <a:p>
+            <a:pPr algn="ctr"/>
+          </a:p>
+        </p:txBody>
+      </p:sp>
+      <p:sp>
+        <p:nvSpPr>
+          <p:cNvPr id="5" name="Rounded Rectangle 4"/>
+          <p:cNvSpPr/>
+          <p:nvPr/>
+        </p:nvSpPr>
+        <p:spPr>
+          <a:xfrm>
+            <a:off x="3169767" y="1874519"/>
+            <a:ext cx="5852160" cy="731520"/>
+          </a:xfrm>
+          <a:prstGeom prst="roundRect">
+            <a:avLst/>
+          </a:prstGeom>
+          <a:solidFill>
+            <a:srgbClr val="4E3FB8"/>
+          </a:solidFill>
+          <a:ln>
+            <a:noFill/>
+          </a:ln>
+          <a:effectLst/>
+        </p:spPr>
+        <p:style>
+          <a:lnRef idx="1">
+            <a:schemeClr val="accent1"/>
+          </a:lnRef>
+          <a:fillRef idx="3">
+            <a:schemeClr val="accent1"/>
+          </a:fillRef>
+          <a:effectRef idx="2">
+            <a:schemeClr val="accent1"/>
+          </a:effectRef>
+          <a:fontRef idx="minor">
+            <a:schemeClr val="lt1"/>
+          </a:fontRef>
+        </p:style>
+        <p:txBody>
+          <a:bodyPr rtlCol="0" anchor="ctr" wrap="square"/>
+          <a:lstStyle/>
+          <a:p>
+            <a:pPr algn="ctr"/>
+            <a:r>
+              <a:rPr sz="1500" b="1">
+                <a:solidFill>
+                  <a:srgbClr val="FFFFFF"/>
+                </a:solidFill>
+                <a:latin typeface="Calibri"/>
+              </a:rPr>
+              <a:t>AI STEP 1     understand the request</a:t>
+            </a:r>
+          </a:p>
+        </p:txBody>
+      </p:sp>
+      <p:sp>
+        <p:nvSpPr>
+          <p:cNvPr id="6" name="TextBox 5"/>
+          <p:cNvSpPr txBox="1"/>
+          <p:nvPr/>
+        </p:nvSpPr>
+        <p:spPr>
+          <a:xfrm>
+            <a:off x="5730087" y="2651760"/>
+            <a:ext cx="731520" cy="292608"/>
+          </a:xfrm>
+          <a:prstGeom prst="rect">
+            <a:avLst/>
+          </a:prstGeom>
+          <a:noFill/>
+        </p:spPr>
+        <p:txBody>
+          <a:bodyPr wrap="square" anchor="t">
+            <a:spAutoFit/>
+          </a:bodyPr>
+          <a:lstStyle/>
+          <a:p>
+            <a:pPr algn="ctr">
+              <a:lnSpc>
+                <a:spcPct val="100000"/>
+              </a:lnSpc>
+            </a:pPr>
+            <a:r>
+              <a:rPr sz="1400" b="0">
+                <a:solidFill>
+                  <a:srgbClr val="8A91A0"/>
+                </a:solidFill>
+                <a:latin typeface="Calibri"/>
+              </a:rPr>
+              <a:t>▼</a:t>
+            </a:r>
+          </a:p>
+        </p:txBody>
+      </p:sp>
+      <p:sp>
+        <p:nvSpPr>
+          <p:cNvPr id="7" name="Rounded Rectangle 6"/>
+          <p:cNvSpPr/>
+          <p:nvPr/>
+        </p:nvSpPr>
+        <p:spPr>
+          <a:xfrm>
+            <a:off x="3169767" y="3017520"/>
+            <a:ext cx="5852160" cy="1371600"/>
+          </a:xfrm>
+          <a:prstGeom prst="roundRect">
+            <a:avLst/>
+          </a:prstGeom>
+          <a:solidFill>
+            <a:srgbClr val="D6F2E8"/>
+          </a:solidFill>
+          <a:ln>
+            <a:noFill/>
+          </a:ln>
+          <a:effectLst/>
+        </p:spPr>
+        <p:style>
+          <a:lnRef idx="1">
+            <a:schemeClr val="accent1"/>
+          </a:lnRef>
+          <a:fillRef idx="3">
+            <a:schemeClr val="accent1"/>
+          </a:fillRef>
+          <a:effectRef idx="2">
+            <a:schemeClr val="accent1"/>
+          </a:effectRef>
+          <a:fontRef idx="minor">
+            <a:schemeClr val="lt1"/>
+          </a:fontRef>
+        </p:style>
+        <p:txBody>
+          <a:bodyPr rtlCol="0" anchor="ctr" wrap="square"/>
+          <a:lstStyle/>
+          <a:p>
+            <a:pPr algn="ctr"/>
+            <a:r>
+              <a:rPr sz="1500" b="1">
+                <a:solidFill>
+                  <a:srgbClr val="161A23"/>
+                </a:solidFill>
+                <a:latin typeface="Calibri"/>
+              </a:rPr>
+              <a:t>PLAIN PYTHON     fetch flights, hotels,
+attractions and restaurants</a:t>
+            </a:r>
+          </a:p>
+        </p:txBody>
+      </p:sp>
+      <p:sp>
+        <p:nvSpPr>
+          <p:cNvPr id="8" name="TextBox 7"/>
+          <p:cNvSpPr txBox="1"/>
+          <p:nvPr/>
+        </p:nvSpPr>
+        <p:spPr>
+          <a:xfrm>
+            <a:off x="5730087" y="4434840"/>
+            <a:ext cx="731520" cy="292608"/>
+          </a:xfrm>
+          <a:prstGeom prst="rect">
+            <a:avLst/>
+          </a:prstGeom>
+          <a:noFill/>
+        </p:spPr>
+        <p:txBody>
+          <a:bodyPr wrap="square" anchor="t">
+            <a:spAutoFit/>
+          </a:bodyPr>
+          <a:lstStyle/>
+          <a:p>
+            <a:pPr algn="ctr">
+              <a:lnSpc>
+                <a:spcPct val="100000"/>
+              </a:lnSpc>
+            </a:pPr>
+            <a:r>
+              <a:rPr sz="1400" b="0">
+                <a:solidFill>
+                  <a:srgbClr val="8A91A0"/>
+                </a:solidFill>
+                <a:latin typeface="Calibri"/>
+              </a:rPr>
+              <a:t>▼</a:t>
+            </a:r>
+          </a:p>
+        </p:txBody>
+      </p:sp>
+      <p:sp>
+        <p:nvSpPr>
+          <p:cNvPr id="9" name="Rounded Rectangle 8"/>
+          <p:cNvSpPr/>
+          <p:nvPr/>
+        </p:nvSpPr>
+        <p:spPr>
+          <a:xfrm>
+            <a:off x="3169767" y="4800600"/>
+            <a:ext cx="5852160" cy="731520"/>
+          </a:xfrm>
+          <a:prstGeom prst="roundRect">
+            <a:avLst/>
+          </a:prstGeom>
+          <a:solidFill>
+            <a:srgbClr val="4E3FB8"/>
+          </a:solidFill>
+          <a:ln>
+            <a:noFill/>
+          </a:ln>
+          <a:effectLst/>
+        </p:spPr>
+        <p:style>
+          <a:lnRef idx="1">
+            <a:schemeClr val="accent1"/>
+          </a:lnRef>
+          <a:fillRef idx="3">
+            <a:schemeClr val="accent1"/>
+          </a:fillRef>
+          <a:effectRef idx="2">
+            <a:schemeClr val="accent1"/>
+          </a:effectRef>
+          <a:fontRef idx="minor">
+            <a:schemeClr val="lt1"/>
+          </a:fontRef>
+        </p:style>
+        <p:txBody>
+          <a:bodyPr rtlCol="0" anchor="ctr" wrap="square"/>
+          <a:lstStyle/>
+          <a:p>
+            <a:pPr algn="ctr"/>
+            <a:r>
+              <a:rPr sz="1500" b="1">
+                <a:solidFill>
+                  <a:srgbClr val="FFFFFF"/>
+                </a:solidFill>
+                <a:latin typeface="Calibri"/>
+              </a:rPr>
+              <a:t>AI STEP 2     build the day-by-day plan</a:t>
+            </a:r>
+          </a:p>
+        </p:txBody>
+      </p:sp>
+      <p:sp>
+        <p:nvSpPr>
+          <p:cNvPr id="10" name="TextBox 9"/>
+          <p:cNvSpPr txBox="1"/>
+          <p:nvPr/>
+        </p:nvSpPr>
+        <p:spPr>
+          <a:xfrm>
+            <a:off x="822960" y="5760720"/>
+            <a:ext cx="10515600" cy="822960"/>
+          </a:xfrm>
+          <a:prstGeom prst="rect">
+            <a:avLst/>
+          </a:prstGeom>
+          <a:noFill/>
+        </p:spPr>
+        <p:txBody>
+          <a:bodyPr wrap="square" anchor="t">
+            <a:spAutoFit/>
+          </a:bodyPr>
+          <a:lstStyle/>
+          <a:p>
+            <a:pPr algn="ctr">
+              <a:lnSpc>
+                <a:spcPct val="100000"/>
+              </a:lnSpc>
+            </a:pPr>
+            <a:r>
+              <a:rPr sz="1800" b="1">
+                <a:solidFill>
+                  <a:srgbClr val="161A23"/>
+                </a:solidFill>
+                <a:latin typeface="Calibri"/>
+              </a:rPr>
+              <a:t>Once we know the destination and the dates, searching is fixed. There is nothing left for AI to decide.</a:t>
+            </a:r>
+          </a:p>
+        </p:txBody>
+      </p:sp>
+    </p:spTree>
+  </p:cSld>
+  <p:clrMapOvr>
+    <a:masterClrMapping/>
+  </p:clrMapOvr>
+</p:sld>
+</file>
+
+<file path=ppt/slides/slide9.xml><?xml version="1.0" encoding="utf-8"?>
+<p:sld xmlns:a="http://schemas.openxmlformats.org/drawingml/2006/main" xmlns:p="http://schemas.openxmlformats.org/presentationml/2006/main" xmlns:r="http://schemas.openxmlformats.org/officeDocument/2006/relationships">
+  <p:cSld>
+    <p:spTree>
+      <p:nvGrpSpPr>
+        <p:cNvPr id="1" name=""/>
+        <p:cNvGrpSpPr/>
+        <p:nvPr/>
+      </p:nvGrpSpPr>
+      <p:grpSpPr/>
+      <p:sp>
+        <p:nvSpPr>
+          <p:cNvPr id="2" name="TextBox 1"/>
+          <p:cNvSpPr txBox="1"/>
+          <p:nvPr/>
+        </p:nvSpPr>
+        <p:spPr>
+          <a:xfrm>
+            <a:off x="822960" y="457200"/>
+            <a:ext cx="10515600" cy="365760"/>
+          </a:xfrm>
+          <a:prstGeom prst="rect">
+            <a:avLst/>
+          </a:prstGeom>
+          <a:noFill/>
+        </p:spPr>
+        <p:txBody>
+          <a:bodyPr wrap="square" anchor="t">
+            <a:spAutoFit/>
+          </a:bodyPr>
+          <a:lstStyle/>
+          <a:p>
+            <a:pPr algn="l">
+              <a:lnSpc>
+                <a:spcPct val="100000"/>
+              </a:lnSpc>
+            </a:pPr>
+            <a:r>
+              <a:rPr sz="1200" b="1">
+                <a:solidFill>
+                  <a:srgbClr val="4338CA"/>
+                </a:solidFill>
+                <a:latin typeface="Calibri"/>
+              </a:rPr>
+              <a:t>8  ·  WHERE THE TOOL SERVER FITS</a:t>
+            </a:r>
+          </a:p>
+        </p:txBody>
+      </p:sp>
+      <p:sp>
+        <p:nvSpPr>
+          <p:cNvPr id="3" name="TextBox 2"/>
+          <p:cNvSpPr txBox="1"/>
+          <p:nvPr/>
+        </p:nvSpPr>
+        <p:spPr>
+          <a:xfrm>
+            <a:off x="822960" y="777240"/>
+            <a:ext cx="10515600" cy="822960"/>
+          </a:xfrm>
+          <a:prstGeom prst="rect">
+            <a:avLst/>
+          </a:prstGeom>
+          <a:noFill/>
+        </p:spPr>
+        <p:txBody>
+          <a:bodyPr wrap="square" anchor="t">
+            <a:spAutoFit/>
+          </a:bodyPr>
+          <a:lstStyle/>
+          <a:p>
+            <a:pPr algn="l">
+              <a:lnSpc>
+                <a:spcPct val="100000"/>
+              </a:lnSpc>
+            </a:pPr>
+            <a:r>
+              <a:rPr sz="3200" b="1">
+                <a:solidFill>
+                  <a:srgbClr val="161A23"/>
+                </a:solidFill>
+                <a:latin typeface="Calibri"/>
+              </a:rPr>
+              <a:t>12 tools, but not every approach uses it the same way</a:t>
+            </a:r>
+          </a:p>
+        </p:txBody>
+      </p:sp>
+      <p:sp>
+        <p:nvSpPr>
+          <p:cNvPr id="4" name="Rectangle 3"/>
+          <p:cNvSpPr/>
+          <p:nvPr/>
+        </p:nvSpPr>
+        <p:spPr>
+          <a:xfrm>
+            <a:off x="822960" y="1572768"/>
+            <a:ext cx="1005840" cy="34000"/>
+          </a:xfrm>
+          <a:prstGeom prst="rect">
+            <a:avLst/>
+          </a:prstGeom>
+          <a:solidFill>
+            <a:srgbClr val="4338CA"/>
+          </a:solidFill>
+          <a:ln>
+            <a:noFill/>
+          </a:ln>
+          <a:effectLst/>
+        </p:spPr>
+        <p:style>
+          <a:lnRef idx="1">
+            <a:schemeClr val="accent1"/>
+          </a:lnRef>
+          <a:fillRef idx="3">
+            <a:schemeClr val="accent1"/>
+          </a:fillRef>
+          <a:effectRef idx="2">
+            <a:schemeClr val="accent1"/>
+          </a:effectRef>
+          <a:fontRef idx="minor">
+            <a:schemeClr val="lt1"/>
+          </a:fontRef>
+        </p:style>
+        <p:txBody>
+          <a:bodyPr rtlCol="0" anchor="ctr"/>
+          <a:lstStyle/>
+          <a:p>
+            <a:pPr algn="ctr"/>
+          </a:p>
+        </p:txBody>
+      </p:sp>
+      <p:graphicFrame>
+        <p:nvGraphicFramePr>
+          <p:cNvPr id="5" name="Table 4"/>
+          <p:cNvGraphicFramePr>
+            <a:graphicFrameLocks noGrp="1"/>
+          </p:cNvGraphicFramePr>
+          <p:nvPr/>
+        </p:nvGraphicFramePr>
+        <p:xfrm>
+          <a:off x="822960" y="2011680"/>
+          <a:ext cx="10515599" cy="1828800"/>
+        </p:xfrm>
+        <a:graphic>
+          <a:graphicData uri="http://schemas.openxmlformats.org/drawingml/2006/table">
+            <a:tbl>
+              <a:tblPr firstRow="1" bandRow="1">
+                <a:tableStyleId>{5C22544A-7EE6-4342-B048-85BDC9FD1C3A}</a:tableStyleId>
+              </a:tblPr>
+              <a:tblGrid>
+                <a:gridCol w="382385"/>
+                <a:gridCol w="10133214"/>
+              </a:tblGrid>
+              <a:tr h="365760">
+                <a:tc>
+                  <a:txBody>
+                    <a:bodyPr/>
+                    <a:lstStyle/>
+                    <a:p>
+                      <a:r>
+                        <a:rPr sz="1350" b="1">
+                          <a:solidFill>
+                            <a:srgbClr val="FFFFFF"/>
+                          </a:solidFill>
+                          <a:latin typeface="Calibri"/>
+                        </a:rPr>
+                        <a:t> </a:t>
+                      </a:r>
+                    </a:p>
+                  </a:txBody>
+                  <a:tcPr>
+                    <a:solidFill>
+                      <a:srgbClr val="4338CA"/>
+                    </a:solidFill>
+                  </a:tcPr>
+                </a:tc>
+                <a:tc>
+                  <a:txBody>
+                    <a:bodyPr/>
+                    <a:lstStyle/>
+                    <a:p>
+                      <a:r>
+                        <a:rPr sz="1350" b="1">
+                          <a:solidFill>
+                            <a:srgbClr val="FFFFFF"/>
+                          </a:solidFill>
+                          <a:latin typeface="Calibri"/>
+                        </a:rPr>
+                        <a:t>How it reaches a travel API</a:t>
+                      </a:r>
+                    </a:p>
+                  </a:txBody>
+                  <a:tcPr>
+                    <a:solidFill>
+                      <a:srgbClr val="4338CA"/>
+                    </a:solidFill>
+                  </a:tcPr>
+                </a:tc>
+              </a:tr>
+              <a:tr h="365760">
+                <a:tc>
+                  <a:txBody>
+                    <a:bodyPr/>
+                    <a:lstStyle/>
+                    <a:p>
+                      <a:r>
+                        <a:rPr sz="1350" b="0">
+                          <a:solidFill>
+                            <a:srgbClr val="161A23"/>
+                          </a:solidFill>
+                          <a:latin typeface="Calibri"/>
+                        </a:rPr>
+                        <a:t>A</a:t>
+                      </a:r>
+                    </a:p>
+                  </a:txBody>
+                  <a:tcPr>
+                    <a:solidFill>
+                      <a:srgbClr val="FFFFFF"/>
+                    </a:solidFill>
+                  </a:tcPr>
+                </a:tc>
+                <a:tc>
+                  <a:txBody>
+                    <a:bodyPr/>
+                    <a:lstStyle/>
+                    <a:p>
+                      <a:r>
+                        <a:rPr sz="1350" b="0">
+                          <a:solidFill>
+                            <a:srgbClr val="161A23"/>
+                          </a:solidFill>
+                          <a:latin typeface="Calibri"/>
+                        </a:rPr>
+                        <a:t>It does not. No tools at all</a:t>
+                      </a:r>
+                    </a:p>
+                  </a:txBody>
+                  <a:tcPr>
+                    <a:solidFill>
+                      <a:srgbClr val="FFFFFF"/>
+                    </a:solidFill>
+                  </a:tcPr>
+                </a:tc>
+              </a:tr>
+              <a:tr h="365760">
+                <a:tc>
+                  <a:txBody>
+                    <a:bodyPr/>
+                    <a:lstStyle/>
+                    <a:p>
+                      <a:r>
+                        <a:rPr sz="1350" b="0">
+                          <a:solidFill>
+                            <a:srgbClr val="161A23"/>
+                          </a:solidFill>
+                          <a:latin typeface="Calibri"/>
+                        </a:rPr>
+                        <a:t>B</a:t>
+                      </a:r>
+                    </a:p>
+                  </a:txBody>
+                  <a:tcPr>
+                    <a:solidFill>
+                      <a:srgbClr val="F7F8FC"/>
+                    </a:solidFill>
+                  </a:tcPr>
+                </a:tc>
+                <a:tc>
+                  <a:txBody>
+                    <a:bodyPr/>
+                    <a:lstStyle/>
+                    <a:p>
+                      <a:r>
+                        <a:rPr sz="1350" b="0">
+                          <a:solidFill>
+                            <a:srgbClr val="161A23"/>
+                          </a:solidFill>
+                          <a:latin typeface="Calibri"/>
+                        </a:rPr>
+                        <a:t>Agent -&gt; tool wrapper -&gt; MCP client -&gt; JSON-RPC -&gt; MCP server -&gt; travel API</a:t>
+                      </a:r>
+                    </a:p>
+                  </a:txBody>
+                  <a:tcPr>
+                    <a:solidFill>
+                      <a:srgbClr val="F7F8FC"/>
+                    </a:solidFill>
+                  </a:tcPr>
+                </a:tc>
+              </a:tr>
+              <a:tr h="365760">
+                <a:tc>
+                  <a:txBody>
+                    <a:bodyPr/>
+                    <a:lstStyle/>
+                    <a:p>
+                      <a:r>
+                        <a:rPr sz="1350" b="0">
+                          <a:solidFill>
+                            <a:srgbClr val="161A23"/>
+                          </a:solidFill>
+                          <a:latin typeface="Calibri"/>
+                        </a:rPr>
+                        <a:t>C</a:t>
+                      </a:r>
+                    </a:p>
+                  </a:txBody>
+                  <a:tcPr>
+                    <a:solidFill>
+                      <a:srgbClr val="FFFFFF"/>
+                    </a:solidFill>
+                  </a:tcPr>
+                </a:tc>
+                <a:tc>
+                  <a:txBody>
+                    <a:bodyPr/>
+                    <a:lstStyle/>
+                    <a:p>
+                      <a:r>
+                        <a:rPr sz="1350" b="0">
+                          <a:solidFill>
+                            <a:srgbClr val="161A23"/>
+                          </a:solidFill>
+                          <a:latin typeface="Calibri"/>
+                        </a:rPr>
+                        <a:t>Agent -&gt; the same server functions, called directly in the process. No JSON-RPC</a:t>
+                      </a:r>
+                    </a:p>
+                  </a:txBody>
+                  <a:tcPr>
+                    <a:solidFill>
+                      <a:srgbClr val="FFFFFF"/>
+                    </a:solidFill>
+                  </a:tcPr>
+                </a:tc>
+              </a:tr>
+              <a:tr h="365760">
+                <a:tc>
+                  <a:txBody>
+                    <a:bodyPr/>
+                    <a:lstStyle/>
+                    <a:p>
+                      <a:r>
+                        <a:rPr sz="1350" b="0">
+                          <a:solidFill>
+                            <a:srgbClr val="161A23"/>
+                          </a:solidFill>
+                          <a:latin typeface="Calibri"/>
+                        </a:rPr>
+                        <a:t>D</a:t>
+                      </a:r>
+                    </a:p>
+                  </a:txBody>
+                  <a:tcPr>
+                    <a:solidFill>
+                      <a:srgbClr val="F7F8FC"/>
+                    </a:solidFill>
+                  </a:tcPr>
+                </a:tc>
+                <a:tc>
+                  <a:txBody>
+                    <a:bodyPr/>
+                    <a:lstStyle/>
+                    <a:p>
+                      <a:r>
+                        <a:rPr sz="1350" b="0">
+                          <a:solidFill>
+                            <a:srgbClr val="161A23"/>
+                          </a:solidFill>
+                          <a:latin typeface="Calibri"/>
+                        </a:rPr>
+                        <a:t>Plain Python -&gt; the same server functions, called directly. Code decides when</a:t>
+                      </a:r>
+                    </a:p>
+                  </a:txBody>
+                  <a:tcPr>
+                    <a:solidFill>
+                      <a:srgbClr val="F7F8FC"/>
+                    </a:solidFill>
+                  </a:tcPr>
+                </a:tc>
+              </a:tr>
+            </a:tbl>
+          </a:graphicData>
+        </a:graphic>
+      </p:graphicFrame>
+      <p:sp>
+        <p:nvSpPr>
+          <p:cNvPr id="6" name="TextBox 5"/>
+          <p:cNvSpPr txBox="1"/>
+          <p:nvPr/>
+        </p:nvSpPr>
+        <p:spPr>
+          <a:xfrm>
+            <a:off x="822960" y="4754880"/>
+            <a:ext cx="10515600" cy="1371600"/>
+          </a:xfrm>
+          <a:prstGeom prst="rect">
+            <a:avLst/>
+          </a:prstGeom>
+          <a:noFill/>
+        </p:spPr>
+        <p:txBody>
+          <a:bodyPr wrap="square" anchor="t">
+            <a:spAutoFit/>
+          </a:bodyPr>
+          <a:lstStyle/>
+          <a:p>
+            <a:pPr algn="l">
+              <a:lnSpc>
+                <a:spcPct val="130000"/>
+              </a:lnSpc>
+            </a:pPr>
+            <a:r>
+              <a:rPr sz="1600" b="0">
+                <a:solidFill>
+                  <a:srgbClr val="545C6E"/>
+                </a:solidFill>
+                <a:latin typeface="Calibri"/>
+              </a:rPr>
+              <a:t>If asked "does the final system use the MCP server?"</a:t>
+            </a:r>
+          </a:p>
+          <a:p>
+            <a:pPr algn="l">
+              <a:lnSpc>
+                <a:spcPct val="130000"/>
+              </a:lnSpc>
+            </a:pPr>
+            <a:r>
+              <a:rPr sz="1700" b="1">
+                <a:solidFill>
+                  <a:srgbClr val="161A23"/>
+                </a:solidFill>
+                <a:latin typeface="Calibri"/>
+              </a:rPr>
+              <a:t>It uses the same tool functions the server exposes, but calls them in-process rather than over JSON-RPC. The protocol itself is exercised by Approach B and by the conformance audit.</a:t>
             </a:r>
           </a:p>
         </p:txBody>

--- a/submission/CMP7200_Viva_Presentation.pptx
+++ b/submission/CMP7200_Viva_Presentation.pptx
@@ -14,9 +14,6 @@
     <p:sldId id="262" r:id="rId14"/>
     <p:sldId id="263" r:id="rId15"/>
     <p:sldId id="264" r:id="rId16"/>
-    <p:sldId id="265" r:id="rId17"/>
-    <p:sldId id="266" r:id="rId18"/>
-    <p:sldId id="267" r:id="rId19"/>
   </p:sldIdLst>
   <p:sldSz cx="12191695" cy="6858000" type="screen4x3"/>
   <p:notesSz cx="6858000" cy="9144000"/>
@@ -513,217 +510,7 @@
           <a:lstStyle/>
           <a:p>
             <a:r>
-              <a:t>Twelve slides. A working travel planner, and one research question inside it: which parts actually need AI? I built it four ways and measured all four.</a:t>
-            </a:r>
-          </a:p>
-        </p:txBody>
-      </p:sp>
-      <p:sp>
-        <p:nvSpPr>
-          <p:cNvPr id="4" name="Slide Number Placeholder 3"/>
-          <p:cNvSpPr>
-            <a:spLocks noGrp="1"/>
-          </p:cNvSpPr>
-          <p:nvPr>
-            <p:ph type="sldNum" idx="5" sz="quarter"/>
-          </p:nvPr>
-        </p:nvSpPr>
-        <p:spPr/>
-      </p:sp>
-    </p:spTree>
-  </p:cSld>
-  <p:clrMapOvr>
-    <a:masterClrMapping/>
-  </p:clrMapOvr>
-</p:notes>
-</file>
-
-<file path=ppt/notesSlides/notesSlide10.xml><?xml version="1.0" encoding="utf-8"?>
-<p:notes xmlns:a="http://schemas.openxmlformats.org/drawingml/2006/main" xmlns:p="http://schemas.openxmlformats.org/presentationml/2006/main" xmlns:r="http://schemas.openxmlformats.org/officeDocument/2006/relationships">
-  <p:cSld>
-    <p:spTree>
-      <p:nvGrpSpPr>
-        <p:cNvPr id="1" name=""/>
-        <p:cNvGrpSpPr/>
-        <p:nvPr/>
-      </p:nvGrpSpPr>
-      <p:grpSpPr>
-        <a:xfrm>
-          <a:off x="0" y="0"/>
-          <a:ext cx="0" cy="0"/>
-          <a:chOff x="0" y="0"/>
-          <a:chExt cx="0" cy="0"/>
-        </a:xfrm>
-      </p:grpSpPr>
-      <p:sp>
-        <p:nvSpPr>
-          <p:cNvPr id="2" name="Slide Image Placeholder 1"/>
-          <p:cNvSpPr>
-            <a:spLocks noGrp="1"/>
-          </p:cNvSpPr>
-          <p:nvPr>
-            <p:ph type="sldImg" idx="2"/>
-          </p:nvPr>
-        </p:nvSpPr>
-        <p:spPr/>
-      </p:sp>
-      <p:sp>
-        <p:nvSpPr>
-          <p:cNvPr id="3" name="Notes Placeholder 2"/>
-          <p:cNvSpPr>
-            <a:spLocks noGrp="1"/>
-          </p:cNvSpPr>
-          <p:nvPr>
-            <p:ph type="body" idx="3" sz="quarter"/>
-          </p:nvPr>
-        </p:nvSpPr>
-        <p:spPr/>
-        <p:txBody>
-          <a:bodyPr/>
-          <a:lstStyle/>
-          <a:p>
-            <a:r>
-              <a:t>Read the last row carefully. C scores 56% and D 47%, and their intervals overlap, so I cannot claim D is better grounded - and I do not. What does not overlap is the token count. The claim is therefore cheaper and faster with no measurable penalty, which is a smaller claim than the numbers first suggest and the only one the data supports.</a:t>
-            </a:r>
-          </a:p>
-        </p:txBody>
-      </p:sp>
-      <p:sp>
-        <p:nvSpPr>
-          <p:cNvPr id="4" name="Slide Number Placeholder 3"/>
-          <p:cNvSpPr>
-            <a:spLocks noGrp="1"/>
-          </p:cNvSpPr>
-          <p:nvPr>
-            <p:ph type="sldNum" idx="5" sz="quarter"/>
-          </p:nvPr>
-        </p:nvSpPr>
-        <p:spPr/>
-      </p:sp>
-    </p:spTree>
-  </p:cSld>
-  <p:clrMapOvr>
-    <a:masterClrMapping/>
-  </p:clrMapOvr>
-</p:notes>
-</file>
-
-<file path=ppt/notesSlides/notesSlide11.xml><?xml version="1.0" encoding="utf-8"?>
-<p:notes xmlns:a="http://schemas.openxmlformats.org/drawingml/2006/main" xmlns:p="http://schemas.openxmlformats.org/presentationml/2006/main" xmlns:r="http://schemas.openxmlformats.org/officeDocument/2006/relationships">
-  <p:cSld>
-    <p:spTree>
-      <p:nvGrpSpPr>
-        <p:cNvPr id="1" name=""/>
-        <p:cNvGrpSpPr/>
-        <p:nvPr/>
-      </p:nvGrpSpPr>
-      <p:grpSpPr>
-        <a:xfrm>
-          <a:off x="0" y="0"/>
-          <a:ext cx="0" cy="0"/>
-          <a:chOff x="0" y="0"/>
-          <a:chExt cx="0" cy="0"/>
-        </a:xfrm>
-      </p:grpSpPr>
-      <p:sp>
-        <p:nvSpPr>
-          <p:cNvPr id="2" name="Slide Image Placeholder 1"/>
-          <p:cNvSpPr>
-            <a:spLocks noGrp="1"/>
-          </p:cNvSpPr>
-          <p:nvPr>
-            <p:ph type="sldImg" idx="2"/>
-          </p:nvPr>
-        </p:nvSpPr>
-        <p:spPr/>
-      </p:sp>
-      <p:sp>
-        <p:nvSpPr>
-          <p:cNvPr id="3" name="Notes Placeholder 2"/>
-          <p:cNvSpPr>
-            <a:spLocks noGrp="1"/>
-          </p:cNvSpPr>
-          <p:nvPr>
-            <p:ph type="body" idx="3" sz="quarter"/>
-          </p:nvPr>
-        </p:nvSpPr>
-        <p:spPr/>
-        <p:txBody>
-          <a:bodyPr/>
-          <a:lstStyle/>
-          <a:p>
-            <a:r>
-              <a:t>Two things worth demonstrating. The seven step rows tick over live as each finishes, so the page never looks frozen. And the budget check: it works out the cheapest this trip could possibly cost, using the real recorded fare rather than a built-in table - the table said $350 and the API returned $734 - then refuses and offers a shorter trip, a bigger budget, or a nearer city.</a:t>
-            </a:r>
-          </a:p>
-        </p:txBody>
-      </p:sp>
-      <p:sp>
-        <p:nvSpPr>
-          <p:cNvPr id="4" name="Slide Number Placeholder 3"/>
-          <p:cNvSpPr>
-            <a:spLocks noGrp="1"/>
-          </p:cNvSpPr>
-          <p:nvPr>
-            <p:ph type="sldNum" idx="5" sz="quarter"/>
-          </p:nvPr>
-        </p:nvSpPr>
-        <p:spPr/>
-      </p:sp>
-    </p:spTree>
-  </p:cSld>
-  <p:clrMapOvr>
-    <a:masterClrMapping/>
-  </p:clrMapOvr>
-</p:notes>
-</file>
-
-<file path=ppt/notesSlides/notesSlide12.xml><?xml version="1.0" encoding="utf-8"?>
-<p:notes xmlns:a="http://schemas.openxmlformats.org/drawingml/2006/main" xmlns:p="http://schemas.openxmlformats.org/presentationml/2006/main" xmlns:r="http://schemas.openxmlformats.org/officeDocument/2006/relationships">
-  <p:cSld>
-    <p:spTree>
-      <p:nvGrpSpPr>
-        <p:cNvPr id="1" name=""/>
-        <p:cNvGrpSpPr/>
-        <p:nvPr/>
-      </p:nvGrpSpPr>
-      <p:grpSpPr>
-        <a:xfrm>
-          <a:off x="0" y="0"/>
-          <a:ext cx="0" cy="0"/>
-          <a:chOff x="0" y="0"/>
-          <a:chExt cx="0" cy="0"/>
-        </a:xfrm>
-      </p:grpSpPr>
-      <p:sp>
-        <p:nvSpPr>
-          <p:cNvPr id="2" name="Slide Image Placeholder 1"/>
-          <p:cNvSpPr>
-            <a:spLocks noGrp="1"/>
-          </p:cNvSpPr>
-          <p:nvPr>
-            <p:ph type="sldImg" idx="2"/>
-          </p:nvPr>
-        </p:nvSpPr>
-        <p:spPr/>
-      </p:sp>
-      <p:sp>
-        <p:nvSpPr>
-          <p:cNvPr id="3" name="Notes Placeholder 2"/>
-          <p:cNvSpPr>
-            <a:spLocks noGrp="1"/>
-          </p:cNvSpPr>
-          <p:nvPr>
-            <p:ph type="body" idx="3" sz="quarter"/>
-          </p:nvPr>
-        </p:nvSpPr>
-        <p:spPr/>
-        <p:txBody>
-          <a:bodyPr/>
-          <a:lstStyle/>
-          <a:p>
-            <a:r>
-              <a:t>Land the claim and its limits together. The three findings map onto three comparisons: A against the rest shows tools are essential; B against C shows configuration matters; C against D shows removing AI from deterministic lookup is free money. 403 tests and 30 saved API replies mean anyone can check all of it without a single API key.</a:t>
+              <a:t>Nine slides. A working travel planner, and one question inside it: which parts of it really need AI? I built it four ways and measured all four.</a:t>
             </a:r>
           </a:p>
         </p:txBody>
@@ -793,7 +580,7 @@
           <a:lstStyle/>
           <a:p>
             <a:r>
-              <a:t>This is the scenario every one of the four approaches is given, word for word, so nothing in the comparison depends on phrasing. Jobs 1 to 3 need judgement - there is no single right way to read a sentence. Jobs 4 to 7 are fixed once you know the destination and the dates. Job 8 needs judgement again.</a:t>
+              <a:t>Six agents. Two of them read what the traveller wrote, three look things up, and one writes the plan. Keep this slide up while naming them - the next four slides all refer back to these names.</a:t>
             </a:r>
           </a:p>
         </p:txBody>
@@ -863,7 +650,7 @@
           <a:lstStyle/>
           <a:p>
             <a:r>
-              <a:t>The test for each agent: could I write its job as ordinary code? You cannot write a rule that understands any way a person might phrase a request, and you cannot write a rule that makes a day pleasant. You can absolutely write a rule that calls a flight API with a date.</a:t>
+              <a:t>Say it plainly: Approach A shows what happens when AI plans a trip with no access to real travel data. It produced a confident, well-written itinerary and 1.7% of the prices in it matched anything real. Every other approach has to beat this.</a:t>
             </a:r>
           </a:p>
         </p:txBody>
@@ -933,7 +720,7 @@
           <a:lstStyle/>
           <a:p>
             <a:r>
-              <a:t>C is the one that makes this honest. Without it, someone could say D only won because B was configured badly - and they would be partly right, which is the finding on slide 7.</a:t>
+              <a:t>This was my original proposal. The hotel agent has eight tools and is allowed ten thinking steps, and every step is a separate AI call that re-sends the conversation and all eight tool descriptions. It took 20.6 AI calls and 372 seconds, gave broken output twice, and never once called the attractions or the restaurant tool - while still producing a plan that looked complete.</a:t>
             </a:r>
           </a:p>
         </p:txBody>
@@ -1003,7 +790,7 @@
           <a:lstStyle/>
           <a:p>
             <a:r>
-              <a:t>Say it plainly: Approach A is the baseline. It shows what happens when AI plans a trip with no access to real travel data. It produced a fluent, confident itinerary and 1.7% of the prices in it matched anything real. Every other approach has to beat this, and if one of them did not, the tool layer would not be earning its place.</a:t>
+              <a:t>Approach C is Approach B done properly, and it exists so nobody can say D only won because B was set up badly. Instead of handing the AI twelve thousand characters of hotel data, it gets three lines - Theodora Pension $33 10/10, and so on. Settings alone removed 89% of the tokens. Being honest about that is what makes the next slide believable.</a:t>
             </a:r>
           </a:p>
         </p:txBody>
@@ -1073,7 +860,7 @@
           <a:lstStyle/>
           <a:p>
             <a:r>
-              <a:t>This was my original proposal. The agents can keep thinking, and every step re-sends the conversation and all the tool descriptions. On the recorded run it took 20.6 AI calls and 372 seconds, produced malformed output twice that its own loop had to retry, and never called the attractions or the restaurant tool once - while still writing a complete-looking plan.</a:t>
+              <a:t>This is the one that ships. AI understands the request, Python fetches the data, AI writes the plan. No agent holds a search tool in the measured run, so it makes exactly 5 searches every time in the same order - an IF statement decides rather than a model, so nothing can be skipped, which is exactly what B and C both did. If asked about the four helper tools in the web app: they are on the coordinator for the interactive path, and the measured arm strips them so the comparison is clean.</a:t>
             </a:r>
           </a:p>
         </p:txBody>
@@ -1143,7 +930,7 @@
           <a:lstStyle/>
           <a:p>
             <a:r>
-              <a:t>Instead of handing the AI 12,000 characters of hotel data, C trims it to three lines - Theodora Pension $33 10/10, Hotel Sultania $41 9/10, and so on. Configuration alone removed 89% of the tokens. Being honest about that is what makes the next slide's claim defensible rather than inflated.</a:t>
+              <a:t>Read the last row carefully. C is 56% and D is 47%, and their ranges overlap, so I cannot claim D is better grounded and I do not. What does not overlap is the token count. The claim is cheaper and faster with no measurable penalty - a smaller claim than the numbers first suggest, and the only one the data supports.</a:t>
             </a:r>
           </a:p>
         </p:txBody>
@@ -1213,7 +1000,7 @@
           <a:lstStyle/>
           <a:p>
             <a:r>
-              <a:t>The one-sentence version of the whole project: AI decides what the user wants and how to present it; Python decides what data needs fetching. It makes exactly 5 requests every time, in the same order, because an IF statement decides rather than a model. Nothing can be skipped, and 2 AI calls do the whole trip.</a:t>
+              <a:t>Two things worth demonstrating. The seven step rows tick over live as each finishes, so the page never looks frozen. And the budget check: it works out the cheapest this trip could possibly cost, using the real recorded fare rather than a built-in table - the table said $350 and the API returned $734 - then refuses and offers a shorter trip, a bigger budget, or a nearer city.</a:t>
             </a:r>
           </a:p>
         </p:txBody>
@@ -1283,7 +1070,7 @@
           <a:lstStyle/>
           <a:p>
             <a:r>
-              <a:t>This is the question most likely to catch someone out, so it is on a slide rather than left to memory. It is also stated in Section 7.2 of the report as a limitation rather than glossed over: the two protocols the project is named for are less load-bearing in the shipped version than the proposal implied.</a:t>
+              <a:t>Three findings from three comparisons: A against the rest shows tools are essential, B against C shows setup matters, C against D shows that removing AI from the searching costs nothing in quality. 403 tests and 30 saved API replies mean anyone can check all of it without an API key.</a:t>
             </a:r>
           </a:p>
         </p:txBody>
@@ -4711,7 +4498,7 @@
 </p:sld>
 </file>
 
-<file path=ppt/slides/slide10.xml><?xml version="1.0" encoding="utf-8"?>
+<file path=ppt/slides/slide2.xml><?xml version="1.0" encoding="utf-8"?>
 <p:sld xmlns:a="http://schemas.openxmlformats.org/drawingml/2006/main" xmlns:p="http://schemas.openxmlformats.org/presentationml/2006/main" xmlns:r="http://schemas.openxmlformats.org/officeDocument/2006/relationships">
   <p:cSld>
     <p:spTree>
@@ -4755,7 +4542,7 @@
                 </a:solidFill>
                 <a:latin typeface="Calibri"/>
               </a:rPr>
-              <a:t>9  ·  THE FOUR SIDE BY SIDE</a:t>
+              <a:t>1  ·  THE AGENTS</a:t>
             </a:r>
           </a:p>
         </p:txBody>
@@ -4794,7 +4581,7 @@
                 </a:solidFill>
                 <a:latin typeface="Calibri"/>
               </a:rPr>
-              <a:t>5 runs of each</a:t>
+              <a:t>Each one has a name and one job</a:t>
             </a:r>
           </a:p>
         </p:txBody>
@@ -4852,8 +4639,8 @@
           <p:nvPr/>
         </p:nvGraphicFramePr>
         <p:xfrm>
-          <a:off x="822960" y="2011680"/>
-          <a:ext cx="10515597" cy="2194560"/>
+          <a:off x="822960" y="2103120"/>
+          <a:ext cx="10515599" cy="2560320"/>
         </p:xfrm>
         <a:graphic>
           <a:graphicData uri="http://schemas.openxmlformats.org/drawingml/2006/table">
@@ -4862,11 +4649,8 @@
                 <a:tableStyleId>{5C22544A-7EE6-4342-B048-85BDC9FD1C3A}</a:tableStyleId>
               </a:tblPr>
               <a:tblGrid>
-                <a:gridCol w="2816678"/>
-                <a:gridCol w="1877785"/>
-                <a:gridCol w="1877785"/>
-                <a:gridCol w="1877785"/>
-                <a:gridCol w="2065564"/>
+                <a:gridCol w="3894666"/>
+                <a:gridCol w="6620933"/>
               </a:tblGrid>
               <a:tr h="365760">
                 <a:tc>
@@ -4875,13 +4659,13 @@
                     <a:lstStyle/>
                     <a:p>
                       <a:r>
-                        <a:rPr sz="1350" b="1">
+                        <a:rPr sz="1500" b="1">
                           <a:solidFill>
                             <a:srgbClr val="FFFFFF"/>
                           </a:solidFill>
                           <a:latin typeface="Calibri"/>
                         </a:rPr>
-                        <a:t> </a:t>
+                        <a:t>Agent</a:t>
                       </a:r>
                     </a:p>
                   </a:txBody>
@@ -4897,79 +4681,13 @@
                     <a:lstStyle/>
                     <a:p>
                       <a:r>
-                        <a:rPr sz="1350" b="1">
+                        <a:rPr sz="1500" b="1">
                           <a:solidFill>
                             <a:srgbClr val="FFFFFF"/>
                           </a:solidFill>
                           <a:latin typeface="Calibri"/>
                         </a:rPr>
-                        <a:t>A  single AI</a:t>
-                      </a:r>
-                    </a:p>
-                  </a:txBody>
-                  <a:tcPr>
-                    <a:solidFill>
-                      <a:srgbClr val="4338CA"/>
-                    </a:solidFill>
-                  </a:tcPr>
-                </a:tc>
-                <a:tc>
-                  <a:txBody>
-                    <a:bodyPr/>
-                    <a:lstStyle/>
-                    <a:p>
-                      <a:r>
-                        <a:rPr sz="1350" b="1">
-                          <a:solidFill>
-                            <a:srgbClr val="FFFFFF"/>
-                          </a:solidFill>
-                          <a:latin typeface="Calibri"/>
-                        </a:rPr>
-                        <a:t>B  6 naive</a:t>
-                      </a:r>
-                    </a:p>
-                  </a:txBody>
-                  <a:tcPr>
-                    <a:solidFill>
-                      <a:srgbClr val="4338CA"/>
-                    </a:solidFill>
-                  </a:tcPr>
-                </a:tc>
-                <a:tc>
-                  <a:txBody>
-                    <a:bodyPr/>
-                    <a:lstStyle/>
-                    <a:p>
-                      <a:r>
-                        <a:rPr sz="1350" b="1">
-                          <a:solidFill>
-                            <a:srgbClr val="FFFFFF"/>
-                          </a:solidFill>
-                          <a:latin typeface="Calibri"/>
-                        </a:rPr>
-                        <a:t>C  6 tuned</a:t>
-                      </a:r>
-                    </a:p>
-                  </a:txBody>
-                  <a:tcPr>
-                    <a:solidFill>
-                      <a:srgbClr val="4338CA"/>
-                    </a:solidFill>
-                  </a:tcPr>
-                </a:tc>
-                <a:tc>
-                  <a:txBody>
-                    <a:bodyPr/>
-                    <a:lstStyle/>
-                    <a:p>
-                      <a:r>
-                        <a:rPr sz="1350" b="1">
-                          <a:solidFill>
-                            <a:srgbClr val="FFFFFF"/>
-                          </a:solidFill>
-                          <a:latin typeface="Calibri"/>
-                        </a:rPr>
-                        <a:t>D  3 direct</a:t>
+                        <a:t>What it does</a:t>
                       </a:r>
                     </a:p>
                   </a:txBody>
@@ -4987,13 +4705,13 @@
                     <a:lstStyle/>
                     <a:p>
                       <a:r>
-                        <a:rPr sz="1350" b="0">
+                        <a:rPr sz="1500" b="0">
                           <a:solidFill>
                             <a:srgbClr val="161A23"/>
                           </a:solidFill>
                           <a:latin typeface="Calibri"/>
                         </a:rPr>
-                        <a:t>AI calls</a:t>
+                        <a:t>Travel Conversation Assistant</a:t>
                       </a:r>
                     </a:p>
                   </a:txBody>
@@ -5009,79 +4727,13 @@
                     <a:lstStyle/>
                     <a:p>
                       <a:r>
-                        <a:rPr sz="1350" b="0">
+                        <a:rPr sz="1500" b="0">
                           <a:solidFill>
                             <a:srgbClr val="161A23"/>
                           </a:solidFill>
                           <a:latin typeface="Calibri"/>
                         </a:rPr>
-                        <a:t>1</a:t>
-                      </a:r>
-                    </a:p>
-                  </a:txBody>
-                  <a:tcPr>
-                    <a:solidFill>
-                      <a:srgbClr val="FFFFFF"/>
-                    </a:solidFill>
-                  </a:tcPr>
-                </a:tc>
-                <a:tc>
-                  <a:txBody>
-                    <a:bodyPr/>
-                    <a:lstStyle/>
-                    <a:p>
-                      <a:r>
-                        <a:rPr sz="1350" b="0">
-                          <a:solidFill>
-                            <a:srgbClr val="161A23"/>
-                          </a:solidFill>
-                          <a:latin typeface="Calibri"/>
-                        </a:rPr>
-                        <a:t>21</a:t>
-                      </a:r>
-                    </a:p>
-                  </a:txBody>
-                  <a:tcPr>
-                    <a:solidFill>
-                      <a:srgbClr val="FFFFFF"/>
-                    </a:solidFill>
-                  </a:tcPr>
-                </a:tc>
-                <a:tc>
-                  <a:txBody>
-                    <a:bodyPr/>
-                    <a:lstStyle/>
-                    <a:p>
-                      <a:r>
-                        <a:rPr sz="1350" b="0">
-                          <a:solidFill>
-                            <a:srgbClr val="161A23"/>
-                          </a:solidFill>
-                          <a:latin typeface="Calibri"/>
-                        </a:rPr>
-                        <a:t>10</a:t>
-                      </a:r>
-                    </a:p>
-                  </a:txBody>
-                  <a:tcPr>
-                    <a:solidFill>
-                      <a:srgbClr val="FFFFFF"/>
-                    </a:solidFill>
-                  </a:tcPr>
-                </a:tc>
-                <a:tc>
-                  <a:txBody>
-                    <a:bodyPr/>
-                    <a:lstStyle/>
-                    <a:p>
-                      <a:r>
-                        <a:rPr sz="1350" b="0">
-                          <a:solidFill>
-                            <a:srgbClr val="161A23"/>
-                          </a:solidFill>
-                          <a:latin typeface="Calibri"/>
-                        </a:rPr>
-                        <a:t>2</a:t>
+                        <a:t>Asks the traveller for anything missing</a:t>
                       </a:r>
                     </a:p>
                   </a:txBody>
@@ -5099,13 +4751,13 @@
                     <a:lstStyle/>
                     <a:p>
                       <a:r>
-                        <a:rPr sz="1350" b="0">
+                        <a:rPr sz="1500" b="0">
                           <a:solidFill>
                             <a:srgbClr val="161A23"/>
                           </a:solidFill>
                           <a:latin typeface="Calibri"/>
                         </a:rPr>
-                        <a:t>Text sent to the AI</a:t>
+                        <a:t>Travel Preferences Extractor</a:t>
                       </a:r>
                     </a:p>
                   </a:txBody>
@@ -5121,79 +4773,13 @@
                     <a:lstStyle/>
                     <a:p>
                       <a:r>
-                        <a:rPr sz="1350" b="0">
+                        <a:rPr sz="1500" b="0">
                           <a:solidFill>
                             <a:srgbClr val="161A23"/>
                           </a:solidFill>
                           <a:latin typeface="Calibri"/>
                         </a:rPr>
-                        <a:t>4,644</a:t>
-                      </a:r>
-                    </a:p>
-                  </a:txBody>
-                  <a:tcPr>
-                    <a:solidFill>
-                      <a:srgbClr val="F7F8FC"/>
-                    </a:solidFill>
-                  </a:tcPr>
-                </a:tc>
-                <a:tc>
-                  <a:txBody>
-                    <a:bodyPr/>
-                    <a:lstStyle/>
-                    <a:p>
-                      <a:r>
-                        <a:rPr sz="1350" b="0">
-                          <a:solidFill>
-                            <a:srgbClr val="161A23"/>
-                          </a:solidFill>
-                          <a:latin typeface="Calibri"/>
-                        </a:rPr>
-                        <a:t>120,703</a:t>
-                      </a:r>
-                    </a:p>
-                  </a:txBody>
-                  <a:tcPr>
-                    <a:solidFill>
-                      <a:srgbClr val="F7F8FC"/>
-                    </a:solidFill>
-                  </a:tcPr>
-                </a:tc>
-                <a:tc>
-                  <a:txBody>
-                    <a:bodyPr/>
-                    <a:lstStyle/>
-                    <a:p>
-                      <a:r>
-                        <a:rPr sz="1350" b="0">
-                          <a:solidFill>
-                            <a:srgbClr val="161A23"/>
-                          </a:solidFill>
-                          <a:latin typeface="Calibri"/>
-                        </a:rPr>
-                        <a:t>13,521</a:t>
-                      </a:r>
-                    </a:p>
-                  </a:txBody>
-                  <a:tcPr>
-                    <a:solidFill>
-                      <a:srgbClr val="F7F8FC"/>
-                    </a:solidFill>
-                  </a:tcPr>
-                </a:tc>
-                <a:tc>
-                  <a:txBody>
-                    <a:bodyPr/>
-                    <a:lstStyle/>
-                    <a:p>
-                      <a:r>
-                        <a:rPr sz="1350" b="0">
-                          <a:solidFill>
-                            <a:srgbClr val="161A23"/>
-                          </a:solidFill>
-                          <a:latin typeface="Calibri"/>
-                        </a:rPr>
-                        <a:t>7,840</a:t>
+                        <a:t>Turns those words into exact fields</a:t>
                       </a:r>
                     </a:p>
                   </a:txBody>
@@ -5211,13 +4797,13 @@
                     <a:lstStyle/>
                     <a:p>
                       <a:r>
-                        <a:rPr sz="1350" b="0">
+                        <a:rPr sz="1500" b="0">
                           <a:solidFill>
                             <a:srgbClr val="161A23"/>
                           </a:solidFill>
                           <a:latin typeface="Calibri"/>
                         </a:rPr>
-                        <a:t>Cost per trip</a:t>
+                        <a:t>Flight Search Specialist</a:t>
                       </a:r>
                     </a:p>
                   </a:txBody>
@@ -5233,79 +4819,13 @@
                     <a:lstStyle/>
                     <a:p>
                       <a:r>
-                        <a:rPr sz="1350" b="0">
+                        <a:rPr sz="1500" b="0">
                           <a:solidFill>
                             <a:srgbClr val="161A23"/>
                           </a:solidFill>
                           <a:latin typeface="Calibri"/>
                         </a:rPr>
-                        <a:t>$0.0170</a:t>
-                      </a:r>
-                    </a:p>
-                  </a:txBody>
-                  <a:tcPr>
-                    <a:solidFill>
-                      <a:srgbClr val="FFFFFF"/>
-                    </a:solidFill>
-                  </a:tcPr>
-                </a:tc>
-                <a:tc>
-                  <a:txBody>
-                    <a:bodyPr/>
-                    <a:lstStyle/>
-                    <a:p>
-                      <a:r>
-                        <a:rPr sz="1350" b="0">
-                          <a:solidFill>
-                            <a:srgbClr val="161A23"/>
-                          </a:solidFill>
-                          <a:latin typeface="Calibri"/>
-                        </a:rPr>
-                        <a:t>$0.1859</a:t>
-                      </a:r>
-                    </a:p>
-                  </a:txBody>
-                  <a:tcPr>
-                    <a:solidFill>
-                      <a:srgbClr val="FFFFFF"/>
-                    </a:solidFill>
-                  </a:tcPr>
-                </a:tc>
-                <a:tc>
-                  <a:txBody>
-                    <a:bodyPr/>
-                    <a:lstStyle/>
-                    <a:p>
-                      <a:r>
-                        <a:rPr sz="1350" b="0">
-                          <a:solidFill>
-                            <a:srgbClr val="161A23"/>
-                          </a:solidFill>
-                          <a:latin typeface="Calibri"/>
-                        </a:rPr>
-                        <a:t>$0.0313</a:t>
-                      </a:r>
-                    </a:p>
-                  </a:txBody>
-                  <a:tcPr>
-                    <a:solidFill>
-                      <a:srgbClr val="FFFFFF"/>
-                    </a:solidFill>
-                  </a:tcPr>
-                </a:tc>
-                <a:tc>
-                  <a:txBody>
-                    <a:bodyPr/>
-                    <a:lstStyle/>
-                    <a:p>
-                      <a:r>
-                        <a:rPr sz="1350" b="0">
-                          <a:solidFill>
-                            <a:srgbClr val="161A23"/>
-                          </a:solidFill>
-                          <a:latin typeface="Calibri"/>
-                        </a:rPr>
-                        <a:t>$0.0179</a:t>
+                        <a:t>Looks up flights</a:t>
                       </a:r>
                     </a:p>
                   </a:txBody>
@@ -5323,13 +4843,13 @@
                     <a:lstStyle/>
                     <a:p>
                       <a:r>
-                        <a:rPr sz="1350" b="0">
+                        <a:rPr sz="1500" b="0">
                           <a:solidFill>
                             <a:srgbClr val="161A23"/>
                           </a:solidFill>
                           <a:latin typeface="Calibri"/>
                         </a:rPr>
-                        <a:t>Time</a:t>
+                        <a:t>Hotel Search Specialist</a:t>
                       </a:r>
                     </a:p>
                   </a:txBody>
@@ -5345,79 +4865,13 @@
                     <a:lstStyle/>
                     <a:p>
                       <a:r>
-                        <a:rPr sz="1350" b="0">
+                        <a:rPr sz="1500" b="0">
                           <a:solidFill>
                             <a:srgbClr val="161A23"/>
                           </a:solidFill>
                           <a:latin typeface="Calibri"/>
                         </a:rPr>
-                        <a:t>27s</a:t>
-                      </a:r>
-                    </a:p>
-                  </a:txBody>
-                  <a:tcPr>
-                    <a:solidFill>
-                      <a:srgbClr val="F7F8FC"/>
-                    </a:solidFill>
-                  </a:tcPr>
-                </a:tc>
-                <a:tc>
-                  <a:txBody>
-                    <a:bodyPr/>
-                    <a:lstStyle/>
-                    <a:p>
-                      <a:r>
-                        <a:rPr sz="1350" b="0">
-                          <a:solidFill>
-                            <a:srgbClr val="161A23"/>
-                          </a:solidFill>
-                          <a:latin typeface="Calibri"/>
-                        </a:rPr>
-                        <a:t>372s</a:t>
-                      </a:r>
-                    </a:p>
-                  </a:txBody>
-                  <a:tcPr>
-                    <a:solidFill>
-                      <a:srgbClr val="F7F8FC"/>
-                    </a:solidFill>
-                  </a:tcPr>
-                </a:tc>
-                <a:tc>
-                  <a:txBody>
-                    <a:bodyPr/>
-                    <a:lstStyle/>
-                    <a:p>
-                      <a:r>
-                        <a:rPr sz="1350" b="0">
-                          <a:solidFill>
-                            <a:srgbClr val="161A23"/>
-                          </a:solidFill>
-                          <a:latin typeface="Calibri"/>
-                        </a:rPr>
-                        <a:t>37s</a:t>
-                      </a:r>
-                    </a:p>
-                  </a:txBody>
-                  <a:tcPr>
-                    <a:solidFill>
-                      <a:srgbClr val="F7F8FC"/>
-                    </a:solidFill>
-                  </a:tcPr>
-                </a:tc>
-                <a:tc>
-                  <a:txBody>
-                    <a:bodyPr/>
-                    <a:lstStyle/>
-                    <a:p>
-                      <a:r>
-                        <a:rPr sz="1350" b="0">
-                          <a:solidFill>
-                            <a:srgbClr val="161A23"/>
-                          </a:solidFill>
-                          <a:latin typeface="Calibri"/>
-                        </a:rPr>
-                        <a:t>23s</a:t>
+                        <a:t>Looks up hotels</a:t>
                       </a:r>
                     </a:p>
                   </a:txBody>
@@ -5435,13 +4889,13 @@
                     <a:lstStyle/>
                     <a:p>
                       <a:r>
-                        <a:rPr sz="1350" b="0">
+                        <a:rPr sz="1500" b="0">
                           <a:solidFill>
                             <a:srgbClr val="161A23"/>
                           </a:solidFill>
                           <a:latin typeface="Calibri"/>
                         </a:rPr>
-                        <a:t>Prices that are real</a:t>
+                        <a:t>Activities Specialist</a:t>
                       </a:r>
                     </a:p>
                   </a:txBody>
@@ -5457,13 +4911,13 @@
                     <a:lstStyle/>
                     <a:p>
                       <a:r>
-                        <a:rPr sz="1350" b="0">
+                        <a:rPr sz="1500" b="0">
                           <a:solidFill>
                             <a:srgbClr val="161A23"/>
                           </a:solidFill>
                           <a:latin typeface="Calibri"/>
                         </a:rPr>
-                        <a:t>1.7%</a:t>
+                        <a:t>Looks up places to visit and places to eat</a:t>
                       </a:r>
                     </a:p>
                   </a:txBody>
@@ -5473,69 +4927,49 @@
                     </a:solidFill>
                   </a:tcPr>
                 </a:tc>
-                <a:tc>
-                  <a:txBody>
-                    <a:bodyPr/>
-                    <a:lstStyle/>
-                    <a:p>
-                      <a:r>
-                        <a:rPr sz="1350" b="0">
+              </a:tr>
+              <a:tr h="365760">
+                <a:tc>
+                  <a:txBody>
+                    <a:bodyPr/>
+                    <a:lstStyle/>
+                    <a:p>
+                      <a:r>
+                        <a:rPr sz="1500" b="0">
                           <a:solidFill>
                             <a:srgbClr val="161A23"/>
                           </a:solidFill>
                           <a:latin typeface="Calibri"/>
                         </a:rPr>
-                        <a:t>23%</a:t>
-                      </a:r>
-                    </a:p>
-                  </a:txBody>
-                  <a:tcPr>
-                    <a:solidFill>
-                      <a:srgbClr val="FFFFFF"/>
-                    </a:solidFill>
-                  </a:tcPr>
-                </a:tc>
-                <a:tc>
-                  <a:txBody>
-                    <a:bodyPr/>
-                    <a:lstStyle/>
-                    <a:p>
-                      <a:r>
-                        <a:rPr sz="1350" b="0">
+                        <a:t>Itinerary Coordinator</a:t>
+                      </a:r>
+                    </a:p>
+                  </a:txBody>
+                  <a:tcPr>
+                    <a:solidFill>
+                      <a:srgbClr val="F7F8FC"/>
+                    </a:solidFill>
+                  </a:tcPr>
+                </a:tc>
+                <a:tc>
+                  <a:txBody>
+                    <a:bodyPr/>
+                    <a:lstStyle/>
+                    <a:p>
+                      <a:r>
+                        <a:rPr sz="1500" b="0">
                           <a:solidFill>
                             <a:srgbClr val="161A23"/>
                           </a:solidFill>
                           <a:latin typeface="Calibri"/>
                         </a:rPr>
-                        <a:t>56%</a:t>
-                      </a:r>
-                    </a:p>
-                  </a:txBody>
-                  <a:tcPr>
-                    <a:solidFill>
-                      <a:srgbClr val="FFFFFF"/>
-                    </a:solidFill>
-                  </a:tcPr>
-                </a:tc>
-                <a:tc>
-                  <a:txBody>
-                    <a:bodyPr/>
-                    <a:lstStyle/>
-                    <a:p>
-                      <a:r>
-                        <a:rPr sz="1350" b="0">
-                          <a:solidFill>
-                            <a:srgbClr val="161A23"/>
-                          </a:solidFill>
-                          <a:latin typeface="Calibri"/>
-                        </a:rPr>
-                        <a:t>47%</a:t>
-                      </a:r>
-                    </a:p>
-                  </a:txBody>
-                  <a:tcPr>
-                    <a:solidFill>
-                      <a:srgbClr val="FFFFFF"/>
+                        <a:t>Writes the final day-by-day plan</a:t>
+                      </a:r>
+                    </a:p>
+                  </a:txBody>
+                  <a:tcPr>
+                    <a:solidFill>
+                      <a:srgbClr val="F7F8FC"/>
                     </a:solidFill>
                   </a:tcPr>
                 </a:tc>
@@ -5552,8 +4986,8 @@
         </p:nvSpPr>
         <p:spPr>
           <a:xfrm>
-            <a:off x="822960" y="4846320"/>
-            <a:ext cx="10515600" cy="1371600"/>
+            <a:off x="822960" y="5577840"/>
+            <a:ext cx="10515600" cy="731520"/>
           </a:xfrm>
           <a:prstGeom prst="rect">
             <a:avLst/>
@@ -5568,33 +5002,17 @@
           <a:p>
             <a:pPr algn="l">
               <a:lnSpc>
-                <a:spcPct val="130000"/>
+                <a:spcPct val="100000"/>
               </a:lnSpc>
             </a:pPr>
             <a:r>
-              <a:rPr sz="1600" b="0">
+              <a:rPr sz="1700" b="0">
                 <a:solidFill>
                   <a:srgbClr val="545C6E"/>
                 </a:solidFill>
                 <a:latin typeface="Calibri"/>
               </a:rPr>
-              <a:t>The honest reading, not the flattering one:</a:t>
-            </a:r>
-          </a:p>
-          <a:p>
-            <a:pPr algn="l">
-              <a:lnSpc>
-                <a:spcPct val="130000"/>
-              </a:lnSpc>
-            </a:pPr>
-            <a:r>
-              <a:rPr sz="1800" b="1">
-                <a:solidFill>
-                  <a:srgbClr val="4338CA"/>
-                </a:solidFill>
-                <a:latin typeface="Calibri"/>
-              </a:rPr>
-              <a:t>D is not more accurate than C — their ranges overlap. D is 1.7x cheaper than C and 15x cheaper than B, with no detectable loss of accuracy.</a:t>
+              <a:t>Six agents. The next four slides show which of them each approach uses, and what tools each one is given.</a:t>
             </a:r>
           </a:p>
         </p:txBody>
@@ -5607,7 +5025,7 @@
 </p:sld>
 </file>
 
-<file path=ppt/slides/slide11.xml><?xml version="1.0" encoding="utf-8"?>
+<file path=ppt/slides/slide3.xml><?xml version="1.0" encoding="utf-8"?>
 <p:sld xmlns:a="http://schemas.openxmlformats.org/drawingml/2006/main" xmlns:p="http://schemas.openxmlformats.org/presentationml/2006/main" xmlns:r="http://schemas.openxmlformats.org/officeDocument/2006/relationships">
   <p:cSld>
     <p:spTree>
@@ -5651,7 +5069,7 @@
                 </a:solidFill>
                 <a:latin typeface="Calibri"/>
               </a:rPr>
-              <a:t>10  ·  WHAT THE USER SEES</a:t>
+              <a:t>2  ·  APPROACH A</a:t>
             </a:r>
           </a:p>
         </p:txBody>
@@ -5690,7 +5108,7 @@
                 </a:solidFill>
                 <a:latin typeface="Calibri"/>
               </a:rPr>
-              <a:t>And the check that stops a fantasy trip</a:t>
+              <a:t>One AI on its own. No agents, no tools</a:t>
             </a:r>
           </a:p>
         </p:txBody>
@@ -5739,39 +5157,217 @@
           </a:p>
         </p:txBody>
       </p:sp>
-      <p:pic>
-        <p:nvPicPr>
-          <p:cNvPr id="5" name="Picture 4" descr="frontend.png"/>
-          <p:cNvPicPr>
-            <a:picLocks noChangeAspect="1"/>
-          </p:cNvPicPr>
+      <p:graphicFrame>
+        <p:nvGraphicFramePr>
+          <p:cNvPr id="5" name="Table 4"/>
+          <p:cNvGraphicFramePr>
+            <a:graphicFrameLocks noGrp="1"/>
+          </p:cNvGraphicFramePr>
           <p:nvPr/>
-        </p:nvPicPr>
-        <p:blipFill>
-          <a:blip r:embed="rId2"/>
-          <a:stretch>
-            <a:fillRect/>
-          </a:stretch>
-        </p:blipFill>
+        </p:nvGraphicFramePr>
+        <p:xfrm>
+          <a:off x="822960" y="2103120"/>
+          <a:ext cx="10515599" cy="731520"/>
+        </p:xfrm>
+        <a:graphic>
+          <a:graphicData uri="http://schemas.openxmlformats.org/drawingml/2006/table">
+            <a:tbl>
+              <a:tblPr firstRow="1" bandRow="1">
+                <a:tableStyleId>{5C22544A-7EE6-4342-B048-85BDC9FD1C3A}</a:tableStyleId>
+              </a:tblPr>
+              <a:tblGrid>
+                <a:gridCol w="4284133"/>
+                <a:gridCol w="2531533"/>
+                <a:gridCol w="3699933"/>
+              </a:tblGrid>
+              <a:tr h="365760">
+                <a:tc>
+                  <a:txBody>
+                    <a:bodyPr/>
+                    <a:lstStyle/>
+                    <a:p>
+                      <a:r>
+                        <a:rPr sz="1500" b="1">
+                          <a:solidFill>
+                            <a:srgbClr val="FFFFFF"/>
+                          </a:solidFill>
+                          <a:latin typeface="Calibri"/>
+                        </a:rPr>
+                        <a:t>Agent</a:t>
+                      </a:r>
+                    </a:p>
+                  </a:txBody>
+                  <a:tcPr>
+                    <a:solidFill>
+                      <a:srgbClr val="4338CA"/>
+                    </a:solidFill>
+                  </a:tcPr>
+                </a:tc>
+                <a:tc>
+                  <a:txBody>
+                    <a:bodyPr/>
+                    <a:lstStyle/>
+                    <a:p>
+                      <a:r>
+                        <a:rPr sz="1500" b="1">
+                          <a:solidFill>
+                            <a:srgbClr val="FFFFFF"/>
+                          </a:solidFill>
+                          <a:latin typeface="Calibri"/>
+                        </a:rPr>
+                        <a:t>How many tools</a:t>
+                      </a:r>
+                    </a:p>
+                  </a:txBody>
+                  <a:tcPr>
+                    <a:solidFill>
+                      <a:srgbClr val="4338CA"/>
+                    </a:solidFill>
+                  </a:tcPr>
+                </a:tc>
+                <a:tc>
+                  <a:txBody>
+                    <a:bodyPr/>
+                    <a:lstStyle/>
+                    <a:p>
+                      <a:r>
+                        <a:rPr sz="1500" b="1">
+                          <a:solidFill>
+                            <a:srgbClr val="FFFFFF"/>
+                          </a:solidFill>
+                          <a:latin typeface="Calibri"/>
+                        </a:rPr>
+                        <a:t>Which tools</a:t>
+                      </a:r>
+                    </a:p>
+                  </a:txBody>
+                  <a:tcPr>
+                    <a:solidFill>
+                      <a:srgbClr val="4338CA"/>
+                    </a:solidFill>
+                  </a:tcPr>
+                </a:tc>
+              </a:tr>
+              <a:tr h="365760">
+                <a:tc>
+                  <a:txBody>
+                    <a:bodyPr/>
+                    <a:lstStyle/>
+                    <a:p>
+                      <a:r>
+                        <a:rPr sz="1500" b="0">
+                          <a:solidFill>
+                            <a:srgbClr val="161A23"/>
+                          </a:solidFill>
+                          <a:latin typeface="Calibri"/>
+                        </a:rPr>
+                        <a:t>none — just one AI call</a:t>
+                      </a:r>
+                    </a:p>
+                  </a:txBody>
+                  <a:tcPr>
+                    <a:solidFill>
+                      <a:srgbClr val="FFFFFF"/>
+                    </a:solidFill>
+                  </a:tcPr>
+                </a:tc>
+                <a:tc>
+                  <a:txBody>
+                    <a:bodyPr/>
+                    <a:lstStyle/>
+                    <a:p>
+                      <a:r>
+                        <a:rPr sz="1500" b="0">
+                          <a:solidFill>
+                            <a:srgbClr val="161A23"/>
+                          </a:solidFill>
+                          <a:latin typeface="Calibri"/>
+                        </a:rPr>
+                        <a:t>0</a:t>
+                      </a:r>
+                    </a:p>
+                  </a:txBody>
+                  <a:tcPr>
+                    <a:solidFill>
+                      <a:srgbClr val="FFFFFF"/>
+                    </a:solidFill>
+                  </a:tcPr>
+                </a:tc>
+                <a:tc>
+                  <a:txBody>
+                    <a:bodyPr/>
+                    <a:lstStyle/>
+                    <a:p>
+                      <a:r>
+                        <a:rPr sz="1500" b="0">
+                          <a:solidFill>
+                            <a:srgbClr val="161A23"/>
+                          </a:solidFill>
+                          <a:latin typeface="Calibri"/>
+                        </a:rPr>
+                        <a:t>none</a:t>
+                      </a:r>
+                    </a:p>
+                  </a:txBody>
+                  <a:tcPr>
+                    <a:solidFill>
+                      <a:srgbClr val="FFFFFF"/>
+                    </a:solidFill>
+                  </a:tcPr>
+                </a:tc>
+              </a:tr>
+            </a:tbl>
+          </a:graphicData>
+        </a:graphic>
+      </p:graphicFrame>
+      <p:sp>
+        <p:nvSpPr>
+          <p:cNvPr id="6" name="TextBox 5"/>
+          <p:cNvSpPr txBox="1"/>
+          <p:nvPr/>
+        </p:nvSpPr>
         <p:spPr>
           <a:xfrm>
-            <a:off x="3148643" y="1737360"/>
-            <a:ext cx="5894409" cy="3383280"/>
+            <a:off x="822960" y="3108960"/>
+            <a:ext cx="10515600" cy="640080"/>
           </a:xfrm>
           <a:prstGeom prst="rect">
             <a:avLst/>
           </a:prstGeom>
+          <a:noFill/>
         </p:spPr>
-      </p:pic>
-      <p:sp>
-        <p:nvSpPr>
-          <p:cNvPr id="6" name="TextBox 5"/>
+        <p:txBody>
+          <a:bodyPr wrap="square" anchor="t">
+            <a:spAutoFit/>
+          </a:bodyPr>
+          <a:lstStyle/>
+          <a:p>
+            <a:pPr algn="l">
+              <a:lnSpc>
+                <a:spcPct val="100000"/>
+              </a:lnSpc>
+            </a:pPr>
+            <a:r>
+              <a:rPr sz="1800" b="0">
+                <a:solidFill>
+                  <a:srgbClr val="161A23"/>
+                </a:solidFill>
+                <a:latin typeface="Calibri"/>
+              </a:rPr>
+              <a:t>The AI writes the whole plan from what it already knows. It cannot look anything up.</a:t>
+            </a:r>
+          </a:p>
+        </p:txBody>
+      </p:sp>
+      <p:sp>
+        <p:nvSpPr>
+          <p:cNvPr id="7" name="TextBox 6"/>
           <p:cNvSpPr txBox="1"/>
           <p:nvPr/>
         </p:nvSpPr>
         <p:spPr>
           <a:xfrm>
-            <a:off x="822960" y="5257800"/>
+            <a:off x="822960" y="3931920"/>
             <a:ext cx="3515258" cy="1188720"/>
           </a:xfrm>
           <a:prstGeom prst="rect">
@@ -5797,20 +5393,20 @@
                 </a:solidFill>
                 <a:latin typeface="Calibri"/>
               </a:rPr>
-              <a:t>$800</a:t>
-            </a:r>
-          </a:p>
-        </p:txBody>
-      </p:sp>
-      <p:sp>
-        <p:nvSpPr>
-          <p:cNvPr id="7" name="TextBox 6"/>
+              <a:t>1</a:t>
+            </a:r>
+          </a:p>
+        </p:txBody>
+      </p:sp>
+      <p:sp>
+        <p:nvSpPr>
+          <p:cNvPr id="8" name="TextBox 7"/>
           <p:cNvSpPr txBox="1"/>
           <p:nvPr/>
         </p:nvSpPr>
         <p:spPr>
           <a:xfrm>
-            <a:off x="822960" y="6400800"/>
+            <a:off x="822960" y="5074920"/>
             <a:ext cx="3515258" cy="731520"/>
           </a:xfrm>
           <a:prstGeom prst="rect">
@@ -5836,20 +5432,20 @@
                 </a:solidFill>
                 <a:latin typeface="Calibri"/>
               </a:rPr>
-              <a:t>traveller asked for</a:t>
-            </a:r>
-          </a:p>
-        </p:txBody>
-      </p:sp>
-      <p:sp>
-        <p:nvSpPr>
-          <p:cNvPr id="8" name="TextBox 7"/>
+              <a:t>AI call</a:t>
+            </a:r>
+          </a:p>
+        </p:txBody>
+      </p:sp>
+      <p:sp>
+        <p:nvSpPr>
+          <p:cNvPr id="9" name="TextBox 8"/>
           <p:cNvSpPr txBox="1"/>
           <p:nvPr/>
         </p:nvSpPr>
         <p:spPr>
           <a:xfrm>
-            <a:off x="4338218" y="5257800"/>
+            <a:off x="4338218" y="3931920"/>
             <a:ext cx="3515258" cy="1188720"/>
           </a:xfrm>
           <a:prstGeom prst="rect">
@@ -5875,20 +5471,20 @@
                 </a:solidFill>
                 <a:latin typeface="Calibri"/>
               </a:rPr>
-              <a:t>$837</a:t>
-            </a:r>
-          </a:p>
-        </p:txBody>
-      </p:sp>
-      <p:sp>
-        <p:nvSpPr>
-          <p:cNvPr id="9" name="TextBox 8"/>
+              <a:t>1.7%</a:t>
+            </a:r>
+          </a:p>
+        </p:txBody>
+      </p:sp>
+      <p:sp>
+        <p:nvSpPr>
+          <p:cNvPr id="10" name="TextBox 9"/>
           <p:cNvSpPr txBox="1"/>
           <p:nvPr/>
         </p:nvSpPr>
         <p:spPr>
           <a:xfrm>
-            <a:off x="4338218" y="6400800"/>
+            <a:off x="4338218" y="5074920"/>
             <a:ext cx="3515258" cy="731520"/>
           </a:xfrm>
           <a:prstGeom prst="rect">
@@ -5914,20 +5510,20 @@
                 </a:solidFill>
                 <a:latin typeface="Calibri"/>
               </a:rPr>
-              <a:t>cheapest it can be done</a:t>
-            </a:r>
-          </a:p>
-        </p:txBody>
-      </p:sp>
-      <p:sp>
-        <p:nvSpPr>
-          <p:cNvPr id="10" name="TextBox 9"/>
+              <a:t>of its prices were real</a:t>
+            </a:r>
+          </a:p>
+        </p:txBody>
+      </p:sp>
+      <p:sp>
+        <p:nvSpPr>
+          <p:cNvPr id="11" name="TextBox 10"/>
           <p:cNvSpPr txBox="1"/>
           <p:nvPr/>
         </p:nvSpPr>
         <p:spPr>
           <a:xfrm>
-            <a:off x="7853476" y="5257800"/>
+            <a:off x="7853476" y="3931920"/>
             <a:ext cx="3515258" cy="1188720"/>
           </a:xfrm>
           <a:prstGeom prst="rect">
@@ -5953,20 +5549,20 @@
                 </a:solidFill>
                 <a:latin typeface="Calibri"/>
               </a:rPr>
-              <a:t>REFUSED</a:t>
-            </a:r>
-          </a:p>
-        </p:txBody>
-      </p:sp>
-      <p:sp>
-        <p:nvSpPr>
-          <p:cNvPr id="11" name="TextBox 10"/>
+              <a:t>27s</a:t>
+            </a:r>
+          </a:p>
+        </p:txBody>
+      </p:sp>
+      <p:sp>
+        <p:nvSpPr>
+          <p:cNvPr id="12" name="TextBox 11"/>
           <p:cNvSpPr txBox="1"/>
           <p:nvPr/>
         </p:nvSpPr>
         <p:spPr>
           <a:xfrm>
-            <a:off x="7853476" y="6400800"/>
+            <a:off x="7853476" y="5074920"/>
             <a:ext cx="3515258" cy="731520"/>
           </a:xfrm>
           <a:prstGeom prst="rect">
@@ -5992,7 +5588,46 @@
                 </a:solidFill>
                 <a:latin typeface="Calibri"/>
               </a:rPr>
-              <a:t>with three ways to fix it</a:t>
+              <a:t>to finish</a:t>
+            </a:r>
+          </a:p>
+        </p:txBody>
+      </p:sp>
+      <p:sp>
+        <p:nvSpPr>
+          <p:cNvPr id="13" name="TextBox 12"/>
+          <p:cNvSpPr txBox="1"/>
+          <p:nvPr/>
+        </p:nvSpPr>
+        <p:spPr>
+          <a:xfrm>
+            <a:off x="822960" y="5669280"/>
+            <a:ext cx="10515600" cy="731520"/>
+          </a:xfrm>
+          <a:prstGeom prst="rect">
+            <a:avLst/>
+          </a:prstGeom>
+          <a:noFill/>
+        </p:spPr>
+        <p:txBody>
+          <a:bodyPr wrap="square" anchor="t">
+            <a:spAutoFit/>
+          </a:bodyPr>
+          <a:lstStyle/>
+          <a:p>
+            <a:pPr algn="l">
+              <a:lnSpc>
+                <a:spcPct val="100000"/>
+              </a:lnSpc>
+            </a:pPr>
+            <a:r>
+              <a:rPr sz="2000" b="1">
+                <a:solidFill>
+                  <a:srgbClr val="A85B00"/>
+                </a:solidFill>
+                <a:latin typeface="Calibri"/>
+              </a:rPr>
+              <a:t>So it makes the prices up. This is the baseline everything else has to beat.</a:t>
             </a:r>
           </a:p>
         </p:txBody>
@@ -6005,306 +5640,7 @@
 </p:sld>
 </file>
 
-<file path=ppt/slides/slide12.xml><?xml version="1.0" encoding="utf-8"?>
-<p:sld xmlns:a="http://schemas.openxmlformats.org/drawingml/2006/main" xmlns:p="http://schemas.openxmlformats.org/presentationml/2006/main" xmlns:r="http://schemas.openxmlformats.org/officeDocument/2006/relationships">
-  <p:cSld>
-    <p:bg>
-      <p:bgPr>
-        <a:solidFill>
-          <a:srgbClr val="1E1B4B"/>
-        </a:solidFill>
-        <a:effectLst/>
-      </p:bgPr>
-    </p:bg>
-    <p:spTree>
-      <p:nvGrpSpPr>
-        <p:cNvPr id="1" name=""/>
-        <p:cNvGrpSpPr/>
-        <p:nvPr/>
-      </p:nvGrpSpPr>
-      <p:grpSpPr/>
-      <p:sp>
-        <p:nvSpPr>
-          <p:cNvPr id="2" name="TextBox 1"/>
-          <p:cNvSpPr txBox="1"/>
-          <p:nvPr/>
-        </p:nvSpPr>
-        <p:spPr>
-          <a:xfrm>
-            <a:off x="1005840" y="1051560"/>
-            <a:ext cx="10241280" cy="457200"/>
-          </a:xfrm>
-          <a:prstGeom prst="rect">
-            <a:avLst/>
-          </a:prstGeom>
-          <a:noFill/>
-        </p:spPr>
-        <p:txBody>
-          <a:bodyPr wrap="square" anchor="t">
-            <a:spAutoFit/>
-          </a:bodyPr>
-          <a:lstStyle/>
-          <a:p>
-            <a:pPr algn="l">
-              <a:lnSpc>
-                <a:spcPct val="100000"/>
-              </a:lnSpc>
-            </a:pPr>
-            <a:r>
-              <a:rPr sz="1400" b="1">
-                <a:solidFill>
-                  <a:srgbClr val="9CA3F5"/>
-                </a:solidFill>
-                <a:latin typeface="Calibri"/>
-              </a:rPr>
-              <a:t>IN ONE SENTENCE</a:t>
-            </a:r>
-          </a:p>
-        </p:txBody>
-      </p:sp>
-      <p:sp>
-        <p:nvSpPr>
-          <p:cNvPr id="3" name="TextBox 2"/>
-          <p:cNvSpPr txBox="1"/>
-          <p:nvPr/>
-        </p:nvSpPr>
-        <p:spPr>
-          <a:xfrm>
-            <a:off x="1005840" y="1508760"/>
-            <a:ext cx="10241280" cy="1828800"/>
-          </a:xfrm>
-          <a:prstGeom prst="rect">
-            <a:avLst/>
-          </a:prstGeom>
-          <a:noFill/>
-        </p:spPr>
-        <p:txBody>
-          <a:bodyPr wrap="square" anchor="t">
-            <a:spAutoFit/>
-          </a:bodyPr>
-          <a:lstStyle/>
-          <a:p>
-            <a:pPr algn="l">
-              <a:lnSpc>
-                <a:spcPct val="120000"/>
-              </a:lnSpc>
-            </a:pPr>
-            <a:r>
-              <a:rPr sz="3000" b="1">
-                <a:solidFill>
-                  <a:srgbClr val="FFFFFF"/>
-                </a:solidFill>
-                <a:latin typeface="Calibri"/>
-              </a:rPr>
-              <a:t>AI decides what the user wants and how to present it.</a:t>
-            </a:r>
-          </a:p>
-          <a:p>
-            <a:pPr algn="l">
-              <a:lnSpc>
-                <a:spcPct val="120000"/>
-              </a:lnSpc>
-            </a:pPr>
-            <a:r>
-              <a:rPr sz="3000" b="1">
-                <a:solidFill>
-                  <a:srgbClr val="6EE7DF"/>
-                </a:solidFill>
-                <a:latin typeface="Calibri"/>
-              </a:rPr>
-              <a:t>Python decides what data needs to be fetched.</a:t>
-            </a:r>
-          </a:p>
-        </p:txBody>
-      </p:sp>
-      <p:sp>
-        <p:nvSpPr>
-          <p:cNvPr id="4" name="Rectangle 3"/>
-          <p:cNvSpPr/>
-          <p:nvPr/>
-        </p:nvSpPr>
-        <p:spPr>
-          <a:xfrm>
-            <a:off x="1005840" y="3520440"/>
-            <a:ext cx="1463040" cy="34000"/>
-          </a:xfrm>
-          <a:prstGeom prst="rect">
-            <a:avLst/>
-          </a:prstGeom>
-          <a:solidFill>
-            <a:srgbClr val="0EA5A4"/>
-          </a:solidFill>
-          <a:ln>
-            <a:noFill/>
-          </a:ln>
-          <a:effectLst/>
-        </p:spPr>
-        <p:style>
-          <a:lnRef idx="1">
-            <a:schemeClr val="accent1"/>
-          </a:lnRef>
-          <a:fillRef idx="3">
-            <a:schemeClr val="accent1"/>
-          </a:fillRef>
-          <a:effectRef idx="2">
-            <a:schemeClr val="accent1"/>
-          </a:effectRef>
-          <a:fontRef idx="minor">
-            <a:schemeClr val="lt1"/>
-          </a:fontRef>
-        </p:style>
-        <p:txBody>
-          <a:bodyPr rtlCol="0" anchor="ctr"/>
-          <a:lstStyle/>
-          <a:p>
-            <a:pPr algn="ctr"/>
-          </a:p>
-        </p:txBody>
-      </p:sp>
-      <p:sp>
-        <p:nvSpPr>
-          <p:cNvPr id="5" name="TextBox 4"/>
-          <p:cNvSpPr txBox="1"/>
-          <p:nvPr/>
-        </p:nvSpPr>
-        <p:spPr>
-          <a:xfrm>
-            <a:off x="1005840" y="3840480"/>
-            <a:ext cx="10241280" cy="2377440"/>
-          </a:xfrm>
-          <a:prstGeom prst="rect">
-            <a:avLst/>
-          </a:prstGeom>
-          <a:noFill/>
-        </p:spPr>
-        <p:txBody>
-          <a:bodyPr wrap="square" anchor="t">
-            <a:spAutoFit/>
-          </a:bodyPr>
-          <a:lstStyle/>
-          <a:p>
-            <a:pPr algn="l">
-              <a:lnSpc>
-                <a:spcPct val="125000"/>
-              </a:lnSpc>
-            </a:pPr>
-            <a:r>
-              <a:rPr sz="1200" b="1">
-                <a:solidFill>
-                  <a:srgbClr val="9CA3F5"/>
-                </a:solidFill>
-                <a:latin typeface="Calibri"/>
-              </a:rPr>
-              <a:t>WHAT I FOUND</a:t>
-            </a:r>
-          </a:p>
-          <a:p>
-            <a:pPr algn="l">
-              <a:lnSpc>
-                <a:spcPct val="125000"/>
-              </a:lnSpc>
-            </a:pPr>
-            <a:r>
-              <a:rPr sz="500" b="0">
-                <a:solidFill>
-                  <a:srgbClr val="FFFFFF"/>
-                </a:solidFill>
-                <a:latin typeface="Calibri"/>
-              </a:rPr>
-              <a:t/>
-            </a:r>
-          </a:p>
-          <a:p>
-            <a:pPr algn="l">
-              <a:lnSpc>
-                <a:spcPct val="125000"/>
-              </a:lnSpc>
-            </a:pPr>
-            <a:r>
-              <a:rPr sz="1600" b="0">
-                <a:solidFill>
-                  <a:srgbClr val="C7D2FE"/>
-                </a:solidFill>
-                <a:latin typeface="Calibri"/>
-              </a:rPr>
-              <a:t>Without tools, AI invents travel information. Tools are essential.</a:t>
-            </a:r>
-          </a:p>
-          <a:p>
-            <a:pPr algn="l">
-              <a:lnSpc>
-                <a:spcPct val="125000"/>
-              </a:lnSpc>
-            </a:pPr>
-            <a:r>
-              <a:rPr sz="1600" b="0">
-                <a:solidFill>
-                  <a:srgbClr val="C7D2FE"/>
-                </a:solidFill>
-                <a:latin typeface="Calibri"/>
-              </a:rPr>
-              <a:t>Configuration matters enormously — settings alone saved 89%.</a:t>
-            </a:r>
-          </a:p>
-          <a:p>
-            <a:pPr algn="l">
-              <a:lnSpc>
-                <a:spcPct val="125000"/>
-              </a:lnSpc>
-            </a:pPr>
-            <a:r>
-              <a:rPr sz="1600" b="0">
-                <a:solidFill>
-                  <a:srgbClr val="6EE7DF"/>
-                </a:solidFill>
-                <a:latin typeface="Calibri"/>
-              </a:rPr>
-              <a:t>Taking AI out of the lookup step is cheaper and faster, with no detectable loss of accuracy.</a:t>
-            </a:r>
-          </a:p>
-          <a:p>
-            <a:pPr algn="l">
-              <a:lnSpc>
-                <a:spcPct val="125000"/>
-              </a:lnSpc>
-            </a:pPr>
-            <a:r>
-              <a:rPr sz="500" b="0">
-                <a:solidFill>
-                  <a:srgbClr val="FFFFFF"/>
-                </a:solidFill>
-                <a:latin typeface="Calibri"/>
-              </a:rPr>
-              <a:t/>
-            </a:r>
-          </a:p>
-          <a:p>
-            <a:pPr algn="l">
-              <a:lnSpc>
-                <a:spcPct val="125000"/>
-              </a:lnSpc>
-            </a:pPr>
-            <a:r>
-              <a:rPr sz="1400" b="0">
-                <a:solidFill>
-                  <a:srgbClr val="9CA3F5"/>
-                </a:solidFill>
-                <a:latin typeface="Calibri"/>
-              </a:rPr>
-              <a:t>The gap: 1 of 20 trips measured for cost, because of the free API limits. 3 of 9 of my own design checks pass. Both are in the report.</a:t>
-            </a:r>
-          </a:p>
-        </p:txBody>
-      </p:sp>
-    </p:spTree>
-  </p:cSld>
-  <p:clrMapOvr>
-    <a:masterClrMapping/>
-  </p:clrMapOvr>
-</p:sld>
-</file>
-
-<file path=ppt/slides/slide2.xml><?xml version="1.0" encoding="utf-8"?>
+<file path=ppt/slides/slide4.xml><?xml version="1.0" encoding="utf-8"?>
 <p:sld xmlns:a="http://schemas.openxmlformats.org/drawingml/2006/main" xmlns:p="http://schemas.openxmlformats.org/presentationml/2006/main" xmlns:r="http://schemas.openxmlformats.org/officeDocument/2006/relationships">
   <p:cSld>
     <p:spTree>
@@ -6348,7 +5684,7 @@
                 </a:solidFill>
                 <a:latin typeface="Calibri"/>
               </a:rPr>
-              <a:t>1  ·  WHAT THE SYSTEM HAS TO DO</a:t>
+              <a:t>3  ·  APPROACH B</a:t>
             </a:r>
           </a:p>
         </p:txBody>
@@ -6387,7 +5723,7 @@
                 </a:solidFill>
                 <a:latin typeface="Calibri"/>
               </a:rPr>
-              <a:t>One request, eight jobs</a:t>
+              <a:t>Six agents. Each one picks its own tools</a:t>
             </a:r>
           </a:p>
         </p:txBody>
@@ -6436,72 +5772,17 @@
           </a:p>
         </p:txBody>
       </p:sp>
-      <p:sp>
-        <p:nvSpPr>
-          <p:cNvPr id="5" name="Rounded Rectangle 4"/>
-          <p:cNvSpPr/>
-          <p:nvPr/>
-        </p:nvSpPr>
-        <p:spPr>
-          <a:xfrm>
-            <a:off x="822960" y="1874519"/>
-            <a:ext cx="10515600" cy="685800"/>
-          </a:xfrm>
-          <a:prstGeom prst="roundRect">
-            <a:avLst/>
-          </a:prstGeom>
-          <a:solidFill>
-            <a:srgbClr val="F7F8FC"/>
-          </a:solidFill>
-          <a:ln w="15875">
-            <a:solidFill>
-              <a:srgbClr val="E3E7F0"/>
-            </a:solidFill>
-          </a:ln>
-          <a:effectLst/>
-        </p:spPr>
-        <p:style>
-          <a:lnRef idx="1">
-            <a:schemeClr val="accent1"/>
-          </a:lnRef>
-          <a:fillRef idx="3">
-            <a:schemeClr val="accent1"/>
-          </a:fillRef>
-          <a:effectRef idx="2">
-            <a:schemeClr val="accent1"/>
-          </a:effectRef>
-          <a:fontRef idx="minor">
-            <a:schemeClr val="lt1"/>
-          </a:fontRef>
-        </p:style>
-        <p:txBody>
-          <a:bodyPr rtlCol="0" anchor="ctr" wrap="square"/>
-          <a:lstStyle/>
-          <a:p>
-            <a:pPr algn="ctr"/>
-            <a:r>
-              <a:rPr sz="1500" b="0">
-                <a:solidFill>
-                  <a:srgbClr val="545C6E"/>
-                </a:solidFill>
-                <a:latin typeface="Calibri"/>
-              </a:rPr>
-              <a:t>"I want to plan a trip from Lahore to Istanbul for 4 nights, departing 2026-08-15. Budget is $800 for one person. I like history, food, and shopping."</a:t>
-            </a:r>
-          </a:p>
-        </p:txBody>
-      </p:sp>
       <p:graphicFrame>
         <p:nvGraphicFramePr>
-          <p:cNvPr id="6" name="Table 5"/>
+          <p:cNvPr id="5" name="Table 4"/>
           <p:cNvGraphicFramePr>
             <a:graphicFrameLocks noGrp="1"/>
           </p:cNvGraphicFramePr>
           <p:nvPr/>
         </p:nvGraphicFramePr>
         <p:xfrm>
-          <a:off x="822960" y="2834640"/>
-          <a:ext cx="10515600" cy="1828800"/>
+          <a:off x="822960" y="1965960"/>
+          <a:ext cx="10515599" cy="2560320"/>
         </p:xfrm>
         <a:graphic>
           <a:graphicData uri="http://schemas.openxmlformats.org/drawingml/2006/table">
@@ -6510,9 +5791,9 @@
                 <a:tableStyleId>{5C22544A-7EE6-4342-B048-85BDC9FD1C3A}</a:tableStyleId>
               </a:tblPr>
               <a:tblGrid>
-                <a:gridCol w="3108960"/>
-                <a:gridCol w="3291840"/>
-                <a:gridCol w="4114800"/>
+                <a:gridCol w="3059083"/>
+                <a:gridCol w="860367"/>
+                <a:gridCol w="6596149"/>
               </a:tblGrid>
               <a:tr h="365760">
                 <a:tc>
@@ -6521,13 +5802,13 @@
                     <a:lstStyle/>
                     <a:p>
                       <a:r>
-                        <a:rPr sz="1350" b="1">
+                        <a:rPr sz="1100" b="1">
                           <a:solidFill>
                             <a:srgbClr val="FFFFFF"/>
                           </a:solidFill>
                           <a:latin typeface="Calibri"/>
                         </a:rPr>
-                        <a:t>Understand the request</a:t>
+                        <a:t>Agent</a:t>
                       </a:r>
                     </a:p>
                   </a:txBody>
@@ -6543,13 +5824,13 @@
                     <a:lstStyle/>
                     <a:p>
                       <a:r>
-                        <a:rPr sz="1350" b="1">
+                        <a:rPr sz="1100" b="1">
                           <a:solidFill>
                             <a:srgbClr val="FFFFFF"/>
                           </a:solidFill>
                           <a:latin typeface="Calibri"/>
                         </a:rPr>
-                        <a:t>Get real information</a:t>
+                        <a:t>Tools</a:t>
                       </a:r>
                     </a:p>
                   </a:txBody>
@@ -6565,13 +5846,13 @@
                     <a:lstStyle/>
                     <a:p>
                       <a:r>
-                        <a:rPr sz="1350" b="1">
+                        <a:rPr sz="1100" b="1">
                           <a:solidFill>
                             <a:srgbClr val="FFFFFF"/>
                           </a:solidFill>
                           <a:latin typeface="Calibri"/>
                         </a:rPr>
-                        <a:t>Then</a:t>
+                        <a:t>Which tools</a:t>
                       </a:r>
                     </a:p>
                   </a:txBody>
@@ -6589,13 +5870,13 @@
                     <a:lstStyle/>
                     <a:p>
                       <a:r>
-                        <a:rPr sz="1350" b="0">
+                        <a:rPr sz="1100" b="0">
                           <a:solidFill>
                             <a:srgbClr val="161A23"/>
                           </a:solidFill>
                           <a:latin typeface="Calibri"/>
                         </a:rPr>
-                        <a:t>1  Lahore to Istanbul</a:t>
+                        <a:t>Travel Preferences Extractor</a:t>
                       </a:r>
                     </a:p>
                   </a:txBody>
@@ -6611,13 +5892,13 @@
                     <a:lstStyle/>
                     <a:p>
                       <a:r>
-                        <a:rPr sz="1350" b="0">
+                        <a:rPr sz="1100" b="0">
                           <a:solidFill>
                             <a:srgbClr val="161A23"/>
                           </a:solidFill>
                           <a:latin typeface="Calibri"/>
                         </a:rPr>
-                        <a:t>4  Find real flights</a:t>
+                        <a:t>0</a:t>
                       </a:r>
                     </a:p>
                   </a:txBody>
@@ -6633,13 +5914,13 @@
                     <a:lstStyle/>
                     <a:p>
                       <a:r>
-                        <a:rPr sz="1350" b="0">
+                        <a:rPr sz="1100" b="0">
                           <a:solidFill>
                             <a:srgbClr val="161A23"/>
                           </a:solidFill>
                           <a:latin typeface="Calibri"/>
                         </a:rPr>
-                        <a:t>8  Build the day-by-day plan</a:t>
+                        <a:t>none</a:t>
                       </a:r>
                     </a:p>
                   </a:txBody>
@@ -6657,13 +5938,13 @@
                     <a:lstStyle/>
                     <a:p>
                       <a:r>
-                        <a:rPr sz="1350" b="0">
+                        <a:rPr sz="1100" b="0">
                           <a:solidFill>
                             <a:srgbClr val="161A23"/>
                           </a:solidFill>
                           <a:latin typeface="Calibri"/>
                         </a:rPr>
-                        <a:t>2  The dates</a:t>
+                        <a:t>Flight Search Specialist</a:t>
                       </a:r>
                     </a:p>
                   </a:txBody>
@@ -6679,13 +5960,13 @@
                     <a:lstStyle/>
                     <a:p>
                       <a:r>
-                        <a:rPr sz="1350" b="0">
+                        <a:rPr sz="1100" b="0">
                           <a:solidFill>
                             <a:srgbClr val="161A23"/>
                           </a:solidFill>
                           <a:latin typeface="Calibri"/>
                         </a:rPr>
-                        <a:t>5  Find real hotels</a:t>
+                        <a:t>4</a:t>
                       </a:r>
                     </a:p>
                   </a:txBody>
@@ -6701,13 +5982,13 @@
                     <a:lstStyle/>
                     <a:p>
                       <a:r>
-                        <a:rPr sz="1350" b="0">
+                        <a:rPr sz="1100" b="0">
                           <a:solidFill>
                             <a:srgbClr val="161A23"/>
                           </a:solidFill>
                           <a:latin typeface="Calibri"/>
                         </a:rPr>
-                        <a:t> </a:t>
+                        <a:t>search_comprehensive_flights,  search_round_trip_flights,  search_internet,  calculate</a:t>
                       </a:r>
                     </a:p>
                   </a:txBody>
@@ -6725,13 +6006,13 @@
                     <a:lstStyle/>
                     <a:p>
                       <a:r>
-                        <a:rPr sz="1350" b="0">
+                        <a:rPr sz="1100" b="0">
                           <a:solidFill>
                             <a:srgbClr val="161A23"/>
                           </a:solidFill>
                           <a:latin typeface="Calibri"/>
                         </a:rPr>
-                        <a:t>3  The budget</a:t>
+                        <a:t>Hotel Search Specialist</a:t>
                       </a:r>
                     </a:p>
                   </a:txBody>
@@ -6747,13 +6028,13 @@
                     <a:lstStyle/>
                     <a:p>
                       <a:r>
-                        <a:rPr sz="1350" b="0">
+                        <a:rPr sz="1100" b="0">
                           <a:solidFill>
                             <a:srgbClr val="161A23"/>
                           </a:solidFill>
                           <a:latin typeface="Calibri"/>
                         </a:rPr>
-                        <a:t>6  Find real attractions</a:t>
+                        <a:t>8</a:t>
                       </a:r>
                     </a:p>
                   </a:txBody>
@@ -6769,13 +6050,13 @@
                     <a:lstStyle/>
                     <a:p>
                       <a:r>
-                        <a:rPr sz="1350" b="0">
+                        <a:rPr sz="1100" b="0">
                           <a:solidFill>
                             <a:srgbClr val="161A23"/>
                           </a:solidFill>
                           <a:latin typeface="Calibri"/>
                         </a:rPr>
-                        <a:t> </a:t>
+                        <a:t>search_hotels_comprehensive,  search_accommodations_with_location,  search_hotel_destination,  search_hotels_by_dest_id,  get_hotel_reviews,  get_attractions_near_hotel,  search_internet,  calculate</a:t>
                       </a:r>
                     </a:p>
                   </a:txBody>
@@ -6793,13 +6074,13 @@
                     <a:lstStyle/>
                     <a:p>
                       <a:r>
-                        <a:rPr sz="1350" b="0">
+                        <a:rPr sz="1100" b="0">
                           <a:solidFill>
                             <a:srgbClr val="161A23"/>
                           </a:solidFill>
                           <a:latin typeface="Calibri"/>
                         </a:rPr>
-                        <a:t> </a:t>
+                        <a:t>Activities Specialist</a:t>
                       </a:r>
                     </a:p>
                   </a:txBody>
@@ -6815,13 +6096,13 @@
                     <a:lstStyle/>
                     <a:p>
                       <a:r>
-                        <a:rPr sz="1350" b="0">
+                        <a:rPr sz="1100" b="0">
                           <a:solidFill>
                             <a:srgbClr val="161A23"/>
                           </a:solidFill>
                           <a:latin typeface="Calibri"/>
                         </a:rPr>
-                        <a:t>7  Find real restaurants</a:t>
+                        <a:t>4</a:t>
                       </a:r>
                     </a:p>
                   </a:txBody>
@@ -6837,7 +6118,143 @@
                     <a:lstStyle/>
                     <a:p>
                       <a:r>
-                        <a:rPr sz="1350" b="0">
+                        <a:rPr sz="1100" b="0">
+                          <a:solidFill>
+                            <a:srgbClr val="161A23"/>
+                          </a:solidFill>
+                          <a:latin typeface="Calibri"/>
+                        </a:rPr>
+                        <a:t>search_attractions,  search_restaurants,  search_internet,  calculate</a:t>
+                      </a:r>
+                    </a:p>
+                  </a:txBody>
+                  <a:tcPr>
+                    <a:solidFill>
+                      <a:srgbClr val="F7F8FC"/>
+                    </a:solidFill>
+                  </a:tcPr>
+                </a:tc>
+              </a:tr>
+              <a:tr h="365760">
+                <a:tc>
+                  <a:txBody>
+                    <a:bodyPr/>
+                    <a:lstStyle/>
+                    <a:p>
+                      <a:r>
+                        <a:rPr sz="1100" b="0">
+                          <a:solidFill>
+                            <a:srgbClr val="161A23"/>
+                          </a:solidFill>
+                          <a:latin typeface="Calibri"/>
+                        </a:rPr>
+                        <a:t>Itinerary Coordinator</a:t>
+                      </a:r>
+                    </a:p>
+                  </a:txBody>
+                  <a:tcPr>
+                    <a:solidFill>
+                      <a:srgbClr val="FFFFFF"/>
+                    </a:solidFill>
+                  </a:tcPr>
+                </a:tc>
+                <a:tc>
+                  <a:txBody>
+                    <a:bodyPr/>
+                    <a:lstStyle/>
+                    <a:p>
+                      <a:r>
+                        <a:rPr sz="1100" b="0">
+                          <a:solidFill>
+                            <a:srgbClr val="161A23"/>
+                          </a:solidFill>
+                          <a:latin typeface="Calibri"/>
+                        </a:rPr>
+                        <a:t>4</a:t>
+                      </a:r>
+                    </a:p>
+                  </a:txBody>
+                  <a:tcPr>
+                    <a:solidFill>
+                      <a:srgbClr val="FFFFFF"/>
+                    </a:solidFill>
+                  </a:tcPr>
+                </a:tc>
+                <a:tc>
+                  <a:txBody>
+                    <a:bodyPr/>
+                    <a:lstStyle/>
+                    <a:p>
+                      <a:r>
+                        <a:rPr sz="1100" b="0">
+                          <a:solidFill>
+                            <a:srgbClr val="161A23"/>
+                          </a:solidFill>
+                          <a:latin typeface="Calibri"/>
+                        </a:rPr>
+                        <a:t>calculate,  search_internet,  search_attractions,  search_restaurants</a:t>
+                      </a:r>
+                    </a:p>
+                  </a:txBody>
+                  <a:tcPr>
+                    <a:solidFill>
+                      <a:srgbClr val="FFFFFF"/>
+                    </a:solidFill>
+                  </a:tcPr>
+                </a:tc>
+              </a:tr>
+              <a:tr h="365760">
+                <a:tc>
+                  <a:txBody>
+                    <a:bodyPr/>
+                    <a:lstStyle/>
+                    <a:p>
+                      <a:r>
+                        <a:rPr sz="1100" b="0">
+                          <a:solidFill>
+                            <a:srgbClr val="161A23"/>
+                          </a:solidFill>
+                          <a:latin typeface="Calibri"/>
+                        </a:rPr>
+                        <a:t>Total</a:t>
+                      </a:r>
+                    </a:p>
+                  </a:txBody>
+                  <a:tcPr>
+                    <a:solidFill>
+                      <a:srgbClr val="F7F8FC"/>
+                    </a:solidFill>
+                  </a:tcPr>
+                </a:tc>
+                <a:tc>
+                  <a:txBody>
+                    <a:bodyPr/>
+                    <a:lstStyle/>
+                    <a:p>
+                      <a:r>
+                        <a:rPr sz="1100" b="0">
+                          <a:solidFill>
+                            <a:srgbClr val="161A23"/>
+                          </a:solidFill>
+                          <a:latin typeface="Calibri"/>
+                        </a:rPr>
+                        <a:t>20</a:t>
+                      </a:r>
+                    </a:p>
+                  </a:txBody>
+                  <a:tcPr>
+                    <a:solidFill>
+                      <a:srgbClr val="F7F8FC"/>
+                    </a:solidFill>
+                  </a:tcPr>
+                </a:tc>
+                <a:tc>
+                  <a:txBody>
+                    <a:bodyPr/>
+                    <a:lstStyle/>
+                    <a:p>
+                      <a:r>
+                        <a:rPr sz="1100" b="0">
                           <a:solidFill>
                             <a:srgbClr val="161A23"/>
                           </a:solidFill>
@@ -6860,7 +6277,7 @@
       </p:graphicFrame>
       <p:sp>
         <p:nvSpPr>
-          <p:cNvPr id="7" name="TextBox 6"/>
+          <p:cNvPr id="6" name="TextBox 5"/>
           <p:cNvSpPr txBox="1"/>
           <p:nvPr/>
         </p:nvSpPr>
@@ -6882,33 +6299,33 @@
           <a:p>
             <a:pPr algn="l">
               <a:lnSpc>
-                <a:spcPct val="130000"/>
+                <a:spcPct val="125000"/>
               </a:lnSpc>
             </a:pPr>
             <a:r>
-              <a:rPr sz="1600" b="0">
+              <a:rPr sz="2000" b="1">
                 <a:solidFill>
-                  <a:srgbClr val="545C6E"/>
+                  <a:srgbClr val="161A23"/>
                 </a:solidFill>
                 <a:latin typeface="Calibri"/>
               </a:rPr>
-              <a:t>So the real question is:</a:t>
+              <a:t>It used 21 AI calls and took 372 seconds to plan one trip.</a:t>
             </a:r>
           </a:p>
           <a:p>
             <a:pPr algn="l">
               <a:lnSpc>
-                <a:spcPct val="130000"/>
+                <a:spcPct val="125000"/>
               </a:lnSpc>
             </a:pPr>
             <a:r>
-              <a:rPr sz="2100" b="1">
+              <a:rPr sz="1700" b="1">
                 <a:solidFill>
-                  <a:srgbClr val="4338CA"/>
+                  <a:srgbClr val="A85B00"/>
                 </a:solidFill>
                 <a:latin typeface="Calibri"/>
               </a:rPr>
-              <a:t>Should AI decide when to search for flights and hotels, or should normal code just do it?</a:t>
+              <a:t>Too much freedom: the agents keep thinking and searching — and they still never called two of their own tools.</a:t>
             </a:r>
           </a:p>
         </p:txBody>
@@ -6921,7 +6338,7 @@
 </p:sld>
 </file>
 
-<file path=ppt/slides/slide3.xml><?xml version="1.0" encoding="utf-8"?>
+<file path=ppt/slides/slide5.xml><?xml version="1.0" encoding="utf-8"?>
 <p:sld xmlns:a="http://schemas.openxmlformats.org/drawingml/2006/main" xmlns:p="http://schemas.openxmlformats.org/presentationml/2006/main" xmlns:r="http://schemas.openxmlformats.org/officeDocument/2006/relationships">
   <p:cSld>
     <p:spTree>
@@ -6965,7 +6382,7 @@
                 </a:solidFill>
                 <a:latin typeface="Calibri"/>
               </a:rPr>
-              <a:t>2  ·  THE AGENTS WE USE</a:t>
+              <a:t>4  ·  APPROACH C</a:t>
             </a:r>
           </a:p>
         </p:txBody>
@@ -7004,7 +6421,7 @@
                 </a:solidFill>
                 <a:latin typeface="Calibri"/>
               </a:rPr>
-              <a:t>Each has a name and one job</a:t>
+              <a:t>The same six agents, but set up properly</a:t>
             </a:r>
           </a:p>
         </p:txBody>
@@ -7063,7 +6480,7 @@
         </p:nvGraphicFramePr>
         <p:xfrm>
           <a:off x="822960" y="2011680"/>
-          <a:ext cx="10515598" cy="2560320"/>
+          <a:ext cx="10515599" cy="2560320"/>
         </p:xfrm>
         <a:graphic>
           <a:graphicData uri="http://schemas.openxmlformats.org/drawingml/2006/table">
@@ -7072,9 +6489,9 @@
                 <a:tableStyleId>{5C22544A-7EE6-4342-B048-85BDC9FD1C3A}</a:tableStyleId>
               </a:tblPr>
               <a:tblGrid>
-                <a:gridCol w="3250276"/>
-                <a:gridCol w="4397432"/>
-                <a:gridCol w="2867890"/>
+                <a:gridCol w="3059083"/>
+                <a:gridCol w="860367"/>
+                <a:gridCol w="6596149"/>
               </a:tblGrid>
               <a:tr h="365760">
                 <a:tc>
@@ -7111,7 +6528,7 @@
                           </a:solidFill>
                           <a:latin typeface="Calibri"/>
                         </a:rPr>
-                        <a:t>What it does</a:t>
+                        <a:t>Tools</a:t>
                       </a:r>
                     </a:p>
                   </a:txBody>
@@ -7133,7 +6550,7 @@
                           </a:solidFill>
                           <a:latin typeface="Calibri"/>
                         </a:rPr>
-                        <a:t>Needs AI?</a:t>
+                        <a:t>Which tools</a:t>
                       </a:r>
                     </a:p>
                   </a:txBody>
@@ -7157,7 +6574,7 @@
                           </a:solidFill>
                           <a:latin typeface="Calibri"/>
                         </a:rPr>
-                        <a:t>Travel Conversation Assistant</a:t>
+                        <a:t>Travel Preferences Extractor</a:t>
                       </a:r>
                     </a:p>
                   </a:txBody>
@@ -7179,7 +6596,7 @@
                           </a:solidFill>
                           <a:latin typeface="Calibri"/>
                         </a:rPr>
-                        <a:t>Asks for anything missing</a:t>
+                        <a:t>0</a:t>
                       </a:r>
                     </a:p>
                   </a:txBody>
@@ -7201,7 +6618,7 @@
                           </a:solidFill>
                           <a:latin typeface="Calibri"/>
                         </a:rPr>
-                        <a:t>Yes - people write in many ways</a:t>
+                        <a:t>none</a:t>
                       </a:r>
                     </a:p>
                   </a:txBody>
@@ -7225,7 +6642,7 @@
                           </a:solidFill>
                           <a:latin typeface="Calibri"/>
                         </a:rPr>
-                        <a:t>Travel Preferences Extractor</a:t>
+                        <a:t>Flight Search Specialist</a:t>
                       </a:r>
                     </a:p>
                   </a:txBody>
@@ -7247,7 +6664,7 @@
                           </a:solidFill>
                           <a:latin typeface="Calibri"/>
                         </a:rPr>
-                        <a:t>Turns those words into exact fields</a:t>
+                        <a:t>1</a:t>
                       </a:r>
                     </a:p>
                   </a:txBody>
@@ -7269,7 +6686,7 @@
                           </a:solidFill>
                           <a:latin typeface="Calibri"/>
                         </a:rPr>
-                        <a:t>Yes - same reason</a:t>
+                        <a:t>distilled_search_flights</a:t>
                       </a:r>
                     </a:p>
                   </a:txBody>
@@ -7293,7 +6710,7 @@
                           </a:solidFill>
                           <a:latin typeface="Calibri"/>
                         </a:rPr>
-                        <a:t>Flight Search Specialist</a:t>
+                        <a:t>Hotel Search Specialist</a:t>
                       </a:r>
                     </a:p>
                   </a:txBody>
@@ -7315,7 +6732,7 @@
                           </a:solidFill>
                           <a:latin typeface="Calibri"/>
                         </a:rPr>
-                        <a:t>Looks up flights</a:t>
+                        <a:t>1</a:t>
                       </a:r>
                     </a:p>
                   </a:txBody>
@@ -7337,7 +6754,7 @@
                           </a:solidFill>
                           <a:latin typeface="Calibri"/>
                         </a:rPr>
-                        <a:t>No</a:t>
+                        <a:t>distilled_search_hotels</a:t>
                       </a:r>
                     </a:p>
                   </a:txBody>
@@ -7361,7 +6778,7 @@
                           </a:solidFill>
                           <a:latin typeface="Calibri"/>
                         </a:rPr>
-                        <a:t>Hotel Search Specialist</a:t>
+                        <a:t>Activities Specialist</a:t>
                       </a:r>
                     </a:p>
                   </a:txBody>
@@ -7383,7 +6800,7 @@
                           </a:solidFill>
                           <a:latin typeface="Calibri"/>
                         </a:rPr>
-                        <a:t>Looks up hotels</a:t>
+                        <a:t>2</a:t>
                       </a:r>
                     </a:p>
                   </a:txBody>
@@ -7405,7 +6822,7 @@
                           </a:solidFill>
                           <a:latin typeface="Calibri"/>
                         </a:rPr>
-                        <a:t>No</a:t>
+                        <a:t>distilled_search_attractions,  distilled_search_restaurants</a:t>
                       </a:r>
                     </a:p>
                   </a:txBody>
@@ -7429,7 +6846,7 @@
                           </a:solidFill>
                           <a:latin typeface="Calibri"/>
                         </a:rPr>
-                        <a:t>Activities Specialist</a:t>
+                        <a:t>Itinerary Coordinator</a:t>
                       </a:r>
                     </a:p>
                   </a:txBody>
@@ -7451,7 +6868,7 @@
                           </a:solidFill>
                           <a:latin typeface="Calibri"/>
                         </a:rPr>
-                        <a:t>Looks up places to visit and eat</a:t>
+                        <a:t>0</a:t>
                       </a:r>
                     </a:p>
                   </a:txBody>
@@ -7473,7 +6890,7 @@
                           </a:solidFill>
                           <a:latin typeface="Calibri"/>
                         </a:rPr>
-                        <a:t>No</a:t>
+                        <a:t>none</a:t>
                       </a:r>
                     </a:p>
                   </a:txBody>
@@ -7497,7 +6914,7 @@
                           </a:solidFill>
                           <a:latin typeface="Calibri"/>
                         </a:rPr>
-                        <a:t>Itinerary Coordinator</a:t>
+                        <a:t>Total</a:t>
                       </a:r>
                     </a:p>
                   </a:txBody>
@@ -7519,7 +6936,7 @@
                           </a:solidFill>
                           <a:latin typeface="Calibri"/>
                         </a:rPr>
-                        <a:t>Writes the day-by-day plan</a:t>
+                        <a:t>4</a:t>
                       </a:r>
                     </a:p>
                   </a:txBody>
@@ -7541,7 +6958,7 @@
                           </a:solidFill>
                           <a:latin typeface="Calibri"/>
                         </a:rPr>
-                        <a:t>Yes - which day, what order</a:t>
+                        <a:t> </a:t>
                       </a:r>
                     </a:p>
                   </a:txBody>
@@ -7564,8 +6981,8 @@
         </p:nvSpPr>
         <p:spPr>
           <a:xfrm>
-            <a:off x="822960" y="5394960"/>
-            <a:ext cx="10515600" cy="822960"/>
+            <a:off x="822960" y="4572000"/>
+            <a:ext cx="10515600" cy="1737360"/>
           </a:xfrm>
           <a:prstGeom prst="rect">
             <a:avLst/>
@@ -7580,17 +6997,65 @@
           <a:p>
             <a:pPr algn="l">
               <a:lnSpc>
-                <a:spcPct val="100000"/>
+                <a:spcPct val="120000"/>
               </a:lnSpc>
             </a:pPr>
             <a:r>
-              <a:rPr sz="1900" b="1">
+              <a:rPr sz="1700" b="0">
+                <a:solidFill>
+                  <a:srgbClr val="161A23"/>
+                </a:solidFill>
+                <a:latin typeface="Calibri"/>
+              </a:rPr>
+              <a:t>Three changes: fewer tools each, only 3 thinking steps instead of 15, and the AI is shown the best 3 results instead of 12,000 characters.</a:t>
+            </a:r>
+          </a:p>
+          <a:p>
+            <a:pPr algn="l">
+              <a:lnSpc>
+                <a:spcPct val="120000"/>
+              </a:lnSpc>
+            </a:pPr>
+            <a:r>
+              <a:rPr sz="500" b="0">
+                <a:solidFill>
+                  <a:srgbClr val="161A23"/>
+                </a:solidFill>
+                <a:latin typeface="Calibri"/>
+              </a:rPr>
+              <a:t/>
+            </a:r>
+          </a:p>
+          <a:p>
+            <a:pPr algn="l">
+              <a:lnSpc>
+                <a:spcPct val="120000"/>
+              </a:lnSpc>
+            </a:pPr>
+            <a:r>
+              <a:rPr sz="2000" b="1">
                 <a:solidFill>
                   <a:srgbClr val="4338CA"/>
                 </a:solidFill>
                 <a:latin typeface="Calibri"/>
               </a:rPr>
-              <a:t>Looking something up does not need thinking. Only three of the six really need AI.</a:t>
+              <a:t>Result: 89% less text sent, and 10 AI calls instead of 21.</a:t>
+            </a:r>
+          </a:p>
+          <a:p>
+            <a:pPr algn="l">
+              <a:lnSpc>
+                <a:spcPct val="120000"/>
+              </a:lnSpc>
+            </a:pPr>
+            <a:r>
+              <a:rPr sz="1700" b="1">
+                <a:solidFill>
+                  <a:srgbClr val="A85B00"/>
+                </a:solidFill>
+                <a:latin typeface="Calibri"/>
+              </a:rPr>
+              <a:t>Worth saying out loud: most of B's cost was bad setup, not the design.</a:t>
             </a:r>
           </a:p>
         </p:txBody>
@@ -7603,7 +7068,7 @@
 </p:sld>
 </file>
 
-<file path=ppt/slides/slide4.xml><?xml version="1.0" encoding="utf-8"?>
+<file path=ppt/slides/slide6.xml><?xml version="1.0" encoding="utf-8"?>
 <p:sld xmlns:a="http://schemas.openxmlformats.org/drawingml/2006/main" xmlns:p="http://schemas.openxmlformats.org/presentationml/2006/main" xmlns:r="http://schemas.openxmlformats.org/officeDocument/2006/relationships">
   <p:cSld>
     <p:spTree>
@@ -7647,7 +7112,7 @@
                 </a:solidFill>
                 <a:latin typeface="Calibri"/>
               </a:rPr>
-              <a:t>3  ·  I BUILT IT FOUR WAYS</a:t>
+              <a:t>5  ·  APPROACH D</a:t>
             </a:r>
           </a:p>
         </p:txBody>
@@ -7686,7 +7151,7 @@
                 </a:solidFill>
                 <a:latin typeface="Calibri"/>
               </a:rPr>
-              <a:t>Same request, same data</a:t>
+              <a:t>Three agents. Plain Python does the searching</a:t>
             </a:r>
           </a:p>
         </p:txBody>
@@ -7745,7 +7210,7 @@
         </p:nvGraphicFramePr>
         <p:xfrm>
           <a:off x="822960" y="2011680"/>
-          <a:ext cx="10515598" cy="1828800"/>
+          <a:ext cx="10515599" cy="1828800"/>
         </p:xfrm>
         <a:graphic>
           <a:graphicData uri="http://schemas.openxmlformats.org/drawingml/2006/table">
@@ -7754,11 +7219,9 @@
                 <a:tableStyleId>{5C22544A-7EE6-4342-B048-85BDC9FD1C3A}</a:tableStyleId>
               </a:tblPr>
               <a:tblGrid>
-                <a:gridCol w="382385"/>
-                <a:gridCol w="1911927"/>
-                <a:gridCol w="3728258"/>
+                <a:gridCol w="3059083"/>
                 <a:gridCol w="860367"/>
-                <a:gridCol w="3632661"/>
+                <a:gridCol w="6596149"/>
               </a:tblGrid>
               <a:tr h="365760">
                 <a:tc>
@@ -7767,13 +7230,13 @@
                     <a:lstStyle/>
                     <a:p>
                       <a:r>
-                        <a:rPr sz="1300" b="1">
+                        <a:rPr sz="1350" b="1">
                           <a:solidFill>
                             <a:srgbClr val="FFFFFF"/>
                           </a:solidFill>
                           <a:latin typeface="Calibri"/>
                         </a:rPr>
-                        <a:t> </a:t>
+                        <a:t>Agent</a:t>
                       </a:r>
                     </a:p>
                   </a:txBody>
@@ -7789,13 +7252,13 @@
                     <a:lstStyle/>
                     <a:p>
                       <a:r>
-                        <a:rPr sz="1300" b="1">
+                        <a:rPr sz="1350" b="1">
                           <a:solidFill>
                             <a:srgbClr val="FFFFFF"/>
                           </a:solidFill>
                           <a:latin typeface="Calibri"/>
                         </a:rPr>
-                        <a:t>Name</a:t>
+                        <a:t>Tools</a:t>
                       </a:r>
                     </a:p>
                   </a:txBody>
@@ -7811,57 +7274,13 @@
                     <a:lstStyle/>
                     <a:p>
                       <a:r>
-                        <a:rPr sz="1300" b="1">
+                        <a:rPr sz="1350" b="1">
                           <a:solidFill>
                             <a:srgbClr val="FFFFFF"/>
                           </a:solidFill>
                           <a:latin typeface="Calibri"/>
                         </a:rPr>
-                        <a:t>Simple meaning</a:t>
-                      </a:r>
-                    </a:p>
-                  </a:txBody>
-                  <a:tcPr>
-                    <a:solidFill>
-                      <a:srgbClr val="4338CA"/>
-                    </a:solidFill>
-                  </a:tcPr>
-                </a:tc>
-                <a:tc>
-                  <a:txBody>
-                    <a:bodyPr/>
-                    <a:lstStyle/>
-                    <a:p>
-                      <a:r>
-                        <a:rPr sz="1300" b="1">
-                          <a:solidFill>
-                            <a:srgbClr val="FFFFFF"/>
-                          </a:solidFill>
-                          <a:latin typeface="Calibri"/>
-                        </a:rPr>
-                        <a:t>Agents</a:t>
-                      </a:r>
-                    </a:p>
-                  </a:txBody>
-                  <a:tcPr>
-                    <a:solidFill>
-                      <a:srgbClr val="4338CA"/>
-                    </a:solidFill>
-                  </a:tcPr>
-                </a:tc>
-                <a:tc>
-                  <a:txBody>
-                    <a:bodyPr/>
-                    <a:lstStyle/>
-                    <a:p>
-                      <a:r>
-                        <a:rPr sz="1300" b="1">
-                          <a:solidFill>
-                            <a:srgbClr val="FFFFFF"/>
-                          </a:solidFill>
-                          <a:latin typeface="Calibri"/>
-                        </a:rPr>
-                        <a:t>Who fetches the data</a:t>
+                        <a:t>Which tools</a:t>
                       </a:r>
                     </a:p>
                   </a:txBody>
@@ -7879,13 +7298,13 @@
                     <a:lstStyle/>
                     <a:p>
                       <a:r>
-                        <a:rPr sz="1300" b="0">
+                        <a:rPr sz="1350" b="0">
                           <a:solidFill>
                             <a:srgbClr val="161A23"/>
                           </a:solidFill>
                           <a:latin typeface="Calibri"/>
                         </a:rPr>
-                        <a:t>A</a:t>
+                        <a:t>Travel Conversation Assistant</a:t>
                       </a:r>
                     </a:p>
                   </a:txBody>
@@ -7901,13 +7320,13 @@
                     <a:lstStyle/>
                     <a:p>
                       <a:r>
-                        <a:rPr sz="1300" b="0">
+                        <a:rPr sz="1350" b="0">
                           <a:solidFill>
                             <a:srgbClr val="161A23"/>
                           </a:solidFill>
                           <a:latin typeface="Calibri"/>
                         </a:rPr>
-                        <a:t>Single AI</a:t>
+                        <a:t>0</a:t>
                       </a:r>
                     </a:p>
                   </a:txBody>
@@ -7923,57 +7342,13 @@
                     <a:lstStyle/>
                     <a:p>
                       <a:r>
-                        <a:rPr sz="1300" b="0">
+                        <a:rPr sz="1350" b="0">
                           <a:solidFill>
                             <a:srgbClr val="161A23"/>
                           </a:solidFill>
                           <a:latin typeface="Calibri"/>
                         </a:rPr>
-                        <a:t>AI answers from its own knowledge</a:t>
-                      </a:r>
-                    </a:p>
-                  </a:txBody>
-                  <a:tcPr>
-                    <a:solidFill>
-                      <a:srgbClr val="FFFFFF"/>
-                    </a:solidFill>
-                  </a:tcPr>
-                </a:tc>
-                <a:tc>
-                  <a:txBody>
-                    <a:bodyPr/>
-                    <a:lstStyle/>
-                    <a:p>
-                      <a:r>
-                        <a:rPr sz="1300" b="0">
-                          <a:solidFill>
-                            <a:srgbClr val="161A23"/>
-                          </a:solidFill>
-                          <a:latin typeface="Calibri"/>
-                        </a:rPr>
-                        <a:t>1</a:t>
-                      </a:r>
-                    </a:p>
-                  </a:txBody>
-                  <a:tcPr>
-                    <a:solidFill>
-                      <a:srgbClr val="FFFFFF"/>
-                    </a:solidFill>
-                  </a:tcPr>
-                </a:tc>
-                <a:tc>
-                  <a:txBody>
-                    <a:bodyPr/>
-                    <a:lstStyle/>
-                    <a:p>
-                      <a:r>
-                        <a:rPr sz="1300" b="0">
-                          <a:solidFill>
-                            <a:srgbClr val="161A23"/>
-                          </a:solidFill>
-                          <a:latin typeface="Calibri"/>
-                        </a:rPr>
-                        <a:t>nobody - no APIs at all</a:t>
+                        <a:t>none</a:t>
                       </a:r>
                     </a:p>
                   </a:txBody>
@@ -7991,13 +7366,13 @@
                     <a:lstStyle/>
                     <a:p>
                       <a:r>
-                        <a:rPr sz="1300" b="0">
+                        <a:rPr sz="1350" b="0">
                           <a:solidFill>
                             <a:srgbClr val="161A23"/>
                           </a:solidFill>
                           <a:latin typeface="Calibri"/>
                         </a:rPr>
-                        <a:t>B</a:t>
+                        <a:t>Travel Preferences Extractor</a:t>
                       </a:r>
                     </a:p>
                   </a:txBody>
@@ -8013,13 +7388,13 @@
                     <a:lstStyle/>
                     <a:p>
                       <a:r>
-                        <a:rPr sz="1300" b="0">
+                        <a:rPr sz="1350" b="0">
                           <a:solidFill>
                             <a:srgbClr val="161A23"/>
                           </a:solidFill>
                           <a:latin typeface="Calibri"/>
                         </a:rPr>
-                        <a:t>6 agents, naive</a:t>
+                        <a:t>0</a:t>
                       </a:r>
                     </a:p>
                   </a:txBody>
@@ -8035,57 +7410,13 @@
                     <a:lstStyle/>
                     <a:p>
                       <a:r>
-                        <a:rPr sz="1300" b="0">
+                        <a:rPr sz="1350" b="0">
                           <a:solidFill>
                             <a:srgbClr val="161A23"/>
                           </a:solidFill>
                           <a:latin typeface="Calibri"/>
                         </a:rPr>
-                        <a:t>Each agent decides its own tool use</a:t>
-                      </a:r>
-                    </a:p>
-                  </a:txBody>
-                  <a:tcPr>
-                    <a:solidFill>
-                      <a:srgbClr val="F7F8FC"/>
-                    </a:solidFill>
-                  </a:tcPr>
-                </a:tc>
-                <a:tc>
-                  <a:txBody>
-                    <a:bodyPr/>
-                    <a:lstStyle/>
-                    <a:p>
-                      <a:r>
-                        <a:rPr sz="1300" b="0">
-                          <a:solidFill>
-                            <a:srgbClr val="161A23"/>
-                          </a:solidFill>
-                          <a:latin typeface="Calibri"/>
-                        </a:rPr>
-                        <a:t>6</a:t>
-                      </a:r>
-                    </a:p>
-                  </a:txBody>
-                  <a:tcPr>
-                    <a:solidFill>
-                      <a:srgbClr val="F7F8FC"/>
-                    </a:solidFill>
-                  </a:tcPr>
-                </a:tc>
-                <a:tc>
-                  <a:txBody>
-                    <a:bodyPr/>
-                    <a:lstStyle/>
-                    <a:p>
-                      <a:r>
-                        <a:rPr sz="1300" b="0">
-                          <a:solidFill>
-                            <a:srgbClr val="161A23"/>
-                          </a:solidFill>
-                          <a:latin typeface="Calibri"/>
-                        </a:rPr>
-                        <a:t>the agents, through the tool server</a:t>
+                        <a:t>none</a:t>
                       </a:r>
                     </a:p>
                   </a:txBody>
@@ -8103,13 +7434,13 @@
                     <a:lstStyle/>
                     <a:p>
                       <a:r>
-                        <a:rPr sz="1300" b="0">
+                        <a:rPr sz="1350" b="0">
                           <a:solidFill>
                             <a:srgbClr val="161A23"/>
                           </a:solidFill>
                           <a:latin typeface="Calibri"/>
                         </a:rPr>
-                        <a:t>C</a:t>
+                        <a:t>Itinerary Coordinator</a:t>
                       </a:r>
                     </a:p>
                   </a:txBody>
@@ -8125,13 +7456,13 @@
                     <a:lstStyle/>
                     <a:p>
                       <a:r>
-                        <a:rPr sz="1300" b="0">
+                        <a:rPr sz="1350" b="0">
                           <a:solidFill>
                             <a:srgbClr val="161A23"/>
                           </a:solidFill>
                           <a:latin typeface="Calibri"/>
                         </a:rPr>
-                        <a:t>6 agents, tuned</a:t>
+                        <a:t>0</a:t>
                       </a:r>
                     </a:p>
                   </a:txBody>
@@ -8147,57 +7478,13 @@
                     <a:lstStyle/>
                     <a:p>
                       <a:r>
-                        <a:rPr sz="1300" b="0">
+                        <a:rPr sz="1350" b="0">
                           <a:solidFill>
                             <a:srgbClr val="161A23"/>
                           </a:solidFill>
                           <a:latin typeface="Calibri"/>
                         </a:rPr>
-                        <a:t>Same six, configured properly</a:t>
-                      </a:r>
-                    </a:p>
-                  </a:txBody>
-                  <a:tcPr>
-                    <a:solidFill>
-                      <a:srgbClr val="FFFFFF"/>
-                    </a:solidFill>
-                  </a:tcPr>
-                </a:tc>
-                <a:tc>
-                  <a:txBody>
-                    <a:bodyPr/>
-                    <a:lstStyle/>
-                    <a:p>
-                      <a:r>
-                        <a:rPr sz="1300" b="0">
-                          <a:solidFill>
-                            <a:srgbClr val="161A23"/>
-                          </a:solidFill>
-                          <a:latin typeface="Calibri"/>
-                        </a:rPr>
-                        <a:t>6</a:t>
-                      </a:r>
-                    </a:p>
-                  </a:txBody>
-                  <a:tcPr>
-                    <a:solidFill>
-                      <a:srgbClr val="FFFFFF"/>
-                    </a:solidFill>
-                  </a:tcPr>
-                </a:tc>
-                <a:tc>
-                  <a:txBody>
-                    <a:bodyPr/>
-                    <a:lstStyle/>
-                    <a:p>
-                      <a:r>
-                        <a:rPr sz="1300" b="0">
-                          <a:solidFill>
-                            <a:srgbClr val="161A23"/>
-                          </a:solidFill>
-                          <a:latin typeface="Calibri"/>
-                        </a:rPr>
-                        <a:t>the agents, calling directly</a:t>
+                        <a:t>none — the data is handed to it already</a:t>
                       </a:r>
                     </a:p>
                   </a:txBody>
@@ -8215,13 +7502,13 @@
                     <a:lstStyle/>
                     <a:p>
                       <a:r>
-                        <a:rPr sz="1300" b="0">
+                        <a:rPr sz="1350" b="0">
                           <a:solidFill>
                             <a:srgbClr val="161A23"/>
                           </a:solidFill>
                           <a:latin typeface="Calibri"/>
                         </a:rPr>
-                        <a:t>D</a:t>
+                        <a:t>Total</a:t>
                       </a:r>
                     </a:p>
                   </a:txBody>
@@ -8237,13 +7524,13 @@
                     <a:lstStyle/>
                     <a:p>
                       <a:r>
-                        <a:rPr sz="1300" b="0">
+                        <a:rPr sz="1350" b="0">
                           <a:solidFill>
                             <a:srgbClr val="161A23"/>
                           </a:solidFill>
                           <a:latin typeface="Calibri"/>
                         </a:rPr>
-                        <a:t>3 agents, direct</a:t>
+                        <a:t>0</a:t>
                       </a:r>
                     </a:p>
                   </a:txBody>
@@ -8259,57 +7546,13 @@
                     <a:lstStyle/>
                     <a:p>
                       <a:r>
-                        <a:rPr sz="1300" b="0">
+                        <a:rPr sz="1350" b="0">
                           <a:solidFill>
                             <a:srgbClr val="161A23"/>
                           </a:solidFill>
                           <a:latin typeface="Calibri"/>
                         </a:rPr>
-                        <a:t>AI thinks; code does the searching</a:t>
-                      </a:r>
-                    </a:p>
-                  </a:txBody>
-                  <a:tcPr>
-                    <a:solidFill>
-                      <a:srgbClr val="F7F8FC"/>
-                    </a:solidFill>
-                  </a:tcPr>
-                </a:tc>
-                <a:tc>
-                  <a:txBody>
-                    <a:bodyPr/>
-                    <a:lstStyle/>
-                    <a:p>
-                      <a:r>
-                        <a:rPr sz="1300" b="0">
-                          <a:solidFill>
-                            <a:srgbClr val="161A23"/>
-                          </a:solidFill>
-                          <a:latin typeface="Calibri"/>
-                        </a:rPr>
-                        <a:t>3</a:t>
-                      </a:r>
-                    </a:p>
-                  </a:txBody>
-                  <a:tcPr>
-                    <a:solidFill>
-                      <a:srgbClr val="F7F8FC"/>
-                    </a:solidFill>
-                  </a:tcPr>
-                </a:tc>
-                <a:tc>
-                  <a:txBody>
-                    <a:bodyPr/>
-                    <a:lstStyle/>
-                    <a:p>
-                      <a:r>
-                        <a:rPr sz="1300" b="0">
-                          <a:solidFill>
-                            <a:srgbClr val="161A23"/>
-                          </a:solidFill>
-                          <a:latin typeface="Calibri"/>
-                        </a:rPr>
-                        <a:t>plain Python</a:t>
+                        <a:t> </a:t>
                       </a:r>
                     </a:p>
                   </a:txBody>
@@ -8332,8 +7575,8 @@
         </p:nvSpPr>
         <p:spPr>
           <a:xfrm>
-            <a:off x="822960" y="4937760"/>
-            <a:ext cx="10515600" cy="1188720"/>
+            <a:off x="822960" y="3886200"/>
+            <a:ext cx="10515600" cy="457200"/>
           </a:xfrm>
           <a:prstGeom prst="rect">
             <a:avLst/>
@@ -8348,7 +7591,7 @@
           <a:p>
             <a:pPr algn="l">
               <a:lnSpc>
-                <a:spcPct val="125000"/>
+                <a:spcPct val="100000"/>
               </a:lnSpc>
             </a:pPr>
             <a:r>
@@ -8358,23 +7601,319 @@
                 </a:solidFill>
                 <a:latin typeface="Calibri"/>
               </a:rPr>
-              <a:t>All four get the identical request and the identical travel data.</a:t>
-            </a:r>
-          </a:p>
+              <a:t>The three search agents are gone. Plain Python fetches the flights, hotels, attractions and restaurants.</a:t>
+            </a:r>
+          </a:p>
+        </p:txBody>
+      </p:sp>
+      <p:sp>
+        <p:nvSpPr>
+          <p:cNvPr id="7" name="TextBox 6"/>
+          <p:cNvSpPr txBox="1"/>
+          <p:nvPr/>
+        </p:nvSpPr>
+        <p:spPr>
+          <a:xfrm>
+            <a:off x="822960" y="4389120"/>
+            <a:ext cx="10515600" cy="457200"/>
+          </a:xfrm>
+          <a:prstGeom prst="rect">
+            <a:avLst/>
+          </a:prstGeom>
+          <a:noFill/>
+        </p:spPr>
+        <p:txBody>
+          <a:bodyPr wrap="square" anchor="t">
+            <a:spAutoFit/>
+          </a:bodyPr>
+          <a:lstStyle/>
           <a:p>
             <a:pPr algn="l">
               <a:lnSpc>
-                <a:spcPct val="125000"/>
+                <a:spcPct val="100000"/>
               </a:lnSpc>
             </a:pPr>
             <a:r>
-              <a:rPr sz="1700" b="0">
+              <a:rPr sz="1200" b="0">
                 <a:solidFill>
                   <a:srgbClr val="545C6E"/>
                 </a:solidFill>
                 <a:latin typeface="Calibri"/>
               </a:rPr>
-              <a:t>So the only thing being tested is who decides when to fetch it.</a:t>
+              <a:t>(In the web app the coordinator keeps 4 helper tools — calculate, search_internet, search_attractions, search_restaurants. The measured run removes them.)</a:t>
+            </a:r>
+          </a:p>
+        </p:txBody>
+      </p:sp>
+      <p:sp>
+        <p:nvSpPr>
+          <p:cNvPr id="8" name="TextBox 7"/>
+          <p:cNvSpPr txBox="1"/>
+          <p:nvPr/>
+        </p:nvSpPr>
+        <p:spPr>
+          <a:xfrm>
+            <a:off x="822960" y="4892040"/>
+            <a:ext cx="3515258" cy="1188720"/>
+          </a:xfrm>
+          <a:prstGeom prst="rect">
+            <a:avLst/>
+          </a:prstGeom>
+          <a:noFill/>
+        </p:spPr>
+        <p:txBody>
+          <a:bodyPr wrap="square" anchor="t">
+            <a:spAutoFit/>
+          </a:bodyPr>
+          <a:lstStyle/>
+          <a:p>
+            <a:pPr algn="ctr">
+              <a:lnSpc>
+                <a:spcPct val="100000"/>
+              </a:lnSpc>
+            </a:pPr>
+            <a:r>
+              <a:rPr sz="6000" b="1">
+                <a:solidFill>
+                  <a:srgbClr val="4338CA"/>
+                </a:solidFill>
+                <a:latin typeface="Calibri"/>
+              </a:rPr>
+              <a:t>2</a:t>
+            </a:r>
+          </a:p>
+        </p:txBody>
+      </p:sp>
+      <p:sp>
+        <p:nvSpPr>
+          <p:cNvPr id="9" name="TextBox 8"/>
+          <p:cNvSpPr txBox="1"/>
+          <p:nvPr/>
+        </p:nvSpPr>
+        <p:spPr>
+          <a:xfrm>
+            <a:off x="822960" y="6035040"/>
+            <a:ext cx="3515258" cy="731520"/>
+          </a:xfrm>
+          <a:prstGeom prst="rect">
+            <a:avLst/>
+          </a:prstGeom>
+          <a:noFill/>
+        </p:spPr>
+        <p:txBody>
+          <a:bodyPr wrap="square" anchor="t">
+            <a:spAutoFit/>
+          </a:bodyPr>
+          <a:lstStyle/>
+          <a:p>
+            <a:pPr algn="ctr">
+              <a:lnSpc>
+                <a:spcPct val="100000"/>
+              </a:lnSpc>
+            </a:pPr>
+            <a:r>
+              <a:rPr sz="1400" b="0">
+                <a:solidFill>
+                  <a:srgbClr val="545C6E"/>
+                </a:solidFill>
+                <a:latin typeface="Calibri"/>
+              </a:rPr>
+              <a:t>AI calls</a:t>
+            </a:r>
+          </a:p>
+        </p:txBody>
+      </p:sp>
+      <p:sp>
+        <p:nvSpPr>
+          <p:cNvPr id="10" name="TextBox 9"/>
+          <p:cNvSpPr txBox="1"/>
+          <p:nvPr/>
+        </p:nvSpPr>
+        <p:spPr>
+          <a:xfrm>
+            <a:off x="4338218" y="4892040"/>
+            <a:ext cx="3515258" cy="1188720"/>
+          </a:xfrm>
+          <a:prstGeom prst="rect">
+            <a:avLst/>
+          </a:prstGeom>
+          <a:noFill/>
+        </p:spPr>
+        <p:txBody>
+          <a:bodyPr wrap="square" anchor="t">
+            <a:spAutoFit/>
+          </a:bodyPr>
+          <a:lstStyle/>
+          <a:p>
+            <a:pPr algn="ctr">
+              <a:lnSpc>
+                <a:spcPct val="100000"/>
+              </a:lnSpc>
+            </a:pPr>
+            <a:r>
+              <a:rPr sz="6000" b="1">
+                <a:solidFill>
+                  <a:srgbClr val="4338CA"/>
+                </a:solidFill>
+                <a:latin typeface="Calibri"/>
+              </a:rPr>
+              <a:t>23s</a:t>
+            </a:r>
+          </a:p>
+        </p:txBody>
+      </p:sp>
+      <p:sp>
+        <p:nvSpPr>
+          <p:cNvPr id="11" name="TextBox 10"/>
+          <p:cNvSpPr txBox="1"/>
+          <p:nvPr/>
+        </p:nvSpPr>
+        <p:spPr>
+          <a:xfrm>
+            <a:off x="4338218" y="6035040"/>
+            <a:ext cx="3515258" cy="731520"/>
+          </a:xfrm>
+          <a:prstGeom prst="rect">
+            <a:avLst/>
+          </a:prstGeom>
+          <a:noFill/>
+        </p:spPr>
+        <p:txBody>
+          <a:bodyPr wrap="square" anchor="t">
+            <a:spAutoFit/>
+          </a:bodyPr>
+          <a:lstStyle/>
+          <a:p>
+            <a:pPr algn="ctr">
+              <a:lnSpc>
+                <a:spcPct val="100000"/>
+              </a:lnSpc>
+            </a:pPr>
+            <a:r>
+              <a:rPr sz="1400" b="0">
+                <a:solidFill>
+                  <a:srgbClr val="545C6E"/>
+                </a:solidFill>
+                <a:latin typeface="Calibri"/>
+              </a:rPr>
+              <a:t>to finish</a:t>
+            </a:r>
+          </a:p>
+        </p:txBody>
+      </p:sp>
+      <p:sp>
+        <p:nvSpPr>
+          <p:cNvPr id="12" name="TextBox 11"/>
+          <p:cNvSpPr txBox="1"/>
+          <p:nvPr/>
+        </p:nvSpPr>
+        <p:spPr>
+          <a:xfrm>
+            <a:off x="7853476" y="4892040"/>
+            <a:ext cx="3515258" cy="1188720"/>
+          </a:xfrm>
+          <a:prstGeom prst="rect">
+            <a:avLst/>
+          </a:prstGeom>
+          <a:noFill/>
+        </p:spPr>
+        <p:txBody>
+          <a:bodyPr wrap="square" anchor="t">
+            <a:spAutoFit/>
+          </a:bodyPr>
+          <a:lstStyle/>
+          <a:p>
+            <a:pPr algn="ctr">
+              <a:lnSpc>
+                <a:spcPct val="100000"/>
+              </a:lnSpc>
+            </a:pPr>
+            <a:r>
+              <a:rPr sz="6000" b="1">
+                <a:solidFill>
+                  <a:srgbClr val="4338CA"/>
+                </a:solidFill>
+                <a:latin typeface="Calibri"/>
+              </a:rPr>
+              <a:t>5</a:t>
+            </a:r>
+          </a:p>
+        </p:txBody>
+      </p:sp>
+      <p:sp>
+        <p:nvSpPr>
+          <p:cNvPr id="13" name="TextBox 12"/>
+          <p:cNvSpPr txBox="1"/>
+          <p:nvPr/>
+        </p:nvSpPr>
+        <p:spPr>
+          <a:xfrm>
+            <a:off x="7853476" y="6035040"/>
+            <a:ext cx="3515258" cy="731520"/>
+          </a:xfrm>
+          <a:prstGeom prst="rect">
+            <a:avLst/>
+          </a:prstGeom>
+          <a:noFill/>
+        </p:spPr>
+        <p:txBody>
+          <a:bodyPr wrap="square" anchor="t">
+            <a:spAutoFit/>
+          </a:bodyPr>
+          <a:lstStyle/>
+          <a:p>
+            <a:pPr algn="ctr">
+              <a:lnSpc>
+                <a:spcPct val="100000"/>
+              </a:lnSpc>
+            </a:pPr>
+            <a:r>
+              <a:rPr sz="1400" b="0">
+                <a:solidFill>
+                  <a:srgbClr val="545C6E"/>
+                </a:solidFill>
+                <a:latin typeface="Calibri"/>
+              </a:rPr>
+              <a:t>searches, every single time</a:t>
+            </a:r>
+          </a:p>
+        </p:txBody>
+      </p:sp>
+      <p:sp>
+        <p:nvSpPr>
+          <p:cNvPr id="14" name="TextBox 13"/>
+          <p:cNvSpPr txBox="1"/>
+          <p:nvPr/>
+        </p:nvSpPr>
+        <p:spPr>
+          <a:xfrm>
+            <a:off x="822960" y="6400800"/>
+            <a:ext cx="10515600" cy="365760"/>
+          </a:xfrm>
+          <a:prstGeom prst="rect">
+            <a:avLst/>
+          </a:prstGeom>
+          <a:noFill/>
+        </p:spPr>
+        <p:txBody>
+          <a:bodyPr wrap="square" anchor="t">
+            <a:spAutoFit/>
+          </a:bodyPr>
+          <a:lstStyle/>
+          <a:p>
+            <a:pPr algn="l">
+              <a:lnSpc>
+                <a:spcPct val="100000"/>
+              </a:lnSpc>
+            </a:pPr>
+            <a:r>
+              <a:rPr sz="1600" b="0">
+                <a:solidFill>
+                  <a:srgbClr val="545C6E"/>
+                </a:solidFill>
+                <a:latin typeface="Calibri"/>
+              </a:rPr>
+              <a:t>Once we know the place and the dates, there is nothing left for AI to decide.</a:t>
             </a:r>
           </a:p>
         </p:txBody>
@@ -8387,7 +7926,7 @@
 </p:sld>
 </file>
 
-<file path=ppt/slides/slide5.xml><?xml version="1.0" encoding="utf-8"?>
+<file path=ppt/slides/slide7.xml><?xml version="1.0" encoding="utf-8"?>
 <p:sld xmlns:a="http://schemas.openxmlformats.org/drawingml/2006/main" xmlns:p="http://schemas.openxmlformats.org/presentationml/2006/main" xmlns:r="http://schemas.openxmlformats.org/officeDocument/2006/relationships">
   <p:cSld>
     <p:spTree>
@@ -8431,7 +7970,7 @@
                 </a:solidFill>
                 <a:latin typeface="Calibri"/>
               </a:rPr>
-              <a:t>4  ·  APPROACH A  —  SINGLE AI</a:t>
+              <a:t>6  ·  ALL FOUR SIDE BY SIDE</a:t>
             </a:r>
           </a:p>
         </p:txBody>
@@ -8470,7 +8009,7 @@
                 </a:solidFill>
                 <a:latin typeface="Calibri"/>
               </a:rPr>
-              <a:t>The baseline</a:t>
+              <a:t>Each one run 5 times</a:t>
             </a:r>
           </a:p>
         </p:txBody>
@@ -8519,175 +8058,829 @@
           </a:p>
         </p:txBody>
       </p:sp>
-      <p:sp>
-        <p:nvSpPr>
-          <p:cNvPr id="5" name="Rounded Rectangle 4"/>
-          <p:cNvSpPr/>
+      <p:graphicFrame>
+        <p:nvGraphicFramePr>
+          <p:cNvPr id="5" name="Table 4"/>
+          <p:cNvGraphicFramePr>
+            <a:graphicFrameLocks noGrp="1"/>
+          </p:cNvGraphicFramePr>
+          <p:nvPr/>
+        </p:nvGraphicFramePr>
+        <p:xfrm>
+          <a:off x="822960" y="2011680"/>
+          <a:ext cx="10515597" cy="2560320"/>
+        </p:xfrm>
+        <a:graphic>
+          <a:graphicData uri="http://schemas.openxmlformats.org/drawingml/2006/table">
+            <a:tbl>
+              <a:tblPr firstRow="1" bandRow="1">
+                <a:tableStyleId>{5C22544A-7EE6-4342-B048-85BDC9FD1C3A}</a:tableStyleId>
+              </a:tblPr>
+              <a:tblGrid>
+                <a:gridCol w="2816678"/>
+                <a:gridCol w="1877785"/>
+                <a:gridCol w="1877785"/>
+                <a:gridCol w="1877785"/>
+                <a:gridCol w="2065564"/>
+              </a:tblGrid>
+              <a:tr h="365760">
+                <a:tc>
+                  <a:txBody>
+                    <a:bodyPr/>
+                    <a:lstStyle/>
+                    <a:p>
+                      <a:r>
+                        <a:rPr sz="1400" b="1">
+                          <a:solidFill>
+                            <a:srgbClr val="FFFFFF"/>
+                          </a:solidFill>
+                          <a:latin typeface="Calibri"/>
+                        </a:rPr>
+                        <a:t> </a:t>
+                      </a:r>
+                    </a:p>
+                  </a:txBody>
+                  <a:tcPr>
+                    <a:solidFill>
+                      <a:srgbClr val="4338CA"/>
+                    </a:solidFill>
+                  </a:tcPr>
+                </a:tc>
+                <a:tc>
+                  <a:txBody>
+                    <a:bodyPr/>
+                    <a:lstStyle/>
+                    <a:p>
+                      <a:r>
+                        <a:rPr sz="1400" b="1">
+                          <a:solidFill>
+                            <a:srgbClr val="FFFFFF"/>
+                          </a:solidFill>
+                          <a:latin typeface="Calibri"/>
+                        </a:rPr>
+                        <a:t>A  one AI</a:t>
+                      </a:r>
+                    </a:p>
+                  </a:txBody>
+                  <a:tcPr>
+                    <a:solidFill>
+                      <a:srgbClr val="4338CA"/>
+                    </a:solidFill>
+                  </a:tcPr>
+                </a:tc>
+                <a:tc>
+                  <a:txBody>
+                    <a:bodyPr/>
+                    <a:lstStyle/>
+                    <a:p>
+                      <a:r>
+                        <a:rPr sz="1400" b="1">
+                          <a:solidFill>
+                            <a:srgbClr val="FFFFFF"/>
+                          </a:solidFill>
+                          <a:latin typeface="Calibri"/>
+                        </a:rPr>
+                        <a:t>B  6 agents</a:t>
+                      </a:r>
+                    </a:p>
+                  </a:txBody>
+                  <a:tcPr>
+                    <a:solidFill>
+                      <a:srgbClr val="4338CA"/>
+                    </a:solidFill>
+                  </a:tcPr>
+                </a:tc>
+                <a:tc>
+                  <a:txBody>
+                    <a:bodyPr/>
+                    <a:lstStyle/>
+                    <a:p>
+                      <a:r>
+                        <a:rPr sz="1400" b="1">
+                          <a:solidFill>
+                            <a:srgbClr val="FFFFFF"/>
+                          </a:solidFill>
+                          <a:latin typeface="Calibri"/>
+                        </a:rPr>
+                        <a:t>C  6 tuned</a:t>
+                      </a:r>
+                    </a:p>
+                  </a:txBody>
+                  <a:tcPr>
+                    <a:solidFill>
+                      <a:srgbClr val="4338CA"/>
+                    </a:solidFill>
+                  </a:tcPr>
+                </a:tc>
+                <a:tc>
+                  <a:txBody>
+                    <a:bodyPr/>
+                    <a:lstStyle/>
+                    <a:p>
+                      <a:r>
+                        <a:rPr sz="1400" b="1">
+                          <a:solidFill>
+                            <a:srgbClr val="FFFFFF"/>
+                          </a:solidFill>
+                          <a:latin typeface="Calibri"/>
+                        </a:rPr>
+                        <a:t>D  3 agents</a:t>
+                      </a:r>
+                    </a:p>
+                  </a:txBody>
+                  <a:tcPr>
+                    <a:solidFill>
+                      <a:srgbClr val="4338CA"/>
+                    </a:solidFill>
+                  </a:tcPr>
+                </a:tc>
+              </a:tr>
+              <a:tr h="365760">
+                <a:tc>
+                  <a:txBody>
+                    <a:bodyPr/>
+                    <a:lstStyle/>
+                    <a:p>
+                      <a:r>
+                        <a:rPr sz="1400" b="0">
+                          <a:solidFill>
+                            <a:srgbClr val="161A23"/>
+                          </a:solidFill>
+                          <a:latin typeface="Calibri"/>
+                        </a:rPr>
+                        <a:t>Tools given to agents</a:t>
+                      </a:r>
+                    </a:p>
+                  </a:txBody>
+                  <a:tcPr>
+                    <a:solidFill>
+                      <a:srgbClr val="FFFFFF"/>
+                    </a:solidFill>
+                  </a:tcPr>
+                </a:tc>
+                <a:tc>
+                  <a:txBody>
+                    <a:bodyPr/>
+                    <a:lstStyle/>
+                    <a:p>
+                      <a:r>
+                        <a:rPr sz="1400" b="0">
+                          <a:solidFill>
+                            <a:srgbClr val="161A23"/>
+                          </a:solidFill>
+                          <a:latin typeface="Calibri"/>
+                        </a:rPr>
+                        <a:t>0</a:t>
+                      </a:r>
+                    </a:p>
+                  </a:txBody>
+                  <a:tcPr>
+                    <a:solidFill>
+                      <a:srgbClr val="FFFFFF"/>
+                    </a:solidFill>
+                  </a:tcPr>
+                </a:tc>
+                <a:tc>
+                  <a:txBody>
+                    <a:bodyPr/>
+                    <a:lstStyle/>
+                    <a:p>
+                      <a:r>
+                        <a:rPr sz="1400" b="0">
+                          <a:solidFill>
+                            <a:srgbClr val="161A23"/>
+                          </a:solidFill>
+                          <a:latin typeface="Calibri"/>
+                        </a:rPr>
+                        <a:t>20</a:t>
+                      </a:r>
+                    </a:p>
+                  </a:txBody>
+                  <a:tcPr>
+                    <a:solidFill>
+                      <a:srgbClr val="FFFFFF"/>
+                    </a:solidFill>
+                  </a:tcPr>
+                </a:tc>
+                <a:tc>
+                  <a:txBody>
+                    <a:bodyPr/>
+                    <a:lstStyle/>
+                    <a:p>
+                      <a:r>
+                        <a:rPr sz="1400" b="0">
+                          <a:solidFill>
+                            <a:srgbClr val="161A23"/>
+                          </a:solidFill>
+                          <a:latin typeface="Calibri"/>
+                        </a:rPr>
+                        <a:t>4</a:t>
+                      </a:r>
+                    </a:p>
+                  </a:txBody>
+                  <a:tcPr>
+                    <a:solidFill>
+                      <a:srgbClr val="FFFFFF"/>
+                    </a:solidFill>
+                  </a:tcPr>
+                </a:tc>
+                <a:tc>
+                  <a:txBody>
+                    <a:bodyPr/>
+                    <a:lstStyle/>
+                    <a:p>
+                      <a:r>
+                        <a:rPr sz="1400" b="0">
+                          <a:solidFill>
+                            <a:srgbClr val="161A23"/>
+                          </a:solidFill>
+                          <a:latin typeface="Calibri"/>
+                        </a:rPr>
+                        <a:t>0</a:t>
+                      </a:r>
+                    </a:p>
+                  </a:txBody>
+                  <a:tcPr>
+                    <a:solidFill>
+                      <a:srgbClr val="FFFFFF"/>
+                    </a:solidFill>
+                  </a:tcPr>
+                </a:tc>
+              </a:tr>
+              <a:tr h="365760">
+                <a:tc>
+                  <a:txBody>
+                    <a:bodyPr/>
+                    <a:lstStyle/>
+                    <a:p>
+                      <a:r>
+                        <a:rPr sz="1400" b="0">
+                          <a:solidFill>
+                            <a:srgbClr val="161A23"/>
+                          </a:solidFill>
+                          <a:latin typeface="Calibri"/>
+                        </a:rPr>
+                        <a:t>AI calls</a:t>
+                      </a:r>
+                    </a:p>
+                  </a:txBody>
+                  <a:tcPr>
+                    <a:solidFill>
+                      <a:srgbClr val="F7F8FC"/>
+                    </a:solidFill>
+                  </a:tcPr>
+                </a:tc>
+                <a:tc>
+                  <a:txBody>
+                    <a:bodyPr/>
+                    <a:lstStyle/>
+                    <a:p>
+                      <a:r>
+                        <a:rPr sz="1400" b="0">
+                          <a:solidFill>
+                            <a:srgbClr val="161A23"/>
+                          </a:solidFill>
+                          <a:latin typeface="Calibri"/>
+                        </a:rPr>
+                        <a:t>1</a:t>
+                      </a:r>
+                    </a:p>
+                  </a:txBody>
+                  <a:tcPr>
+                    <a:solidFill>
+                      <a:srgbClr val="F7F8FC"/>
+                    </a:solidFill>
+                  </a:tcPr>
+                </a:tc>
+                <a:tc>
+                  <a:txBody>
+                    <a:bodyPr/>
+                    <a:lstStyle/>
+                    <a:p>
+                      <a:r>
+                        <a:rPr sz="1400" b="0">
+                          <a:solidFill>
+                            <a:srgbClr val="161A23"/>
+                          </a:solidFill>
+                          <a:latin typeface="Calibri"/>
+                        </a:rPr>
+                        <a:t>21</a:t>
+                      </a:r>
+                    </a:p>
+                  </a:txBody>
+                  <a:tcPr>
+                    <a:solidFill>
+                      <a:srgbClr val="F7F8FC"/>
+                    </a:solidFill>
+                  </a:tcPr>
+                </a:tc>
+                <a:tc>
+                  <a:txBody>
+                    <a:bodyPr/>
+                    <a:lstStyle/>
+                    <a:p>
+                      <a:r>
+                        <a:rPr sz="1400" b="0">
+                          <a:solidFill>
+                            <a:srgbClr val="161A23"/>
+                          </a:solidFill>
+                          <a:latin typeface="Calibri"/>
+                        </a:rPr>
+                        <a:t>10</a:t>
+                      </a:r>
+                    </a:p>
+                  </a:txBody>
+                  <a:tcPr>
+                    <a:solidFill>
+                      <a:srgbClr val="F7F8FC"/>
+                    </a:solidFill>
+                  </a:tcPr>
+                </a:tc>
+                <a:tc>
+                  <a:txBody>
+                    <a:bodyPr/>
+                    <a:lstStyle/>
+                    <a:p>
+                      <a:r>
+                        <a:rPr sz="1400" b="0">
+                          <a:solidFill>
+                            <a:srgbClr val="161A23"/>
+                          </a:solidFill>
+                          <a:latin typeface="Calibri"/>
+                        </a:rPr>
+                        <a:t>2</a:t>
+                      </a:r>
+                    </a:p>
+                  </a:txBody>
+                  <a:tcPr>
+                    <a:solidFill>
+                      <a:srgbClr val="F7F8FC"/>
+                    </a:solidFill>
+                  </a:tcPr>
+                </a:tc>
+              </a:tr>
+              <a:tr h="365760">
+                <a:tc>
+                  <a:txBody>
+                    <a:bodyPr/>
+                    <a:lstStyle/>
+                    <a:p>
+                      <a:r>
+                        <a:rPr sz="1400" b="0">
+                          <a:solidFill>
+                            <a:srgbClr val="161A23"/>
+                          </a:solidFill>
+                          <a:latin typeface="Calibri"/>
+                        </a:rPr>
+                        <a:t>Text sent to the AI</a:t>
+                      </a:r>
+                    </a:p>
+                  </a:txBody>
+                  <a:tcPr>
+                    <a:solidFill>
+                      <a:srgbClr val="FFFFFF"/>
+                    </a:solidFill>
+                  </a:tcPr>
+                </a:tc>
+                <a:tc>
+                  <a:txBody>
+                    <a:bodyPr/>
+                    <a:lstStyle/>
+                    <a:p>
+                      <a:r>
+                        <a:rPr sz="1400" b="0">
+                          <a:solidFill>
+                            <a:srgbClr val="161A23"/>
+                          </a:solidFill>
+                          <a:latin typeface="Calibri"/>
+                        </a:rPr>
+                        <a:t>4,644</a:t>
+                      </a:r>
+                    </a:p>
+                  </a:txBody>
+                  <a:tcPr>
+                    <a:solidFill>
+                      <a:srgbClr val="FFFFFF"/>
+                    </a:solidFill>
+                  </a:tcPr>
+                </a:tc>
+                <a:tc>
+                  <a:txBody>
+                    <a:bodyPr/>
+                    <a:lstStyle/>
+                    <a:p>
+                      <a:r>
+                        <a:rPr sz="1400" b="0">
+                          <a:solidFill>
+                            <a:srgbClr val="161A23"/>
+                          </a:solidFill>
+                          <a:latin typeface="Calibri"/>
+                        </a:rPr>
+                        <a:t>120,703</a:t>
+                      </a:r>
+                    </a:p>
+                  </a:txBody>
+                  <a:tcPr>
+                    <a:solidFill>
+                      <a:srgbClr val="FFFFFF"/>
+                    </a:solidFill>
+                  </a:tcPr>
+                </a:tc>
+                <a:tc>
+                  <a:txBody>
+                    <a:bodyPr/>
+                    <a:lstStyle/>
+                    <a:p>
+                      <a:r>
+                        <a:rPr sz="1400" b="0">
+                          <a:solidFill>
+                            <a:srgbClr val="161A23"/>
+                          </a:solidFill>
+                          <a:latin typeface="Calibri"/>
+                        </a:rPr>
+                        <a:t>13,521</a:t>
+                      </a:r>
+                    </a:p>
+                  </a:txBody>
+                  <a:tcPr>
+                    <a:solidFill>
+                      <a:srgbClr val="FFFFFF"/>
+                    </a:solidFill>
+                  </a:tcPr>
+                </a:tc>
+                <a:tc>
+                  <a:txBody>
+                    <a:bodyPr/>
+                    <a:lstStyle/>
+                    <a:p>
+                      <a:r>
+                        <a:rPr sz="1400" b="0">
+                          <a:solidFill>
+                            <a:srgbClr val="161A23"/>
+                          </a:solidFill>
+                          <a:latin typeface="Calibri"/>
+                        </a:rPr>
+                        <a:t>7,840</a:t>
+                      </a:r>
+                    </a:p>
+                  </a:txBody>
+                  <a:tcPr>
+                    <a:solidFill>
+                      <a:srgbClr val="FFFFFF"/>
+                    </a:solidFill>
+                  </a:tcPr>
+                </a:tc>
+              </a:tr>
+              <a:tr h="365760">
+                <a:tc>
+                  <a:txBody>
+                    <a:bodyPr/>
+                    <a:lstStyle/>
+                    <a:p>
+                      <a:r>
+                        <a:rPr sz="1400" b="0">
+                          <a:solidFill>
+                            <a:srgbClr val="161A23"/>
+                          </a:solidFill>
+                          <a:latin typeface="Calibri"/>
+                        </a:rPr>
+                        <a:t>Cost per trip</a:t>
+                      </a:r>
+                    </a:p>
+                  </a:txBody>
+                  <a:tcPr>
+                    <a:solidFill>
+                      <a:srgbClr val="F7F8FC"/>
+                    </a:solidFill>
+                  </a:tcPr>
+                </a:tc>
+                <a:tc>
+                  <a:txBody>
+                    <a:bodyPr/>
+                    <a:lstStyle/>
+                    <a:p>
+                      <a:r>
+                        <a:rPr sz="1400" b="0">
+                          <a:solidFill>
+                            <a:srgbClr val="161A23"/>
+                          </a:solidFill>
+                          <a:latin typeface="Calibri"/>
+                        </a:rPr>
+                        <a:t>$0.0170</a:t>
+                      </a:r>
+                    </a:p>
+                  </a:txBody>
+                  <a:tcPr>
+                    <a:solidFill>
+                      <a:srgbClr val="F7F8FC"/>
+                    </a:solidFill>
+                  </a:tcPr>
+                </a:tc>
+                <a:tc>
+                  <a:txBody>
+                    <a:bodyPr/>
+                    <a:lstStyle/>
+                    <a:p>
+                      <a:r>
+                        <a:rPr sz="1400" b="0">
+                          <a:solidFill>
+                            <a:srgbClr val="161A23"/>
+                          </a:solidFill>
+                          <a:latin typeface="Calibri"/>
+                        </a:rPr>
+                        <a:t>$0.1859</a:t>
+                      </a:r>
+                    </a:p>
+                  </a:txBody>
+                  <a:tcPr>
+                    <a:solidFill>
+                      <a:srgbClr val="F7F8FC"/>
+                    </a:solidFill>
+                  </a:tcPr>
+                </a:tc>
+                <a:tc>
+                  <a:txBody>
+                    <a:bodyPr/>
+                    <a:lstStyle/>
+                    <a:p>
+                      <a:r>
+                        <a:rPr sz="1400" b="0">
+                          <a:solidFill>
+                            <a:srgbClr val="161A23"/>
+                          </a:solidFill>
+                          <a:latin typeface="Calibri"/>
+                        </a:rPr>
+                        <a:t>$0.0313</a:t>
+                      </a:r>
+                    </a:p>
+                  </a:txBody>
+                  <a:tcPr>
+                    <a:solidFill>
+                      <a:srgbClr val="F7F8FC"/>
+                    </a:solidFill>
+                  </a:tcPr>
+                </a:tc>
+                <a:tc>
+                  <a:txBody>
+                    <a:bodyPr/>
+                    <a:lstStyle/>
+                    <a:p>
+                      <a:r>
+                        <a:rPr sz="1400" b="0">
+                          <a:solidFill>
+                            <a:srgbClr val="161A23"/>
+                          </a:solidFill>
+                          <a:latin typeface="Calibri"/>
+                        </a:rPr>
+                        <a:t>$0.0179</a:t>
+                      </a:r>
+                    </a:p>
+                  </a:txBody>
+                  <a:tcPr>
+                    <a:solidFill>
+                      <a:srgbClr val="F7F8FC"/>
+                    </a:solidFill>
+                  </a:tcPr>
+                </a:tc>
+              </a:tr>
+              <a:tr h="365760">
+                <a:tc>
+                  <a:txBody>
+                    <a:bodyPr/>
+                    <a:lstStyle/>
+                    <a:p>
+                      <a:r>
+                        <a:rPr sz="1400" b="0">
+                          <a:solidFill>
+                            <a:srgbClr val="161A23"/>
+                          </a:solidFill>
+                          <a:latin typeface="Calibri"/>
+                        </a:rPr>
+                        <a:t>Time</a:t>
+                      </a:r>
+                    </a:p>
+                  </a:txBody>
+                  <a:tcPr>
+                    <a:solidFill>
+                      <a:srgbClr val="FFFFFF"/>
+                    </a:solidFill>
+                  </a:tcPr>
+                </a:tc>
+                <a:tc>
+                  <a:txBody>
+                    <a:bodyPr/>
+                    <a:lstStyle/>
+                    <a:p>
+                      <a:r>
+                        <a:rPr sz="1400" b="0">
+                          <a:solidFill>
+                            <a:srgbClr val="161A23"/>
+                          </a:solidFill>
+                          <a:latin typeface="Calibri"/>
+                        </a:rPr>
+                        <a:t>27s</a:t>
+                      </a:r>
+                    </a:p>
+                  </a:txBody>
+                  <a:tcPr>
+                    <a:solidFill>
+                      <a:srgbClr val="FFFFFF"/>
+                    </a:solidFill>
+                  </a:tcPr>
+                </a:tc>
+                <a:tc>
+                  <a:txBody>
+                    <a:bodyPr/>
+                    <a:lstStyle/>
+                    <a:p>
+                      <a:r>
+                        <a:rPr sz="1400" b="0">
+                          <a:solidFill>
+                            <a:srgbClr val="161A23"/>
+                          </a:solidFill>
+                          <a:latin typeface="Calibri"/>
+                        </a:rPr>
+                        <a:t>372s</a:t>
+                      </a:r>
+                    </a:p>
+                  </a:txBody>
+                  <a:tcPr>
+                    <a:solidFill>
+                      <a:srgbClr val="FFFFFF"/>
+                    </a:solidFill>
+                  </a:tcPr>
+                </a:tc>
+                <a:tc>
+                  <a:txBody>
+                    <a:bodyPr/>
+                    <a:lstStyle/>
+                    <a:p>
+                      <a:r>
+                        <a:rPr sz="1400" b="0">
+                          <a:solidFill>
+                            <a:srgbClr val="161A23"/>
+                          </a:solidFill>
+                          <a:latin typeface="Calibri"/>
+                        </a:rPr>
+                        <a:t>37s</a:t>
+                      </a:r>
+                    </a:p>
+                  </a:txBody>
+                  <a:tcPr>
+                    <a:solidFill>
+                      <a:srgbClr val="FFFFFF"/>
+                    </a:solidFill>
+                  </a:tcPr>
+                </a:tc>
+                <a:tc>
+                  <a:txBody>
+                    <a:bodyPr/>
+                    <a:lstStyle/>
+                    <a:p>
+                      <a:r>
+                        <a:rPr sz="1400" b="0">
+                          <a:solidFill>
+                            <a:srgbClr val="161A23"/>
+                          </a:solidFill>
+                          <a:latin typeface="Calibri"/>
+                        </a:rPr>
+                        <a:t>23s</a:t>
+                      </a:r>
+                    </a:p>
+                  </a:txBody>
+                  <a:tcPr>
+                    <a:solidFill>
+                      <a:srgbClr val="FFFFFF"/>
+                    </a:solidFill>
+                  </a:tcPr>
+                </a:tc>
+              </a:tr>
+              <a:tr h="365760">
+                <a:tc>
+                  <a:txBody>
+                    <a:bodyPr/>
+                    <a:lstStyle/>
+                    <a:p>
+                      <a:r>
+                        <a:rPr sz="1400" b="0">
+                          <a:solidFill>
+                            <a:srgbClr val="161A23"/>
+                          </a:solidFill>
+                          <a:latin typeface="Calibri"/>
+                        </a:rPr>
+                        <a:t>Prices that were real</a:t>
+                      </a:r>
+                    </a:p>
+                  </a:txBody>
+                  <a:tcPr>
+                    <a:solidFill>
+                      <a:srgbClr val="F7F8FC"/>
+                    </a:solidFill>
+                  </a:tcPr>
+                </a:tc>
+                <a:tc>
+                  <a:txBody>
+                    <a:bodyPr/>
+                    <a:lstStyle/>
+                    <a:p>
+                      <a:r>
+                        <a:rPr sz="1400" b="0">
+                          <a:solidFill>
+                            <a:srgbClr val="161A23"/>
+                          </a:solidFill>
+                          <a:latin typeface="Calibri"/>
+                        </a:rPr>
+                        <a:t>1.7%</a:t>
+                      </a:r>
+                    </a:p>
+                  </a:txBody>
+                  <a:tcPr>
+                    <a:solidFill>
+                      <a:srgbClr val="F7F8FC"/>
+                    </a:solidFill>
+                  </a:tcPr>
+                </a:tc>
+                <a:tc>
+                  <a:txBody>
+                    <a:bodyPr/>
+                    <a:lstStyle/>
+                    <a:p>
+                      <a:r>
+                        <a:rPr sz="1400" b="0">
+                          <a:solidFill>
+                            <a:srgbClr val="161A23"/>
+                          </a:solidFill>
+                          <a:latin typeface="Calibri"/>
+                        </a:rPr>
+                        <a:t>23%</a:t>
+                      </a:r>
+                    </a:p>
+                  </a:txBody>
+                  <a:tcPr>
+                    <a:solidFill>
+                      <a:srgbClr val="F7F8FC"/>
+                    </a:solidFill>
+                  </a:tcPr>
+                </a:tc>
+                <a:tc>
+                  <a:txBody>
+                    <a:bodyPr/>
+                    <a:lstStyle/>
+                    <a:p>
+                      <a:r>
+                        <a:rPr sz="1400" b="0">
+                          <a:solidFill>
+                            <a:srgbClr val="161A23"/>
+                          </a:solidFill>
+                          <a:latin typeface="Calibri"/>
+                        </a:rPr>
+                        <a:t>56%</a:t>
+                      </a:r>
+                    </a:p>
+                  </a:txBody>
+                  <a:tcPr>
+                    <a:solidFill>
+                      <a:srgbClr val="F7F8FC"/>
+                    </a:solidFill>
+                  </a:tcPr>
+                </a:tc>
+                <a:tc>
+                  <a:txBody>
+                    <a:bodyPr/>
+                    <a:lstStyle/>
+                    <a:p>
+                      <a:r>
+                        <a:rPr sz="1400" b="0">
+                          <a:solidFill>
+                            <a:srgbClr val="161A23"/>
+                          </a:solidFill>
+                          <a:latin typeface="Calibri"/>
+                        </a:rPr>
+                        <a:t>47%</a:t>
+                      </a:r>
+                    </a:p>
+                  </a:txBody>
+                  <a:tcPr>
+                    <a:solidFill>
+                      <a:srgbClr val="F7F8FC"/>
+                    </a:solidFill>
+                  </a:tcPr>
+                </a:tc>
+              </a:tr>
+            </a:tbl>
+          </a:graphicData>
+        </a:graphic>
+      </p:graphicFrame>
+      <p:sp>
+        <p:nvSpPr>
+          <p:cNvPr id="6" name="TextBox 5"/>
+          <p:cNvSpPr txBox="1"/>
           <p:nvPr/>
         </p:nvSpPr>
         <p:spPr>
           <a:xfrm>
-            <a:off x="2377440" y="1920240"/>
-            <a:ext cx="2194560" cy="777240"/>
-          </a:xfrm>
-          <a:prstGeom prst="roundRect">
-            <a:avLst/>
-          </a:prstGeom>
-          <a:solidFill>
-            <a:srgbClr val="EFEEEA"/>
-          </a:solidFill>
-          <a:ln>
-            <a:noFill/>
-          </a:ln>
-          <a:effectLst/>
-        </p:spPr>
-        <p:style>
-          <a:lnRef idx="1">
-            <a:schemeClr val="accent1"/>
-          </a:lnRef>
-          <a:fillRef idx="3">
-            <a:schemeClr val="accent1"/>
-          </a:fillRef>
-          <a:effectRef idx="2">
-            <a:schemeClr val="accent1"/>
-          </a:effectRef>
-          <a:fontRef idx="minor">
-            <a:schemeClr val="lt1"/>
-          </a:fontRef>
-        </p:style>
-        <p:txBody>
-          <a:bodyPr rtlCol="0" anchor="ctr" wrap="square"/>
-          <a:lstStyle/>
-          <a:p>
-            <a:pPr algn="ctr"/>
-            <a:r>
-              <a:rPr sz="1400" b="1">
-                <a:solidFill>
-                  <a:srgbClr val="161A23"/>
-                </a:solidFill>
-                <a:latin typeface="Calibri"/>
-              </a:rPr>
-              <a:t>USER</a:t>
-            </a:r>
-          </a:p>
-        </p:txBody>
-      </p:sp>
-      <p:sp>
-        <p:nvSpPr>
-          <p:cNvPr id="6" name="Rounded Rectangle 5"/>
-          <p:cNvSpPr/>
-          <p:nvPr/>
-        </p:nvSpPr>
-        <p:spPr>
-          <a:xfrm>
-            <a:off x="5029200" y="1920240"/>
-            <a:ext cx="2194560" cy="777240"/>
-          </a:xfrm>
-          <a:prstGeom prst="roundRect">
-            <a:avLst/>
-          </a:prstGeom>
-          <a:solidFill>
-            <a:srgbClr val="4E3FB8"/>
-          </a:solidFill>
-          <a:ln>
-            <a:noFill/>
-          </a:ln>
-          <a:effectLst/>
-        </p:spPr>
-        <p:style>
-          <a:lnRef idx="1">
-            <a:schemeClr val="accent1"/>
-          </a:lnRef>
-          <a:fillRef idx="3">
-            <a:schemeClr val="accent1"/>
-          </a:fillRef>
-          <a:effectRef idx="2">
-            <a:schemeClr val="accent1"/>
-          </a:effectRef>
-          <a:fontRef idx="minor">
-            <a:schemeClr val="lt1"/>
-          </a:fontRef>
-        </p:style>
-        <p:txBody>
-          <a:bodyPr rtlCol="0" anchor="ctr" wrap="square"/>
-          <a:lstStyle/>
-          <a:p>
-            <a:pPr algn="ctr"/>
-            <a:r>
-              <a:rPr sz="1400" b="1">
-                <a:solidFill>
-                  <a:srgbClr val="FFFFFF"/>
-                </a:solidFill>
-                <a:latin typeface="Calibri"/>
-              </a:rPr>
-              <a:t>AI</a:t>
-            </a:r>
-          </a:p>
-        </p:txBody>
-      </p:sp>
-      <p:sp>
-        <p:nvSpPr>
-          <p:cNvPr id="7" name="Rounded Rectangle 6"/>
-          <p:cNvSpPr/>
-          <p:nvPr/>
-        </p:nvSpPr>
-        <p:spPr>
-          <a:xfrm>
-            <a:off x="7680960" y="1920240"/>
-            <a:ext cx="2194560" cy="777240"/>
-          </a:xfrm>
-          <a:prstGeom prst="roundRect">
-            <a:avLst/>
-          </a:prstGeom>
-          <a:solidFill>
-            <a:srgbClr val="EFEEEA"/>
-          </a:solidFill>
-          <a:ln>
-            <a:noFill/>
-          </a:ln>
-          <a:effectLst/>
-        </p:spPr>
-        <p:style>
-          <a:lnRef idx="1">
-            <a:schemeClr val="accent1"/>
-          </a:lnRef>
-          <a:fillRef idx="3">
-            <a:schemeClr val="accent1"/>
-          </a:fillRef>
-          <a:effectRef idx="2">
-            <a:schemeClr val="accent1"/>
-          </a:effectRef>
-          <a:fontRef idx="minor">
-            <a:schemeClr val="lt1"/>
-          </a:fontRef>
-        </p:style>
-        <p:txBody>
-          <a:bodyPr rtlCol="0" anchor="ctr" wrap="square"/>
-          <a:lstStyle/>
-          <a:p>
-            <a:pPr algn="ctr"/>
-            <a:r>
-              <a:rPr sz="1400" b="1">
-                <a:solidFill>
-                  <a:srgbClr val="161A23"/>
-                </a:solidFill>
-                <a:latin typeface="Calibri"/>
-              </a:rPr>
-              <a:t>ITINERARY</a:t>
-            </a:r>
-          </a:p>
-        </p:txBody>
-      </p:sp>
-      <p:sp>
-        <p:nvSpPr>
-          <p:cNvPr id="8" name="TextBox 7"/>
-          <p:cNvSpPr txBox="1"/>
-          <p:nvPr/>
-        </p:nvSpPr>
-        <p:spPr>
-          <a:xfrm>
-            <a:off x="4572000" y="2057400"/>
-            <a:ext cx="457200" cy="457200"/>
+            <a:off x="822960" y="5212080"/>
+            <a:ext cx="10515600" cy="1097280"/>
           </a:xfrm>
           <a:prstGeom prst="rect">
             <a:avLst/>
@@ -8700,87 +8893,9 @@
           </a:bodyPr>
           <a:lstStyle/>
           <a:p>
-            <a:pPr algn="ctr">
+            <a:pPr algn="l">
               <a:lnSpc>
-                <a:spcPct val="100000"/>
-              </a:lnSpc>
-            </a:pPr>
-            <a:r>
-              <a:rPr sz="1400" b="0">
-                <a:solidFill>
-                  <a:srgbClr val="8A91A0"/>
-                </a:solidFill>
-                <a:latin typeface="Calibri"/>
-              </a:rPr>
-              <a:t>▶</a:t>
-            </a:r>
-          </a:p>
-        </p:txBody>
-      </p:sp>
-      <p:sp>
-        <p:nvSpPr>
-          <p:cNvPr id="9" name="TextBox 8"/>
-          <p:cNvSpPr txBox="1"/>
-          <p:nvPr/>
-        </p:nvSpPr>
-        <p:spPr>
-          <a:xfrm>
-            <a:off x="7223760" y="2057400"/>
-            <a:ext cx="457200" cy="457200"/>
-          </a:xfrm>
-          <a:prstGeom prst="rect">
-            <a:avLst/>
-          </a:prstGeom>
-          <a:noFill/>
-        </p:spPr>
-        <p:txBody>
-          <a:bodyPr wrap="square" anchor="t">
-            <a:spAutoFit/>
-          </a:bodyPr>
-          <a:lstStyle/>
-          <a:p>
-            <a:pPr algn="ctr">
-              <a:lnSpc>
-                <a:spcPct val="100000"/>
-              </a:lnSpc>
-            </a:pPr>
-            <a:r>
-              <a:rPr sz="1400" b="0">
-                <a:solidFill>
-                  <a:srgbClr val="8A91A0"/>
-                </a:solidFill>
-                <a:latin typeface="Calibri"/>
-              </a:rPr>
-              <a:t>▶</a:t>
-            </a:r>
-          </a:p>
-        </p:txBody>
-      </p:sp>
-      <p:sp>
-        <p:nvSpPr>
-          <p:cNvPr id="10" name="TextBox 9"/>
-          <p:cNvSpPr txBox="1"/>
-          <p:nvPr/>
-        </p:nvSpPr>
-        <p:spPr>
-          <a:xfrm>
-            <a:off x="822960" y="3017520"/>
-            <a:ext cx="10515600" cy="548640"/>
-          </a:xfrm>
-          <a:prstGeom prst="rect">
-            <a:avLst/>
-          </a:prstGeom>
-          <a:noFill/>
-        </p:spPr>
-        <p:txBody>
-          <a:bodyPr wrap="square" anchor="t">
-            <a:spAutoFit/>
-          </a:bodyPr>
-          <a:lstStyle/>
-          <a:p>
-            <a:pPr algn="ctr">
-              <a:lnSpc>
-                <a:spcPct val="100000"/>
+                <a:spcPct val="130000"/>
               </a:lnSpc>
             </a:pPr>
             <a:r>
@@ -8790,280 +8905,23 @@
                 </a:solidFill>
                 <a:latin typeface="Calibri"/>
               </a:rPr>
-              <a:t>No tools. No APIs. The AI writes the plan from what it already knows.</a:t>
-            </a:r>
-          </a:p>
-        </p:txBody>
-      </p:sp>
-      <p:sp>
-        <p:nvSpPr>
-          <p:cNvPr id="11" name="TextBox 10"/>
-          <p:cNvSpPr txBox="1"/>
-          <p:nvPr/>
-        </p:nvSpPr>
-        <p:spPr>
-          <a:xfrm>
-            <a:off x="822960" y="3749039"/>
-            <a:ext cx="3515258" cy="1188720"/>
-          </a:xfrm>
-          <a:prstGeom prst="rect">
-            <a:avLst/>
-          </a:prstGeom>
-          <a:noFill/>
-        </p:spPr>
-        <p:txBody>
-          <a:bodyPr wrap="square" anchor="t">
-            <a:spAutoFit/>
-          </a:bodyPr>
-          <a:lstStyle/>
-          <a:p>
-            <a:pPr algn="ctr">
+              <a:t>Being honest: D is not more accurate than C — their ranges overlap.</a:t>
+            </a:r>
+          </a:p>
+          <a:p>
+            <a:pPr algn="l">
               <a:lnSpc>
-                <a:spcPct val="100000"/>
+                <a:spcPct val="130000"/>
               </a:lnSpc>
             </a:pPr>
             <a:r>
-              <a:rPr sz="6000" b="1">
+              <a:rPr sz="1900" b="1">
                 <a:solidFill>
-                  <a:srgbClr val="A85B00"/>
+                  <a:srgbClr val="4338CA"/>
                 </a:solidFill>
                 <a:latin typeface="Calibri"/>
               </a:rPr>
-              <a:t>1</a:t>
-            </a:r>
-          </a:p>
-        </p:txBody>
-      </p:sp>
-      <p:sp>
-        <p:nvSpPr>
-          <p:cNvPr id="12" name="TextBox 11"/>
-          <p:cNvSpPr txBox="1"/>
-          <p:nvPr/>
-        </p:nvSpPr>
-        <p:spPr>
-          <a:xfrm>
-            <a:off x="822960" y="4892039"/>
-            <a:ext cx="3515258" cy="731520"/>
-          </a:xfrm>
-          <a:prstGeom prst="rect">
-            <a:avLst/>
-          </a:prstGeom>
-          <a:noFill/>
-        </p:spPr>
-        <p:txBody>
-          <a:bodyPr wrap="square" anchor="t">
-            <a:spAutoFit/>
-          </a:bodyPr>
-          <a:lstStyle/>
-          <a:p>
-            <a:pPr algn="ctr">
-              <a:lnSpc>
-                <a:spcPct val="100000"/>
-              </a:lnSpc>
-            </a:pPr>
-            <a:r>
-              <a:rPr sz="1400" b="0">
-                <a:solidFill>
-                  <a:srgbClr val="545C6E"/>
-                </a:solidFill>
-                <a:latin typeface="Calibri"/>
-              </a:rPr>
-              <a:t>AI call</a:t>
-            </a:r>
-          </a:p>
-        </p:txBody>
-      </p:sp>
-      <p:sp>
-        <p:nvSpPr>
-          <p:cNvPr id="13" name="TextBox 12"/>
-          <p:cNvSpPr txBox="1"/>
-          <p:nvPr/>
-        </p:nvSpPr>
-        <p:spPr>
-          <a:xfrm>
-            <a:off x="4338218" y="3749039"/>
-            <a:ext cx="3515258" cy="1188720"/>
-          </a:xfrm>
-          <a:prstGeom prst="rect">
-            <a:avLst/>
-          </a:prstGeom>
-          <a:noFill/>
-        </p:spPr>
-        <p:txBody>
-          <a:bodyPr wrap="square" anchor="t">
-            <a:spAutoFit/>
-          </a:bodyPr>
-          <a:lstStyle/>
-          <a:p>
-            <a:pPr algn="ctr">
-              <a:lnSpc>
-                <a:spcPct val="100000"/>
-              </a:lnSpc>
-            </a:pPr>
-            <a:r>
-              <a:rPr sz="6000" b="1">
-                <a:solidFill>
-                  <a:srgbClr val="A85B00"/>
-                </a:solidFill>
-                <a:latin typeface="Calibri"/>
-              </a:rPr>
-              <a:t>1.7%</a:t>
-            </a:r>
-          </a:p>
-        </p:txBody>
-      </p:sp>
-      <p:sp>
-        <p:nvSpPr>
-          <p:cNvPr id="14" name="TextBox 13"/>
-          <p:cNvSpPr txBox="1"/>
-          <p:nvPr/>
-        </p:nvSpPr>
-        <p:spPr>
-          <a:xfrm>
-            <a:off x="4338218" y="4892039"/>
-            <a:ext cx="3515258" cy="731520"/>
-          </a:xfrm>
-          <a:prstGeom prst="rect">
-            <a:avLst/>
-          </a:prstGeom>
-          <a:noFill/>
-        </p:spPr>
-        <p:txBody>
-          <a:bodyPr wrap="square" anchor="t">
-            <a:spAutoFit/>
-          </a:bodyPr>
-          <a:lstStyle/>
-          <a:p>
-            <a:pPr algn="ctr">
-              <a:lnSpc>
-                <a:spcPct val="100000"/>
-              </a:lnSpc>
-            </a:pPr>
-            <a:r>
-              <a:rPr sz="1400" b="0">
-                <a:solidFill>
-                  <a:srgbClr val="545C6E"/>
-                </a:solidFill>
-                <a:latin typeface="Calibri"/>
-              </a:rPr>
-              <a:t>of its prices matched a real fare</a:t>
-            </a:r>
-          </a:p>
-        </p:txBody>
-      </p:sp>
-      <p:sp>
-        <p:nvSpPr>
-          <p:cNvPr id="15" name="TextBox 14"/>
-          <p:cNvSpPr txBox="1"/>
-          <p:nvPr/>
-        </p:nvSpPr>
-        <p:spPr>
-          <a:xfrm>
-            <a:off x="7853476" y="3749039"/>
-            <a:ext cx="3515258" cy="1188720"/>
-          </a:xfrm>
-          <a:prstGeom prst="rect">
-            <a:avLst/>
-          </a:prstGeom>
-          <a:noFill/>
-        </p:spPr>
-        <p:txBody>
-          <a:bodyPr wrap="square" anchor="t">
-            <a:spAutoFit/>
-          </a:bodyPr>
-          <a:lstStyle/>
-          <a:p>
-            <a:pPr algn="ctr">
-              <a:lnSpc>
-                <a:spcPct val="100000"/>
-              </a:lnSpc>
-            </a:pPr>
-            <a:r>
-              <a:rPr sz="6000" b="1">
-                <a:solidFill>
-                  <a:srgbClr val="A85B00"/>
-                </a:solidFill>
-                <a:latin typeface="Calibri"/>
-              </a:rPr>
-              <a:t>27s</a:t>
-            </a:r>
-          </a:p>
-        </p:txBody>
-      </p:sp>
-      <p:sp>
-        <p:nvSpPr>
-          <p:cNvPr id="16" name="TextBox 15"/>
-          <p:cNvSpPr txBox="1"/>
-          <p:nvPr/>
-        </p:nvSpPr>
-        <p:spPr>
-          <a:xfrm>
-            <a:off x="7853476" y="4892039"/>
-            <a:ext cx="3515258" cy="731520"/>
-          </a:xfrm>
-          <a:prstGeom prst="rect">
-            <a:avLst/>
-          </a:prstGeom>
-          <a:noFill/>
-        </p:spPr>
-        <p:txBody>
-          <a:bodyPr wrap="square" anchor="t">
-            <a:spAutoFit/>
-          </a:bodyPr>
-          <a:lstStyle/>
-          <a:p>
-            <a:pPr algn="ctr">
-              <a:lnSpc>
-                <a:spcPct val="100000"/>
-              </a:lnSpc>
-            </a:pPr>
-            <a:r>
-              <a:rPr sz="1400" b="0">
-                <a:solidFill>
-                  <a:srgbClr val="545C6E"/>
-                </a:solidFill>
-                <a:latin typeface="Calibri"/>
-              </a:rPr>
-              <a:t>to produce the plan</a:t>
-            </a:r>
-          </a:p>
-        </p:txBody>
-      </p:sp>
-      <p:sp>
-        <p:nvSpPr>
-          <p:cNvPr id="17" name="TextBox 16"/>
-          <p:cNvSpPr txBox="1"/>
-          <p:nvPr/>
-        </p:nvSpPr>
-        <p:spPr>
-          <a:xfrm>
-            <a:off x="822960" y="5532120"/>
-            <a:ext cx="10515600" cy="822960"/>
-          </a:xfrm>
-          <a:prstGeom prst="rect">
-            <a:avLst/>
-          </a:prstGeom>
-          <a:noFill/>
-        </p:spPr>
-        <p:txBody>
-          <a:bodyPr wrap="square" anchor="t">
-            <a:spAutoFit/>
-          </a:bodyPr>
-          <a:lstStyle/>
-          <a:p>
-            <a:pPr algn="l">
-              <a:lnSpc>
-                <a:spcPct val="100000"/>
-              </a:lnSpc>
-            </a:pPr>
-            <a:r>
-              <a:rPr sz="1800" b="1">
-                <a:solidFill>
-                  <a:srgbClr val="A85B00"/>
-                </a:solidFill>
-                <a:latin typeface="Calibri"/>
-              </a:rPr>
-              <a:t>Cheap and fast, and the information cannot be trusted. That is what this approach is here to show.</a:t>
+              <a:t>What D is: 1.7x cheaper than C and 15x cheaper than B, with no drop in accuracy.</a:t>
             </a:r>
           </a:p>
         </p:txBody>
@@ -9076,7 +8934,7 @@
 </p:sld>
 </file>
 
-<file path=ppt/slides/slide6.xml><?xml version="1.0" encoding="utf-8"?>
+<file path=ppt/slides/slide8.xml><?xml version="1.0" encoding="utf-8"?>
 <p:sld xmlns:a="http://schemas.openxmlformats.org/drawingml/2006/main" xmlns:p="http://schemas.openxmlformats.org/presentationml/2006/main" xmlns:r="http://schemas.openxmlformats.org/officeDocument/2006/relationships">
   <p:cSld>
     <p:spTree>
@@ -9120,7 +8978,7 @@
                 </a:solidFill>
                 <a:latin typeface="Calibri"/>
               </a:rPr>
-              <a:t>5  ·  APPROACH B  —  6 AGENTS, NAIVE</a:t>
+              <a:t>7  ·  WHAT THE USER SEES</a:t>
             </a:r>
           </a:p>
         </p:txBody>
@@ -9159,7 +9017,7 @@
                 </a:solidFill>
                 <a:latin typeface="Calibri"/>
               </a:rPr>
-              <a:t>Every agent decides for itself</a:t>
+              <a:t>And the check that stops an impossible trip</a:t>
             </a:r>
           </a:p>
         </p:txBody>
@@ -9208,308 +9066,30 @@
           </a:p>
         </p:txBody>
       </p:sp>
-      <p:graphicFrame>
-        <p:nvGraphicFramePr>
-          <p:cNvPr id="5" name="Table 4"/>
-          <p:cNvGraphicFramePr>
-            <a:graphicFrameLocks noGrp="1"/>
-          </p:cNvGraphicFramePr>
+      <p:pic>
+        <p:nvPicPr>
+          <p:cNvPr id="5" name="Picture 4" descr="frontend.png"/>
+          <p:cNvPicPr>
+            <a:picLocks noChangeAspect="1"/>
+          </p:cNvPicPr>
           <p:nvPr/>
-        </p:nvGraphicFramePr>
-        <p:xfrm>
-          <a:off x="822960" y="1965960"/>
-          <a:ext cx="10515599" cy="2194560"/>
-        </p:xfrm>
-        <a:graphic>
-          <a:graphicData uri="http://schemas.openxmlformats.org/drawingml/2006/table">
-            <a:tbl>
-              <a:tblPr firstRow="1" bandRow="1">
-                <a:tableStyleId>{5C22544A-7EE6-4342-B048-85BDC9FD1C3A}</a:tableStyleId>
-              </a:tblPr>
-              <a:tblGrid>
-                <a:gridCol w="6036733"/>
-                <a:gridCol w="4478866"/>
-              </a:tblGrid>
-              <a:tr h="365760">
-                <a:tc>
-                  <a:txBody>
-                    <a:bodyPr/>
-                    <a:lstStyle/>
-                    <a:p>
-                      <a:r>
-                        <a:rPr sz="1300" b="1">
-                          <a:solidFill>
-                            <a:srgbClr val="FFFFFF"/>
-                          </a:solidFill>
-                          <a:latin typeface="Calibri"/>
-                        </a:rPr>
-                        <a:t>The hotel agent's thinking</a:t>
-                      </a:r>
-                    </a:p>
-                  </a:txBody>
-                  <a:tcPr>
-                    <a:solidFill>
-                      <a:srgbClr val="4338CA"/>
-                    </a:solidFill>
-                  </a:tcPr>
-                </a:tc>
-                <a:tc>
-                  <a:txBody>
-                    <a:bodyPr/>
-                    <a:lstStyle/>
-                    <a:p>
-                      <a:r>
-                        <a:rPr sz="1300" b="1">
-                          <a:solidFill>
-                            <a:srgbClr val="FFFFFF"/>
-                          </a:solidFill>
-                          <a:latin typeface="Calibri"/>
-                        </a:rPr>
-                        <a:t>Each line is a separate AI call</a:t>
-                      </a:r>
-                    </a:p>
-                  </a:txBody>
-                  <a:tcPr>
-                    <a:solidFill>
-                      <a:srgbClr val="4338CA"/>
-                    </a:solidFill>
-                  </a:tcPr>
-                </a:tc>
-              </a:tr>
-              <a:tr h="365760">
-                <a:tc>
-                  <a:txBody>
-                    <a:bodyPr/>
-                    <a:lstStyle/>
-                    <a:p>
-                      <a:r>
-                        <a:rPr sz="1300" b="0">
-                          <a:solidFill>
-                            <a:srgbClr val="161A23"/>
-                          </a:solidFill>
-                          <a:latin typeface="Calibri"/>
-                        </a:rPr>
-                        <a:t>"I need Istanbul's destination ID"</a:t>
-                      </a:r>
-                    </a:p>
-                  </a:txBody>
-                  <a:tcPr>
-                    <a:solidFill>
-                      <a:srgbClr val="FFFFFF"/>
-                    </a:solidFill>
-                  </a:tcPr>
-                </a:tc>
-                <a:tc>
-                  <a:txBody>
-                    <a:bodyPr/>
-                    <a:lstStyle/>
-                    <a:p>
-                      <a:r>
-                        <a:rPr sz="1300" b="0">
-                          <a:solidFill>
-                            <a:srgbClr val="161A23"/>
-                          </a:solidFill>
-                          <a:latin typeface="Calibri"/>
-                        </a:rPr>
-                        <a:t>tool call</a:t>
-                      </a:r>
-                    </a:p>
-                  </a:txBody>
-                  <a:tcPr>
-                    <a:solidFill>
-                      <a:srgbClr val="FFFFFF"/>
-                    </a:solidFill>
-                  </a:tcPr>
-                </a:tc>
-              </a:tr>
-              <a:tr h="365760">
-                <a:tc>
-                  <a:txBody>
-                    <a:bodyPr/>
-                    <a:lstStyle/>
-                    <a:p>
-                      <a:r>
-                        <a:rPr sz="1300" b="0">
-                          <a:solidFill>
-                            <a:srgbClr val="161A23"/>
-                          </a:solidFill>
-                          <a:latin typeface="Calibri"/>
-                        </a:rPr>
-                        <a:t>"Now I'll search hotels"</a:t>
-                      </a:r>
-                    </a:p>
-                  </a:txBody>
-                  <a:tcPr>
-                    <a:solidFill>
-                      <a:srgbClr val="F7F8FC"/>
-                    </a:solidFill>
-                  </a:tcPr>
-                </a:tc>
-                <a:tc>
-                  <a:txBody>
-                    <a:bodyPr/>
-                    <a:lstStyle/>
-                    <a:p>
-                      <a:r>
-                        <a:rPr sz="1300" b="0">
-                          <a:solidFill>
-                            <a:srgbClr val="161A23"/>
-                          </a:solidFill>
-                          <a:latin typeface="Calibri"/>
-                        </a:rPr>
-                        <a:t>tool call - 12,000 characters back</a:t>
-                      </a:r>
-                    </a:p>
-                  </a:txBody>
-                  <a:tcPr>
-                    <a:solidFill>
-                      <a:srgbClr val="F7F8FC"/>
-                    </a:solidFill>
-                  </a:tcPr>
-                </a:tc>
-              </a:tr>
-              <a:tr h="365760">
-                <a:tc>
-                  <a:txBody>
-                    <a:bodyPr/>
-                    <a:lstStyle/>
-                    <a:p>
-                      <a:r>
-                        <a:rPr sz="1300" b="0">
-                          <a:solidFill>
-                            <a:srgbClr val="161A23"/>
-                          </a:solidFill>
-                          <a:latin typeface="Calibri"/>
-                        </a:rPr>
-                        <a:t>"Maybe I should check the reviews"</a:t>
-                      </a:r>
-                    </a:p>
-                  </a:txBody>
-                  <a:tcPr>
-                    <a:solidFill>
-                      <a:srgbClr val="FFFFFF"/>
-                    </a:solidFill>
-                  </a:tcPr>
-                </a:tc>
-                <a:tc>
-                  <a:txBody>
-                    <a:bodyPr/>
-                    <a:lstStyle/>
-                    <a:p>
-                      <a:r>
-                        <a:rPr sz="1300" b="0">
-                          <a:solidFill>
-                            <a:srgbClr val="161A23"/>
-                          </a:solidFill>
-                          <a:latin typeface="Calibri"/>
-                        </a:rPr>
-                        <a:t>tool call</a:t>
-                      </a:r>
-                    </a:p>
-                  </a:txBody>
-                  <a:tcPr>
-                    <a:solidFill>
-                      <a:srgbClr val="FFFFFF"/>
-                    </a:solidFill>
-                  </a:tcPr>
-                </a:tc>
-              </a:tr>
-              <a:tr h="365760">
-                <a:tc>
-                  <a:txBody>
-                    <a:bodyPr/>
-                    <a:lstStyle/>
-                    <a:p>
-                      <a:r>
-                        <a:rPr sz="1300" b="0">
-                          <a:solidFill>
-                            <a:srgbClr val="161A23"/>
-                          </a:solidFill>
-                          <a:latin typeface="Calibri"/>
-                        </a:rPr>
-                        <a:t>"Maybe I should look at nearby attractions"</a:t>
-                      </a:r>
-                    </a:p>
-                  </a:txBody>
-                  <a:tcPr>
-                    <a:solidFill>
-                      <a:srgbClr val="F7F8FC"/>
-                    </a:solidFill>
-                  </a:tcPr>
-                </a:tc>
-                <a:tc>
-                  <a:txBody>
-                    <a:bodyPr/>
-                    <a:lstStyle/>
-                    <a:p>
-                      <a:r>
-                        <a:rPr sz="1300" b="0">
-                          <a:solidFill>
-                            <a:srgbClr val="161A23"/>
-                          </a:solidFill>
-                          <a:latin typeface="Calibri"/>
-                        </a:rPr>
-                        <a:t>tool call</a:t>
-                      </a:r>
-                    </a:p>
-                  </a:txBody>
-                  <a:tcPr>
-                    <a:solidFill>
-                      <a:srgbClr val="F7F8FC"/>
-                    </a:solidFill>
-                  </a:tcPr>
-                </a:tc>
-              </a:tr>
-              <a:tr h="365760">
-                <a:tc>
-                  <a:txBody>
-                    <a:bodyPr/>
-                    <a:lstStyle/>
-                    <a:p>
-                      <a:r>
-                        <a:rPr sz="1300" b="0">
-                          <a:solidFill>
-                            <a:srgbClr val="161A23"/>
-                          </a:solidFill>
-                          <a:latin typeface="Calibri"/>
-                        </a:rPr>
-                        <a:t>...and it may keep going, up to 10 steps</a:t>
-                      </a:r>
-                    </a:p>
-                  </a:txBody>
-                  <a:tcPr>
-                    <a:solidFill>
-                      <a:srgbClr val="FFFFFF"/>
-                    </a:solidFill>
-                  </a:tcPr>
-                </a:tc>
-                <a:tc>
-                  <a:txBody>
-                    <a:bodyPr/>
-                    <a:lstStyle/>
-                    <a:p>
-                      <a:r>
-                        <a:rPr sz="1300" b="0">
-                          <a:solidFill>
-                            <a:srgbClr val="161A23"/>
-                          </a:solidFill>
-                          <a:latin typeface="Calibri"/>
-                        </a:rPr>
-                        <a:t>8 tool descriptions re-sent every single time</a:t>
-                      </a:r>
-                    </a:p>
-                  </a:txBody>
-                  <a:tcPr>
-                    <a:solidFill>
-                      <a:srgbClr val="FFFFFF"/>
-                    </a:solidFill>
-                  </a:tcPr>
-                </a:tc>
-              </a:tr>
-            </a:tbl>
-          </a:graphicData>
-        </a:graphic>
-      </p:graphicFrame>
+        </p:nvPicPr>
+        <p:blipFill>
+          <a:blip r:embed="rId2"/>
+          <a:stretch>
+            <a:fillRect/>
+          </a:stretch>
+        </p:blipFill>
+        <p:spPr>
+          <a:xfrm>
+            <a:off x="3387605" y="1737360"/>
+            <a:ext cx="5416484" cy="3108960"/>
+          </a:xfrm>
+          <a:prstGeom prst="rect">
+            <a:avLst/>
+          </a:prstGeom>
+        </p:spPr>
+      </p:pic>
       <p:sp>
         <p:nvSpPr>
           <p:cNvPr id="6" name="TextBox 5"/>
@@ -9518,7 +9098,7 @@
         </p:nvSpPr>
         <p:spPr>
           <a:xfrm>
-            <a:off x="822960" y="4297680"/>
+            <a:off x="822960" y="4983480"/>
             <a:ext cx="3515258" cy="1188720"/>
           </a:xfrm>
           <a:prstGeom prst="rect">
@@ -9544,7 +9124,7 @@
                 </a:solidFill>
                 <a:latin typeface="Calibri"/>
               </a:rPr>
-              <a:t>21</a:t>
+              <a:t>$800</a:t>
             </a:r>
           </a:p>
         </p:txBody>
@@ -9557,7 +9137,7 @@
         </p:nvSpPr>
         <p:spPr>
           <a:xfrm>
-            <a:off x="822960" y="5440680"/>
+            <a:off x="822960" y="6126480"/>
             <a:ext cx="3515258" cy="731520"/>
           </a:xfrm>
           <a:prstGeom prst="rect">
@@ -9583,7 +9163,7 @@
                 </a:solidFill>
                 <a:latin typeface="Calibri"/>
               </a:rPr>
-              <a:t>AI calls per trip</a:t>
+              <a:t>traveller asked for</a:t>
             </a:r>
           </a:p>
         </p:txBody>
@@ -9596,7 +9176,7 @@
         </p:nvSpPr>
         <p:spPr>
           <a:xfrm>
-            <a:off x="4338218" y="4297680"/>
+            <a:off x="4338218" y="4983480"/>
             <a:ext cx="3515258" cy="1188720"/>
           </a:xfrm>
           <a:prstGeom prst="rect">
@@ -9622,7 +9202,7 @@
                 </a:solidFill>
                 <a:latin typeface="Calibri"/>
               </a:rPr>
-              <a:t>372s</a:t>
+              <a:t>$837</a:t>
             </a:r>
           </a:p>
         </p:txBody>
@@ -9635,7 +9215,7 @@
         </p:nvSpPr>
         <p:spPr>
           <a:xfrm>
-            <a:off x="4338218" y="5440680"/>
+            <a:off x="4338218" y="6126480"/>
             <a:ext cx="3515258" cy="731520"/>
           </a:xfrm>
           <a:prstGeom prst="rect">
@@ -9661,7 +9241,7 @@
                 </a:solidFill>
                 <a:latin typeface="Calibri"/>
               </a:rPr>
-              <a:t>to plan one trip</a:t>
+              <a:t>cheapest it can be done</a:t>
             </a:r>
           </a:p>
         </p:txBody>
@@ -9674,7 +9254,7 @@
         </p:nvSpPr>
         <p:spPr>
           <a:xfrm>
-            <a:off x="7853476" y="4297680"/>
+            <a:off x="7853476" y="4983480"/>
             <a:ext cx="3515258" cy="1188720"/>
           </a:xfrm>
           <a:prstGeom prst="rect">
@@ -9700,7 +9280,7 @@
                 </a:solidFill>
                 <a:latin typeface="Calibri"/>
               </a:rPr>
-              <a:t>2</a:t>
+              <a:t>REFUSED</a:t>
             </a:r>
           </a:p>
         </p:txBody>
@@ -9713,7 +9293,7 @@
         </p:nvSpPr>
         <p:spPr>
           <a:xfrm>
-            <a:off x="7853476" y="5440680"/>
+            <a:off x="7853476" y="6126480"/>
             <a:ext cx="3515258" cy="731520"/>
           </a:xfrm>
           <a:prstGeom prst="rect">
@@ -9739,46 +9319,7 @@
                 </a:solidFill>
                 <a:latin typeface="Calibri"/>
               </a:rPr>
-              <a:t>tools it never called at all</a:t>
-            </a:r>
-          </a:p>
-        </p:txBody>
-      </p:sp>
-      <p:sp>
-        <p:nvSpPr>
-          <p:cNvPr id="12" name="TextBox 11"/>
-          <p:cNvSpPr txBox="1"/>
-          <p:nvPr/>
-        </p:nvSpPr>
-        <p:spPr>
-          <a:xfrm>
-            <a:off x="822960" y="5943600"/>
-            <a:ext cx="10515600" cy="640080"/>
-          </a:xfrm>
-          <a:prstGeom prst="rect">
-            <a:avLst/>
-          </a:prstGeom>
-          <a:noFill/>
-        </p:spPr>
-        <p:txBody>
-          <a:bodyPr wrap="square" anchor="t">
-            <a:spAutoFit/>
-          </a:bodyPr>
-          <a:lstStyle/>
-          <a:p>
-            <a:pPr algn="l">
-              <a:lnSpc>
-                <a:spcPct val="100000"/>
-              </a:lnSpc>
-            </a:pPr>
-            <a:r>
-              <a:rPr sz="1700" b="1">
-                <a:solidFill>
-                  <a:srgbClr val="A85B00"/>
-                </a:solidFill>
-                <a:latin typeface="Calibri"/>
-              </a:rPr>
-              <a:t>Too much freedom: it keeps thinking and searching when it does not need to - and still skipped tools.</a:t>
+              <a:t>with three ways to fix it</a:t>
             </a:r>
           </a:p>
         </p:txBody>
@@ -9791,9 +9332,17 @@
 </p:sld>
 </file>
 
-<file path=ppt/slides/slide7.xml><?xml version="1.0" encoding="utf-8"?>
+<file path=ppt/slides/slide9.xml><?xml version="1.0" encoding="utf-8"?>
 <p:sld xmlns:a="http://schemas.openxmlformats.org/drawingml/2006/main" xmlns:p="http://schemas.openxmlformats.org/presentationml/2006/main" xmlns:r="http://schemas.openxmlformats.org/officeDocument/2006/relationships">
   <p:cSld>
+    <p:bg>
+      <p:bgPr>
+        <a:solidFill>
+          <a:srgbClr val="1E1B4B"/>
+        </a:solidFill>
+        <a:effectLst/>
+      </p:bgPr>
+    </p:bg>
     <p:spTree>
       <p:nvGrpSpPr>
         <p:cNvPr id="1" name=""/>
@@ -9809,8 +9358,8 @@
         </p:nvSpPr>
         <p:spPr>
           <a:xfrm>
-            <a:off x="822960" y="457200"/>
-            <a:ext cx="10515600" cy="365760"/>
+            <a:off x="1005840" y="1280160"/>
+            <a:ext cx="10241280" cy="457200"/>
           </a:xfrm>
           <a:prstGeom prst="rect">
             <a:avLst/>
@@ -9829,13 +9378,13 @@
               </a:lnSpc>
             </a:pPr>
             <a:r>
-              <a:rPr sz="1200" b="1">
+              <a:rPr sz="1400" b="1">
                 <a:solidFill>
-                  <a:srgbClr val="4338CA"/>
+                  <a:srgbClr val="9CA3F5"/>
                 </a:solidFill>
                 <a:latin typeface="Calibri"/>
               </a:rPr>
-              <a:t>6  ·  APPROACH C  —  6 AGENTS, TUNED</a:t>
+              <a:t>IN ONE SENTENCE</a:t>
             </a:r>
           </a:p>
         </p:txBody>
@@ -9848,8 +9397,8 @@
         </p:nvSpPr>
         <p:spPr>
           <a:xfrm>
-            <a:off x="822960" y="777240"/>
-            <a:ext cx="10515600" cy="822960"/>
+            <a:off x="1005840" y="1737360"/>
+            <a:ext cx="10241280" cy="1828800"/>
           </a:xfrm>
           <a:prstGeom prst="rect">
             <a:avLst/>
@@ -9864,17 +9413,33 @@
           <a:p>
             <a:pPr algn="l">
               <a:lnSpc>
-                <a:spcPct val="100000"/>
+                <a:spcPct val="120000"/>
               </a:lnSpc>
             </a:pPr>
             <a:r>
-              <a:rPr sz="3200" b="1">
+              <a:rPr sz="3000" b="1">
                 <a:solidFill>
-                  <a:srgbClr val="161A23"/>
+                  <a:srgbClr val="FFFFFF"/>
                 </a:solidFill>
                 <a:latin typeface="Calibri"/>
               </a:rPr>
-              <a:t>Approach B done properly</a:t>
+              <a:t>AI decides what the user wants and how to show it.</a:t>
+            </a:r>
+          </a:p>
+          <a:p>
+            <a:pPr algn="l">
+              <a:lnSpc>
+                <a:spcPct val="120000"/>
+              </a:lnSpc>
+            </a:pPr>
+            <a:r>
+              <a:rPr sz="3000" b="1">
+                <a:solidFill>
+                  <a:srgbClr val="6EE7DF"/>
+                </a:solidFill>
+                <a:latin typeface="Calibri"/>
+              </a:rPr>
+              <a:t>Python decides what data to fetch.</a:t>
             </a:r>
           </a:p>
         </p:txBody>
@@ -9887,14 +9452,14 @@
         </p:nvSpPr>
         <p:spPr>
           <a:xfrm>
-            <a:off x="822960" y="1572768"/>
-            <a:ext cx="1005840" cy="34000"/>
+            <a:off x="1005840" y="3749039"/>
+            <a:ext cx="1463040" cy="34000"/>
           </a:xfrm>
           <a:prstGeom prst="rect">
             <a:avLst/>
           </a:prstGeom>
           <a:solidFill>
-            <a:srgbClr val="4338CA"/>
+            <a:srgbClr val="0EA5A4"/>
           </a:solidFill>
           <a:ln>
             <a:noFill/>
@@ -9923,383 +9488,16 @@
           </a:p>
         </p:txBody>
       </p:sp>
-      <p:graphicFrame>
-        <p:nvGraphicFramePr>
-          <p:cNvPr id="5" name="Table 4"/>
-          <p:cNvGraphicFramePr>
-            <a:graphicFrameLocks noGrp="1"/>
-          </p:cNvGraphicFramePr>
-          <p:nvPr/>
-        </p:nvGraphicFramePr>
-        <p:xfrm>
-          <a:off x="822960" y="2011680"/>
-          <a:ext cx="10515598" cy="1828800"/>
-        </p:xfrm>
-        <a:graphic>
-          <a:graphicData uri="http://schemas.openxmlformats.org/drawingml/2006/table">
-            <a:tbl>
-              <a:tblPr firstRow="1" bandRow="1">
-                <a:tableStyleId>{5C22544A-7EE6-4342-B048-85BDC9FD1C3A}</a:tableStyleId>
-              </a:tblPr>
-              <a:tblGrid>
-                <a:gridCol w="2804159"/>
-                <a:gridCol w="4005942"/>
-                <a:gridCol w="3705497"/>
-              </a:tblGrid>
-              <a:tr h="365760">
-                <a:tc>
-                  <a:txBody>
-                    <a:bodyPr/>
-                    <a:lstStyle/>
-                    <a:p>
-                      <a:r>
-                        <a:rPr sz="1350" b="1">
-                          <a:solidFill>
-                            <a:srgbClr val="FFFFFF"/>
-                          </a:solidFill>
-                          <a:latin typeface="Calibri"/>
-                        </a:rPr>
-                        <a:t> </a:t>
-                      </a:r>
-                    </a:p>
-                  </a:txBody>
-                  <a:tcPr>
-                    <a:solidFill>
-                      <a:srgbClr val="4338CA"/>
-                    </a:solidFill>
-                  </a:tcPr>
-                </a:tc>
-                <a:tc>
-                  <a:txBody>
-                    <a:bodyPr/>
-                    <a:lstStyle/>
-                    <a:p>
-                      <a:r>
-                        <a:rPr sz="1350" b="1">
-                          <a:solidFill>
-                            <a:srgbClr val="FFFFFF"/>
-                          </a:solidFill>
-                          <a:latin typeface="Calibri"/>
-                        </a:rPr>
-                        <a:t>Approach B</a:t>
-                      </a:r>
-                    </a:p>
-                  </a:txBody>
-                  <a:tcPr>
-                    <a:solidFill>
-                      <a:srgbClr val="4338CA"/>
-                    </a:solidFill>
-                  </a:tcPr>
-                </a:tc>
-                <a:tc>
-                  <a:txBody>
-                    <a:bodyPr/>
-                    <a:lstStyle/>
-                    <a:p>
-                      <a:r>
-                        <a:rPr sz="1350" b="1">
-                          <a:solidFill>
-                            <a:srgbClr val="FFFFFF"/>
-                          </a:solidFill>
-                          <a:latin typeface="Calibri"/>
-                        </a:rPr>
-                        <a:t>Approach C</a:t>
-                      </a:r>
-                    </a:p>
-                  </a:txBody>
-                  <a:tcPr>
-                    <a:solidFill>
-                      <a:srgbClr val="4338CA"/>
-                    </a:solidFill>
-                  </a:tcPr>
-                </a:tc>
-              </a:tr>
-              <a:tr h="365760">
-                <a:tc>
-                  <a:txBody>
-                    <a:bodyPr/>
-                    <a:lstStyle/>
-                    <a:p>
-                      <a:r>
-                        <a:rPr sz="1350" b="0">
-                          <a:solidFill>
-                            <a:srgbClr val="161A23"/>
-                          </a:solidFill>
-                          <a:latin typeface="Calibri"/>
-                        </a:rPr>
-                        <a:t>Tools per agent</a:t>
-                      </a:r>
-                    </a:p>
-                  </a:txBody>
-                  <a:tcPr>
-                    <a:solidFill>
-                      <a:srgbClr val="FFFFFF"/>
-                    </a:solidFill>
-                  </a:tcPr>
-                </a:tc>
-                <a:tc>
-                  <a:txBody>
-                    <a:bodyPr/>
-                    <a:lstStyle/>
-                    <a:p>
-                      <a:r>
-                        <a:rPr sz="1350" b="0">
-                          <a:solidFill>
-                            <a:srgbClr val="161A23"/>
-                          </a:solidFill>
-                          <a:latin typeface="Calibri"/>
-                        </a:rPr>
-                        <a:t>up to 8</a:t>
-                      </a:r>
-                    </a:p>
-                  </a:txBody>
-                  <a:tcPr>
-                    <a:solidFill>
-                      <a:srgbClr val="FFFFFF"/>
-                    </a:solidFill>
-                  </a:tcPr>
-                </a:tc>
-                <a:tc>
-                  <a:txBody>
-                    <a:bodyPr/>
-                    <a:lstStyle/>
-                    <a:p>
-                      <a:r>
-                        <a:rPr sz="1350" b="0">
-                          <a:solidFill>
-                            <a:srgbClr val="161A23"/>
-                          </a:solidFill>
-                          <a:latin typeface="Calibri"/>
-                        </a:rPr>
-                        <a:t>1 or 2</a:t>
-                      </a:r>
-                    </a:p>
-                  </a:txBody>
-                  <a:tcPr>
-                    <a:solidFill>
-                      <a:srgbClr val="FFFFFF"/>
-                    </a:solidFill>
-                  </a:tcPr>
-                </a:tc>
-              </a:tr>
-              <a:tr h="365760">
-                <a:tc>
-                  <a:txBody>
-                    <a:bodyPr/>
-                    <a:lstStyle/>
-                    <a:p>
-                      <a:r>
-                        <a:rPr sz="1350" b="0">
-                          <a:solidFill>
-                            <a:srgbClr val="161A23"/>
-                          </a:solidFill>
-                          <a:latin typeface="Calibri"/>
-                        </a:rPr>
-                        <a:t>Thinking steps allowed</a:t>
-                      </a:r>
-                    </a:p>
-                  </a:txBody>
-                  <a:tcPr>
-                    <a:solidFill>
-                      <a:srgbClr val="F7F8FC"/>
-                    </a:solidFill>
-                  </a:tcPr>
-                </a:tc>
-                <a:tc>
-                  <a:txBody>
-                    <a:bodyPr/>
-                    <a:lstStyle/>
-                    <a:p>
-                      <a:r>
-                        <a:rPr sz="1350" b="0">
-                          <a:solidFill>
-                            <a:srgbClr val="161A23"/>
-                          </a:solidFill>
-                          <a:latin typeface="Calibri"/>
-                        </a:rPr>
-                        <a:t>8 to 15</a:t>
-                      </a:r>
-                    </a:p>
-                  </a:txBody>
-                  <a:tcPr>
-                    <a:solidFill>
-                      <a:srgbClr val="F7F8FC"/>
-                    </a:solidFill>
-                  </a:tcPr>
-                </a:tc>
-                <a:tc>
-                  <a:txBody>
-                    <a:bodyPr/>
-                    <a:lstStyle/>
-                    <a:p>
-                      <a:r>
-                        <a:rPr sz="1350" b="0">
-                          <a:solidFill>
-                            <a:srgbClr val="161A23"/>
-                          </a:solidFill>
-                          <a:latin typeface="Calibri"/>
-                        </a:rPr>
-                        <a:t>3</a:t>
-                      </a:r>
-                    </a:p>
-                  </a:txBody>
-                  <a:tcPr>
-                    <a:solidFill>
-                      <a:srgbClr val="F7F8FC"/>
-                    </a:solidFill>
-                  </a:tcPr>
-                </a:tc>
-              </a:tr>
-              <a:tr h="365760">
-                <a:tc>
-                  <a:txBody>
-                    <a:bodyPr/>
-                    <a:lstStyle/>
-                    <a:p>
-                      <a:r>
-                        <a:rPr sz="1350" b="0">
-                          <a:solidFill>
-                            <a:srgbClr val="161A23"/>
-                          </a:solidFill>
-                          <a:latin typeface="Calibri"/>
-                        </a:rPr>
-                        <a:t>What the AI is sent</a:t>
-                      </a:r>
-                    </a:p>
-                  </a:txBody>
-                  <a:tcPr>
-                    <a:solidFill>
-                      <a:srgbClr val="FFFFFF"/>
-                    </a:solidFill>
-                  </a:tcPr>
-                </a:tc>
-                <a:tc>
-                  <a:txBody>
-                    <a:bodyPr/>
-                    <a:lstStyle/>
-                    <a:p>
-                      <a:r>
-                        <a:rPr sz="1350" b="0">
-                          <a:solidFill>
-                            <a:srgbClr val="161A23"/>
-                          </a:solidFill>
-                          <a:latin typeface="Calibri"/>
-                        </a:rPr>
-                        <a:t>the full 12,000-character API reply</a:t>
-                      </a:r>
-                    </a:p>
-                  </a:txBody>
-                  <a:tcPr>
-                    <a:solidFill>
-                      <a:srgbClr val="FFFFFF"/>
-                    </a:solidFill>
-                  </a:tcPr>
-                </a:tc>
-                <a:tc>
-                  <a:txBody>
-                    <a:bodyPr/>
-                    <a:lstStyle/>
-                    <a:p>
-                      <a:r>
-                        <a:rPr sz="1350" b="0">
-                          <a:solidFill>
-                            <a:srgbClr val="161A23"/>
-                          </a:solidFill>
-                          <a:latin typeface="Calibri"/>
-                        </a:rPr>
-                        <a:t>the best 3 results, trimmed</a:t>
-                      </a:r>
-                    </a:p>
-                  </a:txBody>
-                  <a:tcPr>
-                    <a:solidFill>
-                      <a:srgbClr val="FFFFFF"/>
-                    </a:solidFill>
-                  </a:tcPr>
-                </a:tc>
-              </a:tr>
-              <a:tr h="365760">
-                <a:tc>
-                  <a:txBody>
-                    <a:bodyPr/>
-                    <a:lstStyle/>
-                    <a:p>
-                      <a:r>
-                        <a:rPr sz="1350" b="0">
-                          <a:solidFill>
-                            <a:srgbClr val="161A23"/>
-                          </a:solidFill>
-                          <a:latin typeface="Calibri"/>
-                        </a:rPr>
-                        <a:t>When agents run</a:t>
-                      </a:r>
-                    </a:p>
-                  </a:txBody>
-                  <a:tcPr>
-                    <a:solidFill>
-                      <a:srgbClr val="F7F8FC"/>
-                    </a:solidFill>
-                  </a:tcPr>
-                </a:tc>
-                <a:tc>
-                  <a:txBody>
-                    <a:bodyPr/>
-                    <a:lstStyle/>
-                    <a:p>
-                      <a:r>
-                        <a:rPr sz="1350" b="0">
-                          <a:solidFill>
-                            <a:srgbClr val="161A23"/>
-                          </a:solidFill>
-                          <a:latin typeface="Calibri"/>
-                        </a:rPr>
-                        <a:t>one after another</a:t>
-                      </a:r>
-                    </a:p>
-                  </a:txBody>
-                  <a:tcPr>
-                    <a:solidFill>
-                      <a:srgbClr val="F7F8FC"/>
-                    </a:solidFill>
-                  </a:tcPr>
-                </a:tc>
-                <a:tc>
-                  <a:txBody>
-                    <a:bodyPr/>
-                    <a:lstStyle/>
-                    <a:p>
-                      <a:r>
-                        <a:rPr sz="1350" b="0">
-                          <a:solidFill>
-                            <a:srgbClr val="161A23"/>
-                          </a:solidFill>
-                          <a:latin typeface="Calibri"/>
-                        </a:rPr>
-                        <a:t>at the same time</a:t>
-                      </a:r>
-                    </a:p>
-                  </a:txBody>
-                  <a:tcPr>
-                    <a:solidFill>
-                      <a:srgbClr val="F7F8FC"/>
-                    </a:solidFill>
-                  </a:tcPr>
-                </a:tc>
-              </a:tr>
-            </a:tbl>
-          </a:graphicData>
-        </a:graphic>
-      </p:graphicFrame>
-      <p:sp>
-        <p:nvSpPr>
-          <p:cNvPr id="6" name="TextBox 5"/>
+      <p:sp>
+        <p:nvSpPr>
+          <p:cNvPr id="5" name="TextBox 4"/>
           <p:cNvSpPr txBox="1"/>
           <p:nvPr/>
         </p:nvSpPr>
         <p:spPr>
           <a:xfrm>
-            <a:off x="822960" y="4206240"/>
-            <a:ext cx="3515258" cy="1188720"/>
+            <a:off x="1005840" y="4069080"/>
+            <a:ext cx="10241280" cy="2194560"/>
           </a:xfrm>
           <a:prstGeom prst="rect">
             <a:avLst/>
@@ -10312,1121 +9510,115 @@
           </a:bodyPr>
           <a:lstStyle/>
           <a:p>
-            <a:pPr algn="ctr">
+            <a:pPr algn="l">
               <a:lnSpc>
-                <a:spcPct val="100000"/>
+                <a:spcPct val="125000"/>
               </a:lnSpc>
             </a:pPr>
             <a:r>
-              <a:rPr sz="6000" b="1">
+              <a:rPr sz="1200" b="1">
                 <a:solidFill>
-                  <a:srgbClr val="4338CA"/>
+                  <a:srgbClr val="9CA3F5"/>
                 </a:solidFill>
                 <a:latin typeface="Calibri"/>
               </a:rPr>
-              <a:t>89%</a:t>
-            </a:r>
-          </a:p>
-        </p:txBody>
-      </p:sp>
-      <p:sp>
-        <p:nvSpPr>
-          <p:cNvPr id="7" name="TextBox 6"/>
-          <p:cNvSpPr txBox="1"/>
-          <p:nvPr/>
-        </p:nvSpPr>
-        <p:spPr>
-          <a:xfrm>
-            <a:off x="822960" y="5349240"/>
-            <a:ext cx="3515258" cy="731520"/>
-          </a:xfrm>
-          <a:prstGeom prst="rect">
-            <a:avLst/>
-          </a:prstGeom>
-          <a:noFill/>
-        </p:spPr>
-        <p:txBody>
-          <a:bodyPr wrap="square" anchor="t">
-            <a:spAutoFit/>
-          </a:bodyPr>
-          <a:lstStyle/>
-          <a:p>
-            <a:pPr algn="ctr">
+              <a:t>WHAT I FOUND</a:t>
+            </a:r>
+          </a:p>
+          <a:p>
+            <a:pPr algn="l">
               <a:lnSpc>
-                <a:spcPct val="100000"/>
+                <a:spcPct val="125000"/>
               </a:lnSpc>
             </a:pPr>
             <a:r>
-              <a:rPr sz="1400" b="0">
-                <a:solidFill>
-                  <a:srgbClr val="545C6E"/>
-                </a:solidFill>
-                <a:latin typeface="Calibri"/>
-              </a:rPr>
-              <a:t>less text sent, from settings alone</a:t>
-            </a:r>
-          </a:p>
-        </p:txBody>
-      </p:sp>
-      <p:sp>
-        <p:nvSpPr>
-          <p:cNvPr id="8" name="TextBox 7"/>
-          <p:cNvSpPr txBox="1"/>
-          <p:nvPr/>
-        </p:nvSpPr>
-        <p:spPr>
-          <a:xfrm>
-            <a:off x="4338218" y="4206240"/>
-            <a:ext cx="3515258" cy="1188720"/>
-          </a:xfrm>
-          <a:prstGeom prst="rect">
-            <a:avLst/>
-          </a:prstGeom>
-          <a:noFill/>
-        </p:spPr>
-        <p:txBody>
-          <a:bodyPr wrap="square" anchor="t">
-            <a:spAutoFit/>
-          </a:bodyPr>
-          <a:lstStyle/>
-          <a:p>
-            <a:pPr algn="ctr">
-              <a:lnSpc>
-                <a:spcPct val="100000"/>
-              </a:lnSpc>
-            </a:pPr>
-            <a:r>
-              <a:rPr sz="6000" b="1">
-                <a:solidFill>
-                  <a:srgbClr val="4338CA"/>
-                </a:solidFill>
-                <a:latin typeface="Calibri"/>
-              </a:rPr>
-              <a:t>10</a:t>
-            </a:r>
-          </a:p>
-        </p:txBody>
-      </p:sp>
-      <p:sp>
-        <p:nvSpPr>
-          <p:cNvPr id="9" name="TextBox 8"/>
-          <p:cNvSpPr txBox="1"/>
-          <p:nvPr/>
-        </p:nvSpPr>
-        <p:spPr>
-          <a:xfrm>
-            <a:off x="4338218" y="5349240"/>
-            <a:ext cx="3515258" cy="731520"/>
-          </a:xfrm>
-          <a:prstGeom prst="rect">
-            <a:avLst/>
-          </a:prstGeom>
-          <a:noFill/>
-        </p:spPr>
-        <p:txBody>
-          <a:bodyPr wrap="square" anchor="t">
-            <a:spAutoFit/>
-          </a:bodyPr>
-          <a:lstStyle/>
-          <a:p>
-            <a:pPr algn="ctr">
-              <a:lnSpc>
-                <a:spcPct val="100000"/>
-              </a:lnSpc>
-            </a:pPr>
-            <a:r>
-              <a:rPr sz="1400" b="0">
-                <a:solidFill>
-                  <a:srgbClr val="545C6E"/>
-                </a:solidFill>
-                <a:latin typeface="Calibri"/>
-              </a:rPr>
-              <a:t>AI calls, down from 21</a:t>
-            </a:r>
-          </a:p>
-        </p:txBody>
-      </p:sp>
-      <p:sp>
-        <p:nvSpPr>
-          <p:cNvPr id="10" name="TextBox 9"/>
-          <p:cNvSpPr txBox="1"/>
-          <p:nvPr/>
-        </p:nvSpPr>
-        <p:spPr>
-          <a:xfrm>
-            <a:off x="7853476" y="4206240"/>
-            <a:ext cx="3515258" cy="1188720"/>
-          </a:xfrm>
-          <a:prstGeom prst="rect">
-            <a:avLst/>
-          </a:prstGeom>
-          <a:noFill/>
-        </p:spPr>
-        <p:txBody>
-          <a:bodyPr wrap="square" anchor="t">
-            <a:spAutoFit/>
-          </a:bodyPr>
-          <a:lstStyle/>
-          <a:p>
-            <a:pPr algn="ctr">
-              <a:lnSpc>
-                <a:spcPct val="100000"/>
-              </a:lnSpc>
-            </a:pPr>
-            <a:r>
-              <a:rPr sz="6000" b="1">
-                <a:solidFill>
-                  <a:srgbClr val="4338CA"/>
-                </a:solidFill>
-                <a:latin typeface="Calibri"/>
-              </a:rPr>
-              <a:t>56%</a:t>
-            </a:r>
-          </a:p>
-        </p:txBody>
-      </p:sp>
-      <p:sp>
-        <p:nvSpPr>
-          <p:cNvPr id="11" name="TextBox 10"/>
-          <p:cNvSpPr txBox="1"/>
-          <p:nvPr/>
-        </p:nvSpPr>
-        <p:spPr>
-          <a:xfrm>
-            <a:off x="7853476" y="5349240"/>
-            <a:ext cx="3515258" cy="731520"/>
-          </a:xfrm>
-          <a:prstGeom prst="rect">
-            <a:avLst/>
-          </a:prstGeom>
-          <a:noFill/>
-        </p:spPr>
-        <p:txBody>
-          <a:bodyPr wrap="square" anchor="t">
-            <a:spAutoFit/>
-          </a:bodyPr>
-          <a:lstStyle/>
-          <a:p>
-            <a:pPr algn="ctr">
-              <a:lnSpc>
-                <a:spcPct val="100000"/>
-              </a:lnSpc>
-            </a:pPr>
-            <a:r>
-              <a:rPr sz="1400" b="0">
-                <a:solidFill>
-                  <a:srgbClr val="545C6E"/>
-                </a:solidFill>
-                <a:latin typeface="Calibri"/>
-              </a:rPr>
-              <a:t>of its prices are real</a:t>
-            </a:r>
-          </a:p>
-        </p:txBody>
-      </p:sp>
-      <p:sp>
-        <p:nvSpPr>
-          <p:cNvPr id="12" name="TextBox 11"/>
-          <p:cNvSpPr txBox="1"/>
-          <p:nvPr/>
-        </p:nvSpPr>
-        <p:spPr>
-          <a:xfrm>
-            <a:off x="822960" y="5852160"/>
-            <a:ext cx="10515600" cy="731520"/>
-          </a:xfrm>
-          <a:prstGeom prst="rect">
-            <a:avLst/>
-          </a:prstGeom>
-          <a:noFill/>
-        </p:spPr>
-        <p:txBody>
-          <a:bodyPr wrap="square" anchor="t">
-            <a:spAutoFit/>
-          </a:bodyPr>
-          <a:lstStyle/>
-          <a:p>
-            <a:pPr algn="l">
-              <a:lnSpc>
-                <a:spcPct val="100000"/>
-              </a:lnSpc>
-            </a:pPr>
-            <a:r>
-              <a:rPr sz="1800" b="1">
-                <a:solidFill>
-                  <a:srgbClr val="4338CA"/>
-                </a:solidFill>
-                <a:latin typeface="Calibri"/>
-              </a:rPr>
-              <a:t>This is one of the biggest findings: most of B's cost was bad configuration, not the design.</a:t>
-            </a:r>
-          </a:p>
-        </p:txBody>
-      </p:sp>
-    </p:spTree>
-  </p:cSld>
-  <p:clrMapOvr>
-    <a:masterClrMapping/>
-  </p:clrMapOvr>
-</p:sld>
-</file>
-
-<file path=ppt/slides/slide8.xml><?xml version="1.0" encoding="utf-8"?>
-<p:sld xmlns:a="http://schemas.openxmlformats.org/drawingml/2006/main" xmlns:p="http://schemas.openxmlformats.org/presentationml/2006/main" xmlns:r="http://schemas.openxmlformats.org/officeDocument/2006/relationships">
-  <p:cSld>
-    <p:spTree>
-      <p:nvGrpSpPr>
-        <p:cNvPr id="1" name=""/>
-        <p:cNvGrpSpPr/>
-        <p:nvPr/>
-      </p:nvGrpSpPr>
-      <p:grpSpPr/>
-      <p:sp>
-        <p:nvSpPr>
-          <p:cNvPr id="2" name="TextBox 1"/>
-          <p:cNvSpPr txBox="1"/>
-          <p:nvPr/>
-        </p:nvSpPr>
-        <p:spPr>
-          <a:xfrm>
-            <a:off x="822960" y="457200"/>
-            <a:ext cx="10515600" cy="365760"/>
-          </a:xfrm>
-          <a:prstGeom prst="rect">
-            <a:avLst/>
-          </a:prstGeom>
-          <a:noFill/>
-        </p:spPr>
-        <p:txBody>
-          <a:bodyPr wrap="square" anchor="t">
-            <a:spAutoFit/>
-          </a:bodyPr>
-          <a:lstStyle/>
-          <a:p>
-            <a:pPr algn="l">
-              <a:lnSpc>
-                <a:spcPct val="100000"/>
-              </a:lnSpc>
-            </a:pPr>
-            <a:r>
-              <a:rPr sz="1200" b="1">
-                <a:solidFill>
-                  <a:srgbClr val="4338CA"/>
-                </a:solidFill>
-                <a:latin typeface="Calibri"/>
-              </a:rPr>
-              <a:t>7  ·  APPROACH D  —  3 AGENTS, DIRECT</a:t>
-            </a:r>
-          </a:p>
-        </p:txBody>
-      </p:sp>
-      <p:sp>
-        <p:nvSpPr>
-          <p:cNvPr id="3" name="TextBox 2"/>
-          <p:cNvSpPr txBox="1"/>
-          <p:nvPr/>
-        </p:nvSpPr>
-        <p:spPr>
-          <a:xfrm>
-            <a:off x="822960" y="777240"/>
-            <a:ext cx="10515600" cy="822960"/>
-          </a:xfrm>
-          <a:prstGeom prst="rect">
-            <a:avLst/>
-          </a:prstGeom>
-          <a:noFill/>
-        </p:spPr>
-        <p:txBody>
-          <a:bodyPr wrap="square" anchor="t">
-            <a:spAutoFit/>
-          </a:bodyPr>
-          <a:lstStyle/>
-          <a:p>
-            <a:pPr algn="l">
-              <a:lnSpc>
-                <a:spcPct val="100000"/>
-              </a:lnSpc>
-            </a:pPr>
-            <a:r>
-              <a:rPr sz="3200" b="1">
-                <a:solidFill>
-                  <a:srgbClr val="161A23"/>
-                </a:solidFill>
-                <a:latin typeface="Calibri"/>
-              </a:rPr>
-              <a:t>The design that ships</a:t>
-            </a:r>
-          </a:p>
-        </p:txBody>
-      </p:sp>
-      <p:sp>
-        <p:nvSpPr>
-          <p:cNvPr id="4" name="Rectangle 3"/>
-          <p:cNvSpPr/>
-          <p:nvPr/>
-        </p:nvSpPr>
-        <p:spPr>
-          <a:xfrm>
-            <a:off x="822960" y="1572768"/>
-            <a:ext cx="1005840" cy="34000"/>
-          </a:xfrm>
-          <a:prstGeom prst="rect">
-            <a:avLst/>
-          </a:prstGeom>
-          <a:solidFill>
-            <a:srgbClr val="4338CA"/>
-          </a:solidFill>
-          <a:ln>
-            <a:noFill/>
-          </a:ln>
-          <a:effectLst/>
-        </p:spPr>
-        <p:style>
-          <a:lnRef idx="1">
-            <a:schemeClr val="accent1"/>
-          </a:lnRef>
-          <a:fillRef idx="3">
-            <a:schemeClr val="accent1"/>
-          </a:fillRef>
-          <a:effectRef idx="2">
-            <a:schemeClr val="accent1"/>
-          </a:effectRef>
-          <a:fontRef idx="minor">
-            <a:schemeClr val="lt1"/>
-          </a:fontRef>
-        </p:style>
-        <p:txBody>
-          <a:bodyPr rtlCol="0" anchor="ctr"/>
-          <a:lstStyle/>
-          <a:p>
-            <a:pPr algn="ctr"/>
-          </a:p>
-        </p:txBody>
-      </p:sp>
-      <p:sp>
-        <p:nvSpPr>
-          <p:cNvPr id="5" name="Rounded Rectangle 4"/>
-          <p:cNvSpPr/>
-          <p:nvPr/>
-        </p:nvSpPr>
-        <p:spPr>
-          <a:xfrm>
-            <a:off x="3169767" y="1874519"/>
-            <a:ext cx="5852160" cy="731520"/>
-          </a:xfrm>
-          <a:prstGeom prst="roundRect">
-            <a:avLst/>
-          </a:prstGeom>
-          <a:solidFill>
-            <a:srgbClr val="4E3FB8"/>
-          </a:solidFill>
-          <a:ln>
-            <a:noFill/>
-          </a:ln>
-          <a:effectLst/>
-        </p:spPr>
-        <p:style>
-          <a:lnRef idx="1">
-            <a:schemeClr val="accent1"/>
-          </a:lnRef>
-          <a:fillRef idx="3">
-            <a:schemeClr val="accent1"/>
-          </a:fillRef>
-          <a:effectRef idx="2">
-            <a:schemeClr val="accent1"/>
-          </a:effectRef>
-          <a:fontRef idx="minor">
-            <a:schemeClr val="lt1"/>
-          </a:fontRef>
-        </p:style>
-        <p:txBody>
-          <a:bodyPr rtlCol="0" anchor="ctr" wrap="square"/>
-          <a:lstStyle/>
-          <a:p>
-            <a:pPr algn="ctr"/>
-            <a:r>
-              <a:rPr sz="1500" b="1">
+              <a:rPr sz="500" b="0">
                 <a:solidFill>
                   <a:srgbClr val="FFFFFF"/>
                 </a:solidFill>
                 <a:latin typeface="Calibri"/>
               </a:rPr>
-              <a:t>AI STEP 1     understand the request</a:t>
-            </a:r>
-          </a:p>
-        </p:txBody>
-      </p:sp>
-      <p:sp>
-        <p:nvSpPr>
-          <p:cNvPr id="6" name="TextBox 5"/>
-          <p:cNvSpPr txBox="1"/>
-          <p:nvPr/>
-        </p:nvSpPr>
-        <p:spPr>
-          <a:xfrm>
-            <a:off x="5730087" y="2651760"/>
-            <a:ext cx="731520" cy="292608"/>
-          </a:xfrm>
-          <a:prstGeom prst="rect">
-            <a:avLst/>
-          </a:prstGeom>
-          <a:noFill/>
-        </p:spPr>
-        <p:txBody>
-          <a:bodyPr wrap="square" anchor="t">
-            <a:spAutoFit/>
-          </a:bodyPr>
-          <a:lstStyle/>
-          <a:p>
-            <a:pPr algn="ctr">
+              <a:t/>
+            </a:r>
+          </a:p>
+          <a:p>
+            <a:pPr algn="l">
               <a:lnSpc>
-                <a:spcPct val="100000"/>
+                <a:spcPct val="125000"/>
               </a:lnSpc>
             </a:pPr>
             <a:r>
-              <a:rPr sz="1400" b="0">
+              <a:rPr sz="1700" b="0">
                 <a:solidFill>
-                  <a:srgbClr val="8A91A0"/>
+                  <a:srgbClr val="C7D2FE"/>
                 </a:solidFill>
                 <a:latin typeface="Calibri"/>
               </a:rPr>
-              <a:t>▼</a:t>
-            </a:r>
-          </a:p>
-        </p:txBody>
-      </p:sp>
-      <p:sp>
-        <p:nvSpPr>
-          <p:cNvPr id="7" name="Rounded Rectangle 6"/>
-          <p:cNvSpPr/>
-          <p:nvPr/>
-        </p:nvSpPr>
-        <p:spPr>
-          <a:xfrm>
-            <a:off x="3169767" y="3017520"/>
-            <a:ext cx="5852160" cy="1371600"/>
-          </a:xfrm>
-          <a:prstGeom prst="roundRect">
-            <a:avLst/>
-          </a:prstGeom>
-          <a:solidFill>
-            <a:srgbClr val="D6F2E8"/>
-          </a:solidFill>
-          <a:ln>
-            <a:noFill/>
-          </a:ln>
-          <a:effectLst/>
-        </p:spPr>
-        <p:style>
-          <a:lnRef idx="1">
-            <a:schemeClr val="accent1"/>
-          </a:lnRef>
-          <a:fillRef idx="3">
-            <a:schemeClr val="accent1"/>
-          </a:fillRef>
-          <a:effectRef idx="2">
-            <a:schemeClr val="accent1"/>
-          </a:effectRef>
-          <a:fontRef idx="minor">
-            <a:schemeClr val="lt1"/>
-          </a:fontRef>
-        </p:style>
-        <p:txBody>
-          <a:bodyPr rtlCol="0" anchor="ctr" wrap="square"/>
-          <a:lstStyle/>
-          <a:p>
-            <a:pPr algn="ctr"/>
-            <a:r>
-              <a:rPr sz="1500" b="1">
+              <a:t>1.  Without tools, AI makes travel prices up. Tools are essential.</a:t>
+            </a:r>
+          </a:p>
+          <a:p>
+            <a:pPr algn="l">
+              <a:lnSpc>
+                <a:spcPct val="125000"/>
+              </a:lnSpc>
+            </a:pPr>
+            <a:r>
+              <a:rPr sz="1700" b="0">
                 <a:solidFill>
-                  <a:srgbClr val="161A23"/>
+                  <a:srgbClr val="C7D2FE"/>
                 </a:solidFill>
                 <a:latin typeface="Calibri"/>
               </a:rPr>
-              <a:t>PLAIN PYTHON     fetch flights, hotels,
-attractions and restaurants</a:t>
-            </a:r>
-          </a:p>
-        </p:txBody>
-      </p:sp>
-      <p:sp>
-        <p:nvSpPr>
-          <p:cNvPr id="8" name="TextBox 7"/>
-          <p:cNvSpPr txBox="1"/>
-          <p:nvPr/>
-        </p:nvSpPr>
-        <p:spPr>
-          <a:xfrm>
-            <a:off x="5730087" y="4434840"/>
-            <a:ext cx="731520" cy="292608"/>
-          </a:xfrm>
-          <a:prstGeom prst="rect">
-            <a:avLst/>
-          </a:prstGeom>
-          <a:noFill/>
-        </p:spPr>
-        <p:txBody>
-          <a:bodyPr wrap="square" anchor="t">
-            <a:spAutoFit/>
-          </a:bodyPr>
-          <a:lstStyle/>
-          <a:p>
-            <a:pPr algn="ctr">
+              <a:t>2.  Setup matters hugely — settings alone saved 89% of the cost.</a:t>
+            </a:r>
+          </a:p>
+          <a:p>
+            <a:pPr algn="l">
               <a:lnSpc>
-                <a:spcPct val="100000"/>
+                <a:spcPct val="125000"/>
               </a:lnSpc>
             </a:pPr>
             <a:r>
-              <a:rPr sz="1400" b="0">
+              <a:rPr sz="1700" b="0">
                 <a:solidFill>
-                  <a:srgbClr val="8A91A0"/>
+                  <a:srgbClr val="6EE7DF"/>
                 </a:solidFill>
                 <a:latin typeface="Calibri"/>
               </a:rPr>
-              <a:t>▼</a:t>
-            </a:r>
-          </a:p>
-        </p:txBody>
-      </p:sp>
-      <p:sp>
-        <p:nvSpPr>
-          <p:cNvPr id="9" name="Rounded Rectangle 8"/>
-          <p:cNvSpPr/>
-          <p:nvPr/>
-        </p:nvSpPr>
-        <p:spPr>
-          <a:xfrm>
-            <a:off x="3169767" y="4800600"/>
-            <a:ext cx="5852160" cy="731520"/>
-          </a:xfrm>
-          <a:prstGeom prst="roundRect">
-            <a:avLst/>
-          </a:prstGeom>
-          <a:solidFill>
-            <a:srgbClr val="4E3FB8"/>
-          </a:solidFill>
-          <a:ln>
-            <a:noFill/>
-          </a:ln>
-          <a:effectLst/>
-        </p:spPr>
-        <p:style>
-          <a:lnRef idx="1">
-            <a:schemeClr val="accent1"/>
-          </a:lnRef>
-          <a:fillRef idx="3">
-            <a:schemeClr val="accent1"/>
-          </a:fillRef>
-          <a:effectRef idx="2">
-            <a:schemeClr val="accent1"/>
-          </a:effectRef>
-          <a:fontRef idx="minor">
-            <a:schemeClr val="lt1"/>
-          </a:fontRef>
-        </p:style>
-        <p:txBody>
-          <a:bodyPr rtlCol="0" anchor="ctr" wrap="square"/>
-          <a:lstStyle/>
-          <a:p>
-            <a:pPr algn="ctr"/>
-            <a:r>
-              <a:rPr sz="1500" b="1">
+              <a:t>3.  Taking AI out of the searching is cheaper and faster, and just as accurate.</a:t>
+            </a:r>
+          </a:p>
+          <a:p>
+            <a:pPr algn="l">
+              <a:lnSpc>
+                <a:spcPct val="125000"/>
+              </a:lnSpc>
+            </a:pPr>
+            <a:r>
+              <a:rPr sz="500" b="0">
                 <a:solidFill>
                   <a:srgbClr val="FFFFFF"/>
                 </a:solidFill>
                 <a:latin typeface="Calibri"/>
               </a:rPr>
-              <a:t>AI STEP 2     build the day-by-day plan</a:t>
-            </a:r>
-          </a:p>
-        </p:txBody>
-      </p:sp>
-      <p:sp>
-        <p:nvSpPr>
-          <p:cNvPr id="10" name="TextBox 9"/>
-          <p:cNvSpPr txBox="1"/>
-          <p:nvPr/>
-        </p:nvSpPr>
-        <p:spPr>
-          <a:xfrm>
-            <a:off x="822960" y="5760720"/>
-            <a:ext cx="10515600" cy="822960"/>
-          </a:xfrm>
-          <a:prstGeom prst="rect">
-            <a:avLst/>
-          </a:prstGeom>
-          <a:noFill/>
-        </p:spPr>
-        <p:txBody>
-          <a:bodyPr wrap="square" anchor="t">
-            <a:spAutoFit/>
-          </a:bodyPr>
-          <a:lstStyle/>
-          <a:p>
-            <a:pPr algn="ctr">
+              <a:t/>
+            </a:r>
+          </a:p>
+          <a:p>
+            <a:pPr algn="l">
               <a:lnSpc>
-                <a:spcPct val="100000"/>
+                <a:spcPct val="125000"/>
               </a:lnSpc>
             </a:pPr>
             <a:r>
-              <a:rPr sz="1800" b="1">
+              <a:rPr sz="1400" b="0">
                 <a:solidFill>
-                  <a:srgbClr val="161A23"/>
+                  <a:srgbClr val="9CA3F5"/>
                 </a:solidFill>
                 <a:latin typeface="Calibri"/>
               </a:rPr>
-              <a:t>Once we know the destination and the dates, searching is fixed. There is nothing left for AI to decide.</a:t>
-            </a:r>
-          </a:p>
-        </p:txBody>
-      </p:sp>
-    </p:spTree>
-  </p:cSld>
-  <p:clrMapOvr>
-    <a:masterClrMapping/>
-  </p:clrMapOvr>
-</p:sld>
-</file>
-
-<file path=ppt/slides/slide9.xml><?xml version="1.0" encoding="utf-8"?>
-<p:sld xmlns:a="http://schemas.openxmlformats.org/drawingml/2006/main" xmlns:p="http://schemas.openxmlformats.org/presentationml/2006/main" xmlns:r="http://schemas.openxmlformats.org/officeDocument/2006/relationships">
-  <p:cSld>
-    <p:spTree>
-      <p:nvGrpSpPr>
-        <p:cNvPr id="1" name=""/>
-        <p:cNvGrpSpPr/>
-        <p:nvPr/>
-      </p:nvGrpSpPr>
-      <p:grpSpPr/>
-      <p:sp>
-        <p:nvSpPr>
-          <p:cNvPr id="2" name="TextBox 1"/>
-          <p:cNvSpPr txBox="1"/>
-          <p:nvPr/>
-        </p:nvSpPr>
-        <p:spPr>
-          <a:xfrm>
-            <a:off x="822960" y="457200"/>
-            <a:ext cx="10515600" cy="365760"/>
-          </a:xfrm>
-          <a:prstGeom prst="rect">
-            <a:avLst/>
-          </a:prstGeom>
-          <a:noFill/>
-        </p:spPr>
-        <p:txBody>
-          <a:bodyPr wrap="square" anchor="t">
-            <a:spAutoFit/>
-          </a:bodyPr>
-          <a:lstStyle/>
-          <a:p>
-            <a:pPr algn="l">
-              <a:lnSpc>
-                <a:spcPct val="100000"/>
-              </a:lnSpc>
-            </a:pPr>
-            <a:r>
-              <a:rPr sz="1200" b="1">
-                <a:solidFill>
-                  <a:srgbClr val="4338CA"/>
-                </a:solidFill>
-                <a:latin typeface="Calibri"/>
-              </a:rPr>
-              <a:t>8  ·  WHERE THE TOOL SERVER FITS</a:t>
-            </a:r>
-          </a:p>
-        </p:txBody>
-      </p:sp>
-      <p:sp>
-        <p:nvSpPr>
-          <p:cNvPr id="3" name="TextBox 2"/>
-          <p:cNvSpPr txBox="1"/>
-          <p:nvPr/>
-        </p:nvSpPr>
-        <p:spPr>
-          <a:xfrm>
-            <a:off x="822960" y="777240"/>
-            <a:ext cx="10515600" cy="822960"/>
-          </a:xfrm>
-          <a:prstGeom prst="rect">
-            <a:avLst/>
-          </a:prstGeom>
-          <a:noFill/>
-        </p:spPr>
-        <p:txBody>
-          <a:bodyPr wrap="square" anchor="t">
-            <a:spAutoFit/>
-          </a:bodyPr>
-          <a:lstStyle/>
-          <a:p>
-            <a:pPr algn="l">
-              <a:lnSpc>
-                <a:spcPct val="100000"/>
-              </a:lnSpc>
-            </a:pPr>
-            <a:r>
-              <a:rPr sz="3200" b="1">
-                <a:solidFill>
-                  <a:srgbClr val="161A23"/>
-                </a:solidFill>
-                <a:latin typeface="Calibri"/>
-              </a:rPr>
-              <a:t>12 tools, but not every approach uses it the same way</a:t>
-            </a:r>
-          </a:p>
-        </p:txBody>
-      </p:sp>
-      <p:sp>
-        <p:nvSpPr>
-          <p:cNvPr id="4" name="Rectangle 3"/>
-          <p:cNvSpPr/>
-          <p:nvPr/>
-        </p:nvSpPr>
-        <p:spPr>
-          <a:xfrm>
-            <a:off x="822960" y="1572768"/>
-            <a:ext cx="1005840" cy="34000"/>
-          </a:xfrm>
-          <a:prstGeom prst="rect">
-            <a:avLst/>
-          </a:prstGeom>
-          <a:solidFill>
-            <a:srgbClr val="4338CA"/>
-          </a:solidFill>
-          <a:ln>
-            <a:noFill/>
-          </a:ln>
-          <a:effectLst/>
-        </p:spPr>
-        <p:style>
-          <a:lnRef idx="1">
-            <a:schemeClr val="accent1"/>
-          </a:lnRef>
-          <a:fillRef idx="3">
-            <a:schemeClr val="accent1"/>
-          </a:fillRef>
-          <a:effectRef idx="2">
-            <a:schemeClr val="accent1"/>
-          </a:effectRef>
-          <a:fontRef idx="minor">
-            <a:schemeClr val="lt1"/>
-          </a:fontRef>
-        </p:style>
-        <p:txBody>
-          <a:bodyPr rtlCol="0" anchor="ctr"/>
-          <a:lstStyle/>
-          <a:p>
-            <a:pPr algn="ctr"/>
-          </a:p>
-        </p:txBody>
-      </p:sp>
-      <p:graphicFrame>
-        <p:nvGraphicFramePr>
-          <p:cNvPr id="5" name="Table 4"/>
-          <p:cNvGraphicFramePr>
-            <a:graphicFrameLocks noGrp="1"/>
-          </p:cNvGraphicFramePr>
-          <p:nvPr/>
-        </p:nvGraphicFramePr>
-        <p:xfrm>
-          <a:off x="822960" y="2011680"/>
-          <a:ext cx="10515599" cy="1828800"/>
-        </p:xfrm>
-        <a:graphic>
-          <a:graphicData uri="http://schemas.openxmlformats.org/drawingml/2006/table">
-            <a:tbl>
-              <a:tblPr firstRow="1" bandRow="1">
-                <a:tableStyleId>{5C22544A-7EE6-4342-B048-85BDC9FD1C3A}</a:tableStyleId>
-              </a:tblPr>
-              <a:tblGrid>
-                <a:gridCol w="382385"/>
-                <a:gridCol w="10133214"/>
-              </a:tblGrid>
-              <a:tr h="365760">
-                <a:tc>
-                  <a:txBody>
-                    <a:bodyPr/>
-                    <a:lstStyle/>
-                    <a:p>
-                      <a:r>
-                        <a:rPr sz="1350" b="1">
-                          <a:solidFill>
-                            <a:srgbClr val="FFFFFF"/>
-                          </a:solidFill>
-                          <a:latin typeface="Calibri"/>
-                        </a:rPr>
-                        <a:t> </a:t>
-                      </a:r>
-                    </a:p>
-                  </a:txBody>
-                  <a:tcPr>
-                    <a:solidFill>
-                      <a:srgbClr val="4338CA"/>
-                    </a:solidFill>
-                  </a:tcPr>
-                </a:tc>
-                <a:tc>
-                  <a:txBody>
-                    <a:bodyPr/>
-                    <a:lstStyle/>
-                    <a:p>
-                      <a:r>
-                        <a:rPr sz="1350" b="1">
-                          <a:solidFill>
-                            <a:srgbClr val="FFFFFF"/>
-                          </a:solidFill>
-                          <a:latin typeface="Calibri"/>
-                        </a:rPr>
-                        <a:t>How it reaches a travel API</a:t>
-                      </a:r>
-                    </a:p>
-                  </a:txBody>
-                  <a:tcPr>
-                    <a:solidFill>
-                      <a:srgbClr val="4338CA"/>
-                    </a:solidFill>
-                  </a:tcPr>
-                </a:tc>
-              </a:tr>
-              <a:tr h="365760">
-                <a:tc>
-                  <a:txBody>
-                    <a:bodyPr/>
-                    <a:lstStyle/>
-                    <a:p>
-                      <a:r>
-                        <a:rPr sz="1350" b="0">
-                          <a:solidFill>
-                            <a:srgbClr val="161A23"/>
-                          </a:solidFill>
-                          <a:latin typeface="Calibri"/>
-                        </a:rPr>
-                        <a:t>A</a:t>
-                      </a:r>
-                    </a:p>
-                  </a:txBody>
-                  <a:tcPr>
-                    <a:solidFill>
-                      <a:srgbClr val="FFFFFF"/>
-                    </a:solidFill>
-                  </a:tcPr>
-                </a:tc>
-                <a:tc>
-                  <a:txBody>
-                    <a:bodyPr/>
-                    <a:lstStyle/>
-                    <a:p>
-                      <a:r>
-                        <a:rPr sz="1350" b="0">
-                          <a:solidFill>
-                            <a:srgbClr val="161A23"/>
-                          </a:solidFill>
-                          <a:latin typeface="Calibri"/>
-                        </a:rPr>
-                        <a:t>It does not. No tools at all</a:t>
-                      </a:r>
-                    </a:p>
-                  </a:txBody>
-                  <a:tcPr>
-                    <a:solidFill>
-                      <a:srgbClr val="FFFFFF"/>
-                    </a:solidFill>
-                  </a:tcPr>
-                </a:tc>
-              </a:tr>
-              <a:tr h="365760">
-                <a:tc>
-                  <a:txBody>
-                    <a:bodyPr/>
-                    <a:lstStyle/>
-                    <a:p>
-                      <a:r>
-                        <a:rPr sz="1350" b="0">
-                          <a:solidFill>
-                            <a:srgbClr val="161A23"/>
-                          </a:solidFill>
-                          <a:latin typeface="Calibri"/>
-                        </a:rPr>
-                        <a:t>B</a:t>
-                      </a:r>
-                    </a:p>
-                  </a:txBody>
-                  <a:tcPr>
-                    <a:solidFill>
-                      <a:srgbClr val="F7F8FC"/>
-                    </a:solidFill>
-                  </a:tcPr>
-                </a:tc>
-                <a:tc>
-                  <a:txBody>
-                    <a:bodyPr/>
-                    <a:lstStyle/>
-                    <a:p>
-                      <a:r>
-                        <a:rPr sz="1350" b="0">
-                          <a:solidFill>
-                            <a:srgbClr val="161A23"/>
-                          </a:solidFill>
-                          <a:latin typeface="Calibri"/>
-                        </a:rPr>
-                        <a:t>Agent -&gt; tool wrapper -&gt; MCP client -&gt; JSON-RPC -&gt; MCP server -&gt; travel API</a:t>
-                      </a:r>
-                    </a:p>
-                  </a:txBody>
-                  <a:tcPr>
-                    <a:solidFill>
-                      <a:srgbClr val="F7F8FC"/>
-                    </a:solidFill>
-                  </a:tcPr>
-                </a:tc>
-              </a:tr>
-              <a:tr h="365760">
-                <a:tc>
-                  <a:txBody>
-                    <a:bodyPr/>
-                    <a:lstStyle/>
-                    <a:p>
-                      <a:r>
-                        <a:rPr sz="1350" b="0">
-                          <a:solidFill>
-                            <a:srgbClr val="161A23"/>
-                          </a:solidFill>
-                          <a:latin typeface="Calibri"/>
-                        </a:rPr>
-                        <a:t>C</a:t>
-                      </a:r>
-                    </a:p>
-                  </a:txBody>
-                  <a:tcPr>
-                    <a:solidFill>
-                      <a:srgbClr val="FFFFFF"/>
-                    </a:solidFill>
-                  </a:tcPr>
-                </a:tc>
-                <a:tc>
-                  <a:txBody>
-                    <a:bodyPr/>
-                    <a:lstStyle/>
-                    <a:p>
-                      <a:r>
-                        <a:rPr sz="1350" b="0">
-                          <a:solidFill>
-                            <a:srgbClr val="161A23"/>
-                          </a:solidFill>
-                          <a:latin typeface="Calibri"/>
-                        </a:rPr>
-                        <a:t>Agent -&gt; the same server functions, called directly in the process. No JSON-RPC</a:t>
-                      </a:r>
-                    </a:p>
-                  </a:txBody>
-                  <a:tcPr>
-                    <a:solidFill>
-                      <a:srgbClr val="FFFFFF"/>
-                    </a:solidFill>
-                  </a:tcPr>
-                </a:tc>
-              </a:tr>
-              <a:tr h="365760">
-                <a:tc>
-                  <a:txBody>
-                    <a:bodyPr/>
-                    <a:lstStyle/>
-                    <a:p>
-                      <a:r>
-                        <a:rPr sz="1350" b="0">
-                          <a:solidFill>
-                            <a:srgbClr val="161A23"/>
-                          </a:solidFill>
-                          <a:latin typeface="Calibri"/>
-                        </a:rPr>
-                        <a:t>D</a:t>
-                      </a:r>
-                    </a:p>
-                  </a:txBody>
-                  <a:tcPr>
-                    <a:solidFill>
-                      <a:srgbClr val="F7F8FC"/>
-                    </a:solidFill>
-                  </a:tcPr>
-                </a:tc>
-                <a:tc>
-                  <a:txBody>
-                    <a:bodyPr/>
-                    <a:lstStyle/>
-                    <a:p>
-                      <a:r>
-                        <a:rPr sz="1350" b="0">
-                          <a:solidFill>
-                            <a:srgbClr val="161A23"/>
-                          </a:solidFill>
-                          <a:latin typeface="Calibri"/>
-                        </a:rPr>
-                        <a:t>Plain Python -&gt; the same server functions, called directly. Code decides when</a:t>
-                      </a:r>
-                    </a:p>
-                  </a:txBody>
-                  <a:tcPr>
-                    <a:solidFill>
-                      <a:srgbClr val="F7F8FC"/>
-                    </a:solidFill>
-                  </a:tcPr>
-                </a:tc>
-              </a:tr>
-            </a:tbl>
-          </a:graphicData>
-        </a:graphic>
-      </p:graphicFrame>
-      <p:sp>
-        <p:nvSpPr>
-          <p:cNvPr id="6" name="TextBox 5"/>
-          <p:cNvSpPr txBox="1"/>
-          <p:nvPr/>
-        </p:nvSpPr>
-        <p:spPr>
-          <a:xfrm>
-            <a:off x="822960" y="4754880"/>
-            <a:ext cx="10515600" cy="1371600"/>
-          </a:xfrm>
-          <a:prstGeom prst="rect">
-            <a:avLst/>
-          </a:prstGeom>
-          <a:noFill/>
-        </p:spPr>
-        <p:txBody>
-          <a:bodyPr wrap="square" anchor="t">
-            <a:spAutoFit/>
-          </a:bodyPr>
-          <a:lstStyle/>
-          <a:p>
-            <a:pPr algn="l">
-              <a:lnSpc>
-                <a:spcPct val="130000"/>
-              </a:lnSpc>
-            </a:pPr>
-            <a:r>
-              <a:rPr sz="1600" b="0">
-                <a:solidFill>
-                  <a:srgbClr val="545C6E"/>
-                </a:solidFill>
-                <a:latin typeface="Calibri"/>
-              </a:rPr>
-              <a:t>If asked "does the final system use the MCP server?"</a:t>
-            </a:r>
-          </a:p>
-          <a:p>
-            <a:pPr algn="l">
-              <a:lnSpc>
-                <a:spcPct val="130000"/>
-              </a:lnSpc>
-            </a:pPr>
-            <a:r>
-              <a:rPr sz="1700" b="1">
-                <a:solidFill>
-                  <a:srgbClr val="161A23"/>
-                </a:solidFill>
-                <a:latin typeface="Calibri"/>
-              </a:rPr>
-              <a:t>It uses the same tool functions the server exposes, but calls them in-process rather than over JSON-RPC. The protocol itself is exercised by Approach B and by the conformance audit.</a:t>
+              <a:t>Honest gap: only 1 of 20 trips measured for cost, because of the free API limits.</a:t>
             </a:r>
           </a:p>
         </p:txBody>

--- a/submission/CMP7200_Viva_Presentation.pptx
+++ b/submission/CMP7200_Viva_Presentation.pptx
@@ -720,7 +720,7 @@
           <a:lstStyle/>
           <a:p>
             <a:r>
-              <a:t>This was my original proposal. The hotel agent has eight tools and is allowed ten thinking steps, and every step is a separate AI call that re-sends the conversation and all eight tool descriptions. It took 20.6 AI calls and 372 seconds, gave broken output twice, and never once called the attractions or the restaurant tool - while still producing a plan that looked complete.</a:t>
+              <a:t>This was my original proposal. The four search and coordination agents run in one sequential crew, so the hotel agent cannot start until the flight agent has finished. The hotel agent has eight tools and is allowed ten thinking steps, and every step is a separate AI call that re-sends the conversation and all eight tool descriptions. It took 20.6 AI calls and 372 seconds, gave broken output twice, and never once called the attractions or the restaurant tool - while still producing a plan that looked complete.</a:t>
             </a:r>
           </a:p>
         </p:txBody>
@@ -790,7 +790,7 @@
           <a:lstStyle/>
           <a:p>
             <a:r>
-              <a:t>Approach C is Approach B done properly, and it exists so nobody can say D only won because B was set up badly. Instead of handing the AI twelve thousand characters of hotel data, it gets three lines - Theodora Pension $33 10/10, and so on. Settings alone removed 89% of the tokens. Being honest about that is what makes the next slide believable.</a:t>
+              <a:t>Approach C is Approach B done properly, and it exists so nobody can say D only won because B was set up badly. Two things changed. Running the three specialists in parallel instead of in a queue is most of why the time drops from 372 seconds to 37. And instead of handing the AI twelve thousand characters of hotel data it gets three lines - Theodora Pension $33 10/10, and so on - which is most of why the tokens drop by 89%. Being honest about that is what makes the next slide believable.</a:t>
             </a:r>
           </a:p>
         </p:txBody>
@@ -860,7 +860,7 @@
           <a:lstStyle/>
           <a:p>
             <a:r>
-              <a:t>This is the one that ships. AI understands the request, Python fetches the data, AI writes the plan. No agent holds a search tool in the measured run, so it makes exactly 5 searches every time in the same order - an IF statement decides rather than a model, so nothing can be skipped, which is exactly what B and C both did. If asked about the four helper tools in the web app: they are on the coordinator for the interactive path, and the measured arm strips them so the comparison is clean.</a:t>
+              <a:t>This is the one that ships. Once we know the place and the dates, there is nothing left for AI to decide - so AI understands the request, Python fetches the data, AI writes the plan. No agent holds a search tool in the measured run, so it makes exactly 5 searches every time in the same order - an IF statement decides rather than a model, so nothing can be skipped, which is exactly what B and C both did. Worth noting the Python fetches also run one after another, so D is not faster because of parallelism: it is faster because there are only 2 AI calls in it. If asked about the four helper tools in the web app: they are on the coordinator for the interactive path, and the measured arm strips them so the comparison is clean.</a:t>
             </a:r>
           </a:p>
         </p:txBody>
@@ -930,7 +930,7 @@
           <a:lstStyle/>
           <a:p>
             <a:r>
-              <a:t>Read the last row carefully. C is 56% and D is 47%, and their ranges overlap, so I cannot claim D is better grounded and I do not. What does not overlap is the token count. The claim is cheaper and faster with no measurable penalty - a smaller claim than the numbers first suggest, and the only one the data supports.</a:t>
+              <a:t>Two rows to point at. The run row explains the time row: B queues its agents so it takes 372 seconds, C runs three of them at once and drops to 37. D fetches its data one call after another in Python and is still the fastest at 23, because the saving comes from removing AI steps, not from running things in parallel. Then read the last row carefully: C is 56% and D is 47%, and their ranges overlap, so I cannot claim D is better grounded and I do not. What does not overlap is the token count. The claim is cheaper and faster with no measurable penalty - a smaller claim than the numbers first suggest, and the only one the data supports.</a:t>
             </a:r>
           </a:p>
         </p:txBody>
@@ -5328,8 +5328,8 @@
         </p:nvSpPr>
         <p:spPr>
           <a:xfrm>
-            <a:off x="822960" y="3108960"/>
-            <a:ext cx="10515600" cy="640080"/>
+            <a:off x="822960" y="3063240"/>
+            <a:ext cx="10515600" cy="457200"/>
           </a:xfrm>
           <a:prstGeom prst="rect">
             <a:avLst/>
@@ -5367,7 +5367,46 @@
         </p:nvSpPr>
         <p:spPr>
           <a:xfrm>
-            <a:off x="822960" y="3931920"/>
+            <a:off x="822960" y="3611880"/>
+            <a:ext cx="10515600" cy="457200"/>
+          </a:xfrm>
+          <a:prstGeom prst="rect">
+            <a:avLst/>
+          </a:prstGeom>
+          <a:noFill/>
+        </p:spPr>
+        <p:txBody>
+          <a:bodyPr wrap="square" anchor="t">
+            <a:spAutoFit/>
+          </a:bodyPr>
+          <a:lstStyle/>
+          <a:p>
+            <a:pPr algn="l">
+              <a:lnSpc>
+                <a:spcPct val="100000"/>
+              </a:lnSpc>
+            </a:pPr>
+            <a:r>
+              <a:rPr sz="1700" b="1">
+                <a:solidFill>
+                  <a:srgbClr val="0EA5A4"/>
+                </a:solidFill>
+                <a:latin typeface="Calibri"/>
+              </a:rPr>
+              <a:t>How it runs:  one AI call, and that is the whole thing.</a:t>
+            </a:r>
+          </a:p>
+        </p:txBody>
+      </p:sp>
+      <p:sp>
+        <p:nvSpPr>
+          <p:cNvPr id="8" name="TextBox 7"/>
+          <p:cNvSpPr txBox="1"/>
+          <p:nvPr/>
+        </p:nvSpPr>
+        <p:spPr>
+          <a:xfrm>
+            <a:off x="822960" y="4206240"/>
             <a:ext cx="3515258" cy="1188720"/>
           </a:xfrm>
           <a:prstGeom prst="rect">
@@ -5400,14 +5439,14 @@
       </p:sp>
       <p:sp>
         <p:nvSpPr>
-          <p:cNvPr id="8" name="TextBox 7"/>
+          <p:cNvPr id="9" name="TextBox 8"/>
           <p:cNvSpPr txBox="1"/>
           <p:nvPr/>
         </p:nvSpPr>
         <p:spPr>
           <a:xfrm>
-            <a:off x="822960" y="5074920"/>
-            <a:ext cx="3515258" cy="731520"/>
+            <a:off x="822960" y="5349240"/>
+            <a:ext cx="3515258" cy="457200"/>
           </a:xfrm>
           <a:prstGeom prst="rect">
             <a:avLst/>
@@ -5439,13 +5478,13 @@
       </p:sp>
       <p:sp>
         <p:nvSpPr>
-          <p:cNvPr id="9" name="TextBox 8"/>
+          <p:cNvPr id="10" name="TextBox 9"/>
           <p:cNvSpPr txBox="1"/>
           <p:nvPr/>
         </p:nvSpPr>
         <p:spPr>
           <a:xfrm>
-            <a:off x="4338218" y="3931920"/>
+            <a:off x="4338218" y="4206240"/>
             <a:ext cx="3515258" cy="1188720"/>
           </a:xfrm>
           <a:prstGeom prst="rect">
@@ -5478,14 +5517,14 @@
       </p:sp>
       <p:sp>
         <p:nvSpPr>
-          <p:cNvPr id="10" name="TextBox 9"/>
+          <p:cNvPr id="11" name="TextBox 10"/>
           <p:cNvSpPr txBox="1"/>
           <p:nvPr/>
         </p:nvSpPr>
         <p:spPr>
           <a:xfrm>
-            <a:off x="4338218" y="5074920"/>
-            <a:ext cx="3515258" cy="731520"/>
+            <a:off x="4338218" y="5349240"/>
+            <a:ext cx="3515258" cy="457200"/>
           </a:xfrm>
           <a:prstGeom prst="rect">
             <a:avLst/>
@@ -5517,13 +5556,13 @@
       </p:sp>
       <p:sp>
         <p:nvSpPr>
-          <p:cNvPr id="11" name="TextBox 10"/>
+          <p:cNvPr id="12" name="TextBox 11"/>
           <p:cNvSpPr txBox="1"/>
           <p:nvPr/>
         </p:nvSpPr>
         <p:spPr>
           <a:xfrm>
-            <a:off x="7853476" y="3931920"/>
+            <a:off x="7853476" y="4206240"/>
             <a:ext cx="3515258" cy="1188720"/>
           </a:xfrm>
           <a:prstGeom prst="rect">
@@ -5556,14 +5595,14 @@
       </p:sp>
       <p:sp>
         <p:nvSpPr>
-          <p:cNvPr id="12" name="TextBox 11"/>
+          <p:cNvPr id="13" name="TextBox 12"/>
           <p:cNvSpPr txBox="1"/>
           <p:nvPr/>
         </p:nvSpPr>
         <p:spPr>
           <a:xfrm>
-            <a:off x="7853476" y="5074920"/>
-            <a:ext cx="3515258" cy="731520"/>
+            <a:off x="7853476" y="5349240"/>
+            <a:ext cx="3515258" cy="457200"/>
           </a:xfrm>
           <a:prstGeom prst="rect">
             <a:avLst/>
@@ -5595,14 +5634,14 @@
       </p:sp>
       <p:sp>
         <p:nvSpPr>
-          <p:cNvPr id="13" name="TextBox 12"/>
+          <p:cNvPr id="14" name="TextBox 13"/>
           <p:cNvSpPr txBox="1"/>
           <p:nvPr/>
         </p:nvSpPr>
         <p:spPr>
           <a:xfrm>
-            <a:off x="822960" y="5669280"/>
-            <a:ext cx="10515600" cy="731520"/>
+            <a:off x="822960" y="5897880"/>
+            <a:ext cx="10515600" cy="457200"/>
           </a:xfrm>
           <a:prstGeom prst="rect">
             <a:avLst/>
@@ -5781,7 +5820,7 @@
           <p:nvPr/>
         </p:nvGraphicFramePr>
         <p:xfrm>
-          <a:off x="822960" y="1965960"/>
+          <a:off x="822960" y="1874519"/>
           <a:ext cx="10515599" cy="2560320"/>
         </p:xfrm>
         <a:graphic>
@@ -6283,8 +6322,8 @@
         </p:nvSpPr>
         <p:spPr>
           <a:xfrm>
-            <a:off x="822960" y="5029200"/>
-            <a:ext cx="10515600" cy="1280160"/>
+            <a:off x="822960" y="4617720"/>
+            <a:ext cx="10515600" cy="1737360"/>
           </a:xfrm>
           <a:prstGeom prst="rect">
             <a:avLst/>
@@ -6299,11 +6338,27 @@
           <a:p>
             <a:pPr algn="l">
               <a:lnSpc>
-                <a:spcPct val="125000"/>
+                <a:spcPct val="120000"/>
               </a:lnSpc>
             </a:pPr>
             <a:r>
-              <a:rPr sz="2000" b="1">
+              <a:rPr sz="1700" b="1">
+                <a:solidFill>
+                  <a:srgbClr val="0EA5A4"/>
+                </a:solidFill>
+                <a:latin typeface="Calibri"/>
+              </a:rPr>
+              <a:t>How they run:  one after another. Flights finish, then hotels, then attractions, then the plan. Nothing overlaps.</a:t>
+            </a:r>
+          </a:p>
+          <a:p>
+            <a:pPr algn="l">
+              <a:lnSpc>
+                <a:spcPct val="120000"/>
+              </a:lnSpc>
+            </a:pPr>
+            <a:r>
+              <a:rPr sz="1900" b="1">
                 <a:solidFill>
                   <a:srgbClr val="161A23"/>
                 </a:solidFill>
@@ -6315,11 +6370,11 @@
           <a:p>
             <a:pPr algn="l">
               <a:lnSpc>
-                <a:spcPct val="125000"/>
+                <a:spcPct val="120000"/>
               </a:lnSpc>
             </a:pPr>
             <a:r>
-              <a:rPr sz="1700" b="1">
+              <a:rPr sz="1600" b="1">
                 <a:solidFill>
                   <a:srgbClr val="A85B00"/>
                 </a:solidFill>
@@ -6479,7 +6534,7 @@
           <p:nvPr/>
         </p:nvGraphicFramePr>
         <p:xfrm>
-          <a:off x="822960" y="2011680"/>
+          <a:off x="822960" y="1920240"/>
           <a:ext cx="10515599" cy="2560320"/>
         </p:xfrm>
         <a:graphic>
@@ -6981,8 +7036,8 @@
         </p:nvSpPr>
         <p:spPr>
           <a:xfrm>
-            <a:off x="822960" y="4572000"/>
-            <a:ext cx="10515600" cy="1737360"/>
+            <a:off x="822960" y="4526280"/>
+            <a:ext cx="10515600" cy="1828800"/>
           </a:xfrm>
           <a:prstGeom prst="rect">
             <a:avLst/>
@@ -6997,65 +7052,65 @@
           <a:p>
             <a:pPr algn="l">
               <a:lnSpc>
-                <a:spcPct val="120000"/>
+                <a:spcPct val="115000"/>
               </a:lnSpc>
             </a:pPr>
             <a:r>
-              <a:rPr sz="1700" b="0">
+              <a:rPr sz="1700" b="1">
                 <a:solidFill>
-                  <a:srgbClr val="161A23"/>
+                  <a:srgbClr val="0EA5A4"/>
                 </a:solidFill>
                 <a:latin typeface="Calibri"/>
               </a:rPr>
-              <a:t>Three changes: fewer tools each, only 3 thinking steps instead of 15, and the AI is shown the best 3 results instead of 12,000 characters.</a:t>
+              <a:t>How they run:  flights, hotels and activities run at the same time, not one after another. Then the coordinator writes the plan.</a:t>
             </a:r>
           </a:p>
           <a:p>
             <a:pPr algn="l">
               <a:lnSpc>
-                <a:spcPct val="120000"/>
+                <a:spcPct val="115000"/>
               </a:lnSpc>
             </a:pPr>
             <a:r>
-              <a:rPr sz="500" b="0">
+              <a:rPr sz="1500" b="0">
                 <a:solidFill>
-                  <a:srgbClr val="161A23"/>
+                  <a:srgbClr val="545C6E"/>
                 </a:solidFill>
                 <a:latin typeface="Calibri"/>
               </a:rPr>
-              <a:t/>
+              <a:t>Also: fewer tools each, 3 thinking steps instead of 15, and the AI is shown the best 3 results instead of 12,000 characters.</a:t>
             </a:r>
           </a:p>
           <a:p>
             <a:pPr algn="l">
               <a:lnSpc>
-                <a:spcPct val="120000"/>
+                <a:spcPct val="115000"/>
               </a:lnSpc>
             </a:pPr>
             <a:r>
-              <a:rPr sz="2000" b="1">
+              <a:rPr sz="1900" b="1">
                 <a:solidFill>
                   <a:srgbClr val="4338CA"/>
                 </a:solidFill>
                 <a:latin typeface="Calibri"/>
               </a:rPr>
-              <a:t>Result: 89% less text sent, and 10 AI calls instead of 21.</a:t>
+              <a:t>Result: 89% less text than B, 10 AI calls instead of 21, and 37s instead of 372s.</a:t>
             </a:r>
           </a:p>
           <a:p>
             <a:pPr algn="l">
               <a:lnSpc>
-                <a:spcPct val="120000"/>
+                <a:spcPct val="115000"/>
               </a:lnSpc>
             </a:pPr>
             <a:r>
-              <a:rPr sz="1700" b="1">
+              <a:rPr sz="1600" b="1">
                 <a:solidFill>
                   <a:srgbClr val="A85B00"/>
                 </a:solidFill>
                 <a:latin typeface="Calibri"/>
               </a:rPr>
-              <a:t>Worth saying out loud: most of B's cost was bad setup, not the design.</a:t>
+              <a:t>So most of B's cost was bad setup, not the design.</a:t>
             </a:r>
           </a:p>
         </p:txBody>
@@ -7209,7 +7264,7 @@
           <p:nvPr/>
         </p:nvGraphicFramePr>
         <p:xfrm>
-          <a:off x="822960" y="2011680"/>
+          <a:off x="822960" y="1965960"/>
           <a:ext cx="10515599" cy="1828800"/>
         </p:xfrm>
         <a:graphic>
@@ -7575,8 +7630,8 @@
         </p:nvSpPr>
         <p:spPr>
           <a:xfrm>
-            <a:off x="822960" y="3886200"/>
-            <a:ext cx="10515600" cy="457200"/>
+            <a:off x="822960" y="4069080"/>
+            <a:ext cx="10515600" cy="1005840"/>
           </a:xfrm>
           <a:prstGeom prst="rect">
             <a:avLst/>
@@ -7591,46 +7646,23 @@
           <a:p>
             <a:pPr algn="l">
               <a:lnSpc>
-                <a:spcPct val="100000"/>
+                <a:spcPct val="115000"/>
               </a:lnSpc>
             </a:pPr>
             <a:r>
-              <a:rPr sz="1800" b="1">
+              <a:rPr sz="1700" b="1">
                 <a:solidFill>
-                  <a:srgbClr val="161A23"/>
+                  <a:srgbClr val="0EA5A4"/>
                 </a:solidFill>
                 <a:latin typeface="Calibri"/>
               </a:rPr>
-              <a:t>The three search agents are gone. Plain Python fetches the flights, hotels, attractions and restaurants.</a:t>
-            </a:r>
-          </a:p>
-        </p:txBody>
-      </p:sp>
-      <p:sp>
-        <p:nvSpPr>
-          <p:cNvPr id="7" name="TextBox 6"/>
-          <p:cNvSpPr txBox="1"/>
-          <p:nvPr/>
-        </p:nvSpPr>
-        <p:spPr>
-          <a:xfrm>
-            <a:off x="822960" y="4389120"/>
-            <a:ext cx="10515600" cy="457200"/>
-          </a:xfrm>
-          <a:prstGeom prst="rect">
-            <a:avLst/>
-          </a:prstGeom>
-          <a:noFill/>
-        </p:spPr>
-        <p:txBody>
-          <a:bodyPr wrap="square" anchor="t">
-            <a:spAutoFit/>
-          </a:bodyPr>
-          <a:lstStyle/>
+              <a:t>How it runs:  three steps. AI reads the request  →  Python fetches the flights, hotels, attractions and restaurants  →  AI writes the plan.</a:t>
+            </a:r>
+          </a:p>
           <a:p>
             <a:pPr algn="l">
               <a:lnSpc>
-                <a:spcPct val="100000"/>
+                <a:spcPct val="115000"/>
               </a:lnSpc>
             </a:pPr>
             <a:r>
@@ -7647,13 +7679,13 @@
       </p:sp>
       <p:sp>
         <p:nvSpPr>
-          <p:cNvPr id="8" name="TextBox 7"/>
+          <p:cNvPr id="7" name="TextBox 6"/>
           <p:cNvSpPr txBox="1"/>
           <p:nvPr/>
         </p:nvSpPr>
         <p:spPr>
           <a:xfrm>
-            <a:off x="822960" y="4892040"/>
+            <a:off x="822960" y="5120640"/>
             <a:ext cx="3515258" cy="1188720"/>
           </a:xfrm>
           <a:prstGeom prst="rect">
@@ -7686,14 +7718,14 @@
       </p:sp>
       <p:sp>
         <p:nvSpPr>
-          <p:cNvPr id="9" name="TextBox 8"/>
+          <p:cNvPr id="8" name="TextBox 7"/>
           <p:cNvSpPr txBox="1"/>
           <p:nvPr/>
         </p:nvSpPr>
         <p:spPr>
           <a:xfrm>
-            <a:off x="822960" y="6035040"/>
-            <a:ext cx="3515258" cy="731520"/>
+            <a:off x="822960" y="6263640"/>
+            <a:ext cx="3515258" cy="457200"/>
           </a:xfrm>
           <a:prstGeom prst="rect">
             <a:avLst/>
@@ -7725,13 +7757,13 @@
       </p:sp>
       <p:sp>
         <p:nvSpPr>
-          <p:cNvPr id="10" name="TextBox 9"/>
+          <p:cNvPr id="9" name="TextBox 8"/>
           <p:cNvSpPr txBox="1"/>
           <p:nvPr/>
         </p:nvSpPr>
         <p:spPr>
           <a:xfrm>
-            <a:off x="4338218" y="4892040"/>
+            <a:off x="4338218" y="5120640"/>
             <a:ext cx="3515258" cy="1188720"/>
           </a:xfrm>
           <a:prstGeom prst="rect">
@@ -7764,14 +7796,14 @@
       </p:sp>
       <p:sp>
         <p:nvSpPr>
-          <p:cNvPr id="11" name="TextBox 10"/>
+          <p:cNvPr id="10" name="TextBox 9"/>
           <p:cNvSpPr txBox="1"/>
           <p:nvPr/>
         </p:nvSpPr>
         <p:spPr>
           <a:xfrm>
-            <a:off x="4338218" y="6035040"/>
-            <a:ext cx="3515258" cy="731520"/>
+            <a:off x="4338218" y="6263640"/>
+            <a:ext cx="3515258" cy="457200"/>
           </a:xfrm>
           <a:prstGeom prst="rect">
             <a:avLst/>
@@ -7803,13 +7835,13 @@
       </p:sp>
       <p:sp>
         <p:nvSpPr>
-          <p:cNvPr id="12" name="TextBox 11"/>
+          <p:cNvPr id="11" name="TextBox 10"/>
           <p:cNvSpPr txBox="1"/>
           <p:nvPr/>
         </p:nvSpPr>
         <p:spPr>
           <a:xfrm>
-            <a:off x="7853476" y="4892040"/>
+            <a:off x="7853476" y="5120640"/>
             <a:ext cx="3515258" cy="1188720"/>
           </a:xfrm>
           <a:prstGeom prst="rect">
@@ -7842,14 +7874,14 @@
       </p:sp>
       <p:sp>
         <p:nvSpPr>
-          <p:cNvPr id="13" name="TextBox 12"/>
+          <p:cNvPr id="12" name="TextBox 11"/>
           <p:cNvSpPr txBox="1"/>
           <p:nvPr/>
         </p:nvSpPr>
         <p:spPr>
           <a:xfrm>
-            <a:off x="7853476" y="6035040"/>
-            <a:ext cx="3515258" cy="731520"/>
+            <a:off x="7853476" y="6263640"/>
+            <a:ext cx="3515258" cy="457200"/>
           </a:xfrm>
           <a:prstGeom prst="rect">
             <a:avLst/>
@@ -7875,45 +7907,6 @@
                 <a:latin typeface="Calibri"/>
               </a:rPr>
               <a:t>searches, every single time</a:t>
-            </a:r>
-          </a:p>
-        </p:txBody>
-      </p:sp>
-      <p:sp>
-        <p:nvSpPr>
-          <p:cNvPr id="14" name="TextBox 13"/>
-          <p:cNvSpPr txBox="1"/>
-          <p:nvPr/>
-        </p:nvSpPr>
-        <p:spPr>
-          <a:xfrm>
-            <a:off x="822960" y="6400800"/>
-            <a:ext cx="10515600" cy="365760"/>
-          </a:xfrm>
-          <a:prstGeom prst="rect">
-            <a:avLst/>
-          </a:prstGeom>
-          <a:noFill/>
-        </p:spPr>
-        <p:txBody>
-          <a:bodyPr wrap="square" anchor="t">
-            <a:spAutoFit/>
-          </a:bodyPr>
-          <a:lstStyle/>
-          <a:p>
-            <a:pPr algn="l">
-              <a:lnSpc>
-                <a:spcPct val="100000"/>
-              </a:lnSpc>
-            </a:pPr>
-            <a:r>
-              <a:rPr sz="1600" b="0">
-                <a:solidFill>
-                  <a:srgbClr val="545C6E"/>
-                </a:solidFill>
-                <a:latin typeface="Calibri"/>
-              </a:rPr>
-              <a:t>Once we know the place and the dates, there is nothing left for AI to decide.</a:t>
             </a:r>
           </a:p>
         </p:txBody>
@@ -8067,8 +8060,8 @@
           <p:nvPr/>
         </p:nvGraphicFramePr>
         <p:xfrm>
-          <a:off x="822960" y="2011680"/>
-          <a:ext cx="10515597" cy="2560320"/>
+          <a:off x="822960" y="1874519"/>
+          <a:ext cx="10515597" cy="2926080"/>
         </p:xfrm>
         <a:graphic>
           <a:graphicData uri="http://schemas.openxmlformats.org/drawingml/2006/table">
@@ -8090,7 +8083,7 @@
                     <a:lstStyle/>
                     <a:p>
                       <a:r>
-                        <a:rPr sz="1400" b="1">
+                        <a:rPr sz="1300" b="1">
                           <a:solidFill>
                             <a:srgbClr val="FFFFFF"/>
                           </a:solidFill>
@@ -8112,7 +8105,7 @@
                     <a:lstStyle/>
                     <a:p>
                       <a:r>
-                        <a:rPr sz="1400" b="1">
+                        <a:rPr sz="1300" b="1">
                           <a:solidFill>
                             <a:srgbClr val="FFFFFF"/>
                           </a:solidFill>
@@ -8134,7 +8127,7 @@
                     <a:lstStyle/>
                     <a:p>
                       <a:r>
-                        <a:rPr sz="1400" b="1">
+                        <a:rPr sz="1300" b="1">
                           <a:solidFill>
                             <a:srgbClr val="FFFFFF"/>
                           </a:solidFill>
@@ -8156,7 +8149,7 @@
                     <a:lstStyle/>
                     <a:p>
                       <a:r>
-                        <a:rPr sz="1400" b="1">
+                        <a:rPr sz="1300" b="1">
                           <a:solidFill>
                             <a:srgbClr val="FFFFFF"/>
                           </a:solidFill>
@@ -8178,7 +8171,7 @@
                     <a:lstStyle/>
                     <a:p>
                       <a:r>
-                        <a:rPr sz="1400" b="1">
+                        <a:rPr sz="1300" b="1">
                           <a:solidFill>
                             <a:srgbClr val="FFFFFF"/>
                           </a:solidFill>
@@ -8202,7 +8195,7 @@
                     <a:lstStyle/>
                     <a:p>
                       <a:r>
-                        <a:rPr sz="1400" b="0">
+                        <a:rPr sz="1300" b="0">
                           <a:solidFill>
                             <a:srgbClr val="161A23"/>
                           </a:solidFill>
@@ -8224,7 +8217,7 @@
                     <a:lstStyle/>
                     <a:p>
                       <a:r>
-                        <a:rPr sz="1400" b="0">
+                        <a:rPr sz="1300" b="0">
                           <a:solidFill>
                             <a:srgbClr val="161A23"/>
                           </a:solidFill>
@@ -8246,7 +8239,7 @@
                     <a:lstStyle/>
                     <a:p>
                       <a:r>
-                        <a:rPr sz="1400" b="0">
+                        <a:rPr sz="1300" b="0">
                           <a:solidFill>
                             <a:srgbClr val="161A23"/>
                           </a:solidFill>
@@ -8268,7 +8261,7 @@
                     <a:lstStyle/>
                     <a:p>
                       <a:r>
-                        <a:rPr sz="1400" b="0">
+                        <a:rPr sz="1300" b="0">
                           <a:solidFill>
                             <a:srgbClr val="161A23"/>
                           </a:solidFill>
@@ -8290,7 +8283,7 @@
                     <a:lstStyle/>
                     <a:p>
                       <a:r>
-                        <a:rPr sz="1400" b="0">
+                        <a:rPr sz="1300" b="0">
                           <a:solidFill>
                             <a:srgbClr val="161A23"/>
                           </a:solidFill>
@@ -8314,13 +8307,13 @@
                     <a:lstStyle/>
                     <a:p>
                       <a:r>
-                        <a:rPr sz="1400" b="0">
+                        <a:rPr sz="1300" b="0">
                           <a:solidFill>
                             <a:srgbClr val="161A23"/>
                           </a:solidFill>
                           <a:latin typeface="Calibri"/>
                         </a:rPr>
-                        <a:t>AI calls</a:t>
+                        <a:t>How the agents run</a:t>
                       </a:r>
                     </a:p>
                   </a:txBody>
@@ -8336,13 +8329,13 @@
                     <a:lstStyle/>
                     <a:p>
                       <a:r>
-                        <a:rPr sz="1400" b="0">
+                        <a:rPr sz="1300" b="0">
                           <a:solidFill>
                             <a:srgbClr val="161A23"/>
                           </a:solidFill>
                           <a:latin typeface="Calibri"/>
                         </a:rPr>
-                        <a:t>1</a:t>
+                        <a:t>one call</a:t>
                       </a:r>
                     </a:p>
                   </a:txBody>
@@ -8358,13 +8351,18 @@
                     <a:lstStyle/>
                     <a:p>
                       <a:r>
-                        <a:rPr sz="1400" b="0">
+                        <a:rPr sz="1300" b="0">
                           <a:solidFill>
                             <a:srgbClr val="161A23"/>
                           </a:solidFill>
                           <a:latin typeface="Calibri"/>
                         </a:rPr>
-                        <a:t>21</a:t>
+                        <a:t>one after</a:t>
+                      </a:r>
+                    </a:p>
+                    <a:p>
+                      <a:r>
+                        <a:t>another</a:t>
                       </a:r>
                     </a:p>
                   </a:txBody>
@@ -8380,13 +8378,18 @@
                     <a:lstStyle/>
                     <a:p>
                       <a:r>
-                        <a:rPr sz="1400" b="0">
+                        <a:rPr sz="1300" b="0">
                           <a:solidFill>
                             <a:srgbClr val="161A23"/>
                           </a:solidFill>
                           <a:latin typeface="Calibri"/>
                         </a:rPr>
-                        <a:t>10</a:t>
+                        <a:t>3 at the</a:t>
+                      </a:r>
+                    </a:p>
+                    <a:p>
+                      <a:r>
+                        <a:t>same time</a:t>
                       </a:r>
                     </a:p>
                   </a:txBody>
@@ -8402,13 +8405,18 @@
                     <a:lstStyle/>
                     <a:p>
                       <a:r>
-                        <a:rPr sz="1400" b="0">
+                        <a:rPr sz="1300" b="0">
                           <a:solidFill>
                             <a:srgbClr val="161A23"/>
                           </a:solidFill>
                           <a:latin typeface="Calibri"/>
                         </a:rPr>
-                        <a:t>2</a:t>
+                        <a:t>AI → Python</a:t>
+                      </a:r>
+                    </a:p>
+                    <a:p>
+                      <a:r>
+                        <a:t>→ AI</a:t>
                       </a:r>
                     </a:p>
                   </a:txBody>
@@ -8426,13 +8434,13 @@
                     <a:lstStyle/>
                     <a:p>
                       <a:r>
-                        <a:rPr sz="1400" b="0">
+                        <a:rPr sz="1300" b="0">
                           <a:solidFill>
                             <a:srgbClr val="161A23"/>
                           </a:solidFill>
                           <a:latin typeface="Calibri"/>
                         </a:rPr>
-                        <a:t>Text sent to the AI</a:t>
+                        <a:t>AI calls</a:t>
                       </a:r>
                     </a:p>
                   </a:txBody>
@@ -8448,13 +8456,13 @@
                     <a:lstStyle/>
                     <a:p>
                       <a:r>
-                        <a:rPr sz="1400" b="0">
+                        <a:rPr sz="1300" b="0">
                           <a:solidFill>
                             <a:srgbClr val="161A23"/>
                           </a:solidFill>
                           <a:latin typeface="Calibri"/>
                         </a:rPr>
-                        <a:t>4,644</a:t>
+                        <a:t>1</a:t>
                       </a:r>
                     </a:p>
                   </a:txBody>
@@ -8470,13 +8478,13 @@
                     <a:lstStyle/>
                     <a:p>
                       <a:r>
-                        <a:rPr sz="1400" b="0">
+                        <a:rPr sz="1300" b="0">
                           <a:solidFill>
                             <a:srgbClr val="161A23"/>
                           </a:solidFill>
                           <a:latin typeface="Calibri"/>
                         </a:rPr>
-                        <a:t>120,703</a:t>
+                        <a:t>21</a:t>
                       </a:r>
                     </a:p>
                   </a:txBody>
@@ -8492,13 +8500,13 @@
                     <a:lstStyle/>
                     <a:p>
                       <a:r>
-                        <a:rPr sz="1400" b="0">
+                        <a:rPr sz="1300" b="0">
                           <a:solidFill>
                             <a:srgbClr val="161A23"/>
                           </a:solidFill>
                           <a:latin typeface="Calibri"/>
                         </a:rPr>
-                        <a:t>13,521</a:t>
+                        <a:t>10</a:t>
                       </a:r>
                     </a:p>
                   </a:txBody>
@@ -8514,13 +8522,13 @@
                     <a:lstStyle/>
                     <a:p>
                       <a:r>
-                        <a:rPr sz="1400" b="0">
+                        <a:rPr sz="1300" b="0">
                           <a:solidFill>
                             <a:srgbClr val="161A23"/>
                           </a:solidFill>
                           <a:latin typeface="Calibri"/>
                         </a:rPr>
-                        <a:t>7,840</a:t>
+                        <a:t>2</a:t>
                       </a:r>
                     </a:p>
                   </a:txBody>
@@ -8538,13 +8546,13 @@
                     <a:lstStyle/>
                     <a:p>
                       <a:r>
-                        <a:rPr sz="1400" b="0">
+                        <a:rPr sz="1300" b="0">
                           <a:solidFill>
                             <a:srgbClr val="161A23"/>
                           </a:solidFill>
                           <a:latin typeface="Calibri"/>
                         </a:rPr>
-                        <a:t>Cost per trip</a:t>
+                        <a:t>Text sent to the AI</a:t>
                       </a:r>
                     </a:p>
                   </a:txBody>
@@ -8560,13 +8568,13 @@
                     <a:lstStyle/>
                     <a:p>
                       <a:r>
-                        <a:rPr sz="1400" b="0">
+                        <a:rPr sz="1300" b="0">
                           <a:solidFill>
                             <a:srgbClr val="161A23"/>
                           </a:solidFill>
                           <a:latin typeface="Calibri"/>
                         </a:rPr>
-                        <a:t>$0.0170</a:t>
+                        <a:t>4,644</a:t>
                       </a:r>
                     </a:p>
                   </a:txBody>
@@ -8582,13 +8590,13 @@
                     <a:lstStyle/>
                     <a:p>
                       <a:r>
-                        <a:rPr sz="1400" b="0">
+                        <a:rPr sz="1300" b="0">
                           <a:solidFill>
                             <a:srgbClr val="161A23"/>
                           </a:solidFill>
                           <a:latin typeface="Calibri"/>
                         </a:rPr>
-                        <a:t>$0.1859</a:t>
+                        <a:t>120,703</a:t>
                       </a:r>
                     </a:p>
                   </a:txBody>
@@ -8604,13 +8612,13 @@
                     <a:lstStyle/>
                     <a:p>
                       <a:r>
-                        <a:rPr sz="1400" b="0">
+                        <a:rPr sz="1300" b="0">
                           <a:solidFill>
                             <a:srgbClr val="161A23"/>
                           </a:solidFill>
                           <a:latin typeface="Calibri"/>
                         </a:rPr>
-                        <a:t>$0.0313</a:t>
+                        <a:t>13,521</a:t>
                       </a:r>
                     </a:p>
                   </a:txBody>
@@ -8626,13 +8634,13 @@
                     <a:lstStyle/>
                     <a:p>
                       <a:r>
-                        <a:rPr sz="1400" b="0">
+                        <a:rPr sz="1300" b="0">
                           <a:solidFill>
                             <a:srgbClr val="161A23"/>
                           </a:solidFill>
                           <a:latin typeface="Calibri"/>
                         </a:rPr>
-                        <a:t>$0.0179</a:t>
+                        <a:t>7,840</a:t>
                       </a:r>
                     </a:p>
                   </a:txBody>
@@ -8650,13 +8658,13 @@
                     <a:lstStyle/>
                     <a:p>
                       <a:r>
-                        <a:rPr sz="1400" b="0">
+                        <a:rPr sz="1300" b="0">
                           <a:solidFill>
                             <a:srgbClr val="161A23"/>
                           </a:solidFill>
                           <a:latin typeface="Calibri"/>
                         </a:rPr>
-                        <a:t>Time</a:t>
+                        <a:t>Cost per trip</a:t>
                       </a:r>
                     </a:p>
                   </a:txBody>
@@ -8672,13 +8680,13 @@
                     <a:lstStyle/>
                     <a:p>
                       <a:r>
-                        <a:rPr sz="1400" b="0">
+                        <a:rPr sz="1300" b="0">
                           <a:solidFill>
                             <a:srgbClr val="161A23"/>
                           </a:solidFill>
                           <a:latin typeface="Calibri"/>
                         </a:rPr>
-                        <a:t>27s</a:t>
+                        <a:t>$0.0170</a:t>
                       </a:r>
                     </a:p>
                   </a:txBody>
@@ -8694,13 +8702,13 @@
                     <a:lstStyle/>
                     <a:p>
                       <a:r>
-                        <a:rPr sz="1400" b="0">
+                        <a:rPr sz="1300" b="0">
                           <a:solidFill>
                             <a:srgbClr val="161A23"/>
                           </a:solidFill>
                           <a:latin typeface="Calibri"/>
                         </a:rPr>
-                        <a:t>372s</a:t>
+                        <a:t>$0.1859</a:t>
                       </a:r>
                     </a:p>
                   </a:txBody>
@@ -8716,13 +8724,13 @@
                     <a:lstStyle/>
                     <a:p>
                       <a:r>
-                        <a:rPr sz="1400" b="0">
+                        <a:rPr sz="1300" b="0">
                           <a:solidFill>
                             <a:srgbClr val="161A23"/>
                           </a:solidFill>
                           <a:latin typeface="Calibri"/>
                         </a:rPr>
-                        <a:t>37s</a:t>
+                        <a:t>$0.0313</a:t>
                       </a:r>
                     </a:p>
                   </a:txBody>
@@ -8738,13 +8746,13 @@
                     <a:lstStyle/>
                     <a:p>
                       <a:r>
-                        <a:rPr sz="1400" b="0">
+                        <a:rPr sz="1300" b="0">
                           <a:solidFill>
                             <a:srgbClr val="161A23"/>
                           </a:solidFill>
                           <a:latin typeface="Calibri"/>
                         </a:rPr>
-                        <a:t>23s</a:t>
+                        <a:t>$0.0179</a:t>
                       </a:r>
                     </a:p>
                   </a:txBody>
@@ -8762,29 +8770,141 @@
                     <a:lstStyle/>
                     <a:p>
                       <a:r>
-                        <a:rPr sz="1400" b="0">
+                        <a:rPr sz="1300" b="0">
                           <a:solidFill>
                             <a:srgbClr val="161A23"/>
                           </a:solidFill>
                           <a:latin typeface="Calibri"/>
                         </a:rPr>
+                        <a:t>Time</a:t>
+                      </a:r>
+                    </a:p>
+                  </a:txBody>
+                  <a:tcPr>
+                    <a:solidFill>
+                      <a:srgbClr val="F7F8FC"/>
+                    </a:solidFill>
+                  </a:tcPr>
+                </a:tc>
+                <a:tc>
+                  <a:txBody>
+                    <a:bodyPr/>
+                    <a:lstStyle/>
+                    <a:p>
+                      <a:r>
+                        <a:rPr sz="1300" b="0">
+                          <a:solidFill>
+                            <a:srgbClr val="161A23"/>
+                          </a:solidFill>
+                          <a:latin typeface="Calibri"/>
+                        </a:rPr>
+                        <a:t>27s</a:t>
+                      </a:r>
+                    </a:p>
+                  </a:txBody>
+                  <a:tcPr>
+                    <a:solidFill>
+                      <a:srgbClr val="F7F8FC"/>
+                    </a:solidFill>
+                  </a:tcPr>
+                </a:tc>
+                <a:tc>
+                  <a:txBody>
+                    <a:bodyPr/>
+                    <a:lstStyle/>
+                    <a:p>
+                      <a:r>
+                        <a:rPr sz="1300" b="0">
+                          <a:solidFill>
+                            <a:srgbClr val="161A23"/>
+                          </a:solidFill>
+                          <a:latin typeface="Calibri"/>
+                        </a:rPr>
+                        <a:t>372s</a:t>
+                      </a:r>
+                    </a:p>
+                  </a:txBody>
+                  <a:tcPr>
+                    <a:solidFill>
+                      <a:srgbClr val="F7F8FC"/>
+                    </a:solidFill>
+                  </a:tcPr>
+                </a:tc>
+                <a:tc>
+                  <a:txBody>
+                    <a:bodyPr/>
+                    <a:lstStyle/>
+                    <a:p>
+                      <a:r>
+                        <a:rPr sz="1300" b="0">
+                          <a:solidFill>
+                            <a:srgbClr val="161A23"/>
+                          </a:solidFill>
+                          <a:latin typeface="Calibri"/>
+                        </a:rPr>
+                        <a:t>37s</a:t>
+                      </a:r>
+                    </a:p>
+                  </a:txBody>
+                  <a:tcPr>
+                    <a:solidFill>
+                      <a:srgbClr val="F7F8FC"/>
+                    </a:solidFill>
+                  </a:tcPr>
+                </a:tc>
+                <a:tc>
+                  <a:txBody>
+                    <a:bodyPr/>
+                    <a:lstStyle/>
+                    <a:p>
+                      <a:r>
+                        <a:rPr sz="1300" b="0">
+                          <a:solidFill>
+                            <a:srgbClr val="161A23"/>
+                          </a:solidFill>
+                          <a:latin typeface="Calibri"/>
+                        </a:rPr>
+                        <a:t>23s</a:t>
+                      </a:r>
+                    </a:p>
+                  </a:txBody>
+                  <a:tcPr>
+                    <a:solidFill>
+                      <a:srgbClr val="F7F8FC"/>
+                    </a:solidFill>
+                  </a:tcPr>
+                </a:tc>
+              </a:tr>
+              <a:tr h="365760">
+                <a:tc>
+                  <a:txBody>
+                    <a:bodyPr/>
+                    <a:lstStyle/>
+                    <a:p>
+                      <a:r>
+                        <a:rPr sz="1300" b="0">
+                          <a:solidFill>
+                            <a:srgbClr val="161A23"/>
+                          </a:solidFill>
+                          <a:latin typeface="Calibri"/>
+                        </a:rPr>
                         <a:t>Prices that were real</a:t>
                       </a:r>
                     </a:p>
                   </a:txBody>
                   <a:tcPr>
                     <a:solidFill>
-                      <a:srgbClr val="F7F8FC"/>
-                    </a:solidFill>
-                  </a:tcPr>
-                </a:tc>
-                <a:tc>
-                  <a:txBody>
-                    <a:bodyPr/>
-                    <a:lstStyle/>
-                    <a:p>
-                      <a:r>
-                        <a:rPr sz="1400" b="0">
+                      <a:srgbClr val="FFFFFF"/>
+                    </a:solidFill>
+                  </a:tcPr>
+                </a:tc>
+                <a:tc>
+                  <a:txBody>
+                    <a:bodyPr/>
+                    <a:lstStyle/>
+                    <a:p>
+                      <a:r>
+                        <a:rPr sz="1300" b="0">
                           <a:solidFill>
                             <a:srgbClr val="161A23"/>
                           </a:solidFill>
@@ -8796,17 +8916,17 @@
                   </a:txBody>
                   <a:tcPr>
                     <a:solidFill>
-                      <a:srgbClr val="F7F8FC"/>
-                    </a:solidFill>
-                  </a:tcPr>
-                </a:tc>
-                <a:tc>
-                  <a:txBody>
-                    <a:bodyPr/>
-                    <a:lstStyle/>
-                    <a:p>
-                      <a:r>
-                        <a:rPr sz="1400" b="0">
+                      <a:srgbClr val="FFFFFF"/>
+                    </a:solidFill>
+                  </a:tcPr>
+                </a:tc>
+                <a:tc>
+                  <a:txBody>
+                    <a:bodyPr/>
+                    <a:lstStyle/>
+                    <a:p>
+                      <a:r>
+                        <a:rPr sz="1300" b="0">
                           <a:solidFill>
                             <a:srgbClr val="161A23"/>
                           </a:solidFill>
@@ -8818,17 +8938,17 @@
                   </a:txBody>
                   <a:tcPr>
                     <a:solidFill>
-                      <a:srgbClr val="F7F8FC"/>
-                    </a:solidFill>
-                  </a:tcPr>
-                </a:tc>
-                <a:tc>
-                  <a:txBody>
-                    <a:bodyPr/>
-                    <a:lstStyle/>
-                    <a:p>
-                      <a:r>
-                        <a:rPr sz="1400" b="0">
+                      <a:srgbClr val="FFFFFF"/>
+                    </a:solidFill>
+                  </a:tcPr>
+                </a:tc>
+                <a:tc>
+                  <a:txBody>
+                    <a:bodyPr/>
+                    <a:lstStyle/>
+                    <a:p>
+                      <a:r>
+                        <a:rPr sz="1300" b="0">
                           <a:solidFill>
                             <a:srgbClr val="161A23"/>
                           </a:solidFill>
@@ -8840,17 +8960,17 @@
                   </a:txBody>
                   <a:tcPr>
                     <a:solidFill>
-                      <a:srgbClr val="F7F8FC"/>
-                    </a:solidFill>
-                  </a:tcPr>
-                </a:tc>
-                <a:tc>
-                  <a:txBody>
-                    <a:bodyPr/>
-                    <a:lstStyle/>
-                    <a:p>
-                      <a:r>
-                        <a:rPr sz="1400" b="0">
+                      <a:srgbClr val="FFFFFF"/>
+                    </a:solidFill>
+                  </a:tcPr>
+                </a:tc>
+                <a:tc>
+                  <a:txBody>
+                    <a:bodyPr/>
+                    <a:lstStyle/>
+                    <a:p>
+                      <a:r>
+                        <a:rPr sz="1300" b="0">
                           <a:solidFill>
                             <a:srgbClr val="161A23"/>
                           </a:solidFill>
@@ -8862,7 +8982,7 @@
                   </a:txBody>
                   <a:tcPr>
                     <a:solidFill>
-                      <a:srgbClr val="F7F8FC"/>
+                      <a:srgbClr val="FFFFFF"/>
                     </a:solidFill>
                   </a:tcPr>
                 </a:tc>
@@ -9138,7 +9258,7 @@
         <p:spPr>
           <a:xfrm>
             <a:off x="822960" y="6126480"/>
-            <a:ext cx="3515258" cy="731520"/>
+            <a:ext cx="3515258" cy="457200"/>
           </a:xfrm>
           <a:prstGeom prst="rect">
             <a:avLst/>
@@ -9216,7 +9336,7 @@
         <p:spPr>
           <a:xfrm>
             <a:off x="4338218" y="6126480"/>
-            <a:ext cx="3515258" cy="731520"/>
+            <a:ext cx="3515258" cy="457200"/>
           </a:xfrm>
           <a:prstGeom prst="rect">
             <a:avLst/>
@@ -9294,7 +9414,7 @@
         <p:spPr>
           <a:xfrm>
             <a:off x="7853476" y="6126480"/>
-            <a:ext cx="3515258" cy="731520"/>
+            <a:ext cx="3515258" cy="457200"/>
           </a:xfrm>
           <a:prstGeom prst="rect">
             <a:avLst/>

--- a/submission/CMP7200_Viva_Presentation.pptx
+++ b/submission/CMP7200_Viva_Presentation.pptx
@@ -5012,7 +5012,7 @@
                 </a:solidFill>
                 <a:latin typeface="Calibri"/>
               </a:rPr>
-              <a:t>Six agents. The next four slides show which of them each approach uses, and what tools each one is given.</a:t>
+              <a:t>Six agents. The next four slides show which ones each approach uses, and what tools they get.</a:t>
             </a:r>
           </a:p>
         </p:txBody>
@@ -5666,7 +5666,7 @@
                 </a:solidFill>
                 <a:latin typeface="Calibri"/>
               </a:rPr>
-              <a:t>So it makes the prices up. This is the baseline everything else has to beat.</a:t>
+              <a:t>So it makes the prices up. Every other approach has to beat this.</a:t>
             </a:r>
           </a:p>
         </p:txBody>
@@ -6348,7 +6348,7 @@
                 </a:solidFill>
                 <a:latin typeface="Calibri"/>
               </a:rPr>
-              <a:t>How they run:  one after another. Flights finish, then hotels, then attractions, then the plan. Nothing overlaps.</a:t>
+              <a:t>How they run:  one at a time. Flights, then hotels, then attractions, then the plan.</a:t>
             </a:r>
           </a:p>
           <a:p>
@@ -6380,7 +6380,7 @@
                 </a:solidFill>
                 <a:latin typeface="Calibri"/>
               </a:rPr>
-              <a:t>Too much freedom: the agents keep thinking and searching — and they still never called two of their own tools.</a:t>
+              <a:t>Too much freedom. They keep thinking and searching, and they still never used two of their own tools.</a:t>
             </a:r>
           </a:p>
         </p:txBody>
@@ -7062,7 +7062,7 @@
                 </a:solidFill>
                 <a:latin typeface="Calibri"/>
               </a:rPr>
-              <a:t>How they run:  flights, hotels and activities run at the same time, not one after another. Then the coordinator writes the plan.</a:t>
+              <a:t>How they run:  flights, hotels and activities all at the same time. Then one agent writes the plan.</a:t>
             </a:r>
           </a:p>
           <a:p>
@@ -7078,7 +7078,7 @@
                 </a:solidFill>
                 <a:latin typeface="Calibri"/>
               </a:rPr>
-              <a:t>Also: fewer tools each, 3 thinking steps instead of 15, and the AI is shown the best 3 results instead of 12,000 characters.</a:t>
+              <a:t>We also gave each agent fewer tools, 3 thinking steps instead of 15, and the best 3 results instead of 12,000 characters of data.</a:t>
             </a:r>
           </a:p>
           <a:p>
@@ -7110,7 +7110,7 @@
                 </a:solidFill>
                 <a:latin typeface="Calibri"/>
               </a:rPr>
-              <a:t>So most of B's cost was bad setup, not the design.</a:t>
+              <a:t>So most of B's cost was bad setup, not a bad design.</a:t>
             </a:r>
           </a:p>
         </p:txBody>
@@ -7656,7 +7656,7 @@
                 </a:solidFill>
                 <a:latin typeface="Calibri"/>
               </a:rPr>
-              <a:t>How it runs:  three steps. AI reads the request  →  Python fetches the flights, hotels, attractions and restaurants  →  AI writes the plan.</a:t>
+              <a:t>How it runs:  three steps. AI reads the request. Python fetches the flights, hotels, attractions and restaurants. AI writes the plan.</a:t>
             </a:r>
           </a:p>
           <a:p>
@@ -7672,7 +7672,7 @@
                 </a:solidFill>
                 <a:latin typeface="Calibri"/>
               </a:rPr>
-              <a:t>(In the web app the coordinator keeps 4 helper tools — calculate, search_internet, search_attractions, search_restaurants. The measured run removes them.)</a:t>
+              <a:t>(The web app leaves 4 helper tools on the last agent. The measured run takes them away, so the comparison is clean.)</a:t>
             </a:r>
           </a:p>
         </p:txBody>
@@ -9025,7 +9025,7 @@
                 </a:solidFill>
                 <a:latin typeface="Calibri"/>
               </a:rPr>
-              <a:t>Being honest: D is not more accurate than C — their ranges overlap.</a:t>
+              <a:t>Being honest: D is not more accurate than C. The two overlap.</a:t>
             </a:r>
           </a:p>
           <a:p>
@@ -9041,7 +9041,7 @@
                 </a:solidFill>
                 <a:latin typeface="Calibri"/>
               </a:rPr>
-              <a:t>What D is: 1.7x cheaper than C and 15x cheaper than B, with no drop in accuracy.</a:t>
+              <a:t>What D is: 1.7x cheaper than C, 15x cheaper than B, and just as accurate.</a:t>
             </a:r>
           </a:p>
         </p:txBody>
@@ -9137,7 +9137,7 @@
                 </a:solidFill>
                 <a:latin typeface="Calibri"/>
               </a:rPr>
-              <a:t>And the check that stops an impossible trip</a:t>
+              <a:t>And the check that stops a trip nobody could afford</a:t>
             </a:r>
           </a:p>
         </p:txBody>
@@ -9674,7 +9674,7 @@
                 </a:solidFill>
                 <a:latin typeface="Calibri"/>
               </a:rPr>
-              <a:t>1.  Without tools, AI makes travel prices up. Tools are essential.</a:t>
+              <a:t>1.  With no tools, AI makes prices up. Tools are essential.</a:t>
             </a:r>
           </a:p>
           <a:p>
@@ -9690,7 +9690,7 @@
                 </a:solidFill>
                 <a:latin typeface="Calibri"/>
               </a:rPr>
-              <a:t>2.  Setup matters hugely — settings alone saved 89% of the cost.</a:t>
+              <a:t>2.  Setup matters. Settings alone saved 89% of the cost.</a:t>
             </a:r>
           </a:p>
           <a:p>
@@ -9706,7 +9706,7 @@
                 </a:solidFill>
                 <a:latin typeface="Calibri"/>
               </a:rPr>
-              <a:t>3.  Taking AI out of the searching is cheaper and faster, and just as accurate.</a:t>
+              <a:t>3.  Taking AI out of the searching is cheaper, faster and just as accurate.</a:t>
             </a:r>
           </a:p>
           <a:p>
@@ -9738,7 +9738,7 @@
                 </a:solidFill>
                 <a:latin typeface="Calibri"/>
               </a:rPr>
-              <a:t>Honest gap: only 1 of 20 trips measured for cost, because of the free API limits.</a:t>
+              <a:t>Honest gap: cost was measured on only 1 of 20 trips, because the free APIs ran out.</a:t>
             </a:r>
           </a:p>
         </p:txBody>

--- a/submission/CMP7200_Viva_Presentation.pptx
+++ b/submission/CMP7200_Viva_Presentation.pptx
@@ -4,18 +4,20 @@
   <p:sldMasterIdLst>
     <p:sldMasterId id="2147483648" r:id="rId1"/>
   </p:sldMasterIdLst>
+  <p:notesMasterIdLst>
+    <p:notesMasterId r:id="rId10"/>
+  </p:notesMasterIdLst>
   <p:sldIdLst>
-    <p:sldId id="256" r:id="rId7"/>
-    <p:sldId id="257" r:id="rId9"/>
-    <p:sldId id="258" r:id="rId10"/>
-    <p:sldId id="259" r:id="rId11"/>
-    <p:sldId id="260" r:id="rId12"/>
-    <p:sldId id="261" r:id="rId13"/>
-    <p:sldId id="262" r:id="rId14"/>
-    <p:sldId id="263" r:id="rId15"/>
-    <p:sldId id="264" r:id="rId16"/>
+    <p:sldId id="256" r:id="rId2"/>
+    <p:sldId id="257" r:id="rId3"/>
+    <p:sldId id="258" r:id="rId4"/>
+    <p:sldId id="259" r:id="rId5"/>
+    <p:sldId id="260" r:id="rId6"/>
+    <p:sldId id="261" r:id="rId7"/>
+    <p:sldId id="262" r:id="rId8"/>
+    <p:sldId id="264" r:id="rId9"/>
   </p:sldIdLst>
-  <p:sldSz cx="12191695" cy="6858000" type="screen4x3"/>
+  <p:sldSz cx="12192000" cy="6858000"/>
   <p:notesSz cx="6858000" cy="9144000"/>
   <p:defaultTextStyle>
     <a:defPPr>
@@ -112,11 +114,27 @@
       </a:defRPr>
     </a:lvl9pPr>
   </p:defaultTextStyle>
+  <p:extLst>
+    <p:ext uri="{EFAFB233-063F-42B5-8137-9DF3F51BA10A}">
+      <p15:sldGuideLst xmlns:p15="http://schemas.microsoft.com/office/powerpoint/2012/main">
+        <p15:guide id="1" orient="horz" pos="2160">
+          <p15:clr>
+            <a:srgbClr val="A4A3A4"/>
+          </p15:clr>
+        </p15:guide>
+        <p15:guide id="2" pos="2880">
+          <p15:clr>
+            <a:srgbClr val="A4A3A4"/>
+          </p15:clr>
+        </p15:guide>
+      </p15:sldGuideLst>
+    </p:ext>
+  </p:extLst>
 </p:presentation>
 </file>
 
 <file path=ppt/notesMasters/notesMaster1.xml><?xml version="1.0" encoding="utf-8"?>
-<p:notesMaster xmlns:a="http://schemas.openxmlformats.org/drawingml/2006/main" xmlns:p="http://schemas.openxmlformats.org/presentationml/2006/main" xmlns:r="http://schemas.openxmlformats.org/officeDocument/2006/relationships">
+<p:notesMaster xmlns:a="http://schemas.openxmlformats.org/drawingml/2006/main" xmlns:r="http://schemas.openxmlformats.org/officeDocument/2006/relationships" xmlns:p="http://schemas.openxmlformats.org/presentationml/2006/main">
   <p:cSld>
     <p:bg>
       <p:bgRef idx="1001">
@@ -137,241 +155,16 @@
           <a:chExt cx="0" cy="0"/>
         </a:xfrm>
       </p:grpSpPr>
-      <p:sp>
-        <p:nvSpPr>
-          <p:cNvPr id="2" name="Header Placeholder 1"/>
-          <p:cNvSpPr>
-            <a:spLocks noGrp="1"/>
-          </p:cNvSpPr>
-          <p:nvPr>
-            <p:ph type="hdr" sz="quarter"/>
-          </p:nvPr>
-        </p:nvSpPr>
-        <p:spPr>
-          <a:xfrm>
-            <a:off x="0" y="0"/>
-            <a:ext cx="2971800" cy="457200"/>
-          </a:xfrm>
-          <a:prstGeom prst="rect">
-            <a:avLst/>
-          </a:prstGeom>
-        </p:spPr>
-        <p:txBody>
-          <a:bodyPr vert="horz" lIns="91440" tIns="45720" rIns="91440" bIns="45720" rtlCol="0"/>
-          <a:lstStyle>
-            <a:lvl1pPr algn="l">
-              <a:defRPr sz="1200"/>
-            </a:lvl1pPr>
-          </a:lstStyle>
-          <a:p>
-            <a:endParaRPr lang="en-US"/>
-          </a:p>
-        </p:txBody>
-      </p:sp>
-      <p:sp>
-        <p:nvSpPr>
-          <p:cNvPr id="3" name="Date Placeholder 2"/>
-          <p:cNvSpPr>
-            <a:spLocks noGrp="1"/>
-          </p:cNvSpPr>
-          <p:nvPr>
-            <p:ph type="dt" idx="1"/>
-          </p:nvPr>
-        </p:nvSpPr>
-        <p:spPr>
-          <a:xfrm>
-            <a:off x="3884613" y="0"/>
-            <a:ext cx="2971800" cy="457200"/>
-          </a:xfrm>
-          <a:prstGeom prst="rect">
-            <a:avLst/>
-          </a:prstGeom>
-        </p:spPr>
-        <p:txBody>
-          <a:bodyPr vert="horz" lIns="91440" tIns="45720" rIns="91440" bIns="45720" rtlCol="0"/>
-          <a:lstStyle>
-            <a:lvl1pPr algn="r">
-              <a:defRPr sz="1200"/>
-            </a:lvl1pPr>
-          </a:lstStyle>
-          <a:p>
-            <a:fld id="{0F89C1C7-3DCD-1040-A9CF-14679D8B5DDD}" type="datetimeFigureOut">
-              <a:rPr lang="en-US" smtClean="0"/>
-              <a:t>10/17/16</a:t>
-            </a:fld>
-            <a:endParaRPr lang="en-US"/>
-          </a:p>
-        </p:txBody>
-      </p:sp>
-      <p:sp>
-        <p:nvSpPr>
-          <p:cNvPr id="4" name="Slide Image Placeholder 3"/>
-          <p:cNvSpPr>
-            <a:spLocks noGrp="1" noRot="1" noChangeAspect="1"/>
-          </p:cNvSpPr>
-          <p:nvPr>
-            <p:ph type="sldImg" idx="2"/>
-          </p:nvPr>
-        </p:nvSpPr>
-        <p:spPr>
-          <a:xfrm>
-            <a:off x="1143000" y="685800"/>
-            <a:ext cx="4572000" cy="3429000"/>
-          </a:xfrm>
-          <a:prstGeom prst="rect">
-            <a:avLst/>
-          </a:prstGeom>
-          <a:noFill/>
-          <a:ln w="12700">
-            <a:solidFill>
-              <a:prstClr val="black"/>
-            </a:solidFill>
-          </a:ln>
-        </p:spPr>
-        <p:txBody>
-          <a:bodyPr vert="horz" lIns="91440" tIns="45720" rIns="91440" bIns="45720" rtlCol="0" anchor="ctr"/>
-          <a:lstStyle/>
-          <a:p>
-            <a:endParaRPr lang="en-US"/>
-          </a:p>
-        </p:txBody>
-      </p:sp>
-      <p:sp>
-        <p:nvSpPr>
-          <p:cNvPr id="5" name="Notes Placeholder 4"/>
-          <p:cNvSpPr>
-            <a:spLocks noGrp="1"/>
-          </p:cNvSpPr>
-          <p:nvPr>
-            <p:ph type="body" sz="quarter" idx="3"/>
-          </p:nvPr>
-        </p:nvSpPr>
-        <p:spPr>
-          <a:xfrm>
-            <a:off x="685800" y="4343400"/>
-            <a:ext cx="5486400" cy="4114800"/>
-          </a:xfrm>
-          <a:prstGeom prst="rect">
-            <a:avLst/>
-          </a:prstGeom>
-        </p:spPr>
-        <p:txBody>
-          <a:bodyPr vert="horz" lIns="91440" tIns="45720" rIns="91440" bIns="45720" rtlCol="0"/>
-          <a:lstStyle/>
-          <a:p>
-            <a:pPr lvl="0"/>
-            <a:r>
-              <a:rPr lang="en-US" smtClean="0"/>
-              <a:t>Click to edit Master text styles</a:t>
-            </a:r>
-          </a:p>
-          <a:p>
-            <a:pPr lvl="1"/>
-            <a:r>
-              <a:rPr lang="en-US" smtClean="0"/>
-              <a:t>Second level</a:t>
-            </a:r>
-          </a:p>
-          <a:p>
-            <a:pPr lvl="2"/>
-            <a:r>
-              <a:rPr lang="en-US" smtClean="0"/>
-              <a:t>Third level</a:t>
-            </a:r>
-          </a:p>
-          <a:p>
-            <a:pPr lvl="3"/>
-            <a:r>
-              <a:rPr lang="en-US" smtClean="0"/>
-              <a:t>Fourth level</a:t>
-            </a:r>
-          </a:p>
-          <a:p>
-            <a:pPr lvl="4"/>
-            <a:r>
-              <a:rPr lang="en-US" smtClean="0"/>
-              <a:t>Fifth level</a:t>
-            </a:r>
-            <a:endParaRPr lang="en-US"/>
-          </a:p>
-        </p:txBody>
-      </p:sp>
-      <p:sp>
-        <p:nvSpPr>
-          <p:cNvPr id="6" name="Footer Placeholder 5"/>
-          <p:cNvSpPr>
-            <a:spLocks noGrp="1"/>
-          </p:cNvSpPr>
-          <p:nvPr>
-            <p:ph type="ftr" sz="quarter" idx="4"/>
-          </p:nvPr>
-        </p:nvSpPr>
-        <p:spPr>
-          <a:xfrm>
-            <a:off x="0" y="8685213"/>
-            <a:ext cx="2971800" cy="457200"/>
-          </a:xfrm>
-          <a:prstGeom prst="rect">
-            <a:avLst/>
-          </a:prstGeom>
-        </p:spPr>
-        <p:txBody>
-          <a:bodyPr vert="horz" lIns="91440" tIns="45720" rIns="91440" bIns="45720" rtlCol="0" anchor="b"/>
-          <a:lstStyle>
-            <a:lvl1pPr algn="l">
-              <a:defRPr sz="1200"/>
-            </a:lvl1pPr>
-          </a:lstStyle>
-          <a:p>
-            <a:endParaRPr lang="en-US"/>
-          </a:p>
-        </p:txBody>
-      </p:sp>
-      <p:sp>
-        <p:nvSpPr>
-          <p:cNvPr id="7" name="Slide Number Placeholder 6"/>
-          <p:cNvSpPr>
-            <a:spLocks noGrp="1"/>
-          </p:cNvSpPr>
-          <p:nvPr>
-            <p:ph type="sldNum" sz="quarter" idx="5"/>
-          </p:nvPr>
-        </p:nvSpPr>
-        <p:spPr>
-          <a:xfrm>
-            <a:off x="3884613" y="8685213"/>
-            <a:ext cx="2971800" cy="457200"/>
-          </a:xfrm>
-          <a:prstGeom prst="rect">
-            <a:avLst/>
-          </a:prstGeom>
-        </p:spPr>
-        <p:txBody>
-          <a:bodyPr vert="horz" lIns="91440" tIns="45720" rIns="91440" bIns="45720" rtlCol="0" anchor="b"/>
-          <a:lstStyle>
-            <a:lvl1pPr algn="r">
-              <a:defRPr sz="1200"/>
-            </a:lvl1pPr>
-          </a:lstStyle>
-          <a:p>
-            <a:fld id="{BB5E49A5-4136-284D-997B-48E1D791AD67}" type="slidenum">
-              <a:rPr lang="en-US" smtClean="0"/>
-              <a:t>‹#›</a:t>
-            </a:fld>
-            <a:endParaRPr lang="en-US"/>
-          </a:p>
-        </p:txBody>
-      </p:sp>
     </p:spTree>
     <p:extLst>
       <p:ext uri="{BB962C8B-B14F-4D97-AF65-F5344CB8AC3E}">
-        <p14:creationId xmlns:p14="http://schemas.microsoft.com/office/powerpoint/2010/main" val="2623252185"/>
+        <p14:creationId xmlns:p14="http://schemas.microsoft.com/office/powerpoint/2010/main" val="3157760458"/>
       </p:ext>
     </p:extLst>
   </p:cSld>
   <p:clrMap bg1="lt1" tx1="dk1" bg2="lt2" tx2="dk2" accent1="accent1" accent2="accent2" accent3="accent3" accent4="accent4" accent5="accent5" accent6="accent6" hlink="hlink" folHlink="folHlink"/>
   <p:notesStyle>
-    <a:lvl1pPr marL="0" algn="l" defTabSz="457200" rtl="0" eaLnBrk="1" latinLnBrk="0" hangingPunct="1">
+    <a:lvl1pPr marL="0" algn="l" defTabSz="914400" rtl="0" eaLnBrk="1" latinLnBrk="0" hangingPunct="1">
       <a:defRPr sz="1200" kern="1200">
         <a:solidFill>
           <a:schemeClr val="tx1"/>
@@ -381,7 +174,7 @@
         <a:cs typeface="+mn-cs"/>
       </a:defRPr>
     </a:lvl1pPr>
-    <a:lvl2pPr marL="457200" algn="l" defTabSz="457200" rtl="0" eaLnBrk="1" latinLnBrk="0" hangingPunct="1">
+    <a:lvl2pPr marL="457200" algn="l" defTabSz="914400" rtl="0" eaLnBrk="1" latinLnBrk="0" hangingPunct="1">
       <a:defRPr sz="1200" kern="1200">
         <a:solidFill>
           <a:schemeClr val="tx1"/>
@@ -391,7 +184,7 @@
         <a:cs typeface="+mn-cs"/>
       </a:defRPr>
     </a:lvl2pPr>
-    <a:lvl3pPr marL="914400" algn="l" defTabSz="457200" rtl="0" eaLnBrk="1" latinLnBrk="0" hangingPunct="1">
+    <a:lvl3pPr marL="914400" algn="l" defTabSz="914400" rtl="0" eaLnBrk="1" latinLnBrk="0" hangingPunct="1">
       <a:defRPr sz="1200" kern="1200">
         <a:solidFill>
           <a:schemeClr val="tx1"/>
@@ -401,7 +194,7 @@
         <a:cs typeface="+mn-cs"/>
       </a:defRPr>
     </a:lvl3pPr>
-    <a:lvl4pPr marL="1371600" algn="l" defTabSz="457200" rtl="0" eaLnBrk="1" latinLnBrk="0" hangingPunct="1">
+    <a:lvl4pPr marL="1371600" algn="l" defTabSz="914400" rtl="0" eaLnBrk="1" latinLnBrk="0" hangingPunct="1">
       <a:defRPr sz="1200" kern="1200">
         <a:solidFill>
           <a:schemeClr val="tx1"/>
@@ -411,7 +204,7 @@
         <a:cs typeface="+mn-cs"/>
       </a:defRPr>
     </a:lvl4pPr>
-    <a:lvl5pPr marL="1828800" algn="l" defTabSz="457200" rtl="0" eaLnBrk="1" latinLnBrk="0" hangingPunct="1">
+    <a:lvl5pPr marL="1828800" algn="l" defTabSz="914400" rtl="0" eaLnBrk="1" latinLnBrk="0" hangingPunct="1">
       <a:defRPr sz="1200" kern="1200">
         <a:solidFill>
           <a:schemeClr val="tx1"/>
@@ -421,7 +214,7 @@
         <a:cs typeface="+mn-cs"/>
       </a:defRPr>
     </a:lvl5pPr>
-    <a:lvl6pPr marL="2286000" algn="l" defTabSz="457200" rtl="0" eaLnBrk="1" latinLnBrk="0" hangingPunct="1">
+    <a:lvl6pPr marL="2286000" algn="l" defTabSz="914400" rtl="0" eaLnBrk="1" latinLnBrk="0" hangingPunct="1">
       <a:defRPr sz="1200" kern="1200">
         <a:solidFill>
           <a:schemeClr val="tx1"/>
@@ -431,7 +224,7 @@
         <a:cs typeface="+mn-cs"/>
       </a:defRPr>
     </a:lvl6pPr>
-    <a:lvl7pPr marL="2743200" algn="l" defTabSz="457200" rtl="0" eaLnBrk="1" latinLnBrk="0" hangingPunct="1">
+    <a:lvl7pPr marL="2743200" algn="l" defTabSz="914400" rtl="0" eaLnBrk="1" latinLnBrk="0" hangingPunct="1">
       <a:defRPr sz="1200" kern="1200">
         <a:solidFill>
           <a:schemeClr val="tx1"/>
@@ -441,7 +234,7 @@
         <a:cs typeface="+mn-cs"/>
       </a:defRPr>
     </a:lvl7pPr>
-    <a:lvl8pPr marL="3200400" algn="l" defTabSz="457200" rtl="0" eaLnBrk="1" latinLnBrk="0" hangingPunct="1">
+    <a:lvl8pPr marL="3200400" algn="l" defTabSz="914400" rtl="0" eaLnBrk="1" latinLnBrk="0" hangingPunct="1">
       <a:defRPr sz="1200" kern="1200">
         <a:solidFill>
           <a:schemeClr val="tx1"/>
@@ -451,7 +244,7 @@
         <a:cs typeface="+mn-cs"/>
       </a:defRPr>
     </a:lvl8pPr>
-    <a:lvl9pPr marL="3657600" algn="l" defTabSz="457200" rtl="0" eaLnBrk="1" latinLnBrk="0" hangingPunct="1">
+    <a:lvl9pPr marL="3657600" algn="l" defTabSz="914400" rtl="0" eaLnBrk="1" latinLnBrk="0" hangingPunct="1">
       <a:defRPr sz="1200" kern="1200">
         <a:solidFill>
           <a:schemeClr val="tx1"/>
@@ -466,7 +259,7 @@
 </file>
 
 <file path=ppt/notesSlides/notesSlide1.xml><?xml version="1.0" encoding="utf-8"?>
-<p:notes xmlns:a="http://schemas.openxmlformats.org/drawingml/2006/main" xmlns:p="http://schemas.openxmlformats.org/presentationml/2006/main" xmlns:r="http://schemas.openxmlformats.org/officeDocument/2006/relationships">
+<p:notes xmlns:a="http://schemas.openxmlformats.org/drawingml/2006/main" xmlns:r="http://schemas.openxmlformats.org/officeDocument/2006/relationships" xmlns:p="http://schemas.openxmlformats.org/presentationml/2006/main">
   <p:cSld>
     <p:spTree>
       <p:nvGrpSpPr>
@@ -486,7 +279,7 @@
         <p:nvSpPr>
           <p:cNvPr id="2" name="Slide Image Placeholder 1"/>
           <p:cNvSpPr>
-            <a:spLocks noGrp="1"/>
+            <a:spLocks noGrp="1" noRot="1" noChangeAspect="1"/>
           </p:cNvSpPr>
           <p:nvPr>
             <p:ph type="sldImg" idx="2"/>
@@ -501,7 +294,7 @@
             <a:spLocks noGrp="1"/>
           </p:cNvSpPr>
           <p:nvPr>
-            <p:ph type="body" idx="3" sz="quarter"/>
+            <p:ph type="body" sz="quarter" idx="3"/>
           </p:nvPr>
         </p:nvSpPr>
         <p:spPr/>
@@ -522,7 +315,7 @@
             <a:spLocks noGrp="1"/>
           </p:cNvSpPr>
           <p:nvPr>
-            <p:ph type="sldNum" idx="5" sz="quarter"/>
+            <p:ph type="sldNum" sz="quarter" idx="5"/>
           </p:nvPr>
         </p:nvSpPr>
         <p:spPr/>
@@ -536,7 +329,7 @@
 </file>
 
 <file path=ppt/notesSlides/notesSlide2.xml><?xml version="1.0" encoding="utf-8"?>
-<p:notes xmlns:a="http://schemas.openxmlformats.org/drawingml/2006/main" xmlns:p="http://schemas.openxmlformats.org/presentationml/2006/main" xmlns:r="http://schemas.openxmlformats.org/officeDocument/2006/relationships">
+<p:notes xmlns:a="http://schemas.openxmlformats.org/drawingml/2006/main" xmlns:r="http://schemas.openxmlformats.org/officeDocument/2006/relationships" xmlns:p="http://schemas.openxmlformats.org/presentationml/2006/main">
   <p:cSld>
     <p:spTree>
       <p:nvGrpSpPr>
@@ -556,7 +349,7 @@
         <p:nvSpPr>
           <p:cNvPr id="2" name="Slide Image Placeholder 1"/>
           <p:cNvSpPr>
-            <a:spLocks noGrp="1"/>
+            <a:spLocks noGrp="1" noRot="1" noChangeAspect="1"/>
           </p:cNvSpPr>
           <p:nvPr>
             <p:ph type="sldImg" idx="2"/>
@@ -571,7 +364,7 @@
             <a:spLocks noGrp="1"/>
           </p:cNvSpPr>
           <p:nvPr>
-            <p:ph type="body" idx="3" sz="quarter"/>
+            <p:ph type="body" sz="quarter" idx="3"/>
           </p:nvPr>
         </p:nvSpPr>
         <p:spPr/>
@@ -592,7 +385,7 @@
             <a:spLocks noGrp="1"/>
           </p:cNvSpPr>
           <p:nvPr>
-            <p:ph type="sldNum" idx="5" sz="quarter"/>
+            <p:ph type="sldNum" sz="quarter" idx="5"/>
           </p:nvPr>
         </p:nvSpPr>
         <p:spPr/>
@@ -606,7 +399,7 @@
 </file>
 
 <file path=ppt/notesSlides/notesSlide3.xml><?xml version="1.0" encoding="utf-8"?>
-<p:notes xmlns:a="http://schemas.openxmlformats.org/drawingml/2006/main" xmlns:p="http://schemas.openxmlformats.org/presentationml/2006/main" xmlns:r="http://schemas.openxmlformats.org/officeDocument/2006/relationships">
+<p:notes xmlns:a="http://schemas.openxmlformats.org/drawingml/2006/main" xmlns:r="http://schemas.openxmlformats.org/officeDocument/2006/relationships" xmlns:p="http://schemas.openxmlformats.org/presentationml/2006/main">
   <p:cSld>
     <p:spTree>
       <p:nvGrpSpPr>
@@ -626,7 +419,7 @@
         <p:nvSpPr>
           <p:cNvPr id="2" name="Slide Image Placeholder 1"/>
           <p:cNvSpPr>
-            <a:spLocks noGrp="1"/>
+            <a:spLocks noGrp="1" noRot="1" noChangeAspect="1"/>
           </p:cNvSpPr>
           <p:nvPr>
             <p:ph type="sldImg" idx="2"/>
@@ -641,7 +434,7 @@
             <a:spLocks noGrp="1"/>
           </p:cNvSpPr>
           <p:nvPr>
-            <p:ph type="body" idx="3" sz="quarter"/>
+            <p:ph type="body" sz="quarter" idx="3"/>
           </p:nvPr>
         </p:nvSpPr>
         <p:spPr/>
@@ -662,7 +455,7 @@
             <a:spLocks noGrp="1"/>
           </p:cNvSpPr>
           <p:nvPr>
-            <p:ph type="sldNum" idx="5" sz="quarter"/>
+            <p:ph type="sldNum" sz="quarter" idx="5"/>
           </p:nvPr>
         </p:nvSpPr>
         <p:spPr/>
@@ -676,7 +469,7 @@
 </file>
 
 <file path=ppt/notesSlides/notesSlide4.xml><?xml version="1.0" encoding="utf-8"?>
-<p:notes xmlns:a="http://schemas.openxmlformats.org/drawingml/2006/main" xmlns:p="http://schemas.openxmlformats.org/presentationml/2006/main" xmlns:r="http://schemas.openxmlformats.org/officeDocument/2006/relationships">
+<p:notes xmlns:a="http://schemas.openxmlformats.org/drawingml/2006/main" xmlns:r="http://schemas.openxmlformats.org/officeDocument/2006/relationships" xmlns:p="http://schemas.openxmlformats.org/presentationml/2006/main">
   <p:cSld>
     <p:spTree>
       <p:nvGrpSpPr>
@@ -696,7 +489,7 @@
         <p:nvSpPr>
           <p:cNvPr id="2" name="Slide Image Placeholder 1"/>
           <p:cNvSpPr>
-            <a:spLocks noGrp="1"/>
+            <a:spLocks noGrp="1" noRot="1" noChangeAspect="1"/>
           </p:cNvSpPr>
           <p:nvPr>
             <p:ph type="sldImg" idx="2"/>
@@ -711,7 +504,7 @@
             <a:spLocks noGrp="1"/>
           </p:cNvSpPr>
           <p:nvPr>
-            <p:ph type="body" idx="3" sz="quarter"/>
+            <p:ph type="body" sz="quarter" idx="3"/>
           </p:nvPr>
         </p:nvSpPr>
         <p:spPr/>
@@ -732,7 +525,7 @@
             <a:spLocks noGrp="1"/>
           </p:cNvSpPr>
           <p:nvPr>
-            <p:ph type="sldNum" idx="5" sz="quarter"/>
+            <p:ph type="sldNum" sz="quarter" idx="5"/>
           </p:nvPr>
         </p:nvSpPr>
         <p:spPr/>
@@ -746,7 +539,7 @@
 </file>
 
 <file path=ppt/notesSlides/notesSlide5.xml><?xml version="1.0" encoding="utf-8"?>
-<p:notes xmlns:a="http://schemas.openxmlformats.org/drawingml/2006/main" xmlns:p="http://schemas.openxmlformats.org/presentationml/2006/main" xmlns:r="http://schemas.openxmlformats.org/officeDocument/2006/relationships">
+<p:notes xmlns:a="http://schemas.openxmlformats.org/drawingml/2006/main" xmlns:r="http://schemas.openxmlformats.org/officeDocument/2006/relationships" xmlns:p="http://schemas.openxmlformats.org/presentationml/2006/main">
   <p:cSld>
     <p:spTree>
       <p:nvGrpSpPr>
@@ -766,7 +559,7 @@
         <p:nvSpPr>
           <p:cNvPr id="2" name="Slide Image Placeholder 1"/>
           <p:cNvSpPr>
-            <a:spLocks noGrp="1"/>
+            <a:spLocks noGrp="1" noRot="1" noChangeAspect="1"/>
           </p:cNvSpPr>
           <p:nvPr>
             <p:ph type="sldImg" idx="2"/>
@@ -781,7 +574,7 @@
             <a:spLocks noGrp="1"/>
           </p:cNvSpPr>
           <p:nvPr>
-            <p:ph type="body" idx="3" sz="quarter"/>
+            <p:ph type="body" sz="quarter" idx="3"/>
           </p:nvPr>
         </p:nvSpPr>
         <p:spPr/>
@@ -802,7 +595,7 @@
             <a:spLocks noGrp="1"/>
           </p:cNvSpPr>
           <p:nvPr>
-            <p:ph type="sldNum" idx="5" sz="quarter"/>
+            <p:ph type="sldNum" sz="quarter" idx="5"/>
           </p:nvPr>
         </p:nvSpPr>
         <p:spPr/>
@@ -816,7 +609,7 @@
 </file>
 
 <file path=ppt/notesSlides/notesSlide6.xml><?xml version="1.0" encoding="utf-8"?>
-<p:notes xmlns:a="http://schemas.openxmlformats.org/drawingml/2006/main" xmlns:p="http://schemas.openxmlformats.org/presentationml/2006/main" xmlns:r="http://schemas.openxmlformats.org/officeDocument/2006/relationships">
+<p:notes xmlns:a="http://schemas.openxmlformats.org/drawingml/2006/main" xmlns:r="http://schemas.openxmlformats.org/officeDocument/2006/relationships" xmlns:p="http://schemas.openxmlformats.org/presentationml/2006/main">
   <p:cSld>
     <p:spTree>
       <p:nvGrpSpPr>
@@ -836,7 +629,7 @@
         <p:nvSpPr>
           <p:cNvPr id="2" name="Slide Image Placeholder 1"/>
           <p:cNvSpPr>
-            <a:spLocks noGrp="1"/>
+            <a:spLocks noGrp="1" noRot="1" noChangeAspect="1"/>
           </p:cNvSpPr>
           <p:nvPr>
             <p:ph type="sldImg" idx="2"/>
@@ -851,7 +644,7 @@
             <a:spLocks noGrp="1"/>
           </p:cNvSpPr>
           <p:nvPr>
-            <p:ph type="body" idx="3" sz="quarter"/>
+            <p:ph type="body" sz="quarter" idx="3"/>
           </p:nvPr>
         </p:nvSpPr>
         <p:spPr/>
@@ -872,7 +665,7 @@
             <a:spLocks noGrp="1"/>
           </p:cNvSpPr>
           <p:nvPr>
-            <p:ph type="sldNum" idx="5" sz="quarter"/>
+            <p:ph type="sldNum" sz="quarter" idx="5"/>
           </p:nvPr>
         </p:nvSpPr>
         <p:spPr/>
@@ -886,7 +679,7 @@
 </file>
 
 <file path=ppt/notesSlides/notesSlide7.xml><?xml version="1.0" encoding="utf-8"?>
-<p:notes xmlns:a="http://schemas.openxmlformats.org/drawingml/2006/main" xmlns:p="http://schemas.openxmlformats.org/presentationml/2006/main" xmlns:r="http://schemas.openxmlformats.org/officeDocument/2006/relationships">
+<p:notes xmlns:a="http://schemas.openxmlformats.org/drawingml/2006/main" xmlns:r="http://schemas.openxmlformats.org/officeDocument/2006/relationships" xmlns:p="http://schemas.openxmlformats.org/presentationml/2006/main">
   <p:cSld>
     <p:spTree>
       <p:nvGrpSpPr>
@@ -906,7 +699,7 @@
         <p:nvSpPr>
           <p:cNvPr id="2" name="Slide Image Placeholder 1"/>
           <p:cNvSpPr>
-            <a:spLocks noGrp="1"/>
+            <a:spLocks noGrp="1" noRot="1" noChangeAspect="1"/>
           </p:cNvSpPr>
           <p:nvPr>
             <p:ph type="sldImg" idx="2"/>
@@ -921,7 +714,7 @@
             <a:spLocks noGrp="1"/>
           </p:cNvSpPr>
           <p:nvPr>
-            <p:ph type="body" idx="3" sz="quarter"/>
+            <p:ph type="body" sz="quarter" idx="3"/>
           </p:nvPr>
         </p:nvSpPr>
         <p:spPr/>
@@ -942,7 +735,7 @@
             <a:spLocks noGrp="1"/>
           </p:cNvSpPr>
           <p:nvPr>
-            <p:ph type="sldNum" idx="5" sz="quarter"/>
+            <p:ph type="sldNum" sz="quarter" idx="5"/>
           </p:nvPr>
         </p:nvSpPr>
         <p:spPr/>
@@ -956,7 +749,7 @@
 </file>
 
 <file path=ppt/notesSlides/notesSlide8.xml><?xml version="1.0" encoding="utf-8"?>
-<p:notes xmlns:a="http://schemas.openxmlformats.org/drawingml/2006/main" xmlns:p="http://schemas.openxmlformats.org/presentationml/2006/main" xmlns:r="http://schemas.openxmlformats.org/officeDocument/2006/relationships">
+<p:notes xmlns:a="http://schemas.openxmlformats.org/drawingml/2006/main" xmlns:r="http://schemas.openxmlformats.org/officeDocument/2006/relationships" xmlns:p="http://schemas.openxmlformats.org/presentationml/2006/main">
   <p:cSld>
     <p:spTree>
       <p:nvGrpSpPr>
@@ -976,7 +769,7 @@
         <p:nvSpPr>
           <p:cNvPr id="2" name="Slide Image Placeholder 1"/>
           <p:cNvSpPr>
-            <a:spLocks noGrp="1"/>
+            <a:spLocks noGrp="1" noRot="1" noChangeAspect="1"/>
           </p:cNvSpPr>
           <p:nvPr>
             <p:ph type="sldImg" idx="2"/>
@@ -991,7 +784,7 @@
             <a:spLocks noGrp="1"/>
           </p:cNvSpPr>
           <p:nvPr>
-            <p:ph type="body" idx="3" sz="quarter"/>
+            <p:ph type="body" sz="quarter" idx="3"/>
           </p:nvPr>
         </p:nvSpPr>
         <p:spPr/>
@@ -1000,7 +793,7 @@
           <a:lstStyle/>
           <a:p>
             <a:r>
-              <a:t>Two things worth demonstrating. The seven step rows tick over live as each finishes, so the page never looks frozen. And the budget check: it works out the cheapest this trip could possibly cost, using the real recorded fare rather than a built-in table - the table said $350 and the API returned $734 - then refuses and offers a shorter trip, a bigger budget, or a nearer city.</a:t>
+              <a:t>Three findings from three comparisons: A against the rest shows tools are essential, B against C shows setup matters, C against D shows that removing AI from the searching costs nothing in quality. 403 tests and 30 saved API replies mean anyone can check all of it without an API key.</a:t>
             </a:r>
           </a:p>
         </p:txBody>
@@ -1012,77 +805,7 @@
             <a:spLocks noGrp="1"/>
           </p:cNvSpPr>
           <p:nvPr>
-            <p:ph type="sldNum" idx="5" sz="quarter"/>
-          </p:nvPr>
-        </p:nvSpPr>
-        <p:spPr/>
-      </p:sp>
-    </p:spTree>
-  </p:cSld>
-  <p:clrMapOvr>
-    <a:masterClrMapping/>
-  </p:clrMapOvr>
-</p:notes>
-</file>
-
-<file path=ppt/notesSlides/notesSlide9.xml><?xml version="1.0" encoding="utf-8"?>
-<p:notes xmlns:a="http://schemas.openxmlformats.org/drawingml/2006/main" xmlns:p="http://schemas.openxmlformats.org/presentationml/2006/main" xmlns:r="http://schemas.openxmlformats.org/officeDocument/2006/relationships">
-  <p:cSld>
-    <p:spTree>
-      <p:nvGrpSpPr>
-        <p:cNvPr id="1" name=""/>
-        <p:cNvGrpSpPr/>
-        <p:nvPr/>
-      </p:nvGrpSpPr>
-      <p:grpSpPr>
-        <a:xfrm>
-          <a:off x="0" y="0"/>
-          <a:ext cx="0" cy="0"/>
-          <a:chOff x="0" y="0"/>
-          <a:chExt cx="0" cy="0"/>
-        </a:xfrm>
-      </p:grpSpPr>
-      <p:sp>
-        <p:nvSpPr>
-          <p:cNvPr id="2" name="Slide Image Placeholder 1"/>
-          <p:cNvSpPr>
-            <a:spLocks noGrp="1"/>
-          </p:cNvSpPr>
-          <p:nvPr>
-            <p:ph type="sldImg" idx="2"/>
-          </p:nvPr>
-        </p:nvSpPr>
-        <p:spPr/>
-      </p:sp>
-      <p:sp>
-        <p:nvSpPr>
-          <p:cNvPr id="3" name="Notes Placeholder 2"/>
-          <p:cNvSpPr>
-            <a:spLocks noGrp="1"/>
-          </p:cNvSpPr>
-          <p:nvPr>
-            <p:ph type="body" idx="3" sz="quarter"/>
-          </p:nvPr>
-        </p:nvSpPr>
-        <p:spPr/>
-        <p:txBody>
-          <a:bodyPr/>
-          <a:lstStyle/>
-          <a:p>
-            <a:r>
-              <a:t>Three findings from three comparisons: A against the rest shows tools are essential, B against C shows setup matters, C against D shows that removing AI from the searching costs nothing in quality. 403 tests and 30 saved API replies mean anyone can check all of it without an API key.</a:t>
-            </a:r>
-          </a:p>
-        </p:txBody>
-      </p:sp>
-      <p:sp>
-        <p:nvSpPr>
-          <p:cNvPr id="4" name="Slide Number Placeholder 3"/>
-          <p:cNvSpPr>
-            <a:spLocks noGrp="1"/>
-          </p:cNvSpPr>
-          <p:nvPr>
-            <p:ph type="sldNum" idx="5" sz="quarter"/>
+            <p:ph type="sldNum" sz="quarter" idx="5"/>
           </p:nvPr>
         </p:nvSpPr>
         <p:spPr/>
@@ -1276,7 +999,7 @@
           <a:p>
             <a:fld id="{5BCAD085-E8A6-8845-BD4E-CB4CCA059FC4}" type="datetimeFigureOut">
               <a:rPr lang="en-US" smtClean="0"/>
-              <a:t>1/27/13</a:t>
+              <a:t>9/3/2026</a:t>
             </a:fld>
             <a:endParaRPr lang="en-US"/>
           </a:p>
@@ -1446,7 +1169,7 @@
           <a:p>
             <a:fld id="{5BCAD085-E8A6-8845-BD4E-CB4CCA059FC4}" type="datetimeFigureOut">
               <a:rPr lang="en-US" smtClean="0"/>
-              <a:t>1/27/13</a:t>
+              <a:t>9/3/2026</a:t>
             </a:fld>
             <a:endParaRPr lang="en-US"/>
           </a:p>
@@ -1626,7 +1349,7 @@
           <a:p>
             <a:fld id="{5BCAD085-E8A6-8845-BD4E-CB4CCA059FC4}" type="datetimeFigureOut">
               <a:rPr lang="en-US" smtClean="0"/>
-              <a:t>1/27/13</a:t>
+              <a:t>9/3/2026</a:t>
             </a:fld>
             <a:endParaRPr lang="en-US"/>
           </a:p>
@@ -1796,7 +1519,7 @@
           <a:p>
             <a:fld id="{5BCAD085-E8A6-8845-BD4E-CB4CCA059FC4}" type="datetimeFigureOut">
               <a:rPr lang="en-US" smtClean="0"/>
-              <a:t>1/27/13</a:t>
+              <a:t>9/3/2026</a:t>
             </a:fld>
             <a:endParaRPr lang="en-US"/>
           </a:p>
@@ -2042,7 +1765,7 @@
           <a:p>
             <a:fld id="{5BCAD085-E8A6-8845-BD4E-CB4CCA059FC4}" type="datetimeFigureOut">
               <a:rPr lang="en-US" smtClean="0"/>
-              <a:t>1/27/13</a:t>
+              <a:t>9/3/2026</a:t>
             </a:fld>
             <a:endParaRPr lang="en-US"/>
           </a:p>
@@ -2330,7 +2053,7 @@
           <a:p>
             <a:fld id="{5BCAD085-E8A6-8845-BD4E-CB4CCA059FC4}" type="datetimeFigureOut">
               <a:rPr lang="en-US" smtClean="0"/>
-              <a:t>1/27/13</a:t>
+              <a:t>9/3/2026</a:t>
             </a:fld>
             <a:endParaRPr lang="en-US"/>
           </a:p>
@@ -2752,7 +2475,7 @@
           <a:p>
             <a:fld id="{5BCAD085-E8A6-8845-BD4E-CB4CCA059FC4}" type="datetimeFigureOut">
               <a:rPr lang="en-US" smtClean="0"/>
-              <a:t>1/27/13</a:t>
+              <a:t>9/3/2026</a:t>
             </a:fld>
             <a:endParaRPr lang="en-US"/>
           </a:p>
@@ -2870,7 +2593,7 @@
           <a:p>
             <a:fld id="{5BCAD085-E8A6-8845-BD4E-CB4CCA059FC4}" type="datetimeFigureOut">
               <a:rPr lang="en-US" smtClean="0"/>
-              <a:t>1/27/13</a:t>
+              <a:t>9/3/2026</a:t>
             </a:fld>
             <a:endParaRPr lang="en-US"/>
           </a:p>
@@ -2965,7 +2688,7 @@
           <a:p>
             <a:fld id="{5BCAD085-E8A6-8845-BD4E-CB4CCA059FC4}" type="datetimeFigureOut">
               <a:rPr lang="en-US" smtClean="0"/>
-              <a:t>1/27/13</a:t>
+              <a:t>9/3/2026</a:t>
             </a:fld>
             <a:endParaRPr lang="en-US"/>
           </a:p>
@@ -3242,7 +2965,7 @@
           <a:p>
             <a:fld id="{5BCAD085-E8A6-8845-BD4E-CB4CCA059FC4}" type="datetimeFigureOut">
               <a:rPr lang="en-US" smtClean="0"/>
-              <a:t>1/27/13</a:t>
+              <a:t>9/3/2026</a:t>
             </a:fld>
             <a:endParaRPr lang="en-US"/>
           </a:p>
@@ -3495,7 +3218,7 @@
           <a:p>
             <a:fld id="{5BCAD085-E8A6-8845-BD4E-CB4CCA059FC4}" type="datetimeFigureOut">
               <a:rPr lang="en-US" smtClean="0"/>
-              <a:t>1/27/13</a:t>
+              <a:t>9/3/2026</a:t>
             </a:fld>
             <a:endParaRPr lang="en-US"/>
           </a:p>
@@ -3708,7 +3431,7 @@
           <a:p>
             <a:fld id="{5BCAD085-E8A6-8845-BD4E-CB4CCA059FC4}" type="datetimeFigureOut">
               <a:rPr lang="en-US" smtClean="0"/>
-              <a:t>1/27/13</a:t>
+              <a:t>9/3/2026</a:t>
             </a:fld>
             <a:endParaRPr lang="en-US"/>
           </a:p>
@@ -4067,7 +3790,7 @@
 </file>
 
 <file path=ppt/slides/slide1.xml><?xml version="1.0" encoding="utf-8"?>
-<p:sld xmlns:a="http://schemas.openxmlformats.org/drawingml/2006/main" xmlns:p="http://schemas.openxmlformats.org/presentationml/2006/main" xmlns:r="http://schemas.openxmlformats.org/officeDocument/2006/relationships">
+<p:sld xmlns:a="http://schemas.openxmlformats.org/drawingml/2006/main" xmlns:r="http://schemas.openxmlformats.org/officeDocument/2006/relationships" xmlns:p="http://schemas.openxmlformats.org/presentationml/2006/main">
   <p:cSld>
     <p:bg>
       <p:bgPr>
@@ -4083,7 +3806,14 @@
         <p:cNvGrpSpPr/>
         <p:nvPr/>
       </p:nvGrpSpPr>
-      <p:grpSpPr/>
+      <p:grpSpPr>
+        <a:xfrm>
+          <a:off x="0" y="0"/>
+          <a:ext cx="0" cy="0"/>
+          <a:chOff x="0" y="0"/>
+          <a:chExt cx="0" cy="0"/>
+        </a:xfrm>
+      </p:grpSpPr>
       <p:sp>
         <p:nvSpPr>
           <p:cNvPr id="2" name="TextBox 1"/>
@@ -4242,6 +3972,7 @@
           <a:lstStyle/>
           <a:p>
             <a:pPr algn="ctr"/>
+            <a:endParaRPr/>
           </a:p>
         </p:txBody>
       </p:sp>
@@ -4288,15 +4019,12 @@
                 <a:spcPct val="125000"/>
               </a:lnSpc>
             </a:pPr>
-            <a:r>
-              <a:rPr sz="600" b="0">
-                <a:solidFill>
-                  <a:srgbClr val="FFFFFF"/>
-                </a:solidFill>
-                <a:latin typeface="Calibri"/>
-              </a:rPr>
-              <a:t/>
-            </a:r>
+            <a:endParaRPr sz="1300" b="1">
+              <a:solidFill>
+                <a:srgbClr val="F0B46A"/>
+              </a:solidFill>
+              <a:latin typeface="Calibri"/>
+            </a:endParaRPr>
           </a:p>
           <a:p>
             <a:pPr algn="l">
@@ -4320,15 +4048,12 @@
                 <a:spcPct val="125000"/>
               </a:lnSpc>
             </a:pPr>
-            <a:r>
-              <a:rPr sz="400" b="0">
-                <a:solidFill>
-                  <a:srgbClr val="FFFFFF"/>
-                </a:solidFill>
-                <a:latin typeface="Calibri"/>
-              </a:rPr>
-              <a:t/>
-            </a:r>
+            <a:endParaRPr sz="1700" b="0">
+              <a:solidFill>
+                <a:srgbClr val="FFFFFF"/>
+              </a:solidFill>
+              <a:latin typeface="Calibri"/>
+            </a:endParaRPr>
           </a:p>
           <a:p>
             <a:pPr algn="l">
@@ -4391,15 +4116,12 @@
                 <a:spcPct val="125000"/>
               </a:lnSpc>
             </a:pPr>
-            <a:r>
-              <a:rPr sz="600" b="0">
-                <a:solidFill>
-                  <a:srgbClr val="FFFFFF"/>
-                </a:solidFill>
-                <a:latin typeface="Calibri"/>
-              </a:rPr>
-              <a:t/>
-            </a:r>
+            <a:endParaRPr sz="1300" b="1">
+              <a:solidFill>
+                <a:srgbClr val="6EE7DF"/>
+              </a:solidFill>
+              <a:latin typeface="Calibri"/>
+            </a:endParaRPr>
           </a:p>
           <a:p>
             <a:pPr algn="l">
@@ -4423,15 +4145,12 @@
                 <a:spcPct val="125000"/>
               </a:lnSpc>
             </a:pPr>
-            <a:r>
-              <a:rPr sz="400" b="0">
-                <a:solidFill>
-                  <a:srgbClr val="FFFFFF"/>
-                </a:solidFill>
-                <a:latin typeface="Calibri"/>
-              </a:rPr>
-              <a:t/>
-            </a:r>
+            <a:endParaRPr sz="1700" b="0">
+              <a:solidFill>
+                <a:srgbClr val="FFFFFF"/>
+              </a:solidFill>
+              <a:latin typeface="Calibri"/>
+            </a:endParaRPr>
           </a:p>
           <a:p>
             <a:pPr algn="l">
@@ -4499,7 +4218,7 @@
 </file>
 
 <file path=ppt/slides/slide2.xml><?xml version="1.0" encoding="utf-8"?>
-<p:sld xmlns:a="http://schemas.openxmlformats.org/drawingml/2006/main" xmlns:p="http://schemas.openxmlformats.org/presentationml/2006/main" xmlns:r="http://schemas.openxmlformats.org/officeDocument/2006/relationships">
+<p:sld xmlns:a="http://schemas.openxmlformats.org/drawingml/2006/main" xmlns:r="http://schemas.openxmlformats.org/officeDocument/2006/relationships" xmlns:p="http://schemas.openxmlformats.org/presentationml/2006/main">
   <p:cSld>
     <p:spTree>
       <p:nvGrpSpPr>
@@ -4507,7 +4226,14 @@
         <p:cNvGrpSpPr/>
         <p:nvPr/>
       </p:nvGrpSpPr>
-      <p:grpSpPr/>
+      <p:grpSpPr>
+        <a:xfrm>
+          <a:off x="0" y="0"/>
+          <a:ext cx="0" cy="0"/>
+          <a:chOff x="0" y="0"/>
+          <a:chExt cx="0" cy="0"/>
+        </a:xfrm>
+      </p:grpSpPr>
       <p:sp>
         <p:nvSpPr>
           <p:cNvPr id="2" name="TextBox 1"/>
@@ -4627,6 +4353,7 @@
           <a:lstStyle/>
           <a:p>
             <a:pPr algn="ctr"/>
+            <a:endParaRPr/>
           </a:p>
         </p:txBody>
       </p:sp>
@@ -4649,8 +4376,20 @@
                 <a:tableStyleId>{5C22544A-7EE6-4342-B048-85BDC9FD1C3A}</a:tableStyleId>
               </a:tblPr>
               <a:tblGrid>
-                <a:gridCol w="3894666"/>
-                <a:gridCol w="6620933"/>
+                <a:gridCol w="3894666">
+                  <a:extLst>
+                    <a:ext uri="{9D8B030D-6E8A-4147-A177-3AD203B41FA5}">
+                      <a16:colId xmlns:a16="http://schemas.microsoft.com/office/drawing/2014/main" val="20000"/>
+                    </a:ext>
+                  </a:extLst>
+                </a:gridCol>
+                <a:gridCol w="6620933">
+                  <a:extLst>
+                    <a:ext uri="{9D8B030D-6E8A-4147-A177-3AD203B41FA5}">
+                      <a16:colId xmlns:a16="http://schemas.microsoft.com/office/drawing/2014/main" val="20001"/>
+                    </a:ext>
+                  </a:extLst>
+                </a:gridCol>
               </a:tblGrid>
               <a:tr h="365760">
                 <a:tc>
@@ -4697,6 +4436,11 @@
                     </a:solidFill>
                   </a:tcPr>
                 </a:tc>
+                <a:extLst>
+                  <a:ext uri="{0D108BD9-81ED-4DB2-BD59-A6C34878D82A}">
+                    <a16:rowId xmlns:a16="http://schemas.microsoft.com/office/drawing/2014/main" val="10000"/>
+                  </a:ext>
+                </a:extLst>
               </a:tr>
               <a:tr h="365760">
                 <a:tc>
@@ -4743,6 +4487,11 @@
                     </a:solidFill>
                   </a:tcPr>
                 </a:tc>
+                <a:extLst>
+                  <a:ext uri="{0D108BD9-81ED-4DB2-BD59-A6C34878D82A}">
+                    <a16:rowId xmlns:a16="http://schemas.microsoft.com/office/drawing/2014/main" val="10001"/>
+                  </a:ext>
+                </a:extLst>
               </a:tr>
               <a:tr h="365760">
                 <a:tc>
@@ -4789,6 +4538,11 @@
                     </a:solidFill>
                   </a:tcPr>
                 </a:tc>
+                <a:extLst>
+                  <a:ext uri="{0D108BD9-81ED-4DB2-BD59-A6C34878D82A}">
+                    <a16:rowId xmlns:a16="http://schemas.microsoft.com/office/drawing/2014/main" val="10002"/>
+                  </a:ext>
+                </a:extLst>
               </a:tr>
               <a:tr h="365760">
                 <a:tc>
@@ -4835,6 +4589,11 @@
                     </a:solidFill>
                   </a:tcPr>
                 </a:tc>
+                <a:extLst>
+                  <a:ext uri="{0D108BD9-81ED-4DB2-BD59-A6C34878D82A}">
+                    <a16:rowId xmlns:a16="http://schemas.microsoft.com/office/drawing/2014/main" val="10003"/>
+                  </a:ext>
+                </a:extLst>
               </a:tr>
               <a:tr h="365760">
                 <a:tc>
@@ -4881,6 +4640,11 @@
                     </a:solidFill>
                   </a:tcPr>
                 </a:tc>
+                <a:extLst>
+                  <a:ext uri="{0D108BD9-81ED-4DB2-BD59-A6C34878D82A}">
+                    <a16:rowId xmlns:a16="http://schemas.microsoft.com/office/drawing/2014/main" val="10004"/>
+                  </a:ext>
+                </a:extLst>
               </a:tr>
               <a:tr h="365760">
                 <a:tc>
@@ -4927,6 +4691,11 @@
                     </a:solidFill>
                   </a:tcPr>
                 </a:tc>
+                <a:extLst>
+                  <a:ext uri="{0D108BD9-81ED-4DB2-BD59-A6C34878D82A}">
+                    <a16:rowId xmlns:a16="http://schemas.microsoft.com/office/drawing/2014/main" val="10005"/>
+                  </a:ext>
+                </a:extLst>
               </a:tr>
               <a:tr h="365760">
                 <a:tc>
@@ -4973,6 +4742,11 @@
                     </a:solidFill>
                   </a:tcPr>
                 </a:tc>
+                <a:extLst>
+                  <a:ext uri="{0D108BD9-81ED-4DB2-BD59-A6C34878D82A}">
+                    <a16:rowId xmlns:a16="http://schemas.microsoft.com/office/drawing/2014/main" val="10006"/>
+                  </a:ext>
+                </a:extLst>
               </a:tr>
             </a:tbl>
           </a:graphicData>
@@ -5026,7 +4800,7 @@
 </file>
 
 <file path=ppt/slides/slide3.xml><?xml version="1.0" encoding="utf-8"?>
-<p:sld xmlns:a="http://schemas.openxmlformats.org/drawingml/2006/main" xmlns:p="http://schemas.openxmlformats.org/presentationml/2006/main" xmlns:r="http://schemas.openxmlformats.org/officeDocument/2006/relationships">
+<p:sld xmlns:a="http://schemas.openxmlformats.org/drawingml/2006/main" xmlns:r="http://schemas.openxmlformats.org/officeDocument/2006/relationships" xmlns:p="http://schemas.openxmlformats.org/presentationml/2006/main">
   <p:cSld>
     <p:spTree>
       <p:nvGrpSpPr>
@@ -5034,7 +4808,14 @@
         <p:cNvGrpSpPr/>
         <p:nvPr/>
       </p:nvGrpSpPr>
-      <p:grpSpPr/>
+      <p:grpSpPr>
+        <a:xfrm>
+          <a:off x="0" y="0"/>
+          <a:ext cx="0" cy="0"/>
+          <a:chOff x="0" y="0"/>
+          <a:chExt cx="0" cy="0"/>
+        </a:xfrm>
+      </p:grpSpPr>
       <p:sp>
         <p:nvSpPr>
           <p:cNvPr id="2" name="TextBox 1"/>
@@ -5154,6 +4935,7 @@
           <a:lstStyle/>
           <a:p>
             <a:pPr algn="ctr"/>
+            <a:endParaRPr/>
           </a:p>
         </p:txBody>
       </p:sp>
@@ -5176,9 +4958,27 @@
                 <a:tableStyleId>{5C22544A-7EE6-4342-B048-85BDC9FD1C3A}</a:tableStyleId>
               </a:tblPr>
               <a:tblGrid>
-                <a:gridCol w="4284133"/>
-                <a:gridCol w="2531533"/>
-                <a:gridCol w="3699933"/>
+                <a:gridCol w="4284133">
+                  <a:extLst>
+                    <a:ext uri="{9D8B030D-6E8A-4147-A177-3AD203B41FA5}">
+                      <a16:colId xmlns:a16="http://schemas.microsoft.com/office/drawing/2014/main" val="20000"/>
+                    </a:ext>
+                  </a:extLst>
+                </a:gridCol>
+                <a:gridCol w="2531533">
+                  <a:extLst>
+                    <a:ext uri="{9D8B030D-6E8A-4147-A177-3AD203B41FA5}">
+                      <a16:colId xmlns:a16="http://schemas.microsoft.com/office/drawing/2014/main" val="20001"/>
+                    </a:ext>
+                  </a:extLst>
+                </a:gridCol>
+                <a:gridCol w="3699933">
+                  <a:extLst>
+                    <a:ext uri="{9D8B030D-6E8A-4147-A177-3AD203B41FA5}">
+                      <a16:colId xmlns:a16="http://schemas.microsoft.com/office/drawing/2014/main" val="20002"/>
+                    </a:ext>
+                  </a:extLst>
+                </a:gridCol>
               </a:tblGrid>
               <a:tr h="365760">
                 <a:tc>
@@ -5247,6 +5047,11 @@
                     </a:solidFill>
                   </a:tcPr>
                 </a:tc>
+                <a:extLst>
+                  <a:ext uri="{0D108BD9-81ED-4DB2-BD59-A6C34878D82A}">
+                    <a16:rowId xmlns:a16="http://schemas.microsoft.com/office/drawing/2014/main" val="10000"/>
+                  </a:ext>
+                </a:extLst>
               </a:tr>
               <a:tr h="365760">
                 <a:tc>
@@ -5315,6 +5120,11 @@
                     </a:solidFill>
                   </a:tcPr>
                 </a:tc>
+                <a:extLst>
+                  <a:ext uri="{0D108BD9-81ED-4DB2-BD59-A6C34878D82A}">
+                    <a16:rowId xmlns:a16="http://schemas.microsoft.com/office/drawing/2014/main" val="10001"/>
+                  </a:ext>
+                </a:extLst>
               </a:tr>
             </a:tbl>
           </a:graphicData>
@@ -5680,7 +5490,7 @@
 </file>
 
 <file path=ppt/slides/slide4.xml><?xml version="1.0" encoding="utf-8"?>
-<p:sld xmlns:a="http://schemas.openxmlformats.org/drawingml/2006/main" xmlns:p="http://schemas.openxmlformats.org/presentationml/2006/main" xmlns:r="http://schemas.openxmlformats.org/officeDocument/2006/relationships">
+<p:sld xmlns:a="http://schemas.openxmlformats.org/drawingml/2006/main" xmlns:r="http://schemas.openxmlformats.org/officeDocument/2006/relationships" xmlns:p="http://schemas.openxmlformats.org/presentationml/2006/main">
   <p:cSld>
     <p:spTree>
       <p:nvGrpSpPr>
@@ -5688,7 +5498,14 @@
         <p:cNvGrpSpPr/>
         <p:nvPr/>
       </p:nvGrpSpPr>
-      <p:grpSpPr/>
+      <p:grpSpPr>
+        <a:xfrm>
+          <a:off x="0" y="0"/>
+          <a:ext cx="0" cy="0"/>
+          <a:chOff x="0" y="0"/>
+          <a:chExt cx="0" cy="0"/>
+        </a:xfrm>
+      </p:grpSpPr>
       <p:sp>
         <p:nvSpPr>
           <p:cNvPr id="2" name="TextBox 1"/>
@@ -5808,6 +5625,7 @@
           <a:lstStyle/>
           <a:p>
             <a:pPr algn="ctr"/>
+            <a:endParaRPr/>
           </a:p>
         </p:txBody>
       </p:sp>
@@ -5821,7 +5639,7 @@
         </p:nvGraphicFramePr>
         <p:xfrm>
           <a:off x="822960" y="1874519"/>
-          <a:ext cx="10515599" cy="2560320"/>
+          <a:ext cx="10515599" cy="2621280"/>
         </p:xfrm>
         <a:graphic>
           <a:graphicData uri="http://schemas.openxmlformats.org/drawingml/2006/table">
@@ -5830,9 +5648,27 @@
                 <a:tableStyleId>{5C22544A-7EE6-4342-B048-85BDC9FD1C3A}</a:tableStyleId>
               </a:tblPr>
               <a:tblGrid>
-                <a:gridCol w="3059083"/>
-                <a:gridCol w="860367"/>
-                <a:gridCol w="6596149"/>
+                <a:gridCol w="3059083">
+                  <a:extLst>
+                    <a:ext uri="{9D8B030D-6E8A-4147-A177-3AD203B41FA5}">
+                      <a16:colId xmlns:a16="http://schemas.microsoft.com/office/drawing/2014/main" val="20000"/>
+                    </a:ext>
+                  </a:extLst>
+                </a:gridCol>
+                <a:gridCol w="860367">
+                  <a:extLst>
+                    <a:ext uri="{9D8B030D-6E8A-4147-A177-3AD203B41FA5}">
+                      <a16:colId xmlns:a16="http://schemas.microsoft.com/office/drawing/2014/main" val="20001"/>
+                    </a:ext>
+                  </a:extLst>
+                </a:gridCol>
+                <a:gridCol w="6596149">
+                  <a:extLst>
+                    <a:ext uri="{9D8B030D-6E8A-4147-A177-3AD203B41FA5}">
+                      <a16:colId xmlns:a16="http://schemas.microsoft.com/office/drawing/2014/main" val="20002"/>
+                    </a:ext>
+                  </a:extLst>
+                </a:gridCol>
               </a:tblGrid>
               <a:tr h="365760">
                 <a:tc>
@@ -5901,6 +5737,11 @@
                     </a:solidFill>
                   </a:tcPr>
                 </a:tc>
+                <a:extLst>
+                  <a:ext uri="{0D108BD9-81ED-4DB2-BD59-A6C34878D82A}">
+                    <a16:rowId xmlns:a16="http://schemas.microsoft.com/office/drawing/2014/main" val="10000"/>
+                  </a:ext>
+                </a:extLst>
               </a:tr>
               <a:tr h="365760">
                 <a:tc>
@@ -5969,6 +5810,11 @@
                     </a:solidFill>
                   </a:tcPr>
                 </a:tc>
+                <a:extLst>
+                  <a:ext uri="{0D108BD9-81ED-4DB2-BD59-A6C34878D82A}">
+                    <a16:rowId xmlns:a16="http://schemas.microsoft.com/office/drawing/2014/main" val="10001"/>
+                  </a:ext>
+                </a:extLst>
               </a:tr>
               <a:tr h="365760">
                 <a:tc>
@@ -6037,6 +5883,11 @@
                     </a:solidFill>
                   </a:tcPr>
                 </a:tc>
+                <a:extLst>
+                  <a:ext uri="{0D108BD9-81ED-4DB2-BD59-A6C34878D82A}">
+                    <a16:rowId xmlns:a16="http://schemas.microsoft.com/office/drawing/2014/main" val="10002"/>
+                  </a:ext>
+                </a:extLst>
               </a:tr>
               <a:tr h="365760">
                 <a:tc>
@@ -6105,6 +5956,11 @@
                     </a:solidFill>
                   </a:tcPr>
                 </a:tc>
+                <a:extLst>
+                  <a:ext uri="{0D108BD9-81ED-4DB2-BD59-A6C34878D82A}">
+                    <a16:rowId xmlns:a16="http://schemas.microsoft.com/office/drawing/2014/main" val="10003"/>
+                  </a:ext>
+                </a:extLst>
               </a:tr>
               <a:tr h="365760">
                 <a:tc>
@@ -6173,6 +6029,11 @@
                     </a:solidFill>
                   </a:tcPr>
                 </a:tc>
+                <a:extLst>
+                  <a:ext uri="{0D108BD9-81ED-4DB2-BD59-A6C34878D82A}">
+                    <a16:rowId xmlns:a16="http://schemas.microsoft.com/office/drawing/2014/main" val="10004"/>
+                  </a:ext>
+                </a:extLst>
               </a:tr>
               <a:tr h="365760">
                 <a:tc>
@@ -6241,6 +6102,11 @@
                     </a:solidFill>
                   </a:tcPr>
                 </a:tc>
+                <a:extLst>
+                  <a:ext uri="{0D108BD9-81ED-4DB2-BD59-A6C34878D82A}">
+                    <a16:rowId xmlns:a16="http://schemas.microsoft.com/office/drawing/2014/main" val="10005"/>
+                  </a:ext>
+                </a:extLst>
               </a:tr>
               <a:tr h="365760">
                 <a:tc>
@@ -6309,6 +6175,11 @@
                     </a:solidFill>
                   </a:tcPr>
                 </a:tc>
+                <a:extLst>
+                  <a:ext uri="{0D108BD9-81ED-4DB2-BD59-A6C34878D82A}">
+                    <a16:rowId xmlns:a16="http://schemas.microsoft.com/office/drawing/2014/main" val="10006"/>
+                  </a:ext>
+                </a:extLst>
               </a:tr>
             </a:tbl>
           </a:graphicData>
@@ -6394,7 +6265,7 @@
 </file>
 
 <file path=ppt/slides/slide5.xml><?xml version="1.0" encoding="utf-8"?>
-<p:sld xmlns:a="http://schemas.openxmlformats.org/drawingml/2006/main" xmlns:p="http://schemas.openxmlformats.org/presentationml/2006/main" xmlns:r="http://schemas.openxmlformats.org/officeDocument/2006/relationships">
+<p:sld xmlns:a="http://schemas.openxmlformats.org/drawingml/2006/main" xmlns:r="http://schemas.openxmlformats.org/officeDocument/2006/relationships" xmlns:p="http://schemas.openxmlformats.org/presentationml/2006/main">
   <p:cSld>
     <p:spTree>
       <p:nvGrpSpPr>
@@ -6402,7 +6273,14 @@
         <p:cNvGrpSpPr/>
         <p:nvPr/>
       </p:nvGrpSpPr>
-      <p:grpSpPr/>
+      <p:grpSpPr>
+        <a:xfrm>
+          <a:off x="0" y="0"/>
+          <a:ext cx="0" cy="0"/>
+          <a:chOff x="0" y="0"/>
+          <a:chExt cx="0" cy="0"/>
+        </a:xfrm>
+      </p:grpSpPr>
       <p:sp>
         <p:nvSpPr>
           <p:cNvPr id="2" name="TextBox 1"/>
@@ -6522,6 +6400,7 @@
           <a:lstStyle/>
           <a:p>
             <a:pPr algn="ctr"/>
+            <a:endParaRPr/>
           </a:p>
         </p:txBody>
       </p:sp>
@@ -6544,9 +6423,27 @@
                 <a:tableStyleId>{5C22544A-7EE6-4342-B048-85BDC9FD1C3A}</a:tableStyleId>
               </a:tblPr>
               <a:tblGrid>
-                <a:gridCol w="3059083"/>
-                <a:gridCol w="860367"/>
-                <a:gridCol w="6596149"/>
+                <a:gridCol w="3059083">
+                  <a:extLst>
+                    <a:ext uri="{9D8B030D-6E8A-4147-A177-3AD203B41FA5}">
+                      <a16:colId xmlns:a16="http://schemas.microsoft.com/office/drawing/2014/main" val="20000"/>
+                    </a:ext>
+                  </a:extLst>
+                </a:gridCol>
+                <a:gridCol w="860367">
+                  <a:extLst>
+                    <a:ext uri="{9D8B030D-6E8A-4147-A177-3AD203B41FA5}">
+                      <a16:colId xmlns:a16="http://schemas.microsoft.com/office/drawing/2014/main" val="20001"/>
+                    </a:ext>
+                  </a:extLst>
+                </a:gridCol>
+                <a:gridCol w="6596149">
+                  <a:extLst>
+                    <a:ext uri="{9D8B030D-6E8A-4147-A177-3AD203B41FA5}">
+                      <a16:colId xmlns:a16="http://schemas.microsoft.com/office/drawing/2014/main" val="20002"/>
+                    </a:ext>
+                  </a:extLst>
+                </a:gridCol>
               </a:tblGrid>
               <a:tr h="365760">
                 <a:tc>
@@ -6615,6 +6512,11 @@
                     </a:solidFill>
                   </a:tcPr>
                 </a:tc>
+                <a:extLst>
+                  <a:ext uri="{0D108BD9-81ED-4DB2-BD59-A6C34878D82A}">
+                    <a16:rowId xmlns:a16="http://schemas.microsoft.com/office/drawing/2014/main" val="10000"/>
+                  </a:ext>
+                </a:extLst>
               </a:tr>
               <a:tr h="365760">
                 <a:tc>
@@ -6683,6 +6585,11 @@
                     </a:solidFill>
                   </a:tcPr>
                 </a:tc>
+                <a:extLst>
+                  <a:ext uri="{0D108BD9-81ED-4DB2-BD59-A6C34878D82A}">
+                    <a16:rowId xmlns:a16="http://schemas.microsoft.com/office/drawing/2014/main" val="10001"/>
+                  </a:ext>
+                </a:extLst>
               </a:tr>
               <a:tr h="365760">
                 <a:tc>
@@ -6751,6 +6658,11 @@
                     </a:solidFill>
                   </a:tcPr>
                 </a:tc>
+                <a:extLst>
+                  <a:ext uri="{0D108BD9-81ED-4DB2-BD59-A6C34878D82A}">
+                    <a16:rowId xmlns:a16="http://schemas.microsoft.com/office/drawing/2014/main" val="10002"/>
+                  </a:ext>
+                </a:extLst>
               </a:tr>
               <a:tr h="365760">
                 <a:tc>
@@ -6819,6 +6731,11 @@
                     </a:solidFill>
                   </a:tcPr>
                 </a:tc>
+                <a:extLst>
+                  <a:ext uri="{0D108BD9-81ED-4DB2-BD59-A6C34878D82A}">
+                    <a16:rowId xmlns:a16="http://schemas.microsoft.com/office/drawing/2014/main" val="10003"/>
+                  </a:ext>
+                </a:extLst>
               </a:tr>
               <a:tr h="365760">
                 <a:tc>
@@ -6887,6 +6804,11 @@
                     </a:solidFill>
                   </a:tcPr>
                 </a:tc>
+                <a:extLst>
+                  <a:ext uri="{0D108BD9-81ED-4DB2-BD59-A6C34878D82A}">
+                    <a16:rowId xmlns:a16="http://schemas.microsoft.com/office/drawing/2014/main" val="10004"/>
+                  </a:ext>
+                </a:extLst>
               </a:tr>
               <a:tr h="365760">
                 <a:tc>
@@ -6955,6 +6877,11 @@
                     </a:solidFill>
                   </a:tcPr>
                 </a:tc>
+                <a:extLst>
+                  <a:ext uri="{0D108BD9-81ED-4DB2-BD59-A6C34878D82A}">
+                    <a16:rowId xmlns:a16="http://schemas.microsoft.com/office/drawing/2014/main" val="10005"/>
+                  </a:ext>
+                </a:extLst>
               </a:tr>
               <a:tr h="365760">
                 <a:tc>
@@ -7023,6 +6950,11 @@
                     </a:solidFill>
                   </a:tcPr>
                 </a:tc>
+                <a:extLst>
+                  <a:ext uri="{0D108BD9-81ED-4DB2-BD59-A6C34878D82A}">
+                    <a16:rowId xmlns:a16="http://schemas.microsoft.com/office/drawing/2014/main" val="10006"/>
+                  </a:ext>
+                </a:extLst>
               </a:tr>
             </a:tbl>
           </a:graphicData>
@@ -7124,7 +7056,7 @@
 </file>
 
 <file path=ppt/slides/slide6.xml><?xml version="1.0" encoding="utf-8"?>
-<p:sld xmlns:a="http://schemas.openxmlformats.org/drawingml/2006/main" xmlns:p="http://schemas.openxmlformats.org/presentationml/2006/main" xmlns:r="http://schemas.openxmlformats.org/officeDocument/2006/relationships">
+<p:sld xmlns:a="http://schemas.openxmlformats.org/drawingml/2006/main" xmlns:r="http://schemas.openxmlformats.org/officeDocument/2006/relationships" xmlns:p="http://schemas.openxmlformats.org/presentationml/2006/main">
   <p:cSld>
     <p:spTree>
       <p:nvGrpSpPr>
@@ -7132,7 +7064,14 @@
         <p:cNvGrpSpPr/>
         <p:nvPr/>
       </p:nvGrpSpPr>
-      <p:grpSpPr/>
+      <p:grpSpPr>
+        <a:xfrm>
+          <a:off x="0" y="0"/>
+          <a:ext cx="0" cy="0"/>
+          <a:chOff x="0" y="0"/>
+          <a:chExt cx="0" cy="0"/>
+        </a:xfrm>
+      </p:grpSpPr>
       <p:sp>
         <p:nvSpPr>
           <p:cNvPr id="2" name="TextBox 1"/>
@@ -7252,6 +7191,7 @@
           <a:lstStyle/>
           <a:p>
             <a:pPr algn="ctr"/>
+            <a:endParaRPr/>
           </a:p>
         </p:txBody>
       </p:sp>
@@ -7274,9 +7214,27 @@
                 <a:tableStyleId>{5C22544A-7EE6-4342-B048-85BDC9FD1C3A}</a:tableStyleId>
               </a:tblPr>
               <a:tblGrid>
-                <a:gridCol w="3059083"/>
-                <a:gridCol w="860367"/>
-                <a:gridCol w="6596149"/>
+                <a:gridCol w="3059083">
+                  <a:extLst>
+                    <a:ext uri="{9D8B030D-6E8A-4147-A177-3AD203B41FA5}">
+                      <a16:colId xmlns:a16="http://schemas.microsoft.com/office/drawing/2014/main" val="20000"/>
+                    </a:ext>
+                  </a:extLst>
+                </a:gridCol>
+                <a:gridCol w="860367">
+                  <a:extLst>
+                    <a:ext uri="{9D8B030D-6E8A-4147-A177-3AD203B41FA5}">
+                      <a16:colId xmlns:a16="http://schemas.microsoft.com/office/drawing/2014/main" val="20001"/>
+                    </a:ext>
+                  </a:extLst>
+                </a:gridCol>
+                <a:gridCol w="6596149">
+                  <a:extLst>
+                    <a:ext uri="{9D8B030D-6E8A-4147-A177-3AD203B41FA5}">
+                      <a16:colId xmlns:a16="http://schemas.microsoft.com/office/drawing/2014/main" val="20002"/>
+                    </a:ext>
+                  </a:extLst>
+                </a:gridCol>
               </a:tblGrid>
               <a:tr h="365760">
                 <a:tc>
@@ -7345,6 +7303,11 @@
                     </a:solidFill>
                   </a:tcPr>
                 </a:tc>
+                <a:extLst>
+                  <a:ext uri="{0D108BD9-81ED-4DB2-BD59-A6C34878D82A}">
+                    <a16:rowId xmlns:a16="http://schemas.microsoft.com/office/drawing/2014/main" val="10000"/>
+                  </a:ext>
+                </a:extLst>
               </a:tr>
               <a:tr h="365760">
                 <a:tc>
@@ -7413,6 +7376,11 @@
                     </a:solidFill>
                   </a:tcPr>
                 </a:tc>
+                <a:extLst>
+                  <a:ext uri="{0D108BD9-81ED-4DB2-BD59-A6C34878D82A}">
+                    <a16:rowId xmlns:a16="http://schemas.microsoft.com/office/drawing/2014/main" val="10001"/>
+                  </a:ext>
+                </a:extLst>
               </a:tr>
               <a:tr h="365760">
                 <a:tc>
@@ -7481,6 +7449,11 @@
                     </a:solidFill>
                   </a:tcPr>
                 </a:tc>
+                <a:extLst>
+                  <a:ext uri="{0D108BD9-81ED-4DB2-BD59-A6C34878D82A}">
+                    <a16:rowId xmlns:a16="http://schemas.microsoft.com/office/drawing/2014/main" val="10002"/>
+                  </a:ext>
+                </a:extLst>
               </a:tr>
               <a:tr h="365760">
                 <a:tc>
@@ -7549,6 +7522,11 @@
                     </a:solidFill>
                   </a:tcPr>
                 </a:tc>
+                <a:extLst>
+                  <a:ext uri="{0D108BD9-81ED-4DB2-BD59-A6C34878D82A}">
+                    <a16:rowId xmlns:a16="http://schemas.microsoft.com/office/drawing/2014/main" val="10003"/>
+                  </a:ext>
+                </a:extLst>
               </a:tr>
               <a:tr h="365760">
                 <a:tc>
@@ -7617,6 +7595,11 @@
                     </a:solidFill>
                   </a:tcPr>
                 </a:tc>
+                <a:extLst>
+                  <a:ext uri="{0D108BD9-81ED-4DB2-BD59-A6C34878D82A}">
+                    <a16:rowId xmlns:a16="http://schemas.microsoft.com/office/drawing/2014/main" val="10004"/>
+                  </a:ext>
+                </a:extLst>
               </a:tr>
             </a:tbl>
           </a:graphicData>
@@ -7920,7 +7903,7 @@
 </file>
 
 <file path=ppt/slides/slide7.xml><?xml version="1.0" encoding="utf-8"?>
-<p:sld xmlns:a="http://schemas.openxmlformats.org/drawingml/2006/main" xmlns:p="http://schemas.openxmlformats.org/presentationml/2006/main" xmlns:r="http://schemas.openxmlformats.org/officeDocument/2006/relationships">
+<p:sld xmlns:a="http://schemas.openxmlformats.org/drawingml/2006/main" xmlns:r="http://schemas.openxmlformats.org/officeDocument/2006/relationships" xmlns:p="http://schemas.openxmlformats.org/presentationml/2006/main">
   <p:cSld>
     <p:spTree>
       <p:nvGrpSpPr>
@@ -7928,7 +7911,14 @@
         <p:cNvGrpSpPr/>
         <p:nvPr/>
       </p:nvGrpSpPr>
-      <p:grpSpPr/>
+      <p:grpSpPr>
+        <a:xfrm>
+          <a:off x="0" y="0"/>
+          <a:ext cx="0" cy="0"/>
+          <a:chOff x="0" y="0"/>
+          <a:chExt cx="0" cy="0"/>
+        </a:xfrm>
+      </p:grpSpPr>
       <p:sp>
         <p:nvSpPr>
           <p:cNvPr id="2" name="TextBox 1"/>
@@ -8048,6 +8038,7 @@
           <a:lstStyle/>
           <a:p>
             <a:pPr algn="ctr"/>
+            <a:endParaRPr/>
           </a:p>
         </p:txBody>
       </p:sp>
@@ -8061,7 +8052,7 @@
         </p:nvGraphicFramePr>
         <p:xfrm>
           <a:off x="822960" y="1874519"/>
-          <a:ext cx="10515597" cy="2926080"/>
+          <a:ext cx="10515597" cy="3124200"/>
         </p:xfrm>
         <a:graphic>
           <a:graphicData uri="http://schemas.openxmlformats.org/drawingml/2006/table">
@@ -8070,11 +8061,41 @@
                 <a:tableStyleId>{5C22544A-7EE6-4342-B048-85BDC9FD1C3A}</a:tableStyleId>
               </a:tblPr>
               <a:tblGrid>
-                <a:gridCol w="2816678"/>
-                <a:gridCol w="1877785"/>
-                <a:gridCol w="1877785"/>
-                <a:gridCol w="1877785"/>
-                <a:gridCol w="2065564"/>
+                <a:gridCol w="2816678">
+                  <a:extLst>
+                    <a:ext uri="{9D8B030D-6E8A-4147-A177-3AD203B41FA5}">
+                      <a16:colId xmlns:a16="http://schemas.microsoft.com/office/drawing/2014/main" val="20000"/>
+                    </a:ext>
+                  </a:extLst>
+                </a:gridCol>
+                <a:gridCol w="1877785">
+                  <a:extLst>
+                    <a:ext uri="{9D8B030D-6E8A-4147-A177-3AD203B41FA5}">
+                      <a16:colId xmlns:a16="http://schemas.microsoft.com/office/drawing/2014/main" val="20001"/>
+                    </a:ext>
+                  </a:extLst>
+                </a:gridCol>
+                <a:gridCol w="1877785">
+                  <a:extLst>
+                    <a:ext uri="{9D8B030D-6E8A-4147-A177-3AD203B41FA5}">
+                      <a16:colId xmlns:a16="http://schemas.microsoft.com/office/drawing/2014/main" val="20002"/>
+                    </a:ext>
+                  </a:extLst>
+                </a:gridCol>
+                <a:gridCol w="1877785">
+                  <a:extLst>
+                    <a:ext uri="{9D8B030D-6E8A-4147-A177-3AD203B41FA5}">
+                      <a16:colId xmlns:a16="http://schemas.microsoft.com/office/drawing/2014/main" val="20003"/>
+                    </a:ext>
+                  </a:extLst>
+                </a:gridCol>
+                <a:gridCol w="2065564">
+                  <a:extLst>
+                    <a:ext uri="{9D8B030D-6E8A-4147-A177-3AD203B41FA5}">
+                      <a16:colId xmlns:a16="http://schemas.microsoft.com/office/drawing/2014/main" val="20004"/>
+                    </a:ext>
+                  </a:extLst>
+                </a:gridCol>
               </a:tblGrid>
               <a:tr h="365760">
                 <a:tc>
@@ -8187,6 +8208,11 @@
                     </a:solidFill>
                   </a:tcPr>
                 </a:tc>
+                <a:extLst>
+                  <a:ext uri="{0D108BD9-81ED-4DB2-BD59-A6C34878D82A}">
+                    <a16:rowId xmlns:a16="http://schemas.microsoft.com/office/drawing/2014/main" val="10000"/>
+                  </a:ext>
+                </a:extLst>
               </a:tr>
               <a:tr h="365760">
                 <a:tc>
@@ -8299,6 +8325,11 @@
                     </a:solidFill>
                   </a:tcPr>
                 </a:tc>
+                <a:extLst>
+                  <a:ext uri="{0D108BD9-81ED-4DB2-BD59-A6C34878D82A}">
+                    <a16:rowId xmlns:a16="http://schemas.microsoft.com/office/drawing/2014/main" val="10001"/>
+                  </a:ext>
+                </a:extLst>
               </a:tr>
               <a:tr h="365760">
                 <a:tc>
@@ -8426,6 +8457,11 @@
                     </a:solidFill>
                   </a:tcPr>
                 </a:tc>
+                <a:extLst>
+                  <a:ext uri="{0D108BD9-81ED-4DB2-BD59-A6C34878D82A}">
+                    <a16:rowId xmlns:a16="http://schemas.microsoft.com/office/drawing/2014/main" val="10002"/>
+                  </a:ext>
+                </a:extLst>
               </a:tr>
               <a:tr h="365760">
                 <a:tc>
@@ -8538,6 +8574,11 @@
                     </a:solidFill>
                   </a:tcPr>
                 </a:tc>
+                <a:extLst>
+                  <a:ext uri="{0D108BD9-81ED-4DB2-BD59-A6C34878D82A}">
+                    <a16:rowId xmlns:a16="http://schemas.microsoft.com/office/drawing/2014/main" val="10003"/>
+                  </a:ext>
+                </a:extLst>
               </a:tr>
               <a:tr h="365760">
                 <a:tc>
@@ -8650,6 +8691,11 @@
                     </a:solidFill>
                   </a:tcPr>
                 </a:tc>
+                <a:extLst>
+                  <a:ext uri="{0D108BD9-81ED-4DB2-BD59-A6C34878D82A}">
+                    <a16:rowId xmlns:a16="http://schemas.microsoft.com/office/drawing/2014/main" val="10004"/>
+                  </a:ext>
+                </a:extLst>
               </a:tr>
               <a:tr h="365760">
                 <a:tc>
@@ -8762,6 +8808,11 @@
                     </a:solidFill>
                   </a:tcPr>
                 </a:tc>
+                <a:extLst>
+                  <a:ext uri="{0D108BD9-81ED-4DB2-BD59-A6C34878D82A}">
+                    <a16:rowId xmlns:a16="http://schemas.microsoft.com/office/drawing/2014/main" val="10005"/>
+                  </a:ext>
+                </a:extLst>
               </a:tr>
               <a:tr h="365760">
                 <a:tc>
@@ -8874,6 +8925,11 @@
                     </a:solidFill>
                   </a:tcPr>
                 </a:tc>
+                <a:extLst>
+                  <a:ext uri="{0D108BD9-81ED-4DB2-BD59-A6C34878D82A}">
+                    <a16:rowId xmlns:a16="http://schemas.microsoft.com/office/drawing/2014/main" val="10006"/>
+                  </a:ext>
+                </a:extLst>
               </a:tr>
               <a:tr h="365760">
                 <a:tc>
@@ -8986,6 +9042,11 @@
                     </a:solidFill>
                   </a:tcPr>
                 </a:tc>
+                <a:extLst>
+                  <a:ext uri="{0D108BD9-81ED-4DB2-BD59-A6C34878D82A}">
+                    <a16:rowId xmlns:a16="http://schemas.microsoft.com/office/drawing/2014/main" val="10007"/>
+                  </a:ext>
+                </a:extLst>
               </a:tr>
             </a:tbl>
           </a:graphicData>
@@ -9055,405 +9116,7 @@
 </file>
 
 <file path=ppt/slides/slide8.xml><?xml version="1.0" encoding="utf-8"?>
-<p:sld xmlns:a="http://schemas.openxmlformats.org/drawingml/2006/main" xmlns:p="http://schemas.openxmlformats.org/presentationml/2006/main" xmlns:r="http://schemas.openxmlformats.org/officeDocument/2006/relationships">
-  <p:cSld>
-    <p:spTree>
-      <p:nvGrpSpPr>
-        <p:cNvPr id="1" name=""/>
-        <p:cNvGrpSpPr/>
-        <p:nvPr/>
-      </p:nvGrpSpPr>
-      <p:grpSpPr/>
-      <p:sp>
-        <p:nvSpPr>
-          <p:cNvPr id="2" name="TextBox 1"/>
-          <p:cNvSpPr txBox="1"/>
-          <p:nvPr/>
-        </p:nvSpPr>
-        <p:spPr>
-          <a:xfrm>
-            <a:off x="822960" y="457200"/>
-            <a:ext cx="10515600" cy="365760"/>
-          </a:xfrm>
-          <a:prstGeom prst="rect">
-            <a:avLst/>
-          </a:prstGeom>
-          <a:noFill/>
-        </p:spPr>
-        <p:txBody>
-          <a:bodyPr wrap="square" anchor="t">
-            <a:spAutoFit/>
-          </a:bodyPr>
-          <a:lstStyle/>
-          <a:p>
-            <a:pPr algn="l">
-              <a:lnSpc>
-                <a:spcPct val="100000"/>
-              </a:lnSpc>
-            </a:pPr>
-            <a:r>
-              <a:rPr sz="1200" b="1">
-                <a:solidFill>
-                  <a:srgbClr val="4338CA"/>
-                </a:solidFill>
-                <a:latin typeface="Calibri"/>
-              </a:rPr>
-              <a:t>7  ·  WHAT THE USER SEES</a:t>
-            </a:r>
-          </a:p>
-        </p:txBody>
-      </p:sp>
-      <p:sp>
-        <p:nvSpPr>
-          <p:cNvPr id="3" name="TextBox 2"/>
-          <p:cNvSpPr txBox="1"/>
-          <p:nvPr/>
-        </p:nvSpPr>
-        <p:spPr>
-          <a:xfrm>
-            <a:off x="822960" y="777240"/>
-            <a:ext cx="10515600" cy="822960"/>
-          </a:xfrm>
-          <a:prstGeom prst="rect">
-            <a:avLst/>
-          </a:prstGeom>
-          <a:noFill/>
-        </p:spPr>
-        <p:txBody>
-          <a:bodyPr wrap="square" anchor="t">
-            <a:spAutoFit/>
-          </a:bodyPr>
-          <a:lstStyle/>
-          <a:p>
-            <a:pPr algn="l">
-              <a:lnSpc>
-                <a:spcPct val="100000"/>
-              </a:lnSpc>
-            </a:pPr>
-            <a:r>
-              <a:rPr sz="3200" b="1">
-                <a:solidFill>
-                  <a:srgbClr val="161A23"/>
-                </a:solidFill>
-                <a:latin typeface="Calibri"/>
-              </a:rPr>
-              <a:t>And the check that stops a trip nobody could afford</a:t>
-            </a:r>
-          </a:p>
-        </p:txBody>
-      </p:sp>
-      <p:sp>
-        <p:nvSpPr>
-          <p:cNvPr id="4" name="Rectangle 3"/>
-          <p:cNvSpPr/>
-          <p:nvPr/>
-        </p:nvSpPr>
-        <p:spPr>
-          <a:xfrm>
-            <a:off x="822960" y="1572768"/>
-            <a:ext cx="1005840" cy="34000"/>
-          </a:xfrm>
-          <a:prstGeom prst="rect">
-            <a:avLst/>
-          </a:prstGeom>
-          <a:solidFill>
-            <a:srgbClr val="4338CA"/>
-          </a:solidFill>
-          <a:ln>
-            <a:noFill/>
-          </a:ln>
-          <a:effectLst/>
-        </p:spPr>
-        <p:style>
-          <a:lnRef idx="1">
-            <a:schemeClr val="accent1"/>
-          </a:lnRef>
-          <a:fillRef idx="3">
-            <a:schemeClr val="accent1"/>
-          </a:fillRef>
-          <a:effectRef idx="2">
-            <a:schemeClr val="accent1"/>
-          </a:effectRef>
-          <a:fontRef idx="minor">
-            <a:schemeClr val="lt1"/>
-          </a:fontRef>
-        </p:style>
-        <p:txBody>
-          <a:bodyPr rtlCol="0" anchor="ctr"/>
-          <a:lstStyle/>
-          <a:p>
-            <a:pPr algn="ctr"/>
-          </a:p>
-        </p:txBody>
-      </p:sp>
-      <p:pic>
-        <p:nvPicPr>
-          <p:cNvPr id="5" name="Picture 4" descr="frontend.png"/>
-          <p:cNvPicPr>
-            <a:picLocks noChangeAspect="1"/>
-          </p:cNvPicPr>
-          <p:nvPr/>
-        </p:nvPicPr>
-        <p:blipFill>
-          <a:blip r:embed="rId2"/>
-          <a:stretch>
-            <a:fillRect/>
-          </a:stretch>
-        </p:blipFill>
-        <p:spPr>
-          <a:xfrm>
-            <a:off x="3387605" y="1737360"/>
-            <a:ext cx="5416484" cy="3108960"/>
-          </a:xfrm>
-          <a:prstGeom prst="rect">
-            <a:avLst/>
-          </a:prstGeom>
-        </p:spPr>
-      </p:pic>
-      <p:sp>
-        <p:nvSpPr>
-          <p:cNvPr id="6" name="TextBox 5"/>
-          <p:cNvSpPr txBox="1"/>
-          <p:nvPr/>
-        </p:nvSpPr>
-        <p:spPr>
-          <a:xfrm>
-            <a:off x="822960" y="4983480"/>
-            <a:ext cx="3515258" cy="1188720"/>
-          </a:xfrm>
-          <a:prstGeom prst="rect">
-            <a:avLst/>
-          </a:prstGeom>
-          <a:noFill/>
-        </p:spPr>
-        <p:txBody>
-          <a:bodyPr wrap="square" anchor="t">
-            <a:spAutoFit/>
-          </a:bodyPr>
-          <a:lstStyle/>
-          <a:p>
-            <a:pPr algn="ctr">
-              <a:lnSpc>
-                <a:spcPct val="100000"/>
-              </a:lnSpc>
-            </a:pPr>
-            <a:r>
-              <a:rPr sz="6000" b="1">
-                <a:solidFill>
-                  <a:srgbClr val="A85B00"/>
-                </a:solidFill>
-                <a:latin typeface="Calibri"/>
-              </a:rPr>
-              <a:t>$800</a:t>
-            </a:r>
-          </a:p>
-        </p:txBody>
-      </p:sp>
-      <p:sp>
-        <p:nvSpPr>
-          <p:cNvPr id="7" name="TextBox 6"/>
-          <p:cNvSpPr txBox="1"/>
-          <p:nvPr/>
-        </p:nvSpPr>
-        <p:spPr>
-          <a:xfrm>
-            <a:off x="822960" y="6126480"/>
-            <a:ext cx="3515258" cy="457200"/>
-          </a:xfrm>
-          <a:prstGeom prst="rect">
-            <a:avLst/>
-          </a:prstGeom>
-          <a:noFill/>
-        </p:spPr>
-        <p:txBody>
-          <a:bodyPr wrap="square" anchor="t">
-            <a:spAutoFit/>
-          </a:bodyPr>
-          <a:lstStyle/>
-          <a:p>
-            <a:pPr algn="ctr">
-              <a:lnSpc>
-                <a:spcPct val="100000"/>
-              </a:lnSpc>
-            </a:pPr>
-            <a:r>
-              <a:rPr sz="1400" b="0">
-                <a:solidFill>
-                  <a:srgbClr val="545C6E"/>
-                </a:solidFill>
-                <a:latin typeface="Calibri"/>
-              </a:rPr>
-              <a:t>traveller asked for</a:t>
-            </a:r>
-          </a:p>
-        </p:txBody>
-      </p:sp>
-      <p:sp>
-        <p:nvSpPr>
-          <p:cNvPr id="8" name="TextBox 7"/>
-          <p:cNvSpPr txBox="1"/>
-          <p:nvPr/>
-        </p:nvSpPr>
-        <p:spPr>
-          <a:xfrm>
-            <a:off x="4338218" y="4983480"/>
-            <a:ext cx="3515258" cy="1188720"/>
-          </a:xfrm>
-          <a:prstGeom prst="rect">
-            <a:avLst/>
-          </a:prstGeom>
-          <a:noFill/>
-        </p:spPr>
-        <p:txBody>
-          <a:bodyPr wrap="square" anchor="t">
-            <a:spAutoFit/>
-          </a:bodyPr>
-          <a:lstStyle/>
-          <a:p>
-            <a:pPr algn="ctr">
-              <a:lnSpc>
-                <a:spcPct val="100000"/>
-              </a:lnSpc>
-            </a:pPr>
-            <a:r>
-              <a:rPr sz="6000" b="1">
-                <a:solidFill>
-                  <a:srgbClr val="A85B00"/>
-                </a:solidFill>
-                <a:latin typeface="Calibri"/>
-              </a:rPr>
-              <a:t>$837</a:t>
-            </a:r>
-          </a:p>
-        </p:txBody>
-      </p:sp>
-      <p:sp>
-        <p:nvSpPr>
-          <p:cNvPr id="9" name="TextBox 8"/>
-          <p:cNvSpPr txBox="1"/>
-          <p:nvPr/>
-        </p:nvSpPr>
-        <p:spPr>
-          <a:xfrm>
-            <a:off x="4338218" y="6126480"/>
-            <a:ext cx="3515258" cy="457200"/>
-          </a:xfrm>
-          <a:prstGeom prst="rect">
-            <a:avLst/>
-          </a:prstGeom>
-          <a:noFill/>
-        </p:spPr>
-        <p:txBody>
-          <a:bodyPr wrap="square" anchor="t">
-            <a:spAutoFit/>
-          </a:bodyPr>
-          <a:lstStyle/>
-          <a:p>
-            <a:pPr algn="ctr">
-              <a:lnSpc>
-                <a:spcPct val="100000"/>
-              </a:lnSpc>
-            </a:pPr>
-            <a:r>
-              <a:rPr sz="1400" b="0">
-                <a:solidFill>
-                  <a:srgbClr val="545C6E"/>
-                </a:solidFill>
-                <a:latin typeface="Calibri"/>
-              </a:rPr>
-              <a:t>cheapest it can be done</a:t>
-            </a:r>
-          </a:p>
-        </p:txBody>
-      </p:sp>
-      <p:sp>
-        <p:nvSpPr>
-          <p:cNvPr id="10" name="TextBox 9"/>
-          <p:cNvSpPr txBox="1"/>
-          <p:nvPr/>
-        </p:nvSpPr>
-        <p:spPr>
-          <a:xfrm>
-            <a:off x="7853476" y="4983480"/>
-            <a:ext cx="3515258" cy="1188720"/>
-          </a:xfrm>
-          <a:prstGeom prst="rect">
-            <a:avLst/>
-          </a:prstGeom>
-          <a:noFill/>
-        </p:spPr>
-        <p:txBody>
-          <a:bodyPr wrap="square" anchor="t">
-            <a:spAutoFit/>
-          </a:bodyPr>
-          <a:lstStyle/>
-          <a:p>
-            <a:pPr algn="ctr">
-              <a:lnSpc>
-                <a:spcPct val="100000"/>
-              </a:lnSpc>
-            </a:pPr>
-            <a:r>
-              <a:rPr sz="6000" b="1">
-                <a:solidFill>
-                  <a:srgbClr val="A85B00"/>
-                </a:solidFill>
-                <a:latin typeface="Calibri"/>
-              </a:rPr>
-              <a:t>REFUSED</a:t>
-            </a:r>
-          </a:p>
-        </p:txBody>
-      </p:sp>
-      <p:sp>
-        <p:nvSpPr>
-          <p:cNvPr id="11" name="TextBox 10"/>
-          <p:cNvSpPr txBox="1"/>
-          <p:nvPr/>
-        </p:nvSpPr>
-        <p:spPr>
-          <a:xfrm>
-            <a:off x="7853476" y="6126480"/>
-            <a:ext cx="3515258" cy="457200"/>
-          </a:xfrm>
-          <a:prstGeom prst="rect">
-            <a:avLst/>
-          </a:prstGeom>
-          <a:noFill/>
-        </p:spPr>
-        <p:txBody>
-          <a:bodyPr wrap="square" anchor="t">
-            <a:spAutoFit/>
-          </a:bodyPr>
-          <a:lstStyle/>
-          <a:p>
-            <a:pPr algn="ctr">
-              <a:lnSpc>
-                <a:spcPct val="100000"/>
-              </a:lnSpc>
-            </a:pPr>
-            <a:r>
-              <a:rPr sz="1400" b="0">
-                <a:solidFill>
-                  <a:srgbClr val="545C6E"/>
-                </a:solidFill>
-                <a:latin typeface="Calibri"/>
-              </a:rPr>
-              <a:t>with three ways to fix it</a:t>
-            </a:r>
-          </a:p>
-        </p:txBody>
-      </p:sp>
-    </p:spTree>
-  </p:cSld>
-  <p:clrMapOvr>
-    <a:masterClrMapping/>
-  </p:clrMapOvr>
-</p:sld>
-</file>
-
-<file path=ppt/slides/slide9.xml><?xml version="1.0" encoding="utf-8"?>
-<p:sld xmlns:a="http://schemas.openxmlformats.org/drawingml/2006/main" xmlns:p="http://schemas.openxmlformats.org/presentationml/2006/main" xmlns:r="http://schemas.openxmlformats.org/officeDocument/2006/relationships">
+<p:sld xmlns:a="http://schemas.openxmlformats.org/drawingml/2006/main" xmlns:r="http://schemas.openxmlformats.org/officeDocument/2006/relationships" xmlns:p="http://schemas.openxmlformats.org/presentationml/2006/main">
   <p:cSld>
     <p:bg>
       <p:bgPr>
@@ -9469,7 +9132,14 @@
         <p:cNvGrpSpPr/>
         <p:nvPr/>
       </p:nvGrpSpPr>
-      <p:grpSpPr/>
+      <p:grpSpPr>
+        <a:xfrm>
+          <a:off x="0" y="0"/>
+          <a:ext cx="0" cy="0"/>
+          <a:chOff x="0" y="0"/>
+          <a:chExt cx="0" cy="0"/>
+        </a:xfrm>
+      </p:grpSpPr>
       <p:sp>
         <p:nvSpPr>
           <p:cNvPr id="2" name="TextBox 1"/>
@@ -9605,6 +9275,7 @@
           <a:lstStyle/>
           <a:p>
             <a:pPr algn="ctr"/>
+            <a:endParaRPr/>
           </a:p>
         </p:txBody>
       </p:sp>
@@ -9651,15 +9322,12 @@
                 <a:spcPct val="125000"/>
               </a:lnSpc>
             </a:pPr>
-            <a:r>
-              <a:rPr sz="500" b="0">
-                <a:solidFill>
-                  <a:srgbClr val="FFFFFF"/>
-                </a:solidFill>
-                <a:latin typeface="Calibri"/>
-              </a:rPr>
-              <a:t/>
-            </a:r>
+            <a:endParaRPr sz="1200" b="1">
+              <a:solidFill>
+                <a:srgbClr val="9CA3F5"/>
+              </a:solidFill>
+              <a:latin typeface="Calibri"/>
+            </a:endParaRPr>
           </a:p>
           <a:p>
             <a:pPr algn="l">
@@ -9715,15 +9383,12 @@
                 <a:spcPct val="125000"/>
               </a:lnSpc>
             </a:pPr>
-            <a:r>
-              <a:rPr sz="500" b="0">
-                <a:solidFill>
-                  <a:srgbClr val="FFFFFF"/>
-                </a:solidFill>
-                <a:latin typeface="Calibri"/>
-              </a:rPr>
-              <a:t/>
-            </a:r>
+            <a:endParaRPr sz="1700" b="0">
+              <a:solidFill>
+                <a:srgbClr val="6EE7DF"/>
+              </a:solidFill>
+              <a:latin typeface="Calibri"/>
+            </a:endParaRPr>
           </a:p>
           <a:p>
             <a:pPr algn="l">
@@ -10082,44 +9747,44 @@
         <a:sysClr val="window" lastClr="FFFFFF"/>
       </a:lt1>
       <a:dk2>
-        <a:srgbClr val="1F497D"/>
+        <a:srgbClr val="44546A"/>
       </a:dk2>
       <a:lt2>
-        <a:srgbClr val="EEECE1"/>
+        <a:srgbClr val="E7E6E6"/>
       </a:lt2>
       <a:accent1>
-        <a:srgbClr val="4F81BD"/>
+        <a:srgbClr val="5B9BD5"/>
       </a:accent1>
       <a:accent2>
-        <a:srgbClr val="C0504D"/>
+        <a:srgbClr val="ED7D31"/>
       </a:accent2>
       <a:accent3>
-        <a:srgbClr val="9BBB59"/>
+        <a:srgbClr val="A5A5A5"/>
       </a:accent3>
       <a:accent4>
-        <a:srgbClr val="8064A2"/>
+        <a:srgbClr val="FFC000"/>
       </a:accent4>
       <a:accent5>
-        <a:srgbClr val="4BACC6"/>
+        <a:srgbClr val="4472C4"/>
       </a:accent5>
       <a:accent6>
-        <a:srgbClr val="F79646"/>
+        <a:srgbClr val="70AD47"/>
       </a:accent6>
       <a:hlink>
-        <a:srgbClr val="0000FF"/>
+        <a:srgbClr val="0563C1"/>
       </a:hlink>
       <a:folHlink>
-        <a:srgbClr val="800080"/>
+        <a:srgbClr val="954F72"/>
       </a:folHlink>
     </a:clrScheme>
     <a:fontScheme name="Office">
       <a:majorFont>
-        <a:latin typeface="Calibri"/>
+        <a:latin typeface="Calibri Light" panose="020F0302020204030204"/>
         <a:ea typeface=""/>
         <a:cs typeface=""/>
-        <a:font script="Jpan" typeface="ＭＳ Ｐゴシック"/>
+        <a:font script="Jpan" typeface="游ゴシック Light"/>
         <a:font script="Hang" typeface="맑은 고딕"/>
-        <a:font script="Hans" typeface="宋体"/>
+        <a:font script="Hans" typeface="等线 Light"/>
         <a:font script="Hant" typeface="新細明體"/>
         <a:font script="Arab" typeface="Times New Roman"/>
         <a:font script="Hebr" typeface="Times New Roman"/>
@@ -10149,12 +9814,12 @@
         <a:font script="Geor" typeface="Sylfaen"/>
       </a:majorFont>
       <a:minorFont>
-        <a:latin typeface="Calibri"/>
+        <a:latin typeface="Calibri" panose="020F0502020204030204"/>
         <a:ea typeface=""/>
         <a:cs typeface=""/>
-        <a:font script="Jpan" typeface="ＭＳ Ｐゴシック"/>
+        <a:font script="Jpan" typeface="游ゴシック"/>
         <a:font script="Hang" typeface="맑은 고딕"/>
-        <a:font script="Hans" typeface="宋体"/>
+        <a:font script="Hans" typeface="等线"/>
         <a:font script="Hant" typeface="新細明體"/>
         <a:font script="Arab" typeface="Arial"/>
         <a:font script="Hebr" typeface="Arial"/>
@@ -10193,200 +9858,141 @@
           <a:gsLst>
             <a:gs pos="0">
               <a:schemeClr val="phClr">
-                <a:tint val="50000"/>
-                <a:satMod val="300000"/>
+                <a:lumMod val="110000"/>
+                <a:satMod val="105000"/>
+                <a:tint val="67000"/>
               </a:schemeClr>
             </a:gs>
-            <a:gs pos="35000">
+            <a:gs pos="50000">
               <a:schemeClr val="phClr">
-                <a:tint val="37000"/>
-                <a:satMod val="300000"/>
+                <a:lumMod val="105000"/>
+                <a:satMod val="103000"/>
+                <a:tint val="73000"/>
               </a:schemeClr>
             </a:gs>
             <a:gs pos="100000">
               <a:schemeClr val="phClr">
-                <a:tint val="15000"/>
-                <a:satMod val="350000"/>
+                <a:lumMod val="105000"/>
+                <a:satMod val="109000"/>
+                <a:tint val="81000"/>
               </a:schemeClr>
             </a:gs>
           </a:gsLst>
-          <a:lin ang="16200000" scaled="1"/>
+          <a:lin ang="5400000" scaled="0"/>
         </a:gradFill>
         <a:gradFill rotWithShape="1">
           <a:gsLst>
             <a:gs pos="0">
               <a:schemeClr val="phClr">
-                <a:tint val="100000"/>
+                <a:satMod val="103000"/>
+                <a:lumMod val="102000"/>
+                <a:tint val="94000"/>
+              </a:schemeClr>
+            </a:gs>
+            <a:gs pos="50000">
+              <a:schemeClr val="phClr">
+                <a:satMod val="110000"/>
+                <a:lumMod val="100000"/>
                 <a:shade val="100000"/>
-                <a:satMod val="130000"/>
               </a:schemeClr>
             </a:gs>
             <a:gs pos="100000">
               <a:schemeClr val="phClr">
-                <a:tint val="50000"/>
-                <a:shade val="100000"/>
-                <a:satMod val="350000"/>
+                <a:lumMod val="99000"/>
+                <a:satMod val="120000"/>
+                <a:shade val="78000"/>
               </a:schemeClr>
             </a:gs>
           </a:gsLst>
-          <a:lin ang="16200000" scaled="0"/>
+          <a:lin ang="5400000" scaled="0"/>
         </a:gradFill>
       </a:fillStyleLst>
       <a:lnStyleLst>
-        <a:ln w="9525" cap="flat" cmpd="sng" algn="ctr">
-          <a:solidFill>
-            <a:schemeClr val="phClr">
-              <a:shade val="95000"/>
-              <a:satMod val="105000"/>
-            </a:schemeClr>
-          </a:solidFill>
-          <a:prstDash val="solid"/>
-        </a:ln>
-        <a:ln w="25400" cap="flat" cmpd="sng" algn="ctr">
+        <a:ln w="6350" cap="flat" cmpd="sng" algn="ctr">
           <a:solidFill>
             <a:schemeClr val="phClr"/>
           </a:solidFill>
           <a:prstDash val="solid"/>
+          <a:miter lim="800000"/>
         </a:ln>
-        <a:ln w="38100" cap="flat" cmpd="sng" algn="ctr">
+        <a:ln w="12700" cap="flat" cmpd="sng" algn="ctr">
           <a:solidFill>
             <a:schemeClr val="phClr"/>
           </a:solidFill>
           <a:prstDash val="solid"/>
+          <a:miter lim="800000"/>
+        </a:ln>
+        <a:ln w="19050" cap="flat" cmpd="sng" algn="ctr">
+          <a:solidFill>
+            <a:schemeClr val="phClr"/>
+          </a:solidFill>
+          <a:prstDash val="solid"/>
+          <a:miter lim="800000"/>
         </a:ln>
       </a:lnStyleLst>
       <a:effectStyleLst>
         <a:effectStyle>
+          <a:effectLst/>
+        </a:effectStyle>
+        <a:effectStyle>
+          <a:effectLst/>
+        </a:effectStyle>
+        <a:effectStyle>
           <a:effectLst>
-            <a:outerShdw blurRad="40000" dist="20000" dir="5400000" rotWithShape="0">
+            <a:outerShdw blurRad="57150" dist="19050" dir="5400000" algn="ctr" rotWithShape="0">
               <a:srgbClr val="000000">
-                <a:alpha val="38000"/>
+                <a:alpha val="63000"/>
               </a:srgbClr>
             </a:outerShdw>
           </a:effectLst>
-        </a:effectStyle>
-        <a:effectStyle>
-          <a:effectLst>
-            <a:outerShdw blurRad="40000" dist="23000" dir="5400000" rotWithShape="0">
-              <a:srgbClr val="000000">
-                <a:alpha val="35000"/>
-              </a:srgbClr>
-            </a:outerShdw>
-          </a:effectLst>
-        </a:effectStyle>
-        <a:effectStyle>
-          <a:effectLst>
-            <a:outerShdw blurRad="40000" dist="23000" dir="5400000" rotWithShape="0">
-              <a:srgbClr val="000000">
-                <a:alpha val="35000"/>
-              </a:srgbClr>
-            </a:outerShdw>
-          </a:effectLst>
-          <a:scene3d>
-            <a:camera prst="orthographicFront">
-              <a:rot lat="0" lon="0" rev="0"/>
-            </a:camera>
-            <a:lightRig rig="threePt" dir="t">
-              <a:rot lat="0" lon="0" rev="1200000"/>
-            </a:lightRig>
-          </a:scene3d>
-          <a:sp3d>
-            <a:bevelT w="63500" h="25400"/>
-          </a:sp3d>
         </a:effectStyle>
       </a:effectStyleLst>
       <a:bgFillStyleLst>
         <a:solidFill>
           <a:schemeClr val="phClr"/>
         </a:solidFill>
+        <a:solidFill>
+          <a:schemeClr val="phClr">
+            <a:tint val="95000"/>
+            <a:satMod val="170000"/>
+          </a:schemeClr>
+        </a:solidFill>
         <a:gradFill rotWithShape="1">
           <a:gsLst>
             <a:gs pos="0">
               <a:schemeClr val="phClr">
-                <a:tint val="40000"/>
-                <a:satMod val="350000"/>
+                <a:tint val="93000"/>
+                <a:satMod val="150000"/>
+                <a:shade val="98000"/>
+                <a:lumMod val="102000"/>
               </a:schemeClr>
             </a:gs>
-            <a:gs pos="40000">
+            <a:gs pos="50000">
               <a:schemeClr val="phClr">
-                <a:tint val="45000"/>
-                <a:shade val="99000"/>
-                <a:satMod val="350000"/>
+                <a:tint val="98000"/>
+                <a:satMod val="130000"/>
+                <a:shade val="90000"/>
+                <a:lumMod val="103000"/>
               </a:schemeClr>
             </a:gs>
             <a:gs pos="100000">
               <a:schemeClr val="phClr">
-                <a:shade val="20000"/>
-                <a:satMod val="255000"/>
+                <a:shade val="63000"/>
+                <a:satMod val="120000"/>
               </a:schemeClr>
             </a:gs>
           </a:gsLst>
-          <a:path path="circle">
-            <a:fillToRect l="50000" t="-80000" r="50000" b="180000"/>
-          </a:path>
-        </a:gradFill>
-        <a:gradFill rotWithShape="1">
-          <a:gsLst>
-            <a:gs pos="0">
-              <a:schemeClr val="phClr">
-                <a:tint val="80000"/>
-                <a:satMod val="300000"/>
-              </a:schemeClr>
-            </a:gs>
-            <a:gs pos="100000">
-              <a:schemeClr val="phClr">
-                <a:shade val="30000"/>
-                <a:satMod val="200000"/>
-              </a:schemeClr>
-            </a:gs>
-          </a:gsLst>
-          <a:path path="circle">
-            <a:fillToRect l="50000" t="50000" r="50000" b="50000"/>
-          </a:path>
+          <a:lin ang="5400000" scaled="0"/>
         </a:gradFill>
       </a:bgFillStyleLst>
     </a:fmtScheme>
   </a:themeElements>
-  <a:objectDefaults>
-    <a:spDef>
-      <a:spPr/>
-      <a:bodyPr/>
-      <a:lstStyle/>
-      <a:style>
-        <a:lnRef idx="1">
-          <a:schemeClr val="accent1"/>
-        </a:lnRef>
-        <a:fillRef idx="3">
-          <a:schemeClr val="accent1"/>
-        </a:fillRef>
-        <a:effectRef idx="2">
-          <a:schemeClr val="accent1"/>
-        </a:effectRef>
-        <a:fontRef idx="minor">
-          <a:schemeClr val="lt1"/>
-        </a:fontRef>
-      </a:style>
-    </a:spDef>
-    <a:lnDef>
-      <a:spPr/>
-      <a:bodyPr/>
-      <a:lstStyle/>
-      <a:style>
-        <a:lnRef idx="2">
-          <a:schemeClr val="accent1"/>
-        </a:lnRef>
-        <a:fillRef idx="0">
-          <a:schemeClr val="accent1"/>
-        </a:fillRef>
-        <a:effectRef idx="1">
-          <a:schemeClr val="accent1"/>
-        </a:effectRef>
-        <a:fontRef idx="minor">
-          <a:schemeClr val="tx1"/>
-        </a:fontRef>
-      </a:style>
-    </a:lnDef>
-  </a:objectDefaults>
+  <a:objectDefaults/>
   <a:extraClrSchemeLst/>
+  <a:extLst>
+    <a:ext uri="{05A4C25C-085E-4340-85A3-A5531E510DB2}">
+      <thm15:themeFamily xmlns:thm15="http://schemas.microsoft.com/office/thememl/2012/main" name="Office Theme" id="{62F939B6-93AF-4DB8-9C6B-D6C7DFDC589F}" vid="{4A3C46E8-61CC-4603-A589-7422A47A8E4A}"/>
+    </a:ext>
+  </a:extLst>
 </a:theme>
 </file>